--- a/Resilience.pptx
+++ b/Resilience.pptx
@@ -155,8 +155,7 @@
 <file path=ppt/revisionInfo.xml><?xml version="1.0" encoding="utf-8"?>
 <p1510:revInfo xmlns:a="http://schemas.openxmlformats.org/drawingml/2006/main" xmlns:r="http://schemas.openxmlformats.org/officeDocument/2006/relationships" xmlns:p1510="http://schemas.microsoft.com/office/powerpoint/2015/10/main">
   <p1510:revLst>
-    <p1510:client id="{0F7102E3-B1ED-4733-957D-85FAB5094C64}" v="59" dt="2026-09-18T13:15:23.091"/>
-    <p1510:client id="{13B43BEF-9B9B-431D-9308-0B2B126B7992}" v="90" dt="2026-09-19T07:46:32.485"/>
+    <p1510:client id="{13B43BEF-9B9B-431D-9308-0B2B126B7992}" v="9" dt="2026-09-20T19:41:10.978"/>
   </p1510:revLst>
 </p1510:revInfo>
 </file>
@@ -165,8 +164,8 @@
 <pc:chgInfo xmlns:a="http://schemas.openxmlformats.org/drawingml/2006/main" xmlns:r="http://schemas.openxmlformats.org/officeDocument/2006/relationships" xmlns:ac="http://schemas.microsoft.com/office/drawing/2013/main/command" xmlns:pc="http://schemas.microsoft.com/office/powerpoint/2013/main/command">
   <pc:docChgLst>
     <pc:chgData name="Jan Willem van den End (EBO_CMA)" userId="32ade95a-e024-4672-952f-5ed8641a9e00" providerId="ADAL" clId="{3BBBE02E-ACD4-4586-9407-5E79BF620DF1}"/>
-    <pc:docChg chg="undo custSel modSld">
-      <pc:chgData name="Jan Willem van den End (EBO_CMA)" userId="32ade95a-e024-4672-952f-5ed8641a9e00" providerId="ADAL" clId="{3BBBE02E-ACD4-4586-9407-5E79BF620DF1}" dt="2026-09-19T08:04:47.471" v="2008" actId="20577"/>
+    <pc:docChg chg="undo redo custSel modSld">
+      <pc:chgData name="Jan Willem van den End (EBO_CMA)" userId="32ade95a-e024-4672-952f-5ed8641a9e00" providerId="ADAL" clId="{3BBBE02E-ACD4-4586-9407-5E79BF620DF1}" dt="2026-09-20T19:43:08.706" v="2453" actId="6549"/>
       <pc:docMkLst>
         <pc:docMk/>
       </pc:docMkLst>
@@ -186,13 +185,13 @@
         </pc:spChg>
       </pc:sldChg>
       <pc:sldChg chg="modSp mod">
-        <pc:chgData name="Jan Willem van den End (EBO_CMA)" userId="32ade95a-e024-4672-952f-5ed8641a9e00" providerId="ADAL" clId="{3BBBE02E-ACD4-4586-9407-5E79BF620DF1}" dt="2026-09-19T07:50:15.958" v="1793" actId="20577"/>
+        <pc:chgData name="Jan Willem van den End (EBO_CMA)" userId="32ade95a-e024-4672-952f-5ed8641a9e00" providerId="ADAL" clId="{3BBBE02E-ACD4-4586-9407-5E79BF620DF1}" dt="2026-09-20T19:40:41.054" v="2411" actId="20577"/>
         <pc:sldMkLst>
           <pc:docMk/>
           <pc:sldMk cId="1203207517" sldId="768"/>
         </pc:sldMkLst>
         <pc:spChg chg="mod">
-          <ac:chgData name="Jan Willem van den End (EBO_CMA)" userId="32ade95a-e024-4672-952f-5ed8641a9e00" providerId="ADAL" clId="{3BBBE02E-ACD4-4586-9407-5E79BF620DF1}" dt="2026-09-19T07:50:15.958" v="1793" actId="20577"/>
+          <ac:chgData name="Jan Willem van den End (EBO_CMA)" userId="32ade95a-e024-4672-952f-5ed8641a9e00" providerId="ADAL" clId="{3BBBE02E-ACD4-4586-9407-5E79BF620DF1}" dt="2026-09-20T19:40:41.054" v="2411" actId="20577"/>
           <ac:spMkLst>
             <pc:docMk/>
             <pc:sldMk cId="1203207517" sldId="768"/>
@@ -201,13 +200,13 @@
         </pc:spChg>
       </pc:sldChg>
       <pc:sldChg chg="modSp mod">
-        <pc:chgData name="Jan Willem van den End (EBO_CMA)" userId="32ade95a-e024-4672-952f-5ed8641a9e00" providerId="ADAL" clId="{3BBBE02E-ACD4-4586-9407-5E79BF620DF1}" dt="2026-09-19T07:59:00.521" v="1915" actId="1076"/>
+        <pc:chgData name="Jan Willem van den End (EBO_CMA)" userId="32ade95a-e024-4672-952f-5ed8641a9e00" providerId="ADAL" clId="{3BBBE02E-ACD4-4586-9407-5E79BF620DF1}" dt="2026-09-20T19:40:36.825" v="2409" actId="14100"/>
         <pc:sldMkLst>
           <pc:docMk/>
           <pc:sldMk cId="2428101549" sldId="784"/>
         </pc:sldMkLst>
         <pc:spChg chg="mod">
-          <ac:chgData name="Jan Willem van den End (EBO_CMA)" userId="32ade95a-e024-4672-952f-5ed8641a9e00" providerId="ADAL" clId="{3BBBE02E-ACD4-4586-9407-5E79BF620DF1}" dt="2026-09-19T07:59:00.521" v="1915" actId="1076"/>
+          <ac:chgData name="Jan Willem van den End (EBO_CMA)" userId="32ade95a-e024-4672-952f-5ed8641a9e00" providerId="ADAL" clId="{3BBBE02E-ACD4-4586-9407-5E79BF620DF1}" dt="2026-09-20T19:40:36.825" v="2409" actId="14100"/>
           <ac:spMkLst>
             <pc:docMk/>
             <pc:sldMk cId="2428101549" sldId="784"/>
@@ -231,13 +230,13 @@
         </pc:spChg>
       </pc:sldChg>
       <pc:sldChg chg="modSp mod">
-        <pc:chgData name="Jan Willem van den End (EBO_CMA)" userId="32ade95a-e024-4672-952f-5ed8641a9e00" providerId="ADAL" clId="{3BBBE02E-ACD4-4586-9407-5E79BF620DF1}" dt="2026-09-19T08:01:17.354" v="1963" actId="20577"/>
+        <pc:chgData name="Jan Willem van den End (EBO_CMA)" userId="32ade95a-e024-4672-952f-5ed8641a9e00" providerId="ADAL" clId="{3BBBE02E-ACD4-4586-9407-5E79BF620DF1}" dt="2026-09-20T19:43:08.706" v="2453" actId="6549"/>
         <pc:sldMkLst>
           <pc:docMk/>
           <pc:sldMk cId="3777662078" sldId="790"/>
         </pc:sldMkLst>
         <pc:spChg chg="mod">
-          <ac:chgData name="Jan Willem van den End (EBO_CMA)" userId="32ade95a-e024-4672-952f-5ed8641a9e00" providerId="ADAL" clId="{3BBBE02E-ACD4-4586-9407-5E79BF620DF1}" dt="2026-09-19T08:01:17.354" v="1963" actId="20577"/>
+          <ac:chgData name="Jan Willem van den End (EBO_CMA)" userId="32ade95a-e024-4672-952f-5ed8641a9e00" providerId="ADAL" clId="{3BBBE02E-ACD4-4586-9407-5E79BF620DF1}" dt="2026-09-20T19:43:08.706" v="2453" actId="6549"/>
           <ac:spMkLst>
             <pc:docMk/>
             <pc:sldMk cId="3777662078" sldId="790"/>
@@ -254,42 +253,50 @@
         </pc:spChg>
       </pc:sldChg>
       <pc:sldChg chg="modSp mod">
-        <pc:chgData name="Jan Willem van den End (EBO_CMA)" userId="32ade95a-e024-4672-952f-5ed8641a9e00" providerId="ADAL" clId="{3BBBE02E-ACD4-4586-9407-5E79BF620DF1}" dt="2026-09-19T08:03:05.935" v="1965" actId="20577"/>
+        <pc:chgData name="Jan Willem van den End (EBO_CMA)" userId="32ade95a-e024-4672-952f-5ed8641a9e00" providerId="ADAL" clId="{3BBBE02E-ACD4-4586-9407-5E79BF620DF1}" dt="2026-09-20T19:38:59.954" v="2404" actId="20577"/>
         <pc:sldMkLst>
           <pc:docMk/>
           <pc:sldMk cId="374833015" sldId="791"/>
         </pc:sldMkLst>
         <pc:spChg chg="mod">
-          <ac:chgData name="Jan Willem van den End (EBO_CMA)" userId="32ade95a-e024-4672-952f-5ed8641a9e00" providerId="ADAL" clId="{3BBBE02E-ACD4-4586-9407-5E79BF620DF1}" dt="2026-09-19T08:03:05.935" v="1965" actId="20577"/>
+          <ac:chgData name="Jan Willem van den End (EBO_CMA)" userId="32ade95a-e024-4672-952f-5ed8641a9e00" providerId="ADAL" clId="{3BBBE02E-ACD4-4586-9407-5E79BF620DF1}" dt="2026-09-20T19:32:00.290" v="2064" actId="1076"/>
+          <ac:spMkLst>
+            <pc:docMk/>
+            <pc:sldMk cId="374833015" sldId="791"/>
+            <ac:spMk id="8" creationId="{21C63CC4-9F1C-6D6D-9FEF-9D04021E36EE}"/>
+          </ac:spMkLst>
+        </pc:spChg>
+        <pc:spChg chg="mod">
+          <ac:chgData name="Jan Willem van den End (EBO_CMA)" userId="32ade95a-e024-4672-952f-5ed8641a9e00" providerId="ADAL" clId="{3BBBE02E-ACD4-4586-9407-5E79BF620DF1}" dt="2026-09-20T19:38:59.954" v="2404" actId="20577"/>
           <ac:spMkLst>
             <pc:docMk/>
             <pc:sldMk cId="374833015" sldId="791"/>
             <ac:spMk id="11" creationId="{7D1FCEE6-8AAC-959D-A8E8-B4CF4C9F0122}"/>
           </ac:spMkLst>
         </pc:spChg>
+        <pc:picChg chg="mod">
+          <ac:chgData name="Jan Willem van den End (EBO_CMA)" userId="32ade95a-e024-4672-952f-5ed8641a9e00" providerId="ADAL" clId="{3BBBE02E-ACD4-4586-9407-5E79BF620DF1}" dt="2026-09-20T19:31:53.066" v="2062" actId="1076"/>
+          <ac:picMkLst>
+            <pc:docMk/>
+            <pc:sldMk cId="374833015" sldId="791"/>
+            <ac:picMk id="9" creationId="{9A1BFB74-B0F9-69A1-8D0B-9ADBEF25B14A}"/>
+          </ac:picMkLst>
+        </pc:picChg>
       </pc:sldChg>
       <pc:sldChg chg="addSp delSp modSp mod">
-        <pc:chgData name="Jan Willem van den End (EBO_CMA)" userId="32ade95a-e024-4672-952f-5ed8641a9e00" providerId="ADAL" clId="{3BBBE02E-ACD4-4586-9407-5E79BF620DF1}" dt="2026-09-19T08:04:47.471" v="2008" actId="20577"/>
+        <pc:chgData name="Jan Willem van den End (EBO_CMA)" userId="32ade95a-e024-4672-952f-5ed8641a9e00" providerId="ADAL" clId="{3BBBE02E-ACD4-4586-9407-5E79BF620DF1}" dt="2026-09-20T19:41:39.336" v="2429" actId="20577"/>
         <pc:sldMkLst>
           <pc:docMk/>
           <pc:sldMk cId="2304846322" sldId="792"/>
         </pc:sldMkLst>
         <pc:spChg chg="mod">
-          <ac:chgData name="Jan Willem van den End (EBO_CMA)" userId="32ade95a-e024-4672-952f-5ed8641a9e00" providerId="ADAL" clId="{3BBBE02E-ACD4-4586-9407-5E79BF620DF1}" dt="2026-09-19T08:04:47.471" v="2008" actId="20577"/>
+          <ac:chgData name="Jan Willem van den End (EBO_CMA)" userId="32ade95a-e024-4672-952f-5ed8641a9e00" providerId="ADAL" clId="{3BBBE02E-ACD4-4586-9407-5E79BF620DF1}" dt="2026-09-20T19:41:39.336" v="2429" actId="20577"/>
           <ac:spMkLst>
             <pc:docMk/>
             <pc:sldMk cId="2304846322" sldId="792"/>
             <ac:spMk id="6" creationId="{CF9708F7-32AE-5645-3159-CE1174AB0729}"/>
           </ac:spMkLst>
         </pc:spChg>
-        <pc:graphicFrameChg chg="add del modGraphic">
-          <ac:chgData name="Jan Willem van den End (EBO_CMA)" userId="32ade95a-e024-4672-952f-5ed8641a9e00" providerId="ADAL" clId="{3BBBE02E-ACD4-4586-9407-5E79BF620DF1}" dt="2026-09-18T18:49:54.512" v="98" actId="27309"/>
-          <ac:graphicFrameMkLst>
-            <pc:docMk/>
-            <pc:sldMk cId="2304846322" sldId="792"/>
-            <ac:graphicFrameMk id="9" creationId="{271B1B44-14A0-3DCE-F0CE-A489973C9714}"/>
-          </ac:graphicFrameMkLst>
-        </pc:graphicFrameChg>
       </pc:sldChg>
       <pc:sldChg chg="modSp mod">
         <pc:chgData name="Jan Willem van den End (EBO_CMA)" userId="32ade95a-e024-4672-952f-5ed8641a9e00" providerId="ADAL" clId="{3BBBE02E-ACD4-4586-9407-5E79BF620DF1}" dt="2026-09-19T07:46:22.115" v="1766" actId="114"/>
@@ -307,19 +314,35 @@
         </pc:spChg>
       </pc:sldChg>
       <pc:sldChg chg="modSp mod">
-        <pc:chgData name="Jan Willem van den End (EBO_CMA)" userId="32ade95a-e024-4672-952f-5ed8641a9e00" providerId="ADAL" clId="{3BBBE02E-ACD4-4586-9407-5E79BF620DF1}" dt="2026-09-19T08:03:18.134" v="1967" actId="20577"/>
+        <pc:chgData name="Jan Willem van den End (EBO_CMA)" userId="32ade95a-e024-4672-952f-5ed8641a9e00" providerId="ADAL" clId="{3BBBE02E-ACD4-4586-9407-5E79BF620DF1}" dt="2026-09-20T19:38:25.902" v="2399" actId="20577"/>
         <pc:sldMkLst>
           <pc:docMk/>
           <pc:sldMk cId="240743824" sldId="794"/>
         </pc:sldMkLst>
         <pc:spChg chg="mod">
-          <ac:chgData name="Jan Willem van den End (EBO_CMA)" userId="32ade95a-e024-4672-952f-5ed8641a9e00" providerId="ADAL" clId="{3BBBE02E-ACD4-4586-9407-5E79BF620DF1}" dt="2026-09-19T08:03:18.134" v="1967" actId="20577"/>
+          <ac:chgData name="Jan Willem van den End (EBO_CMA)" userId="32ade95a-e024-4672-952f-5ed8641a9e00" providerId="ADAL" clId="{3BBBE02E-ACD4-4586-9407-5E79BF620DF1}" dt="2026-09-20T19:38:25.902" v="2399" actId="20577"/>
           <ac:spMkLst>
             <pc:docMk/>
             <pc:sldMk cId="240743824" sldId="794"/>
             <ac:spMk id="11" creationId="{D6974398-2614-1310-0782-A3E80B13A2FD}"/>
           </ac:spMkLst>
         </pc:spChg>
+        <pc:picChg chg="mod">
+          <ac:chgData name="Jan Willem van den End (EBO_CMA)" userId="32ade95a-e024-4672-952f-5ed8641a9e00" providerId="ADAL" clId="{3BBBE02E-ACD4-4586-9407-5E79BF620DF1}" dt="2026-09-20T19:30:56.811" v="2009" actId="1076"/>
+          <ac:picMkLst>
+            <pc:docMk/>
+            <pc:sldMk cId="240743824" sldId="794"/>
+            <ac:picMk id="3" creationId="{A9B511F9-EA27-E187-9227-1EF502D06828}"/>
+          </ac:picMkLst>
+        </pc:picChg>
+        <pc:picChg chg="mod">
+          <ac:chgData name="Jan Willem van den End (EBO_CMA)" userId="32ade95a-e024-4672-952f-5ed8641a9e00" providerId="ADAL" clId="{3BBBE02E-ACD4-4586-9407-5E79BF620DF1}" dt="2026-09-20T19:31:44.104" v="2061" actId="1076"/>
+          <ac:picMkLst>
+            <pc:docMk/>
+            <pc:sldMk cId="240743824" sldId="794"/>
+            <ac:picMk id="4" creationId="{D752BB6B-84D3-1A02-4BE3-8EAA21B12319}"/>
+          </ac:picMkLst>
+        </pc:picChg>
       </pc:sldChg>
       <pc:sldChg chg="modSp mod">
         <pc:chgData name="Jan Willem van den End (EBO_CMA)" userId="32ade95a-e024-4672-952f-5ed8641a9e00" providerId="ADAL" clId="{3BBBE02E-ACD4-4586-9407-5E79BF620DF1}" dt="2026-09-19T07:48:13.382" v="1791" actId="6549"/>
@@ -337,7 +360,7 @@
         </pc:spChg>
       </pc:sldChg>
       <pc:sldChg chg="addSp delSp modSp mod">
-        <pc:chgData name="Jan Willem van den End (EBO_CMA)" userId="32ade95a-e024-4672-952f-5ed8641a9e00" providerId="ADAL" clId="{3BBBE02E-ACD4-4586-9407-5E79BF620DF1}" dt="2026-09-19T07:59:25.603" v="1947" actId="20577"/>
+        <pc:chgData name="Jan Willem van den End (EBO_CMA)" userId="32ade95a-e024-4672-952f-5ed8641a9e00" providerId="ADAL" clId="{3BBBE02E-ACD4-4586-9407-5E79BF620DF1}" dt="2026-09-20T19:37:46.772" v="2395" actId="255"/>
         <pc:sldMkLst>
           <pc:docMk/>
           <pc:sldMk cId="909146083" sldId="796"/>
@@ -351,6 +374,14 @@
           </ac:spMkLst>
         </pc:spChg>
         <pc:spChg chg="add mod">
+          <ac:chgData name="Jan Willem van den End (EBO_CMA)" userId="32ade95a-e024-4672-952f-5ed8641a9e00" providerId="ADAL" clId="{3BBBE02E-ACD4-4586-9407-5E79BF620DF1}" dt="2026-09-20T19:37:46.772" v="2395" actId="255"/>
+          <ac:spMkLst>
+            <pc:docMk/>
+            <pc:sldMk cId="909146083" sldId="796"/>
+            <ac:spMk id="3" creationId="{23C9BFD4-AA2F-C8EE-A3EB-D5C9BACC14F1}"/>
+          </ac:spMkLst>
+        </pc:spChg>
+        <pc:spChg chg="add mod">
           <ac:chgData name="Jan Willem van den End (EBO_CMA)" userId="32ade95a-e024-4672-952f-5ed8641a9e00" providerId="ADAL" clId="{3BBBE02E-ACD4-4586-9407-5E79BF620DF1}" dt="2026-09-18T18:56:06.647" v="165" actId="1038"/>
           <ac:spMkLst>
             <pc:docMk/>
@@ -358,14 +389,6 @@
             <ac:spMk id="6" creationId="{4ED6076C-5ED2-F560-9ECC-68A359BFC0CA}"/>
           </ac:spMkLst>
         </pc:spChg>
-        <pc:picChg chg="del mod">
-          <ac:chgData name="Jan Willem van den End (EBO_CMA)" userId="32ade95a-e024-4672-952f-5ed8641a9e00" providerId="ADAL" clId="{3BBBE02E-ACD4-4586-9407-5E79BF620DF1}" dt="2026-09-18T18:49:16.922" v="91" actId="478"/>
-          <ac:picMkLst>
-            <pc:docMk/>
-            <pc:sldMk cId="909146083" sldId="796"/>
-            <ac:picMk id="3" creationId="{B8AE92C3-2830-FAC2-938C-8AB03FFDFA8A}"/>
-          </ac:picMkLst>
-        </pc:picChg>
         <pc:picChg chg="mod">
           <ac:chgData name="Jan Willem van den End (EBO_CMA)" userId="32ade95a-e024-4672-952f-5ed8641a9e00" providerId="ADAL" clId="{3BBBE02E-ACD4-4586-9407-5E79BF620DF1}" dt="2026-09-18T18:56:06.647" v="165" actId="1038"/>
           <ac:picMkLst>
@@ -462,7 +485,7 @@
           <a:p>
             <a:fld id="{C26BBE9F-2231-4498-A3E5-DFB02EDDD594}" type="datetimeFigureOut">
               <a:rPr lang="nl-NL" smtClean="0"/>
-              <a:t>19-9-2026</a:t>
+              <a:t>20-9-2026</a:t>
             </a:fld>
             <a:endParaRPr lang="nl-NL"/>
           </a:p>
@@ -627,7 +650,7 @@
           <a:p>
             <a:fld id="{900D5B51-A3C5-4FC7-8A0D-54EFEFAFACD3}" type="datetimeFigureOut">
               <a:rPr lang="nl-NL" smtClean="0"/>
-              <a:t>19-9-2026</a:t>
+              <a:t>20-9-2026</a:t>
             </a:fld>
             <a:endParaRPr lang="nl-NL"/>
           </a:p>
@@ -5611,7 +5634,7 @@
                 <a:latin typeface="Verdana" panose="020B0604030504040204" pitchFamily="34" charset="0"/>
                 <a:ea typeface="Verdana" panose="020B0604030504040204" pitchFamily="34" charset="0"/>
               </a:rPr>
-              <a:t>Financial AI-exposure does not play this role and even seems to be a relative disadvantage in stress periods</a:t>
+              <a:t>Financial AI-exposure does not play this role and even seems to be a relative disadvantage during shocks</a:t>
             </a:r>
           </a:p>
           <a:p>
@@ -6210,7 +6233,7 @@
         </p:nvSpPr>
         <p:spPr>
           <a:xfrm>
-            <a:off x="4820687" y="5371457"/>
+            <a:off x="4820687" y="5251888"/>
             <a:ext cx="4087369" cy="646331"/>
           </a:xfrm>
           <a:prstGeom prst="rect">
@@ -6402,7 +6425,7 @@
         </p:blipFill>
         <p:spPr>
           <a:xfrm>
-            <a:off x="77260" y="1668620"/>
+            <a:off x="146304" y="1558892"/>
             <a:ext cx="4404742" cy="3372459"/>
           </a:xfrm>
           <a:prstGeom prst="rect">
@@ -6424,8 +6447,8 @@
         </p:nvSpPr>
         <p:spPr>
           <a:xfrm>
-            <a:off x="235946" y="5371457"/>
-            <a:ext cx="4087369" cy="1015663"/>
+            <a:off x="304990" y="5154001"/>
+            <a:ext cx="4087369" cy="1200329"/>
           </a:xfrm>
           <a:prstGeom prst="rect">
             <a:avLst/>
@@ -6500,7 +6523,7 @@
                   <a:srgbClr val="002060"/>
                 </a:solidFill>
               </a:rPr>
-              <a:t> data 2000-2024. Product </a:t>
+              <a:t> data 2000-2025 (</a:t>
             </a:r>
             <a:r>
               <a:rPr lang="nl-NL" sz="1200" dirty="0" err="1">
@@ -6508,6 +6531,102 @@
                   <a:srgbClr val="002060"/>
                 </a:solidFill>
               </a:rPr>
+              <a:t>for</a:t>
+            </a:r>
+            <a:r>
+              <a:rPr lang="nl-NL" sz="1200" dirty="0">
+                <a:solidFill>
+                  <a:srgbClr val="002060"/>
+                </a:solidFill>
+              </a:rPr>
+              <a:t> </a:t>
+            </a:r>
+            <a:r>
+              <a:rPr lang="nl-NL" sz="1200" dirty="0" err="1">
+                <a:solidFill>
+                  <a:srgbClr val="002060"/>
+                </a:solidFill>
+              </a:rPr>
+              <a:t>some</a:t>
+            </a:r>
+            <a:r>
+              <a:rPr lang="nl-NL" sz="1200" dirty="0">
+                <a:solidFill>
+                  <a:srgbClr val="002060"/>
+                </a:solidFill>
+              </a:rPr>
+              <a:t> </a:t>
+            </a:r>
+            <a:r>
+              <a:rPr lang="nl-NL" sz="1200" dirty="0" err="1">
+                <a:solidFill>
+                  <a:srgbClr val="002060"/>
+                </a:solidFill>
+              </a:rPr>
+              <a:t>countries</a:t>
+            </a:r>
+            <a:r>
+              <a:rPr lang="nl-NL" sz="1200" dirty="0">
+                <a:solidFill>
+                  <a:srgbClr val="002060"/>
+                </a:solidFill>
+              </a:rPr>
+              <a:t> the data </a:t>
+            </a:r>
+            <a:r>
+              <a:rPr lang="nl-NL" sz="1200" dirty="0" err="1">
+                <a:solidFill>
+                  <a:srgbClr val="002060"/>
+                </a:solidFill>
+              </a:rPr>
+              <a:t>for</a:t>
+            </a:r>
+            <a:r>
+              <a:rPr lang="nl-NL" sz="1200" dirty="0">
+                <a:solidFill>
+                  <a:srgbClr val="002060"/>
+                </a:solidFill>
+              </a:rPr>
+              <a:t> 2025 is missing; 2024 data is </a:t>
+            </a:r>
+            <a:r>
+              <a:rPr lang="nl-NL" sz="1200" dirty="0" err="1">
+                <a:solidFill>
+                  <a:srgbClr val="002060"/>
+                </a:solidFill>
+              </a:rPr>
+              <a:t>then</a:t>
+            </a:r>
+            <a:r>
+              <a:rPr lang="nl-NL" sz="1200" dirty="0">
+                <a:solidFill>
+                  <a:srgbClr val="002060"/>
+                </a:solidFill>
+              </a:rPr>
+              <a:t> </a:t>
+            </a:r>
+            <a:r>
+              <a:rPr lang="nl-NL" sz="1200" dirty="0" err="1">
+                <a:solidFill>
+                  <a:srgbClr val="002060"/>
+                </a:solidFill>
+              </a:rPr>
+              <a:t>used</a:t>
+            </a:r>
+            <a:r>
+              <a:rPr lang="nl-NL" sz="1200" dirty="0">
+                <a:solidFill>
+                  <a:srgbClr val="002060"/>
+                </a:solidFill>
+              </a:rPr>
+              <a:t>). Product </a:t>
+            </a:r>
+            <a:r>
+              <a:rPr lang="nl-NL" sz="1200" dirty="0" err="1">
+                <a:solidFill>
+                  <a:srgbClr val="002060"/>
+                </a:solidFill>
+              </a:rPr>
               <a:t>groups</a:t>
             </a:r>
             <a:r>
@@ -6524,20 +6643,7 @@
                   <a:srgbClr val="002060"/>
                 </a:solidFill>
               </a:rPr>
-              <a:t>N1132G,</a:t>
-            </a:r>
-          </a:p>
-          <a:p>
-            <a:pPr>
-              <a:defRPr/>
-            </a:pPr>
-            <a:r>
-              <a:rPr lang="pt-BR" sz="1200" dirty="0">
-                <a:solidFill>
-                  <a:srgbClr val="002060"/>
-                </a:solidFill>
-              </a:rPr>
-              <a:t>N1173G, N112G_secJ, N117G_secJ, N1173G_secJ (source: Eurostat).</a:t>
+              <a:t>N1132G, N1173G, N112G_secJ, N117G_secJ, N1173G_secJ (source: Eurostat).</a:t>
             </a:r>
           </a:p>
           <a:p>
@@ -6963,8 +7069,8 @@
         </p:nvSpPr>
         <p:spPr>
           <a:xfrm>
-            <a:off x="207037" y="5051417"/>
-            <a:ext cx="4087369" cy="1200329"/>
+            <a:off x="207037" y="4849659"/>
+            <a:ext cx="4087369" cy="1384995"/>
           </a:xfrm>
           <a:prstGeom prst="rect">
             <a:avLst/>
@@ -7050,7 +7156,103 @@
                   <a:srgbClr val="002060"/>
                 </a:solidFill>
               </a:rPr>
-              <a:t> data 2000-2024.</a:t>
+              <a:t> data 2000-2024 (data </a:t>
+            </a:r>
+            <a:r>
+              <a:rPr lang="nl-NL" sz="1200" dirty="0" err="1">
+                <a:solidFill>
+                  <a:srgbClr val="002060"/>
+                </a:solidFill>
+              </a:rPr>
+              <a:t>for</a:t>
+            </a:r>
+            <a:r>
+              <a:rPr lang="nl-NL" sz="1200" dirty="0">
+                <a:solidFill>
+                  <a:srgbClr val="002060"/>
+                </a:solidFill>
+              </a:rPr>
+              <a:t> 2025 is </a:t>
+            </a:r>
+            <a:r>
+              <a:rPr lang="nl-NL" sz="1200" dirty="0" err="1">
+                <a:solidFill>
+                  <a:srgbClr val="002060"/>
+                </a:solidFill>
+              </a:rPr>
+              <a:t>not</a:t>
+            </a:r>
+            <a:r>
+              <a:rPr lang="nl-NL" sz="1200" dirty="0">
+                <a:solidFill>
+                  <a:srgbClr val="002060"/>
+                </a:solidFill>
+              </a:rPr>
+              <a:t> </a:t>
+            </a:r>
+            <a:r>
+              <a:rPr lang="nl-NL" sz="1200" dirty="0" err="1">
+                <a:solidFill>
+                  <a:srgbClr val="002060"/>
+                </a:solidFill>
+              </a:rPr>
+              <a:t>available</a:t>
+            </a:r>
+            <a:r>
+              <a:rPr lang="nl-NL" sz="1200" dirty="0">
+                <a:solidFill>
+                  <a:srgbClr val="002060"/>
+                </a:solidFill>
+              </a:rPr>
+              <a:t> </a:t>
+            </a:r>
+            <a:r>
+              <a:rPr lang="nl-NL" sz="1200" dirty="0" err="1">
+                <a:solidFill>
+                  <a:srgbClr val="002060"/>
+                </a:solidFill>
+              </a:rPr>
+              <a:t>yet</a:t>
+            </a:r>
+            <a:r>
+              <a:rPr lang="nl-NL" sz="1200" dirty="0">
+                <a:solidFill>
+                  <a:srgbClr val="002060"/>
+                </a:solidFill>
+              </a:rPr>
+              <a:t>; 2024 data is </a:t>
+            </a:r>
+            <a:r>
+              <a:rPr lang="nl-NL" sz="1200" dirty="0" err="1">
+                <a:solidFill>
+                  <a:srgbClr val="002060"/>
+                </a:solidFill>
+              </a:rPr>
+              <a:t>then</a:t>
+            </a:r>
+            <a:r>
+              <a:rPr lang="nl-NL" sz="1200" dirty="0">
+                <a:solidFill>
+                  <a:srgbClr val="002060"/>
+                </a:solidFill>
+              </a:rPr>
+              <a:t> </a:t>
+            </a:r>
+            <a:r>
+              <a:rPr lang="nl-NL" sz="1200" dirty="0" err="1">
+                <a:solidFill>
+                  <a:srgbClr val="002060"/>
+                </a:solidFill>
+              </a:rPr>
+              <a:t>used</a:t>
+            </a:r>
+            <a:r>
+              <a:rPr lang="nl-NL" sz="1200" dirty="0">
+                <a:solidFill>
+                  <a:srgbClr val="002060"/>
+                </a:solidFill>
+              </a:rPr>
+              <a:t>). </a:t>
             </a:r>
           </a:p>
           <a:p>
@@ -7164,7 +7366,7 @@
         </p:blipFill>
         <p:spPr>
           <a:xfrm>
-            <a:off x="207037" y="1737360"/>
+            <a:off x="207037" y="1408176"/>
             <a:ext cx="4227362" cy="3026765"/>
           </a:xfrm>
           <a:prstGeom prst="rect">
@@ -7194,7 +7396,7 @@
         </p:blipFill>
         <p:spPr>
           <a:xfrm>
-            <a:off x="4902230" y="1737360"/>
+            <a:off x="4902229" y="1522726"/>
             <a:ext cx="3949219" cy="3200400"/>
           </a:xfrm>
           <a:prstGeom prst="rect">
@@ -7754,14 +7956,11 @@
               </a:rPr>
               <a:t>cycle</a:t>
             </a:r>
-            <a:r>
-              <a:rPr lang="nl-NL" sz="1200" dirty="0">
-                <a:solidFill>
-                  <a:srgbClr val="002060"/>
-                </a:solidFill>
-              </a:rPr>
-              <a:t>.</a:t>
-            </a:r>
+            <a:endParaRPr lang="nl-NL" sz="1200" dirty="0">
+              <a:solidFill>
+                <a:srgbClr val="002060"/>
+              </a:solidFill>
+            </a:endParaRPr>
           </a:p>
         </p:txBody>
       </p:sp>
@@ -9299,7 +9498,7 @@
                 <a:latin typeface="Verdana" panose="020B0604030504040204" pitchFamily="34" charset="0"/>
                 <a:ea typeface="Verdana" panose="020B0604030504040204" pitchFamily="34" charset="0"/>
               </a:rPr>
-              <a:t>More positive growth surprises in countries with higher tech-exports in shock years…</a:t>
+              <a:t>More positive growth surprises in shock years for countries with higher tech-exports …</a:t>
             </a:r>
           </a:p>
           <a:p>
@@ -11861,6 +12060,150 @@
           </a:p>
         </p:txBody>
       </p:sp>
+      <mc:AlternateContent xmlns:mc="http://schemas.openxmlformats.org/markup-compatibility/2006">
+        <mc:Choice xmlns:a14="http://schemas.microsoft.com/office/drawing/2010/main" Requires="a14">
+          <p:sp>
+            <p:nvSpPr>
+              <p:cNvPr id="3" name="TextBox 2">
+                <a:extLst>
+                  <a:ext uri="{FF2B5EF4-FFF2-40B4-BE49-F238E27FC236}">
+                    <a16:creationId xmlns:a16="http://schemas.microsoft.com/office/drawing/2014/main" id="{23C9BFD4-AA2F-C8EE-A3EB-D5C9BACC14F1}"/>
+                  </a:ext>
+                </a:extLst>
+              </p:cNvPr>
+              <p:cNvSpPr txBox="1"/>
+              <p:nvPr/>
+            </p:nvSpPr>
+            <p:spPr>
+              <a:xfrm>
+                <a:off x="281720" y="3530754"/>
+                <a:ext cx="2543776" cy="381515"/>
+              </a:xfrm>
+              <a:prstGeom prst="rect">
+                <a:avLst/>
+              </a:prstGeom>
+              <a:noFill/>
+            </p:spPr>
+            <p:txBody>
+              <a:bodyPr wrap="square" rtlCol="0">
+                <a:spAutoFit/>
+              </a:bodyPr>
+              <a:lstStyle/>
+              <a:p>
+                <a:r>
+                  <a:rPr lang="en-GB" i="1" dirty="0">
+                    <a:latin typeface="Times New Roman" panose="02020603050405020304" pitchFamily="18" charset="0"/>
+                    <a:cs typeface="Times New Roman" panose="02020603050405020304" pitchFamily="18" charset="0"/>
+                  </a:rPr>
+                  <a:t>Variable</a:t>
+                </a:r>
+                <a:r>
+                  <a:rPr lang="en-GB" i="1" dirty="0"/>
+                  <a:t> </a:t>
+                </a:r>
+                <a14:m>
+                  <m:oMath xmlns:m="http://schemas.openxmlformats.org/officeDocument/2006/math">
+                    <m:sSub>
+                      <m:sSubPr>
+                        <m:ctrlPr>
+                          <a:rPr lang="en-US" i="1" noProof="1">
+                            <a:latin typeface="Cambria Math" panose="02040503050406030204" pitchFamily="18" charset="0"/>
+                            <a:ea typeface="Verdana" panose="020B0604030504040204" pitchFamily="34" charset="0"/>
+                          </a:rPr>
+                        </m:ctrlPr>
+                      </m:sSubPr>
+                      <m:e>
+                        <m:r>
+                          <a:rPr lang="en-US" i="1" noProof="1">
+                            <a:latin typeface="Cambria Math" panose="02040503050406030204" pitchFamily="18" charset="0"/>
+                            <a:ea typeface="Verdana" panose="020B0604030504040204" pitchFamily="34" charset="0"/>
+                          </a:rPr>
+                          <m:t> </m:t>
+                        </m:r>
+                        <m:r>
+                          <a:rPr lang="en-US" i="1" noProof="1">
+                            <a:latin typeface="Cambria Math" panose="02040503050406030204" pitchFamily="18" charset="0"/>
+                            <a:ea typeface="Verdana" panose="020B0604030504040204" pitchFamily="34" charset="0"/>
+                          </a:rPr>
+                          <m:t>𝑋</m:t>
+                        </m:r>
+                      </m:e>
+                      <m:sub>
+                        <m:r>
+                          <a:rPr lang="en-US" i="1" noProof="1">
+                            <a:latin typeface="Cambria Math" panose="02040503050406030204" pitchFamily="18" charset="0"/>
+                            <a:ea typeface="Verdana" panose="020B0604030504040204" pitchFamily="34" charset="0"/>
+                          </a:rPr>
+                          <m:t>𝑖</m:t>
+                        </m:r>
+                        <m:r>
+                          <a:rPr lang="en-US" i="1" noProof="1">
+                            <a:latin typeface="Cambria Math" panose="02040503050406030204" pitchFamily="18" charset="0"/>
+                            <a:ea typeface="Verdana" panose="020B0604030504040204" pitchFamily="34" charset="0"/>
+                          </a:rPr>
+                          <m:t>,</m:t>
+                        </m:r>
+                        <m:r>
+                          <a:rPr lang="en-US" i="1" noProof="1">
+                            <a:latin typeface="Cambria Math" panose="02040503050406030204" pitchFamily="18" charset="0"/>
+                            <a:ea typeface="Verdana" panose="020B0604030504040204" pitchFamily="34" charset="0"/>
+                          </a:rPr>
+                          <m:t>𝑡</m:t>
+                        </m:r>
+                      </m:sub>
+                    </m:sSub>
+                  </m:oMath>
+                </a14:m>
+                <a:endParaRPr lang="en-GB" dirty="0"/>
+              </a:p>
+            </p:txBody>
+          </p:sp>
+        </mc:Choice>
+        <mc:Fallback>
+          <p:sp>
+            <p:nvSpPr>
+              <p:cNvPr id="3" name="TextBox 2">
+                <a:extLst>
+                  <a:ext uri="{FF2B5EF4-FFF2-40B4-BE49-F238E27FC236}">
+                    <a16:creationId xmlns:a16="http://schemas.microsoft.com/office/drawing/2014/main" id="{23C9BFD4-AA2F-C8EE-A3EB-D5C9BACC14F1}"/>
+                  </a:ext>
+                </a:extLst>
+              </p:cNvPr>
+              <p:cNvSpPr txBox="1">
+                <a:spLocks noRot="1" noChangeAspect="1" noMove="1" noResize="1" noEditPoints="1" noAdjustHandles="1" noChangeArrowheads="1" noChangeShapeType="1" noTextEdit="1"/>
+              </p:cNvSpPr>
+              <p:nvPr/>
+            </p:nvSpPr>
+            <p:spPr>
+              <a:xfrm>
+                <a:off x="281720" y="3530754"/>
+                <a:ext cx="2543776" cy="381515"/>
+              </a:xfrm>
+              <a:prstGeom prst="rect">
+                <a:avLst/>
+              </a:prstGeom>
+              <a:blipFill>
+                <a:blip r:embed="rId4"/>
+                <a:stretch>
+                  <a:fillRect l="-1914" t="-7937" b="-20635"/>
+                </a:stretch>
+              </a:blipFill>
+            </p:spPr>
+            <p:txBody>
+              <a:bodyPr/>
+              <a:lstStyle/>
+              <a:p>
+                <a:r>
+                  <a:rPr lang="en-GB">
+                    <a:noFill/>
+                  </a:rPr>
+                  <a:t> </a:t>
+                </a:r>
+              </a:p>
+            </p:txBody>
+          </p:sp>
+        </mc:Fallback>
+      </mc:AlternateContent>
     </p:spTree>
     <p:extLst>
       <p:ext uri="{BB962C8B-B14F-4D97-AF65-F5344CB8AC3E}">

--- a/Resilience.pptx
+++ b/Resilience.pptx
@@ -155,7 +155,7 @@
 <file path=ppt/revisionInfo.xml><?xml version="1.0" encoding="utf-8"?>
 <p1510:revInfo xmlns:a="http://schemas.openxmlformats.org/drawingml/2006/main" xmlns:r="http://schemas.openxmlformats.org/officeDocument/2006/relationships" xmlns:p1510="http://schemas.microsoft.com/office/powerpoint/2015/10/main">
   <p1510:revLst>
-    <p1510:client id="{13B43BEF-9B9B-431D-9308-0B2B126B7992}" v="9" dt="2026-09-20T19:41:10.978"/>
+    <p1510:client id="{13B43BEF-9B9B-431D-9308-0B2B126B7992}" v="13" dt="2026-09-21T12:54:34.462"/>
   </p1510:revLst>
 </p1510:revInfo>
 </file>
@@ -165,7 +165,7 @@
   <pc:docChgLst>
     <pc:chgData name="Jan Willem van den End (EBO_CMA)" userId="32ade95a-e024-4672-952f-5ed8641a9e00" providerId="ADAL" clId="{3BBBE02E-ACD4-4586-9407-5E79BF620DF1}"/>
     <pc:docChg chg="undo redo custSel modSld">
-      <pc:chgData name="Jan Willem van den End (EBO_CMA)" userId="32ade95a-e024-4672-952f-5ed8641a9e00" providerId="ADAL" clId="{3BBBE02E-ACD4-4586-9407-5E79BF620DF1}" dt="2026-09-20T19:43:08.706" v="2453" actId="6549"/>
+      <pc:chgData name="Jan Willem van den End (EBO_CMA)" userId="32ade95a-e024-4672-952f-5ed8641a9e00" providerId="ADAL" clId="{3BBBE02E-ACD4-4586-9407-5E79BF620DF1}" dt="2026-09-21T12:54:52.415" v="2492" actId="1076"/>
       <pc:docMkLst>
         <pc:docMk/>
       </pc:docMkLst>
@@ -199,8 +199,8 @@
           </ac:spMkLst>
         </pc:spChg>
       </pc:sldChg>
-      <pc:sldChg chg="modSp mod">
-        <pc:chgData name="Jan Willem van den End (EBO_CMA)" userId="32ade95a-e024-4672-952f-5ed8641a9e00" providerId="ADAL" clId="{3BBBE02E-ACD4-4586-9407-5E79BF620DF1}" dt="2026-09-20T19:40:36.825" v="2409" actId="14100"/>
+      <pc:sldChg chg="addSp delSp modSp mod">
+        <pc:chgData name="Jan Willem van den End (EBO_CMA)" userId="32ade95a-e024-4672-952f-5ed8641a9e00" providerId="ADAL" clId="{3BBBE02E-ACD4-4586-9407-5E79BF620DF1}" dt="2026-09-21T12:52:28.546" v="2481" actId="1076"/>
         <pc:sldMkLst>
           <pc:docMk/>
           <pc:sldMk cId="2428101549" sldId="784"/>
@@ -213,6 +213,38 @@
             <ac:spMk id="6" creationId="{613E110F-8AEE-A02C-2032-1F07DE944DEB}"/>
           </ac:spMkLst>
         </pc:spChg>
+        <pc:picChg chg="del mod">
+          <ac:chgData name="Jan Willem van den End (EBO_CMA)" userId="32ade95a-e024-4672-952f-5ed8641a9e00" providerId="ADAL" clId="{3BBBE02E-ACD4-4586-9407-5E79BF620DF1}" dt="2026-09-21T12:52:06.108" v="2474" actId="478"/>
+          <ac:picMkLst>
+            <pc:docMk/>
+            <pc:sldMk cId="2428101549" sldId="784"/>
+            <ac:picMk id="3" creationId="{1D1467E3-A484-4163-851C-187525BE7907}"/>
+          </ac:picMkLst>
+        </pc:picChg>
+        <pc:picChg chg="mod">
+          <ac:chgData name="Jan Willem van den End (EBO_CMA)" userId="32ade95a-e024-4672-952f-5ed8641a9e00" providerId="ADAL" clId="{3BBBE02E-ACD4-4586-9407-5E79BF620DF1}" dt="2026-09-21T12:52:28.546" v="2481" actId="1076"/>
+          <ac:picMkLst>
+            <pc:docMk/>
+            <pc:sldMk cId="2428101549" sldId="784"/>
+            <ac:picMk id="4" creationId="{6ECE1DC5-FB80-BD91-88E9-814F7F9FA66B}"/>
+          </ac:picMkLst>
+        </pc:picChg>
+        <pc:picChg chg="del">
+          <ac:chgData name="Jan Willem van den End (EBO_CMA)" userId="32ade95a-e024-4672-952f-5ed8641a9e00" providerId="ADAL" clId="{3BBBE02E-ACD4-4586-9407-5E79BF620DF1}" dt="2026-09-21T12:48:54.267" v="2454" actId="478"/>
+          <ac:picMkLst>
+            <pc:docMk/>
+            <pc:sldMk cId="2428101549" sldId="784"/>
+            <ac:picMk id="10" creationId="{477F3FA9-013F-F0A8-95C8-DBD688C3744A}"/>
+          </ac:picMkLst>
+        </pc:picChg>
+        <pc:picChg chg="add del mod">
+          <ac:chgData name="Jan Willem van den End (EBO_CMA)" userId="32ade95a-e024-4672-952f-5ed8641a9e00" providerId="ADAL" clId="{3BBBE02E-ACD4-4586-9407-5E79BF620DF1}" dt="2026-09-21T12:49:28.867" v="2461" actId="1076"/>
+          <ac:picMkLst>
+            <pc:docMk/>
+            <pc:sldMk cId="2428101549" sldId="784"/>
+            <ac:picMk id="11" creationId="{7A25CD59-D632-9630-3CAD-3BDC8155E548}"/>
+          </ac:picMkLst>
+        </pc:picChg>
       </pc:sldChg>
       <pc:sldChg chg="modSp mod">
         <pc:chgData name="Jan Willem van den End (EBO_CMA)" userId="32ade95a-e024-4672-952f-5ed8641a9e00" providerId="ADAL" clId="{3BBBE02E-ACD4-4586-9407-5E79BF620DF1}" dt="2026-09-19T07:22:24.819" v="1551" actId="20577"/>
@@ -284,7 +316,7 @@
         </pc:picChg>
       </pc:sldChg>
       <pc:sldChg chg="addSp delSp modSp mod">
-        <pc:chgData name="Jan Willem van den End (EBO_CMA)" userId="32ade95a-e024-4672-952f-5ed8641a9e00" providerId="ADAL" clId="{3BBBE02E-ACD4-4586-9407-5E79BF620DF1}" dt="2026-09-20T19:41:39.336" v="2429" actId="20577"/>
+        <pc:chgData name="Jan Willem van den End (EBO_CMA)" userId="32ade95a-e024-4672-952f-5ed8641a9e00" providerId="ADAL" clId="{3BBBE02E-ACD4-4586-9407-5E79BF620DF1}" dt="2026-09-21T12:51:25.288" v="2473" actId="1038"/>
         <pc:sldMkLst>
           <pc:docMk/>
           <pc:sldMk cId="2304846322" sldId="792"/>
@@ -297,6 +329,22 @@
             <ac:spMk id="6" creationId="{CF9708F7-32AE-5645-3159-CE1174AB0729}"/>
           </ac:spMkLst>
         </pc:spChg>
+        <pc:picChg chg="del">
+          <ac:chgData name="Jan Willem van den End (EBO_CMA)" userId="32ade95a-e024-4672-952f-5ed8641a9e00" providerId="ADAL" clId="{3BBBE02E-ACD4-4586-9407-5E79BF620DF1}" dt="2026-09-21T12:51:02.236" v="2462" actId="478"/>
+          <ac:picMkLst>
+            <pc:docMk/>
+            <pc:sldMk cId="2304846322" sldId="792"/>
+            <ac:picMk id="3" creationId="{D13E89F4-0265-ABF8-064D-EE79C4DCAA71}"/>
+          </ac:picMkLst>
+        </pc:picChg>
+        <pc:picChg chg="mod">
+          <ac:chgData name="Jan Willem van den End (EBO_CMA)" userId="32ade95a-e024-4672-952f-5ed8641a9e00" providerId="ADAL" clId="{3BBBE02E-ACD4-4586-9407-5E79BF620DF1}" dt="2026-09-21T12:51:25.288" v="2473" actId="1038"/>
+          <ac:picMkLst>
+            <pc:docMk/>
+            <pc:sldMk cId="2304846322" sldId="792"/>
+            <ac:picMk id="7" creationId="{5A97EF09-CBBC-6BFB-7A2B-C80CB9B80409}"/>
+          </ac:picMkLst>
+        </pc:picChg>
       </pc:sldChg>
       <pc:sldChg chg="modSp mod">
         <pc:chgData name="Jan Willem van den End (EBO_CMA)" userId="32ade95a-e024-4672-952f-5ed8641a9e00" providerId="ADAL" clId="{3BBBE02E-ACD4-4586-9407-5E79BF620DF1}" dt="2026-09-19T07:46:22.115" v="1766" actId="114"/>
@@ -360,7 +408,7 @@
         </pc:spChg>
       </pc:sldChg>
       <pc:sldChg chg="addSp delSp modSp mod">
-        <pc:chgData name="Jan Willem van den End (EBO_CMA)" userId="32ade95a-e024-4672-952f-5ed8641a9e00" providerId="ADAL" clId="{3BBBE02E-ACD4-4586-9407-5E79BF620DF1}" dt="2026-09-20T19:37:46.772" v="2395" actId="255"/>
+        <pc:chgData name="Jan Willem van den End (EBO_CMA)" userId="32ade95a-e024-4672-952f-5ed8641a9e00" providerId="ADAL" clId="{3BBBE02E-ACD4-4586-9407-5E79BF620DF1}" dt="2026-09-21T12:54:52.415" v="2492" actId="1076"/>
         <pc:sldMkLst>
           <pc:docMk/>
           <pc:sldMk cId="909146083" sldId="796"/>
@@ -373,8 +421,8 @@
             <ac:spMk id="2" creationId="{9D7DFCD1-CA74-2C76-7A49-94B41E557F74}"/>
           </ac:spMkLst>
         </pc:spChg>
-        <pc:spChg chg="add mod">
-          <ac:chgData name="Jan Willem van den End (EBO_CMA)" userId="32ade95a-e024-4672-952f-5ed8641a9e00" providerId="ADAL" clId="{3BBBE02E-ACD4-4586-9407-5E79BF620DF1}" dt="2026-09-20T19:37:46.772" v="2395" actId="255"/>
+        <pc:spChg chg="add del mod">
+          <ac:chgData name="Jan Willem van den End (EBO_CMA)" userId="32ade95a-e024-4672-952f-5ed8641a9e00" providerId="ADAL" clId="{3BBBE02E-ACD4-4586-9407-5E79BF620DF1}" dt="2026-09-21T12:54:46.779" v="2490" actId="21"/>
           <ac:spMkLst>
             <pc:docMk/>
             <pc:sldMk cId="909146083" sldId="796"/>
@@ -389,12 +437,28 @@
             <ac:spMk id="6" creationId="{4ED6076C-5ED2-F560-9ECC-68A359BFC0CA}"/>
           </ac:spMkLst>
         </pc:spChg>
-        <pc:picChg chg="mod">
-          <ac:chgData name="Jan Willem van den End (EBO_CMA)" userId="32ade95a-e024-4672-952f-5ed8641a9e00" providerId="ADAL" clId="{3BBBE02E-ACD4-4586-9407-5E79BF620DF1}" dt="2026-09-18T18:56:06.647" v="165" actId="1038"/>
+        <pc:spChg chg="add mod">
+          <ac:chgData name="Jan Willem van den End (EBO_CMA)" userId="32ade95a-e024-4672-952f-5ed8641a9e00" providerId="ADAL" clId="{3BBBE02E-ACD4-4586-9407-5E79BF620DF1}" dt="2026-09-21T12:54:52.415" v="2492" actId="1076"/>
+          <ac:spMkLst>
+            <pc:docMk/>
+            <pc:sldMk cId="909146083" sldId="796"/>
+            <ac:spMk id="8" creationId="{5643E4AF-9E9D-0E9E-1516-7D39415B0712}"/>
+          </ac:spMkLst>
+        </pc:spChg>
+        <pc:picChg chg="add del mod">
+          <ac:chgData name="Jan Willem van den End (EBO_CMA)" userId="32ade95a-e024-4672-952f-5ed8641a9e00" providerId="ADAL" clId="{3BBBE02E-ACD4-4586-9407-5E79BF620DF1}" dt="2026-09-21T12:54:28.516" v="2485" actId="478"/>
           <ac:picMkLst>
             <pc:docMk/>
             <pc:sldMk cId="909146083" sldId="796"/>
             <ac:picMk id="4" creationId="{FD6B8E7D-29E9-A720-3479-9CC57D8735B6}"/>
+          </ac:picMkLst>
+        </pc:picChg>
+        <pc:picChg chg="mod">
+          <ac:chgData name="Jan Willem van den End (EBO_CMA)" userId="32ade95a-e024-4672-952f-5ed8641a9e00" providerId="ADAL" clId="{3BBBE02E-ACD4-4586-9407-5E79BF620DF1}" dt="2026-09-21T12:54:43.471" v="2489" actId="1076"/>
+          <ac:picMkLst>
+            <pc:docMk/>
+            <pc:sldMk cId="909146083" sldId="796"/>
+            <ac:picMk id="5" creationId="{7AC3EA6C-9FAB-BBCC-B436-3E86CEC18820}"/>
           </ac:picMkLst>
         </pc:picChg>
       </pc:sldChg>
@@ -485,7 +549,7 @@
           <a:p>
             <a:fld id="{C26BBE9F-2231-4498-A3E5-DFB02EDDD594}" type="datetimeFigureOut">
               <a:rPr lang="nl-NL" smtClean="0"/>
-              <a:t>20-9-2026</a:t>
+              <a:t>21-9-2026</a:t>
             </a:fld>
             <a:endParaRPr lang="nl-NL"/>
           </a:p>
@@ -650,7 +714,7 @@
           <a:p>
             <a:fld id="{900D5B51-A3C5-4FC7-8A0D-54EFEFAFACD3}" type="datetimeFigureOut">
               <a:rPr lang="nl-NL" smtClean="0"/>
-              <a:t>20-9-2026</a:t>
+              <a:t>21-9-2026</a:t>
             </a:fld>
             <a:endParaRPr lang="nl-NL"/>
           </a:p>
@@ -9283,10 +9347,10 @@
       </p:sp>
       <p:pic>
         <p:nvPicPr>
-          <p:cNvPr id="10" name="Picture 9">
+          <p:cNvPr id="11" name="Picture 10">
             <a:extLst>
               <a:ext uri="{FF2B5EF4-FFF2-40B4-BE49-F238E27FC236}">
-                <a16:creationId xmlns:a16="http://schemas.microsoft.com/office/drawing/2014/main" id="{477F3FA9-013F-F0A8-95C8-DBD688C3744A}"/>
+                <a16:creationId xmlns:a16="http://schemas.microsoft.com/office/drawing/2014/main" id="{7A25CD59-D632-9630-3CAD-3BDC8155E548}"/>
               </a:ext>
             </a:extLst>
           </p:cNvPr>
@@ -9303,8 +9367,8 @@
         </p:blipFill>
         <p:spPr>
           <a:xfrm>
-            <a:off x="4434840" y="1387268"/>
-            <a:ext cx="4014216" cy="2117138"/>
+            <a:off x="4613338" y="3469220"/>
+            <a:ext cx="4088978" cy="2219053"/>
           </a:xfrm>
           <a:prstGeom prst="rect">
             <a:avLst/>
@@ -9313,10 +9377,10 @@
       </p:pic>
       <p:pic>
         <p:nvPicPr>
-          <p:cNvPr id="11" name="Picture 10">
+          <p:cNvPr id="4" name="Picture 3">
             <a:extLst>
               <a:ext uri="{FF2B5EF4-FFF2-40B4-BE49-F238E27FC236}">
-                <a16:creationId xmlns:a16="http://schemas.microsoft.com/office/drawing/2014/main" id="{7A25CD59-D632-9630-3CAD-3BDC8155E548}"/>
+                <a16:creationId xmlns:a16="http://schemas.microsoft.com/office/drawing/2014/main" id="{6ECE1DC5-FB80-BD91-88E9-814F7F9FA66B}"/>
               </a:ext>
             </a:extLst>
           </p:cNvPr>
@@ -9333,8 +9397,8 @@
         </p:blipFill>
         <p:spPr>
           <a:xfrm>
-            <a:off x="4442374" y="3504405"/>
-            <a:ext cx="4088978" cy="2219053"/>
+            <a:off x="4613339" y="1249141"/>
+            <a:ext cx="4088977" cy="2139639"/>
           </a:xfrm>
           <a:prstGeom prst="rect">
             <a:avLst/>
@@ -9660,10 +9724,10 @@
       </p:sp>
       <p:pic>
         <p:nvPicPr>
-          <p:cNvPr id="3" name="Picture 2">
+          <p:cNvPr id="4" name="Picture 3">
             <a:extLst>
               <a:ext uri="{FF2B5EF4-FFF2-40B4-BE49-F238E27FC236}">
-                <a16:creationId xmlns:a16="http://schemas.microsoft.com/office/drawing/2014/main" id="{D13E89F4-0265-ABF8-064D-EE79C4DCAA71}"/>
+                <a16:creationId xmlns:a16="http://schemas.microsoft.com/office/drawing/2014/main" id="{551404D6-F9AD-BB52-B168-06741BAA0097}"/>
               </a:ext>
             </a:extLst>
           </p:cNvPr>
@@ -9680,8 +9744,8 @@
         </p:blipFill>
         <p:spPr>
           <a:xfrm>
-            <a:off x="4527665" y="1292833"/>
-            <a:ext cx="3985397" cy="2104991"/>
+            <a:off x="4572000" y="3397824"/>
+            <a:ext cx="3959350" cy="2170453"/>
           </a:xfrm>
           <a:prstGeom prst="rect">
             <a:avLst/>
@@ -9690,10 +9754,10 @@
       </p:pic>
       <p:pic>
         <p:nvPicPr>
-          <p:cNvPr id="4" name="Picture 3">
+          <p:cNvPr id="7" name="Picture 6">
             <a:extLst>
               <a:ext uri="{FF2B5EF4-FFF2-40B4-BE49-F238E27FC236}">
-                <a16:creationId xmlns:a16="http://schemas.microsoft.com/office/drawing/2014/main" id="{551404D6-F9AD-BB52-B168-06741BAA0097}"/>
+                <a16:creationId xmlns:a16="http://schemas.microsoft.com/office/drawing/2014/main" id="{5A97EF09-CBBC-6BFB-7A2B-C80CB9B80409}"/>
               </a:ext>
             </a:extLst>
           </p:cNvPr>
@@ -9710,8 +9774,8 @@
         </p:blipFill>
         <p:spPr>
           <a:xfrm>
-            <a:off x="4572000" y="3397824"/>
-            <a:ext cx="3959350" cy="2170453"/>
+            <a:off x="4566596" y="1234859"/>
+            <a:ext cx="3962400" cy="2170453"/>
           </a:xfrm>
           <a:prstGeom prst="rect">
             <a:avLst/>
@@ -11975,36 +12039,6 @@
           </a:p>
         </p:txBody>
       </p:sp>
-      <p:pic>
-        <p:nvPicPr>
-          <p:cNvPr id="4" name="Picture 3">
-            <a:extLst>
-              <a:ext uri="{FF2B5EF4-FFF2-40B4-BE49-F238E27FC236}">
-                <a16:creationId xmlns:a16="http://schemas.microsoft.com/office/drawing/2014/main" id="{FD6B8E7D-29E9-A720-3479-9CC57D8735B6}"/>
-              </a:ext>
-            </a:extLst>
-          </p:cNvPr>
-          <p:cNvPicPr>
-            <a:picLocks noChangeAspect="1"/>
-          </p:cNvPicPr>
-          <p:nvPr/>
-        </p:nvPicPr>
-        <p:blipFill>
-          <a:blip r:embed="rId3"/>
-          <a:stretch>
-            <a:fillRect/>
-          </a:stretch>
-        </p:blipFill>
-        <p:spPr>
-          <a:xfrm>
-            <a:off x="142877" y="2807209"/>
-            <a:ext cx="8774267" cy="2586798"/>
-          </a:xfrm>
-          <a:prstGeom prst="rect">
-            <a:avLst/>
-          </a:prstGeom>
-        </p:spPr>
-      </p:pic>
       <p:sp>
         <p:nvSpPr>
           <p:cNvPr id="6" name="Tekstvak 3">
@@ -12060,14 +12094,44 @@
           </a:p>
         </p:txBody>
       </p:sp>
+      <p:pic>
+        <p:nvPicPr>
+          <p:cNvPr id="5" name="Picture 4">
+            <a:extLst>
+              <a:ext uri="{FF2B5EF4-FFF2-40B4-BE49-F238E27FC236}">
+                <a16:creationId xmlns:a16="http://schemas.microsoft.com/office/drawing/2014/main" id="{7AC3EA6C-9FAB-BBCC-B436-3E86CEC18820}"/>
+              </a:ext>
+            </a:extLst>
+          </p:cNvPr>
+          <p:cNvPicPr>
+            <a:picLocks noChangeAspect="1"/>
+          </p:cNvPicPr>
+          <p:nvPr/>
+        </p:nvPicPr>
+        <p:blipFill>
+          <a:blip r:embed="rId3"/>
+          <a:stretch>
+            <a:fillRect/>
+          </a:stretch>
+        </p:blipFill>
+        <p:spPr>
+          <a:xfrm>
+            <a:off x="222474" y="2800348"/>
+            <a:ext cx="8639806" cy="2453854"/>
+          </a:xfrm>
+          <a:prstGeom prst="rect">
+            <a:avLst/>
+          </a:prstGeom>
+        </p:spPr>
+      </p:pic>
       <mc:AlternateContent xmlns:mc="http://schemas.openxmlformats.org/markup-compatibility/2006">
         <mc:Choice xmlns:a14="http://schemas.microsoft.com/office/drawing/2010/main" Requires="a14">
           <p:sp>
             <p:nvSpPr>
-              <p:cNvPr id="3" name="TextBox 2">
+              <p:cNvPr id="8" name="TextBox 7">
                 <a:extLst>
                   <a:ext uri="{FF2B5EF4-FFF2-40B4-BE49-F238E27FC236}">
-                    <a16:creationId xmlns:a16="http://schemas.microsoft.com/office/drawing/2014/main" id="{23C9BFD4-AA2F-C8EE-A3EB-D5C9BACC14F1}"/>
+                    <a16:creationId xmlns:a16="http://schemas.microsoft.com/office/drawing/2014/main" id="{5643E4AF-9E9D-0E9E-1516-7D39415B0712}"/>
                   </a:ext>
                 </a:extLst>
               </p:cNvPr>
@@ -12076,7 +12140,7 @@
             </p:nvSpPr>
             <p:spPr>
               <a:xfrm>
-                <a:off x="281720" y="3530754"/>
+                <a:off x="281720" y="3429000"/>
                 <a:ext cx="2543776" cy="381515"/>
               </a:xfrm>
               <a:prstGeom prst="rect">
@@ -12162,10 +12226,10 @@
         <mc:Fallback>
           <p:sp>
             <p:nvSpPr>
-              <p:cNvPr id="3" name="TextBox 2">
+              <p:cNvPr id="8" name="TextBox 7">
                 <a:extLst>
                   <a:ext uri="{FF2B5EF4-FFF2-40B4-BE49-F238E27FC236}">
-                    <a16:creationId xmlns:a16="http://schemas.microsoft.com/office/drawing/2014/main" id="{23C9BFD4-AA2F-C8EE-A3EB-D5C9BACC14F1}"/>
+                    <a16:creationId xmlns:a16="http://schemas.microsoft.com/office/drawing/2014/main" id="{5643E4AF-9E9D-0E9E-1516-7D39415B0712}"/>
                   </a:ext>
                 </a:extLst>
               </p:cNvPr>
@@ -12176,7 +12240,7 @@
             </p:nvSpPr>
             <p:spPr>
               <a:xfrm>
-                <a:off x="281720" y="3530754"/>
+                <a:off x="281720" y="3429000"/>
                 <a:ext cx="2543776" cy="381515"/>
               </a:xfrm>
               <a:prstGeom prst="rect">
@@ -12185,7 +12249,7 @@
               <a:blipFill>
                 <a:blip r:embed="rId4"/>
                 <a:stretch>
-                  <a:fillRect l="-1914" t="-7937" b="-20635"/>
+                  <a:fillRect l="-1914" t="-9677" b="-20968"/>
                 </a:stretch>
               </a:blipFill>
             </p:spPr>

--- a/Resilience.pptx
+++ b/Resilience.pptx
@@ -155,7 +155,7 @@
 <file path=ppt/revisionInfo.xml><?xml version="1.0" encoding="utf-8"?>
 <p1510:revInfo xmlns:a="http://schemas.openxmlformats.org/drawingml/2006/main" xmlns:r="http://schemas.openxmlformats.org/officeDocument/2006/relationships" xmlns:p1510="http://schemas.microsoft.com/office/powerpoint/2015/10/main">
   <p1510:revLst>
-    <p1510:client id="{13B43BEF-9B9B-431D-9308-0B2B126B7992}" v="13" dt="2026-09-21T12:54:34.462"/>
+    <p1510:client id="{13B43BEF-9B9B-431D-9308-0B2B126B7992}" v="14" dt="2026-09-21T21:56:53.956"/>
   </p1510:revLst>
 </p1510:revInfo>
 </file>
@@ -165,7 +165,7 @@
   <pc:docChgLst>
     <pc:chgData name="Jan Willem van den End (EBO_CMA)" userId="32ade95a-e024-4672-952f-5ed8641a9e00" providerId="ADAL" clId="{3BBBE02E-ACD4-4586-9407-5E79BF620DF1}"/>
     <pc:docChg chg="undo redo custSel modSld">
-      <pc:chgData name="Jan Willem van den End (EBO_CMA)" userId="32ade95a-e024-4672-952f-5ed8641a9e00" providerId="ADAL" clId="{3BBBE02E-ACD4-4586-9407-5E79BF620DF1}" dt="2026-09-21T12:54:52.415" v="2492" actId="1076"/>
+      <pc:chgData name="Jan Willem van den End (EBO_CMA)" userId="32ade95a-e024-4672-952f-5ed8641a9e00" providerId="ADAL" clId="{3BBBE02E-ACD4-4586-9407-5E79BF620DF1}" dt="2026-09-21T21:58:20.427" v="2750" actId="20577"/>
       <pc:docMkLst>
         <pc:docMk/>
       </pc:docMkLst>
@@ -408,13 +408,13 @@
         </pc:spChg>
       </pc:sldChg>
       <pc:sldChg chg="addSp delSp modSp mod">
-        <pc:chgData name="Jan Willem van den End (EBO_CMA)" userId="32ade95a-e024-4672-952f-5ed8641a9e00" providerId="ADAL" clId="{3BBBE02E-ACD4-4586-9407-5E79BF620DF1}" dt="2026-09-21T12:54:52.415" v="2492" actId="1076"/>
+        <pc:chgData name="Jan Willem van den End (EBO_CMA)" userId="32ade95a-e024-4672-952f-5ed8641a9e00" providerId="ADAL" clId="{3BBBE02E-ACD4-4586-9407-5E79BF620DF1}" dt="2026-09-21T21:58:20.427" v="2750" actId="20577"/>
         <pc:sldMkLst>
           <pc:docMk/>
           <pc:sldMk cId="909146083" sldId="796"/>
         </pc:sldMkLst>
         <pc:spChg chg="mod">
-          <ac:chgData name="Jan Willem van den End (EBO_CMA)" userId="32ade95a-e024-4672-952f-5ed8641a9e00" providerId="ADAL" clId="{3BBBE02E-ACD4-4586-9407-5E79BF620DF1}" dt="2026-09-19T07:59:25.603" v="1947" actId="20577"/>
+          <ac:chgData name="Jan Willem van den End (EBO_CMA)" userId="32ade95a-e024-4672-952f-5ed8641a9e00" providerId="ADAL" clId="{3BBBE02E-ACD4-4586-9407-5E79BF620DF1}" dt="2026-09-21T21:58:20.427" v="2750" actId="20577"/>
           <ac:spMkLst>
             <pc:docMk/>
             <pc:sldMk cId="909146083" sldId="796"/>
@@ -430,7 +430,7 @@
           </ac:spMkLst>
         </pc:spChg>
         <pc:spChg chg="add mod">
-          <ac:chgData name="Jan Willem van den End (EBO_CMA)" userId="32ade95a-e024-4672-952f-5ed8641a9e00" providerId="ADAL" clId="{3BBBE02E-ACD4-4586-9407-5E79BF620DF1}" dt="2026-09-18T18:56:06.647" v="165" actId="1038"/>
+          <ac:chgData name="Jan Willem van den End (EBO_CMA)" userId="32ade95a-e024-4672-952f-5ed8641a9e00" providerId="ADAL" clId="{3BBBE02E-ACD4-4586-9407-5E79BF620DF1}" dt="2026-09-21T21:58:09.680" v="2739" actId="1076"/>
           <ac:spMkLst>
             <pc:docMk/>
             <pc:sldMk cId="909146083" sldId="796"/>
@@ -438,13 +438,29 @@
           </ac:spMkLst>
         </pc:spChg>
         <pc:spChg chg="add mod">
-          <ac:chgData name="Jan Willem van den End (EBO_CMA)" userId="32ade95a-e024-4672-952f-5ed8641a9e00" providerId="ADAL" clId="{3BBBE02E-ACD4-4586-9407-5E79BF620DF1}" dt="2026-09-21T12:54:52.415" v="2492" actId="1076"/>
+          <ac:chgData name="Jan Willem van den End (EBO_CMA)" userId="32ade95a-e024-4672-952f-5ed8641a9e00" providerId="ADAL" clId="{3BBBE02E-ACD4-4586-9407-5E79BF620DF1}" dt="2026-09-21T21:58:09.680" v="2739" actId="1076"/>
+          <ac:spMkLst>
+            <pc:docMk/>
+            <pc:sldMk cId="909146083" sldId="796"/>
+            <ac:spMk id="7" creationId="{475F513A-C52D-7D55-1C0D-2A6BC3630CED}"/>
+          </ac:spMkLst>
+        </pc:spChg>
+        <pc:spChg chg="add del mod">
+          <ac:chgData name="Jan Willem van den End (EBO_CMA)" userId="32ade95a-e024-4672-952f-5ed8641a9e00" providerId="ADAL" clId="{3BBBE02E-ACD4-4586-9407-5E79BF620DF1}" dt="2026-09-21T21:57:05.242" v="2688" actId="21"/>
           <ac:spMkLst>
             <pc:docMk/>
             <pc:sldMk cId="909146083" sldId="796"/>
             <ac:spMk id="8" creationId="{5643E4AF-9E9D-0E9E-1516-7D39415B0712}"/>
           </ac:spMkLst>
         </pc:spChg>
+        <pc:picChg chg="mod">
+          <ac:chgData name="Jan Willem van den End (EBO_CMA)" userId="32ade95a-e024-4672-952f-5ed8641a9e00" providerId="ADAL" clId="{3BBBE02E-ACD4-4586-9407-5E79BF620DF1}" dt="2026-09-21T21:58:09.680" v="2739" actId="1076"/>
+          <ac:picMkLst>
+            <pc:docMk/>
+            <pc:sldMk cId="909146083" sldId="796"/>
+            <ac:picMk id="3" creationId="{A69985F4-E5BB-D076-899F-DF9BEDA0FAA6}"/>
+          </ac:picMkLst>
+        </pc:picChg>
         <pc:picChg chg="add del mod">
           <ac:chgData name="Jan Willem van den End (EBO_CMA)" userId="32ade95a-e024-4672-952f-5ed8641a9e00" providerId="ADAL" clId="{3BBBE02E-ACD4-4586-9407-5E79BF620DF1}" dt="2026-09-21T12:54:28.516" v="2485" actId="478"/>
           <ac:picMkLst>
@@ -453,8 +469,8 @@
             <ac:picMk id="4" creationId="{FD6B8E7D-29E9-A720-3479-9CC57D8735B6}"/>
           </ac:picMkLst>
         </pc:picChg>
-        <pc:picChg chg="mod">
-          <ac:chgData name="Jan Willem van den End (EBO_CMA)" userId="32ade95a-e024-4672-952f-5ed8641a9e00" providerId="ADAL" clId="{3BBBE02E-ACD4-4586-9407-5E79BF620DF1}" dt="2026-09-21T12:54:43.471" v="2489" actId="1076"/>
+        <pc:picChg chg="del mod">
+          <ac:chgData name="Jan Willem van den End (EBO_CMA)" userId="32ade95a-e024-4672-952f-5ed8641a9e00" providerId="ADAL" clId="{3BBBE02E-ACD4-4586-9407-5E79BF620DF1}" dt="2026-09-21T21:56:16.469" v="2685" actId="478"/>
           <ac:picMkLst>
             <pc:docMk/>
             <pc:sldMk cId="909146083" sldId="796"/>
@@ -11998,7 +12014,7 @@
                 <a:latin typeface="Verdana" panose="020B0604030504040204" pitchFamily="34" charset="0"/>
                 <a:ea typeface="Verdana" panose="020B0604030504040204" pitchFamily="34" charset="0"/>
               </a:rPr>
-              <a:t>ICT/AI investment and AI-related stock market exposure raise probability of positive growth surprise in whole sample</a:t>
+              <a:t>Only ICT/AI-related trade exposure has an additional effect on positive growth surprise in shock years</a:t>
             </a:r>
           </a:p>
           <a:p>
@@ -12017,7 +12033,7 @@
                 <a:latin typeface="Verdana" panose="020B0604030504040204" pitchFamily="34" charset="0"/>
                 <a:ea typeface="Verdana" panose="020B0604030504040204" pitchFamily="34" charset="0"/>
               </a:rPr>
-              <a:t>ICT/AI-related trade exposure has an additional effect on positive growth surprise in shock years (confirming unconditional tests)</a:t>
+              <a:t>Confirming the inights from the unconditional tests</a:t>
             </a:r>
           </a:p>
           <a:p>
@@ -12053,8 +12069,8 @@
         </p:nvSpPr>
         <p:spPr>
           <a:xfrm>
-            <a:off x="63547" y="5500152"/>
-            <a:ext cx="8748822" cy="430887"/>
+            <a:off x="63547" y="5399568"/>
+            <a:ext cx="8748822" cy="600164"/>
           </a:xfrm>
           <a:prstGeom prst="rect">
             <a:avLst/>
@@ -12076,7 +12092,7 @@
                   <a:srgbClr val="002060"/>
                 </a:solidFill>
               </a:rPr>
-              <a:t>***, **, * indicate 1%, 5%, 10% significance. Analytic-Hessian standard errors. </a:t>
+              <a:t>***, **, * indicate 1%, 5%, 10% significance. Standard errors based on country-clustered sandwich covariance matrix (robust to heteroscedasticity and within country dependence, so countries (clusters) are assumed independent of each other). </a:t>
             </a:r>
             <a:r>
               <a:rPr lang="en-US" sz="1100" noProof="1">
@@ -12096,10 +12112,10 @@
       </p:sp>
       <p:pic>
         <p:nvPicPr>
-          <p:cNvPr id="5" name="Picture 4">
+          <p:cNvPr id="3" name="Picture 2">
             <a:extLst>
               <a:ext uri="{FF2B5EF4-FFF2-40B4-BE49-F238E27FC236}">
-                <a16:creationId xmlns:a16="http://schemas.microsoft.com/office/drawing/2014/main" id="{7AC3EA6C-9FAB-BBCC-B436-3E86CEC18820}"/>
+                <a16:creationId xmlns:a16="http://schemas.microsoft.com/office/drawing/2014/main" id="{A69985F4-E5BB-D076-899F-DF9BEDA0FAA6}"/>
               </a:ext>
             </a:extLst>
           </p:cNvPr>
@@ -12116,8 +12132,8 @@
         </p:blipFill>
         <p:spPr>
           <a:xfrm>
-            <a:off x="222474" y="2800348"/>
-            <a:ext cx="8639806" cy="2453854"/>
+            <a:off x="226030" y="2791922"/>
+            <a:ext cx="8452144" cy="2400555"/>
           </a:xfrm>
           <a:prstGeom prst="rect">
             <a:avLst/>
@@ -12128,10 +12144,10 @@
         <mc:Choice xmlns:a14="http://schemas.microsoft.com/office/drawing/2010/main" Requires="a14">
           <p:sp>
             <p:nvSpPr>
-              <p:cNvPr id="8" name="TextBox 7">
+              <p:cNvPr id="7" name="TextBox 6">
                 <a:extLst>
                   <a:ext uri="{FF2B5EF4-FFF2-40B4-BE49-F238E27FC236}">
-                    <a16:creationId xmlns:a16="http://schemas.microsoft.com/office/drawing/2014/main" id="{5643E4AF-9E9D-0E9E-1516-7D39415B0712}"/>
+                    <a16:creationId xmlns:a16="http://schemas.microsoft.com/office/drawing/2014/main" id="{475F513A-C52D-7D55-1C0D-2A6BC3630CED}"/>
                   </a:ext>
                 </a:extLst>
               </p:cNvPr>
@@ -12140,7 +12156,7 @@
             </p:nvSpPr>
             <p:spPr>
               <a:xfrm>
-                <a:off x="281720" y="3429000"/>
+                <a:off x="281720" y="3413414"/>
                 <a:ext cx="2543776" cy="381515"/>
               </a:xfrm>
               <a:prstGeom prst="rect">
@@ -12226,10 +12242,10 @@
         <mc:Fallback>
           <p:sp>
             <p:nvSpPr>
-              <p:cNvPr id="8" name="TextBox 7">
+              <p:cNvPr id="7" name="TextBox 6">
                 <a:extLst>
                   <a:ext uri="{FF2B5EF4-FFF2-40B4-BE49-F238E27FC236}">
-                    <a16:creationId xmlns:a16="http://schemas.microsoft.com/office/drawing/2014/main" id="{5643E4AF-9E9D-0E9E-1516-7D39415B0712}"/>
+                    <a16:creationId xmlns:a16="http://schemas.microsoft.com/office/drawing/2014/main" id="{475F513A-C52D-7D55-1C0D-2A6BC3630CED}"/>
                   </a:ext>
                 </a:extLst>
               </p:cNvPr>
@@ -12240,7 +12256,7 @@
             </p:nvSpPr>
             <p:spPr>
               <a:xfrm>
-                <a:off x="281720" y="3429000"/>
+                <a:off x="281720" y="3413414"/>
                 <a:ext cx="2543776" cy="381515"/>
               </a:xfrm>
               <a:prstGeom prst="rect">
@@ -12249,7 +12265,7 @@
               <a:blipFill>
                 <a:blip r:embed="rId4"/>
                 <a:stretch>
-                  <a:fillRect l="-1914" t="-9677" b="-20968"/>
+                  <a:fillRect l="-1914" t="-9524" b="-20635"/>
                 </a:stretch>
               </a:blipFill>
             </p:spPr>

--- a/Resilience.pptx
+++ b/Resilience.pptx
@@ -165,7 +165,7 @@
   <pc:docChgLst>
     <pc:chgData name="Jan Willem van den End (EBO_CMA)" userId="32ade95a-e024-4672-952f-5ed8641a9e00" providerId="ADAL" clId="{3BBBE02E-ACD4-4586-9407-5E79BF620DF1}"/>
     <pc:docChg chg="undo redo custSel modSld">
-      <pc:chgData name="Jan Willem van den End (EBO_CMA)" userId="32ade95a-e024-4672-952f-5ed8641a9e00" providerId="ADAL" clId="{3BBBE02E-ACD4-4586-9407-5E79BF620DF1}" dt="2026-09-21T21:58:20.427" v="2750" actId="20577"/>
+      <pc:chgData name="Jan Willem van den End (EBO_CMA)" userId="32ade95a-e024-4672-952f-5ed8641a9e00" providerId="ADAL" clId="{3BBBE02E-ACD4-4586-9407-5E79BF620DF1}" dt="2026-09-22T06:51:42.256" v="2752" actId="20577"/>
       <pc:docMkLst>
         <pc:docMk/>
       </pc:docMkLst>
@@ -393,13 +393,13 @@
         </pc:picChg>
       </pc:sldChg>
       <pc:sldChg chg="modSp mod">
-        <pc:chgData name="Jan Willem van den End (EBO_CMA)" userId="32ade95a-e024-4672-952f-5ed8641a9e00" providerId="ADAL" clId="{3BBBE02E-ACD4-4586-9407-5E79BF620DF1}" dt="2026-09-19T07:48:13.382" v="1791" actId="6549"/>
+        <pc:chgData name="Jan Willem van den End (EBO_CMA)" userId="32ade95a-e024-4672-952f-5ed8641a9e00" providerId="ADAL" clId="{3BBBE02E-ACD4-4586-9407-5E79BF620DF1}" dt="2026-09-22T06:51:42.256" v="2752" actId="20577"/>
         <pc:sldMkLst>
           <pc:docMk/>
           <pc:sldMk cId="165802264" sldId="795"/>
         </pc:sldMkLst>
         <pc:spChg chg="mod">
-          <ac:chgData name="Jan Willem van den End (EBO_CMA)" userId="32ade95a-e024-4672-952f-5ed8641a9e00" providerId="ADAL" clId="{3BBBE02E-ACD4-4586-9407-5E79BF620DF1}" dt="2026-09-19T07:48:13.382" v="1791" actId="6549"/>
+          <ac:chgData name="Jan Willem van den End (EBO_CMA)" userId="32ade95a-e024-4672-952f-5ed8641a9e00" providerId="ADAL" clId="{3BBBE02E-ACD4-4586-9407-5E79BF620DF1}" dt="2026-09-22T06:51:42.256" v="2752" actId="20577"/>
           <ac:spMkLst>
             <pc:docMk/>
             <pc:sldMk cId="165802264" sldId="795"/>
@@ -565,7 +565,7 @@
           <a:p>
             <a:fld id="{C26BBE9F-2231-4498-A3E5-DFB02EDDD594}" type="datetimeFigureOut">
               <a:rPr lang="nl-NL" smtClean="0"/>
-              <a:t>21-9-2026</a:t>
+              <a:t>22-9-2026</a:t>
             </a:fld>
             <a:endParaRPr lang="nl-NL"/>
           </a:p>
@@ -730,7 +730,7 @@
           <a:p>
             <a:fld id="{900D5B51-A3C5-4FC7-8A0D-54EFEFAFACD3}" type="datetimeFigureOut">
               <a:rPr lang="nl-NL" smtClean="0"/>
-              <a:t>21-9-2026</a:t>
+              <a:t>22-9-2026</a:t>
             </a:fld>
             <a:endParaRPr lang="nl-NL"/>
           </a:p>
@@ -8203,13 +8203,10 @@
               <a:buFont typeface="Arial" panose="020B0604020202020204" pitchFamily="34" charset="0"/>
               <a:buChar char="•"/>
             </a:pPr>
-            <a:r>
-              <a:rPr lang="nl-NL" sz="2000" noProof="1">
-                <a:latin typeface="Verdana" panose="020B0604030504040204" pitchFamily="34" charset="0"/>
-                <a:ea typeface="Verdana" panose="020B0604030504040204" pitchFamily="34" charset="0"/>
-              </a:rPr>
-              <a:t>Data for 10 euro area countries, 2011-2025</a:t>
-            </a:r>
+            <a:endParaRPr lang="nl-NL" sz="2000" noProof="1">
+              <a:latin typeface="Verdana" panose="020B0604030504040204" pitchFamily="34" charset="0"/>
+              <a:ea typeface="Verdana" panose="020B0604030504040204" pitchFamily="34" charset="0"/>
+            </a:endParaRPr>
           </a:p>
           <a:p>
             <a:pPr marL="342900" indent="-342900">
@@ -8223,12 +8220,47 @@
               <a:buChar char="•"/>
             </a:pPr>
             <a:r>
+              <a:rPr lang="nl-NL" sz="2000" noProof="1">
+                <a:latin typeface="Verdana" panose="020B0604030504040204" pitchFamily="34" charset="0"/>
+                <a:ea typeface="Verdana" panose="020B0604030504040204" pitchFamily="34" charset="0"/>
+              </a:rPr>
+              <a:t>Data for 10 euro area countries, 2011-2025</a:t>
+            </a:r>
+          </a:p>
+          <a:p>
+            <a:pPr marL="342900" indent="-342900">
+              <a:lnSpc>
+                <a:spcPct val="120000"/>
+              </a:lnSpc>
+              <a:spcAft>
+                <a:spcPts val="1200"/>
+              </a:spcAft>
+              <a:buFont typeface="Arial" panose="020B0604020202020204" pitchFamily="34" charset="0"/>
+              <a:buChar char="•"/>
+            </a:pPr>
+            <a:r>
               <a:rPr lang="en-US" sz="2000" noProof="1">
                 <a:latin typeface="Verdana" panose="020B0604030504040204" pitchFamily="34" charset="0"/>
                 <a:ea typeface="Verdana" panose="020B0604030504040204" pitchFamily="34" charset="0"/>
               </a:rPr>
               <a:t>Eur Com bi-annual forecast vintages</a:t>
             </a:r>
+          </a:p>
+          <a:p>
+            <a:pPr marL="342900" indent="-342900">
+              <a:lnSpc>
+                <a:spcPct val="120000"/>
+              </a:lnSpc>
+              <a:spcAft>
+                <a:spcPts val="1200"/>
+              </a:spcAft>
+              <a:buFont typeface="Arial" panose="020B0604020202020204" pitchFamily="34" charset="0"/>
+              <a:buChar char="•"/>
+            </a:pPr>
+            <a:endParaRPr lang="nl-NL" sz="2000" noProof="1">
+              <a:latin typeface="Verdana" panose="020B0604030504040204" pitchFamily="34" charset="0"/>
+              <a:ea typeface="Verdana" panose="020B0604030504040204" pitchFamily="34" charset="0"/>
+            </a:endParaRPr>
           </a:p>
           <a:p>
             <a:pPr marL="342900" indent="-342900">
@@ -12140,8 +12172,8 @@
           </a:prstGeom>
         </p:spPr>
       </p:pic>
-      <mc:AlternateContent xmlns:mc="http://schemas.openxmlformats.org/markup-compatibility/2006">
-        <mc:Choice xmlns:a14="http://schemas.microsoft.com/office/drawing/2010/main" Requires="a14">
+      <mc:AlternateContent xmlns:mc="http://schemas.openxmlformats.org/markup-compatibility/2006" xmlns:a14="http://schemas.microsoft.com/office/drawing/2010/main">
+        <mc:Choice Requires="a14">
           <p:sp>
             <p:nvSpPr>
               <p:cNvPr id="7" name="TextBox 6">
@@ -12239,7 +12271,7 @@
             </p:txBody>
           </p:sp>
         </mc:Choice>
-        <mc:Fallback>
+        <mc:Fallback xmlns="">
           <p:sp>
             <p:nvSpPr>
               <p:cNvPr id="7" name="TextBox 6">

--- a/Resilience.pptx
+++ b/Resilience.pptx
@@ -6,10 +6,10 @@
     <p:sldMasterId id="2147483708" r:id="rId2"/>
   </p:sldMasterIdLst>
   <p:notesMasterIdLst>
-    <p:notesMasterId r:id="rId17"/>
+    <p:notesMasterId r:id="rId18"/>
   </p:notesMasterIdLst>
   <p:handoutMasterIdLst>
-    <p:handoutMasterId r:id="rId18"/>
+    <p:handoutMasterId r:id="rId19"/>
   </p:handoutMasterIdLst>
   <p:sldIdLst>
     <p:sldId id="781" r:id="rId3"/>
@@ -26,6 +26,7 @@
     <p:sldId id="782" r:id="rId14"/>
     <p:sldId id="791" r:id="rId15"/>
     <p:sldId id="794" r:id="rId16"/>
+    <p:sldId id="797" r:id="rId17"/>
   </p:sldIdLst>
   <p:sldSz cx="9144000" cy="6858000" type="screen4x3"/>
   <p:notesSz cx="6805613" cy="9944100"/>
@@ -155,7 +156,7 @@
 <file path=ppt/revisionInfo.xml><?xml version="1.0" encoding="utf-8"?>
 <p1510:revInfo xmlns:a="http://schemas.openxmlformats.org/drawingml/2006/main" xmlns:r="http://schemas.openxmlformats.org/officeDocument/2006/relationships" xmlns:p1510="http://schemas.microsoft.com/office/powerpoint/2015/10/main">
   <p1510:revLst>
-    <p1510:client id="{13B43BEF-9B9B-431D-9308-0B2B126B7992}" v="14" dt="2026-09-21T21:56:53.956"/>
+    <p1510:client id="{13B43BEF-9B9B-431D-9308-0B2B126B7992}" v="62" dt="2026-09-23T10:25:06.968"/>
   </p1510:revLst>
 </p1510:revInfo>
 </file>
@@ -164,8 +165,8 @@
 <pc:chgInfo xmlns:a="http://schemas.openxmlformats.org/drawingml/2006/main" xmlns:r="http://schemas.openxmlformats.org/officeDocument/2006/relationships" xmlns:ac="http://schemas.microsoft.com/office/drawing/2013/main/command" xmlns:pc="http://schemas.microsoft.com/office/powerpoint/2013/main/command">
   <pc:docChgLst>
     <pc:chgData name="Jan Willem van den End (EBO_CMA)" userId="32ade95a-e024-4672-952f-5ed8641a9e00" providerId="ADAL" clId="{3BBBE02E-ACD4-4586-9407-5E79BF620DF1}"/>
-    <pc:docChg chg="undo redo custSel modSld">
-      <pc:chgData name="Jan Willem van den End (EBO_CMA)" userId="32ade95a-e024-4672-952f-5ed8641a9e00" providerId="ADAL" clId="{3BBBE02E-ACD4-4586-9407-5E79BF620DF1}" dt="2026-09-22T06:51:42.256" v="2752" actId="20577"/>
+    <pc:docChg chg="undo redo custSel addSld modSld">
+      <pc:chgData name="Jan Willem van den End (EBO_CMA)" userId="32ade95a-e024-4672-952f-5ed8641a9e00" providerId="ADAL" clId="{3BBBE02E-ACD4-4586-9407-5E79BF620DF1}" dt="2026-09-23T10:27:23.811" v="4052" actId="20577"/>
       <pc:docMkLst>
         <pc:docMk/>
       </pc:docMkLst>
@@ -200,45 +201,45 @@
         </pc:spChg>
       </pc:sldChg>
       <pc:sldChg chg="addSp delSp modSp mod">
-        <pc:chgData name="Jan Willem van den End (EBO_CMA)" userId="32ade95a-e024-4672-952f-5ed8641a9e00" providerId="ADAL" clId="{3BBBE02E-ACD4-4586-9407-5E79BF620DF1}" dt="2026-09-21T12:52:28.546" v="2481" actId="1076"/>
+        <pc:chgData name="Jan Willem van den End (EBO_CMA)" userId="32ade95a-e024-4672-952f-5ed8641a9e00" providerId="ADAL" clId="{3BBBE02E-ACD4-4586-9407-5E79BF620DF1}" dt="2026-09-23T09:47:54.527" v="3772" actId="1035"/>
         <pc:sldMkLst>
           <pc:docMk/>
           <pc:sldMk cId="2428101549" sldId="784"/>
         </pc:sldMkLst>
         <pc:spChg chg="mod">
-          <ac:chgData name="Jan Willem van den End (EBO_CMA)" userId="32ade95a-e024-4672-952f-5ed8641a9e00" providerId="ADAL" clId="{3BBBE02E-ACD4-4586-9407-5E79BF620DF1}" dt="2026-09-20T19:40:36.825" v="2409" actId="14100"/>
+          <ac:chgData name="Jan Willem van den End (EBO_CMA)" userId="32ade95a-e024-4672-952f-5ed8641a9e00" providerId="ADAL" clId="{3BBBE02E-ACD4-4586-9407-5E79BF620DF1}" dt="2026-09-23T09:47:31.463" v="3757" actId="20577"/>
           <ac:spMkLst>
             <pc:docMk/>
             <pc:sldMk cId="2428101549" sldId="784"/>
             <ac:spMk id="6" creationId="{613E110F-8AEE-A02C-2032-1F07DE944DEB}"/>
           </ac:spMkLst>
         </pc:spChg>
-        <pc:picChg chg="del mod">
-          <ac:chgData name="Jan Willem van den End (EBO_CMA)" userId="32ade95a-e024-4672-952f-5ed8641a9e00" providerId="ADAL" clId="{3BBBE02E-ACD4-4586-9407-5E79BF620DF1}" dt="2026-09-21T12:52:06.108" v="2474" actId="478"/>
+        <pc:picChg chg="mod">
+          <ac:chgData name="Jan Willem van den End (EBO_CMA)" userId="32ade95a-e024-4672-952f-5ed8641a9e00" providerId="ADAL" clId="{3BBBE02E-ACD4-4586-9407-5E79BF620DF1}" dt="2026-09-23T09:47:46.869" v="3758" actId="14100"/>
           <ac:picMkLst>
             <pc:docMk/>
             <pc:sldMk cId="2428101549" sldId="784"/>
-            <ac:picMk id="3" creationId="{1D1467E3-A484-4163-851C-187525BE7907}"/>
+            <ac:picMk id="3" creationId="{3AEC0293-BD5F-607E-F810-8030B0619792}"/>
           </ac:picMkLst>
         </pc:picChg>
-        <pc:picChg chg="mod">
-          <ac:chgData name="Jan Willem van den End (EBO_CMA)" userId="32ade95a-e024-4672-952f-5ed8641a9e00" providerId="ADAL" clId="{3BBBE02E-ACD4-4586-9407-5E79BF620DF1}" dt="2026-09-21T12:52:28.546" v="2481" actId="1076"/>
+        <pc:picChg chg="del mod">
+          <ac:chgData name="Jan Willem van den End (EBO_CMA)" userId="32ade95a-e024-4672-952f-5ed8641a9e00" providerId="ADAL" clId="{3BBBE02E-ACD4-4586-9407-5E79BF620DF1}" dt="2026-09-23T09:45:48.661" v="3726" actId="478"/>
           <ac:picMkLst>
             <pc:docMk/>
             <pc:sldMk cId="2428101549" sldId="784"/>
             <ac:picMk id="4" creationId="{6ECE1DC5-FB80-BD91-88E9-814F7F9FA66B}"/>
           </ac:picMkLst>
         </pc:picChg>
-        <pc:picChg chg="del">
-          <ac:chgData name="Jan Willem van den End (EBO_CMA)" userId="32ade95a-e024-4672-952f-5ed8641a9e00" providerId="ADAL" clId="{3BBBE02E-ACD4-4586-9407-5E79BF620DF1}" dt="2026-09-21T12:48:54.267" v="2454" actId="478"/>
+        <pc:picChg chg="mod">
+          <ac:chgData name="Jan Willem van den End (EBO_CMA)" userId="32ade95a-e024-4672-952f-5ed8641a9e00" providerId="ADAL" clId="{3BBBE02E-ACD4-4586-9407-5E79BF620DF1}" dt="2026-09-23T09:47:54.527" v="3772" actId="1035"/>
           <ac:picMkLst>
             <pc:docMk/>
             <pc:sldMk cId="2428101549" sldId="784"/>
-            <ac:picMk id="10" creationId="{477F3FA9-013F-F0A8-95C8-DBD688C3744A}"/>
+            <ac:picMk id="7" creationId="{339ECCAE-ABF5-C0A3-D3B2-D90FA8CF9B40}"/>
           </ac:picMkLst>
         </pc:picChg>
         <pc:picChg chg="add del mod">
-          <ac:chgData name="Jan Willem van den End (EBO_CMA)" userId="32ade95a-e024-4672-952f-5ed8641a9e00" providerId="ADAL" clId="{3BBBE02E-ACD4-4586-9407-5E79BF620DF1}" dt="2026-09-21T12:49:28.867" v="2461" actId="1076"/>
+          <ac:chgData name="Jan Willem van den End (EBO_CMA)" userId="32ade95a-e024-4672-952f-5ed8641a9e00" providerId="ADAL" clId="{3BBBE02E-ACD4-4586-9407-5E79BF620DF1}" dt="2026-09-23T09:46:14.259" v="3731" actId="478"/>
           <ac:picMkLst>
             <pc:docMk/>
             <pc:sldMk cId="2428101549" sldId="784"/>
@@ -284,8 +285,8 @@
           </ac:spMkLst>
         </pc:spChg>
       </pc:sldChg>
-      <pc:sldChg chg="modSp mod">
-        <pc:chgData name="Jan Willem van den End (EBO_CMA)" userId="32ade95a-e024-4672-952f-5ed8641a9e00" providerId="ADAL" clId="{3BBBE02E-ACD4-4586-9407-5E79BF620DF1}" dt="2026-09-20T19:38:59.954" v="2404" actId="20577"/>
+      <pc:sldChg chg="delSp modSp mod">
+        <pc:chgData name="Jan Willem van den End (EBO_CMA)" userId="32ade95a-e024-4672-952f-5ed8641a9e00" providerId="ADAL" clId="{3BBBE02E-ACD4-4586-9407-5E79BF620DF1}" dt="2026-09-23T10:25:55.343" v="4048" actId="6549"/>
         <pc:sldMkLst>
           <pc:docMk/>
           <pc:sldMk cId="374833015" sldId="791"/>
@@ -299,7 +300,7 @@
           </ac:spMkLst>
         </pc:spChg>
         <pc:spChg chg="mod">
-          <ac:chgData name="Jan Willem van den End (EBO_CMA)" userId="32ade95a-e024-4672-952f-5ed8641a9e00" providerId="ADAL" clId="{3BBBE02E-ACD4-4586-9407-5E79BF620DF1}" dt="2026-09-20T19:38:59.954" v="2404" actId="20577"/>
+          <ac:chgData name="Jan Willem van den End (EBO_CMA)" userId="32ade95a-e024-4672-952f-5ed8641a9e00" providerId="ADAL" clId="{3BBBE02E-ACD4-4586-9407-5E79BF620DF1}" dt="2026-09-23T10:25:55.343" v="4048" actId="6549"/>
           <ac:spMkLst>
             <pc:docMk/>
             <pc:sldMk cId="374833015" sldId="791"/>
@@ -307,7 +308,15 @@
           </ac:spMkLst>
         </pc:spChg>
         <pc:picChg chg="mod">
-          <ac:chgData name="Jan Willem van den End (EBO_CMA)" userId="32ade95a-e024-4672-952f-5ed8641a9e00" providerId="ADAL" clId="{3BBBE02E-ACD4-4586-9407-5E79BF620DF1}" dt="2026-09-20T19:31:53.066" v="2062" actId="1076"/>
+          <ac:chgData name="Jan Willem van den End (EBO_CMA)" userId="32ade95a-e024-4672-952f-5ed8641a9e00" providerId="ADAL" clId="{3BBBE02E-ACD4-4586-9407-5E79BF620DF1}" dt="2026-09-23T10:25:19.998" v="4015" actId="1076"/>
+          <ac:picMkLst>
+            <pc:docMk/>
+            <pc:sldMk cId="374833015" sldId="791"/>
+            <ac:picMk id="3" creationId="{8A7EFEE7-907A-EF9C-42CF-70E7257DAC35}"/>
+          </ac:picMkLst>
+        </pc:picChg>
+        <pc:picChg chg="del mod">
+          <ac:chgData name="Jan Willem van den End (EBO_CMA)" userId="32ade95a-e024-4672-952f-5ed8641a9e00" providerId="ADAL" clId="{3BBBE02E-ACD4-4586-9407-5E79BF620DF1}" dt="2026-09-23T10:25:00.997" v="4009" actId="478"/>
           <ac:picMkLst>
             <pc:docMk/>
             <pc:sldMk cId="374833015" sldId="791"/>
@@ -316,44 +325,60 @@
         </pc:picChg>
       </pc:sldChg>
       <pc:sldChg chg="addSp delSp modSp mod">
-        <pc:chgData name="Jan Willem van den End (EBO_CMA)" userId="32ade95a-e024-4672-952f-5ed8641a9e00" providerId="ADAL" clId="{3BBBE02E-ACD4-4586-9407-5E79BF620DF1}" dt="2026-09-21T12:51:25.288" v="2473" actId="1038"/>
+        <pc:chgData name="Jan Willem van den End (EBO_CMA)" userId="32ade95a-e024-4672-952f-5ed8641a9e00" providerId="ADAL" clId="{3BBBE02E-ACD4-4586-9407-5E79BF620DF1}" dt="2026-09-23T09:52:20.284" v="3869" actId="6549"/>
         <pc:sldMkLst>
           <pc:docMk/>
           <pc:sldMk cId="2304846322" sldId="792"/>
         </pc:sldMkLst>
         <pc:spChg chg="mod">
-          <ac:chgData name="Jan Willem van den End (EBO_CMA)" userId="32ade95a-e024-4672-952f-5ed8641a9e00" providerId="ADAL" clId="{3BBBE02E-ACD4-4586-9407-5E79BF620DF1}" dt="2026-09-20T19:41:39.336" v="2429" actId="20577"/>
+          <ac:chgData name="Jan Willem van den End (EBO_CMA)" userId="32ade95a-e024-4672-952f-5ed8641a9e00" providerId="ADAL" clId="{3BBBE02E-ACD4-4586-9407-5E79BF620DF1}" dt="2026-09-23T09:52:20.284" v="3869" actId="6549"/>
           <ac:spMkLst>
             <pc:docMk/>
             <pc:sldMk cId="2304846322" sldId="792"/>
             <ac:spMk id="6" creationId="{CF9708F7-32AE-5645-3159-CE1174AB0729}"/>
           </ac:spMkLst>
         </pc:spChg>
-        <pc:picChg chg="del">
-          <ac:chgData name="Jan Willem van den End (EBO_CMA)" userId="32ade95a-e024-4672-952f-5ed8641a9e00" providerId="ADAL" clId="{3BBBE02E-ACD4-4586-9407-5E79BF620DF1}" dt="2026-09-21T12:51:02.236" v="2462" actId="478"/>
+        <pc:picChg chg="mod">
+          <ac:chgData name="Jan Willem van den End (EBO_CMA)" userId="32ade95a-e024-4672-952f-5ed8641a9e00" providerId="ADAL" clId="{3BBBE02E-ACD4-4586-9407-5E79BF620DF1}" dt="2026-09-23T09:49:41.879" v="3789" actId="1038"/>
           <ac:picMkLst>
             <pc:docMk/>
             <pc:sldMk cId="2304846322" sldId="792"/>
-            <ac:picMk id="3" creationId="{D13E89F4-0265-ABF8-064D-EE79C4DCAA71}"/>
+            <ac:picMk id="3" creationId="{FD8FEF3A-B9D3-C258-3FD3-115594E60806}"/>
           </ac:picMkLst>
         </pc:picChg>
-        <pc:picChg chg="mod">
-          <ac:chgData name="Jan Willem van den End (EBO_CMA)" userId="32ade95a-e024-4672-952f-5ed8641a9e00" providerId="ADAL" clId="{3BBBE02E-ACD4-4586-9407-5E79BF620DF1}" dt="2026-09-21T12:51:25.288" v="2473" actId="1038"/>
+        <pc:picChg chg="del">
+          <ac:chgData name="Jan Willem van den End (EBO_CMA)" userId="32ade95a-e024-4672-952f-5ed8641a9e00" providerId="ADAL" clId="{3BBBE02E-ACD4-4586-9407-5E79BF620DF1}" dt="2026-09-23T09:49:01.275" v="3777" actId="478"/>
+          <ac:picMkLst>
+            <pc:docMk/>
+            <pc:sldMk cId="2304846322" sldId="792"/>
+            <ac:picMk id="4" creationId="{551404D6-F9AD-BB52-B168-06741BAA0097}"/>
+          </ac:picMkLst>
+        </pc:picChg>
+        <pc:picChg chg="del mod">
+          <ac:chgData name="Jan Willem van den End (EBO_CMA)" userId="32ade95a-e024-4672-952f-5ed8641a9e00" providerId="ADAL" clId="{3BBBE02E-ACD4-4586-9407-5E79BF620DF1}" dt="2026-09-23T09:48:45.969" v="3773" actId="478"/>
           <ac:picMkLst>
             <pc:docMk/>
             <pc:sldMk cId="2304846322" sldId="792"/>
             <ac:picMk id="7" creationId="{5A97EF09-CBBC-6BFB-7A2B-C80CB9B80409}"/>
           </ac:picMkLst>
         </pc:picChg>
+        <pc:picChg chg="mod">
+          <ac:chgData name="Jan Willem van den End (EBO_CMA)" userId="32ade95a-e024-4672-952f-5ed8641a9e00" providerId="ADAL" clId="{3BBBE02E-ACD4-4586-9407-5E79BF620DF1}" dt="2026-09-23T09:49:48.959" v="3790" actId="14100"/>
+          <ac:picMkLst>
+            <pc:docMk/>
+            <pc:sldMk cId="2304846322" sldId="792"/>
+            <ac:picMk id="9" creationId="{53094AB5-29A5-390F-D793-10B141A69812}"/>
+          </ac:picMkLst>
+        </pc:picChg>
       </pc:sldChg>
-      <pc:sldChg chg="modSp mod">
-        <pc:chgData name="Jan Willem van den End (EBO_CMA)" userId="32ade95a-e024-4672-952f-5ed8641a9e00" providerId="ADAL" clId="{3BBBE02E-ACD4-4586-9407-5E79BF620DF1}" dt="2026-09-19T07:46:22.115" v="1766" actId="114"/>
+      <pc:sldChg chg="modSp mod modNotesTx">
+        <pc:chgData name="Jan Willem van den End (EBO_CMA)" userId="32ade95a-e024-4672-952f-5ed8641a9e00" providerId="ADAL" clId="{3BBBE02E-ACD4-4586-9407-5E79BF620DF1}" dt="2026-09-23T10:27:23.811" v="4052" actId="20577"/>
         <pc:sldMkLst>
           <pc:docMk/>
           <pc:sldMk cId="515665883" sldId="793"/>
         </pc:sldMkLst>
         <pc:spChg chg="mod">
-          <ac:chgData name="Jan Willem van den End (EBO_CMA)" userId="32ade95a-e024-4672-952f-5ed8641a9e00" providerId="ADAL" clId="{3BBBE02E-ACD4-4586-9407-5E79BF620DF1}" dt="2026-09-19T07:46:22.115" v="1766" actId="114"/>
+          <ac:chgData name="Jan Willem van den End (EBO_CMA)" userId="32ade95a-e024-4672-952f-5ed8641a9e00" providerId="ADAL" clId="{3BBBE02E-ACD4-4586-9407-5E79BF620DF1}" dt="2026-09-23T09:11:21.197" v="2920" actId="207"/>
           <ac:spMkLst>
             <pc:docMk/>
             <pc:sldMk cId="515665883" sldId="793"/>
@@ -361,22 +386,22 @@
           </ac:spMkLst>
         </pc:spChg>
       </pc:sldChg>
-      <pc:sldChg chg="modSp mod">
-        <pc:chgData name="Jan Willem van den End (EBO_CMA)" userId="32ade95a-e024-4672-952f-5ed8641a9e00" providerId="ADAL" clId="{3BBBE02E-ACD4-4586-9407-5E79BF620DF1}" dt="2026-09-20T19:38:25.902" v="2399" actId="20577"/>
+      <pc:sldChg chg="delSp modSp mod">
+        <pc:chgData name="Jan Willem van den End (EBO_CMA)" userId="32ade95a-e024-4672-952f-5ed8641a9e00" providerId="ADAL" clId="{3BBBE02E-ACD4-4586-9407-5E79BF620DF1}" dt="2026-09-23T10:17:02.645" v="3986" actId="1076"/>
         <pc:sldMkLst>
           <pc:docMk/>
           <pc:sldMk cId="240743824" sldId="794"/>
         </pc:sldMkLst>
         <pc:spChg chg="mod">
-          <ac:chgData name="Jan Willem van den End (EBO_CMA)" userId="32ade95a-e024-4672-952f-5ed8641a9e00" providerId="ADAL" clId="{3BBBE02E-ACD4-4586-9407-5E79BF620DF1}" dt="2026-09-20T19:38:25.902" v="2399" actId="20577"/>
+          <ac:chgData name="Jan Willem van den End (EBO_CMA)" userId="32ade95a-e024-4672-952f-5ed8641a9e00" providerId="ADAL" clId="{3BBBE02E-ACD4-4586-9407-5E79BF620DF1}" dt="2026-09-23T10:17:02.645" v="3986" actId="1076"/>
           <ac:spMkLst>
             <pc:docMk/>
             <pc:sldMk cId="240743824" sldId="794"/>
             <ac:spMk id="11" creationId="{D6974398-2614-1310-0782-A3E80B13A2FD}"/>
           </ac:spMkLst>
         </pc:spChg>
-        <pc:picChg chg="mod">
-          <ac:chgData name="Jan Willem van den End (EBO_CMA)" userId="32ade95a-e024-4672-952f-5ed8641a9e00" providerId="ADAL" clId="{3BBBE02E-ACD4-4586-9407-5E79BF620DF1}" dt="2026-09-20T19:30:56.811" v="2009" actId="1076"/>
+        <pc:picChg chg="del mod">
+          <ac:chgData name="Jan Willem van den End (EBO_CMA)" userId="32ade95a-e024-4672-952f-5ed8641a9e00" providerId="ADAL" clId="{3BBBE02E-ACD4-4586-9407-5E79BF620DF1}" dt="2026-09-23T10:16:17.670" v="3969" actId="478"/>
           <ac:picMkLst>
             <pc:docMk/>
             <pc:sldMk cId="240743824" sldId="794"/>
@@ -389,6 +414,14 @@
             <pc:docMk/>
             <pc:sldMk cId="240743824" sldId="794"/>
             <ac:picMk id="4" creationId="{D752BB6B-84D3-1A02-4BE3-8EAA21B12319}"/>
+          </ac:picMkLst>
+        </pc:picChg>
+        <pc:picChg chg="mod">
+          <ac:chgData name="Jan Willem van den End (EBO_CMA)" userId="32ade95a-e024-4672-952f-5ed8641a9e00" providerId="ADAL" clId="{3BBBE02E-ACD4-4586-9407-5E79BF620DF1}" dt="2026-09-23T10:16:30.622" v="3973" actId="1076"/>
+          <ac:picMkLst>
+            <pc:docMk/>
+            <pc:sldMk cId="240743824" sldId="794"/>
+            <ac:picMk id="5" creationId="{7596D83C-A172-D741-78FB-EBEC12FF1632}"/>
           </ac:picMkLst>
         </pc:picChg>
       </pc:sldChg>
@@ -408,37 +441,29 @@
         </pc:spChg>
       </pc:sldChg>
       <pc:sldChg chg="addSp delSp modSp mod">
-        <pc:chgData name="Jan Willem van den End (EBO_CMA)" userId="32ade95a-e024-4672-952f-5ed8641a9e00" providerId="ADAL" clId="{3BBBE02E-ACD4-4586-9407-5E79BF620DF1}" dt="2026-09-21T21:58:20.427" v="2750" actId="20577"/>
+        <pc:chgData name="Jan Willem van den End (EBO_CMA)" userId="32ade95a-e024-4672-952f-5ed8641a9e00" providerId="ADAL" clId="{3BBBE02E-ACD4-4586-9407-5E79BF620DF1}" dt="2026-09-23T09:55:54.127" v="3964" actId="20577"/>
         <pc:sldMkLst>
           <pc:docMk/>
           <pc:sldMk cId="909146083" sldId="796"/>
         </pc:sldMkLst>
         <pc:spChg chg="mod">
-          <ac:chgData name="Jan Willem van den End (EBO_CMA)" userId="32ade95a-e024-4672-952f-5ed8641a9e00" providerId="ADAL" clId="{3BBBE02E-ACD4-4586-9407-5E79BF620DF1}" dt="2026-09-21T21:58:20.427" v="2750" actId="20577"/>
+          <ac:chgData name="Jan Willem van den End (EBO_CMA)" userId="32ade95a-e024-4672-952f-5ed8641a9e00" providerId="ADAL" clId="{3BBBE02E-ACD4-4586-9407-5E79BF620DF1}" dt="2026-09-23T09:40:37.381" v="3725" actId="1076"/>
           <ac:spMkLst>
             <pc:docMk/>
             <pc:sldMk cId="909146083" sldId="796"/>
             <ac:spMk id="2" creationId="{9D7DFCD1-CA74-2C76-7A49-94B41E557F74}"/>
           </ac:spMkLst>
         </pc:spChg>
-        <pc:spChg chg="add del mod">
-          <ac:chgData name="Jan Willem van den End (EBO_CMA)" userId="32ade95a-e024-4672-952f-5ed8641a9e00" providerId="ADAL" clId="{3BBBE02E-ACD4-4586-9407-5E79BF620DF1}" dt="2026-09-21T12:54:46.779" v="2490" actId="21"/>
-          <ac:spMkLst>
-            <pc:docMk/>
-            <pc:sldMk cId="909146083" sldId="796"/>
-            <ac:spMk id="3" creationId="{23C9BFD4-AA2F-C8EE-A3EB-D5C9BACC14F1}"/>
-          </ac:spMkLst>
-        </pc:spChg>
         <pc:spChg chg="add mod">
-          <ac:chgData name="Jan Willem van den End (EBO_CMA)" userId="32ade95a-e024-4672-952f-5ed8641a9e00" providerId="ADAL" clId="{3BBBE02E-ACD4-4586-9407-5E79BF620DF1}" dt="2026-09-21T21:58:09.680" v="2739" actId="1076"/>
+          <ac:chgData name="Jan Willem van den End (EBO_CMA)" userId="32ade95a-e024-4672-952f-5ed8641a9e00" providerId="ADAL" clId="{3BBBE02E-ACD4-4586-9407-5E79BF620DF1}" dt="2026-09-23T09:55:54.127" v="3964" actId="20577"/>
           <ac:spMkLst>
             <pc:docMk/>
             <pc:sldMk cId="909146083" sldId="796"/>
             <ac:spMk id="6" creationId="{4ED6076C-5ED2-F560-9ECC-68A359BFC0CA}"/>
           </ac:spMkLst>
         </pc:spChg>
-        <pc:spChg chg="add mod">
-          <ac:chgData name="Jan Willem van den End (EBO_CMA)" userId="32ade95a-e024-4672-952f-5ed8641a9e00" providerId="ADAL" clId="{3BBBE02E-ACD4-4586-9407-5E79BF620DF1}" dt="2026-09-21T21:58:09.680" v="2739" actId="1076"/>
+        <pc:spChg chg="add del mod">
+          <ac:chgData name="Jan Willem van den End (EBO_CMA)" userId="32ade95a-e024-4672-952f-5ed8641a9e00" providerId="ADAL" clId="{3BBBE02E-ACD4-4586-9407-5E79BF620DF1}" dt="2026-09-23T09:37:31.990" v="3628" actId="21"/>
           <ac:spMkLst>
             <pc:docMk/>
             <pc:sldMk cId="909146083" sldId="796"/>
@@ -446,37 +471,60 @@
           </ac:spMkLst>
         </pc:spChg>
         <pc:spChg chg="add del mod">
-          <ac:chgData name="Jan Willem van den End (EBO_CMA)" userId="32ade95a-e024-4672-952f-5ed8641a9e00" providerId="ADAL" clId="{3BBBE02E-ACD4-4586-9407-5E79BF620DF1}" dt="2026-09-21T21:57:05.242" v="2688" actId="21"/>
+          <ac:chgData name="Jan Willem van den End (EBO_CMA)" userId="32ade95a-e024-4672-952f-5ed8641a9e00" providerId="ADAL" clId="{3BBBE02E-ACD4-4586-9407-5E79BF620DF1}" dt="2026-09-23T09:53:48.056" v="3871" actId="478"/>
           <ac:spMkLst>
             <pc:docMk/>
             <pc:sldMk cId="909146083" sldId="796"/>
-            <ac:spMk id="8" creationId="{5643E4AF-9E9D-0E9E-1516-7D39415B0712}"/>
+            <ac:spMk id="8" creationId="{82858DA4-8DA2-B74F-6A14-AA63B019E87D}"/>
           </ac:spMkLst>
         </pc:spChg>
-        <pc:picChg chg="mod">
-          <ac:chgData name="Jan Willem van den End (EBO_CMA)" userId="32ade95a-e024-4672-952f-5ed8641a9e00" providerId="ADAL" clId="{3BBBE02E-ACD4-4586-9407-5E79BF620DF1}" dt="2026-09-21T21:58:09.680" v="2739" actId="1076"/>
+        <pc:picChg chg="del mod">
+          <ac:chgData name="Jan Willem van den End (EBO_CMA)" userId="32ade95a-e024-4672-952f-5ed8641a9e00" providerId="ADAL" clId="{3BBBE02E-ACD4-4586-9407-5E79BF620DF1}" dt="2026-09-23T09:37:00.284" v="3624" actId="478"/>
           <ac:picMkLst>
             <pc:docMk/>
             <pc:sldMk cId="909146083" sldId="796"/>
             <ac:picMk id="3" creationId="{A69985F4-E5BB-D076-899F-DF9BEDA0FAA6}"/>
           </ac:picMkLst>
         </pc:picChg>
-        <pc:picChg chg="add del mod">
-          <ac:chgData name="Jan Willem van den End (EBO_CMA)" userId="32ade95a-e024-4672-952f-5ed8641a9e00" providerId="ADAL" clId="{3BBBE02E-ACD4-4586-9407-5E79BF620DF1}" dt="2026-09-21T12:54:28.516" v="2485" actId="478"/>
+        <pc:picChg chg="del mod">
+          <ac:chgData name="Jan Willem van den End (EBO_CMA)" userId="32ade95a-e024-4672-952f-5ed8641a9e00" providerId="ADAL" clId="{3BBBE02E-ACD4-4586-9407-5E79BF620DF1}" dt="2026-09-23T09:53:44.862" v="3870" actId="478"/>
           <ac:picMkLst>
             <pc:docMk/>
             <pc:sldMk cId="909146083" sldId="796"/>
-            <ac:picMk id="4" creationId="{FD6B8E7D-29E9-A720-3479-9CC57D8735B6}"/>
+            <ac:picMk id="4" creationId="{77BBDB3E-D62F-2AA7-F4F9-963882708640}"/>
           </ac:picMkLst>
         </pc:picChg>
-        <pc:picChg chg="del mod">
-          <ac:chgData name="Jan Willem van den End (EBO_CMA)" userId="32ade95a-e024-4672-952f-5ed8641a9e00" providerId="ADAL" clId="{3BBBE02E-ACD4-4586-9407-5E79BF620DF1}" dt="2026-09-21T21:56:16.469" v="2685" actId="478"/>
+        <pc:picChg chg="mod">
+          <ac:chgData name="Jan Willem van den End (EBO_CMA)" userId="32ade95a-e024-4672-952f-5ed8641a9e00" providerId="ADAL" clId="{3BBBE02E-ACD4-4586-9407-5E79BF620DF1}" dt="2026-09-23T09:54:04.654" v="3873" actId="1076"/>
           <ac:picMkLst>
             <pc:docMk/>
             <pc:sldMk cId="909146083" sldId="796"/>
-            <ac:picMk id="5" creationId="{7AC3EA6C-9FAB-BBCC-B436-3E86CEC18820}"/>
+            <ac:picMk id="10" creationId="{C9A895D5-4DBA-4775-3A49-739C761362E5}"/>
           </ac:picMkLst>
         </pc:picChg>
+      </pc:sldChg>
+      <pc:sldChg chg="modSp add mod">
+        <pc:chgData name="Jan Willem van den End (EBO_CMA)" userId="32ade95a-e024-4672-952f-5ed8641a9e00" providerId="ADAL" clId="{3BBBE02E-ACD4-4586-9407-5E79BF620DF1}" dt="2026-09-23T09:57:05.545" v="3968" actId="14100"/>
+        <pc:sldMkLst>
+          <pc:docMk/>
+          <pc:sldMk cId="341592472" sldId="797"/>
+        </pc:sldMkLst>
+        <pc:spChg chg="mod">
+          <ac:chgData name="Jan Willem van den End (EBO_CMA)" userId="32ade95a-e024-4672-952f-5ed8641a9e00" providerId="ADAL" clId="{3BBBE02E-ACD4-4586-9407-5E79BF620DF1}" dt="2026-09-23T09:57:05.545" v="3968" actId="14100"/>
+          <ac:spMkLst>
+            <pc:docMk/>
+            <pc:sldMk cId="341592472" sldId="797"/>
+            <ac:spMk id="2" creationId="{69505807-7DB6-66DD-D0C3-991E02849C08}"/>
+          </ac:spMkLst>
+        </pc:spChg>
+        <pc:spChg chg="mod">
+          <ac:chgData name="Jan Willem van den End (EBO_CMA)" userId="32ade95a-e024-4672-952f-5ed8641a9e00" providerId="ADAL" clId="{3BBBE02E-ACD4-4586-9407-5E79BF620DF1}" dt="2026-09-23T09:32:59.846" v="3495" actId="6549"/>
+          <ac:spMkLst>
+            <pc:docMk/>
+            <pc:sldMk cId="341592472" sldId="797"/>
+            <ac:spMk id="9" creationId="{03204D0B-CF7E-0BFC-4F0F-962010862E03}"/>
+          </ac:spMkLst>
+        </pc:spChg>
       </pc:sldChg>
     </pc:docChg>
   </pc:docChgLst>
@@ -565,7 +613,7 @@
           <a:p>
             <a:fld id="{C26BBE9F-2231-4498-A3E5-DFB02EDDD594}" type="datetimeFigureOut">
               <a:rPr lang="nl-NL" smtClean="0"/>
-              <a:t>22-9-2026</a:t>
+              <a:t>23-9-2026</a:t>
             </a:fld>
             <a:endParaRPr lang="nl-NL"/>
           </a:p>
@@ -730,7 +778,7 @@
           <a:p>
             <a:fld id="{900D5B51-A3C5-4FC7-8A0D-54EFEFAFACD3}" type="datetimeFigureOut">
               <a:rPr lang="nl-NL" smtClean="0"/>
-              <a:t>22-9-2026</a:t>
+              <a:t>23-9-2026</a:t>
             </a:fld>
             <a:endParaRPr lang="nl-NL"/>
           </a:p>
@@ -1830,6 +1878,185 @@
 </p:notes>
 </file>
 
+<file path=ppt/notesSlides/notesSlide15.xml><?xml version="1.0" encoding="utf-8"?>
+<p:notes xmlns:a="http://schemas.openxmlformats.org/drawingml/2006/main" xmlns:r="http://schemas.openxmlformats.org/officeDocument/2006/relationships" xmlns:p="http://schemas.openxmlformats.org/presentationml/2006/main">
+  <p:cSld>
+    <p:spTree>
+      <p:nvGrpSpPr>
+        <p:cNvPr id="1" name="">
+          <a:extLst>
+            <a:ext uri="{FF2B5EF4-FFF2-40B4-BE49-F238E27FC236}">
+              <a16:creationId xmlns:a16="http://schemas.microsoft.com/office/drawing/2014/main" id="{5CD36740-ACF0-1F8D-EFE0-B2B9B646E6DE}"/>
+            </a:ext>
+          </a:extLst>
+        </p:cNvPr>
+        <p:cNvGrpSpPr/>
+        <p:nvPr/>
+      </p:nvGrpSpPr>
+      <p:grpSpPr>
+        <a:xfrm>
+          <a:off x="0" y="0"/>
+          <a:ext cx="0" cy="0"/>
+          <a:chOff x="0" y="0"/>
+          <a:chExt cx="0" cy="0"/>
+        </a:xfrm>
+      </p:grpSpPr>
+      <p:sp>
+        <p:nvSpPr>
+          <p:cNvPr id="2" name="Tijdelijke aanduiding voor dia-afbeelding 1">
+            <a:extLst>
+              <a:ext uri="{FF2B5EF4-FFF2-40B4-BE49-F238E27FC236}">
+                <a16:creationId xmlns:a16="http://schemas.microsoft.com/office/drawing/2014/main" id="{94242CD5-8079-4695-C2BE-761D6D79ACDF}"/>
+              </a:ext>
+            </a:extLst>
+          </p:cNvPr>
+          <p:cNvSpPr>
+            <a:spLocks noGrp="1" noRot="1" noChangeAspect="1"/>
+          </p:cNvSpPr>
+          <p:nvPr>
+            <p:ph type="sldImg"/>
+          </p:nvPr>
+        </p:nvSpPr>
+        <p:spPr/>
+        <p:txBody>
+          <a:bodyPr/>
+          <a:lstStyle/>
+          <a:p>
+            <a:endParaRPr lang="en-US"/>
+          </a:p>
+        </p:txBody>
+      </p:sp>
+      <p:sp>
+        <p:nvSpPr>
+          <p:cNvPr id="3" name="Tijdelijke aanduiding voor notities 2">
+            <a:extLst>
+              <a:ext uri="{FF2B5EF4-FFF2-40B4-BE49-F238E27FC236}">
+                <a16:creationId xmlns:a16="http://schemas.microsoft.com/office/drawing/2014/main" id="{7953C6CF-2BBF-0983-ABCB-AAD49ED7E863}"/>
+              </a:ext>
+            </a:extLst>
+          </p:cNvPr>
+          <p:cNvSpPr>
+            <a:spLocks noGrp="1"/>
+          </p:cNvSpPr>
+          <p:nvPr>
+            <p:ph type="body" idx="1"/>
+          </p:nvPr>
+        </p:nvSpPr>
+        <p:spPr/>
+        <p:txBody>
+          <a:bodyPr/>
+          <a:lstStyle/>
+          <a:p>
+            <a:pPr marL="171450" indent="-171450">
+              <a:buFontTx/>
+              <a:buChar char="-"/>
+            </a:pPr>
+            <a:endParaRPr lang="nl-NL"/>
+          </a:p>
+        </p:txBody>
+      </p:sp>
+      <p:sp>
+        <p:nvSpPr>
+          <p:cNvPr id="4" name="Tijdelijke aanduiding voor dianummer 3">
+            <a:extLst>
+              <a:ext uri="{FF2B5EF4-FFF2-40B4-BE49-F238E27FC236}">
+                <a16:creationId xmlns:a16="http://schemas.microsoft.com/office/drawing/2014/main" id="{2CF62F4D-F0F1-75BD-73A5-CA3185063205}"/>
+              </a:ext>
+            </a:extLst>
+          </p:cNvPr>
+          <p:cNvSpPr>
+            <a:spLocks noGrp="1"/>
+          </p:cNvSpPr>
+          <p:nvPr>
+            <p:ph type="sldNum" sz="quarter" idx="10"/>
+          </p:nvPr>
+        </p:nvSpPr>
+        <p:spPr/>
+        <p:txBody>
+          <a:bodyPr/>
+          <a:lstStyle/>
+          <a:p>
+            <a:pPr marL="0" marR="0" lvl="0" indent="0" algn="r" defTabSz="914400" rtl="0" eaLnBrk="1" fontAlgn="auto" latinLnBrk="0" hangingPunct="1">
+              <a:lnSpc>
+                <a:spcPct val="100000"/>
+              </a:lnSpc>
+              <a:spcBef>
+                <a:spcPts val="0"/>
+              </a:spcBef>
+              <a:spcAft>
+                <a:spcPts val="0"/>
+              </a:spcAft>
+              <a:buClrTx/>
+              <a:buSzTx/>
+              <a:buFontTx/>
+              <a:buNone/>
+              <a:tabLst/>
+              <a:defRPr/>
+            </a:pPr>
+            <a:fld id="{F9513F78-5509-4637-B397-C3DEABA56153}" type="slidenum">
+              <a:rPr kumimoji="0" lang="nl-NL" sz="1200" b="0" i="0" u="none" strike="noStrike" kern="1200" cap="none" spc="0" normalizeH="0" baseline="0" noProof="0" smtClean="0">
+                <a:ln>
+                  <a:noFill/>
+                </a:ln>
+                <a:solidFill>
+                  <a:prstClr val="black"/>
+                </a:solidFill>
+                <a:effectLst/>
+                <a:uLnTx/>
+                <a:uFillTx/>
+                <a:latin typeface="Calibri" panose="020F0502020204030204"/>
+                <a:ea typeface="+mn-ea"/>
+                <a:cs typeface="+mn-cs"/>
+              </a:rPr>
+              <a:pPr marL="0" marR="0" lvl="0" indent="0" algn="r" defTabSz="914400" rtl="0" eaLnBrk="1" fontAlgn="auto" latinLnBrk="0" hangingPunct="1">
+                <a:lnSpc>
+                  <a:spcPct val="100000"/>
+                </a:lnSpc>
+                <a:spcBef>
+                  <a:spcPts val="0"/>
+                </a:spcBef>
+                <a:spcAft>
+                  <a:spcPts val="0"/>
+                </a:spcAft>
+                <a:buClrTx/>
+                <a:buSzTx/>
+                <a:buFontTx/>
+                <a:buNone/>
+                <a:tabLst/>
+                <a:defRPr/>
+              </a:pPr>
+              <a:t>15</a:t>
+            </a:fld>
+            <a:endParaRPr kumimoji="0" lang="nl-NL" sz="1200" b="0" i="0" u="none" strike="noStrike" kern="1200" cap="none" spc="0" normalizeH="0" baseline="0" noProof="0">
+              <a:ln>
+                <a:noFill/>
+              </a:ln>
+              <a:solidFill>
+                <a:prstClr val="black"/>
+              </a:solidFill>
+              <a:effectLst/>
+              <a:uLnTx/>
+              <a:uFillTx/>
+              <a:latin typeface="Calibri" panose="020F0502020204030204"/>
+              <a:ea typeface="+mn-ea"/>
+              <a:cs typeface="+mn-cs"/>
+            </a:endParaRPr>
+          </a:p>
+        </p:txBody>
+      </p:sp>
+    </p:spTree>
+    <p:extLst>
+      <p:ext uri="{BB962C8B-B14F-4D97-AF65-F5344CB8AC3E}">
+        <p14:creationId xmlns:p14="http://schemas.microsoft.com/office/powerpoint/2010/main" val="2806218501"/>
+      </p:ext>
+    </p:extLst>
+  </p:cSld>
+  <p:clrMapOvr>
+    <a:masterClrMapping/>
+  </p:clrMapOvr>
+</p:notes>
+</file>
+
 <file path=ppt/notesSlides/notesSlide2.xml><?xml version="1.0" encoding="utf-8"?>
 <p:notes xmlns:a="http://schemas.openxmlformats.org/drawingml/2006/main" xmlns:r="http://schemas.openxmlformats.org/officeDocument/2006/relationships" xmlns:p="http://schemas.openxmlformats.org/presentationml/2006/main">
   <p:cSld>
@@ -2725,7 +2952,119 @@
               <a:buFontTx/>
               <a:buChar char="-"/>
             </a:pPr>
-            <a:endParaRPr lang="nl-NL"/>
+            <a:r>
+              <a:rPr lang="nl-NL" dirty="0" err="1"/>
+              <a:t>Each</a:t>
+            </a:r>
+            <a:r>
+              <a:rPr lang="nl-NL" dirty="0"/>
+              <a:t> </a:t>
+            </a:r>
+            <a:r>
+              <a:rPr lang="nl-NL" dirty="0" err="1"/>
+              <a:t>year</a:t>
+            </a:r>
+            <a:r>
+              <a:rPr lang="nl-NL" dirty="0"/>
+              <a:t> the </a:t>
+            </a:r>
+            <a:r>
+              <a:rPr lang="nl-NL" dirty="0" err="1"/>
+              <a:t>median</a:t>
+            </a:r>
+            <a:r>
+              <a:rPr lang="nl-NL" dirty="0"/>
+              <a:t> </a:t>
+            </a:r>
+            <a:r>
+              <a:rPr lang="nl-NL" dirty="0" err="1"/>
+              <a:t>threshold</a:t>
+            </a:r>
+            <a:r>
+              <a:rPr lang="nl-NL" dirty="0"/>
+              <a:t> </a:t>
+            </a:r>
+            <a:r>
+              <a:rPr lang="nl-NL" dirty="0" err="1"/>
+              <a:t>for</a:t>
+            </a:r>
+            <a:r>
+              <a:rPr lang="nl-NL" dirty="0"/>
+              <a:t> </a:t>
+            </a:r>
+            <a:r>
+              <a:rPr lang="nl-NL" dirty="0" err="1"/>
+              <a:t>Above</a:t>
+            </a:r>
+            <a:r>
+              <a:rPr lang="nl-NL" dirty="0"/>
+              <a:t> </a:t>
+            </a:r>
+            <a:r>
+              <a:rPr lang="nl-NL" dirty="0" err="1"/>
+              <a:t>vs</a:t>
+            </a:r>
+            <a:r>
+              <a:rPr lang="nl-NL" dirty="0"/>
+              <a:t> Below changes, </a:t>
+            </a:r>
+            <a:r>
+              <a:rPr lang="nl-NL" dirty="0" err="1"/>
+              <a:t>so</a:t>
+            </a:r>
+            <a:r>
+              <a:rPr lang="nl-NL" dirty="0"/>
+              <a:t>: </a:t>
+            </a:r>
+            <a:r>
+              <a:rPr lang="nl-NL" dirty="0" err="1"/>
+              <a:t>each</a:t>
+            </a:r>
+            <a:r>
+              <a:rPr lang="nl-NL" dirty="0"/>
+              <a:t> </a:t>
+            </a:r>
+            <a:r>
+              <a:rPr lang="nl-NL" dirty="0" err="1"/>
+              <a:t>year</a:t>
+            </a:r>
+            <a:r>
+              <a:rPr lang="nl-NL" dirty="0"/>
+              <a:t> the </a:t>
+            </a:r>
+            <a:r>
+              <a:rPr lang="nl-NL" dirty="0" err="1"/>
+              <a:t>Above</a:t>
+            </a:r>
+            <a:r>
+              <a:rPr lang="nl-NL" dirty="0"/>
+              <a:t> and Below </a:t>
+            </a:r>
+            <a:r>
+              <a:rPr lang="nl-NL" dirty="0" err="1"/>
+              <a:t>groups</a:t>
+            </a:r>
+            <a:r>
+              <a:rPr lang="nl-NL" dirty="0"/>
+              <a:t> of </a:t>
+            </a:r>
+            <a:r>
+              <a:rPr lang="nl-NL" dirty="0" err="1"/>
+              <a:t>countries</a:t>
+            </a:r>
+            <a:r>
+              <a:rPr lang="nl-NL" dirty="0"/>
+              <a:t> </a:t>
+            </a:r>
+            <a:r>
+              <a:rPr lang="nl-NL" dirty="0" err="1"/>
+              <a:t>differ</a:t>
+            </a:r>
+            <a:r>
+              <a:rPr lang="nl-NL"/>
+              <a:t>.</a:t>
+            </a:r>
+            <a:endParaRPr lang="nl-NL" dirty="0"/>
           </a:p>
         </p:txBody>
       </p:sp>
@@ -2904,7 +3243,7 @@
               <a:buFontTx/>
               <a:buChar char="-"/>
             </a:pPr>
-            <a:endParaRPr lang="nl-NL"/>
+            <a:endParaRPr lang="nl-NL" dirty="0"/>
           </a:p>
         </p:txBody>
       </p:sp>
@@ -6483,36 +6822,6 @@
           </a:prstGeom>
         </p:spPr>
       </p:pic>
-      <p:pic>
-        <p:nvPicPr>
-          <p:cNvPr id="9" name="Picture 8">
-            <a:extLst>
-              <a:ext uri="{FF2B5EF4-FFF2-40B4-BE49-F238E27FC236}">
-                <a16:creationId xmlns:a16="http://schemas.microsoft.com/office/drawing/2014/main" id="{9A1BFB74-B0F9-69A1-8D0B-9ADBEF25B14A}"/>
-              </a:ext>
-            </a:extLst>
-          </p:cNvPr>
-          <p:cNvPicPr>
-            <a:picLocks noChangeAspect="1"/>
-          </p:cNvPicPr>
-          <p:nvPr/>
-        </p:nvPicPr>
-        <p:blipFill>
-          <a:blip r:embed="rId4"/>
-          <a:stretch>
-            <a:fillRect/>
-          </a:stretch>
-        </p:blipFill>
-        <p:spPr>
-          <a:xfrm>
-            <a:off x="146304" y="1558892"/>
-            <a:ext cx="4404742" cy="3372459"/>
-          </a:xfrm>
-          <a:prstGeom prst="rect">
-            <a:avLst/>
-          </a:prstGeom>
-        </p:spPr>
-      </p:pic>
       <p:sp>
         <p:nvSpPr>
           <p:cNvPr id="11" name="Tekstvak 3">
@@ -6527,7 +6836,7 @@
         </p:nvSpPr>
         <p:spPr>
           <a:xfrm>
-            <a:off x="304990" y="5154001"/>
+            <a:off x="304990" y="5053409"/>
             <a:ext cx="4087369" cy="1200329"/>
           </a:xfrm>
           <a:prstGeom prst="rect">
@@ -6627,7 +6936,7 @@
                   <a:srgbClr val="002060"/>
                 </a:solidFill>
               </a:rPr>
-              <a:t>some</a:t>
+              <a:t>countries</a:t>
             </a:r>
             <a:r>
               <a:rPr lang="nl-NL" sz="1200" dirty="0">
@@ -6635,6 +6944,38 @@
                   <a:srgbClr val="002060"/>
                 </a:solidFill>
               </a:rPr>
+              <a:t> of </a:t>
+            </a:r>
+            <a:r>
+              <a:rPr lang="nl-NL" sz="1200" dirty="0" err="1">
+                <a:solidFill>
+                  <a:srgbClr val="002060"/>
+                </a:solidFill>
+              </a:rPr>
+              <a:t>which</a:t>
+            </a:r>
+            <a:r>
+              <a:rPr lang="nl-NL" sz="1200" dirty="0">
+                <a:solidFill>
+                  <a:srgbClr val="002060"/>
+                </a:solidFill>
+              </a:rPr>
+              <a:t> 2025 data is </a:t>
+            </a:r>
+            <a:r>
+              <a:rPr lang="nl-NL" sz="1200" dirty="0" err="1">
+                <a:solidFill>
+                  <a:srgbClr val="002060"/>
+                </a:solidFill>
+              </a:rPr>
+              <a:t>not</a:t>
+            </a:r>
+            <a:r>
+              <a:rPr lang="nl-NL" sz="1200" dirty="0">
+                <a:solidFill>
+                  <a:srgbClr val="002060"/>
+                </a:solidFill>
+              </a:rPr>
               <a:t> </a:t>
             </a:r>
             <a:r>
@@ -6643,7 +6984,7 @@
                   <a:srgbClr val="002060"/>
                 </a:solidFill>
               </a:rPr>
-              <a:t>countries</a:t>
+              <a:t>available</a:t>
             </a:r>
             <a:r>
               <a:rPr lang="nl-NL" sz="1200" dirty="0">
@@ -6651,7 +6992,7 @@
                   <a:srgbClr val="002060"/>
                 </a:solidFill>
               </a:rPr>
-              <a:t> the data </a:t>
+              <a:t> </a:t>
             </a:r>
             <a:r>
               <a:rPr lang="nl-NL" sz="1200" dirty="0" err="1">
@@ -6659,7 +7000,7 @@
                   <a:srgbClr val="002060"/>
                 </a:solidFill>
               </a:rPr>
-              <a:t>for</a:t>
+              <a:t>yet</a:t>
             </a:r>
             <a:r>
               <a:rPr lang="nl-NL" sz="1200" dirty="0">
@@ -6667,23 +7008,7 @@
                   <a:srgbClr val="002060"/>
                 </a:solidFill>
               </a:rPr>
-              <a:t> 2025 is missing; 2024 data is </a:t>
-            </a:r>
-            <a:r>
-              <a:rPr lang="nl-NL" sz="1200" dirty="0" err="1">
-                <a:solidFill>
-                  <a:srgbClr val="002060"/>
-                </a:solidFill>
-              </a:rPr>
-              <a:t>then</a:t>
-            </a:r>
-            <a:r>
-              <a:rPr lang="nl-NL" sz="1200" dirty="0">
-                <a:solidFill>
-                  <a:srgbClr val="002060"/>
-                </a:solidFill>
-              </a:rPr>
-              <a:t> </a:t>
+              <a:t>; 2024 data is </a:t>
             </a:r>
             <a:r>
               <a:rPr lang="nl-NL" sz="1200" dirty="0" err="1">
@@ -6774,7 +7099,7 @@
                 <a:solidFill>
                   <a:srgbClr val="002060"/>
                 </a:solidFill>
-                <a:hlinkClick r:id="rId5" action="ppaction://hlinksldjump"/>
+                <a:hlinkClick r:id="rId4" action="ppaction://hlinksldjump"/>
               </a:rPr>
               <a:t>Link</a:t>
             </a:r>
@@ -6883,6 +7208,36 @@
           </a:p>
         </p:txBody>
       </p:sp>
+      <p:pic>
+        <p:nvPicPr>
+          <p:cNvPr id="3" name="Picture 2">
+            <a:extLst>
+              <a:ext uri="{FF2B5EF4-FFF2-40B4-BE49-F238E27FC236}">
+                <a16:creationId xmlns:a16="http://schemas.microsoft.com/office/drawing/2014/main" id="{8A7EFEE7-907A-EF9C-42CF-70E7257DAC35}"/>
+              </a:ext>
+            </a:extLst>
+          </p:cNvPr>
+          <p:cNvPicPr>
+            <a:picLocks noChangeAspect="1"/>
+          </p:cNvPicPr>
+          <p:nvPr/>
+        </p:nvPicPr>
+        <p:blipFill>
+          <a:blip r:embed="rId5"/>
+          <a:stretch>
+            <a:fillRect/>
+          </a:stretch>
+        </p:blipFill>
+        <p:spPr>
+          <a:xfrm>
+            <a:off x="146304" y="1728216"/>
+            <a:ext cx="4048523" cy="3063240"/>
+          </a:xfrm>
+          <a:prstGeom prst="rect">
+            <a:avLst/>
+          </a:prstGeom>
+        </p:spPr>
+      </p:pic>
     </p:spTree>
     <p:extLst>
       <p:ext uri="{BB962C8B-B14F-4D97-AF65-F5344CB8AC3E}">
@@ -7149,8 +7504,8 @@
         </p:nvSpPr>
         <p:spPr>
           <a:xfrm>
-            <a:off x="207037" y="4849659"/>
-            <a:ext cx="4087369" cy="1384995"/>
+            <a:off x="207037" y="4774417"/>
+            <a:ext cx="4087369" cy="1200329"/>
           </a:xfrm>
           <a:prstGeom prst="rect">
             <a:avLst/>
@@ -7236,109 +7591,8 @@
                   <a:srgbClr val="002060"/>
                 </a:solidFill>
               </a:rPr>
-              <a:t> data 2000-2024 (data </a:t>
-            </a:r>
-            <a:r>
-              <a:rPr lang="nl-NL" sz="1200" dirty="0" err="1">
-                <a:solidFill>
-                  <a:srgbClr val="002060"/>
-                </a:solidFill>
-              </a:rPr>
-              <a:t>for</a:t>
-            </a:r>
-            <a:r>
-              <a:rPr lang="nl-NL" sz="1200" dirty="0">
-                <a:solidFill>
-                  <a:srgbClr val="002060"/>
-                </a:solidFill>
-              </a:rPr>
-              <a:t> 2025 is </a:t>
-            </a:r>
-            <a:r>
-              <a:rPr lang="nl-NL" sz="1200" dirty="0" err="1">
-                <a:solidFill>
-                  <a:srgbClr val="002060"/>
-                </a:solidFill>
-              </a:rPr>
-              <a:t>not</a:t>
-            </a:r>
-            <a:r>
-              <a:rPr lang="nl-NL" sz="1200" dirty="0">
-                <a:solidFill>
-                  <a:srgbClr val="002060"/>
-                </a:solidFill>
-              </a:rPr>
-              <a:t> </a:t>
-            </a:r>
-            <a:r>
-              <a:rPr lang="nl-NL" sz="1200" dirty="0" err="1">
-                <a:solidFill>
-                  <a:srgbClr val="002060"/>
-                </a:solidFill>
-              </a:rPr>
-              <a:t>available</a:t>
-            </a:r>
-            <a:r>
-              <a:rPr lang="nl-NL" sz="1200" dirty="0">
-                <a:solidFill>
-                  <a:srgbClr val="002060"/>
-                </a:solidFill>
-              </a:rPr>
-              <a:t> </a:t>
-            </a:r>
-            <a:r>
-              <a:rPr lang="nl-NL" sz="1200" dirty="0" err="1">
-                <a:solidFill>
-                  <a:srgbClr val="002060"/>
-                </a:solidFill>
-              </a:rPr>
-              <a:t>yet</a:t>
-            </a:r>
-            <a:r>
-              <a:rPr lang="nl-NL" sz="1200" dirty="0">
-                <a:solidFill>
-                  <a:srgbClr val="002060"/>
-                </a:solidFill>
-              </a:rPr>
-              <a:t>; 2024 data is </a:t>
-            </a:r>
-            <a:r>
-              <a:rPr lang="nl-NL" sz="1200" dirty="0" err="1">
-                <a:solidFill>
-                  <a:srgbClr val="002060"/>
-                </a:solidFill>
-              </a:rPr>
-              <a:t>then</a:t>
-            </a:r>
-            <a:r>
-              <a:rPr lang="nl-NL" sz="1200" dirty="0">
-                <a:solidFill>
-                  <a:srgbClr val="002060"/>
-                </a:solidFill>
-              </a:rPr>
-              <a:t> </a:t>
-            </a:r>
-            <a:r>
-              <a:rPr lang="nl-NL" sz="1200" dirty="0" err="1">
-                <a:solidFill>
-                  <a:srgbClr val="002060"/>
-                </a:solidFill>
-              </a:rPr>
-              <a:t>used</a:t>
-            </a:r>
-            <a:r>
-              <a:rPr lang="nl-NL" sz="1200" dirty="0">
-                <a:solidFill>
-                  <a:srgbClr val="002060"/>
-                </a:solidFill>
-              </a:rPr>
-              <a:t>). </a:t>
-            </a:r>
-          </a:p>
-          <a:p>
-            <a:pPr>
-              <a:defRPr/>
-            </a:pPr>
+              <a:t> data 2000-2025. </a:t>
+            </a:r>
             <a:r>
               <a:rPr lang="en-US" sz="1200" dirty="0">
                 <a:solidFill>
@@ -7426,36 +7680,6 @@
       </p:sp>
       <p:pic>
         <p:nvPicPr>
-          <p:cNvPr id="3" name="Picture 2">
-            <a:extLst>
-              <a:ext uri="{FF2B5EF4-FFF2-40B4-BE49-F238E27FC236}">
-                <a16:creationId xmlns:a16="http://schemas.microsoft.com/office/drawing/2014/main" id="{A9B511F9-EA27-E187-9227-1EF502D06828}"/>
-              </a:ext>
-            </a:extLst>
-          </p:cNvPr>
-          <p:cNvPicPr>
-            <a:picLocks noChangeAspect="1"/>
-          </p:cNvPicPr>
-          <p:nvPr/>
-        </p:nvPicPr>
-        <p:blipFill>
-          <a:blip r:embed="rId4"/>
-          <a:stretch>
-            <a:fillRect/>
-          </a:stretch>
-        </p:blipFill>
-        <p:spPr>
-          <a:xfrm>
-            <a:off x="207037" y="1408176"/>
-            <a:ext cx="4227362" cy="3026765"/>
-          </a:xfrm>
-          <a:prstGeom prst="rect">
-            <a:avLst/>
-          </a:prstGeom>
-        </p:spPr>
-      </p:pic>
-      <p:pic>
-        <p:nvPicPr>
           <p:cNvPr id="4" name="Picture 3">
             <a:extLst>
               <a:ext uri="{FF2B5EF4-FFF2-40B4-BE49-F238E27FC236}">
@@ -7469,7 +7693,7 @@
           <p:nvPr/>
         </p:nvPicPr>
         <p:blipFill>
-          <a:blip r:embed="rId5"/>
+          <a:blip r:embed="rId4"/>
           <a:stretch>
             <a:fillRect/>
           </a:stretch>
@@ -7578,10 +7802,241 @@
           </a:p>
         </p:txBody>
       </p:sp>
+      <p:pic>
+        <p:nvPicPr>
+          <p:cNvPr id="5" name="Picture 4">
+            <a:extLst>
+              <a:ext uri="{FF2B5EF4-FFF2-40B4-BE49-F238E27FC236}">
+                <a16:creationId xmlns:a16="http://schemas.microsoft.com/office/drawing/2014/main" id="{7596D83C-A172-D741-78FB-EBEC12FF1632}"/>
+              </a:ext>
+            </a:extLst>
+          </p:cNvPr>
+          <p:cNvPicPr>
+            <a:picLocks noChangeAspect="1"/>
+          </p:cNvPicPr>
+          <p:nvPr/>
+        </p:nvPicPr>
+        <p:blipFill>
+          <a:blip r:embed="rId5"/>
+          <a:stretch>
+            <a:fillRect/>
+          </a:stretch>
+        </p:blipFill>
+        <p:spPr>
+          <a:xfrm>
+            <a:off x="111598" y="1698111"/>
+            <a:ext cx="4460402" cy="2849630"/>
+          </a:xfrm>
+          <a:prstGeom prst="rect">
+            <a:avLst/>
+          </a:prstGeom>
+        </p:spPr>
+      </p:pic>
     </p:spTree>
     <p:extLst>
       <p:ext uri="{BB962C8B-B14F-4D97-AF65-F5344CB8AC3E}">
         <p14:creationId xmlns:p14="http://schemas.microsoft.com/office/powerpoint/2010/main" val="240743824"/>
+      </p:ext>
+    </p:extLst>
+  </p:cSld>
+  <p:clrMapOvr>
+    <a:masterClrMapping/>
+  </p:clrMapOvr>
+</p:sld>
+</file>
+
+<file path=ppt/slides/slide15.xml><?xml version="1.0" encoding="utf-8"?>
+<p:sld xmlns:a="http://schemas.openxmlformats.org/drawingml/2006/main" xmlns:r="http://schemas.openxmlformats.org/officeDocument/2006/relationships" xmlns:p="http://schemas.openxmlformats.org/presentationml/2006/main">
+  <p:cSld>
+    <p:spTree>
+      <p:nvGrpSpPr>
+        <p:cNvPr id="1" name="">
+          <a:extLst>
+            <a:ext uri="{FF2B5EF4-FFF2-40B4-BE49-F238E27FC236}">
+              <a16:creationId xmlns:a16="http://schemas.microsoft.com/office/drawing/2014/main" id="{566DEE4E-62EE-0BE5-AD2F-11094599F35C}"/>
+            </a:ext>
+          </a:extLst>
+        </p:cNvPr>
+        <p:cNvGrpSpPr/>
+        <p:nvPr/>
+      </p:nvGrpSpPr>
+      <p:grpSpPr>
+        <a:xfrm>
+          <a:off x="0" y="0"/>
+          <a:ext cx="0" cy="0"/>
+          <a:chOff x="0" y="0"/>
+          <a:chExt cx="0" cy="0"/>
+        </a:xfrm>
+      </p:grpSpPr>
+      <p:sp>
+        <p:nvSpPr>
+          <p:cNvPr id="9" name="Titel 1">
+            <a:extLst>
+              <a:ext uri="{FF2B5EF4-FFF2-40B4-BE49-F238E27FC236}">
+                <a16:creationId xmlns:a16="http://schemas.microsoft.com/office/drawing/2014/main" id="{03204D0B-CF7E-0BFC-4F0F-962010862E03}"/>
+              </a:ext>
+            </a:extLst>
+          </p:cNvPr>
+          <p:cNvSpPr>
+            <a:spLocks noGrp="1"/>
+          </p:cNvSpPr>
+          <p:nvPr>
+            <p:ph type="title"/>
+          </p:nvPr>
+        </p:nvSpPr>
+        <p:spPr>
+          <a:xfrm>
+            <a:off x="0" y="0"/>
+            <a:ext cx="9144000" cy="566928"/>
+          </a:xfrm>
+          <a:solidFill>
+            <a:srgbClr val="44287F"/>
+          </a:solidFill>
+        </p:spPr>
+        <p:txBody>
+          <a:bodyPr anchor="ctr"/>
+          <a:lstStyle/>
+          <a:p>
+            <a:pPr algn="ctr">
+              <a:lnSpc>
+                <a:spcPct val="100000"/>
+              </a:lnSpc>
+            </a:pPr>
+            <a:r>
+              <a:rPr lang="en-US" sz="2400" noProof="1">
+                <a:solidFill>
+                  <a:schemeClr val="bg1"/>
+                </a:solidFill>
+              </a:rPr>
+              <a:t>Robustness tests</a:t>
+            </a:r>
+          </a:p>
+        </p:txBody>
+      </p:sp>
+      <p:sp>
+        <p:nvSpPr>
+          <p:cNvPr id="2" name="Content Placeholder 2">
+            <a:extLst>
+              <a:ext uri="{FF2B5EF4-FFF2-40B4-BE49-F238E27FC236}">
+                <a16:creationId xmlns:a16="http://schemas.microsoft.com/office/drawing/2014/main" id="{69505807-7DB6-66DD-D0C3-991E02849C08}"/>
+              </a:ext>
+            </a:extLst>
+          </p:cNvPr>
+          <p:cNvSpPr>
+            <a:spLocks noGrp="1"/>
+          </p:cNvSpPr>
+          <p:nvPr>
+            <p:ph idx="1"/>
+          </p:nvPr>
+        </p:nvSpPr>
+        <p:spPr>
+          <a:xfrm>
+            <a:off x="438652" y="803135"/>
+            <a:ext cx="8129275" cy="5679439"/>
+          </a:xfrm>
+        </p:spPr>
+        <p:txBody>
+          <a:bodyPr>
+            <a:normAutofit/>
+          </a:bodyPr>
+          <a:lstStyle/>
+          <a:p>
+            <a:pPr marL="342900" indent="-342900">
+              <a:lnSpc>
+                <a:spcPct val="120000"/>
+              </a:lnSpc>
+              <a:spcAft>
+                <a:spcPts val="1200"/>
+              </a:spcAft>
+              <a:buFont typeface="Arial" panose="020B0604020202020204" pitchFamily="34" charset="0"/>
+              <a:buChar char="•"/>
+            </a:pPr>
+            <a:endParaRPr lang="nl-NL" sz="2000" noProof="1">
+              <a:solidFill>
+                <a:schemeClr val="accent1">
+                  <a:lumMod val="50000"/>
+                </a:schemeClr>
+              </a:solidFill>
+              <a:latin typeface="Verdana" panose="020B0604030504040204" pitchFamily="34" charset="0"/>
+              <a:ea typeface="Verdana" panose="020B0604030504040204" pitchFamily="34" charset="0"/>
+            </a:endParaRPr>
+          </a:p>
+          <a:p>
+            <a:pPr marL="342900" indent="-342900">
+              <a:lnSpc>
+                <a:spcPct val="120000"/>
+              </a:lnSpc>
+              <a:spcAft>
+                <a:spcPts val="1200"/>
+              </a:spcAft>
+              <a:buFont typeface="Arial" panose="020B0604020202020204" pitchFamily="34" charset="0"/>
+              <a:buChar char="•"/>
+            </a:pPr>
+            <a:r>
+              <a:rPr lang="nl-NL" sz="2000" noProof="1">
+                <a:latin typeface="Verdana" panose="020B0604030504040204" pitchFamily="34" charset="0"/>
+                <a:ea typeface="Verdana" panose="020B0604030504040204" pitchFamily="34" charset="0"/>
+              </a:rPr>
+              <a:t>Panel logit regressions </a:t>
+            </a:r>
+            <a:r>
+              <a:rPr lang="nl-NL" sz="2000" noProof="1">
+                <a:latin typeface="Arial" panose="020B0604020202020204" pitchFamily="34" charset="0"/>
+                <a:ea typeface="Verdana" panose="020B0604030504040204" pitchFamily="34" charset="0"/>
+                <a:cs typeface="Arial" panose="020B0604020202020204" pitchFamily="34" charset="0"/>
+              </a:rPr>
+              <a:t>→ similar results</a:t>
+            </a:r>
+          </a:p>
+          <a:p>
+            <a:pPr marL="342900" indent="-342900">
+              <a:lnSpc>
+                <a:spcPct val="120000"/>
+              </a:lnSpc>
+              <a:spcAft>
+                <a:spcPts val="1200"/>
+              </a:spcAft>
+              <a:buFont typeface="Arial" panose="020B0604020202020204" pitchFamily="34" charset="0"/>
+              <a:buChar char="•"/>
+            </a:pPr>
+            <a:r>
+              <a:rPr lang="nl-NL" sz="2000" noProof="1">
+                <a:latin typeface="Arial" panose="020B0604020202020204" pitchFamily="34" charset="0"/>
+                <a:ea typeface="Verdana" panose="020B0604030504040204" pitchFamily="34" charset="0"/>
+                <a:cs typeface="Arial" panose="020B0604020202020204" pitchFamily="34" charset="0"/>
+              </a:rPr>
+              <a:t>Trade data from Eurostat CPA instead of OECD HS → similar results</a:t>
+            </a:r>
+            <a:endParaRPr lang="nl-NL" sz="2000" noProof="1">
+              <a:latin typeface="Verdana" panose="020B0604030504040204" pitchFamily="34" charset="0"/>
+              <a:ea typeface="Verdana" panose="020B0604030504040204" pitchFamily="34" charset="0"/>
+            </a:endParaRPr>
+          </a:p>
+          <a:p>
+            <a:pPr marL="285750" indent="-285750">
+              <a:lnSpc>
+                <a:spcPct val="120000"/>
+              </a:lnSpc>
+              <a:spcAft>
+                <a:spcPts val="1200"/>
+              </a:spcAft>
+              <a:buFont typeface="Arial" panose="020B0604020202020204" pitchFamily="34" charset="0"/>
+              <a:buChar char="•"/>
+            </a:pPr>
+            <a:endParaRPr lang="nl-NL" sz="1600" dirty="0">
+              <a:solidFill>
+                <a:schemeClr val="accent1">
+                  <a:lumMod val="50000"/>
+                </a:schemeClr>
+              </a:solidFill>
+            </a:endParaRPr>
+          </a:p>
+        </p:txBody>
+      </p:sp>
+    </p:spTree>
+    <p:extLst>
+      <p:ext uri="{BB962C8B-B14F-4D97-AF65-F5344CB8AC3E}">
+        <p14:creationId xmlns:p14="http://schemas.microsoft.com/office/powerpoint/2010/main" val="341592472"/>
       </p:ext>
     </p:extLst>
   </p:cSld>
@@ -9251,7 +9706,7 @@
                 <a:latin typeface="Verdana" panose="020B0604030504040204" pitchFamily="34" charset="0"/>
                 <a:ea typeface="Verdana" panose="020B0604030504040204" pitchFamily="34" charset="0"/>
               </a:rPr>
-              <a:t>… advantage washed out by common shocks</a:t>
+              <a:t>… advantage similar in shock years</a:t>
             </a:r>
           </a:p>
           <a:p>
@@ -9395,10 +9850,10 @@
       </p:sp>
       <p:pic>
         <p:nvPicPr>
-          <p:cNvPr id="11" name="Picture 10">
+          <p:cNvPr id="3" name="Picture 2">
             <a:extLst>
               <a:ext uri="{FF2B5EF4-FFF2-40B4-BE49-F238E27FC236}">
-                <a16:creationId xmlns:a16="http://schemas.microsoft.com/office/drawing/2014/main" id="{7A25CD59-D632-9630-3CAD-3BDC8155E548}"/>
+                <a16:creationId xmlns:a16="http://schemas.microsoft.com/office/drawing/2014/main" id="{3AEC0293-BD5F-607E-F810-8030B0619792}"/>
               </a:ext>
             </a:extLst>
           </p:cNvPr>
@@ -9415,8 +9870,8 @@
         </p:blipFill>
         <p:spPr>
           <a:xfrm>
-            <a:off x="4613338" y="3469220"/>
-            <a:ext cx="4088978" cy="2219053"/>
+            <a:off x="4643818" y="1250167"/>
+            <a:ext cx="3962400" cy="2079135"/>
           </a:xfrm>
           <a:prstGeom prst="rect">
             <a:avLst/>
@@ -9425,10 +9880,10 @@
       </p:pic>
       <p:pic>
         <p:nvPicPr>
-          <p:cNvPr id="4" name="Picture 3">
+          <p:cNvPr id="7" name="Picture 6">
             <a:extLst>
               <a:ext uri="{FF2B5EF4-FFF2-40B4-BE49-F238E27FC236}">
-                <a16:creationId xmlns:a16="http://schemas.microsoft.com/office/drawing/2014/main" id="{6ECE1DC5-FB80-BD91-88E9-814F7F9FA66B}"/>
+                <a16:creationId xmlns:a16="http://schemas.microsoft.com/office/drawing/2014/main" id="{339ECCAE-ABF5-C0A3-D3B2-D90FA8CF9B40}"/>
               </a:ext>
             </a:extLst>
           </p:cNvPr>
@@ -9445,8 +9900,8 @@
         </p:blipFill>
         <p:spPr>
           <a:xfrm>
-            <a:off x="4613339" y="1249141"/>
-            <a:ext cx="4088977" cy="2139639"/>
+            <a:off x="4655684" y="3393570"/>
+            <a:ext cx="3962400" cy="2079135"/>
           </a:xfrm>
           <a:prstGeom prst="rect">
             <a:avLst/>
@@ -9591,7 +10046,7 @@
         </p:spPr>
         <p:txBody>
           <a:bodyPr>
-            <a:normAutofit fontScale="92500" lnSpcReduction="20000"/>
+            <a:normAutofit fontScale="92500" lnSpcReduction="10000"/>
           </a:bodyPr>
           <a:lstStyle/>
           <a:p>
@@ -9629,7 +10084,7 @@
                 <a:latin typeface="Verdana" panose="020B0604030504040204" pitchFamily="34" charset="0"/>
                 <a:ea typeface="Verdana" panose="020B0604030504040204" pitchFamily="34" charset="0"/>
               </a:rPr>
-              <a:t>…  suggesting ICT/AI global demand is countercyclical and/or accelerates in shock years</a:t>
+              <a:t>…  suggesting ICT/AI global demand is countercyclical and/or accelerates in shock years …</a:t>
             </a:r>
           </a:p>
           <a:p>
@@ -9664,7 +10119,7 @@
                 <a:latin typeface="Verdana" panose="020B0604030504040204" pitchFamily="34" charset="0"/>
                 <a:ea typeface="Verdana" panose="020B0604030504040204" pitchFamily="34" charset="0"/>
               </a:rPr>
-              <a:t>Higher stock market exposure does not make a difference (in this unconditional test). Common component may dominate</a:t>
+              <a:t>… which is not the case for stock market exposure. Common component may dominate</a:t>
             </a:r>
           </a:p>
           <a:p>
@@ -9772,10 +10227,10 @@
       </p:sp>
       <p:pic>
         <p:nvPicPr>
-          <p:cNvPr id="4" name="Picture 3">
+          <p:cNvPr id="3" name="Picture 2">
             <a:extLst>
               <a:ext uri="{FF2B5EF4-FFF2-40B4-BE49-F238E27FC236}">
-                <a16:creationId xmlns:a16="http://schemas.microsoft.com/office/drawing/2014/main" id="{551404D6-F9AD-BB52-B168-06741BAA0097}"/>
+                <a16:creationId xmlns:a16="http://schemas.microsoft.com/office/drawing/2014/main" id="{FD8FEF3A-B9D3-C258-3FD3-115594E60806}"/>
               </a:ext>
             </a:extLst>
           </p:cNvPr>
@@ -9792,8 +10247,8 @@
         </p:blipFill>
         <p:spPr>
           <a:xfrm>
-            <a:off x="4572000" y="3397824"/>
-            <a:ext cx="3959350" cy="2170453"/>
+            <a:off x="4561469" y="1249141"/>
+            <a:ext cx="3962400" cy="2170453"/>
           </a:xfrm>
           <a:prstGeom prst="rect">
             <a:avLst/>
@@ -9802,10 +10257,10 @@
       </p:pic>
       <p:pic>
         <p:nvPicPr>
-          <p:cNvPr id="7" name="Picture 6">
+          <p:cNvPr id="9" name="Picture 8">
             <a:extLst>
               <a:ext uri="{FF2B5EF4-FFF2-40B4-BE49-F238E27FC236}">
-                <a16:creationId xmlns:a16="http://schemas.microsoft.com/office/drawing/2014/main" id="{5A97EF09-CBBC-6BFB-7A2B-C80CB9B80409}"/>
+                <a16:creationId xmlns:a16="http://schemas.microsoft.com/office/drawing/2014/main" id="{53094AB5-29A5-390F-D793-10B141A69812}"/>
               </a:ext>
             </a:extLst>
           </p:cNvPr>
@@ -9822,8 +10277,8 @@
         </p:blipFill>
         <p:spPr>
           <a:xfrm>
-            <a:off x="4566596" y="1234859"/>
-            <a:ext cx="3962400" cy="2170453"/>
+            <a:off x="4572000" y="3429000"/>
+            <a:ext cx="3962400" cy="2103119"/>
           </a:xfrm>
           <a:prstGeom prst="rect">
             <a:avLst/>
@@ -9911,8 +10366,8 @@
           </a:p>
         </p:txBody>
       </p:sp>
-      <mc:AlternateContent xmlns:mc="http://schemas.openxmlformats.org/markup-compatibility/2006" xmlns:a14="http://schemas.microsoft.com/office/drawing/2010/main">
-        <mc:Choice Requires="a14">
+      <mc:AlternateContent xmlns:mc="http://schemas.openxmlformats.org/markup-compatibility/2006">
+        <mc:Choice xmlns:a14="http://schemas.microsoft.com/office/drawing/2010/main" Requires="a14">
           <p:sp>
             <p:nvSpPr>
               <p:cNvPr id="2" name="Content Placeholder 2">
@@ -9931,7 +10386,7 @@
             </p:nvSpPr>
             <p:spPr>
               <a:xfrm>
-                <a:off x="448056" y="862238"/>
+                <a:off x="429768" y="825662"/>
                 <a:ext cx="8505051" cy="5679439"/>
               </a:xfrm>
             </p:spPr>
@@ -10270,6 +10725,69 @@
                             <a:ea typeface="Verdana" panose="020B0604030504040204" pitchFamily="34" charset="0"/>
                           </a:rPr>
                           <m:t>𝑋</m:t>
+                        </m:r>
+                      </m:e>
+                      <m:sub>
+                        <m:r>
+                          <a:rPr lang="en-US" sz="2200" i="1" noProof="1">
+                            <a:latin typeface="Cambria Math" panose="02040503050406030204" pitchFamily="18" charset="0"/>
+                            <a:ea typeface="Verdana" panose="020B0604030504040204" pitchFamily="34" charset="0"/>
+                          </a:rPr>
+                          <m:t>𝑖</m:t>
+                        </m:r>
+                        <m:r>
+                          <a:rPr lang="en-US" sz="2200" i="1" noProof="1">
+                            <a:latin typeface="Cambria Math" panose="02040503050406030204" pitchFamily="18" charset="0"/>
+                            <a:ea typeface="Verdana" panose="020B0604030504040204" pitchFamily="34" charset="0"/>
+                          </a:rPr>
+                          <m:t>,</m:t>
+                        </m:r>
+                        <m:r>
+                          <a:rPr lang="en-US" sz="2200" i="1" noProof="1">
+                            <a:latin typeface="Cambria Math" panose="02040503050406030204" pitchFamily="18" charset="0"/>
+                            <a:ea typeface="Verdana" panose="020B0604030504040204" pitchFamily="34" charset="0"/>
+                          </a:rPr>
+                          <m:t>𝑡</m:t>
+                        </m:r>
+                      </m:sub>
+                    </m:sSub>
+                    <m:r>
+                      <a:rPr lang="en-US" sz="2200" i="1" noProof="1" smtClean="0">
+                        <a:latin typeface="Cambria Math" panose="02040503050406030204" pitchFamily="18" charset="0"/>
+                        <a:ea typeface="Verdana" panose="020B0604030504040204" pitchFamily="34" charset="0"/>
+                      </a:rPr>
+                      <m:t>+</m:t>
+                    </m:r>
+                    <m:r>
+                      <a:rPr lang="en-US" sz="2200" i="1" noProof="1" smtClean="0">
+                        <a:latin typeface="Cambria Math" panose="02040503050406030204" pitchFamily="18" charset="0"/>
+                        <a:ea typeface="Cambria Math" panose="02040503050406030204" pitchFamily="18" charset="0"/>
+                      </a:rPr>
+                      <m:t>𝜑</m:t>
+                    </m:r>
+                    <m:sSub>
+                      <m:sSubPr>
+                        <m:ctrlPr>
+                          <a:rPr lang="en-US" sz="2200" i="1" noProof="1">
+                            <a:latin typeface="Cambria Math" panose="02040503050406030204" pitchFamily="18" charset="0"/>
+                            <a:ea typeface="Verdana" panose="020B0604030504040204" pitchFamily="34" charset="0"/>
+                          </a:rPr>
+                        </m:ctrlPr>
+                      </m:sSubPr>
+                      <m:e>
+                        <m:r>
+                          <a:rPr lang="en-US" sz="2200" i="1" noProof="1">
+                            <a:latin typeface="Cambria Math" panose="02040503050406030204" pitchFamily="18" charset="0"/>
+                            <a:ea typeface="Verdana" panose="020B0604030504040204" pitchFamily="34" charset="0"/>
+                          </a:rPr>
+                          <m:t> </m:t>
+                        </m:r>
+                        <m:r>
+                          <a:rPr lang="en-US" sz="2200" b="0" i="1" noProof="1" smtClean="0">
+                            <a:latin typeface="Cambria Math" panose="02040503050406030204" pitchFamily="18" charset="0"/>
+                            <a:ea typeface="Verdana" panose="020B0604030504040204" pitchFamily="34" charset="0"/>
+                          </a:rPr>
+                          <m:t>𝑍</m:t>
                         </m:r>
                       </m:e>
                       <m:sub>
@@ -10744,6 +11262,69 @@
                         </m:r>
                       </m:e>
                       <m:sub>
+                        <m:r>
+                          <a:rPr lang="en-US" sz="2000" i="1" noProof="1">
+                            <a:latin typeface="Cambria Math" panose="02040503050406030204" pitchFamily="18" charset="0"/>
+                            <a:ea typeface="Verdana" panose="020B0604030504040204" pitchFamily="34" charset="0"/>
+                          </a:rPr>
+                          <m:t>𝑡</m:t>
+                        </m:r>
+                      </m:sub>
+                    </m:sSub>
+                    <m:r>
+                      <a:rPr lang="en-US" sz="2000" i="1" noProof="1">
+                        <a:latin typeface="Cambria Math" panose="02040503050406030204" pitchFamily="18" charset="0"/>
+                        <a:ea typeface="Verdana" panose="020B0604030504040204" pitchFamily="34" charset="0"/>
+                      </a:rPr>
+                      <m:t>+</m:t>
+                    </m:r>
+                    <m:r>
+                      <a:rPr lang="en-US" sz="2000" i="1" noProof="1">
+                        <a:latin typeface="Cambria Math" panose="02040503050406030204" pitchFamily="18" charset="0"/>
+                        <a:ea typeface="Cambria Math" panose="02040503050406030204" pitchFamily="18" charset="0"/>
+                      </a:rPr>
+                      <m:t>𝜑</m:t>
+                    </m:r>
+                    <m:sSub>
+                      <m:sSubPr>
+                        <m:ctrlPr>
+                          <a:rPr lang="en-US" sz="2000" i="1" noProof="1">
+                            <a:latin typeface="Cambria Math" panose="02040503050406030204" pitchFamily="18" charset="0"/>
+                            <a:ea typeface="Verdana" panose="020B0604030504040204" pitchFamily="34" charset="0"/>
+                          </a:rPr>
+                        </m:ctrlPr>
+                      </m:sSubPr>
+                      <m:e>
+                        <m:r>
+                          <a:rPr lang="en-US" sz="2000" i="1" noProof="1">
+                            <a:latin typeface="Cambria Math" panose="02040503050406030204" pitchFamily="18" charset="0"/>
+                            <a:ea typeface="Verdana" panose="020B0604030504040204" pitchFamily="34" charset="0"/>
+                          </a:rPr>
+                          <m:t> </m:t>
+                        </m:r>
+                        <m:r>
+                          <a:rPr lang="en-US" sz="2000" i="1" noProof="1">
+                            <a:latin typeface="Cambria Math" panose="02040503050406030204" pitchFamily="18" charset="0"/>
+                            <a:ea typeface="Verdana" panose="020B0604030504040204" pitchFamily="34" charset="0"/>
+                          </a:rPr>
+                          <m:t>𝑍</m:t>
+                        </m:r>
+                      </m:e>
+                      <m:sub>
+                        <m:r>
+                          <a:rPr lang="en-US" sz="2000" i="1" noProof="1">
+                            <a:latin typeface="Cambria Math" panose="02040503050406030204" pitchFamily="18" charset="0"/>
+                            <a:ea typeface="Verdana" panose="020B0604030504040204" pitchFamily="34" charset="0"/>
+                          </a:rPr>
+                          <m:t>𝑖</m:t>
+                        </m:r>
+                        <m:r>
+                          <a:rPr lang="en-US" sz="2000" i="1" noProof="1">
+                            <a:latin typeface="Cambria Math" panose="02040503050406030204" pitchFamily="18" charset="0"/>
+                            <a:ea typeface="Verdana" panose="020B0604030504040204" pitchFamily="34" charset="0"/>
+                          </a:rPr>
+                          <m:t>,</m:t>
+                        </m:r>
                         <m:r>
                           <a:rPr lang="en-US" sz="2000" i="1" noProof="1">
                             <a:latin typeface="Cambria Math" panose="02040503050406030204" pitchFamily="18" charset="0"/>
@@ -11236,6 +11817,69 @@
                       </m:sub>
                     </m:sSub>
                     <m:r>
+                      <a:rPr lang="en-US" sz="2200" i="1" noProof="1">
+                        <a:latin typeface="Cambria Math" panose="02040503050406030204" pitchFamily="18" charset="0"/>
+                        <a:ea typeface="Verdana" panose="020B0604030504040204" pitchFamily="34" charset="0"/>
+                      </a:rPr>
+                      <m:t>+</m:t>
+                    </m:r>
+                    <m:r>
+                      <a:rPr lang="en-US" sz="2200" i="1" noProof="1">
+                        <a:latin typeface="Cambria Math" panose="02040503050406030204" pitchFamily="18" charset="0"/>
+                        <a:ea typeface="Cambria Math" panose="02040503050406030204" pitchFamily="18" charset="0"/>
+                      </a:rPr>
+                      <m:t>𝜑</m:t>
+                    </m:r>
+                    <m:sSub>
+                      <m:sSubPr>
+                        <m:ctrlPr>
+                          <a:rPr lang="en-US" sz="2200" i="1" noProof="1">
+                            <a:latin typeface="Cambria Math" panose="02040503050406030204" pitchFamily="18" charset="0"/>
+                            <a:ea typeface="Verdana" panose="020B0604030504040204" pitchFamily="34" charset="0"/>
+                          </a:rPr>
+                        </m:ctrlPr>
+                      </m:sSubPr>
+                      <m:e>
+                        <m:r>
+                          <a:rPr lang="en-US" sz="2200" i="1" noProof="1">
+                            <a:latin typeface="Cambria Math" panose="02040503050406030204" pitchFamily="18" charset="0"/>
+                            <a:ea typeface="Verdana" panose="020B0604030504040204" pitchFamily="34" charset="0"/>
+                          </a:rPr>
+                          <m:t> </m:t>
+                        </m:r>
+                        <m:r>
+                          <a:rPr lang="en-US" sz="2200" i="1" noProof="1">
+                            <a:latin typeface="Cambria Math" panose="02040503050406030204" pitchFamily="18" charset="0"/>
+                            <a:ea typeface="Verdana" panose="020B0604030504040204" pitchFamily="34" charset="0"/>
+                          </a:rPr>
+                          <m:t>𝑍</m:t>
+                        </m:r>
+                      </m:e>
+                      <m:sub>
+                        <m:r>
+                          <a:rPr lang="en-US" sz="2200" i="1" noProof="1">
+                            <a:latin typeface="Cambria Math" panose="02040503050406030204" pitchFamily="18" charset="0"/>
+                            <a:ea typeface="Verdana" panose="020B0604030504040204" pitchFamily="34" charset="0"/>
+                          </a:rPr>
+                          <m:t>𝑖</m:t>
+                        </m:r>
+                        <m:r>
+                          <a:rPr lang="en-US" sz="2200" i="1" noProof="1">
+                            <a:latin typeface="Cambria Math" panose="02040503050406030204" pitchFamily="18" charset="0"/>
+                            <a:ea typeface="Verdana" panose="020B0604030504040204" pitchFamily="34" charset="0"/>
+                          </a:rPr>
+                          <m:t>,</m:t>
+                        </m:r>
+                        <m:r>
+                          <a:rPr lang="en-US" sz="2200" i="1" noProof="1">
+                            <a:latin typeface="Cambria Math" panose="02040503050406030204" pitchFamily="18" charset="0"/>
+                            <a:ea typeface="Verdana" panose="020B0604030504040204" pitchFamily="34" charset="0"/>
+                          </a:rPr>
+                          <m:t>𝑡</m:t>
+                        </m:r>
+                      </m:sub>
+                    </m:sSub>
+                    <m:r>
                       <a:rPr lang="en-US" sz="2200" b="0" i="1" noProof="1" smtClean="0">
                         <a:latin typeface="Cambria Math" panose="02040503050406030204" pitchFamily="18" charset="0"/>
                         <a:ea typeface="Verdana" panose="020B0604030504040204" pitchFamily="34" charset="0"/>
@@ -11283,7 +11927,7 @@
                     <m:sSub>
                       <m:sSubPr>
                         <m:ctrlPr>
-                          <a:rPr lang="en-US" sz="1800" i="1" noProof="1">
+                          <a:rPr lang="en-US" sz="1900" i="1" noProof="1">
                             <a:solidFill>
                               <a:schemeClr val="tx1"/>
                             </a:solidFill>
@@ -11294,7 +11938,7 @@
                       </m:sSubPr>
                       <m:e>
                         <m:r>
-                          <a:rPr lang="en-US" sz="1800" i="1" noProof="1">
+                          <a:rPr lang="en-US" sz="1900" i="1" noProof="1">
                             <a:solidFill>
                               <a:schemeClr val="tx1"/>
                             </a:solidFill>
@@ -11306,7 +11950,7 @@
                       </m:e>
                       <m:sub>
                         <m:r>
-                          <a:rPr lang="en-US" sz="1800" i="1" noProof="1">
+                          <a:rPr lang="en-US" sz="1900" i="1" noProof="1">
                             <a:solidFill>
                               <a:schemeClr val="tx1"/>
                             </a:solidFill>
@@ -11316,7 +11960,7 @@
                           <m:t>𝑖</m:t>
                         </m:r>
                         <m:r>
-                          <a:rPr lang="en-US" sz="1800" i="1" noProof="1">
+                          <a:rPr lang="en-US" sz="1900" i="1" noProof="1">
                             <a:solidFill>
                               <a:schemeClr val="tx1"/>
                             </a:solidFill>
@@ -11326,7 +11970,7 @@
                           <m:t>,</m:t>
                         </m:r>
                         <m:r>
-                          <a:rPr lang="en-US" sz="1800" i="1" noProof="1">
+                          <a:rPr lang="en-US" sz="1900" i="1" noProof="1">
                             <a:solidFill>
                               <a:schemeClr val="tx1"/>
                             </a:solidFill>
@@ -11338,7 +11982,7 @@
                       </m:sub>
                     </m:sSub>
                     <m:r>
-                      <a:rPr lang="en-US" sz="1800" b="0" i="1" noProof="1" smtClean="0">
+                      <a:rPr lang="en-US" sz="1900" b="0" i="1" noProof="1" smtClean="0">
                         <a:solidFill>
                           <a:schemeClr val="tx1"/>
                         </a:solidFill>
@@ -11348,7 +11992,7 @@
                       <m:t>=1 </m:t>
                     </m:r>
                     <m:r>
-                      <a:rPr lang="en-US" sz="1800" b="0" i="0" noProof="1" smtClean="0">
+                      <a:rPr lang="en-US" sz="1900" b="0" i="0" noProof="1" smtClean="0">
                         <a:solidFill>
                           <a:schemeClr val="tx1"/>
                         </a:solidFill>
@@ -11444,7 +12088,7 @@
                     <m:sSub>
                       <m:sSubPr>
                         <m:ctrlPr>
-                          <a:rPr lang="en-US" sz="1800" i="1" noProof="1">
+                          <a:rPr lang="en-US" sz="1900" i="1" noProof="1">
                             <a:latin typeface="Cambria Math" panose="02040503050406030204" pitchFamily="18" charset="0"/>
                             <a:ea typeface="Verdana" panose="020B0604030504040204" pitchFamily="34" charset="0"/>
                           </a:rPr>
@@ -11452,7 +12096,7 @@
                       </m:sSubPr>
                       <m:e>
                         <m:r>
-                          <a:rPr lang="en-US" sz="1800" i="1" noProof="1">
+                          <a:rPr lang="en-US" sz="1900" i="1" noProof="1">
                             <a:latin typeface="Cambria Math" panose="02040503050406030204" pitchFamily="18" charset="0"/>
                             <a:ea typeface="Verdana" panose="020B0604030504040204" pitchFamily="34" charset="0"/>
                           </a:rPr>
@@ -11461,21 +12105,21 @@
                       </m:e>
                       <m:sub>
                         <m:r>
-                          <a:rPr lang="en-US" sz="1800" i="1" noProof="1">
+                          <a:rPr lang="en-US" sz="1900" i="1" noProof="1">
                             <a:latin typeface="Cambria Math" panose="02040503050406030204" pitchFamily="18" charset="0"/>
                             <a:ea typeface="Verdana" panose="020B0604030504040204" pitchFamily="34" charset="0"/>
                           </a:rPr>
                           <m:t>𝑖</m:t>
                         </m:r>
                         <m:r>
-                          <a:rPr lang="en-US" sz="1800" i="1" noProof="1">
+                          <a:rPr lang="en-US" sz="1900" i="1" noProof="1">
                             <a:latin typeface="Cambria Math" panose="02040503050406030204" pitchFamily="18" charset="0"/>
                             <a:ea typeface="Verdana" panose="020B0604030504040204" pitchFamily="34" charset="0"/>
                           </a:rPr>
                           <m:t>,</m:t>
                         </m:r>
                         <m:r>
-                          <a:rPr lang="en-US" sz="1800" i="1" noProof="1">
+                          <a:rPr lang="en-US" sz="1900" i="1" noProof="1">
                             <a:latin typeface="Cambria Math" panose="02040503050406030204" pitchFamily="18" charset="0"/>
                             <a:ea typeface="Verdana" panose="020B0604030504040204" pitchFamily="34" charset="0"/>
                           </a:rPr>
@@ -11530,7 +12174,7 @@
                     <m:sSubSup>
                       <m:sSubSupPr>
                         <m:ctrlPr>
-                          <a:rPr lang="en-US" sz="1800" i="1" noProof="1">
+                          <a:rPr lang="en-US" sz="1900" i="1" noProof="1">
                             <a:latin typeface="Cambria Math" panose="02040503050406030204" pitchFamily="18" charset="0"/>
                             <a:ea typeface="Verdana" panose="020B0604030504040204" pitchFamily="34" charset="0"/>
                           </a:rPr>
@@ -11538,7 +12182,7 @@
                       </m:sSubSupPr>
                       <m:e>
                         <m:r>
-                          <a:rPr lang="en-US" sz="1800" i="1" noProof="1">
+                          <a:rPr lang="en-US" sz="1900" i="1" noProof="1">
                             <a:latin typeface="Cambria Math" panose="02040503050406030204" pitchFamily="18" charset="0"/>
                             <a:ea typeface="Verdana" panose="020B0604030504040204" pitchFamily="34" charset="0"/>
                           </a:rPr>
@@ -11547,21 +12191,21 @@
                       </m:e>
                       <m:sub>
                         <m:r>
-                          <a:rPr lang="en-US" sz="1800" i="1" noProof="1">
+                          <a:rPr lang="en-US" sz="1900" i="1" noProof="1">
                             <a:latin typeface="Cambria Math" panose="02040503050406030204" pitchFamily="18" charset="0"/>
                             <a:ea typeface="Verdana" panose="020B0604030504040204" pitchFamily="34" charset="0"/>
                           </a:rPr>
                           <m:t>𝑖</m:t>
                         </m:r>
                         <m:r>
-                          <a:rPr lang="en-US" sz="1800" i="1" noProof="1">
+                          <a:rPr lang="en-US" sz="1900" i="1" noProof="1">
                             <a:latin typeface="Cambria Math" panose="02040503050406030204" pitchFamily="18" charset="0"/>
                             <a:ea typeface="Verdana" panose="020B0604030504040204" pitchFamily="34" charset="0"/>
                           </a:rPr>
                           <m:t>,</m:t>
                         </m:r>
                         <m:r>
-                          <a:rPr lang="en-US" sz="1800" i="1" noProof="1">
+                          <a:rPr lang="en-US" sz="1900" i="1" noProof="1">
                             <a:latin typeface="Cambria Math" panose="02040503050406030204" pitchFamily="18" charset="0"/>
                             <a:ea typeface="Verdana" panose="020B0604030504040204" pitchFamily="34" charset="0"/>
                           </a:rPr>
@@ -11570,7 +12214,7 @@
                       </m:sub>
                       <m:sup>
                         <m:r>
-                          <a:rPr lang="en-US" sz="1800" i="1" noProof="1">
+                          <a:rPr lang="en-US" sz="1900" i="1" noProof="1">
                             <a:latin typeface="Cambria Math" panose="02040503050406030204" pitchFamily="18" charset="0"/>
                             <a:ea typeface="Verdana" panose="020B0604030504040204" pitchFamily="34" charset="0"/>
                           </a:rPr>
@@ -11579,7 +12223,7 @@
                       </m:sup>
                     </m:sSubSup>
                     <m:r>
-                      <a:rPr lang="en-US" sz="1800" b="0" i="1" noProof="1" smtClean="0">
+                      <a:rPr lang="en-US" sz="1900" b="0" i="1" noProof="1" smtClean="0">
                         <a:latin typeface="Cambria Math" panose="02040503050406030204" pitchFamily="18" charset="0"/>
                         <a:ea typeface="Verdana" panose="020B0604030504040204" pitchFamily="34" charset="0"/>
                       </a:rPr>
@@ -11588,7 +12232,7 @@
                   </m:oMath>
                 </a14:m>
                 <a:r>
-                  <a:rPr lang="en-US" sz="1800" noProof="1">
+                  <a:rPr lang="en-US" sz="1900" noProof="1">
                     <a:ea typeface="Verdana" panose="020B0604030504040204" pitchFamily="34" charset="0"/>
                   </a:rPr>
                   <a:t> </a:t>
@@ -11598,7 +12242,7 @@
                     <m:sSub>
                       <m:sSubPr>
                         <m:ctrlPr>
-                          <a:rPr lang="en-US" sz="1800" i="1" noProof="1">
+                          <a:rPr lang="en-US" sz="1900" i="1" noProof="1">
                             <a:latin typeface="Cambria Math" panose="02040503050406030204" pitchFamily="18" charset="0"/>
                             <a:ea typeface="Verdana" panose="020B0604030504040204" pitchFamily="34" charset="0"/>
                           </a:rPr>
@@ -11606,7 +12250,7 @@
                       </m:sSubPr>
                       <m:e>
                         <m:r>
-                          <a:rPr lang="en-US" sz="1800" i="1" noProof="1">
+                          <a:rPr lang="en-US" sz="1900" i="1" noProof="1">
                             <a:latin typeface="Cambria Math" panose="02040503050406030204" pitchFamily="18" charset="0"/>
                             <a:ea typeface="Verdana" panose="020B0604030504040204" pitchFamily="34" charset="0"/>
                           </a:rPr>
@@ -11615,21 +12259,21 @@
                       </m:e>
                       <m:sub>
                         <m:r>
-                          <a:rPr lang="en-US" sz="1800" i="1" noProof="1">
+                          <a:rPr lang="en-US" sz="1900" i="1" noProof="1">
                             <a:latin typeface="Cambria Math" panose="02040503050406030204" pitchFamily="18" charset="0"/>
                             <a:ea typeface="Verdana" panose="020B0604030504040204" pitchFamily="34" charset="0"/>
                           </a:rPr>
                           <m:t>𝑖</m:t>
                         </m:r>
                         <m:r>
-                          <a:rPr lang="en-US" sz="1800" i="1" noProof="1">
+                          <a:rPr lang="en-US" sz="1900" i="1" noProof="1">
                             <a:latin typeface="Cambria Math" panose="02040503050406030204" pitchFamily="18" charset="0"/>
                             <a:ea typeface="Verdana" panose="020B0604030504040204" pitchFamily="34" charset="0"/>
                           </a:rPr>
                           <m:t>,</m:t>
                         </m:r>
                         <m:r>
-                          <a:rPr lang="en-US" sz="1800" i="1" noProof="1">
+                          <a:rPr lang="en-US" sz="1900" i="1" noProof="1">
                             <a:latin typeface="Cambria Math" panose="02040503050406030204" pitchFamily="18" charset="0"/>
                             <a:ea typeface="Verdana" panose="020B0604030504040204" pitchFamily="34" charset="0"/>
                           </a:rPr>
@@ -11648,7 +12292,7 @@
                     <m:sSub>
                       <m:sSubPr>
                         <m:ctrlPr>
-                          <a:rPr lang="en-US" sz="2000" i="1" noProof="1">
+                          <a:rPr lang="en-US" sz="1900" i="1" noProof="1">
                             <a:latin typeface="Cambria Math" panose="02040503050406030204" pitchFamily="18" charset="0"/>
                             <a:ea typeface="Verdana" panose="020B0604030504040204" pitchFamily="34" charset="0"/>
                           </a:rPr>
@@ -11656,7 +12300,7 @@
                       </m:sSubPr>
                       <m:e>
                         <m:r>
-                          <a:rPr lang="en-US" sz="2000" i="1" noProof="1">
+                          <a:rPr lang="en-US" sz="1900" i="1" noProof="1">
                             <a:latin typeface="Cambria Math" panose="02040503050406030204" pitchFamily="18" charset="0"/>
                             <a:ea typeface="Verdana" panose="020B0604030504040204" pitchFamily="34" charset="0"/>
                           </a:rPr>
@@ -11665,21 +12309,21 @@
                       </m:e>
                       <m:sub>
                         <m:r>
-                          <a:rPr lang="en-US" sz="2000" i="1" noProof="1">
+                          <a:rPr lang="en-US" sz="1900" i="1" noProof="1">
                             <a:latin typeface="Cambria Math" panose="02040503050406030204" pitchFamily="18" charset="0"/>
                             <a:ea typeface="Verdana" panose="020B0604030504040204" pitchFamily="34" charset="0"/>
                           </a:rPr>
                           <m:t>𝑖</m:t>
                         </m:r>
                         <m:r>
-                          <a:rPr lang="en-US" sz="2000" i="1" noProof="1">
+                          <a:rPr lang="en-US" sz="1900" i="1" noProof="1">
                             <a:latin typeface="Cambria Math" panose="02040503050406030204" pitchFamily="18" charset="0"/>
                             <a:ea typeface="Verdana" panose="020B0604030504040204" pitchFamily="34" charset="0"/>
                           </a:rPr>
                           <m:t>,</m:t>
                         </m:r>
                         <m:r>
-                          <a:rPr lang="en-US" sz="2000" i="1" noProof="1">
+                          <a:rPr lang="en-US" sz="1900" i="1" noProof="1">
                             <a:latin typeface="Cambria Math" panose="02040503050406030204" pitchFamily="18" charset="0"/>
                             <a:ea typeface="Verdana" panose="020B0604030504040204" pitchFamily="34" charset="0"/>
                           </a:rPr>
@@ -11688,7 +12332,7 @@
                       </m:sub>
                     </m:sSub>
                     <m:r>
-                      <a:rPr lang="en-US" sz="2000" b="0" i="1" noProof="1" smtClean="0">
+                      <a:rPr lang="en-US" sz="1900" b="0" i="1" noProof="1" smtClean="0">
                         <a:latin typeface="Cambria Math" panose="02040503050406030204" pitchFamily="18" charset="0"/>
                         <a:ea typeface="Verdana" panose="020B0604030504040204" pitchFamily="34" charset="0"/>
                       </a:rPr>
@@ -11698,7 +12342,7 @@
                       <m:rPr>
                         <m:sty m:val="p"/>
                       </m:rPr>
-                      <a:rPr lang="en-US" sz="2000" b="0" i="0" noProof="1" smtClean="0">
+                      <a:rPr lang="en-US" sz="1900" b="0" i="0" noProof="1" smtClean="0">
                         <a:latin typeface="Cambria Math" panose="02040503050406030204" pitchFamily="18" charset="0"/>
                         <a:ea typeface="Verdana" panose="020B0604030504040204" pitchFamily="34" charset="0"/>
                       </a:rPr>
@@ -11707,7 +12351,7 @@
                     <m:d>
                       <m:dPr>
                         <m:ctrlPr>
-                          <a:rPr lang="en-US" sz="2000" b="0" i="1" noProof="1" smtClean="0">
+                          <a:rPr lang="en-US" sz="1900" b="0" i="1" noProof="1" smtClean="0">
                             <a:latin typeface="Cambria Math" panose="02040503050406030204" pitchFamily="18" charset="0"/>
                             <a:ea typeface="Verdana" panose="020B0604030504040204" pitchFamily="34" charset="0"/>
                           </a:rPr>
@@ -11715,7 +12359,7 @@
                       </m:dPr>
                       <m:e>
                         <m:r>
-                          <a:rPr lang="en-US" sz="2000" b="0" i="1" noProof="1" smtClean="0">
+                          <a:rPr lang="en-US" sz="1900" b="0" i="1" noProof="1" smtClean="0">
                             <a:latin typeface="Cambria Math" panose="02040503050406030204" pitchFamily="18" charset="0"/>
                             <a:ea typeface="Verdana" panose="020B0604030504040204" pitchFamily="34" charset="0"/>
                           </a:rPr>
@@ -11724,7 +12368,7 @@
                       </m:e>
                     </m:d>
                     <m:r>
-                      <a:rPr lang="en-US" sz="2000" b="0" i="1" noProof="1" smtClean="0">
+                      <a:rPr lang="en-US" sz="1900" b="0" i="1" noProof="1" smtClean="0">
                         <a:latin typeface="Cambria Math" panose="02040503050406030204" pitchFamily="18" charset="0"/>
                         <a:ea typeface="Verdana" panose="020B0604030504040204" pitchFamily="34" charset="0"/>
                       </a:rPr>
@@ -11734,14 +12378,14 @@
                       <m:rPr>
                         <m:sty m:val="p"/>
                       </m:rPr>
-                      <a:rPr lang="en-US" sz="2000" b="0" i="0" noProof="1" smtClean="0">
+                      <a:rPr lang="en-US" sz="1900" b="0" i="0" noProof="1" smtClean="0">
                         <a:latin typeface="Cambria Math" panose="02040503050406030204" pitchFamily="18" charset="0"/>
                         <a:ea typeface="Verdana" panose="020B0604030504040204" pitchFamily="34" charset="0"/>
                       </a:rPr>
                       <m:t>otherwise</m:t>
                     </m:r>
                     <m:r>
-                      <a:rPr lang="en-US" sz="2000" b="0" i="1" noProof="1" smtClean="0">
+                      <a:rPr lang="en-US" sz="1900" b="0" i="1" noProof="1" smtClean="0">
                         <a:latin typeface="Cambria Math" panose="02040503050406030204" pitchFamily="18" charset="0"/>
                         <a:ea typeface="Verdana" panose="020B0604030504040204" pitchFamily="34" charset="0"/>
                       </a:rPr>
@@ -11768,7 +12412,7 @@
                     <m:sSub>
                       <m:sSubPr>
                         <m:ctrlPr>
-                          <a:rPr lang="en-US" sz="1800" i="1" noProof="1">
+                          <a:rPr lang="en-US" sz="1900" i="1" noProof="1">
                             <a:latin typeface="Cambria Math" panose="02040503050406030204" pitchFamily="18" charset="0"/>
                             <a:ea typeface="Verdana" panose="020B0604030504040204" pitchFamily="34" charset="0"/>
                           </a:rPr>
@@ -11776,7 +12420,7 @@
                       </m:sSubPr>
                       <m:e>
                         <m:r>
-                          <a:rPr lang="en-US" sz="1800" i="1" noProof="1">
+                          <a:rPr lang="en-US" sz="1900" i="1" noProof="1">
                             <a:latin typeface="Cambria Math" panose="02040503050406030204" pitchFamily="18" charset="0"/>
                             <a:ea typeface="Verdana" panose="020B0604030504040204" pitchFamily="34" charset="0"/>
                           </a:rPr>
@@ -11785,7 +12429,7 @@
                       </m:e>
                       <m:sub>
                         <m:r>
-                          <a:rPr lang="en-US" sz="1800" i="1" noProof="1">
+                          <a:rPr lang="en-US" sz="1900" i="1" noProof="1">
                             <a:latin typeface="Cambria Math" panose="02040503050406030204" pitchFamily="18" charset="0"/>
                             <a:ea typeface="Verdana" panose="020B0604030504040204" pitchFamily="34" charset="0"/>
                           </a:rPr>
@@ -11794,7 +12438,7 @@
                       </m:sub>
                     </m:sSub>
                     <m:r>
-                      <a:rPr lang="en-US" sz="1800" b="0" i="1" noProof="1" smtClean="0">
+                      <a:rPr lang="en-US" sz="1900" b="0" i="1" noProof="1" smtClean="0">
                         <a:latin typeface="Cambria Math" panose="02040503050406030204" pitchFamily="18" charset="0"/>
                         <a:ea typeface="Verdana" panose="020B0604030504040204" pitchFamily="34" charset="0"/>
                       </a:rPr>
@@ -11815,7 +12459,7 @@
                     <m:sSub>
                       <m:sSubPr>
                         <m:ctrlPr>
-                          <a:rPr lang="en-US" sz="1800" i="1" noProof="1">
+                          <a:rPr lang="en-US" sz="1900" i="1" noProof="1">
                             <a:latin typeface="Cambria Math" panose="02040503050406030204" pitchFamily="18" charset="0"/>
                             <a:ea typeface="Verdana" panose="020B0604030504040204" pitchFamily="34" charset="0"/>
                           </a:rPr>
@@ -11823,7 +12467,7 @@
                       </m:sSubPr>
                       <m:e>
                         <m:r>
-                          <a:rPr lang="en-US" sz="1800" i="1" noProof="1">
+                          <a:rPr lang="en-US" sz="1900" i="1" noProof="1">
                             <a:latin typeface="Cambria Math" panose="02040503050406030204" pitchFamily="18" charset="0"/>
                             <a:ea typeface="Verdana" panose="020B0604030504040204" pitchFamily="34" charset="0"/>
                           </a:rPr>
@@ -11832,7 +12476,7 @@
                       </m:e>
                       <m:sub>
                         <m:r>
-                          <a:rPr lang="en-US" sz="1800" i="1" noProof="1">
+                          <a:rPr lang="en-US" sz="1900" i="1" noProof="1">
                             <a:latin typeface="Cambria Math" panose="02040503050406030204" pitchFamily="18" charset="0"/>
                             <a:ea typeface="Verdana" panose="020B0604030504040204" pitchFamily="34" charset="0"/>
                           </a:rPr>
@@ -11841,7 +12485,7 @@
                       </m:sub>
                     </m:sSub>
                     <m:r>
-                      <a:rPr lang="en-US" sz="1800" b="0" i="1" noProof="1" smtClean="0">
+                      <a:rPr lang="en-US" sz="1900" b="0" i="1" noProof="1" smtClean="0">
                         <a:latin typeface="Cambria Math" panose="02040503050406030204" pitchFamily="18" charset="0"/>
                         <a:ea typeface="Verdana" panose="020B0604030504040204" pitchFamily="34" charset="0"/>
                       </a:rPr>
@@ -11867,18 +12511,74 @@
                 </a:r>
                 <a:r>
                   <a:rPr lang="nl-NL" sz="1800" dirty="0"/>
-                  <a:t> 0)</a:t>
+                  <a:t> 0); </a:t>
                 </a:r>
-                <a:endParaRPr lang="nl-NL" sz="1800" dirty="0">
-                  <a:solidFill>
-                    <a:schemeClr val="tx1"/>
-                  </a:solidFill>
-                </a:endParaRPr>
+                <a14:m>
+                  <m:oMath xmlns:m="http://schemas.openxmlformats.org/officeDocument/2006/math">
+                    <m:sSub>
+                      <m:sSubPr>
+                        <m:ctrlPr>
+                          <a:rPr lang="en-US" sz="1900" i="1" noProof="1">
+                            <a:latin typeface="Cambria Math" panose="02040503050406030204" pitchFamily="18" charset="0"/>
+                            <a:ea typeface="Verdana" panose="020B0604030504040204" pitchFamily="34" charset="0"/>
+                          </a:rPr>
+                        </m:ctrlPr>
+                      </m:sSubPr>
+                      <m:e>
+                        <m:r>
+                          <a:rPr lang="en-US" sz="1900" i="1" noProof="1">
+                            <a:latin typeface="Cambria Math" panose="02040503050406030204" pitchFamily="18" charset="0"/>
+                            <a:ea typeface="Verdana" panose="020B0604030504040204" pitchFamily="34" charset="0"/>
+                          </a:rPr>
+                          <m:t> </m:t>
+                        </m:r>
+                        <m:r>
+                          <a:rPr lang="en-US" sz="1900" i="1" noProof="1">
+                            <a:latin typeface="Cambria Math" panose="02040503050406030204" pitchFamily="18" charset="0"/>
+                            <a:ea typeface="Verdana" panose="020B0604030504040204" pitchFamily="34" charset="0"/>
+                          </a:rPr>
+                          <m:t>𝑍</m:t>
+                        </m:r>
+                      </m:e>
+                      <m:sub>
+                        <m:r>
+                          <a:rPr lang="en-US" sz="1900" i="1" noProof="1">
+                            <a:latin typeface="Cambria Math" panose="02040503050406030204" pitchFamily="18" charset="0"/>
+                            <a:ea typeface="Verdana" panose="020B0604030504040204" pitchFamily="34" charset="0"/>
+                          </a:rPr>
+                          <m:t>𝑖</m:t>
+                        </m:r>
+                        <m:r>
+                          <a:rPr lang="en-US" sz="1900" i="1" noProof="1">
+                            <a:latin typeface="Cambria Math" panose="02040503050406030204" pitchFamily="18" charset="0"/>
+                            <a:ea typeface="Verdana" panose="020B0604030504040204" pitchFamily="34" charset="0"/>
+                          </a:rPr>
+                          <m:t>,</m:t>
+                        </m:r>
+                        <m:r>
+                          <a:rPr lang="en-US" sz="1900" i="1" noProof="1">
+                            <a:latin typeface="Cambria Math" panose="02040503050406030204" pitchFamily="18" charset="0"/>
+                            <a:ea typeface="Verdana" panose="020B0604030504040204" pitchFamily="34" charset="0"/>
+                          </a:rPr>
+                          <m:t>𝑡</m:t>
+                        </m:r>
+                      </m:sub>
+                    </m:sSub>
+                  </m:oMath>
+                </a14:m>
+                <a:r>
+                  <a:rPr lang="nl-NL" sz="1800" dirty="0">
+                    <a:solidFill>
+                      <a:schemeClr val="tx1"/>
+                    </a:solidFill>
+                  </a:rPr>
+                  <a:t>control variables</a:t>
+                </a:r>
               </a:p>
             </p:txBody>
           </p:sp>
         </mc:Choice>
-        <mc:Fallback xmlns="">
+        <mc:Fallback>
           <p:sp>
             <p:nvSpPr>
               <p:cNvPr id="2" name="Content Placeholder 2">
@@ -11897,7 +12597,7 @@
             </p:nvSpPr>
             <p:spPr>
               <a:xfrm>
-                <a:off x="448056" y="862238"/>
+                <a:off x="429768" y="825662"/>
                 <a:ext cx="8505051" cy="5679439"/>
               </a:xfrm>
               <a:blipFill>
@@ -12021,8 +12721,8 @@
         </p:nvSpPr>
         <p:spPr>
           <a:xfrm>
-            <a:off x="281720" y="1072550"/>
-            <a:ext cx="8396454" cy="5679439"/>
+            <a:off x="105536" y="1016441"/>
+            <a:ext cx="8756744" cy="5679439"/>
           </a:xfrm>
         </p:spPr>
         <p:txBody>
@@ -12046,7 +12746,22 @@
                 <a:latin typeface="Verdana" panose="020B0604030504040204" pitchFamily="34" charset="0"/>
                 <a:ea typeface="Verdana" panose="020B0604030504040204" pitchFamily="34" charset="0"/>
               </a:rPr>
-              <a:t>Only ICT/AI-related trade exposure has an additional effect on positive growth surprise in shock years</a:t>
+              <a:t>ICT/AI-related investment </a:t>
+            </a:r>
+            <a:r>
+              <a:rPr lang="en-US" sz="1800" noProof="1">
+                <a:latin typeface="Arial" panose="020B0604020202020204" pitchFamily="34" charset="0"/>
+                <a:ea typeface="Verdana" panose="020B0604030504040204" pitchFamily="34" charset="0"/>
+                <a:cs typeface="Arial" panose="020B0604020202020204" pitchFamily="34" charset="0"/>
+              </a:rPr>
+              <a:t>→</a:t>
+            </a:r>
+            <a:r>
+              <a:rPr lang="en-US" sz="1800" noProof="1">
+                <a:latin typeface="Verdana" panose="020B0604030504040204" pitchFamily="34" charset="0"/>
+                <a:ea typeface="Verdana" panose="020B0604030504040204" pitchFamily="34" charset="0"/>
+              </a:rPr>
+              <a:t> positive average effect on growth surprises</a:t>
             </a:r>
           </a:p>
           <a:p>
@@ -12065,7 +12780,22 @@
                 <a:latin typeface="Verdana" panose="020B0604030504040204" pitchFamily="34" charset="0"/>
                 <a:ea typeface="Verdana" panose="020B0604030504040204" pitchFamily="34" charset="0"/>
               </a:rPr>
-              <a:t>Confirming the inights from the unconditional tests</a:t>
+              <a:t>ICT/AI-related trade exposure </a:t>
+            </a:r>
+            <a:r>
+              <a:rPr lang="en-US" sz="1800" noProof="1">
+                <a:latin typeface="Arial" panose="020B0604020202020204" pitchFamily="34" charset="0"/>
+                <a:ea typeface="Verdana" panose="020B0604030504040204" pitchFamily="34" charset="0"/>
+                <a:cs typeface="Arial" panose="020B0604020202020204" pitchFamily="34" charset="0"/>
+              </a:rPr>
+              <a:t>→</a:t>
+            </a:r>
+            <a:r>
+              <a:rPr lang="en-US" sz="1800" noProof="1">
+                <a:latin typeface="Verdana" panose="020B0604030504040204" pitchFamily="34" charset="0"/>
+                <a:ea typeface="Verdana" panose="020B0604030504040204" pitchFamily="34" charset="0"/>
+              </a:rPr>
+              <a:t> additional effect on positive growth surprise in shock years, confirming the unconditional tests</a:t>
             </a:r>
           </a:p>
           <a:p>
@@ -12101,8 +12831,8 @@
         </p:nvSpPr>
         <p:spPr>
           <a:xfrm>
-            <a:off x="63547" y="5399568"/>
-            <a:ext cx="8748822" cy="600164"/>
+            <a:off x="163552" y="5061145"/>
+            <a:ext cx="8748822" cy="1107996"/>
           </a:xfrm>
           <a:prstGeom prst="rect">
             <a:avLst/>
@@ -12132,7 +12862,23 @@
                   <a:srgbClr val="002060"/>
                 </a:solidFill>
               </a:rPr>
-              <a:t>Explanatory variables are standardised (z-score), except for dummy variable.</a:t>
+              <a:t>Explanatory variables are standardised and included one period lagged (to address endogeneity concerns and numerator effects in the ratios based on GDP as numerator). In each equation, one of the AI/ICT-related variables is included in </a:t>
+            </a:r>
+            <a:r>
+              <a:rPr lang="en-US" sz="1100" i="1" noProof="1">
+                <a:solidFill>
+                  <a:srgbClr val="002060"/>
+                </a:solidFill>
+              </a:rPr>
+              <a:t>X</a:t>
+            </a:r>
+            <a:r>
+              <a:rPr lang="en-US" sz="1100" noProof="1">
+                <a:solidFill>
+                  <a:srgbClr val="002060"/>
+                </a:solidFill>
+              </a:rPr>
+              <a:t>. As control variable, state aid as ratio of GDP is included (contemporaneous value of state aid and one period lagged GDP).</a:t>
             </a:r>
             <a:endParaRPr lang="nl-NL" sz="1100" noProof="1">
               <a:solidFill>
@@ -12144,10 +12890,10 @@
       </p:sp>
       <p:pic>
         <p:nvPicPr>
-          <p:cNvPr id="3" name="Picture 2">
+          <p:cNvPr id="10" name="Picture 9">
             <a:extLst>
               <a:ext uri="{FF2B5EF4-FFF2-40B4-BE49-F238E27FC236}">
-                <a16:creationId xmlns:a16="http://schemas.microsoft.com/office/drawing/2014/main" id="{A69985F4-E5BB-D076-899F-DF9BEDA0FAA6}"/>
+                <a16:creationId xmlns:a16="http://schemas.microsoft.com/office/drawing/2014/main" id="{C9A895D5-4DBA-4775-3A49-739C761362E5}"/>
               </a:ext>
             </a:extLst>
           </p:cNvPr>
@@ -12164,158 +12910,14 @@
         </p:blipFill>
         <p:spPr>
           <a:xfrm>
-            <a:off x="226030" y="2791922"/>
-            <a:ext cx="8452144" cy="2400555"/>
+            <a:off x="281720" y="2617342"/>
+            <a:ext cx="8630654" cy="2302129"/>
           </a:xfrm>
           <a:prstGeom prst="rect">
             <a:avLst/>
           </a:prstGeom>
         </p:spPr>
       </p:pic>
-      <mc:AlternateContent xmlns:mc="http://schemas.openxmlformats.org/markup-compatibility/2006" xmlns:a14="http://schemas.microsoft.com/office/drawing/2010/main">
-        <mc:Choice Requires="a14">
-          <p:sp>
-            <p:nvSpPr>
-              <p:cNvPr id="7" name="TextBox 6">
-                <a:extLst>
-                  <a:ext uri="{FF2B5EF4-FFF2-40B4-BE49-F238E27FC236}">
-                    <a16:creationId xmlns:a16="http://schemas.microsoft.com/office/drawing/2014/main" id="{475F513A-C52D-7D55-1C0D-2A6BC3630CED}"/>
-                  </a:ext>
-                </a:extLst>
-              </p:cNvPr>
-              <p:cNvSpPr txBox="1"/>
-              <p:nvPr/>
-            </p:nvSpPr>
-            <p:spPr>
-              <a:xfrm>
-                <a:off x="281720" y="3413414"/>
-                <a:ext cx="2543776" cy="381515"/>
-              </a:xfrm>
-              <a:prstGeom prst="rect">
-                <a:avLst/>
-              </a:prstGeom>
-              <a:noFill/>
-            </p:spPr>
-            <p:txBody>
-              <a:bodyPr wrap="square" rtlCol="0">
-                <a:spAutoFit/>
-              </a:bodyPr>
-              <a:lstStyle/>
-              <a:p>
-                <a:r>
-                  <a:rPr lang="en-GB" i="1" dirty="0">
-                    <a:latin typeface="Times New Roman" panose="02020603050405020304" pitchFamily="18" charset="0"/>
-                    <a:cs typeface="Times New Roman" panose="02020603050405020304" pitchFamily="18" charset="0"/>
-                  </a:rPr>
-                  <a:t>Variable</a:t>
-                </a:r>
-                <a:r>
-                  <a:rPr lang="en-GB" i="1" dirty="0"/>
-                  <a:t> </a:t>
-                </a:r>
-                <a14:m>
-                  <m:oMath xmlns:m="http://schemas.openxmlformats.org/officeDocument/2006/math">
-                    <m:sSub>
-                      <m:sSubPr>
-                        <m:ctrlPr>
-                          <a:rPr lang="en-US" i="1" noProof="1">
-                            <a:latin typeface="Cambria Math" panose="02040503050406030204" pitchFamily="18" charset="0"/>
-                            <a:ea typeface="Verdana" panose="020B0604030504040204" pitchFamily="34" charset="0"/>
-                          </a:rPr>
-                        </m:ctrlPr>
-                      </m:sSubPr>
-                      <m:e>
-                        <m:r>
-                          <a:rPr lang="en-US" i="1" noProof="1">
-                            <a:latin typeface="Cambria Math" panose="02040503050406030204" pitchFamily="18" charset="0"/>
-                            <a:ea typeface="Verdana" panose="020B0604030504040204" pitchFamily="34" charset="0"/>
-                          </a:rPr>
-                          <m:t> </m:t>
-                        </m:r>
-                        <m:r>
-                          <a:rPr lang="en-US" i="1" noProof="1">
-                            <a:latin typeface="Cambria Math" panose="02040503050406030204" pitchFamily="18" charset="0"/>
-                            <a:ea typeface="Verdana" panose="020B0604030504040204" pitchFamily="34" charset="0"/>
-                          </a:rPr>
-                          <m:t>𝑋</m:t>
-                        </m:r>
-                      </m:e>
-                      <m:sub>
-                        <m:r>
-                          <a:rPr lang="en-US" i="1" noProof="1">
-                            <a:latin typeface="Cambria Math" panose="02040503050406030204" pitchFamily="18" charset="0"/>
-                            <a:ea typeface="Verdana" panose="020B0604030504040204" pitchFamily="34" charset="0"/>
-                          </a:rPr>
-                          <m:t>𝑖</m:t>
-                        </m:r>
-                        <m:r>
-                          <a:rPr lang="en-US" i="1" noProof="1">
-                            <a:latin typeface="Cambria Math" panose="02040503050406030204" pitchFamily="18" charset="0"/>
-                            <a:ea typeface="Verdana" panose="020B0604030504040204" pitchFamily="34" charset="0"/>
-                          </a:rPr>
-                          <m:t>,</m:t>
-                        </m:r>
-                        <m:r>
-                          <a:rPr lang="en-US" i="1" noProof="1">
-                            <a:latin typeface="Cambria Math" panose="02040503050406030204" pitchFamily="18" charset="0"/>
-                            <a:ea typeface="Verdana" panose="020B0604030504040204" pitchFamily="34" charset="0"/>
-                          </a:rPr>
-                          <m:t>𝑡</m:t>
-                        </m:r>
-                      </m:sub>
-                    </m:sSub>
-                  </m:oMath>
-                </a14:m>
-                <a:endParaRPr lang="en-GB" dirty="0"/>
-              </a:p>
-            </p:txBody>
-          </p:sp>
-        </mc:Choice>
-        <mc:Fallback xmlns="">
-          <p:sp>
-            <p:nvSpPr>
-              <p:cNvPr id="7" name="TextBox 6">
-                <a:extLst>
-                  <a:ext uri="{FF2B5EF4-FFF2-40B4-BE49-F238E27FC236}">
-                    <a16:creationId xmlns:a16="http://schemas.microsoft.com/office/drawing/2014/main" id="{475F513A-C52D-7D55-1C0D-2A6BC3630CED}"/>
-                  </a:ext>
-                </a:extLst>
-              </p:cNvPr>
-              <p:cNvSpPr txBox="1">
-                <a:spLocks noRot="1" noChangeAspect="1" noMove="1" noResize="1" noEditPoints="1" noAdjustHandles="1" noChangeArrowheads="1" noChangeShapeType="1" noTextEdit="1"/>
-              </p:cNvSpPr>
-              <p:nvPr/>
-            </p:nvSpPr>
-            <p:spPr>
-              <a:xfrm>
-                <a:off x="281720" y="3413414"/>
-                <a:ext cx="2543776" cy="381515"/>
-              </a:xfrm>
-              <a:prstGeom prst="rect">
-                <a:avLst/>
-              </a:prstGeom>
-              <a:blipFill>
-                <a:blip r:embed="rId4"/>
-                <a:stretch>
-                  <a:fillRect l="-1914" t="-9524" b="-20635"/>
-                </a:stretch>
-              </a:blipFill>
-            </p:spPr>
-            <p:txBody>
-              <a:bodyPr/>
-              <a:lstStyle/>
-              <a:p>
-                <a:r>
-                  <a:rPr lang="en-GB">
-                    <a:noFill/>
-                  </a:rPr>
-                  <a:t> </a:t>
-                </a:r>
-              </a:p>
-            </p:txBody>
-          </p:sp>
-        </mc:Fallback>
-      </mc:AlternateContent>
     </p:spTree>
     <p:extLst>
       <p:ext uri="{BB962C8B-B14F-4D97-AF65-F5344CB8AC3E}">

--- a/Resilience.pptx
+++ b/Resilience.pptx
@@ -156,7 +156,7 @@
 <file path=ppt/revisionInfo.xml><?xml version="1.0" encoding="utf-8"?>
 <p1510:revInfo xmlns:a="http://schemas.openxmlformats.org/drawingml/2006/main" xmlns:r="http://schemas.openxmlformats.org/officeDocument/2006/relationships" xmlns:p1510="http://schemas.microsoft.com/office/powerpoint/2015/10/main">
   <p1510:revLst>
-    <p1510:client id="{13B43BEF-9B9B-431D-9308-0B2B126B7992}" v="62" dt="2026-09-23T10:25:06.968"/>
+    <p1510:client id="{13B43BEF-9B9B-431D-9308-0B2B126B7992}" v="90" dt="2026-09-23T12:20:25.834"/>
   </p1510:revLst>
 </p1510:revInfo>
 </file>
@@ -166,7 +166,7 @@
   <pc:docChgLst>
     <pc:chgData name="Jan Willem van den End (EBO_CMA)" userId="32ade95a-e024-4672-952f-5ed8641a9e00" providerId="ADAL" clId="{3BBBE02E-ACD4-4586-9407-5E79BF620DF1}"/>
     <pc:docChg chg="undo redo custSel addSld modSld">
-      <pc:chgData name="Jan Willem van den End (EBO_CMA)" userId="32ade95a-e024-4672-952f-5ed8641a9e00" providerId="ADAL" clId="{3BBBE02E-ACD4-4586-9407-5E79BF620DF1}" dt="2026-09-23T10:27:23.811" v="4052" actId="20577"/>
+      <pc:chgData name="Jan Willem van den End (EBO_CMA)" userId="32ade95a-e024-4672-952f-5ed8641a9e00" providerId="ADAL" clId="{3BBBE02E-ACD4-4586-9407-5E79BF620DF1}" dt="2026-09-23T12:20:25.834" v="4079" actId="20577"/>
       <pc:docMkLst>
         <pc:docMk/>
       </pc:docMkLst>
@@ -372,13 +372,13 @@
         </pc:picChg>
       </pc:sldChg>
       <pc:sldChg chg="modSp mod modNotesTx">
-        <pc:chgData name="Jan Willem van den End (EBO_CMA)" userId="32ade95a-e024-4672-952f-5ed8641a9e00" providerId="ADAL" clId="{3BBBE02E-ACD4-4586-9407-5E79BF620DF1}" dt="2026-09-23T10:27:23.811" v="4052" actId="20577"/>
+        <pc:chgData name="Jan Willem van den End (EBO_CMA)" userId="32ade95a-e024-4672-952f-5ed8641a9e00" providerId="ADAL" clId="{3BBBE02E-ACD4-4586-9407-5E79BF620DF1}" dt="2026-09-23T12:20:25.834" v="4079" actId="20577"/>
         <pc:sldMkLst>
           <pc:docMk/>
           <pc:sldMk cId="515665883" sldId="793"/>
         </pc:sldMkLst>
         <pc:spChg chg="mod">
-          <ac:chgData name="Jan Willem van den End (EBO_CMA)" userId="32ade95a-e024-4672-952f-5ed8641a9e00" providerId="ADAL" clId="{3BBBE02E-ACD4-4586-9407-5E79BF620DF1}" dt="2026-09-23T09:11:21.197" v="2920" actId="207"/>
+          <ac:chgData name="Jan Willem van den End (EBO_CMA)" userId="32ade95a-e024-4672-952f-5ed8641a9e00" providerId="ADAL" clId="{3BBBE02E-ACD4-4586-9407-5E79BF620DF1}" dt="2026-09-23T12:20:25.834" v="4079" actId="20577"/>
           <ac:spMkLst>
             <pc:docMk/>
             <pc:sldMk cId="515665883" sldId="793"/>
@@ -10749,6 +10749,13 @@
                           </a:rPr>
                           <m:t>𝑡</m:t>
                         </m:r>
+                        <m:r>
+                          <a:rPr lang="en-US" sz="2200" b="0" i="1" noProof="1" smtClean="0">
+                            <a:latin typeface="Cambria Math" panose="02040503050406030204" pitchFamily="18" charset="0"/>
+                            <a:ea typeface="Verdana" panose="020B0604030504040204" pitchFamily="34" charset="0"/>
+                          </a:rPr>
+                          <m:t>−1</m:t>
+                        </m:r>
                       </m:sub>
                     </m:sSub>
                     <m:r>
@@ -10811,6 +10818,13 @@
                             <a:ea typeface="Verdana" panose="020B0604030504040204" pitchFamily="34" charset="0"/>
                           </a:rPr>
                           <m:t>𝑡</m:t>
+                        </m:r>
+                        <m:r>
+                          <a:rPr lang="en-US" sz="2200" b="0" i="1" noProof="1" smtClean="0">
+                            <a:latin typeface="Cambria Math" panose="02040503050406030204" pitchFamily="18" charset="0"/>
+                            <a:ea typeface="Verdana" panose="020B0604030504040204" pitchFamily="34" charset="0"/>
+                          </a:rPr>
+                          <m:t>−1</m:t>
                         </m:r>
                       </m:sub>
                     </m:sSub>
@@ -11161,15 +11175,15 @@
                           </a:rPr>
                           <m:t>𝑡</m:t>
                         </m:r>
+                        <m:r>
+                          <a:rPr lang="en-US" sz="2200" b="0" i="1" noProof="1" smtClean="0">
+                            <a:latin typeface="Cambria Math" panose="02040503050406030204" pitchFamily="18" charset="0"/>
+                            <a:ea typeface="Verdana" panose="020B0604030504040204" pitchFamily="34" charset="0"/>
+                          </a:rPr>
+                          <m:t>−1</m:t>
+                        </m:r>
                       </m:sub>
                     </m:sSub>
-                    <m:r>
-                      <a:rPr lang="en-US" sz="2200" b="0" i="1" noProof="1" smtClean="0">
-                        <a:latin typeface="Cambria Math" panose="02040503050406030204" pitchFamily="18" charset="0"/>
-                        <a:ea typeface="Verdana" panose="020B0604030504040204" pitchFamily="34" charset="0"/>
-                      </a:rPr>
-                      <m:t> </m:t>
-                    </m:r>
                     <m:r>
                       <a:rPr lang="en-US" sz="2200" i="1" noProof="1">
                         <a:latin typeface="Cambria Math" panose="02040503050406030204" pitchFamily="18" charset="0"/>
@@ -11240,6 +11254,13 @@
                             <a:ea typeface="Verdana" panose="020B0604030504040204" pitchFamily="34" charset="0"/>
                           </a:rPr>
                           <m:t>𝑡</m:t>
+                        </m:r>
+                        <m:r>
+                          <a:rPr lang="en-US" sz="2000" b="0" i="1" noProof="1" smtClean="0">
+                            <a:latin typeface="Cambria Math" panose="02040503050406030204" pitchFamily="18" charset="0"/>
+                            <a:ea typeface="Verdana" panose="020B0604030504040204" pitchFamily="34" charset="0"/>
+                          </a:rPr>
+                          <m:t>−1</m:t>
                         </m:r>
                       </m:sub>
                     </m:sSub>
@@ -11331,6 +11352,13 @@
                             <a:ea typeface="Verdana" panose="020B0604030504040204" pitchFamily="34" charset="0"/>
                           </a:rPr>
                           <m:t>𝑡</m:t>
+                        </m:r>
+                        <m:r>
+                          <a:rPr lang="en-US" sz="2000" b="0" i="1" noProof="1" smtClean="0">
+                            <a:latin typeface="Cambria Math" panose="02040503050406030204" pitchFamily="18" charset="0"/>
+                            <a:ea typeface="Verdana" panose="020B0604030504040204" pitchFamily="34" charset="0"/>
+                          </a:rPr>
+                          <m:t>−1</m:t>
                         </m:r>
                       </m:sub>
                     </m:sSub>
@@ -11694,6 +11722,13 @@
                               </a:rPr>
                               <m:t>𝑡</m:t>
                             </m:r>
+                            <m:r>
+                              <a:rPr lang="en-US" sz="2200" b="0" i="1" noProof="1" smtClean="0">
+                                <a:latin typeface="Cambria Math" panose="02040503050406030204" pitchFamily="18" charset="0"/>
+                                <a:ea typeface="Verdana" panose="020B0604030504040204" pitchFamily="34" charset="0"/>
+                              </a:rPr>
+                              <m:t>−1</m:t>
+                            </m:r>
                           </m:sub>
                           <m:sup>
                             <m:r>
@@ -11776,6 +11811,13 @@
                             <a:ea typeface="Verdana" panose="020B0604030504040204" pitchFamily="34" charset="0"/>
                           </a:rPr>
                           <m:t>𝑡</m:t>
+                        </m:r>
+                        <m:r>
+                          <a:rPr lang="en-US" sz="2200" b="0" i="1" noProof="1" smtClean="0">
+                            <a:latin typeface="Cambria Math" panose="02040503050406030204" pitchFamily="18" charset="0"/>
+                            <a:ea typeface="Verdana" panose="020B0604030504040204" pitchFamily="34" charset="0"/>
+                          </a:rPr>
+                          <m:t>−1</m:t>
                         </m:r>
                       </m:sub>
                       <m:sup>
@@ -11876,6 +11918,13 @@
                             <a:ea typeface="Verdana" panose="020B0604030504040204" pitchFamily="34" charset="0"/>
                           </a:rPr>
                           <m:t>𝑡</m:t>
+                        </m:r>
+                        <m:r>
+                          <a:rPr lang="en-US" sz="2200" b="0" i="1" noProof="1" smtClean="0">
+                            <a:latin typeface="Cambria Math" panose="02040503050406030204" pitchFamily="18" charset="0"/>
+                            <a:ea typeface="Verdana" panose="020B0604030504040204" pitchFamily="34" charset="0"/>
+                          </a:rPr>
+                          <m:t>−1</m:t>
                         </m:r>
                       </m:sub>
                     </m:sSub>

--- a/Resilience.pptx
+++ b/Resilience.pptx
@@ -156,7 +156,7 @@
 <file path=ppt/revisionInfo.xml><?xml version="1.0" encoding="utf-8"?>
 <p1510:revInfo xmlns:a="http://schemas.openxmlformats.org/drawingml/2006/main" xmlns:r="http://schemas.openxmlformats.org/officeDocument/2006/relationships" xmlns:p1510="http://schemas.microsoft.com/office/powerpoint/2015/10/main">
   <p1510:revLst>
-    <p1510:client id="{13B43BEF-9B9B-431D-9308-0B2B126B7992}" v="90" dt="2026-09-23T12:20:25.834"/>
+    <p1510:client id="{13B43BEF-9B9B-431D-9308-0B2B126B7992}" v="93" dt="2026-09-24T11:11:42.992"/>
   </p1510:revLst>
 </p1510:revInfo>
 </file>
@@ -166,7 +166,7 @@
   <pc:docChgLst>
     <pc:chgData name="Jan Willem van den End (EBO_CMA)" userId="32ade95a-e024-4672-952f-5ed8641a9e00" providerId="ADAL" clId="{3BBBE02E-ACD4-4586-9407-5E79BF620DF1}"/>
     <pc:docChg chg="undo redo custSel addSld modSld">
-      <pc:chgData name="Jan Willem van den End (EBO_CMA)" userId="32ade95a-e024-4672-952f-5ed8641a9e00" providerId="ADAL" clId="{3BBBE02E-ACD4-4586-9407-5E79BF620DF1}" dt="2026-09-23T12:20:25.834" v="4079" actId="20577"/>
+      <pc:chgData name="Jan Willem van den End (EBO_CMA)" userId="32ade95a-e024-4672-952f-5ed8641a9e00" providerId="ADAL" clId="{3BBBE02E-ACD4-4586-9407-5E79BF620DF1}" dt="2026-09-24T11:11:59.988" v="4118" actId="6549"/>
       <pc:docMkLst>
         <pc:docMk/>
       </pc:docMkLst>
@@ -197,6 +197,21 @@
             <pc:docMk/>
             <pc:sldMk cId="1203207517" sldId="768"/>
             <ac:spMk id="8" creationId="{545BE5F7-F057-18CF-DA77-201D8BAEDAF2}"/>
+          </ac:spMkLst>
+        </pc:spChg>
+      </pc:sldChg>
+      <pc:sldChg chg="modSp mod">
+        <pc:chgData name="Jan Willem van den End (EBO_CMA)" userId="32ade95a-e024-4672-952f-5ed8641a9e00" providerId="ADAL" clId="{3BBBE02E-ACD4-4586-9407-5E79BF620DF1}" dt="2026-09-24T09:53:12.219" v="4093"/>
+        <pc:sldMkLst>
+          <pc:docMk/>
+          <pc:sldMk cId="1473696260" sldId="782"/>
+        </pc:sldMkLst>
+        <pc:spChg chg="mod">
+          <ac:chgData name="Jan Willem van den End (EBO_CMA)" userId="32ade95a-e024-4672-952f-5ed8641a9e00" providerId="ADAL" clId="{3BBBE02E-ACD4-4586-9407-5E79BF620DF1}" dt="2026-09-24T09:53:12.219" v="4093"/>
+          <ac:spMkLst>
+            <pc:docMk/>
+            <pc:sldMk cId="1473696260" sldId="782"/>
+            <ac:spMk id="8" creationId="{F8831F86-71DE-C3FE-B109-F7E9B5952F04}"/>
           </ac:spMkLst>
         </pc:spChg>
       </pc:sldChg>
@@ -387,13 +402,13 @@
         </pc:spChg>
       </pc:sldChg>
       <pc:sldChg chg="delSp modSp mod">
-        <pc:chgData name="Jan Willem van den End (EBO_CMA)" userId="32ade95a-e024-4672-952f-5ed8641a9e00" providerId="ADAL" clId="{3BBBE02E-ACD4-4586-9407-5E79BF620DF1}" dt="2026-09-23T10:17:02.645" v="3986" actId="1076"/>
+        <pc:chgData name="Jan Willem van den End (EBO_CMA)" userId="32ade95a-e024-4672-952f-5ed8641a9e00" providerId="ADAL" clId="{3BBBE02E-ACD4-4586-9407-5E79BF620DF1}" dt="2026-09-24T11:08:23.522" v="4101" actId="20577"/>
         <pc:sldMkLst>
           <pc:docMk/>
           <pc:sldMk cId="240743824" sldId="794"/>
         </pc:sldMkLst>
         <pc:spChg chg="mod">
-          <ac:chgData name="Jan Willem van den End (EBO_CMA)" userId="32ade95a-e024-4672-952f-5ed8641a9e00" providerId="ADAL" clId="{3BBBE02E-ACD4-4586-9407-5E79BF620DF1}" dt="2026-09-23T10:17:02.645" v="3986" actId="1076"/>
+          <ac:chgData name="Jan Willem van den End (EBO_CMA)" userId="32ade95a-e024-4672-952f-5ed8641a9e00" providerId="ADAL" clId="{3BBBE02E-ACD4-4586-9407-5E79BF620DF1}" dt="2026-09-24T11:08:23.522" v="4101" actId="20577"/>
           <ac:spMkLst>
             <pc:docMk/>
             <pc:sldMk cId="240743824" sldId="794"/>
@@ -504,13 +519,13 @@
         </pc:picChg>
       </pc:sldChg>
       <pc:sldChg chg="modSp add mod">
-        <pc:chgData name="Jan Willem van den End (EBO_CMA)" userId="32ade95a-e024-4672-952f-5ed8641a9e00" providerId="ADAL" clId="{3BBBE02E-ACD4-4586-9407-5E79BF620DF1}" dt="2026-09-23T09:57:05.545" v="3968" actId="14100"/>
+        <pc:chgData name="Jan Willem van den End (EBO_CMA)" userId="32ade95a-e024-4672-952f-5ed8641a9e00" providerId="ADAL" clId="{3BBBE02E-ACD4-4586-9407-5E79BF620DF1}" dt="2026-09-24T11:11:59.988" v="4118" actId="6549"/>
         <pc:sldMkLst>
           <pc:docMk/>
           <pc:sldMk cId="341592472" sldId="797"/>
         </pc:sldMkLst>
         <pc:spChg chg="mod">
-          <ac:chgData name="Jan Willem van den End (EBO_CMA)" userId="32ade95a-e024-4672-952f-5ed8641a9e00" providerId="ADAL" clId="{3BBBE02E-ACD4-4586-9407-5E79BF620DF1}" dt="2026-09-23T09:57:05.545" v="3968" actId="14100"/>
+          <ac:chgData name="Jan Willem van den End (EBO_CMA)" userId="32ade95a-e024-4672-952f-5ed8641a9e00" providerId="ADAL" clId="{3BBBE02E-ACD4-4586-9407-5E79BF620DF1}" dt="2026-09-24T11:11:59.988" v="4118" actId="6549"/>
           <ac:spMkLst>
             <pc:docMk/>
             <pc:sldMk cId="341592472" sldId="797"/>
@@ -613,7 +628,7 @@
           <a:p>
             <a:fld id="{C26BBE9F-2231-4498-A3E5-DFB02EDDD594}" type="datetimeFigureOut">
               <a:rPr lang="nl-NL" smtClean="0"/>
-              <a:t>23-9-2026</a:t>
+              <a:t>24-9-2026</a:t>
             </a:fld>
             <a:endParaRPr lang="nl-NL"/>
           </a:p>
@@ -778,7 +793,7 @@
           <a:p>
             <a:fld id="{900D5B51-A3C5-4FC7-8A0D-54EFEFAFACD3}" type="datetimeFigureOut">
               <a:rPr lang="nl-NL" smtClean="0"/>
-              <a:t>23-9-2026</a:t>
+              <a:t>24-9-2026</a:t>
             </a:fld>
             <a:endParaRPr lang="nl-NL"/>
           </a:p>
@@ -6488,7 +6503,7 @@
                   <a:srgbClr val="002060"/>
                 </a:solidFill>
               </a:rPr>
-              <a:t> log return of STOXX Europe 600 and Semiconductor stock index (SOX). </a:t>
+              <a:t> log return of STOXX Europe 600 and Semiconductor stock index (SOX), source Yahoo Finance. </a:t>
             </a:r>
             <a:r>
               <a:rPr lang="nl-NL" sz="1200" dirty="0">
@@ -6779,7 +6794,24 @@
                   <a:srgbClr val="002060"/>
                 </a:solidFill>
               </a:rPr>
-              <a:t>ETO's CAT (Country Activity Tracker)</a:t>
+              <a:t>ETO's CAT (</a:t>
+            </a:r>
+            <a:r>
+              <a:rPr lang="en-US" sz="1200" dirty="0">
+                <a:solidFill>
+                  <a:srgbClr val="002060"/>
+                </a:solidFill>
+                <a:hlinkClick r:id="rId3"/>
+              </a:rPr>
+              <a:t>Country Activity Tracker</a:t>
+            </a:r>
+            <a:r>
+              <a:rPr lang="en-US" sz="1200" dirty="0">
+                <a:solidFill>
+                  <a:srgbClr val="002060"/>
+                </a:solidFill>
+              </a:rPr>
+              <a:t>)</a:t>
             </a:r>
             <a:r>
               <a:rPr lang="nl-NL" sz="1200" dirty="0">
@@ -6807,7 +6839,7 @@
           <p:nvPr/>
         </p:nvPicPr>
         <p:blipFill>
-          <a:blip r:embed="rId3"/>
+          <a:blip r:embed="rId4"/>
           <a:stretch>
             <a:fillRect/>
           </a:stretch>
@@ -7048,7 +7080,24 @@
                   <a:srgbClr val="002060"/>
                 </a:solidFill>
               </a:rPr>
-              <a:t>N1132G, N1173G, N112G_secJ, N117G_secJ, N1173G_secJ (source: Eurostat).</a:t>
+              <a:t>N1132G, N1173G, N112G_secJ, N117G_secJ, N1173G_secJ (source: </a:t>
+            </a:r>
+            <a:r>
+              <a:rPr lang="pt-BR" sz="1200" dirty="0">
+                <a:solidFill>
+                  <a:srgbClr val="002060"/>
+                </a:solidFill>
+                <a:hlinkClick r:id="rId5"/>
+              </a:rPr>
+              <a:t>Eurostat</a:t>
+            </a:r>
+            <a:r>
+              <a:rPr lang="pt-BR" sz="1200" dirty="0">
+                <a:solidFill>
+                  <a:srgbClr val="002060"/>
+                </a:solidFill>
+              </a:rPr>
+              <a:t>).</a:t>
             </a:r>
           </a:p>
           <a:p>
@@ -7099,7 +7148,7 @@
                 <a:solidFill>
                   <a:srgbClr val="002060"/>
                 </a:solidFill>
-                <a:hlinkClick r:id="rId4" action="ppaction://hlinksldjump"/>
+                <a:hlinkClick r:id="rId6" action="ppaction://hlinksldjump"/>
               </a:rPr>
               <a:t>Link</a:t>
             </a:r>
@@ -7223,7 +7272,7 @@
           <p:nvPr/>
         </p:nvPicPr>
         <p:blipFill>
-          <a:blip r:embed="rId5"/>
+          <a:blip r:embed="rId7"/>
           <a:stretch>
             <a:fillRect/>
           </a:stretch>
@@ -7607,7 +7656,24 @@
                   <a:srgbClr val="002060"/>
                 </a:solidFill>
               </a:rPr>
-              <a:t>(source: OECD).</a:t>
+              <a:t>(source: </a:t>
+            </a:r>
+            <a:r>
+              <a:rPr lang="pt-BR" sz="1200" dirty="0">
+                <a:solidFill>
+                  <a:srgbClr val="002060"/>
+                </a:solidFill>
+                <a:hlinkClick r:id="rId3"/>
+              </a:rPr>
+              <a:t>Eurostat</a:t>
+            </a:r>
+            <a:r>
+              <a:rPr lang="pt-BR" sz="1200" dirty="0">
+                <a:solidFill>
+                  <a:srgbClr val="002060"/>
+                </a:solidFill>
+              </a:rPr>
+              <a:t>).</a:t>
             </a:r>
             <a:endParaRPr lang="en-US" sz="1200" dirty="0">
               <a:solidFill>
@@ -7663,7 +7729,7 @@
                 <a:solidFill>
                   <a:srgbClr val="002060"/>
                 </a:solidFill>
-                <a:hlinkClick r:id="rId3" action="ppaction://hlinksldjump"/>
+                <a:hlinkClick r:id="rId4" action="ppaction://hlinksldjump"/>
               </a:rPr>
               <a:t>Link</a:t>
             </a:r>
@@ -7693,7 +7759,7 @@
           <p:nvPr/>
         </p:nvPicPr>
         <p:blipFill>
-          <a:blip r:embed="rId4"/>
+          <a:blip r:embed="rId5"/>
           <a:stretch>
             <a:fillRect/>
           </a:stretch>
@@ -7817,7 +7883,7 @@
           <p:nvPr/>
         </p:nvPicPr>
         <p:blipFill>
-          <a:blip r:embed="rId5"/>
+          <a:blip r:embed="rId6"/>
           <a:stretch>
             <a:fillRect/>
           </a:stretch>
@@ -8005,7 +8071,7 @@
                 <a:ea typeface="Verdana" panose="020B0604030504040204" pitchFamily="34" charset="0"/>
                 <a:cs typeface="Arial" panose="020B0604020202020204" pitchFamily="34" charset="0"/>
               </a:rPr>
-              <a:t>Trade data from Eurostat CPA instead of OECD HS → similar results</a:t>
+              <a:t>Trade data based on Eurostat CPA instead of HS → similar results</a:t>
             </a:r>
             <a:endParaRPr lang="nl-NL" sz="2000" noProof="1">
               <a:latin typeface="Verdana" panose="020B0604030504040204" pitchFamily="34" charset="0"/>
@@ -10366,8 +10432,8 @@
           </a:p>
         </p:txBody>
       </p:sp>
-      <mc:AlternateContent xmlns:mc="http://schemas.openxmlformats.org/markup-compatibility/2006">
-        <mc:Choice xmlns:a14="http://schemas.microsoft.com/office/drawing/2010/main" Requires="a14">
+      <mc:AlternateContent xmlns:mc="http://schemas.openxmlformats.org/markup-compatibility/2006" xmlns:a14="http://schemas.microsoft.com/office/drawing/2010/main">
+        <mc:Choice Requires="a14">
           <p:sp>
             <p:nvSpPr>
               <p:cNvPr id="2" name="Content Placeholder 2">
@@ -12627,7 +12693,7 @@
             </p:txBody>
           </p:sp>
         </mc:Choice>
-        <mc:Fallback>
+        <mc:Fallback xmlns="">
           <p:sp>
             <p:nvSpPr>
               <p:cNvPr id="2" name="Content Placeholder 2">

--- a/Resilience.pptx
+++ b/Resilience.pptx
@@ -156,7 +156,7 @@
 <file path=ppt/revisionInfo.xml><?xml version="1.0" encoding="utf-8"?>
 <p1510:revInfo xmlns:a="http://schemas.openxmlformats.org/drawingml/2006/main" xmlns:r="http://schemas.openxmlformats.org/officeDocument/2006/relationships" xmlns:p1510="http://schemas.microsoft.com/office/powerpoint/2015/10/main">
   <p1510:revLst>
-    <p1510:client id="{13B43BEF-9B9B-431D-9308-0B2B126B7992}" v="93" dt="2026-09-24T11:11:42.992"/>
+    <p1510:client id="{13B43BEF-9B9B-431D-9308-0B2B126B7992}" v="105" dt="2026-09-25T10:02:22.619"/>
   </p1510:revLst>
 </p1510:revInfo>
 </file>
@@ -166,18 +166,34 @@
   <pc:docChgLst>
     <pc:chgData name="Jan Willem van den End (EBO_CMA)" userId="32ade95a-e024-4672-952f-5ed8641a9e00" providerId="ADAL" clId="{3BBBE02E-ACD4-4586-9407-5E79BF620DF1}"/>
     <pc:docChg chg="undo redo custSel addSld modSld">
-      <pc:chgData name="Jan Willem van den End (EBO_CMA)" userId="32ade95a-e024-4672-952f-5ed8641a9e00" providerId="ADAL" clId="{3BBBE02E-ACD4-4586-9407-5E79BF620DF1}" dt="2026-09-24T11:11:59.988" v="4118" actId="6549"/>
+      <pc:chgData name="Jan Willem van den End (EBO_CMA)" userId="32ade95a-e024-4672-952f-5ed8641a9e00" providerId="ADAL" clId="{3BBBE02E-ACD4-4586-9407-5E79BF620DF1}" dt="2026-09-25T10:11:22.362" v="5083" actId="1035"/>
       <pc:docMkLst>
         <pc:docMk/>
       </pc:docMkLst>
       <pc:sldChg chg="modSp mod">
-        <pc:chgData name="Jan Willem van den End (EBO_CMA)" userId="32ade95a-e024-4672-952f-5ed8641a9e00" providerId="ADAL" clId="{3BBBE02E-ACD4-4586-9407-5E79BF620DF1}" dt="2026-09-19T07:52:20.074" v="1794" actId="1076"/>
+        <pc:chgData name="Jan Willem van den End (EBO_CMA)" userId="32ade95a-e024-4672-952f-5ed8641a9e00" providerId="ADAL" clId="{3BBBE02E-ACD4-4586-9407-5E79BF620DF1}" dt="2026-09-25T09:20:04.427" v="4575" actId="1076"/>
         <pc:sldMkLst>
           <pc:docMk/>
           <pc:sldMk cId="3588697" sldId="657"/>
         </pc:sldMkLst>
         <pc:spChg chg="mod">
-          <ac:chgData name="Jan Willem van den End (EBO_CMA)" userId="32ade95a-e024-4672-952f-5ed8641a9e00" providerId="ADAL" clId="{3BBBE02E-ACD4-4586-9407-5E79BF620DF1}" dt="2026-09-19T07:52:20.074" v="1794" actId="1076"/>
+          <ac:chgData name="Jan Willem van den End (EBO_CMA)" userId="32ade95a-e024-4672-952f-5ed8641a9e00" providerId="ADAL" clId="{3BBBE02E-ACD4-4586-9407-5E79BF620DF1}" dt="2026-09-25T09:20:04.427" v="4575" actId="1076"/>
+          <ac:spMkLst>
+            <pc:docMk/>
+            <pc:sldMk cId="3588697" sldId="657"/>
+            <ac:spMk id="2" creationId="{8F3D8D65-3E89-7468-E586-D814DD2BD102}"/>
+          </ac:spMkLst>
+        </pc:spChg>
+        <pc:spChg chg="mod">
+          <ac:chgData name="Jan Willem van den End (EBO_CMA)" userId="32ade95a-e024-4672-952f-5ed8641a9e00" providerId="ADAL" clId="{3BBBE02E-ACD4-4586-9407-5E79BF620DF1}" dt="2026-09-25T09:12:43.530" v="4544" actId="1035"/>
+          <ac:spMkLst>
+            <pc:docMk/>
+            <pc:sldMk cId="3588697" sldId="657"/>
+            <ac:spMk id="4" creationId="{1D067C04-83DA-B764-8F1B-3A65D2BB4049}"/>
+          </ac:spMkLst>
+        </pc:spChg>
+        <pc:spChg chg="mod">
+          <ac:chgData name="Jan Willem van den End (EBO_CMA)" userId="32ade95a-e024-4672-952f-5ed8641a9e00" providerId="ADAL" clId="{3BBBE02E-ACD4-4586-9407-5E79BF620DF1}" dt="2026-09-25T09:12:45.567" v="4546" actId="1035"/>
           <ac:spMkLst>
             <pc:docMk/>
             <pc:sldMk cId="3588697" sldId="657"/>
@@ -216,21 +232,45 @@
         </pc:spChg>
       </pc:sldChg>
       <pc:sldChg chg="addSp delSp modSp mod">
-        <pc:chgData name="Jan Willem van den End (EBO_CMA)" userId="32ade95a-e024-4672-952f-5ed8641a9e00" providerId="ADAL" clId="{3BBBE02E-ACD4-4586-9407-5E79BF620DF1}" dt="2026-09-23T09:47:54.527" v="3772" actId="1035"/>
+        <pc:chgData name="Jan Willem van den End (EBO_CMA)" userId="32ade95a-e024-4672-952f-5ed8641a9e00" providerId="ADAL" clId="{3BBBE02E-ACD4-4586-9407-5E79BF620DF1}" dt="2026-09-25T10:09:42.045" v="5079" actId="20577"/>
         <pc:sldMkLst>
           <pc:docMk/>
           <pc:sldMk cId="2428101549" sldId="784"/>
         </pc:sldMkLst>
         <pc:spChg chg="mod">
-          <ac:chgData name="Jan Willem van den End (EBO_CMA)" userId="32ade95a-e024-4672-952f-5ed8641a9e00" providerId="ADAL" clId="{3BBBE02E-ACD4-4586-9407-5E79BF620DF1}" dt="2026-09-23T09:47:31.463" v="3757" actId="20577"/>
+          <ac:chgData name="Jan Willem van den End (EBO_CMA)" userId="32ade95a-e024-4672-952f-5ed8641a9e00" providerId="ADAL" clId="{3BBBE02E-ACD4-4586-9407-5E79BF620DF1}" dt="2026-09-25T10:05:05.902" v="5061" actId="1035"/>
+          <ac:spMkLst>
+            <pc:docMk/>
+            <pc:sldMk cId="2428101549" sldId="784"/>
+            <ac:spMk id="5" creationId="{0EEE5C01-F407-B286-8291-7A84B3BBB14E}"/>
+          </ac:spMkLst>
+        </pc:spChg>
+        <pc:spChg chg="mod">
+          <ac:chgData name="Jan Willem van den End (EBO_CMA)" userId="32ade95a-e024-4672-952f-5ed8641a9e00" providerId="ADAL" clId="{3BBBE02E-ACD4-4586-9407-5E79BF620DF1}" dt="2026-09-25T10:09:42.045" v="5079" actId="20577"/>
           <ac:spMkLst>
             <pc:docMk/>
             <pc:sldMk cId="2428101549" sldId="784"/>
             <ac:spMk id="6" creationId="{613E110F-8AEE-A02C-2032-1F07DE944DEB}"/>
           </ac:spMkLst>
         </pc:spChg>
-        <pc:picChg chg="mod">
-          <ac:chgData name="Jan Willem van den End (EBO_CMA)" userId="32ade95a-e024-4672-952f-5ed8641a9e00" providerId="ADAL" clId="{3BBBE02E-ACD4-4586-9407-5E79BF620DF1}" dt="2026-09-23T09:47:46.869" v="3758" actId="14100"/>
+        <pc:spChg chg="del">
+          <ac:chgData name="Jan Willem van den End (EBO_CMA)" userId="32ade95a-e024-4672-952f-5ed8641a9e00" providerId="ADAL" clId="{3BBBE02E-ACD4-4586-9407-5E79BF620DF1}" dt="2026-09-25T10:04:58.439" v="5052" actId="478"/>
+          <ac:spMkLst>
+            <pc:docMk/>
+            <pc:sldMk cId="2428101549" sldId="784"/>
+            <ac:spMk id="8" creationId="{873792AB-3A5F-9374-1FE8-71A49B10A05F}"/>
+          </ac:spMkLst>
+        </pc:spChg>
+        <pc:spChg chg="add mod">
+          <ac:chgData name="Jan Willem van den End (EBO_CMA)" userId="32ade95a-e024-4672-952f-5ed8641a9e00" providerId="ADAL" clId="{3BBBE02E-ACD4-4586-9407-5E79BF620DF1}" dt="2026-09-25T10:07:09.998" v="5062" actId="6549"/>
+          <ac:spMkLst>
+            <pc:docMk/>
+            <pc:sldMk cId="2428101549" sldId="784"/>
+            <ac:spMk id="13" creationId="{C8DC46B8-5E08-30F3-1EE3-CB90635026CE}"/>
+          </ac:spMkLst>
+        </pc:spChg>
+        <pc:picChg chg="del mod">
+          <ac:chgData name="Jan Willem van den End (EBO_CMA)" userId="32ade95a-e024-4672-952f-5ed8641a9e00" providerId="ADAL" clId="{3BBBE02E-ACD4-4586-9407-5E79BF620DF1}" dt="2026-09-25T09:43:59.910" v="4968" actId="478"/>
           <ac:picMkLst>
             <pc:docMk/>
             <pc:sldMk cId="2428101549" sldId="784"/>
@@ -238,27 +278,43 @@
           </ac:picMkLst>
         </pc:picChg>
         <pc:picChg chg="del mod">
-          <ac:chgData name="Jan Willem van den End (EBO_CMA)" userId="32ade95a-e024-4672-952f-5ed8641a9e00" providerId="ADAL" clId="{3BBBE02E-ACD4-4586-9407-5E79BF620DF1}" dt="2026-09-23T09:45:48.661" v="3726" actId="478"/>
+          <ac:chgData name="Jan Willem van den End (EBO_CMA)" userId="32ade95a-e024-4672-952f-5ed8641a9e00" providerId="ADAL" clId="{3BBBE02E-ACD4-4586-9407-5E79BF620DF1}" dt="2026-09-25T10:00:35.450" v="5020" actId="478"/>
           <ac:picMkLst>
             <pc:docMk/>
             <pc:sldMk cId="2428101549" sldId="784"/>
-            <ac:picMk id="4" creationId="{6ECE1DC5-FB80-BD91-88E9-814F7F9FA66B}"/>
+            <ac:picMk id="4" creationId="{5BE696B4-4B0A-E2D7-1BD3-02940175CF30}"/>
           </ac:picMkLst>
         </pc:picChg>
-        <pc:picChg chg="mod">
-          <ac:chgData name="Jan Willem van den End (EBO_CMA)" userId="32ade95a-e024-4672-952f-5ed8641a9e00" providerId="ADAL" clId="{3BBBE02E-ACD4-4586-9407-5E79BF620DF1}" dt="2026-09-23T09:47:54.527" v="3772" actId="1035"/>
+        <pc:picChg chg="del mod">
+          <ac:chgData name="Jan Willem van den End (EBO_CMA)" userId="32ade95a-e024-4672-952f-5ed8641a9e00" providerId="ADAL" clId="{3BBBE02E-ACD4-4586-9407-5E79BF620DF1}" dt="2026-09-25T09:45:07.933" v="4974" actId="478"/>
           <ac:picMkLst>
             <pc:docMk/>
             <pc:sldMk cId="2428101549" sldId="784"/>
             <ac:picMk id="7" creationId="{339ECCAE-ABF5-C0A3-D3B2-D90FA8CF9B40}"/>
           </ac:picMkLst>
         </pc:picChg>
-        <pc:picChg chg="add del mod">
-          <ac:chgData name="Jan Willem van den End (EBO_CMA)" userId="32ade95a-e024-4672-952f-5ed8641a9e00" providerId="ADAL" clId="{3BBBE02E-ACD4-4586-9407-5E79BF620DF1}" dt="2026-09-23T09:46:14.259" v="3731" actId="478"/>
+        <pc:picChg chg="del mod">
+          <ac:chgData name="Jan Willem van den End (EBO_CMA)" userId="32ade95a-e024-4672-952f-5ed8641a9e00" providerId="ADAL" clId="{3BBBE02E-ACD4-4586-9407-5E79BF620DF1}" dt="2026-09-25T10:00:59.393" v="5025" actId="478"/>
           <ac:picMkLst>
             <pc:docMk/>
             <pc:sldMk cId="2428101549" sldId="784"/>
-            <ac:picMk id="11" creationId="{7A25CD59-D632-9630-3CAD-3BDC8155E548}"/>
+            <ac:picMk id="9" creationId="{3CC04740-1A15-978C-59A4-C12419BDA591}"/>
+          </ac:picMkLst>
+        </pc:picChg>
+        <pc:picChg chg="mod">
+          <ac:chgData name="Jan Willem van den End (EBO_CMA)" userId="32ade95a-e024-4672-952f-5ed8641a9e00" providerId="ADAL" clId="{3BBBE02E-ACD4-4586-9407-5E79BF620DF1}" dt="2026-09-25T10:08:15.766" v="5076" actId="1035"/>
+          <ac:picMkLst>
+            <pc:docMk/>
+            <pc:sldMk cId="2428101549" sldId="784"/>
+            <ac:picMk id="10" creationId="{FC7B6F34-37FE-D63D-7B8B-54AB0BA70756}"/>
+          </ac:picMkLst>
+        </pc:picChg>
+        <pc:picChg chg="mod">
+          <ac:chgData name="Jan Willem van den End (EBO_CMA)" userId="32ade95a-e024-4672-952f-5ed8641a9e00" providerId="ADAL" clId="{3BBBE02E-ACD4-4586-9407-5E79BF620DF1}" dt="2026-09-25T10:08:15.766" v="5076" actId="1035"/>
+          <ac:picMkLst>
+            <pc:docMk/>
+            <pc:sldMk cId="2428101549" sldId="784"/>
+            <ac:picMk id="11" creationId="{9865C647-8D5F-98A1-58E5-AEFAF3242ABD}"/>
           </ac:picMkLst>
         </pc:picChg>
       </pc:sldChg>
@@ -330,21 +386,21 @@
             <ac:picMk id="3" creationId="{8A7EFEE7-907A-EF9C-42CF-70E7257DAC35}"/>
           </ac:picMkLst>
         </pc:picChg>
-        <pc:picChg chg="del mod">
-          <ac:chgData name="Jan Willem van den End (EBO_CMA)" userId="32ade95a-e024-4672-952f-5ed8641a9e00" providerId="ADAL" clId="{3BBBE02E-ACD4-4586-9407-5E79BF620DF1}" dt="2026-09-23T10:25:00.997" v="4009" actId="478"/>
-          <ac:picMkLst>
-            <pc:docMk/>
-            <pc:sldMk cId="374833015" sldId="791"/>
-            <ac:picMk id="9" creationId="{9A1BFB74-B0F9-69A1-8D0B-9ADBEF25B14A}"/>
-          </ac:picMkLst>
-        </pc:picChg>
       </pc:sldChg>
       <pc:sldChg chg="addSp delSp modSp mod">
-        <pc:chgData name="Jan Willem van den End (EBO_CMA)" userId="32ade95a-e024-4672-952f-5ed8641a9e00" providerId="ADAL" clId="{3BBBE02E-ACD4-4586-9407-5E79BF620DF1}" dt="2026-09-23T09:52:20.284" v="3869" actId="6549"/>
+        <pc:chgData name="Jan Willem van den End (EBO_CMA)" userId="32ade95a-e024-4672-952f-5ed8641a9e00" providerId="ADAL" clId="{3BBBE02E-ACD4-4586-9407-5E79BF620DF1}" dt="2026-09-25T10:11:22.362" v="5083" actId="1035"/>
         <pc:sldMkLst>
           <pc:docMk/>
           <pc:sldMk cId="2304846322" sldId="792"/>
         </pc:sldMkLst>
+        <pc:spChg chg="mod">
+          <ac:chgData name="Jan Willem van den End (EBO_CMA)" userId="32ade95a-e024-4672-952f-5ed8641a9e00" providerId="ADAL" clId="{3BBBE02E-ACD4-4586-9407-5E79BF620DF1}" dt="2026-09-25T10:04:33.062" v="5051" actId="1038"/>
+          <ac:spMkLst>
+            <pc:docMk/>
+            <pc:sldMk cId="2304846322" sldId="792"/>
+            <ac:spMk id="5" creationId="{64CF75E5-0A93-A50A-135C-BD487E25C478}"/>
+          </ac:spMkLst>
+        </pc:spChg>
         <pc:spChg chg="mod">
           <ac:chgData name="Jan Willem van den End (EBO_CMA)" userId="32ade95a-e024-4672-952f-5ed8641a9e00" providerId="ADAL" clId="{3BBBE02E-ACD4-4586-9407-5E79BF620DF1}" dt="2026-09-23T09:52:20.284" v="3869" actId="6549"/>
           <ac:spMkLst>
@@ -353,36 +409,60 @@
             <ac:spMk id="6" creationId="{CF9708F7-32AE-5645-3159-CE1174AB0729}"/>
           </ac:spMkLst>
         </pc:spChg>
-        <pc:picChg chg="mod">
-          <ac:chgData name="Jan Willem van den End (EBO_CMA)" userId="32ade95a-e024-4672-952f-5ed8641a9e00" providerId="ADAL" clId="{3BBBE02E-ACD4-4586-9407-5E79BF620DF1}" dt="2026-09-23T09:49:41.879" v="3789" actId="1038"/>
+        <pc:spChg chg="mod">
+          <ac:chgData name="Jan Willem van den End (EBO_CMA)" userId="32ade95a-e024-4672-952f-5ed8641a9e00" providerId="ADAL" clId="{3BBBE02E-ACD4-4586-9407-5E79BF620DF1}" dt="2026-09-25T10:07:26.909" v="5070" actId="6549"/>
+          <ac:spMkLst>
+            <pc:docMk/>
+            <pc:sldMk cId="2304846322" sldId="792"/>
+            <ac:spMk id="8" creationId="{AEE2C5DE-2B6A-1A21-C169-797AC72B8FC2}"/>
+          </ac:spMkLst>
+        </pc:spChg>
+        <pc:picChg chg="add del mod">
+          <ac:chgData name="Jan Willem van den End (EBO_CMA)" userId="32ade95a-e024-4672-952f-5ed8641a9e00" providerId="ADAL" clId="{3BBBE02E-ACD4-4586-9407-5E79BF620DF1}" dt="2026-09-25T09:47:58.449" v="4980" actId="478"/>
           <ac:picMkLst>
             <pc:docMk/>
             <pc:sldMk cId="2304846322" sldId="792"/>
             <ac:picMk id="3" creationId="{FD8FEF3A-B9D3-C258-3FD3-115594E60806}"/>
           </ac:picMkLst>
         </pc:picChg>
-        <pc:picChg chg="del">
-          <ac:chgData name="Jan Willem van den End (EBO_CMA)" userId="32ade95a-e024-4672-952f-5ed8641a9e00" providerId="ADAL" clId="{3BBBE02E-ACD4-4586-9407-5E79BF620DF1}" dt="2026-09-23T09:49:01.275" v="3777" actId="478"/>
+        <pc:picChg chg="del mod">
+          <ac:chgData name="Jan Willem van den End (EBO_CMA)" userId="32ade95a-e024-4672-952f-5ed8641a9e00" providerId="ADAL" clId="{3BBBE02E-ACD4-4586-9407-5E79BF620DF1}" dt="2026-09-25T10:01:46.698" v="5028" actId="478"/>
           <ac:picMkLst>
             <pc:docMk/>
             <pc:sldMk cId="2304846322" sldId="792"/>
-            <ac:picMk id="4" creationId="{551404D6-F9AD-BB52-B168-06741BAA0097}"/>
+            <ac:picMk id="4" creationId="{E14172C9-E0A8-FF02-C420-5CB128428A90}"/>
           </ac:picMkLst>
         </pc:picChg>
         <pc:picChg chg="del mod">
-          <ac:chgData name="Jan Willem van den End (EBO_CMA)" userId="32ade95a-e024-4672-952f-5ed8641a9e00" providerId="ADAL" clId="{3BBBE02E-ACD4-4586-9407-5E79BF620DF1}" dt="2026-09-23T09:48:45.969" v="3773" actId="478"/>
+          <ac:chgData name="Jan Willem van den End (EBO_CMA)" userId="32ade95a-e024-4672-952f-5ed8641a9e00" providerId="ADAL" clId="{3BBBE02E-ACD4-4586-9407-5E79BF620DF1}" dt="2026-09-25T10:02:07.601" v="5031" actId="478"/>
           <ac:picMkLst>
             <pc:docMk/>
             <pc:sldMk cId="2304846322" sldId="792"/>
-            <ac:picMk id="7" creationId="{5A97EF09-CBBC-6BFB-7A2B-C80CB9B80409}"/>
+            <ac:picMk id="7" creationId="{487963F1-91B7-B155-55EA-19DCB885998B}"/>
           </ac:picMkLst>
         </pc:picChg>
-        <pc:picChg chg="mod">
-          <ac:chgData name="Jan Willem van den End (EBO_CMA)" userId="32ade95a-e024-4672-952f-5ed8641a9e00" providerId="ADAL" clId="{3BBBE02E-ACD4-4586-9407-5E79BF620DF1}" dt="2026-09-23T09:49:48.959" v="3790" actId="14100"/>
+        <pc:picChg chg="del mod">
+          <ac:chgData name="Jan Willem van den End (EBO_CMA)" userId="32ade95a-e024-4672-952f-5ed8641a9e00" providerId="ADAL" clId="{3BBBE02E-ACD4-4586-9407-5E79BF620DF1}" dt="2026-09-25T09:48:18.415" v="4983" actId="478"/>
           <ac:picMkLst>
             <pc:docMk/>
             <pc:sldMk cId="2304846322" sldId="792"/>
             <ac:picMk id="9" creationId="{53094AB5-29A5-390F-D793-10B141A69812}"/>
+          </ac:picMkLst>
+        </pc:picChg>
+        <pc:picChg chg="mod">
+          <ac:chgData name="Jan Willem van den End (EBO_CMA)" userId="32ade95a-e024-4672-952f-5ed8641a9e00" providerId="ADAL" clId="{3BBBE02E-ACD4-4586-9407-5E79BF620DF1}" dt="2026-09-25T10:11:22.362" v="5083" actId="1035"/>
+          <ac:picMkLst>
+            <pc:docMk/>
+            <pc:sldMk cId="2304846322" sldId="792"/>
+            <ac:picMk id="10" creationId="{8ED05194-3FC9-0803-C7D5-C61C218BC7C9}"/>
+          </ac:picMkLst>
+        </pc:picChg>
+        <pc:picChg chg="mod">
+          <ac:chgData name="Jan Willem van den End (EBO_CMA)" userId="32ade95a-e024-4672-952f-5ed8641a9e00" providerId="ADAL" clId="{3BBBE02E-ACD4-4586-9407-5E79BF620DF1}" dt="2026-09-25T10:10:42.326" v="5080" actId="14100"/>
+          <ac:picMkLst>
+            <pc:docMk/>
+            <pc:sldMk cId="2304846322" sldId="792"/>
+            <ac:picMk id="11" creationId="{F62A9DDD-9890-E970-E360-5F7C952A0047}"/>
           </ac:picMkLst>
         </pc:picChg>
       </pc:sldChg>
@@ -401,28 +481,20 @@
           </ac:spMkLst>
         </pc:spChg>
       </pc:sldChg>
-      <pc:sldChg chg="delSp modSp mod">
-        <pc:chgData name="Jan Willem van den End (EBO_CMA)" userId="32ade95a-e024-4672-952f-5ed8641a9e00" providerId="ADAL" clId="{3BBBE02E-ACD4-4586-9407-5E79BF620DF1}" dt="2026-09-24T11:08:23.522" v="4101" actId="20577"/>
+      <pc:sldChg chg="delSp modSp mod modNotesTx">
+        <pc:chgData name="Jan Willem van den End (EBO_CMA)" userId="32ade95a-e024-4672-952f-5ed8641a9e00" providerId="ADAL" clId="{3BBBE02E-ACD4-4586-9407-5E79BF620DF1}" dt="2026-09-25T09:35:59.431" v="4965" actId="20577"/>
         <pc:sldMkLst>
           <pc:docMk/>
           <pc:sldMk cId="240743824" sldId="794"/>
         </pc:sldMkLst>
         <pc:spChg chg="mod">
-          <ac:chgData name="Jan Willem van den End (EBO_CMA)" userId="32ade95a-e024-4672-952f-5ed8641a9e00" providerId="ADAL" clId="{3BBBE02E-ACD4-4586-9407-5E79BF620DF1}" dt="2026-09-24T11:08:23.522" v="4101" actId="20577"/>
+          <ac:chgData name="Jan Willem van den End (EBO_CMA)" userId="32ade95a-e024-4672-952f-5ed8641a9e00" providerId="ADAL" clId="{3BBBE02E-ACD4-4586-9407-5E79BF620DF1}" dt="2026-09-25T09:33:54.734" v="4688" actId="20577"/>
           <ac:spMkLst>
             <pc:docMk/>
             <pc:sldMk cId="240743824" sldId="794"/>
             <ac:spMk id="11" creationId="{D6974398-2614-1310-0782-A3E80B13A2FD}"/>
           </ac:spMkLst>
         </pc:spChg>
-        <pc:picChg chg="del mod">
-          <ac:chgData name="Jan Willem van den End (EBO_CMA)" userId="32ade95a-e024-4672-952f-5ed8641a9e00" providerId="ADAL" clId="{3BBBE02E-ACD4-4586-9407-5E79BF620DF1}" dt="2026-09-23T10:16:17.670" v="3969" actId="478"/>
-          <ac:picMkLst>
-            <pc:docMk/>
-            <pc:sldMk cId="240743824" sldId="794"/>
-            <ac:picMk id="3" creationId="{A9B511F9-EA27-E187-9227-1EF502D06828}"/>
-          </ac:picMkLst>
-        </pc:picChg>
         <pc:picChg chg="mod">
           <ac:chgData name="Jan Willem van den End (EBO_CMA)" userId="32ade95a-e024-4672-952f-5ed8641a9e00" providerId="ADAL" clId="{3BBBE02E-ACD4-4586-9407-5E79BF620DF1}" dt="2026-09-20T19:31:44.104" v="2061" actId="1076"/>
           <ac:picMkLst>
@@ -456,7 +528,7 @@
         </pc:spChg>
       </pc:sldChg>
       <pc:sldChg chg="addSp delSp modSp mod">
-        <pc:chgData name="Jan Willem van den End (EBO_CMA)" userId="32ade95a-e024-4672-952f-5ed8641a9e00" providerId="ADAL" clId="{3BBBE02E-ACD4-4586-9407-5E79BF620DF1}" dt="2026-09-23T09:55:54.127" v="3964" actId="20577"/>
+        <pc:chgData name="Jan Willem van den End (EBO_CMA)" userId="32ade95a-e024-4672-952f-5ed8641a9e00" providerId="ADAL" clId="{3BBBE02E-ACD4-4586-9407-5E79BF620DF1}" dt="2026-09-24T11:50:04.667" v="4152" actId="20577"/>
         <pc:sldMkLst>
           <pc:docMk/>
           <pc:sldMk cId="909146083" sldId="796"/>
@@ -470,45 +542,13 @@
           </ac:spMkLst>
         </pc:spChg>
         <pc:spChg chg="add mod">
-          <ac:chgData name="Jan Willem van den End (EBO_CMA)" userId="32ade95a-e024-4672-952f-5ed8641a9e00" providerId="ADAL" clId="{3BBBE02E-ACD4-4586-9407-5E79BF620DF1}" dt="2026-09-23T09:55:54.127" v="3964" actId="20577"/>
+          <ac:chgData name="Jan Willem van den End (EBO_CMA)" userId="32ade95a-e024-4672-952f-5ed8641a9e00" providerId="ADAL" clId="{3BBBE02E-ACD4-4586-9407-5E79BF620DF1}" dt="2026-09-24T11:50:04.667" v="4152" actId="20577"/>
           <ac:spMkLst>
             <pc:docMk/>
             <pc:sldMk cId="909146083" sldId="796"/>
             <ac:spMk id="6" creationId="{4ED6076C-5ED2-F560-9ECC-68A359BFC0CA}"/>
           </ac:spMkLst>
         </pc:spChg>
-        <pc:spChg chg="add del mod">
-          <ac:chgData name="Jan Willem van den End (EBO_CMA)" userId="32ade95a-e024-4672-952f-5ed8641a9e00" providerId="ADAL" clId="{3BBBE02E-ACD4-4586-9407-5E79BF620DF1}" dt="2026-09-23T09:37:31.990" v="3628" actId="21"/>
-          <ac:spMkLst>
-            <pc:docMk/>
-            <pc:sldMk cId="909146083" sldId="796"/>
-            <ac:spMk id="7" creationId="{475F513A-C52D-7D55-1C0D-2A6BC3630CED}"/>
-          </ac:spMkLst>
-        </pc:spChg>
-        <pc:spChg chg="add del mod">
-          <ac:chgData name="Jan Willem van den End (EBO_CMA)" userId="32ade95a-e024-4672-952f-5ed8641a9e00" providerId="ADAL" clId="{3BBBE02E-ACD4-4586-9407-5E79BF620DF1}" dt="2026-09-23T09:53:48.056" v="3871" actId="478"/>
-          <ac:spMkLst>
-            <pc:docMk/>
-            <pc:sldMk cId="909146083" sldId="796"/>
-            <ac:spMk id="8" creationId="{82858DA4-8DA2-B74F-6A14-AA63B019E87D}"/>
-          </ac:spMkLst>
-        </pc:spChg>
-        <pc:picChg chg="del mod">
-          <ac:chgData name="Jan Willem van den End (EBO_CMA)" userId="32ade95a-e024-4672-952f-5ed8641a9e00" providerId="ADAL" clId="{3BBBE02E-ACD4-4586-9407-5E79BF620DF1}" dt="2026-09-23T09:37:00.284" v="3624" actId="478"/>
-          <ac:picMkLst>
-            <pc:docMk/>
-            <pc:sldMk cId="909146083" sldId="796"/>
-            <ac:picMk id="3" creationId="{A69985F4-E5BB-D076-899F-DF9BEDA0FAA6}"/>
-          </ac:picMkLst>
-        </pc:picChg>
-        <pc:picChg chg="del mod">
-          <ac:chgData name="Jan Willem van den End (EBO_CMA)" userId="32ade95a-e024-4672-952f-5ed8641a9e00" providerId="ADAL" clId="{3BBBE02E-ACD4-4586-9407-5E79BF620DF1}" dt="2026-09-23T09:53:44.862" v="3870" actId="478"/>
-          <ac:picMkLst>
-            <pc:docMk/>
-            <pc:sldMk cId="909146083" sldId="796"/>
-            <ac:picMk id="4" creationId="{77BBDB3E-D62F-2AA7-F4F9-963882708640}"/>
-          </ac:picMkLst>
-        </pc:picChg>
         <pc:picChg chg="mod">
           <ac:chgData name="Jan Willem van den End (EBO_CMA)" userId="32ade95a-e024-4672-952f-5ed8641a9e00" providerId="ADAL" clId="{3BBBE02E-ACD4-4586-9407-5E79BF620DF1}" dt="2026-09-23T09:54:04.654" v="3873" actId="1076"/>
           <ac:picMkLst>
@@ -519,13 +559,13 @@
         </pc:picChg>
       </pc:sldChg>
       <pc:sldChg chg="modSp add mod">
-        <pc:chgData name="Jan Willem van den End (EBO_CMA)" userId="32ade95a-e024-4672-952f-5ed8641a9e00" providerId="ADAL" clId="{3BBBE02E-ACD4-4586-9407-5E79BF620DF1}" dt="2026-09-24T11:11:59.988" v="4118" actId="6549"/>
+        <pc:chgData name="Jan Willem van den End (EBO_CMA)" userId="32ade95a-e024-4672-952f-5ed8641a9e00" providerId="ADAL" clId="{3BBBE02E-ACD4-4586-9407-5E79BF620DF1}" dt="2026-09-25T09:33:44.581" v="4678" actId="20577"/>
         <pc:sldMkLst>
           <pc:docMk/>
           <pc:sldMk cId="341592472" sldId="797"/>
         </pc:sldMkLst>
         <pc:spChg chg="mod">
-          <ac:chgData name="Jan Willem van den End (EBO_CMA)" userId="32ade95a-e024-4672-952f-5ed8641a9e00" providerId="ADAL" clId="{3BBBE02E-ACD4-4586-9407-5E79BF620DF1}" dt="2026-09-24T11:11:59.988" v="4118" actId="6549"/>
+          <ac:chgData name="Jan Willem van den End (EBO_CMA)" userId="32ade95a-e024-4672-952f-5ed8641a9e00" providerId="ADAL" clId="{3BBBE02E-ACD4-4586-9407-5E79BF620DF1}" dt="2026-09-25T09:33:44.581" v="4678" actId="20577"/>
           <ac:spMkLst>
             <pc:docMk/>
             <pc:sldMk cId="341592472" sldId="797"/>
@@ -628,7 +668,7 @@
           <a:p>
             <a:fld id="{C26BBE9F-2231-4498-A3E5-DFB02EDDD594}" type="datetimeFigureOut">
               <a:rPr lang="nl-NL" smtClean="0"/>
-              <a:t>24-9-2026</a:t>
+              <a:t>25-9-2026</a:t>
             </a:fld>
             <a:endParaRPr lang="nl-NL"/>
           </a:p>
@@ -793,7 +833,7 @@
           <a:p>
             <a:fld id="{900D5B51-A3C5-4FC7-8A0D-54EFEFAFACD3}" type="datetimeFigureOut">
               <a:rPr lang="nl-NL" smtClean="0"/>
-              <a:t>24-9-2026</a:t>
+              <a:t>25-9-2026</a:t>
             </a:fld>
             <a:endParaRPr lang="nl-NL"/>
           </a:p>
@@ -1834,11 +1874,56 @@
           <a:bodyPr/>
           <a:lstStyle/>
           <a:p>
-            <a:pPr marL="0" indent="0">
+            <a:pPr marL="0" marR="0" lvl="0" indent="0" algn="l" defTabSz="914400" rtl="0" eaLnBrk="1" fontAlgn="auto" latinLnBrk="0" hangingPunct="1">
+              <a:lnSpc>
+                <a:spcPct val="100000"/>
+              </a:lnSpc>
+              <a:spcBef>
+                <a:spcPts val="0"/>
+              </a:spcBef>
+              <a:spcAft>
+                <a:spcPts val="0"/>
+              </a:spcAft>
+              <a:buClrTx/>
+              <a:buSzTx/>
               <a:buFontTx/>
               <a:buNone/>
+              <a:tabLst/>
+              <a:defRPr/>
             </a:pPr>
-            <a:endParaRPr lang="nl-NL" i="0" baseline="0"/>
+            <a:r>
+              <a:rPr lang="nl-NL" sz="1200" noProof="1">
+                <a:latin typeface="Arial" panose="020B0604020202020204" pitchFamily="34" charset="0"/>
+                <a:ea typeface="Verdana" panose="020B0604030504040204" pitchFamily="34" charset="0"/>
+                <a:cs typeface="Arial" panose="020B0604020202020204" pitchFamily="34" charset="0"/>
+              </a:rPr>
+              <a:t>Data for compouter services (Eurostat: EBOPS, </a:t>
+            </a:r>
+            <a:r>
+              <a:rPr lang="en-NL" sz="1200" b="0" i="0" kern="1200" dirty="0">
+                <a:solidFill>
+                  <a:schemeClr val="tx1"/>
+                </a:solidFill>
+                <a:effectLst/>
+                <a:latin typeface="+mn-lt"/>
+                <a:ea typeface="+mn-ea"/>
+                <a:cs typeface="+mn-cs"/>
+              </a:rPr>
+              <a:t>International Trade in Services, ITS</a:t>
+            </a:r>
+            <a:r>
+              <a:rPr lang="en-US" sz="1200" b="0" i="0" kern="1200" dirty="0">
+                <a:solidFill>
+                  <a:schemeClr val="tx1"/>
+                </a:solidFill>
+                <a:effectLst/>
+                <a:latin typeface="+mn-lt"/>
+                <a:ea typeface="+mn-ea"/>
+                <a:cs typeface="+mn-cs"/>
+              </a:rPr>
+              <a:t> are just limitedly available (for some countries just starting in 2013, while 2025 data is not yet available for any country).</a:t>
+            </a:r>
+            <a:endParaRPr lang="nl-NL" i="0" baseline="0" dirty="0"/>
           </a:p>
         </p:txBody>
       </p:sp>
@@ -7553,8 +7638,8 @@
         </p:nvSpPr>
         <p:spPr>
           <a:xfrm>
-            <a:off x="207037" y="4774417"/>
-            <a:ext cx="4087369" cy="1200329"/>
+            <a:off x="207038" y="4774417"/>
+            <a:ext cx="4034734" cy="1384995"/>
           </a:xfrm>
           <a:prstGeom prst="rect">
             <a:avLst/>
@@ -7673,7 +7758,7 @@
                   <a:srgbClr val="002060"/>
                 </a:solidFill>
               </a:rPr>
-              <a:t>).</a:t>
+              <a:t>, Comext, HS2022).</a:t>
             </a:r>
             <a:endParaRPr lang="en-US" sz="1200" dirty="0">
               <a:solidFill>
@@ -8929,8 +9014,8 @@
         </p:nvSpPr>
         <p:spPr>
           <a:xfrm>
-            <a:off x="438652" y="803135"/>
-            <a:ext cx="8440171" cy="5679439"/>
+            <a:off x="324482" y="775703"/>
+            <a:ext cx="8645782" cy="5679439"/>
           </a:xfrm>
         </p:spPr>
         <p:txBody>
@@ -8952,22 +9037,7 @@
                 <a:latin typeface="Verdana" panose="020B0604030504040204" pitchFamily="34" charset="0"/>
                 <a:ea typeface="Verdana" panose="020B0604030504040204" pitchFamily="34" charset="0"/>
               </a:rPr>
-              <a:t>Structural channel </a:t>
-            </a:r>
-            <a:r>
-              <a:rPr lang="en-US" sz="2000" noProof="1">
-                <a:latin typeface="Arial" panose="020B0604020202020204" pitchFamily="34" charset="0"/>
-                <a:ea typeface="Verdana" panose="020B0604030504040204" pitchFamily="34" charset="0"/>
-                <a:cs typeface="Arial" panose="020B0604020202020204" pitchFamily="34" charset="0"/>
-              </a:rPr>
-              <a:t>→</a:t>
-            </a:r>
-            <a:r>
-              <a:rPr lang="en-US" sz="2000" noProof="1">
-                <a:latin typeface="Verdana" panose="020B0604030504040204" pitchFamily="34" charset="0"/>
-                <a:ea typeface="Verdana" panose="020B0604030504040204" pitchFamily="34" charset="0"/>
-              </a:rPr>
-              <a:t> private investment</a:t>
+              <a:t>Investment channel</a:t>
             </a:r>
             <a:endParaRPr lang="nl-NL" sz="2000" noProof="1">
               <a:latin typeface="Verdana" panose="020B0604030504040204" pitchFamily="34" charset="0"/>
@@ -8977,7 +9047,7 @@
           <a:p>
             <a:pPr marL="285750" indent="-285750">
               <a:lnSpc>
-                <a:spcPct val="120000"/>
+                <a:spcPct val="100000"/>
               </a:lnSpc>
               <a:spcAft>
                 <a:spcPts val="1200"/>
@@ -9001,41 +9071,23 @@
             </a:r>
           </a:p>
           <a:p>
-            <a:pPr marL="645750" lvl="3" indent="-285750">
+            <a:pPr marL="702900" lvl="3" indent="-342900">
               <a:lnSpc>
-                <a:spcPct val="120000"/>
+                <a:spcPct val="100000"/>
               </a:lnSpc>
               <a:spcAft>
                 <a:spcPts val="300"/>
               </a:spcAft>
-              <a:buFont typeface="Arial" panose="020B0604020202020204" pitchFamily="34" charset="0"/>
-              <a:buChar char="•"/>
+              <a:buSzPct val="100000"/>
+              <a:buFont typeface="Courier New" panose="02070309020205020404" pitchFamily="49" charset="0"/>
+              <a:buChar char="o"/>
             </a:pPr>
             <a:r>
               <a:rPr lang="nl-NL" sz="2000" noProof="1">
                 <a:latin typeface="Verdana" panose="020B0604030504040204" pitchFamily="34" charset="0"/>
                 <a:ea typeface="Verdana" panose="020B0604030504040204" pitchFamily="34" charset="0"/>
               </a:rPr>
-              <a:t>digital investment by corporations</a:t>
-            </a:r>
-          </a:p>
-          <a:p>
-            <a:pPr marL="645750" lvl="3" indent="-285750">
-              <a:lnSpc>
-                <a:spcPct val="120000"/>
-              </a:lnSpc>
-              <a:spcAft>
-                <a:spcPts val="300"/>
-              </a:spcAft>
-              <a:buFont typeface="Arial" panose="020B0604020202020204" pitchFamily="34" charset="0"/>
-              <a:buChar char="•"/>
-            </a:pPr>
-            <a:r>
-              <a:rPr lang="nl-NL" sz="2000" noProof="1">
-                <a:latin typeface="Verdana" panose="020B0604030504040204" pitchFamily="34" charset="0"/>
-                <a:ea typeface="Verdana" panose="020B0604030504040204" pitchFamily="34" charset="0"/>
-              </a:rPr>
-              <a:t>equity investments in AI firms</a:t>
+              <a:t>digital investm by corporations, equity investm in AI firms</a:t>
             </a:r>
           </a:p>
           <a:p>
@@ -9062,32 +9114,24 @@
               </a:spcAft>
             </a:pPr>
             <a:r>
+              <a:rPr lang="en-US" sz="2000" noProof="1">
+                <a:latin typeface="Verdana" panose="020B0604030504040204" pitchFamily="34" charset="0"/>
+                <a:ea typeface="Verdana" panose="020B0604030504040204" pitchFamily="34" charset="0"/>
+              </a:rPr>
+              <a:t>T</a:t>
+            </a:r>
+            <a:r>
               <a:rPr lang="nl-NL" sz="2000" noProof="1">
                 <a:latin typeface="Verdana" panose="020B0604030504040204" pitchFamily="34" charset="0"/>
                 <a:ea typeface="Verdana" panose="020B0604030504040204" pitchFamily="34" charset="0"/>
               </a:rPr>
-              <a:t>Cyclical channel </a:t>
-            </a:r>
-            <a:r>
-              <a:rPr lang="en-US" sz="2000" noProof="1">
-                <a:latin typeface="Arial" panose="020B0604020202020204" pitchFamily="34" charset="0"/>
-                <a:ea typeface="Verdana" panose="020B0604030504040204" pitchFamily="34" charset="0"/>
-                <a:cs typeface="Arial" panose="020B0604020202020204" pitchFamily="34" charset="0"/>
-              </a:rPr>
-              <a:t>→</a:t>
-            </a:r>
-            <a:r>
-              <a:rPr lang="nl-NL" sz="2000" noProof="1">
-                <a:latin typeface="Verdana" panose="020B0604030504040204" pitchFamily="34" charset="0"/>
-                <a:ea typeface="Verdana" panose="020B0604030504040204" pitchFamily="34" charset="0"/>
-              </a:rPr>
-              <a:t> international trade and stock market</a:t>
+              <a:t>rade and stock market channels</a:t>
             </a:r>
           </a:p>
           <a:p>
             <a:pPr marL="285750" indent="-285750">
               <a:lnSpc>
-                <a:spcPct val="120000"/>
+                <a:spcPct val="100000"/>
               </a:lnSpc>
               <a:spcAft>
                 <a:spcPts val="1200"/>
@@ -9115,43 +9159,25 @@
             </a:endParaRPr>
           </a:p>
           <a:p>
-            <a:pPr marL="645750" lvl="3" indent="-285750">
+            <a:pPr marL="702900" lvl="3" indent="-342900">
               <a:lnSpc>
-                <a:spcPct val="120000"/>
+                <a:spcPct val="100000"/>
               </a:lnSpc>
               <a:spcAft>
                 <a:spcPts val="300"/>
               </a:spcAft>
-              <a:buFont typeface="Arial" panose="020B0604020202020204" pitchFamily="34" charset="0"/>
-              <a:buChar char="•"/>
+              <a:buSzPct val="100000"/>
+              <a:buFont typeface="Courier New" panose="02070309020205020404" pitchFamily="49" charset="0"/>
+              <a:buChar char="o"/>
             </a:pPr>
             <a:r>
               <a:rPr lang="nl-NL" sz="2000" noProof="1">
                 <a:latin typeface="Verdana" panose="020B0604030504040204" pitchFamily="34" charset="0"/>
                 <a:ea typeface="Verdana" panose="020B0604030504040204" pitchFamily="34" charset="0"/>
               </a:rPr>
-              <a:t>exports of ICT/AI-related products</a:t>
-            </a:r>
-          </a:p>
-          <a:p>
-            <a:pPr marL="645750" lvl="3" indent="-285750">
-              <a:lnSpc>
-                <a:spcPct val="120000"/>
-              </a:lnSpc>
-              <a:spcAft>
-                <a:spcPts val="300"/>
-              </a:spcAft>
-              <a:buFont typeface="Arial" panose="020B0604020202020204" pitchFamily="34" charset="0"/>
-              <a:buChar char="•"/>
-            </a:pPr>
-            <a:r>
-              <a:rPr lang="nl-NL" sz="2000" noProof="1">
-                <a:latin typeface="Verdana" panose="020B0604030504040204" pitchFamily="34" charset="0"/>
-                <a:ea typeface="Verdana" panose="020B0604030504040204" pitchFamily="34" charset="0"/>
-              </a:rPr>
-              <a:t>correlation national stock index with SOX index</a:t>
-            </a:r>
-            <a:endParaRPr lang="en-US" sz="2300" noProof="1">
+              <a:t>exports ICT/AI-related products, correlation with SOX index</a:t>
+            </a:r>
+            <a:endParaRPr lang="en-US" sz="2000" noProof="1">
               <a:latin typeface="Verdana" panose="020B0604030504040204" pitchFamily="34" charset="0"/>
               <a:ea typeface="Verdana" panose="020B0604030504040204" pitchFamily="34" charset="0"/>
             </a:endParaRPr>
@@ -9165,13 +9191,27 @@
                 <a:spcPts val="1200"/>
               </a:spcAft>
             </a:pPr>
-            <a:endParaRPr lang="nl-NL" sz="1600" dirty="0">
-              <a:solidFill>
-                <a:schemeClr val="accent1">
-                  <a:lumMod val="50000"/>
-                </a:schemeClr>
-              </a:solidFill>
+            <a:endParaRPr lang="nl-NL" sz="2000" noProof="1">
+              <a:latin typeface="Verdana" panose="020B0604030504040204" pitchFamily="34" charset="0"/>
+              <a:ea typeface="Verdana" panose="020B0604030504040204" pitchFamily="34" charset="0"/>
             </a:endParaRPr>
+          </a:p>
+          <a:p>
+            <a:pPr>
+              <a:lnSpc>
+                <a:spcPct val="120000"/>
+              </a:lnSpc>
+              <a:spcAft>
+                <a:spcPts val="1200"/>
+              </a:spcAft>
+            </a:pPr>
+            <a:r>
+              <a:rPr lang="nl-NL" sz="2000" noProof="1">
+                <a:latin typeface="Verdana" panose="020B0604030504040204" pitchFamily="34" charset="0"/>
+                <a:ea typeface="Verdana" panose="020B0604030504040204" pitchFamily="34" charset="0"/>
+              </a:rPr>
+              <a:t>Channels could capture structural and/or cyclical relations (underlying economic changes, or exposure to other cycle/factor)</a:t>
+            </a:r>
           </a:p>
         </p:txBody>
       </p:sp>
@@ -9189,7 +9229,7 @@
         </p:nvSpPr>
         <p:spPr>
           <a:xfrm>
-            <a:off x="7461505" y="5747088"/>
+            <a:off x="7928368" y="4907417"/>
             <a:ext cx="594360" cy="307777"/>
           </a:xfrm>
           <a:prstGeom prst="rect">
@@ -9237,7 +9277,7 @@
         </p:nvSpPr>
         <p:spPr>
           <a:xfrm>
-            <a:off x="7342633" y="3047300"/>
+            <a:off x="7896104" y="2769968"/>
             <a:ext cx="594360" cy="307777"/>
           </a:xfrm>
           <a:prstGeom prst="rect">
@@ -9728,8 +9768,8 @@
         </p:nvSpPr>
         <p:spPr>
           <a:xfrm>
-            <a:off x="358001" y="1098631"/>
-            <a:ext cx="3153296" cy="4989922"/>
+            <a:off x="358000" y="1098631"/>
+            <a:ext cx="3253879" cy="4989922"/>
           </a:xfrm>
         </p:spPr>
         <p:txBody>
@@ -9772,7 +9812,7 @@
                 <a:latin typeface="Verdana" panose="020B0604030504040204" pitchFamily="34" charset="0"/>
                 <a:ea typeface="Verdana" panose="020B0604030504040204" pitchFamily="34" charset="0"/>
               </a:rPr>
-              <a:t>… advantage similar in shock years</a:t>
+              <a:t>… advantage not significant in shock years</a:t>
             </a:r>
           </a:p>
           <a:p>
@@ -9804,7 +9844,7 @@
             </a:pPr>
             <a:r>
               <a:rPr lang="nl-NL" sz="1800" dirty="0"/>
-              <a:t>High </a:t>
+              <a:t>Low </a:t>
             </a:r>
             <a:r>
               <a:rPr lang="nl-NL" sz="1800" dirty="0" err="1"/>
@@ -9824,51 +9864,9 @@
             </a:r>
             <a:r>
               <a:rPr lang="en-US" sz="1800" dirty="0"/>
-              <a:t>seem to be a relative disadvantage in shock years (higher sensitivity to shocks)</a:t>
+              <a:t>seems to be a relative advantage in shock years (less sensitivity to shocks)</a:t>
             </a:r>
             <a:endParaRPr lang="nl-NL" sz="1800" dirty="0"/>
-          </a:p>
-        </p:txBody>
-      </p:sp>
-      <p:sp>
-        <p:nvSpPr>
-          <p:cNvPr id="8" name="Tekstvak 3">
-            <a:extLst>
-              <a:ext uri="{FF2B5EF4-FFF2-40B4-BE49-F238E27FC236}">
-                <a16:creationId xmlns:a16="http://schemas.microsoft.com/office/drawing/2014/main" id="{873792AB-3A5F-9374-1FE8-71A49B10A05F}"/>
-              </a:ext>
-            </a:extLst>
-          </p:cNvPr>
-          <p:cNvSpPr txBox="1"/>
-          <p:nvPr/>
-        </p:nvSpPr>
-        <p:spPr>
-          <a:xfrm>
-            <a:off x="4088753" y="5653088"/>
-            <a:ext cx="4844935" cy="1107996"/>
-          </a:xfrm>
-          <a:prstGeom prst="rect">
-            <a:avLst/>
-          </a:prstGeom>
-          <a:noFill/>
-        </p:spPr>
-        <p:txBody>
-          <a:bodyPr wrap="square" rtlCol="0">
-            <a:spAutoFit/>
-          </a:bodyPr>
-          <a:lstStyle/>
-          <a:p>
-            <a:pPr algn="just">
-              <a:defRPr/>
-            </a:pPr>
-            <a:r>
-              <a:rPr lang="nl-NL" sz="1100" noProof="1">
-                <a:solidFill>
-                  <a:srgbClr val="002060"/>
-                </a:solidFill>
-              </a:rPr>
-              <a:t>Lower vs higher than median ICT/AI-investment ratio (10 EA countries, 2011-25 (all years), 2020, 2022, 2025 (shock years). ***, **, * indicate 1%, 5%, 10% significance of difference between blue and grey dot in same period. +++, ++, + indicate 1%, 5%, 10% significance of difference between blue (grey) dots in all years vs shock years (two-proportion z-test)</a:t>
-            </a:r>
           </a:p>
         </p:txBody>
       </p:sp>
@@ -9886,7 +9884,7 @@
         </p:nvSpPr>
         <p:spPr>
           <a:xfrm>
-            <a:off x="4655684" y="664366"/>
+            <a:off x="4701404" y="636934"/>
             <a:ext cx="3985397" cy="584775"/>
           </a:xfrm>
           <a:prstGeom prst="rect">
@@ -9916,10 +9914,10 @@
       </p:sp>
       <p:pic>
         <p:nvPicPr>
-          <p:cNvPr id="3" name="Picture 2">
+          <p:cNvPr id="10" name="Picture 9">
             <a:extLst>
               <a:ext uri="{FF2B5EF4-FFF2-40B4-BE49-F238E27FC236}">
-                <a16:creationId xmlns:a16="http://schemas.microsoft.com/office/drawing/2014/main" id="{3AEC0293-BD5F-607E-F810-8030B0619792}"/>
+                <a16:creationId xmlns:a16="http://schemas.microsoft.com/office/drawing/2014/main" id="{FC7B6F34-37FE-D63D-7B8B-54AB0BA70756}"/>
               </a:ext>
             </a:extLst>
           </p:cNvPr>
@@ -9936,8 +9934,8 @@
         </p:blipFill>
         <p:spPr>
           <a:xfrm>
-            <a:off x="4643818" y="1250167"/>
-            <a:ext cx="3962400" cy="2079135"/>
+            <a:off x="4686994" y="1251821"/>
+            <a:ext cx="3962400" cy="2144429"/>
           </a:xfrm>
           <a:prstGeom prst="rect">
             <a:avLst/>
@@ -9946,10 +9944,10 @@
       </p:pic>
       <p:pic>
         <p:nvPicPr>
-          <p:cNvPr id="7" name="Picture 6">
+          <p:cNvPr id="11" name="Picture 10">
             <a:extLst>
               <a:ext uri="{FF2B5EF4-FFF2-40B4-BE49-F238E27FC236}">
-                <a16:creationId xmlns:a16="http://schemas.microsoft.com/office/drawing/2014/main" id="{339ECCAE-ABF5-C0A3-D3B2-D90FA8CF9B40}"/>
+                <a16:creationId xmlns:a16="http://schemas.microsoft.com/office/drawing/2014/main" id="{9865C647-8D5F-98A1-58E5-AEFAF3242ABD}"/>
               </a:ext>
             </a:extLst>
           </p:cNvPr>
@@ -9966,14 +9964,56 @@
         </p:blipFill>
         <p:spPr>
           <a:xfrm>
-            <a:off x="4655684" y="3393570"/>
-            <a:ext cx="3962400" cy="2079135"/>
+            <a:off x="4686994" y="3453794"/>
+            <a:ext cx="3962400" cy="2144429"/>
           </a:xfrm>
           <a:prstGeom prst="rect">
             <a:avLst/>
           </a:prstGeom>
         </p:spPr>
       </p:pic>
+      <p:sp>
+        <p:nvSpPr>
+          <p:cNvPr id="13" name="Tekstvak 3">
+            <a:extLst>
+              <a:ext uri="{FF2B5EF4-FFF2-40B4-BE49-F238E27FC236}">
+                <a16:creationId xmlns:a16="http://schemas.microsoft.com/office/drawing/2014/main" id="{C8DC46B8-5E08-30F3-1EE3-CB90635026CE}"/>
+              </a:ext>
+            </a:extLst>
+          </p:cNvPr>
+          <p:cNvSpPr txBox="1"/>
+          <p:nvPr/>
+        </p:nvSpPr>
+        <p:spPr>
+          <a:xfrm>
+            <a:off x="4498847" y="5608859"/>
+            <a:ext cx="4645153" cy="1277273"/>
+          </a:xfrm>
+          <a:prstGeom prst="rect">
+            <a:avLst/>
+          </a:prstGeom>
+          <a:noFill/>
+        </p:spPr>
+        <p:txBody>
+          <a:bodyPr wrap="square" rtlCol="0">
+            <a:spAutoFit/>
+          </a:bodyPr>
+          <a:lstStyle/>
+          <a:p>
+            <a:pPr algn="just">
+              <a:defRPr/>
+            </a:pPr>
+            <a:r>
+              <a:rPr lang="nl-NL" sz="1100" noProof="1">
+                <a:solidFill>
+                  <a:srgbClr val="002060"/>
+                </a:solidFill>
+              </a:rPr>
+              <a:t>Lower vs higher than median ICT/AI-exposure (10 EA countries, 2011-25 (all years), 2020, 2022, 2025 (shock years). ***, **, * indicate 1%, 5%, 10% significance of difference between blue and grey dot in same period. +++, ++, + indicate 1%, 5%, 10% significance of difference between blue (grey) dots in all years vs shock years (country-clustered difference-in-shares test).</a:t>
+            </a:r>
+          </a:p>
+        </p:txBody>
+      </p:sp>
     </p:spTree>
     <p:extLst>
       <p:ext uri="{BB962C8B-B14F-4D97-AF65-F5344CB8AC3E}">
@@ -10221,8 +10261,8 @@
         </p:nvSpPr>
         <p:spPr>
           <a:xfrm>
-            <a:off x="4088753" y="5653088"/>
-            <a:ext cx="4844935" cy="1107996"/>
+            <a:off x="4498847" y="5608859"/>
+            <a:ext cx="4645153" cy="1277273"/>
           </a:xfrm>
           <a:prstGeom prst="rect">
             <a:avLst/>
@@ -10244,7 +10284,7 @@
                   <a:srgbClr val="002060"/>
                 </a:solidFill>
               </a:rPr>
-              <a:t>Lower vs higher than median ICT/AI-exposure (10 EA countries, 2011-25 (all years), 2020, 2022, 2025 (shock years). ***, **, * indicate 1%, 5%, 10% significance of difference between blue and grey dot in same period. +++, ++, + indicate 1%, 5%, 10% significance of difference between blue (grey) dots in all years vs shock years (two-proportion z-test).</a:t>
+              <a:t>Lower vs higher than median ICT/AI-exposure (10 EA countries, 2011-25 (all years), 2020, 2022, 2025 (shock years). ***, **, * indicate 1%, 5%, 10% significance of difference between blue and grey dot in same period. +++, ++, + indicate 1%, 5%, 10% significance of difference between blue (grey) dots in all years vs shock years (country-clustered difference-in-shares test).</a:t>
             </a:r>
           </a:p>
         </p:txBody>
@@ -10263,7 +10303,7 @@
         </p:nvSpPr>
         <p:spPr>
           <a:xfrm>
-            <a:off x="4655684" y="664366"/>
+            <a:off x="4673972" y="646078"/>
             <a:ext cx="3985397" cy="584775"/>
           </a:xfrm>
           <a:prstGeom prst="rect">
@@ -10293,10 +10333,10 @@
       </p:sp>
       <p:pic>
         <p:nvPicPr>
-          <p:cNvPr id="3" name="Picture 2">
+          <p:cNvPr id="10" name="Picture 9">
             <a:extLst>
               <a:ext uri="{FF2B5EF4-FFF2-40B4-BE49-F238E27FC236}">
-                <a16:creationId xmlns:a16="http://schemas.microsoft.com/office/drawing/2014/main" id="{FD8FEF3A-B9D3-C258-3FD3-115594E60806}"/>
+                <a16:creationId xmlns:a16="http://schemas.microsoft.com/office/drawing/2014/main" id="{8ED05194-3FC9-0803-C7D5-C61C218BC7C9}"/>
               </a:ext>
             </a:extLst>
           </p:cNvPr>
@@ -10313,8 +10353,8 @@
         </p:blipFill>
         <p:spPr>
           <a:xfrm>
-            <a:off x="4561469" y="1249141"/>
-            <a:ext cx="3962400" cy="2170453"/>
+            <a:off x="4673972" y="1230853"/>
+            <a:ext cx="3962400" cy="2271299"/>
           </a:xfrm>
           <a:prstGeom prst="rect">
             <a:avLst/>
@@ -10323,10 +10363,10 @@
       </p:pic>
       <p:pic>
         <p:nvPicPr>
-          <p:cNvPr id="9" name="Picture 8">
+          <p:cNvPr id="11" name="Picture 10">
             <a:extLst>
               <a:ext uri="{FF2B5EF4-FFF2-40B4-BE49-F238E27FC236}">
-                <a16:creationId xmlns:a16="http://schemas.microsoft.com/office/drawing/2014/main" id="{53094AB5-29A5-390F-D793-10B141A69812}"/>
+                <a16:creationId xmlns:a16="http://schemas.microsoft.com/office/drawing/2014/main" id="{F62A9DDD-9890-E970-E360-5F7C952A0047}"/>
               </a:ext>
             </a:extLst>
           </p:cNvPr>
@@ -10343,8 +10383,8 @@
         </p:blipFill>
         <p:spPr>
           <a:xfrm>
-            <a:off x="4572000" y="3429000"/>
-            <a:ext cx="3962400" cy="2103119"/>
+            <a:off x="4685470" y="3429000"/>
+            <a:ext cx="3962400" cy="2161571"/>
           </a:xfrm>
           <a:prstGeom prst="rect">
             <a:avLst/>
@@ -12993,7 +13033,24 @@
                   <a:srgbClr val="002060"/>
                 </a:solidFill>
               </a:rPr>
-              <a:t>. As control variable, state aid as ratio of GDP is included (contemporaneous value of state aid and one period lagged GDP).</a:t>
+              <a:t>. As control variable, state aid as ratio of GDP is included (contemporaneous value of state aid and one period lagged GDP, source </a:t>
+            </a:r>
+            <a:r>
+              <a:rPr lang="en-US" sz="1100" noProof="1">
+                <a:solidFill>
+                  <a:srgbClr val="002060"/>
+                </a:solidFill>
+                <a:hlinkClick r:id="rId3"/>
+              </a:rPr>
+              <a:t>Eurostat</a:t>
+            </a:r>
+            <a:r>
+              <a:rPr lang="en-US" sz="1100" noProof="1">
+                <a:solidFill>
+                  <a:srgbClr val="002060"/>
+                </a:solidFill>
+              </a:rPr>
+              <a:t>).</a:t>
             </a:r>
             <a:endParaRPr lang="nl-NL" sz="1100" noProof="1">
               <a:solidFill>
@@ -13018,7 +13075,7 @@
           <p:nvPr/>
         </p:nvPicPr>
         <p:blipFill>
-          <a:blip r:embed="rId3"/>
+          <a:blip r:embed="rId4"/>
           <a:stretch>
             <a:fillRect/>
           </a:stretch>

--- a/Resilience.pptx
+++ b/Resilience.pptx
@@ -156,7 +156,7 @@
 <file path=ppt/revisionInfo.xml><?xml version="1.0" encoding="utf-8"?>
 <p1510:revInfo xmlns:a="http://schemas.openxmlformats.org/drawingml/2006/main" xmlns:r="http://schemas.openxmlformats.org/officeDocument/2006/relationships" xmlns:p1510="http://schemas.microsoft.com/office/powerpoint/2015/10/main">
   <p1510:revLst>
-    <p1510:client id="{13B43BEF-9B9B-431D-9308-0B2B126B7992}" v="105" dt="2026-09-25T10:02:22.619"/>
+    <p1510:client id="{13B43BEF-9B9B-431D-9308-0B2B126B7992}" v="110" dt="2026-09-25T10:23:54.872"/>
   </p1510:revLst>
 </p1510:revInfo>
 </file>
@@ -166,7 +166,7 @@
   <pc:docChgLst>
     <pc:chgData name="Jan Willem van den End (EBO_CMA)" userId="32ade95a-e024-4672-952f-5ed8641a9e00" providerId="ADAL" clId="{3BBBE02E-ACD4-4586-9407-5E79BF620DF1}"/>
     <pc:docChg chg="undo redo custSel addSld modSld">
-      <pc:chgData name="Jan Willem van den End (EBO_CMA)" userId="32ade95a-e024-4672-952f-5ed8641a9e00" providerId="ADAL" clId="{3BBBE02E-ACD4-4586-9407-5E79BF620DF1}" dt="2026-09-25T10:11:22.362" v="5083" actId="1035"/>
+      <pc:chgData name="Jan Willem van den End (EBO_CMA)" userId="32ade95a-e024-4672-952f-5ed8641a9e00" providerId="ADAL" clId="{3BBBE02E-ACD4-4586-9407-5E79BF620DF1}" dt="2026-09-25T10:24:26.604" v="5203" actId="20577"/>
       <pc:docMkLst>
         <pc:docMk/>
       </pc:docMkLst>
@@ -482,7 +482,7 @@
         </pc:spChg>
       </pc:sldChg>
       <pc:sldChg chg="delSp modSp mod modNotesTx">
-        <pc:chgData name="Jan Willem van den End (EBO_CMA)" userId="32ade95a-e024-4672-952f-5ed8641a9e00" providerId="ADAL" clId="{3BBBE02E-ACD4-4586-9407-5E79BF620DF1}" dt="2026-09-25T09:35:59.431" v="4965" actId="20577"/>
+        <pc:chgData name="Jan Willem van den End (EBO_CMA)" userId="32ade95a-e024-4672-952f-5ed8641a9e00" providerId="ADAL" clId="{3BBBE02E-ACD4-4586-9407-5E79BF620DF1}" dt="2026-09-25T10:20:09.252" v="5088" actId="6549"/>
         <pc:sldMkLst>
           <pc:docMk/>
           <pc:sldMk cId="240743824" sldId="794"/>
@@ -558,8 +558,8 @@
           </ac:picMkLst>
         </pc:picChg>
       </pc:sldChg>
-      <pc:sldChg chg="modSp add mod">
-        <pc:chgData name="Jan Willem van den End (EBO_CMA)" userId="32ade95a-e024-4672-952f-5ed8641a9e00" providerId="ADAL" clId="{3BBBE02E-ACD4-4586-9407-5E79BF620DF1}" dt="2026-09-25T09:33:44.581" v="4678" actId="20577"/>
+      <pc:sldChg chg="modSp add mod modNotesTx">
+        <pc:chgData name="Jan Willem van den End (EBO_CMA)" userId="32ade95a-e024-4672-952f-5ed8641a9e00" providerId="ADAL" clId="{3BBBE02E-ACD4-4586-9407-5E79BF620DF1}" dt="2026-09-25T10:24:26.604" v="5203" actId="20577"/>
         <pc:sldMkLst>
           <pc:docMk/>
           <pc:sldMk cId="341592472" sldId="797"/>
@@ -1891,38 +1891,6 @@
               <a:tabLst/>
               <a:defRPr/>
             </a:pPr>
-            <a:r>
-              <a:rPr lang="nl-NL" sz="1200" noProof="1">
-                <a:latin typeface="Arial" panose="020B0604020202020204" pitchFamily="34" charset="0"/>
-                <a:ea typeface="Verdana" panose="020B0604030504040204" pitchFamily="34" charset="0"/>
-                <a:cs typeface="Arial" panose="020B0604020202020204" pitchFamily="34" charset="0"/>
-              </a:rPr>
-              <a:t>Data for compouter services (Eurostat: EBOPS, </a:t>
-            </a:r>
-            <a:r>
-              <a:rPr lang="en-NL" sz="1200" b="0" i="0" kern="1200" dirty="0">
-                <a:solidFill>
-                  <a:schemeClr val="tx1"/>
-                </a:solidFill>
-                <a:effectLst/>
-                <a:latin typeface="+mn-lt"/>
-                <a:ea typeface="+mn-ea"/>
-                <a:cs typeface="+mn-cs"/>
-              </a:rPr>
-              <a:t>International Trade in Services, ITS</a:t>
-            </a:r>
-            <a:r>
-              <a:rPr lang="en-US" sz="1200" b="0" i="0" kern="1200" dirty="0">
-                <a:solidFill>
-                  <a:schemeClr val="tx1"/>
-                </a:solidFill>
-                <a:effectLst/>
-                <a:latin typeface="+mn-lt"/>
-                <a:ea typeface="+mn-ea"/>
-                <a:cs typeface="+mn-cs"/>
-              </a:rPr>
-              <a:t> are just limitedly available (for some countries just starting in 2013, while 2025 data is not yet available for any country).</a:t>
-            </a:r>
             <a:endParaRPr lang="nl-NL" i="0" baseline="0" dirty="0"/>
           </a:p>
         </p:txBody>
@@ -2047,11 +2015,205 @@
           <a:bodyPr/>
           <a:lstStyle/>
           <a:p>
-            <a:pPr marL="171450" indent="-171450">
+            <a:pPr marL="0" marR="0" lvl="0" indent="0" algn="l" defTabSz="914400" rtl="0" eaLnBrk="1" fontAlgn="auto" latinLnBrk="0" hangingPunct="1">
+              <a:lnSpc>
+                <a:spcPct val="100000"/>
+              </a:lnSpc>
+              <a:spcBef>
+                <a:spcPts val="0"/>
+              </a:spcBef>
+              <a:spcAft>
+                <a:spcPts val="0"/>
+              </a:spcAft>
+              <a:buClrTx/>
+              <a:buSzTx/>
+              <a:buFontTx/>
+              <a:buNone/>
+              <a:tabLst/>
+              <a:defRPr/>
+            </a:pPr>
+            <a:r>
+              <a:rPr lang="nl-NL" sz="1200" noProof="1">
+                <a:latin typeface="Arial" panose="020B0604020202020204" pitchFamily="34" charset="0"/>
+                <a:ea typeface="Verdana" panose="020B0604030504040204" pitchFamily="34" charset="0"/>
+                <a:cs typeface="Arial" panose="020B0604020202020204" pitchFamily="34" charset="0"/>
+              </a:rPr>
+              <a:t>Robustness check with CPA data (goods) intra + extra-EA trade for the 10 countries</a:t>
+            </a:r>
+          </a:p>
+          <a:p>
+            <a:pPr marL="171450" marR="0" lvl="0" indent="-171450" algn="l" defTabSz="914400" rtl="0" eaLnBrk="1" fontAlgn="auto" latinLnBrk="0" hangingPunct="1">
+              <a:lnSpc>
+                <a:spcPct val="100000"/>
+              </a:lnSpc>
+              <a:spcBef>
+                <a:spcPts val="0"/>
+              </a:spcBef>
+              <a:spcAft>
+                <a:spcPts val="0"/>
+              </a:spcAft>
+              <a:buClrTx/>
+              <a:buSzTx/>
               <a:buFontTx/>
               <a:buChar char="-"/>
+              <a:tabLst/>
+              <a:defRPr/>
             </a:pPr>
-            <a:endParaRPr lang="nl-NL"/>
+            <a:r>
+              <a:rPr lang="en-US" sz="1200" kern="1200" dirty="0">
+                <a:solidFill>
+                  <a:schemeClr val="tx1"/>
+                </a:solidFill>
+                <a:effectLst/>
+                <a:latin typeface="+mn-lt"/>
+                <a:ea typeface="+mn-ea"/>
+                <a:cs typeface="+mn-cs"/>
+              </a:rPr>
+              <a:t>CPA 2.2 261 Electronic components and boards</a:t>
+            </a:r>
+          </a:p>
+          <a:p>
+            <a:pPr marL="171450" marR="0" lvl="0" indent="-171450" algn="l" defTabSz="914400" rtl="0" eaLnBrk="1" fontAlgn="auto" latinLnBrk="0" hangingPunct="1">
+              <a:lnSpc>
+                <a:spcPct val="100000"/>
+              </a:lnSpc>
+              <a:spcBef>
+                <a:spcPts val="0"/>
+              </a:spcBef>
+              <a:spcAft>
+                <a:spcPts val="0"/>
+              </a:spcAft>
+              <a:buClrTx/>
+              <a:buSzTx/>
+              <a:buFontTx/>
+              <a:buChar char="-"/>
+              <a:tabLst/>
+              <a:defRPr/>
+            </a:pPr>
+            <a:r>
+              <a:rPr lang="en-US" sz="1200" kern="1200" dirty="0">
+                <a:solidFill>
+                  <a:schemeClr val="tx1"/>
+                </a:solidFill>
+                <a:effectLst/>
+                <a:latin typeface="+mn-lt"/>
+                <a:ea typeface="+mn-ea"/>
+                <a:cs typeface="+mn-cs"/>
+              </a:rPr>
+              <a:t>CPA 2.2 262 Computers and peripheral equipment</a:t>
+            </a:r>
+          </a:p>
+          <a:p>
+            <a:pPr marL="171450" marR="0" lvl="0" indent="-171450" algn="l" defTabSz="914400" rtl="0" eaLnBrk="1" fontAlgn="auto" latinLnBrk="0" hangingPunct="1">
+              <a:lnSpc>
+                <a:spcPct val="100000"/>
+              </a:lnSpc>
+              <a:spcBef>
+                <a:spcPts val="0"/>
+              </a:spcBef>
+              <a:spcAft>
+                <a:spcPts val="0"/>
+              </a:spcAft>
+              <a:buClrTx/>
+              <a:buSzTx/>
+              <a:buFontTx/>
+              <a:buChar char="-"/>
+              <a:tabLst/>
+              <a:defRPr/>
+            </a:pPr>
+            <a:r>
+              <a:rPr lang="nl-NL" sz="1200" noProof="1">
+                <a:latin typeface="Arial" panose="020B0604020202020204" pitchFamily="34" charset="0"/>
+                <a:ea typeface="Verdana" panose="020B0604030504040204" pitchFamily="34" charset="0"/>
+                <a:cs typeface="Arial" panose="020B0604020202020204" pitchFamily="34" charset="0"/>
+              </a:rPr>
+              <a:t>CPA 2.2 2899  </a:t>
+            </a:r>
+            <a:r>
+              <a:rPr lang="en-NL" sz="1200" b="0" i="0" kern="1200" dirty="0">
+                <a:solidFill>
+                  <a:schemeClr val="tx1"/>
+                </a:solidFill>
+                <a:effectLst/>
+                <a:latin typeface="+mn-lt"/>
+                <a:ea typeface="+mn-ea"/>
+                <a:cs typeface="+mn-cs"/>
+              </a:rPr>
+              <a:t>Other special-purpose machinery </a:t>
+            </a:r>
+            <a:r>
+              <a:rPr lang="en-NL" sz="1200" b="0" i="0" kern="1200" dirty="0" err="1">
+                <a:solidFill>
+                  <a:schemeClr val="tx1"/>
+                </a:solidFill>
+                <a:effectLst/>
+                <a:latin typeface="+mn-lt"/>
+                <a:ea typeface="+mn-ea"/>
+                <a:cs typeface="+mn-cs"/>
+              </a:rPr>
+              <a:t>n.e.c.</a:t>
+            </a:r>
+            <a:endParaRPr lang="en-NL" sz="1200" b="0" i="0" kern="1200" dirty="0">
+              <a:solidFill>
+                <a:schemeClr val="tx1"/>
+              </a:solidFill>
+              <a:effectLst/>
+              <a:latin typeface="+mn-lt"/>
+              <a:ea typeface="+mn-ea"/>
+              <a:cs typeface="+mn-cs"/>
+            </a:endParaRPr>
+          </a:p>
+          <a:p>
+            <a:pPr marL="0" marR="0" lvl="0" indent="0" algn="l" defTabSz="914400" rtl="0" eaLnBrk="1" fontAlgn="auto" latinLnBrk="0" hangingPunct="1">
+              <a:lnSpc>
+                <a:spcPct val="100000"/>
+              </a:lnSpc>
+              <a:spcBef>
+                <a:spcPts val="0"/>
+              </a:spcBef>
+              <a:spcAft>
+                <a:spcPts val="0"/>
+              </a:spcAft>
+              <a:buClrTx/>
+              <a:buSzTx/>
+              <a:buFontTx/>
+              <a:buNone/>
+              <a:tabLst/>
+              <a:defRPr/>
+            </a:pPr>
+            <a:r>
+              <a:rPr lang="nl-NL" sz="1200" noProof="1">
+                <a:latin typeface="Arial" panose="020B0604020202020204" pitchFamily="34" charset="0"/>
+                <a:ea typeface="Verdana" panose="020B0604030504040204" pitchFamily="34" charset="0"/>
+                <a:cs typeface="Arial" panose="020B0604020202020204" pitchFamily="34" charset="0"/>
+              </a:rPr>
+              <a:t>Data for computer services (Eurostat: EBOPS, </a:t>
+            </a:r>
+            <a:r>
+              <a:rPr lang="en-NL" sz="1200" b="0" i="0" kern="1200" dirty="0">
+                <a:solidFill>
+                  <a:schemeClr val="tx1"/>
+                </a:solidFill>
+                <a:effectLst/>
+                <a:latin typeface="+mn-lt"/>
+                <a:ea typeface="+mn-ea"/>
+                <a:cs typeface="+mn-cs"/>
+              </a:rPr>
+              <a:t>International Trade in Services, ITS</a:t>
+            </a:r>
+            <a:r>
+              <a:rPr lang="en-US" sz="1200" b="0" i="0" kern="1200" dirty="0">
+                <a:solidFill>
+                  <a:schemeClr val="tx1"/>
+                </a:solidFill>
+                <a:effectLst/>
+                <a:latin typeface="+mn-lt"/>
+                <a:ea typeface="+mn-ea"/>
+                <a:cs typeface="+mn-cs"/>
+              </a:rPr>
+              <a:t> are just limitedly available (for some countries just starting in 2013, while 2025 data is not yet available for any country).</a:t>
+            </a:r>
+            <a:endParaRPr lang="nl-NL" i="0" baseline="0" dirty="0"/>
           </a:p>
         </p:txBody>
       </p:sp>

--- a/Resilience.pptx
+++ b/Resilience.pptx
@@ -156,7 +156,7 @@
 <file path=ppt/revisionInfo.xml><?xml version="1.0" encoding="utf-8"?>
 <p1510:revInfo xmlns:a="http://schemas.openxmlformats.org/drawingml/2006/main" xmlns:r="http://schemas.openxmlformats.org/officeDocument/2006/relationships" xmlns:p1510="http://schemas.microsoft.com/office/powerpoint/2015/10/main">
   <p1510:revLst>
-    <p1510:client id="{13B43BEF-9B9B-431D-9308-0B2B126B7992}" v="110" dt="2026-09-25T10:23:54.872"/>
+    <p1510:client id="{13B43BEF-9B9B-431D-9308-0B2B126B7992}" v="113" dt="2026-09-25T10:41:19.945"/>
   </p1510:revLst>
 </p1510:revInfo>
 </file>
@@ -166,12 +166,12 @@
   <pc:docChgLst>
     <pc:chgData name="Jan Willem van den End (EBO_CMA)" userId="32ade95a-e024-4672-952f-5ed8641a9e00" providerId="ADAL" clId="{3BBBE02E-ACD4-4586-9407-5E79BF620DF1}"/>
     <pc:docChg chg="undo redo custSel addSld modSld">
-      <pc:chgData name="Jan Willem van den End (EBO_CMA)" userId="32ade95a-e024-4672-952f-5ed8641a9e00" providerId="ADAL" clId="{3BBBE02E-ACD4-4586-9407-5E79BF620DF1}" dt="2026-09-25T10:24:26.604" v="5203" actId="20577"/>
+      <pc:chgData name="Jan Willem van den End (EBO_CMA)" userId="32ade95a-e024-4672-952f-5ed8641a9e00" providerId="ADAL" clId="{3BBBE02E-ACD4-4586-9407-5E79BF620DF1}" dt="2026-09-25T10:45:34.501" v="5500" actId="20577"/>
       <pc:docMkLst>
         <pc:docMk/>
       </pc:docMkLst>
-      <pc:sldChg chg="modSp mod">
-        <pc:chgData name="Jan Willem van den End (EBO_CMA)" userId="32ade95a-e024-4672-952f-5ed8641a9e00" providerId="ADAL" clId="{3BBBE02E-ACD4-4586-9407-5E79BF620DF1}" dt="2026-09-25T09:20:04.427" v="4575" actId="1076"/>
+      <pc:sldChg chg="delSp modSp mod">
+        <pc:chgData name="Jan Willem van den End (EBO_CMA)" userId="32ade95a-e024-4672-952f-5ed8641a9e00" providerId="ADAL" clId="{3BBBE02E-ACD4-4586-9407-5E79BF620DF1}" dt="2026-09-25T10:40:23.376" v="5236" actId="478"/>
         <pc:sldMkLst>
           <pc:docMk/>
           <pc:sldMk cId="3588697" sldId="657"/>
@@ -184,16 +184,16 @@
             <ac:spMk id="2" creationId="{8F3D8D65-3E89-7468-E586-D814DD2BD102}"/>
           </ac:spMkLst>
         </pc:spChg>
-        <pc:spChg chg="mod">
-          <ac:chgData name="Jan Willem van den End (EBO_CMA)" userId="32ade95a-e024-4672-952f-5ed8641a9e00" providerId="ADAL" clId="{3BBBE02E-ACD4-4586-9407-5E79BF620DF1}" dt="2026-09-25T09:12:43.530" v="4544" actId="1035"/>
+        <pc:spChg chg="del mod">
+          <ac:chgData name="Jan Willem van den End (EBO_CMA)" userId="32ade95a-e024-4672-952f-5ed8641a9e00" providerId="ADAL" clId="{3BBBE02E-ACD4-4586-9407-5E79BF620DF1}" dt="2026-09-25T10:40:23.376" v="5236" actId="478"/>
           <ac:spMkLst>
             <pc:docMk/>
             <pc:sldMk cId="3588697" sldId="657"/>
             <ac:spMk id="4" creationId="{1D067C04-83DA-B764-8F1B-3A65D2BB4049}"/>
           </ac:spMkLst>
         </pc:spChg>
-        <pc:spChg chg="mod">
-          <ac:chgData name="Jan Willem van den End (EBO_CMA)" userId="32ade95a-e024-4672-952f-5ed8641a9e00" providerId="ADAL" clId="{3BBBE02E-ACD4-4586-9407-5E79BF620DF1}" dt="2026-09-25T09:12:45.567" v="4546" actId="1035"/>
+        <pc:spChg chg="del mod">
+          <ac:chgData name="Jan Willem van den End (EBO_CMA)" userId="32ade95a-e024-4672-952f-5ed8641a9e00" providerId="ADAL" clId="{3BBBE02E-ACD4-4586-9407-5E79BF620DF1}" dt="2026-09-25T10:40:20.380" v="5235" actId="478"/>
           <ac:spMkLst>
             <pc:docMk/>
             <pc:sldMk cId="3588697" sldId="657"/>
@@ -202,13 +202,13 @@
         </pc:spChg>
       </pc:sldChg>
       <pc:sldChg chg="modSp mod">
-        <pc:chgData name="Jan Willem van den End (EBO_CMA)" userId="32ade95a-e024-4672-952f-5ed8641a9e00" providerId="ADAL" clId="{3BBBE02E-ACD4-4586-9407-5E79BF620DF1}" dt="2026-09-20T19:40:41.054" v="2411" actId="20577"/>
+        <pc:chgData name="Jan Willem van den End (EBO_CMA)" userId="32ade95a-e024-4672-952f-5ed8641a9e00" providerId="ADAL" clId="{3BBBE02E-ACD4-4586-9407-5E79BF620DF1}" dt="2026-09-25T10:45:34.501" v="5500" actId="20577"/>
         <pc:sldMkLst>
           <pc:docMk/>
           <pc:sldMk cId="1203207517" sldId="768"/>
         </pc:sldMkLst>
         <pc:spChg chg="mod">
-          <ac:chgData name="Jan Willem van den End (EBO_CMA)" userId="32ade95a-e024-4672-952f-5ed8641a9e00" providerId="ADAL" clId="{3BBBE02E-ACD4-4586-9407-5E79BF620DF1}" dt="2026-09-20T19:40:41.054" v="2411" actId="20577"/>
+          <ac:chgData name="Jan Willem van den End (EBO_CMA)" userId="32ade95a-e024-4672-952f-5ed8641a9e00" providerId="ADAL" clId="{3BBBE02E-ACD4-4586-9407-5E79BF620DF1}" dt="2026-09-25T10:45:34.501" v="5500" actId="20577"/>
           <ac:spMkLst>
             <pc:docMk/>
             <pc:sldMk cId="1203207517" sldId="768"/>
@@ -357,11 +357,19 @@
         </pc:spChg>
       </pc:sldChg>
       <pc:sldChg chg="delSp modSp mod">
-        <pc:chgData name="Jan Willem van den End (EBO_CMA)" userId="32ade95a-e024-4672-952f-5ed8641a9e00" providerId="ADAL" clId="{3BBBE02E-ACD4-4586-9407-5E79BF620DF1}" dt="2026-09-23T10:25:55.343" v="4048" actId="6549"/>
+        <pc:chgData name="Jan Willem van den End (EBO_CMA)" userId="32ade95a-e024-4672-952f-5ed8641a9e00" providerId="ADAL" clId="{3BBBE02E-ACD4-4586-9407-5E79BF620DF1}" dt="2026-09-25T10:43:33.513" v="5406" actId="20577"/>
         <pc:sldMkLst>
           <pc:docMk/>
           <pc:sldMk cId="374833015" sldId="791"/>
         </pc:sldMkLst>
+        <pc:spChg chg="mod">
+          <ac:chgData name="Jan Willem van den End (EBO_CMA)" userId="32ade95a-e024-4672-952f-5ed8641a9e00" providerId="ADAL" clId="{3BBBE02E-ACD4-4586-9407-5E79BF620DF1}" dt="2026-09-25T10:43:33.513" v="5406" actId="20577"/>
+          <ac:spMkLst>
+            <pc:docMk/>
+            <pc:sldMk cId="374833015" sldId="791"/>
+            <ac:spMk id="4" creationId="{80A3C609-6383-27DE-510C-C64F4B0DBC92}"/>
+          </ac:spMkLst>
+        </pc:spChg>
         <pc:spChg chg="mod">
           <ac:chgData name="Jan Willem van den End (EBO_CMA)" userId="32ade95a-e024-4672-952f-5ed8641a9e00" providerId="ADAL" clId="{3BBBE02E-ACD4-4586-9407-5E79BF620DF1}" dt="2026-09-20T19:32:00.290" v="2064" actId="1076"/>
           <ac:spMkLst>
@@ -559,7 +567,7 @@
         </pc:picChg>
       </pc:sldChg>
       <pc:sldChg chg="modSp add mod modNotesTx">
-        <pc:chgData name="Jan Willem van den End (EBO_CMA)" userId="32ade95a-e024-4672-952f-5ed8641a9e00" providerId="ADAL" clId="{3BBBE02E-ACD4-4586-9407-5E79BF620DF1}" dt="2026-09-25T10:24:26.604" v="5203" actId="20577"/>
+        <pc:chgData name="Jan Willem van den End (EBO_CMA)" userId="32ade95a-e024-4672-952f-5ed8641a9e00" providerId="ADAL" clId="{3BBBE02E-ACD4-4586-9407-5E79BF620DF1}" dt="2026-09-25T10:43:06.065" v="5402" actId="20577"/>
         <pc:sldMkLst>
           <pc:docMk/>
           <pc:sldMk cId="341592472" sldId="797"/>
@@ -2211,7 +2219,38 @@
                 <a:ea typeface="+mn-ea"/>
                 <a:cs typeface="+mn-cs"/>
               </a:rPr>
-              <a:t> are just limitedly available (for some countries just starting in 2013, while 2025 data is not yet available for any country).</a:t>
+              <a:t> are just limitedly available (for some countries just starting in 2013, while 2025 data is not yet available for any country) </a:t>
+            </a:r>
+          </a:p>
+          <a:p>
+            <a:pPr marL="0" marR="0" lvl="0" indent="0" algn="l" defTabSz="914400" rtl="0" eaLnBrk="1" fontAlgn="auto" latinLnBrk="0" hangingPunct="1">
+              <a:lnSpc>
+                <a:spcPct val="100000"/>
+              </a:lnSpc>
+              <a:spcBef>
+                <a:spcPts val="0"/>
+              </a:spcBef>
+              <a:spcAft>
+                <a:spcPts val="0"/>
+              </a:spcAft>
+              <a:buClrTx/>
+              <a:buSzTx/>
+              <a:buFontTx/>
+              <a:buNone/>
+              <a:tabLst/>
+              <a:defRPr/>
+            </a:pPr>
+            <a:r>
+              <a:rPr lang="en-US" sz="1200" b="0" i="0" kern="1200" dirty="0">
+                <a:solidFill>
+                  <a:schemeClr val="tx1"/>
+                </a:solidFill>
+                <a:effectLst/>
+                <a:latin typeface="+mn-lt"/>
+                <a:ea typeface="+mn-ea"/>
+                <a:cs typeface="+mn-cs"/>
+              </a:rPr>
+              <a:t>=&gt; to fetch these data =&gt;collect_ai_data_eur_serv.py // spreadsheet with data including services = ai_data_eur_serv.xls</a:t>
             </a:r>
             <a:endParaRPr lang="nl-NL" i="0" baseline="0" dirty="0"/>
           </a:p>
@@ -7447,7 +7486,7 @@
                   <a:srgbClr val="002060"/>
                 </a:solidFill>
               </a:rPr>
-              <a:t>Number of equity invetsments in AI fields</a:t>
+              <a:t>Number of equity investments in AI fields</a:t>
             </a:r>
             <a:endParaRPr lang="nl-NL" sz="1600" dirty="0">
               <a:solidFill>
@@ -8630,7 +8669,7 @@
         <p:spPr>
           <a:xfrm>
             <a:off x="3767327" y="5639616"/>
-            <a:ext cx="5376673" cy="830997"/>
+            <a:ext cx="5376673" cy="1015663"/>
           </a:xfrm>
           <a:prstGeom prst="rect">
             <a:avLst/>
@@ -8652,7 +8691,7 @@
                   <a:srgbClr val="002060"/>
                 </a:solidFill>
               </a:rPr>
-              <a:t>Semiconductor stock index (SOX) </a:t>
+              <a:t>Semiconductor stock index (SOX), </a:t>
             </a:r>
             <a:r>
               <a:rPr lang="nl-NL" sz="1200" dirty="0" err="1">
@@ -8660,7 +8699,7 @@
                   <a:srgbClr val="002060"/>
                 </a:solidFill>
               </a:rPr>
-              <a:t>relative</a:t>
+              <a:t>controlled</a:t>
             </a:r>
             <a:r>
               <a:rPr lang="nl-NL" sz="1200" dirty="0">
@@ -8676,7 +8715,7 @@
                   <a:srgbClr val="002060"/>
                 </a:solidFill>
               </a:rPr>
-              <a:t>to</a:t>
+              <a:t>for</a:t>
             </a:r>
             <a:r>
               <a:rPr lang="nl-NL" sz="1200" dirty="0">
@@ -8684,20 +8723,23 @@
                   <a:srgbClr val="002060"/>
                 </a:solidFill>
               </a:rPr>
-              <a:t> STOXX Europe 600.</a:t>
-            </a:r>
-          </a:p>
-          <a:p>
-            <a:pPr>
-              <a:defRPr/>
-            </a:pPr>
+              <a:t> </a:t>
+            </a:r>
+            <a:r>
+              <a:rPr lang="nl-NL" sz="1200" dirty="0" err="1">
+                <a:solidFill>
+                  <a:srgbClr val="002060"/>
+                </a:solidFill>
+              </a:rPr>
+              <a:t>by</a:t>
+            </a:r>
             <a:r>
               <a:rPr lang="nl-NL" sz="1200" dirty="0">
                 <a:solidFill>
                   <a:srgbClr val="002060"/>
                 </a:solidFill>
               </a:rPr>
-              <a:t>Global </a:t>
+              <a:t> </a:t>
             </a:r>
             <a:r>
               <a:rPr lang="nl-NL" sz="1200" dirty="0" err="1">
@@ -8705,6 +8747,22 @@
                   <a:srgbClr val="002060"/>
                 </a:solidFill>
               </a:rPr>
+              <a:t>broad</a:t>
+            </a:r>
+            <a:r>
+              <a:rPr lang="nl-NL" sz="1200" dirty="0">
+                <a:solidFill>
+                  <a:srgbClr val="002060"/>
+                </a:solidFill>
+              </a:rPr>
+              <a:t> traditional stock index (STOXX Europe 600). Global </a:t>
+            </a:r>
+            <a:r>
+              <a:rPr lang="nl-NL" sz="1200" dirty="0" err="1">
+                <a:solidFill>
+                  <a:srgbClr val="002060"/>
+                </a:solidFill>
+              </a:rPr>
               <a:t>uncertainty</a:t>
             </a:r>
             <a:r>
@@ -8713,7 +8771,15 @@
                   <a:srgbClr val="002060"/>
                 </a:solidFill>
               </a:rPr>
-              <a:t> is princ </a:t>
+              <a:t> </a:t>
+            </a:r>
+            <a:r>
+              <a:rPr lang="nl-NL" sz="1200">
+                <a:solidFill>
+                  <a:srgbClr val="002060"/>
+                </a:solidFill>
+              </a:rPr>
+              <a:t>is first </a:t>
             </a:r>
             <a:r>
               <a:rPr lang="nl-NL" sz="1200" dirty="0" err="1">
@@ -8721,7 +8787,7 @@
                   <a:srgbClr val="002060"/>
                 </a:solidFill>
               </a:rPr>
-              <a:t>comp</a:t>
+              <a:t>principal</a:t>
             </a:r>
             <a:r>
               <a:rPr lang="nl-NL" sz="1200" dirty="0">
@@ -8729,7 +8795,7 @@
                   <a:srgbClr val="002060"/>
                 </a:solidFill>
               </a:rPr>
-              <a:t> of EPU, GPR, VIX (</a:t>
+              <a:t> component of EPU, GPR, VIX (</a:t>
             </a:r>
             <a:r>
               <a:rPr lang="nl-NL" sz="1200" dirty="0" err="1">
@@ -9249,7 +9315,22 @@
                 <a:latin typeface="Verdana" panose="020B0604030504040204" pitchFamily="34" charset="0"/>
                 <a:ea typeface="Verdana" panose="020B0604030504040204" pitchFamily="34" charset="0"/>
               </a:rPr>
-              <a:t>digital investm by corporations, equity investm in AI firms</a:t>
+              <a:t>digital </a:t>
+            </a:r>
+            <a:r>
+              <a:rPr lang="nl-NL" sz="2000" noProof="1">
+                <a:latin typeface="Verdana" panose="020B0604030504040204" pitchFamily="34" charset="0"/>
+                <a:ea typeface="Verdana" panose="020B0604030504040204" pitchFamily="34" charset="0"/>
+                <a:hlinkClick r:id="rId3" action="ppaction://hlinksldjump"/>
+              </a:rPr>
+              <a:t>investm</a:t>
+            </a:r>
+            <a:r>
+              <a:rPr lang="nl-NL" sz="2000" noProof="1">
+                <a:latin typeface="Verdana" panose="020B0604030504040204" pitchFamily="34" charset="0"/>
+                <a:ea typeface="Verdana" panose="020B0604030504040204" pitchFamily="34" charset="0"/>
+              </a:rPr>
+              <a:t> by corporations, equity investm in AI firms</a:t>
             </a:r>
           </a:p>
           <a:p>
@@ -9336,8 +9417,16 @@
               <a:rPr lang="nl-NL" sz="2000" noProof="1">
                 <a:latin typeface="Verdana" panose="020B0604030504040204" pitchFamily="34" charset="0"/>
                 <a:ea typeface="Verdana" panose="020B0604030504040204" pitchFamily="34" charset="0"/>
-              </a:rPr>
-              <a:t>exports ICT/AI-related products, correlation with SOX index</a:t>
+                <a:hlinkClick r:id="rId4" action="ppaction://hlinksldjump"/>
+              </a:rPr>
+              <a:t>exports</a:t>
+            </a:r>
+            <a:r>
+              <a:rPr lang="nl-NL" sz="2000" noProof="1">
+                <a:latin typeface="Verdana" panose="020B0604030504040204" pitchFamily="34" charset="0"/>
+                <a:ea typeface="Verdana" panose="020B0604030504040204" pitchFamily="34" charset="0"/>
+              </a:rPr>
+              <a:t> ICT/AI-related products, correlation with SOX index</a:t>
             </a:r>
             <a:endParaRPr lang="en-US" sz="2000" noProof="1">
               <a:latin typeface="Verdana" panose="020B0604030504040204" pitchFamily="34" charset="0"/>
@@ -9374,102 +9463,6 @@
               </a:rPr>
               <a:t>Channels could capture structural and/or cyclical relations (underlying economic changes, or exposure to other cycle/factor)</a:t>
             </a:r>
-          </a:p>
-        </p:txBody>
-      </p:sp>
-      <p:sp>
-        <p:nvSpPr>
-          <p:cNvPr id="4" name="Tekstvak 3">
-            <a:extLst>
-              <a:ext uri="{FF2B5EF4-FFF2-40B4-BE49-F238E27FC236}">
-                <a16:creationId xmlns:a16="http://schemas.microsoft.com/office/drawing/2014/main" id="{1D067C04-83DA-B764-8F1B-3A65D2BB4049}"/>
-              </a:ext>
-            </a:extLst>
-          </p:cNvPr>
-          <p:cNvSpPr txBox="1"/>
-          <p:nvPr/>
-        </p:nvSpPr>
-        <p:spPr>
-          <a:xfrm>
-            <a:off x="7928368" y="4907417"/>
-            <a:ext cx="594360" cy="307777"/>
-          </a:xfrm>
-          <a:prstGeom prst="rect">
-            <a:avLst/>
-          </a:prstGeom>
-          <a:noFill/>
-        </p:spPr>
-        <p:txBody>
-          <a:bodyPr wrap="square" rtlCol="0">
-            <a:spAutoFit/>
-          </a:bodyPr>
-          <a:lstStyle/>
-          <a:p>
-            <a:pPr>
-              <a:defRPr/>
-            </a:pPr>
-            <a:r>
-              <a:rPr lang="nl-NL" sz="1400" dirty="0">
-                <a:solidFill>
-                  <a:srgbClr val="002060"/>
-                </a:solidFill>
-                <a:hlinkClick r:id="rId3" action="ppaction://hlinksldjump"/>
-              </a:rPr>
-              <a:t>Link</a:t>
-            </a:r>
-            <a:endParaRPr lang="nl-NL" sz="1400" dirty="0">
-              <a:solidFill>
-                <a:srgbClr val="002060"/>
-              </a:solidFill>
-            </a:endParaRPr>
-          </a:p>
-        </p:txBody>
-      </p:sp>
-      <p:sp>
-        <p:nvSpPr>
-          <p:cNvPr id="5" name="Tekstvak 3">
-            <a:extLst>
-              <a:ext uri="{FF2B5EF4-FFF2-40B4-BE49-F238E27FC236}">
-                <a16:creationId xmlns:a16="http://schemas.microsoft.com/office/drawing/2014/main" id="{CA3656D4-EE51-EF04-3E51-2AD8DB9C0964}"/>
-              </a:ext>
-            </a:extLst>
-          </p:cNvPr>
-          <p:cNvSpPr txBox="1"/>
-          <p:nvPr/>
-        </p:nvSpPr>
-        <p:spPr>
-          <a:xfrm>
-            <a:off x="7896104" y="2769968"/>
-            <a:ext cx="594360" cy="307777"/>
-          </a:xfrm>
-          <a:prstGeom prst="rect">
-            <a:avLst/>
-          </a:prstGeom>
-          <a:noFill/>
-        </p:spPr>
-        <p:txBody>
-          <a:bodyPr wrap="square" rtlCol="0">
-            <a:spAutoFit/>
-          </a:bodyPr>
-          <a:lstStyle/>
-          <a:p>
-            <a:pPr>
-              <a:defRPr/>
-            </a:pPr>
-            <a:r>
-              <a:rPr lang="nl-NL" sz="1400" dirty="0">
-                <a:solidFill>
-                  <a:srgbClr val="002060"/>
-                </a:solidFill>
-                <a:hlinkClick r:id="rId4" action="ppaction://hlinksldjump"/>
-              </a:rPr>
-              <a:t>Link</a:t>
-            </a:r>
-            <a:endParaRPr lang="nl-NL" sz="1400" dirty="0">
-              <a:solidFill>
-                <a:srgbClr val="002060"/>
-              </a:solidFill>
-            </a:endParaRPr>
           </a:p>
         </p:txBody>
       </p:sp>

--- a/Resilience.pptx
+++ b/Resilience.pptx
@@ -156,7 +156,7 @@
 <file path=ppt/revisionInfo.xml><?xml version="1.0" encoding="utf-8"?>
 <p1510:revInfo xmlns:a="http://schemas.openxmlformats.org/drawingml/2006/main" xmlns:r="http://schemas.openxmlformats.org/officeDocument/2006/relationships" xmlns:p1510="http://schemas.microsoft.com/office/powerpoint/2015/10/main">
   <p1510:revLst>
-    <p1510:client id="{13B43BEF-9B9B-431D-9308-0B2B126B7992}" v="113" dt="2026-09-25T10:41:19.945"/>
+    <p1510:client id="{13B43BEF-9B9B-431D-9308-0B2B126B7992}" v="114" dt="2026-09-25T11:36:54.569"/>
   </p1510:revLst>
 </p1510:revInfo>
 </file>
@@ -166,7 +166,7 @@
   <pc:docChgLst>
     <pc:chgData name="Jan Willem van den End (EBO_CMA)" userId="32ade95a-e024-4672-952f-5ed8641a9e00" providerId="ADAL" clId="{3BBBE02E-ACD4-4586-9407-5E79BF620DF1}"/>
     <pc:docChg chg="undo redo custSel addSld modSld">
-      <pc:chgData name="Jan Willem van den End (EBO_CMA)" userId="32ade95a-e024-4672-952f-5ed8641a9e00" providerId="ADAL" clId="{3BBBE02E-ACD4-4586-9407-5E79BF620DF1}" dt="2026-09-25T10:45:34.501" v="5500" actId="20577"/>
+      <pc:chgData name="Jan Willem van den End (EBO_CMA)" userId="32ade95a-e024-4672-952f-5ed8641a9e00" providerId="ADAL" clId="{3BBBE02E-ACD4-4586-9407-5E79BF620DF1}" dt="2026-09-25T11:36:54.569" v="5519"/>
       <pc:docMkLst>
         <pc:docMk/>
       </pc:docMkLst>
@@ -232,7 +232,7 @@
         </pc:spChg>
       </pc:sldChg>
       <pc:sldChg chg="addSp delSp modSp mod">
-        <pc:chgData name="Jan Willem van den End (EBO_CMA)" userId="32ade95a-e024-4672-952f-5ed8641a9e00" providerId="ADAL" clId="{3BBBE02E-ACD4-4586-9407-5E79BF620DF1}" dt="2026-09-25T10:09:42.045" v="5079" actId="20577"/>
+        <pc:chgData name="Jan Willem van den End (EBO_CMA)" userId="32ade95a-e024-4672-952f-5ed8641a9e00" providerId="ADAL" clId="{3BBBE02E-ACD4-4586-9407-5E79BF620DF1}" dt="2026-09-25T11:36:40.711" v="5518" actId="20577"/>
         <pc:sldMkLst>
           <pc:docMk/>
           <pc:sldMk cId="2428101549" sldId="784"/>
@@ -262,7 +262,7 @@
           </ac:spMkLst>
         </pc:spChg>
         <pc:spChg chg="add mod">
-          <ac:chgData name="Jan Willem van den End (EBO_CMA)" userId="32ade95a-e024-4672-952f-5ed8641a9e00" providerId="ADAL" clId="{3BBBE02E-ACD4-4586-9407-5E79BF620DF1}" dt="2026-09-25T10:07:09.998" v="5062" actId="6549"/>
+          <ac:chgData name="Jan Willem van den End (EBO_CMA)" userId="32ade95a-e024-4672-952f-5ed8641a9e00" providerId="ADAL" clId="{3BBBE02E-ACD4-4586-9407-5E79BF620DF1}" dt="2026-09-25T11:36:40.711" v="5518" actId="20577"/>
           <ac:spMkLst>
             <pc:docMk/>
             <pc:sldMk cId="2428101549" sldId="784"/>
@@ -396,7 +396,7 @@
         </pc:picChg>
       </pc:sldChg>
       <pc:sldChg chg="addSp delSp modSp mod">
-        <pc:chgData name="Jan Willem van den End (EBO_CMA)" userId="32ade95a-e024-4672-952f-5ed8641a9e00" providerId="ADAL" clId="{3BBBE02E-ACD4-4586-9407-5E79BF620DF1}" dt="2026-09-25T10:11:22.362" v="5083" actId="1035"/>
+        <pc:chgData name="Jan Willem van den End (EBO_CMA)" userId="32ade95a-e024-4672-952f-5ed8641a9e00" providerId="ADAL" clId="{3BBBE02E-ACD4-4586-9407-5E79BF620DF1}" dt="2026-09-25T11:36:54.569" v="5519"/>
         <pc:sldMkLst>
           <pc:docMk/>
           <pc:sldMk cId="2304846322" sldId="792"/>
@@ -418,7 +418,7 @@
           </ac:spMkLst>
         </pc:spChg>
         <pc:spChg chg="mod">
-          <ac:chgData name="Jan Willem van den End (EBO_CMA)" userId="32ade95a-e024-4672-952f-5ed8641a9e00" providerId="ADAL" clId="{3BBBE02E-ACD4-4586-9407-5E79BF620DF1}" dt="2026-09-25T10:07:26.909" v="5070" actId="6549"/>
+          <ac:chgData name="Jan Willem van den End (EBO_CMA)" userId="32ade95a-e024-4672-952f-5ed8641a9e00" providerId="ADAL" clId="{3BBBE02E-ACD4-4586-9407-5E79BF620DF1}" dt="2026-09-25T11:36:54.569" v="5519"/>
           <ac:spMkLst>
             <pc:docMk/>
             <pc:sldMk cId="2304846322" sldId="792"/>
@@ -10164,7 +10164,7 @@
                   <a:srgbClr val="002060"/>
                 </a:solidFill>
               </a:rPr>
-              <a:t>Lower vs higher than median ICT/AI-exposure (10 EA countries, 2011-25 (all years), 2020, 2022, 2025 (shock years). ***, **, * indicate 1%, 5%, 10% significance of difference between blue and grey dot in same period. +++, ++, + indicate 1%, 5%, 10% significance of difference between blue (grey) dots in all years vs shock years (country-clustered difference-in-shares test).</a:t>
+              <a:t>Lower vs higher than the time-varying median ICT/AI-exposure (10 EA countries, 2011-25 (all years), 2020, 2022, 2025 (shock years)). ***, **, * indicate 1%, 5%, 10% significance of difference between blue and grey dot in same period. +++, ++, + indicate 1%, 5%, 10% significance of difference between blue (grey) dots in all years vs shock years (country-clustered difference-in-shares test).</a:t>
             </a:r>
           </a:p>
         </p:txBody>
@@ -10439,7 +10439,7 @@
                   <a:srgbClr val="002060"/>
                 </a:solidFill>
               </a:rPr>
-              <a:t>Lower vs higher than median ICT/AI-exposure (10 EA countries, 2011-25 (all years), 2020, 2022, 2025 (shock years). ***, **, * indicate 1%, 5%, 10% significance of difference between blue and grey dot in same period. +++, ++, + indicate 1%, 5%, 10% significance of difference between blue (grey) dots in all years vs shock years (country-clustered difference-in-shares test).</a:t>
+              <a:t>Lower vs higher than the time-varying median ICT/AI-exposure (10 EA countries, 2011-25 (all years), 2020, 2022, 2025 (shock years)). ***, **, * indicate 1%, 5%, 10% significance of difference between blue and grey dot in same period. +++, ++, + indicate 1%, 5%, 10% significance of difference between blue (grey) dots in all years vs shock years (country-clustered difference-in-shares test).</a:t>
             </a:r>
           </a:p>
         </p:txBody>

--- a/Resilience.pptx
+++ b/Resilience.pptx
@@ -156,7 +156,7 @@
 <file path=ppt/revisionInfo.xml><?xml version="1.0" encoding="utf-8"?>
 <p1510:revInfo xmlns:a="http://schemas.openxmlformats.org/drawingml/2006/main" xmlns:r="http://schemas.openxmlformats.org/officeDocument/2006/relationships" xmlns:p1510="http://schemas.microsoft.com/office/powerpoint/2015/10/main">
   <p1510:revLst>
-    <p1510:client id="{13B43BEF-9B9B-431D-9308-0B2B126B7992}" v="114" dt="2026-09-25T11:36:54.569"/>
+    <p1510:client id="{13B43BEF-9B9B-431D-9308-0B2B126B7992}" v="1" dt="2026-09-29T12:11:50.639"/>
   </p1510:revLst>
 </p1510:revInfo>
 </file>
@@ -166,7 +166,7 @@
   <pc:docChgLst>
     <pc:chgData name="Jan Willem van den End (EBO_CMA)" userId="32ade95a-e024-4672-952f-5ed8641a9e00" providerId="ADAL" clId="{3BBBE02E-ACD4-4586-9407-5E79BF620DF1}"/>
     <pc:docChg chg="undo redo custSel addSld modSld">
-      <pc:chgData name="Jan Willem van den End (EBO_CMA)" userId="32ade95a-e024-4672-952f-5ed8641a9e00" providerId="ADAL" clId="{3BBBE02E-ACD4-4586-9407-5E79BF620DF1}" dt="2026-09-25T11:36:54.569" v="5519"/>
+      <pc:chgData name="Jan Willem van den End (EBO_CMA)" userId="32ade95a-e024-4672-952f-5ed8641a9e00" providerId="ADAL" clId="{3BBBE02E-ACD4-4586-9407-5E79BF620DF1}" dt="2026-09-29T12:13:14.932" v="5699" actId="20577"/>
       <pc:docMkLst>
         <pc:docMk/>
       </pc:docMkLst>
@@ -182,22 +182,6 @@
             <pc:docMk/>
             <pc:sldMk cId="3588697" sldId="657"/>
             <ac:spMk id="2" creationId="{8F3D8D65-3E89-7468-E586-D814DD2BD102}"/>
-          </ac:spMkLst>
-        </pc:spChg>
-        <pc:spChg chg="del mod">
-          <ac:chgData name="Jan Willem van den End (EBO_CMA)" userId="32ade95a-e024-4672-952f-5ed8641a9e00" providerId="ADAL" clId="{3BBBE02E-ACD4-4586-9407-5E79BF620DF1}" dt="2026-09-25T10:40:23.376" v="5236" actId="478"/>
-          <ac:spMkLst>
-            <pc:docMk/>
-            <pc:sldMk cId="3588697" sldId="657"/>
-            <ac:spMk id="4" creationId="{1D067C04-83DA-B764-8F1B-3A65D2BB4049}"/>
-          </ac:spMkLst>
-        </pc:spChg>
-        <pc:spChg chg="del mod">
-          <ac:chgData name="Jan Willem van den End (EBO_CMA)" userId="32ade95a-e024-4672-952f-5ed8641a9e00" providerId="ADAL" clId="{3BBBE02E-ACD4-4586-9407-5E79BF620DF1}" dt="2026-09-25T10:40:20.380" v="5235" actId="478"/>
-          <ac:spMkLst>
-            <pc:docMk/>
-            <pc:sldMk cId="3588697" sldId="657"/>
-            <ac:spMk id="5" creationId="{CA3656D4-EE51-EF04-3E51-2AD8DB9C0964}"/>
           </ac:spMkLst>
         </pc:spChg>
       </pc:sldChg>
@@ -253,14 +237,6 @@
             <ac:spMk id="6" creationId="{613E110F-8AEE-A02C-2032-1F07DE944DEB}"/>
           </ac:spMkLst>
         </pc:spChg>
-        <pc:spChg chg="del">
-          <ac:chgData name="Jan Willem van den End (EBO_CMA)" userId="32ade95a-e024-4672-952f-5ed8641a9e00" providerId="ADAL" clId="{3BBBE02E-ACD4-4586-9407-5E79BF620DF1}" dt="2026-09-25T10:04:58.439" v="5052" actId="478"/>
-          <ac:spMkLst>
-            <pc:docMk/>
-            <pc:sldMk cId="2428101549" sldId="784"/>
-            <ac:spMk id="8" creationId="{873792AB-3A5F-9374-1FE8-71A49B10A05F}"/>
-          </ac:spMkLst>
-        </pc:spChg>
         <pc:spChg chg="add mod">
           <ac:chgData name="Jan Willem van den End (EBO_CMA)" userId="32ade95a-e024-4672-952f-5ed8641a9e00" providerId="ADAL" clId="{3BBBE02E-ACD4-4586-9407-5E79BF620DF1}" dt="2026-09-25T11:36:40.711" v="5518" actId="20577"/>
           <ac:spMkLst>
@@ -269,38 +245,6 @@
             <ac:spMk id="13" creationId="{C8DC46B8-5E08-30F3-1EE3-CB90635026CE}"/>
           </ac:spMkLst>
         </pc:spChg>
-        <pc:picChg chg="del mod">
-          <ac:chgData name="Jan Willem van den End (EBO_CMA)" userId="32ade95a-e024-4672-952f-5ed8641a9e00" providerId="ADAL" clId="{3BBBE02E-ACD4-4586-9407-5E79BF620DF1}" dt="2026-09-25T09:43:59.910" v="4968" actId="478"/>
-          <ac:picMkLst>
-            <pc:docMk/>
-            <pc:sldMk cId="2428101549" sldId="784"/>
-            <ac:picMk id="3" creationId="{3AEC0293-BD5F-607E-F810-8030B0619792}"/>
-          </ac:picMkLst>
-        </pc:picChg>
-        <pc:picChg chg="del mod">
-          <ac:chgData name="Jan Willem van den End (EBO_CMA)" userId="32ade95a-e024-4672-952f-5ed8641a9e00" providerId="ADAL" clId="{3BBBE02E-ACD4-4586-9407-5E79BF620DF1}" dt="2026-09-25T10:00:35.450" v="5020" actId="478"/>
-          <ac:picMkLst>
-            <pc:docMk/>
-            <pc:sldMk cId="2428101549" sldId="784"/>
-            <ac:picMk id="4" creationId="{5BE696B4-4B0A-E2D7-1BD3-02940175CF30}"/>
-          </ac:picMkLst>
-        </pc:picChg>
-        <pc:picChg chg="del mod">
-          <ac:chgData name="Jan Willem van den End (EBO_CMA)" userId="32ade95a-e024-4672-952f-5ed8641a9e00" providerId="ADAL" clId="{3BBBE02E-ACD4-4586-9407-5E79BF620DF1}" dt="2026-09-25T09:45:07.933" v="4974" actId="478"/>
-          <ac:picMkLst>
-            <pc:docMk/>
-            <pc:sldMk cId="2428101549" sldId="784"/>
-            <ac:picMk id="7" creationId="{339ECCAE-ABF5-C0A3-D3B2-D90FA8CF9B40}"/>
-          </ac:picMkLst>
-        </pc:picChg>
-        <pc:picChg chg="del mod">
-          <ac:chgData name="Jan Willem van den End (EBO_CMA)" userId="32ade95a-e024-4672-952f-5ed8641a9e00" providerId="ADAL" clId="{3BBBE02E-ACD4-4586-9407-5E79BF620DF1}" dt="2026-09-25T10:00:59.393" v="5025" actId="478"/>
-          <ac:picMkLst>
-            <pc:docMk/>
-            <pc:sldMk cId="2428101549" sldId="784"/>
-            <ac:picMk id="9" creationId="{3CC04740-1A15-978C-59A4-C12419BDA591}"/>
-          </ac:picMkLst>
-        </pc:picChg>
         <pc:picChg chg="mod">
           <ac:chgData name="Jan Willem van den End (EBO_CMA)" userId="32ade95a-e024-4672-952f-5ed8641a9e00" providerId="ADAL" clId="{3BBBE02E-ACD4-4586-9407-5E79BF620DF1}" dt="2026-09-25T10:08:15.766" v="5076" actId="1035"/>
           <ac:picMkLst>
@@ -425,38 +369,6 @@
             <ac:spMk id="8" creationId="{AEE2C5DE-2B6A-1A21-C169-797AC72B8FC2}"/>
           </ac:spMkLst>
         </pc:spChg>
-        <pc:picChg chg="add del mod">
-          <ac:chgData name="Jan Willem van den End (EBO_CMA)" userId="32ade95a-e024-4672-952f-5ed8641a9e00" providerId="ADAL" clId="{3BBBE02E-ACD4-4586-9407-5E79BF620DF1}" dt="2026-09-25T09:47:58.449" v="4980" actId="478"/>
-          <ac:picMkLst>
-            <pc:docMk/>
-            <pc:sldMk cId="2304846322" sldId="792"/>
-            <ac:picMk id="3" creationId="{FD8FEF3A-B9D3-C258-3FD3-115594E60806}"/>
-          </ac:picMkLst>
-        </pc:picChg>
-        <pc:picChg chg="del mod">
-          <ac:chgData name="Jan Willem van den End (EBO_CMA)" userId="32ade95a-e024-4672-952f-5ed8641a9e00" providerId="ADAL" clId="{3BBBE02E-ACD4-4586-9407-5E79BF620DF1}" dt="2026-09-25T10:01:46.698" v="5028" actId="478"/>
-          <ac:picMkLst>
-            <pc:docMk/>
-            <pc:sldMk cId="2304846322" sldId="792"/>
-            <ac:picMk id="4" creationId="{E14172C9-E0A8-FF02-C420-5CB128428A90}"/>
-          </ac:picMkLst>
-        </pc:picChg>
-        <pc:picChg chg="del mod">
-          <ac:chgData name="Jan Willem van den End (EBO_CMA)" userId="32ade95a-e024-4672-952f-5ed8641a9e00" providerId="ADAL" clId="{3BBBE02E-ACD4-4586-9407-5E79BF620DF1}" dt="2026-09-25T10:02:07.601" v="5031" actId="478"/>
-          <ac:picMkLst>
-            <pc:docMk/>
-            <pc:sldMk cId="2304846322" sldId="792"/>
-            <ac:picMk id="7" creationId="{487963F1-91B7-B155-55EA-19DCB885998B}"/>
-          </ac:picMkLst>
-        </pc:picChg>
-        <pc:picChg chg="del mod">
-          <ac:chgData name="Jan Willem van den End (EBO_CMA)" userId="32ade95a-e024-4672-952f-5ed8641a9e00" providerId="ADAL" clId="{3BBBE02E-ACD4-4586-9407-5E79BF620DF1}" dt="2026-09-25T09:48:18.415" v="4983" actId="478"/>
-          <ac:picMkLst>
-            <pc:docMk/>
-            <pc:sldMk cId="2304846322" sldId="792"/>
-            <ac:picMk id="9" creationId="{53094AB5-29A5-390F-D793-10B141A69812}"/>
-          </ac:picMkLst>
-        </pc:picChg>
         <pc:picChg chg="mod">
           <ac:chgData name="Jan Willem van den End (EBO_CMA)" userId="32ade95a-e024-4672-952f-5ed8641a9e00" providerId="ADAL" clId="{3BBBE02E-ACD4-4586-9407-5E79BF620DF1}" dt="2026-09-25T10:11:22.362" v="5083" actId="1035"/>
           <ac:picMkLst>
@@ -536,7 +448,7 @@
         </pc:spChg>
       </pc:sldChg>
       <pc:sldChg chg="addSp delSp modSp mod">
-        <pc:chgData name="Jan Willem van den End (EBO_CMA)" userId="32ade95a-e024-4672-952f-5ed8641a9e00" providerId="ADAL" clId="{3BBBE02E-ACD4-4586-9407-5E79BF620DF1}" dt="2026-09-24T11:50:04.667" v="4152" actId="20577"/>
+        <pc:chgData name="Jan Willem van den End (EBO_CMA)" userId="32ade95a-e024-4672-952f-5ed8641a9e00" providerId="ADAL" clId="{3BBBE02E-ACD4-4586-9407-5E79BF620DF1}" dt="2026-09-29T12:12:08.434" v="5626" actId="1076"/>
         <pc:sldMkLst>
           <pc:docMk/>
           <pc:sldMk cId="909146083" sldId="796"/>
@@ -550,7 +462,7 @@
           </ac:spMkLst>
         </pc:spChg>
         <pc:spChg chg="add mod">
-          <ac:chgData name="Jan Willem van den End (EBO_CMA)" userId="32ade95a-e024-4672-952f-5ed8641a9e00" providerId="ADAL" clId="{3BBBE02E-ACD4-4586-9407-5E79BF620DF1}" dt="2026-09-24T11:50:04.667" v="4152" actId="20577"/>
+          <ac:chgData name="Jan Willem van den End (EBO_CMA)" userId="32ade95a-e024-4672-952f-5ed8641a9e00" providerId="ADAL" clId="{3BBBE02E-ACD4-4586-9407-5E79BF620DF1}" dt="2026-09-29T12:06:55.697" v="5618" actId="20577"/>
           <ac:spMkLst>
             <pc:docMk/>
             <pc:sldMk cId="909146083" sldId="796"/>
@@ -558,7 +470,15 @@
           </ac:spMkLst>
         </pc:spChg>
         <pc:picChg chg="mod">
-          <ac:chgData name="Jan Willem van den End (EBO_CMA)" userId="32ade95a-e024-4672-952f-5ed8641a9e00" providerId="ADAL" clId="{3BBBE02E-ACD4-4586-9407-5E79BF620DF1}" dt="2026-09-23T09:54:04.654" v="3873" actId="1076"/>
+          <ac:chgData name="Jan Willem van den End (EBO_CMA)" userId="32ade95a-e024-4672-952f-5ed8641a9e00" providerId="ADAL" clId="{3BBBE02E-ACD4-4586-9407-5E79BF620DF1}" dt="2026-09-29T12:12:08.434" v="5626" actId="1076"/>
+          <ac:picMkLst>
+            <pc:docMk/>
+            <pc:sldMk cId="909146083" sldId="796"/>
+            <ac:picMk id="3" creationId="{6492589E-33A7-C5CD-04E6-4BE9402B49C5}"/>
+          </ac:picMkLst>
+        </pc:picChg>
+        <pc:picChg chg="del mod">
+          <ac:chgData name="Jan Willem van den End (EBO_CMA)" userId="32ade95a-e024-4672-952f-5ed8641a9e00" providerId="ADAL" clId="{3BBBE02E-ACD4-4586-9407-5E79BF620DF1}" dt="2026-09-29T12:11:44.654" v="5619" actId="478"/>
           <ac:picMkLst>
             <pc:docMk/>
             <pc:sldMk cId="909146083" sldId="796"/>
@@ -567,13 +487,13 @@
         </pc:picChg>
       </pc:sldChg>
       <pc:sldChg chg="modSp add mod modNotesTx">
-        <pc:chgData name="Jan Willem van den End (EBO_CMA)" userId="32ade95a-e024-4672-952f-5ed8641a9e00" providerId="ADAL" clId="{3BBBE02E-ACD4-4586-9407-5E79BF620DF1}" dt="2026-09-25T10:43:06.065" v="5402" actId="20577"/>
+        <pc:chgData name="Jan Willem van den End (EBO_CMA)" userId="32ade95a-e024-4672-952f-5ed8641a9e00" providerId="ADAL" clId="{3BBBE02E-ACD4-4586-9407-5E79BF620DF1}" dt="2026-09-29T12:13:14.932" v="5699" actId="20577"/>
         <pc:sldMkLst>
           <pc:docMk/>
           <pc:sldMk cId="341592472" sldId="797"/>
         </pc:sldMkLst>
         <pc:spChg chg="mod">
-          <ac:chgData name="Jan Willem van den End (EBO_CMA)" userId="32ade95a-e024-4672-952f-5ed8641a9e00" providerId="ADAL" clId="{3BBBE02E-ACD4-4586-9407-5E79BF620DF1}" dt="2026-09-25T09:33:44.581" v="4678" actId="20577"/>
+          <ac:chgData name="Jan Willem van den End (EBO_CMA)" userId="32ade95a-e024-4672-952f-5ed8641a9e00" providerId="ADAL" clId="{3BBBE02E-ACD4-4586-9407-5E79BF620DF1}" dt="2026-09-29T12:13:14.932" v="5699" actId="20577"/>
           <ac:spMkLst>
             <pc:docMk/>
             <pc:sldMk cId="341592472" sldId="797"/>
@@ -676,7 +596,7 @@
           <a:p>
             <a:fld id="{C26BBE9F-2231-4498-A3E5-DFB02EDDD594}" type="datetimeFigureOut">
               <a:rPr lang="nl-NL" smtClean="0"/>
-              <a:t>25-9-2026</a:t>
+              <a:t>29-9-2026</a:t>
             </a:fld>
             <a:endParaRPr lang="nl-NL"/>
           </a:p>
@@ -841,7 +761,7 @@
           <a:p>
             <a:fld id="{900D5B51-A3C5-4FC7-8A0D-54EFEFAFACD3}" type="datetimeFigureOut">
               <a:rPr lang="nl-NL" smtClean="0"/>
-              <a:t>25-9-2026</a:t>
+              <a:t>29-9-2026</a:t>
             </a:fld>
             <a:endParaRPr lang="nl-NL"/>
           </a:p>
@@ -8358,6 +8278,26 @@
                 <a:cs typeface="Arial" panose="020B0604020202020204" pitchFamily="34" charset="0"/>
               </a:rPr>
               <a:t>Trade data based on Eurostat CPA instead of HS → similar results</a:t>
+            </a:r>
+          </a:p>
+          <a:p>
+            <a:pPr marL="342900" indent="-342900">
+              <a:lnSpc>
+                <a:spcPct val="120000"/>
+              </a:lnSpc>
+              <a:spcAft>
+                <a:spcPts val="1200"/>
+              </a:spcAft>
+              <a:buFont typeface="Arial" panose="020B0604020202020204" pitchFamily="34" charset="0"/>
+              <a:buChar char="•"/>
+            </a:pPr>
+            <a:r>
+              <a:rPr lang="nl-NL" sz="2000" noProof="1">
+                <a:latin typeface="Arial" panose="020B0604020202020204" pitchFamily="34" charset="0"/>
+                <a:ea typeface="Verdana" panose="020B0604030504040204" pitchFamily="34" charset="0"/>
+                <a:cs typeface="Arial" panose="020B0604020202020204" pitchFamily="34" charset="0"/>
+              </a:rPr>
+              <a:t>Modified stock correlation variable (to do)</a:t>
             </a:r>
             <a:endParaRPr lang="nl-NL" sz="2000" noProof="1">
               <a:latin typeface="Verdana" panose="020B0604030504040204" pitchFamily="34" charset="0"/>
@@ -13188,7 +13128,7 @@
                   <a:srgbClr val="002060"/>
                 </a:solidFill>
               </a:rPr>
-              <a:t>. As control variable, state aid as ratio of GDP is included (contemporaneous value of state aid and one period lagged GDP, source </a:t>
+              <a:t>. As control variables we included i) state aid as ratio of GDP (contemporaneous value of state aid and one period lagged GDP, source </a:t>
             </a:r>
             <a:r>
               <a:rPr lang="en-US" sz="1100" noProof="1">
@@ -13205,7 +13145,7 @@
                   <a:srgbClr val="002060"/>
                 </a:solidFill>
               </a:rPr>
-              <a:t>).</a:t>
+              <a:t>) and a measure for trade openness (source Worldbank).</a:t>
             </a:r>
             <a:endParaRPr lang="nl-NL" sz="1100" noProof="1">
               <a:solidFill>
@@ -13217,10 +13157,10 @@
       </p:sp>
       <p:pic>
         <p:nvPicPr>
-          <p:cNvPr id="10" name="Picture 9">
+          <p:cNvPr id="3" name="Picture 2">
             <a:extLst>
               <a:ext uri="{FF2B5EF4-FFF2-40B4-BE49-F238E27FC236}">
-                <a16:creationId xmlns:a16="http://schemas.microsoft.com/office/drawing/2014/main" id="{C9A895D5-4DBA-4775-3A49-739C761362E5}"/>
+                <a16:creationId xmlns:a16="http://schemas.microsoft.com/office/drawing/2014/main" id="{6492589E-33A7-C5CD-04E6-4BE9402B49C5}"/>
               </a:ext>
             </a:extLst>
           </p:cNvPr>
@@ -13237,8 +13177,8 @@
         </p:blipFill>
         <p:spPr>
           <a:xfrm>
-            <a:off x="281720" y="2617342"/>
-            <a:ext cx="8630654" cy="2302129"/>
+            <a:off x="222636" y="2329223"/>
+            <a:ext cx="8698728" cy="2470589"/>
           </a:xfrm>
           <a:prstGeom prst="rect">
             <a:avLst/>

--- a/Resilience.pptx
+++ b/Resilience.pptx
@@ -156,7 +156,7 @@
 <file path=ppt/revisionInfo.xml><?xml version="1.0" encoding="utf-8"?>
 <p1510:revInfo xmlns:a="http://schemas.openxmlformats.org/drawingml/2006/main" xmlns:r="http://schemas.openxmlformats.org/officeDocument/2006/relationships" xmlns:p1510="http://schemas.microsoft.com/office/powerpoint/2015/10/main">
   <p1510:revLst>
-    <p1510:client id="{13B43BEF-9B9B-431D-9308-0B2B126B7992}" v="1" dt="2026-09-29T12:11:50.639"/>
+    <p1510:client id="{13B43BEF-9B9B-431D-9308-0B2B126B7992}" v="16" dt="2026-09-29T19:16:39.558"/>
   </p1510:revLst>
 </p1510:revInfo>
 </file>
@@ -166,18 +166,18 @@
   <pc:docChgLst>
     <pc:chgData name="Jan Willem van den End (EBO_CMA)" userId="32ade95a-e024-4672-952f-5ed8641a9e00" providerId="ADAL" clId="{3BBBE02E-ACD4-4586-9407-5E79BF620DF1}"/>
     <pc:docChg chg="undo redo custSel addSld modSld">
-      <pc:chgData name="Jan Willem van den End (EBO_CMA)" userId="32ade95a-e024-4672-952f-5ed8641a9e00" providerId="ADAL" clId="{3BBBE02E-ACD4-4586-9407-5E79BF620DF1}" dt="2026-09-29T12:13:14.932" v="5699" actId="20577"/>
+      <pc:chgData name="Jan Willem van den End (EBO_CMA)" userId="32ade95a-e024-4672-952f-5ed8641a9e00" providerId="ADAL" clId="{3BBBE02E-ACD4-4586-9407-5E79BF620DF1}" dt="2026-09-29T19:17:32.259" v="5883" actId="1076"/>
       <pc:docMkLst>
         <pc:docMk/>
       </pc:docMkLst>
       <pc:sldChg chg="delSp modSp mod">
-        <pc:chgData name="Jan Willem van den End (EBO_CMA)" userId="32ade95a-e024-4672-952f-5ed8641a9e00" providerId="ADAL" clId="{3BBBE02E-ACD4-4586-9407-5E79BF620DF1}" dt="2026-09-25T10:40:23.376" v="5236" actId="478"/>
+        <pc:chgData name="Jan Willem van den End (EBO_CMA)" userId="32ade95a-e024-4672-952f-5ed8641a9e00" providerId="ADAL" clId="{3BBBE02E-ACD4-4586-9407-5E79BF620DF1}" dt="2026-09-29T19:17:20.417" v="5882" actId="1076"/>
         <pc:sldMkLst>
           <pc:docMk/>
           <pc:sldMk cId="3588697" sldId="657"/>
         </pc:sldMkLst>
         <pc:spChg chg="mod">
-          <ac:chgData name="Jan Willem van den End (EBO_CMA)" userId="32ade95a-e024-4672-952f-5ed8641a9e00" providerId="ADAL" clId="{3BBBE02E-ACD4-4586-9407-5E79BF620DF1}" dt="2026-09-25T09:20:04.427" v="4575" actId="1076"/>
+          <ac:chgData name="Jan Willem van den End (EBO_CMA)" userId="32ade95a-e024-4672-952f-5ed8641a9e00" providerId="ADAL" clId="{3BBBE02E-ACD4-4586-9407-5E79BF620DF1}" dt="2026-09-29T19:17:20.417" v="5882" actId="1076"/>
           <ac:spMkLst>
             <pc:docMk/>
             <pc:sldMk cId="3588697" sldId="657"/>
@@ -216,7 +216,7 @@
         </pc:spChg>
       </pc:sldChg>
       <pc:sldChg chg="addSp delSp modSp mod">
-        <pc:chgData name="Jan Willem van den End (EBO_CMA)" userId="32ade95a-e024-4672-952f-5ed8641a9e00" providerId="ADAL" clId="{3BBBE02E-ACD4-4586-9407-5E79BF620DF1}" dt="2026-09-25T11:36:40.711" v="5518" actId="20577"/>
+        <pc:chgData name="Jan Willem van den End (EBO_CMA)" userId="32ade95a-e024-4672-952f-5ed8641a9e00" providerId="ADAL" clId="{3BBBE02E-ACD4-4586-9407-5E79BF620DF1}" dt="2026-09-29T19:08:51.624" v="5708" actId="1076"/>
         <pc:sldMkLst>
           <pc:docMk/>
           <pc:sldMk cId="2428101549" sldId="784"/>
@@ -246,15 +246,31 @@
           </ac:spMkLst>
         </pc:spChg>
         <pc:picChg chg="mod">
-          <ac:chgData name="Jan Willem van den End (EBO_CMA)" userId="32ade95a-e024-4672-952f-5ed8641a9e00" providerId="ADAL" clId="{3BBBE02E-ACD4-4586-9407-5E79BF620DF1}" dt="2026-09-25T10:08:15.766" v="5076" actId="1035"/>
+          <ac:chgData name="Jan Willem van den End (EBO_CMA)" userId="32ade95a-e024-4672-952f-5ed8641a9e00" providerId="ADAL" clId="{3BBBE02E-ACD4-4586-9407-5E79BF620DF1}" dt="2026-09-29T19:08:49.382" v="5707" actId="14100"/>
+          <ac:picMkLst>
+            <pc:docMk/>
+            <pc:sldMk cId="2428101549" sldId="784"/>
+            <ac:picMk id="3" creationId="{B68D3A0C-D014-485F-5A02-9F50BA67BD89}"/>
+          </ac:picMkLst>
+        </pc:picChg>
+        <pc:picChg chg="mod">
+          <ac:chgData name="Jan Willem van den End (EBO_CMA)" userId="32ade95a-e024-4672-952f-5ed8641a9e00" providerId="ADAL" clId="{3BBBE02E-ACD4-4586-9407-5E79BF620DF1}" dt="2026-09-29T19:08:51.624" v="5708" actId="1076"/>
+          <ac:picMkLst>
+            <pc:docMk/>
+            <pc:sldMk cId="2428101549" sldId="784"/>
+            <ac:picMk id="4" creationId="{AFFB3634-5B82-136E-F947-D33F3E34AD6C}"/>
+          </ac:picMkLst>
+        </pc:picChg>
+        <pc:picChg chg="del mod">
+          <ac:chgData name="Jan Willem van den End (EBO_CMA)" userId="32ade95a-e024-4672-952f-5ed8641a9e00" providerId="ADAL" clId="{3BBBE02E-ACD4-4586-9407-5E79BF620DF1}" dt="2026-09-29T19:07:59.062" v="5700" actId="478"/>
           <ac:picMkLst>
             <pc:docMk/>
             <pc:sldMk cId="2428101549" sldId="784"/>
             <ac:picMk id="10" creationId="{FC7B6F34-37FE-D63D-7B8B-54AB0BA70756}"/>
           </ac:picMkLst>
         </pc:picChg>
-        <pc:picChg chg="mod">
-          <ac:chgData name="Jan Willem van den End (EBO_CMA)" userId="32ade95a-e024-4672-952f-5ed8641a9e00" providerId="ADAL" clId="{3BBBE02E-ACD4-4586-9407-5E79BF620DF1}" dt="2026-09-25T10:08:15.766" v="5076" actId="1035"/>
+        <pc:picChg chg="del mod">
+          <ac:chgData name="Jan Willem van den End (EBO_CMA)" userId="32ade95a-e024-4672-952f-5ed8641a9e00" providerId="ADAL" clId="{3BBBE02E-ACD4-4586-9407-5E79BF620DF1}" dt="2026-09-29T19:08:32.770" v="5704" actId="478"/>
           <ac:picMkLst>
             <pc:docMk/>
             <pc:sldMk cId="2428101549" sldId="784"/>
@@ -278,13 +294,13 @@
         </pc:spChg>
       </pc:sldChg>
       <pc:sldChg chg="modSp mod">
-        <pc:chgData name="Jan Willem van den End (EBO_CMA)" userId="32ade95a-e024-4672-952f-5ed8641a9e00" providerId="ADAL" clId="{3BBBE02E-ACD4-4586-9407-5E79BF620DF1}" dt="2026-09-20T19:43:08.706" v="2453" actId="6549"/>
+        <pc:chgData name="Jan Willem van den End (EBO_CMA)" userId="32ade95a-e024-4672-952f-5ed8641a9e00" providerId="ADAL" clId="{3BBBE02E-ACD4-4586-9407-5E79BF620DF1}" dt="2026-09-29T19:14:24.559" v="5805" actId="20577"/>
         <pc:sldMkLst>
           <pc:docMk/>
           <pc:sldMk cId="3777662078" sldId="790"/>
         </pc:sldMkLst>
         <pc:spChg chg="mod">
-          <ac:chgData name="Jan Willem van den End (EBO_CMA)" userId="32ade95a-e024-4672-952f-5ed8641a9e00" providerId="ADAL" clId="{3BBBE02E-ACD4-4586-9407-5E79BF620DF1}" dt="2026-09-20T19:43:08.706" v="2453" actId="6549"/>
+          <ac:chgData name="Jan Willem van den End (EBO_CMA)" userId="32ade95a-e024-4672-952f-5ed8641a9e00" providerId="ADAL" clId="{3BBBE02E-ACD4-4586-9407-5E79BF620DF1}" dt="2026-09-29T19:14:24.559" v="5805" actId="20577"/>
           <ac:spMkLst>
             <pc:docMk/>
             <pc:sldMk cId="3777662078" sldId="790"/>
@@ -301,7 +317,7 @@
         </pc:spChg>
       </pc:sldChg>
       <pc:sldChg chg="delSp modSp mod">
-        <pc:chgData name="Jan Willem van den End (EBO_CMA)" userId="32ade95a-e024-4672-952f-5ed8641a9e00" providerId="ADAL" clId="{3BBBE02E-ACD4-4586-9407-5E79BF620DF1}" dt="2026-09-25T10:43:33.513" v="5406" actId="20577"/>
+        <pc:chgData name="Jan Willem van den End (EBO_CMA)" userId="32ade95a-e024-4672-952f-5ed8641a9e00" providerId="ADAL" clId="{3BBBE02E-ACD4-4586-9407-5E79BF620DF1}" dt="2026-09-29T19:15:17.932" v="5809" actId="6549"/>
         <pc:sldMkLst>
           <pc:docMk/>
           <pc:sldMk cId="374833015" sldId="791"/>
@@ -315,7 +331,7 @@
           </ac:spMkLst>
         </pc:spChg>
         <pc:spChg chg="mod">
-          <ac:chgData name="Jan Willem van den End (EBO_CMA)" userId="32ade95a-e024-4672-952f-5ed8641a9e00" providerId="ADAL" clId="{3BBBE02E-ACD4-4586-9407-5E79BF620DF1}" dt="2026-09-20T19:32:00.290" v="2064" actId="1076"/>
+          <ac:chgData name="Jan Willem van den End (EBO_CMA)" userId="32ade95a-e024-4672-952f-5ed8641a9e00" providerId="ADAL" clId="{3BBBE02E-ACD4-4586-9407-5E79BF620DF1}" dt="2026-09-29T19:15:17.932" v="5809" actId="6549"/>
           <ac:spMkLst>
             <pc:docMk/>
             <pc:sldMk cId="374833015" sldId="791"/>
@@ -340,7 +356,7 @@
         </pc:picChg>
       </pc:sldChg>
       <pc:sldChg chg="addSp delSp modSp mod">
-        <pc:chgData name="Jan Willem van den End (EBO_CMA)" userId="32ade95a-e024-4672-952f-5ed8641a9e00" providerId="ADAL" clId="{3BBBE02E-ACD4-4586-9407-5E79BF620DF1}" dt="2026-09-25T11:36:54.569" v="5519"/>
+        <pc:chgData name="Jan Willem van den End (EBO_CMA)" userId="32ade95a-e024-4672-952f-5ed8641a9e00" providerId="ADAL" clId="{3BBBE02E-ACD4-4586-9407-5E79BF620DF1}" dt="2026-09-29T19:11:01.220" v="5723" actId="1076"/>
         <pc:sldMkLst>
           <pc:docMk/>
           <pc:sldMk cId="2304846322" sldId="792"/>
@@ -354,7 +370,7 @@
           </ac:spMkLst>
         </pc:spChg>
         <pc:spChg chg="mod">
-          <ac:chgData name="Jan Willem van den End (EBO_CMA)" userId="32ade95a-e024-4672-952f-5ed8641a9e00" providerId="ADAL" clId="{3BBBE02E-ACD4-4586-9407-5E79BF620DF1}" dt="2026-09-23T09:52:20.284" v="3869" actId="6549"/>
+          <ac:chgData name="Jan Willem van den End (EBO_CMA)" userId="32ade95a-e024-4672-952f-5ed8641a9e00" providerId="ADAL" clId="{3BBBE02E-ACD4-4586-9407-5E79BF620DF1}" dt="2026-09-29T19:10:03.460" v="5714" actId="20577"/>
           <ac:spMkLst>
             <pc:docMk/>
             <pc:sldMk cId="2304846322" sldId="792"/>
@@ -370,15 +386,31 @@
           </ac:spMkLst>
         </pc:spChg>
         <pc:picChg chg="mod">
-          <ac:chgData name="Jan Willem van den End (EBO_CMA)" userId="32ade95a-e024-4672-952f-5ed8641a9e00" providerId="ADAL" clId="{3BBBE02E-ACD4-4586-9407-5E79BF620DF1}" dt="2026-09-25T10:11:22.362" v="5083" actId="1035"/>
+          <ac:chgData name="Jan Willem van den End (EBO_CMA)" userId="32ade95a-e024-4672-952f-5ed8641a9e00" providerId="ADAL" clId="{3BBBE02E-ACD4-4586-9407-5E79BF620DF1}" dt="2026-09-29T19:10:39.056" v="5719" actId="14100"/>
+          <ac:picMkLst>
+            <pc:docMk/>
+            <pc:sldMk cId="2304846322" sldId="792"/>
+            <ac:picMk id="3" creationId="{E4247869-22B3-74B1-C2DC-BC2BF3DF0889}"/>
+          </ac:picMkLst>
+        </pc:picChg>
+        <pc:picChg chg="mod">
+          <ac:chgData name="Jan Willem van den End (EBO_CMA)" userId="32ade95a-e024-4672-952f-5ed8641a9e00" providerId="ADAL" clId="{3BBBE02E-ACD4-4586-9407-5E79BF620DF1}" dt="2026-09-29T19:11:01.220" v="5723" actId="1076"/>
+          <ac:picMkLst>
+            <pc:docMk/>
+            <pc:sldMk cId="2304846322" sldId="792"/>
+            <ac:picMk id="4" creationId="{0231C4B6-AE28-A975-F5EB-43D3FA1E2ADA}"/>
+          </ac:picMkLst>
+        </pc:picChg>
+        <pc:picChg chg="del mod">
+          <ac:chgData name="Jan Willem van den End (EBO_CMA)" userId="32ade95a-e024-4672-952f-5ed8641a9e00" providerId="ADAL" clId="{3BBBE02E-ACD4-4586-9407-5E79BF620DF1}" dt="2026-09-29T19:10:15.163" v="5715" actId="478"/>
           <ac:picMkLst>
             <pc:docMk/>
             <pc:sldMk cId="2304846322" sldId="792"/>
             <ac:picMk id="10" creationId="{8ED05194-3FC9-0803-C7D5-C61C218BC7C9}"/>
           </ac:picMkLst>
         </pc:picChg>
-        <pc:picChg chg="mod">
-          <ac:chgData name="Jan Willem van den End (EBO_CMA)" userId="32ade95a-e024-4672-952f-5ed8641a9e00" providerId="ADAL" clId="{3BBBE02E-ACD4-4586-9407-5E79BF620DF1}" dt="2026-09-25T10:10:42.326" v="5080" actId="14100"/>
+        <pc:picChg chg="del mod">
+          <ac:chgData name="Jan Willem van den End (EBO_CMA)" userId="32ade95a-e024-4672-952f-5ed8641a9e00" providerId="ADAL" clId="{3BBBE02E-ACD4-4586-9407-5E79BF620DF1}" dt="2026-09-29T19:10:40.725" v="5720" actId="478"/>
           <ac:picMkLst>
             <pc:docMk/>
             <pc:sldMk cId="2304846322" sldId="792"/>
@@ -387,13 +419,13 @@
         </pc:picChg>
       </pc:sldChg>
       <pc:sldChg chg="modSp mod modNotesTx">
-        <pc:chgData name="Jan Willem van den End (EBO_CMA)" userId="32ade95a-e024-4672-952f-5ed8641a9e00" providerId="ADAL" clId="{3BBBE02E-ACD4-4586-9407-5E79BF620DF1}" dt="2026-09-23T12:20:25.834" v="4079" actId="20577"/>
+        <pc:chgData name="Jan Willem van den End (EBO_CMA)" userId="32ade95a-e024-4672-952f-5ed8641a9e00" providerId="ADAL" clId="{3BBBE02E-ACD4-4586-9407-5E79BF620DF1}" dt="2026-09-29T19:17:32.259" v="5883" actId="1076"/>
         <pc:sldMkLst>
           <pc:docMk/>
           <pc:sldMk cId="515665883" sldId="793"/>
         </pc:sldMkLst>
         <pc:spChg chg="mod">
-          <ac:chgData name="Jan Willem van den End (EBO_CMA)" userId="32ade95a-e024-4672-952f-5ed8641a9e00" providerId="ADAL" clId="{3BBBE02E-ACD4-4586-9407-5E79BF620DF1}" dt="2026-09-23T12:20:25.834" v="4079" actId="20577"/>
+          <ac:chgData name="Jan Willem van den End (EBO_CMA)" userId="32ade95a-e024-4672-952f-5ed8641a9e00" providerId="ADAL" clId="{3BBBE02E-ACD4-4586-9407-5E79BF620DF1}" dt="2026-09-29T19:17:32.259" v="5883" actId="1076"/>
           <ac:spMkLst>
             <pc:docMk/>
             <pc:sldMk cId="515665883" sldId="793"/>
@@ -402,11 +434,19 @@
         </pc:spChg>
       </pc:sldChg>
       <pc:sldChg chg="delSp modSp mod modNotesTx">
-        <pc:chgData name="Jan Willem van den End (EBO_CMA)" userId="32ade95a-e024-4672-952f-5ed8641a9e00" providerId="ADAL" clId="{3BBBE02E-ACD4-4586-9407-5E79BF620DF1}" dt="2026-09-25T10:20:09.252" v="5088" actId="6549"/>
+        <pc:chgData name="Jan Willem van den End (EBO_CMA)" userId="32ade95a-e024-4672-952f-5ed8641a9e00" providerId="ADAL" clId="{3BBBE02E-ACD4-4586-9407-5E79BF620DF1}" dt="2026-09-29T19:15:39.472" v="5810" actId="20577"/>
         <pc:sldMkLst>
           <pc:docMk/>
           <pc:sldMk cId="240743824" sldId="794"/>
         </pc:sldMkLst>
+        <pc:spChg chg="mod">
+          <ac:chgData name="Jan Willem van den End (EBO_CMA)" userId="32ade95a-e024-4672-952f-5ed8641a9e00" providerId="ADAL" clId="{3BBBE02E-ACD4-4586-9407-5E79BF620DF1}" dt="2026-09-29T19:15:39.472" v="5810" actId="20577"/>
+          <ac:spMkLst>
+            <pc:docMk/>
+            <pc:sldMk cId="240743824" sldId="794"/>
+            <ac:spMk id="8" creationId="{0677632A-56D3-3DDB-C434-EB0FC24E2732}"/>
+          </ac:spMkLst>
+        </pc:spChg>
         <pc:spChg chg="mod">
           <ac:chgData name="Jan Willem van den End (EBO_CMA)" userId="32ade95a-e024-4672-952f-5ed8641a9e00" providerId="ADAL" clId="{3BBBE02E-ACD4-4586-9407-5E79BF620DF1}" dt="2026-09-25T09:33:54.734" v="4688" actId="20577"/>
           <ac:spMkLst>
@@ -487,13 +527,13 @@
         </pc:picChg>
       </pc:sldChg>
       <pc:sldChg chg="modSp add mod modNotesTx">
-        <pc:chgData name="Jan Willem van den End (EBO_CMA)" userId="32ade95a-e024-4672-952f-5ed8641a9e00" providerId="ADAL" clId="{3BBBE02E-ACD4-4586-9407-5E79BF620DF1}" dt="2026-09-29T12:13:14.932" v="5699" actId="20577"/>
+        <pc:chgData name="Jan Willem van den End (EBO_CMA)" userId="32ade95a-e024-4672-952f-5ed8641a9e00" providerId="ADAL" clId="{3BBBE02E-ACD4-4586-9407-5E79BF620DF1}" dt="2026-09-29T19:16:39.558" v="5878"/>
         <pc:sldMkLst>
           <pc:docMk/>
           <pc:sldMk cId="341592472" sldId="797"/>
         </pc:sldMkLst>
         <pc:spChg chg="mod">
-          <ac:chgData name="Jan Willem van den End (EBO_CMA)" userId="32ade95a-e024-4672-952f-5ed8641a9e00" providerId="ADAL" clId="{3BBBE02E-ACD4-4586-9407-5E79BF620DF1}" dt="2026-09-29T12:13:14.932" v="5699" actId="20577"/>
+          <ac:chgData name="Jan Willem van den End (EBO_CMA)" userId="32ade95a-e024-4672-952f-5ed8641a9e00" providerId="ADAL" clId="{3BBBE02E-ACD4-4586-9407-5E79BF620DF1}" dt="2026-09-29T19:16:39.558" v="5878"/>
           <ac:spMkLst>
             <pc:docMk/>
             <pc:sldMk cId="341592472" sldId="797"/>
@@ -6255,7 +6295,7 @@
                 <a:latin typeface="Verdana" panose="020B0604030504040204" pitchFamily="34" charset="0"/>
                 <a:ea typeface="Verdana" panose="020B0604030504040204" pitchFamily="34" charset="0"/>
               </a:rPr>
-              <a:t>ICT/AI-related investment matters, but mainly in normal times</a:t>
+              <a:t>ICT/AI-related corporate investment matters in normal times</a:t>
             </a:r>
           </a:p>
           <a:p>
@@ -6274,7 +6314,7 @@
                 <a:latin typeface="Verdana" panose="020B0604030504040204" pitchFamily="34" charset="0"/>
                 <a:ea typeface="Verdana" panose="020B0604030504040204" pitchFamily="34" charset="0"/>
               </a:rPr>
-              <a:t>Financial AI-exposure does not play this role and even seems to be a relative disadvantage during shocks</a:t>
+              <a:t>AI equity investment does not play this role and even seems to be a relative disadvantage during shocks</a:t>
             </a:r>
           </a:p>
           <a:p>
@@ -7000,7 +7040,7 @@
                   <a:srgbClr val="002060"/>
                 </a:solidFill>
               </a:rPr>
-              <a:t>ETO's CAT (</a:t>
+              <a:t>ETO's CAT, </a:t>
             </a:r>
             <a:r>
               <a:rPr lang="en-US" sz="1200" dirty="0">
@@ -7740,7 +7780,7 @@
                   <a:srgbClr val="002060"/>
                 </a:solidFill>
               </a:rPr>
-              <a:t> data 2000Q1-2026Q2 (Source: Yahoo Finance)</a:t>
+              <a:t> data 2000Q1-2026Q2 (Source: Yahoo Finance).</a:t>
             </a:r>
           </a:p>
         </p:txBody>
@@ -8246,18 +8286,11 @@
             </a:pPr>
             <a:r>
               <a:rPr lang="nl-NL" sz="2000" noProof="1">
-                <a:latin typeface="Verdana" panose="020B0604030504040204" pitchFamily="34" charset="0"/>
-                <a:ea typeface="Verdana" panose="020B0604030504040204" pitchFamily="34" charset="0"/>
-              </a:rPr>
-              <a:t>Panel logit regressions </a:t>
-            </a:r>
-            <a:r>
-              <a:rPr lang="nl-NL" sz="2000" noProof="1">
                 <a:latin typeface="Arial" panose="020B0604020202020204" pitchFamily="34" charset="0"/>
                 <a:ea typeface="Verdana" panose="020B0604030504040204" pitchFamily="34" charset="0"/>
                 <a:cs typeface="Arial" panose="020B0604020202020204" pitchFamily="34" charset="0"/>
               </a:rPr>
-              <a:t>→ similar results</a:t>
+              <a:t>Panel logit regressions → similar results</a:t>
             </a:r>
           </a:p>
           <a:p>
@@ -8299,10 +8332,26 @@
               </a:rPr>
               <a:t>Modified stock correlation variable (to do)</a:t>
             </a:r>
-            <a:endParaRPr lang="nl-NL" sz="2000" noProof="1">
-              <a:latin typeface="Verdana" panose="020B0604030504040204" pitchFamily="34" charset="0"/>
-              <a:ea typeface="Verdana" panose="020B0604030504040204" pitchFamily="34" charset="0"/>
-            </a:endParaRPr>
+          </a:p>
+          <a:p>
+            <a:pPr marL="342900" indent="-342900">
+              <a:lnSpc>
+                <a:spcPct val="120000"/>
+              </a:lnSpc>
+              <a:spcAft>
+                <a:spcPts val="1200"/>
+              </a:spcAft>
+              <a:buFont typeface="Arial" panose="020B0604020202020204" pitchFamily="34" charset="0"/>
+              <a:buChar char="•"/>
+            </a:pPr>
+            <a:r>
+              <a:rPr lang="nl-NL" sz="2000" noProof="1">
+                <a:latin typeface="Arial" panose="020B0604020202020204" pitchFamily="34" charset="0"/>
+                <a:ea typeface="Verdana" panose="020B0604030504040204" pitchFamily="34" charset="0"/>
+                <a:cs typeface="Arial" panose="020B0604020202020204" pitchFamily="34" charset="0"/>
+              </a:rPr>
+              <a:t>Other control variables (to do)</a:t>
+            </a:r>
           </a:p>
           <a:p>
             <a:pPr marL="285750" indent="-285750">
@@ -9182,8 +9231,8 @@
         </p:nvSpPr>
         <p:spPr>
           <a:xfrm>
-            <a:off x="324482" y="775703"/>
-            <a:ext cx="8645782" cy="5679439"/>
+            <a:off x="287906" y="775703"/>
+            <a:ext cx="8746366" cy="5679439"/>
           </a:xfrm>
         </p:spPr>
         <p:txBody>
@@ -9401,7 +9450,7 @@
                 <a:latin typeface="Verdana" panose="020B0604030504040204" pitchFamily="34" charset="0"/>
                 <a:ea typeface="Verdana" panose="020B0604030504040204" pitchFamily="34" charset="0"/>
               </a:rPr>
-              <a:t>Channels could capture structural and/or cyclical relations (underlying economic changes, or exposure to other cycle/factor)</a:t>
+              <a:t>Channels could capture structural and/or cyclical relations (underlying economic changes, or exposure to another cycle/factor)</a:t>
             </a:r>
           </a:p>
         </p:txBody>
@@ -10007,66 +10056,6 @@
           </a:p>
         </p:txBody>
       </p:sp>
-      <p:pic>
-        <p:nvPicPr>
-          <p:cNvPr id="10" name="Picture 9">
-            <a:extLst>
-              <a:ext uri="{FF2B5EF4-FFF2-40B4-BE49-F238E27FC236}">
-                <a16:creationId xmlns:a16="http://schemas.microsoft.com/office/drawing/2014/main" id="{FC7B6F34-37FE-D63D-7B8B-54AB0BA70756}"/>
-              </a:ext>
-            </a:extLst>
-          </p:cNvPr>
-          <p:cNvPicPr>
-            <a:picLocks noChangeAspect="1"/>
-          </p:cNvPicPr>
-          <p:nvPr/>
-        </p:nvPicPr>
-        <p:blipFill>
-          <a:blip r:embed="rId3"/>
-          <a:stretch>
-            <a:fillRect/>
-          </a:stretch>
-        </p:blipFill>
-        <p:spPr>
-          <a:xfrm>
-            <a:off x="4686994" y="1251821"/>
-            <a:ext cx="3962400" cy="2144429"/>
-          </a:xfrm>
-          <a:prstGeom prst="rect">
-            <a:avLst/>
-          </a:prstGeom>
-        </p:spPr>
-      </p:pic>
-      <p:pic>
-        <p:nvPicPr>
-          <p:cNvPr id="11" name="Picture 10">
-            <a:extLst>
-              <a:ext uri="{FF2B5EF4-FFF2-40B4-BE49-F238E27FC236}">
-                <a16:creationId xmlns:a16="http://schemas.microsoft.com/office/drawing/2014/main" id="{9865C647-8D5F-98A1-58E5-AEFAF3242ABD}"/>
-              </a:ext>
-            </a:extLst>
-          </p:cNvPr>
-          <p:cNvPicPr>
-            <a:picLocks noChangeAspect="1"/>
-          </p:cNvPicPr>
-          <p:nvPr/>
-        </p:nvPicPr>
-        <p:blipFill>
-          <a:blip r:embed="rId4"/>
-          <a:stretch>
-            <a:fillRect/>
-          </a:stretch>
-        </p:blipFill>
-        <p:spPr>
-          <a:xfrm>
-            <a:off x="4686994" y="3453794"/>
-            <a:ext cx="3962400" cy="2144429"/>
-          </a:xfrm>
-          <a:prstGeom prst="rect">
-            <a:avLst/>
-          </a:prstGeom>
-        </p:spPr>
-      </p:pic>
       <p:sp>
         <p:nvSpPr>
           <p:cNvPr id="13" name="Tekstvak 3">
@@ -10109,6 +10098,66 @@
           </a:p>
         </p:txBody>
       </p:sp>
+      <p:pic>
+        <p:nvPicPr>
+          <p:cNvPr id="3" name="Picture 2">
+            <a:extLst>
+              <a:ext uri="{FF2B5EF4-FFF2-40B4-BE49-F238E27FC236}">
+                <a16:creationId xmlns:a16="http://schemas.microsoft.com/office/drawing/2014/main" id="{B68D3A0C-D014-485F-5A02-9F50BA67BD89}"/>
+              </a:ext>
+            </a:extLst>
+          </p:cNvPr>
+          <p:cNvPicPr>
+            <a:picLocks noChangeAspect="1"/>
+          </p:cNvPicPr>
+          <p:nvPr/>
+        </p:nvPicPr>
+        <p:blipFill>
+          <a:blip r:embed="rId3"/>
+          <a:stretch>
+            <a:fillRect/>
+          </a:stretch>
+        </p:blipFill>
+        <p:spPr>
+          <a:xfrm>
+            <a:off x="4686994" y="1232345"/>
+            <a:ext cx="3962400" cy="2169223"/>
+          </a:xfrm>
+          <a:prstGeom prst="rect">
+            <a:avLst/>
+          </a:prstGeom>
+        </p:spPr>
+      </p:pic>
+      <p:pic>
+        <p:nvPicPr>
+          <p:cNvPr id="4" name="Picture 3">
+            <a:extLst>
+              <a:ext uri="{FF2B5EF4-FFF2-40B4-BE49-F238E27FC236}">
+                <a16:creationId xmlns:a16="http://schemas.microsoft.com/office/drawing/2014/main" id="{AFFB3634-5B82-136E-F947-D33F3E34AD6C}"/>
+              </a:ext>
+            </a:extLst>
+          </p:cNvPr>
+          <p:cNvPicPr>
+            <a:picLocks noChangeAspect="1"/>
+          </p:cNvPicPr>
+          <p:nvPr/>
+        </p:nvPicPr>
+        <p:blipFill>
+          <a:blip r:embed="rId4"/>
+          <a:stretch>
+            <a:fillRect/>
+          </a:stretch>
+        </p:blipFill>
+        <p:spPr>
+          <a:xfrm>
+            <a:off x="4686994" y="3401568"/>
+            <a:ext cx="3962400" cy="2179859"/>
+          </a:xfrm>
+          <a:prstGeom prst="rect">
+            <a:avLst/>
+          </a:prstGeom>
+        </p:spPr>
+      </p:pic>
     </p:spTree>
     <p:extLst>
       <p:ext uri="{BB962C8B-B14F-4D97-AF65-F5344CB8AC3E}">
@@ -10320,7 +10369,7 @@
                 <a:latin typeface="Verdana" panose="020B0604030504040204" pitchFamily="34" charset="0"/>
                 <a:ea typeface="Verdana" panose="020B0604030504040204" pitchFamily="34" charset="0"/>
               </a:rPr>
-              <a:t>… which is not the case for stock market exposure. Common component may dominate</a:t>
+              <a:t>… which is not the case for stock market exposure; common component may dominate</a:t>
             </a:r>
           </a:p>
           <a:p>
@@ -10428,10 +10477,10 @@
       </p:sp>
       <p:pic>
         <p:nvPicPr>
-          <p:cNvPr id="10" name="Picture 9">
+          <p:cNvPr id="3" name="Picture 2">
             <a:extLst>
               <a:ext uri="{FF2B5EF4-FFF2-40B4-BE49-F238E27FC236}">
-                <a16:creationId xmlns:a16="http://schemas.microsoft.com/office/drawing/2014/main" id="{8ED05194-3FC9-0803-C7D5-C61C218BC7C9}"/>
+                <a16:creationId xmlns:a16="http://schemas.microsoft.com/office/drawing/2014/main" id="{E4247869-22B3-74B1-C2DC-BC2BF3DF0889}"/>
               </a:ext>
             </a:extLst>
           </p:cNvPr>
@@ -10448,8 +10497,8 @@
         </p:blipFill>
         <p:spPr>
           <a:xfrm>
-            <a:off x="4673972" y="1230853"/>
-            <a:ext cx="3962400" cy="2271299"/>
+            <a:off x="4696969" y="1319147"/>
+            <a:ext cx="3962400" cy="2161571"/>
           </a:xfrm>
           <a:prstGeom prst="rect">
             <a:avLst/>
@@ -10458,10 +10507,10 @@
       </p:pic>
       <p:pic>
         <p:nvPicPr>
-          <p:cNvPr id="11" name="Picture 10">
+          <p:cNvPr id="4" name="Picture 3">
             <a:extLst>
               <a:ext uri="{FF2B5EF4-FFF2-40B4-BE49-F238E27FC236}">
-                <a16:creationId xmlns:a16="http://schemas.microsoft.com/office/drawing/2014/main" id="{F62A9DDD-9890-E970-E360-5F7C952A0047}"/>
+                <a16:creationId xmlns:a16="http://schemas.microsoft.com/office/drawing/2014/main" id="{0231C4B6-AE28-A975-F5EB-43D3FA1E2ADA}"/>
               </a:ext>
             </a:extLst>
           </p:cNvPr>
@@ -10478,8 +10527,8 @@
         </p:blipFill>
         <p:spPr>
           <a:xfrm>
-            <a:off x="4685470" y="3429000"/>
-            <a:ext cx="3962400" cy="2161571"/>
+            <a:off x="4696969" y="3429000"/>
+            <a:ext cx="3962400" cy="2128141"/>
           </a:xfrm>
           <a:prstGeom prst="rect">
             <a:avLst/>
@@ -10567,8 +10616,8 @@
           </a:p>
         </p:txBody>
       </p:sp>
-      <mc:AlternateContent xmlns:mc="http://schemas.openxmlformats.org/markup-compatibility/2006" xmlns:a14="http://schemas.microsoft.com/office/drawing/2010/main">
-        <mc:Choice Requires="a14">
+      <mc:AlternateContent xmlns:mc="http://schemas.openxmlformats.org/markup-compatibility/2006">
+        <mc:Choice xmlns:a14="http://schemas.microsoft.com/office/drawing/2010/main" Requires="a14">
           <p:sp>
             <p:nvSpPr>
               <p:cNvPr id="2" name="Content Placeholder 2">
@@ -10587,7 +10636,7 @@
             </p:nvSpPr>
             <p:spPr>
               <a:xfrm>
-                <a:off x="429768" y="825662"/>
+                <a:off x="420624" y="770798"/>
                 <a:ext cx="8505051" cy="5679439"/>
               </a:xfrm>
             </p:spPr>
@@ -12291,7 +12340,19 @@
                       <a:schemeClr val="tx1"/>
                     </a:solidFill>
                   </a:rPr>
-                  <a:t> 0);</a:t>
+                  <a:t> 0)</a:t>
+                </a:r>
+                <a:r>
+                  <a:rPr lang="nl-NL" sz="1800" dirty="0"/>
+                  <a:t>;</a:t>
+                </a:r>
+                <a:r>
+                  <a:rPr lang="nl-NL" sz="1800" dirty="0">
+                    <a:solidFill>
+                      <a:schemeClr val="tx1"/>
+                    </a:solidFill>
+                  </a:rPr>
+                  <a:t> </a:t>
                 </a:r>
                 <a14:m>
                   <m:oMath xmlns:m="http://schemas.openxmlformats.org/officeDocument/2006/math">
@@ -12822,13 +12883,13 @@
                       <a:schemeClr val="tx1"/>
                     </a:solidFill>
                   </a:rPr>
-                  <a:t>control variables</a:t>
+                  <a:t> control variables</a:t>
                 </a:r>
               </a:p>
             </p:txBody>
           </p:sp>
         </mc:Choice>
-        <mc:Fallback xmlns="">
+        <mc:Fallback>
           <p:sp>
             <p:nvSpPr>
               <p:cNvPr id="2" name="Content Placeholder 2">
@@ -12847,13 +12908,13 @@
             </p:nvSpPr>
             <p:spPr>
               <a:xfrm>
-                <a:off x="429768" y="825662"/>
+                <a:off x="420624" y="770798"/>
                 <a:ext cx="8505051" cy="5679439"/>
               </a:xfrm>
               <a:blipFill>
                 <a:blip r:embed="rId3"/>
                 <a:stretch>
-                  <a:fillRect l="-1864" t="-966"/>
+                  <a:fillRect l="-1792" t="-966"/>
                 </a:stretch>
               </a:blipFill>
             </p:spPr>

--- a/Resilience.pptx
+++ b/Resilience.pptx
@@ -156,7 +156,7 @@
 <file path=ppt/revisionInfo.xml><?xml version="1.0" encoding="utf-8"?>
 <p1510:revInfo xmlns:a="http://schemas.openxmlformats.org/drawingml/2006/main" xmlns:r="http://schemas.openxmlformats.org/officeDocument/2006/relationships" xmlns:p1510="http://schemas.microsoft.com/office/powerpoint/2015/10/main">
   <p1510:revLst>
-    <p1510:client id="{13B43BEF-9B9B-431D-9308-0B2B126B7992}" v="16" dt="2026-09-29T19:16:39.558"/>
+    <p1510:client id="{13B43BEF-9B9B-431D-9308-0B2B126B7992}" v="86" dt="2026-09-30T07:03:06.476"/>
   </p1510:revLst>
 </p1510:revInfo>
 </file>
@@ -166,7 +166,7 @@
   <pc:docChgLst>
     <pc:chgData name="Jan Willem van den End (EBO_CMA)" userId="32ade95a-e024-4672-952f-5ed8641a9e00" providerId="ADAL" clId="{3BBBE02E-ACD4-4586-9407-5E79BF620DF1}"/>
     <pc:docChg chg="undo redo custSel addSld modSld">
-      <pc:chgData name="Jan Willem van den End (EBO_CMA)" userId="32ade95a-e024-4672-952f-5ed8641a9e00" providerId="ADAL" clId="{3BBBE02E-ACD4-4586-9407-5E79BF620DF1}" dt="2026-09-29T19:17:32.259" v="5883" actId="1076"/>
+      <pc:chgData name="Jan Willem van den End (EBO_CMA)" userId="32ade95a-e024-4672-952f-5ed8641a9e00" providerId="ADAL" clId="{3BBBE02E-ACD4-4586-9407-5E79BF620DF1}" dt="2026-09-30T07:03:06.476" v="6084" actId="20577"/>
       <pc:docMkLst>
         <pc:docMk/>
       </pc:docMkLst>
@@ -419,13 +419,13 @@
         </pc:picChg>
       </pc:sldChg>
       <pc:sldChg chg="modSp mod modNotesTx">
-        <pc:chgData name="Jan Willem van den End (EBO_CMA)" userId="32ade95a-e024-4672-952f-5ed8641a9e00" providerId="ADAL" clId="{3BBBE02E-ACD4-4586-9407-5E79BF620DF1}" dt="2026-09-29T19:17:32.259" v="5883" actId="1076"/>
+        <pc:chgData name="Jan Willem van den End (EBO_CMA)" userId="32ade95a-e024-4672-952f-5ed8641a9e00" providerId="ADAL" clId="{3BBBE02E-ACD4-4586-9407-5E79BF620DF1}" dt="2026-09-30T07:03:06.476" v="6084" actId="20577"/>
         <pc:sldMkLst>
           <pc:docMk/>
           <pc:sldMk cId="515665883" sldId="793"/>
         </pc:sldMkLst>
         <pc:spChg chg="mod">
-          <ac:chgData name="Jan Willem van den End (EBO_CMA)" userId="32ade95a-e024-4672-952f-5ed8641a9e00" providerId="ADAL" clId="{3BBBE02E-ACD4-4586-9407-5E79BF620DF1}" dt="2026-09-29T19:17:32.259" v="5883" actId="1076"/>
+          <ac:chgData name="Jan Willem van den End (EBO_CMA)" userId="32ade95a-e024-4672-952f-5ed8641a9e00" providerId="ADAL" clId="{3BBBE02E-ACD4-4586-9407-5E79BF620DF1}" dt="2026-09-30T07:03:06.476" v="6084" actId="20577"/>
           <ac:spMkLst>
             <pc:docMk/>
             <pc:sldMk cId="515665883" sldId="793"/>
@@ -488,7 +488,7 @@
         </pc:spChg>
       </pc:sldChg>
       <pc:sldChg chg="addSp delSp modSp mod">
-        <pc:chgData name="Jan Willem van den End (EBO_CMA)" userId="32ade95a-e024-4672-952f-5ed8641a9e00" providerId="ADAL" clId="{3BBBE02E-ACD4-4586-9407-5E79BF620DF1}" dt="2026-09-29T12:12:08.434" v="5626" actId="1076"/>
+        <pc:chgData name="Jan Willem van den End (EBO_CMA)" userId="32ade95a-e024-4672-952f-5ed8641a9e00" providerId="ADAL" clId="{3BBBE02E-ACD4-4586-9407-5E79BF620DF1}" dt="2026-09-30T07:02:45.020" v="6080" actId="1076"/>
         <pc:sldMkLst>
           <pc:docMk/>
           <pc:sldMk cId="909146083" sldId="796"/>
@@ -502,19 +502,27 @@
           </ac:spMkLst>
         </pc:spChg>
         <pc:spChg chg="add mod">
-          <ac:chgData name="Jan Willem van den End (EBO_CMA)" userId="32ade95a-e024-4672-952f-5ed8641a9e00" providerId="ADAL" clId="{3BBBE02E-ACD4-4586-9407-5E79BF620DF1}" dt="2026-09-29T12:06:55.697" v="5618" actId="20577"/>
+          <ac:chgData name="Jan Willem van den End (EBO_CMA)" userId="32ade95a-e024-4672-952f-5ed8641a9e00" providerId="ADAL" clId="{3BBBE02E-ACD4-4586-9407-5E79BF620DF1}" dt="2026-09-30T06:55:20.835" v="6077" actId="20577"/>
           <ac:spMkLst>
             <pc:docMk/>
             <pc:sldMk cId="909146083" sldId="796"/>
             <ac:spMk id="6" creationId="{4ED6076C-5ED2-F560-9ECC-68A359BFC0CA}"/>
           </ac:spMkLst>
         </pc:spChg>
-        <pc:picChg chg="mod">
-          <ac:chgData name="Jan Willem van den End (EBO_CMA)" userId="32ade95a-e024-4672-952f-5ed8641a9e00" providerId="ADAL" clId="{3BBBE02E-ACD4-4586-9407-5E79BF620DF1}" dt="2026-09-29T12:12:08.434" v="5626" actId="1076"/>
+        <pc:picChg chg="del mod">
+          <ac:chgData name="Jan Willem van den End (EBO_CMA)" userId="32ade95a-e024-4672-952f-5ed8641a9e00" providerId="ADAL" clId="{3BBBE02E-ACD4-4586-9407-5E79BF620DF1}" dt="2026-09-30T07:02:26.402" v="6078" actId="478"/>
           <ac:picMkLst>
             <pc:docMk/>
             <pc:sldMk cId="909146083" sldId="796"/>
             <ac:picMk id="3" creationId="{6492589E-33A7-C5CD-04E6-4BE9402B49C5}"/>
+          </ac:picMkLst>
+        </pc:picChg>
+        <pc:picChg chg="mod">
+          <ac:chgData name="Jan Willem van den End (EBO_CMA)" userId="32ade95a-e024-4672-952f-5ed8641a9e00" providerId="ADAL" clId="{3BBBE02E-ACD4-4586-9407-5E79BF620DF1}" dt="2026-09-30T07:02:45.020" v="6080" actId="1076"/>
+          <ac:picMkLst>
+            <pc:docMk/>
+            <pc:sldMk cId="909146083" sldId="796"/>
+            <ac:picMk id="4" creationId="{AD9689AB-CE82-70F1-7C47-1B6F79E64021}"/>
           </ac:picMkLst>
         </pc:picChg>
         <pc:picChg chg="del mod">
@@ -636,7 +644,7 @@
           <a:p>
             <a:fld id="{C26BBE9F-2231-4498-A3E5-DFB02EDDD594}" type="datetimeFigureOut">
               <a:rPr lang="nl-NL" smtClean="0"/>
-              <a:t>29-9-2026</a:t>
+              <a:t>30-9-2026</a:t>
             </a:fld>
             <a:endParaRPr lang="nl-NL"/>
           </a:p>
@@ -801,7 +809,7 @@
           <a:p>
             <a:fld id="{900D5B51-A3C5-4FC7-8A0D-54EFEFAFACD3}" type="datetimeFigureOut">
               <a:rPr lang="nl-NL" smtClean="0"/>
-              <a:t>29-9-2026</a:t>
+              <a:t>30-9-2026</a:t>
             </a:fld>
             <a:endParaRPr lang="nl-NL"/>
           </a:p>
@@ -10637,7 +10645,7 @@
             <p:spPr>
               <a:xfrm>
                 <a:off x="420624" y="770798"/>
-                <a:ext cx="8505051" cy="5679439"/>
+                <a:ext cx="8505051" cy="6087202"/>
               </a:xfrm>
             </p:spPr>
             <p:txBody>
@@ -12886,6 +12894,125 @@
                   <a:t> control variables</a:t>
                 </a:r>
               </a:p>
+              <a:p>
+                <a:pPr>
+                  <a:lnSpc>
+                    <a:spcPct val="120000"/>
+                  </a:lnSpc>
+                  <a:spcAft>
+                    <a:spcPts val="1200"/>
+                  </a:spcAft>
+                </a:pPr>
+                <a:r>
+                  <a:rPr lang="nl-NL" sz="1800" dirty="0"/>
+                  <a:t>		</a:t>
+                </a:r>
+                <a:r>
+                  <a:rPr lang="en-US" sz="1800" noProof="1">
+                    <a:ea typeface="Cambria Math" panose="02040503050406030204" pitchFamily="18" charset="0"/>
+                  </a:rPr>
+                  <a:t> </a:t>
+                </a:r>
+                <a14:m>
+                  <m:oMath xmlns:m="http://schemas.openxmlformats.org/officeDocument/2006/math">
+                    <m:sSub>
+                      <m:sSubPr>
+                        <m:ctrlPr>
+                          <a:rPr lang="en-US" sz="1800" i="1" noProof="1">
+                            <a:latin typeface="Cambria Math" panose="02040503050406030204" pitchFamily="18" charset="0"/>
+                            <a:ea typeface="Cambria Math" panose="02040503050406030204" pitchFamily="18" charset="0"/>
+                          </a:rPr>
+                        </m:ctrlPr>
+                      </m:sSubPr>
+                      <m:e>
+                        <m:r>
+                          <a:rPr lang="en-US" sz="1800" i="1" noProof="1">
+                            <a:latin typeface="Cambria Math" panose="02040503050406030204" pitchFamily="18" charset="0"/>
+                            <a:ea typeface="Cambria Math" panose="02040503050406030204" pitchFamily="18" charset="0"/>
+                          </a:rPr>
+                          <m:t>𝜇</m:t>
+                        </m:r>
+                      </m:e>
+                      <m:sub>
+                        <m:r>
+                          <a:rPr lang="en-US" sz="1800" i="1" noProof="1">
+                            <a:latin typeface="Cambria Math" panose="02040503050406030204" pitchFamily="18" charset="0"/>
+                            <a:ea typeface="Verdana" panose="020B0604030504040204" pitchFamily="34" charset="0"/>
+                          </a:rPr>
+                          <m:t>𝑖</m:t>
+                        </m:r>
+                      </m:sub>
+                    </m:sSub>
+                  </m:oMath>
+                </a14:m>
+                <a:r>
+                  <a:rPr lang="nl-NL" sz="1800" dirty="0">
+                    <a:solidFill>
+                      <a:schemeClr val="tx1"/>
+                    </a:solidFill>
+                  </a:rPr>
+                  <a:t> </a:t>
+                </a:r>
+                <a:r>
+                  <a:rPr lang="nl-NL" sz="1800" dirty="0"/>
+                  <a:t>is country FE; </a:t>
+                </a:r>
+                <a14:m>
+                  <m:oMath xmlns:m="http://schemas.openxmlformats.org/officeDocument/2006/math">
+                    <m:sSub>
+                      <m:sSubPr>
+                        <m:ctrlPr>
+                          <a:rPr lang="en-US" sz="1800" i="1" noProof="1">
+                            <a:latin typeface="Cambria Math" panose="02040503050406030204" pitchFamily="18" charset="0"/>
+                            <a:ea typeface="Cambria Math" panose="02040503050406030204" pitchFamily="18" charset="0"/>
+                          </a:rPr>
+                        </m:ctrlPr>
+                      </m:sSubPr>
+                      <m:e>
+                        <m:r>
+                          <a:rPr lang="en-US" sz="1800" i="1" noProof="1">
+                            <a:latin typeface="Cambria Math" panose="02040503050406030204" pitchFamily="18" charset="0"/>
+                            <a:ea typeface="Cambria Math" panose="02040503050406030204" pitchFamily="18" charset="0"/>
+                          </a:rPr>
+                          <m:t>𝜏</m:t>
+                        </m:r>
+                      </m:e>
+                      <m:sub>
+                        <m:r>
+                          <a:rPr lang="en-US" sz="1800" i="1" noProof="1">
+                            <a:latin typeface="Cambria Math" panose="02040503050406030204" pitchFamily="18" charset="0"/>
+                            <a:ea typeface="Verdana" panose="020B0604030504040204" pitchFamily="34" charset="0"/>
+                          </a:rPr>
+                          <m:t>𝑡</m:t>
+                        </m:r>
+                      </m:sub>
+                    </m:sSub>
+                  </m:oMath>
+                </a14:m>
+                <a:r>
+                  <a:rPr lang="nl-NL" sz="1800" dirty="0">
+                    <a:solidFill>
+                      <a:schemeClr val="tx1"/>
+                    </a:solidFill>
+                  </a:rPr>
+                  <a:t> is time FE</a:t>
+                </a:r>
+              </a:p>
+              <a:p>
+                <a:pPr>
+                  <a:lnSpc>
+                    <a:spcPct val="120000"/>
+                  </a:lnSpc>
+                  <a:spcAft>
+                    <a:spcPts val="1200"/>
+                  </a:spcAft>
+                </a:pPr>
+                <a:endParaRPr lang="nl-NL" sz="1800" dirty="0">
+                  <a:solidFill>
+                    <a:schemeClr val="tx1"/>
+                  </a:solidFill>
+                </a:endParaRPr>
+              </a:p>
             </p:txBody>
           </p:sp>
         </mc:Choice>
@@ -12909,12 +13036,12 @@
             <p:spPr>
               <a:xfrm>
                 <a:off x="420624" y="770798"/>
-                <a:ext cx="8505051" cy="5679439"/>
+                <a:ext cx="8505051" cy="6087202"/>
               </a:xfrm>
               <a:blipFill>
                 <a:blip r:embed="rId3"/>
                 <a:stretch>
-                  <a:fillRect l="-1792" t="-966"/>
+                  <a:fillRect l="-1792" t="-901"/>
                 </a:stretch>
               </a:blipFill>
             </p:spPr>
@@ -13206,7 +13333,7 @@
                   <a:srgbClr val="002060"/>
                 </a:solidFill>
               </a:rPr>
-              <a:t>) and a measure for trade openness (source Worldbank).</a:t>
+              <a:t>) and ii) trade openness (exposrts + imports over GDP. source Worldbank).</a:t>
             </a:r>
             <a:endParaRPr lang="nl-NL" sz="1100" noProof="1">
               <a:solidFill>
@@ -13218,10 +13345,10 @@
       </p:sp>
       <p:pic>
         <p:nvPicPr>
-          <p:cNvPr id="3" name="Picture 2">
+          <p:cNvPr id="4" name="Picture 3">
             <a:extLst>
               <a:ext uri="{FF2B5EF4-FFF2-40B4-BE49-F238E27FC236}">
-                <a16:creationId xmlns:a16="http://schemas.microsoft.com/office/drawing/2014/main" id="{6492589E-33A7-C5CD-04E6-4BE9402B49C5}"/>
+                <a16:creationId xmlns:a16="http://schemas.microsoft.com/office/drawing/2014/main" id="{AD9689AB-CE82-70F1-7C47-1B6F79E64021}"/>
               </a:ext>
             </a:extLst>
           </p:cNvPr>
@@ -13238,8 +13365,8 @@
         </p:blipFill>
         <p:spPr>
           <a:xfrm>
-            <a:off x="222636" y="2329223"/>
-            <a:ext cx="8698728" cy="2470589"/>
+            <a:off x="365381" y="2446883"/>
+            <a:ext cx="8413238" cy="2389505"/>
           </a:xfrm>
           <a:prstGeom prst="rect">
             <a:avLst/>

--- a/Resilience.pptx
+++ b/Resilience.pptx
@@ -140,6 +140,9 @@
         </p15:guide>
       </p15:sldGuideLst>
     </p:ext>
+    <p:ext uri="{2D200454-40CA-4A62-9FC3-DE9A4176ACB9}">
+      <p15:notesGuideLst xmlns:p15="http://schemas.microsoft.com/office/powerpoint/2012/main"/>
+    </p:ext>
   </p:extLst>
 </p:presentation>
 </file>
@@ -156,7 +159,7 @@
 <file path=ppt/revisionInfo.xml><?xml version="1.0" encoding="utf-8"?>
 <p1510:revInfo xmlns:a="http://schemas.openxmlformats.org/drawingml/2006/main" xmlns:r="http://schemas.openxmlformats.org/officeDocument/2006/relationships" xmlns:p1510="http://schemas.microsoft.com/office/powerpoint/2015/10/main">
   <p1510:revLst>
-    <p1510:client id="{13B43BEF-9B9B-431D-9308-0B2B126B7992}" v="86" dt="2026-09-30T07:03:06.476"/>
+    <p1510:client id="{13B43BEF-9B9B-431D-9308-0B2B126B7992}" v="412" dt="2026-10-05T18:15:19.790"/>
   </p1510:revLst>
 </p1510:revInfo>
 </file>
@@ -165,13 +168,13 @@
 <pc:chgInfo xmlns:a="http://schemas.openxmlformats.org/drawingml/2006/main" xmlns:r="http://schemas.openxmlformats.org/officeDocument/2006/relationships" xmlns:ac="http://schemas.microsoft.com/office/drawing/2013/main/command" xmlns:pc="http://schemas.microsoft.com/office/powerpoint/2013/main/command">
   <pc:docChgLst>
     <pc:chgData name="Jan Willem van den End (EBO_CMA)" userId="32ade95a-e024-4672-952f-5ed8641a9e00" providerId="ADAL" clId="{3BBBE02E-ACD4-4586-9407-5E79BF620DF1}"/>
-    <pc:docChg chg="undo redo custSel addSld modSld">
-      <pc:chgData name="Jan Willem van den End (EBO_CMA)" userId="32ade95a-e024-4672-952f-5ed8641a9e00" providerId="ADAL" clId="{3BBBE02E-ACD4-4586-9407-5E79BF620DF1}" dt="2026-09-30T07:03:06.476" v="6084" actId="20577"/>
+    <pc:docChg chg="undo redo custSel addSld modSld sldOrd">
+      <pc:chgData name="Jan Willem van den End (EBO_CMA)" userId="32ade95a-e024-4672-952f-5ed8641a9e00" providerId="ADAL" clId="{3BBBE02E-ACD4-4586-9407-5E79BF620DF1}" dt="2026-10-05T18:15:36.629" v="8580" actId="6549"/>
       <pc:docMkLst>
         <pc:docMk/>
       </pc:docMkLst>
-      <pc:sldChg chg="delSp modSp mod">
-        <pc:chgData name="Jan Willem van den End (EBO_CMA)" userId="32ade95a-e024-4672-952f-5ed8641a9e00" providerId="ADAL" clId="{3BBBE02E-ACD4-4586-9407-5E79BF620DF1}" dt="2026-09-29T19:17:20.417" v="5882" actId="1076"/>
+      <pc:sldChg chg="delSp modSp mod modNotesTx">
+        <pc:chgData name="Jan Willem van den End (EBO_CMA)" userId="32ade95a-e024-4672-952f-5ed8641a9e00" providerId="ADAL" clId="{3BBBE02E-ACD4-4586-9407-5E79BF620DF1}" dt="2026-10-05T09:32:24.475" v="7022" actId="20577"/>
         <pc:sldMkLst>
           <pc:docMk/>
           <pc:sldMk cId="3588697" sldId="657"/>
@@ -261,31 +264,15 @@
             <ac:picMk id="4" creationId="{AFFB3634-5B82-136E-F947-D33F3E34AD6C}"/>
           </ac:picMkLst>
         </pc:picChg>
-        <pc:picChg chg="del mod">
-          <ac:chgData name="Jan Willem van den End (EBO_CMA)" userId="32ade95a-e024-4672-952f-5ed8641a9e00" providerId="ADAL" clId="{3BBBE02E-ACD4-4586-9407-5E79BF620DF1}" dt="2026-09-29T19:07:59.062" v="5700" actId="478"/>
-          <ac:picMkLst>
-            <pc:docMk/>
-            <pc:sldMk cId="2428101549" sldId="784"/>
-            <ac:picMk id="10" creationId="{FC7B6F34-37FE-D63D-7B8B-54AB0BA70756}"/>
-          </ac:picMkLst>
-        </pc:picChg>
-        <pc:picChg chg="del mod">
-          <ac:chgData name="Jan Willem van den End (EBO_CMA)" userId="32ade95a-e024-4672-952f-5ed8641a9e00" providerId="ADAL" clId="{3BBBE02E-ACD4-4586-9407-5E79BF620DF1}" dt="2026-09-29T19:08:32.770" v="5704" actId="478"/>
-          <ac:picMkLst>
-            <pc:docMk/>
-            <pc:sldMk cId="2428101549" sldId="784"/>
-            <ac:picMk id="11" creationId="{9865C647-8D5F-98A1-58E5-AEFAF3242ABD}"/>
-          </ac:picMkLst>
-        </pc:picChg>
       </pc:sldChg>
-      <pc:sldChg chg="modSp mod">
-        <pc:chgData name="Jan Willem van den End (EBO_CMA)" userId="32ade95a-e024-4672-952f-5ed8641a9e00" providerId="ADAL" clId="{3BBBE02E-ACD4-4586-9407-5E79BF620DF1}" dt="2026-09-19T07:22:24.819" v="1551" actId="20577"/>
+      <pc:sldChg chg="modSp mod modNotes modNotesTx">
+        <pc:chgData name="Jan Willem van den End (EBO_CMA)" userId="32ade95a-e024-4672-952f-5ed8641a9e00" providerId="ADAL" clId="{3BBBE02E-ACD4-4586-9407-5E79BF620DF1}" dt="2026-10-05T12:29:08.034" v="8491" actId="20577"/>
         <pc:sldMkLst>
           <pc:docMk/>
           <pc:sldMk cId="4129420739" sldId="786"/>
         </pc:sldMkLst>
         <pc:spChg chg="mod">
-          <ac:chgData name="Jan Willem van den End (EBO_CMA)" userId="32ade95a-e024-4672-952f-5ed8641a9e00" providerId="ADAL" clId="{3BBBE02E-ACD4-4586-9407-5E79BF620DF1}" dt="2026-09-19T07:22:24.819" v="1551" actId="20577"/>
+          <ac:chgData name="Jan Willem van den End (EBO_CMA)" userId="32ade95a-e024-4672-952f-5ed8641a9e00" providerId="ADAL" clId="{3BBBE02E-ACD4-4586-9407-5E79BF620DF1}" dt="2026-10-05T06:43:41.240" v="6163" actId="20577"/>
           <ac:spMkLst>
             <pc:docMk/>
             <pc:sldMk cId="4129420739" sldId="786"/>
@@ -355,8 +342,8 @@
           </ac:picMkLst>
         </pc:picChg>
       </pc:sldChg>
-      <pc:sldChg chg="addSp delSp modSp mod">
-        <pc:chgData name="Jan Willem van den End (EBO_CMA)" userId="32ade95a-e024-4672-952f-5ed8641a9e00" providerId="ADAL" clId="{3BBBE02E-ACD4-4586-9407-5E79BF620DF1}" dt="2026-09-29T19:11:01.220" v="5723" actId="1076"/>
+      <pc:sldChg chg="addSp delSp modSp mod ord">
+        <pc:chgData name="Jan Willem van den End (EBO_CMA)" userId="32ade95a-e024-4672-952f-5ed8641a9e00" providerId="ADAL" clId="{3BBBE02E-ACD4-4586-9407-5E79BF620DF1}" dt="2026-10-05T18:13:52.126" v="8506"/>
         <pc:sldMkLst>
           <pc:docMk/>
           <pc:sldMk cId="2304846322" sldId="792"/>
@@ -401,25 +388,9 @@
             <ac:picMk id="4" creationId="{0231C4B6-AE28-A975-F5EB-43D3FA1E2ADA}"/>
           </ac:picMkLst>
         </pc:picChg>
-        <pc:picChg chg="del mod">
-          <ac:chgData name="Jan Willem van den End (EBO_CMA)" userId="32ade95a-e024-4672-952f-5ed8641a9e00" providerId="ADAL" clId="{3BBBE02E-ACD4-4586-9407-5E79BF620DF1}" dt="2026-09-29T19:10:15.163" v="5715" actId="478"/>
-          <ac:picMkLst>
-            <pc:docMk/>
-            <pc:sldMk cId="2304846322" sldId="792"/>
-            <ac:picMk id="10" creationId="{8ED05194-3FC9-0803-C7D5-C61C218BC7C9}"/>
-          </ac:picMkLst>
-        </pc:picChg>
-        <pc:picChg chg="del mod">
-          <ac:chgData name="Jan Willem van den End (EBO_CMA)" userId="32ade95a-e024-4672-952f-5ed8641a9e00" providerId="ADAL" clId="{3BBBE02E-ACD4-4586-9407-5E79BF620DF1}" dt="2026-09-29T19:10:40.725" v="5720" actId="478"/>
-          <ac:picMkLst>
-            <pc:docMk/>
-            <pc:sldMk cId="2304846322" sldId="792"/>
-            <ac:picMk id="11" creationId="{F62A9DDD-9890-E970-E360-5F7C952A0047}"/>
-          </ac:picMkLst>
-        </pc:picChg>
       </pc:sldChg>
       <pc:sldChg chg="modSp mod modNotesTx">
-        <pc:chgData name="Jan Willem van den End (EBO_CMA)" userId="32ade95a-e024-4672-952f-5ed8641a9e00" providerId="ADAL" clId="{3BBBE02E-ACD4-4586-9407-5E79BF620DF1}" dt="2026-09-30T07:03:06.476" v="6084" actId="20577"/>
+        <pc:chgData name="Jan Willem van den End (EBO_CMA)" userId="32ade95a-e024-4672-952f-5ed8641a9e00" providerId="ADAL" clId="{3BBBE02E-ACD4-4586-9407-5E79BF620DF1}" dt="2026-10-05T12:09:46.791" v="7927" actId="20577"/>
         <pc:sldMkLst>
           <pc:docMk/>
           <pc:sldMk cId="515665883" sldId="793"/>
@@ -488,7 +459,7 @@
         </pc:spChg>
       </pc:sldChg>
       <pc:sldChg chg="addSp delSp modSp mod">
-        <pc:chgData name="Jan Willem van den End (EBO_CMA)" userId="32ade95a-e024-4672-952f-5ed8641a9e00" providerId="ADAL" clId="{3BBBE02E-ACD4-4586-9407-5E79BF620DF1}" dt="2026-09-30T07:02:45.020" v="6080" actId="1076"/>
+        <pc:chgData name="Jan Willem van den End (EBO_CMA)" userId="32ade95a-e024-4672-952f-5ed8641a9e00" providerId="ADAL" clId="{3BBBE02E-ACD4-4586-9407-5E79BF620DF1}" dt="2026-10-05T18:15:19.790" v="8579" actId="20577"/>
         <pc:sldMkLst>
           <pc:docMk/>
           <pc:sldMk cId="909146083" sldId="796"/>
@@ -502,46 +473,46 @@
           </ac:spMkLst>
         </pc:spChg>
         <pc:spChg chg="add mod">
-          <ac:chgData name="Jan Willem van den End (EBO_CMA)" userId="32ade95a-e024-4672-952f-5ed8641a9e00" providerId="ADAL" clId="{3BBBE02E-ACD4-4586-9407-5E79BF620DF1}" dt="2026-09-30T06:55:20.835" v="6077" actId="20577"/>
+          <ac:chgData name="Jan Willem van den End (EBO_CMA)" userId="32ade95a-e024-4672-952f-5ed8641a9e00" providerId="ADAL" clId="{3BBBE02E-ACD4-4586-9407-5E79BF620DF1}" dt="2026-10-05T18:15:19.790" v="8579" actId="20577"/>
           <ac:spMkLst>
             <pc:docMk/>
             <pc:sldMk cId="909146083" sldId="796"/>
             <ac:spMk id="6" creationId="{4ED6076C-5ED2-F560-9ECC-68A359BFC0CA}"/>
           </ac:spMkLst>
         </pc:spChg>
-        <pc:picChg chg="del mod">
-          <ac:chgData name="Jan Willem van den End (EBO_CMA)" userId="32ade95a-e024-4672-952f-5ed8641a9e00" providerId="ADAL" clId="{3BBBE02E-ACD4-4586-9407-5E79BF620DF1}" dt="2026-09-30T07:02:26.402" v="6078" actId="478"/>
+        <pc:picChg chg="mod">
+          <ac:chgData name="Jan Willem van den End (EBO_CMA)" userId="32ade95a-e024-4672-952f-5ed8641a9e00" providerId="ADAL" clId="{3BBBE02E-ACD4-4586-9407-5E79BF620DF1}" dt="2026-10-05T18:14:19.678" v="8513" actId="1076"/>
           <ac:picMkLst>
             <pc:docMk/>
             <pc:sldMk cId="909146083" sldId="796"/>
-            <ac:picMk id="3" creationId="{6492589E-33A7-C5CD-04E6-4BE9402B49C5}"/>
+            <ac:picMk id="3" creationId="{55B13636-9215-8A37-3974-917B9B355D12}"/>
           </ac:picMkLst>
         </pc:picChg>
-        <pc:picChg chg="mod">
-          <ac:chgData name="Jan Willem van den End (EBO_CMA)" userId="32ade95a-e024-4672-952f-5ed8641a9e00" providerId="ADAL" clId="{3BBBE02E-ACD4-4586-9407-5E79BF620DF1}" dt="2026-09-30T07:02:45.020" v="6080" actId="1076"/>
+        <pc:picChg chg="del mod">
+          <ac:chgData name="Jan Willem van den End (EBO_CMA)" userId="32ade95a-e024-4672-952f-5ed8641a9e00" providerId="ADAL" clId="{3BBBE02E-ACD4-4586-9407-5E79BF620DF1}" dt="2026-10-05T18:13:55.538" v="8507" actId="478"/>
           <ac:picMkLst>
             <pc:docMk/>
             <pc:sldMk cId="909146083" sldId="796"/>
             <ac:picMk id="4" creationId="{AD9689AB-CE82-70F1-7C47-1B6F79E64021}"/>
           </ac:picMkLst>
         </pc:picChg>
-        <pc:picChg chg="del mod">
-          <ac:chgData name="Jan Willem van den End (EBO_CMA)" userId="32ade95a-e024-4672-952f-5ed8641a9e00" providerId="ADAL" clId="{3BBBE02E-ACD4-4586-9407-5E79BF620DF1}" dt="2026-09-29T12:11:44.654" v="5619" actId="478"/>
+        <pc:picChg chg="add del">
+          <ac:chgData name="Jan Willem van den End (EBO_CMA)" userId="32ade95a-e024-4672-952f-5ed8641a9e00" providerId="ADAL" clId="{3BBBE02E-ACD4-4586-9407-5E79BF620DF1}" dt="2026-10-05T12:23:22.279" v="8327" actId="22"/>
           <ac:picMkLst>
             <pc:docMk/>
             <pc:sldMk cId="909146083" sldId="796"/>
-            <ac:picMk id="10" creationId="{C9A895D5-4DBA-4775-3A49-739C761362E5}"/>
+            <ac:picMk id="5" creationId="{3A4A43AF-74F3-97B8-385C-7F2921822E61}"/>
           </ac:picMkLst>
         </pc:picChg>
       </pc:sldChg>
       <pc:sldChg chg="modSp add mod modNotesTx">
-        <pc:chgData name="Jan Willem van den End (EBO_CMA)" userId="32ade95a-e024-4672-952f-5ed8641a9e00" providerId="ADAL" clId="{3BBBE02E-ACD4-4586-9407-5E79BF620DF1}" dt="2026-09-29T19:16:39.558" v="5878"/>
+        <pc:chgData name="Jan Willem van den End (EBO_CMA)" userId="32ade95a-e024-4672-952f-5ed8641a9e00" providerId="ADAL" clId="{3BBBE02E-ACD4-4586-9407-5E79BF620DF1}" dt="2026-10-05T18:15:36.629" v="8580" actId="6549"/>
         <pc:sldMkLst>
           <pc:docMk/>
           <pc:sldMk cId="341592472" sldId="797"/>
         </pc:sldMkLst>
         <pc:spChg chg="mod">
-          <ac:chgData name="Jan Willem van den End (EBO_CMA)" userId="32ade95a-e024-4672-952f-5ed8641a9e00" providerId="ADAL" clId="{3BBBE02E-ACD4-4586-9407-5E79BF620DF1}" dt="2026-09-29T19:16:39.558" v="5878"/>
+          <ac:chgData name="Jan Willem van den End (EBO_CMA)" userId="32ade95a-e024-4672-952f-5ed8641a9e00" providerId="ADAL" clId="{3BBBE02E-ACD4-4586-9407-5E79BF620DF1}" dt="2026-10-05T18:15:36.629" v="8580" actId="6549"/>
           <ac:spMkLst>
             <pc:docMk/>
             <pc:sldMk cId="341592472" sldId="797"/>
@@ -644,7 +615,7 @@
           <a:p>
             <a:fld id="{C26BBE9F-2231-4498-A3E5-DFB02EDDD594}" type="datetimeFigureOut">
               <a:rPr lang="nl-NL" smtClean="0"/>
-              <a:t>30-9-2026</a:t>
+              <a:t>5-10-2026</a:t>
             </a:fld>
             <a:endParaRPr lang="nl-NL"/>
           </a:p>
@@ -809,7 +780,7 @@
           <a:p>
             <a:fld id="{900D5B51-A3C5-4FC7-8A0D-54EFEFAFACD3}" type="datetimeFigureOut">
               <a:rPr lang="nl-NL" smtClean="0"/>
-              <a:t>30-9-2026</a:t>
+              <a:t>5-10-2026</a:t>
             </a:fld>
             <a:endParaRPr lang="nl-NL"/>
           </a:p>
@@ -2664,7 +2635,82 @@
               <a:buFontTx/>
               <a:buChar char="-"/>
             </a:pPr>
-            <a:endParaRPr lang="nl-NL"/>
+            <a:r>
+              <a:rPr lang="nl-NL" dirty="0"/>
+              <a:t>The variables </a:t>
+            </a:r>
+            <a:r>
+              <a:rPr lang="nl-NL" dirty="0" err="1"/>
+              <a:t>for</a:t>
+            </a:r>
+            <a:r>
+              <a:rPr lang="nl-NL" dirty="0"/>
+              <a:t> the investment </a:t>
+            </a:r>
+            <a:r>
+              <a:rPr lang="nl-NL" dirty="0" err="1"/>
+              <a:t>channel</a:t>
+            </a:r>
+            <a:r>
+              <a:rPr lang="nl-NL" dirty="0"/>
+              <a:t> are </a:t>
+            </a:r>
+            <a:r>
+              <a:rPr lang="nl-NL" dirty="0" err="1"/>
+              <a:t>proxies</a:t>
+            </a:r>
+            <a:r>
+              <a:rPr lang="nl-NL" dirty="0"/>
+              <a:t> </a:t>
+            </a:r>
+            <a:r>
+              <a:rPr lang="nl-NL" dirty="0" err="1"/>
+              <a:t>for</a:t>
+            </a:r>
+            <a:r>
+              <a:rPr lang="nl-NL" dirty="0"/>
+              <a:t> the </a:t>
+            </a:r>
+            <a:r>
+              <a:rPr lang="nl-NL" dirty="0" err="1"/>
+              <a:t>use</a:t>
+            </a:r>
+            <a:r>
+              <a:rPr lang="nl-NL" dirty="0"/>
+              <a:t> and </a:t>
+            </a:r>
+            <a:r>
+              <a:rPr lang="nl-NL" dirty="0" err="1"/>
+              <a:t>extend</a:t>
+            </a:r>
+            <a:r>
+              <a:rPr lang="nl-NL" dirty="0"/>
+              <a:t> of </a:t>
+            </a:r>
+            <a:r>
+              <a:rPr lang="nl-NL" dirty="0" err="1"/>
+              <a:t>which</a:t>
+            </a:r>
+            <a:r>
+              <a:rPr lang="nl-NL" dirty="0"/>
+              <a:t> AI/ICT is </a:t>
+            </a:r>
+            <a:r>
+              <a:rPr lang="nl-NL" dirty="0" err="1"/>
+              <a:t>applied</a:t>
+            </a:r>
+            <a:r>
+              <a:rPr lang="nl-NL" dirty="0"/>
+              <a:t> </a:t>
+            </a:r>
+            <a:r>
+              <a:rPr lang="nl-NL" dirty="0" err="1"/>
+              <a:t>by</a:t>
+            </a:r>
+            <a:r>
+              <a:rPr lang="nl-NL" dirty="0"/>
+              <a:t> companies. </a:t>
+            </a:r>
           </a:p>
         </p:txBody>
       </p:sp>
@@ -2812,35 +2858,2156 @@
           </a:p>
         </p:txBody>
       </p:sp>
-      <p:sp>
-        <p:nvSpPr>
-          <p:cNvPr id="3" name="Tijdelijke aanduiding voor notities 2">
-            <a:extLst>
-              <a:ext uri="{FF2B5EF4-FFF2-40B4-BE49-F238E27FC236}">
-                <a16:creationId xmlns:a16="http://schemas.microsoft.com/office/drawing/2014/main" id="{A6DA90D2-1A07-3CDD-DC37-B10D687FEBF4}"/>
-              </a:ext>
-            </a:extLst>
-          </p:cNvPr>
-          <p:cNvSpPr>
-            <a:spLocks noGrp="1"/>
-          </p:cNvSpPr>
-          <p:nvPr>
-            <p:ph type="body" idx="1"/>
-          </p:nvPr>
-        </p:nvSpPr>
-        <p:spPr/>
-        <p:txBody>
-          <a:bodyPr/>
-          <a:lstStyle/>
-          <a:p>
-            <a:pPr marL="0" indent="0">
-              <a:buFontTx/>
-              <a:buNone/>
-            </a:pPr>
-            <a:endParaRPr lang="nl-NL" i="0" baseline="0"/>
-          </a:p>
-        </p:txBody>
-      </p:sp>
+      <mc:AlternateContent xmlns:mc="http://schemas.openxmlformats.org/markup-compatibility/2006" xmlns:a14="http://schemas.microsoft.com/office/drawing/2010/main">
+        <mc:Choice Requires="a14">
+          <p:sp>
+            <p:nvSpPr>
+              <p:cNvPr id="3" name="Tijdelijke aanduiding voor notities 2">
+                <a:extLst>
+                  <a:ext uri="{FF2B5EF4-FFF2-40B4-BE49-F238E27FC236}">
+                    <a16:creationId xmlns:a16="http://schemas.microsoft.com/office/drawing/2014/main" id="{A6DA90D2-1A07-3CDD-DC37-B10D687FEBF4}"/>
+                  </a:ext>
+                </a:extLst>
+              </p:cNvPr>
+              <p:cNvSpPr>
+                <a:spLocks noGrp="1"/>
+              </p:cNvSpPr>
+              <p:nvPr>
+                <p:ph type="body" idx="1"/>
+              </p:nvPr>
+            </p:nvSpPr>
+            <p:spPr>
+              <a:xfrm>
+                <a:off x="474921" y="4785598"/>
+                <a:ext cx="5897525" cy="4847500"/>
+              </a:xfrm>
+            </p:spPr>
+            <p:txBody>
+              <a:bodyPr/>
+              <a:lstStyle/>
+              <a:p>
+                <a:pPr marL="0" marR="0" lvl="0" indent="0" algn="l" defTabSz="914400" rtl="0" eaLnBrk="1" fontAlgn="auto" latinLnBrk="0" hangingPunct="1">
+                  <a:lnSpc>
+                    <a:spcPct val="100000"/>
+                  </a:lnSpc>
+                  <a:spcBef>
+                    <a:spcPts val="0"/>
+                  </a:spcBef>
+                  <a:spcAft>
+                    <a:spcPts val="0"/>
+                  </a:spcAft>
+                  <a:buClrTx/>
+                  <a:buSzTx/>
+                  <a:buFontTx/>
+                  <a:buNone/>
+                  <a:tabLst/>
+                  <a:defRPr/>
+                </a:pPr>
+                <a:r>
+                  <a:rPr lang="en-US" sz="1400" b="0" i="0" kern="1200" dirty="0">
+                    <a:solidFill>
+                      <a:schemeClr val="tx1"/>
+                    </a:solidFill>
+                    <a:effectLst/>
+                    <a:latin typeface="+mn-lt"/>
+                    <a:ea typeface="+mn-ea"/>
+                    <a:cs typeface="+mn-cs"/>
+                  </a:rPr>
+                  <a:t>We pool the GDP growth realizations in year t &amp;  t+1 and Spring &amp;  Autumn forecasts. Advantage of </a:t>
+                </a:r>
+                <a:r>
+                  <a:rPr lang="en-NL" sz="1400" b="0" i="0" kern="1200" dirty="0">
+                    <a:solidFill>
+                      <a:schemeClr val="tx1"/>
+                    </a:solidFill>
+                    <a:effectLst/>
+                    <a:latin typeface="+mn-lt"/>
+                    <a:ea typeface="+mn-ea"/>
+                    <a:cs typeface="+mn-cs"/>
+                  </a:rPr>
+                  <a:t>pooling: it increases sample size and treats all forecasts as observations on the same forecasting problem.</a:t>
+                </a:r>
+                <a:r>
+                  <a:rPr lang="en-US" sz="1400" b="0" i="0" kern="1200" dirty="0">
+                    <a:solidFill>
+                      <a:schemeClr val="tx1"/>
+                    </a:solidFill>
+                    <a:effectLst/>
+                    <a:latin typeface="+mn-lt"/>
+                    <a:ea typeface="+mn-ea"/>
+                    <a:cs typeface="+mn-cs"/>
+                  </a:rPr>
+                  <a:t> </a:t>
+                </a:r>
+              </a:p>
+              <a:p>
+                <a:pPr marL="0" marR="0" lvl="0" indent="0" algn="l" defTabSz="914400" rtl="0" eaLnBrk="1" fontAlgn="auto" latinLnBrk="0" hangingPunct="1">
+                  <a:lnSpc>
+                    <a:spcPct val="100000"/>
+                  </a:lnSpc>
+                  <a:spcBef>
+                    <a:spcPts val="0"/>
+                  </a:spcBef>
+                  <a:spcAft>
+                    <a:spcPts val="0"/>
+                  </a:spcAft>
+                  <a:buClrTx/>
+                  <a:buSzTx/>
+                  <a:buFontTx/>
+                  <a:buNone/>
+                  <a:tabLst/>
+                  <a:defRPr/>
+                </a:pPr>
+                <a:endParaRPr lang="en-US" sz="1400" b="0" i="0" kern="1200" dirty="0">
+                  <a:solidFill>
+                    <a:schemeClr val="tx1"/>
+                  </a:solidFill>
+                  <a:effectLst/>
+                  <a:latin typeface="+mn-lt"/>
+                  <a:ea typeface="+mn-ea"/>
+                  <a:cs typeface="+mn-cs"/>
+                </a:endParaRPr>
+              </a:p>
+              <a:p>
+                <a:pPr marL="0" marR="0" lvl="0" indent="0" algn="l" defTabSz="914400" rtl="0" eaLnBrk="1" fontAlgn="auto" latinLnBrk="0" hangingPunct="1">
+                  <a:lnSpc>
+                    <a:spcPct val="100000"/>
+                  </a:lnSpc>
+                  <a:spcBef>
+                    <a:spcPts val="0"/>
+                  </a:spcBef>
+                  <a:spcAft>
+                    <a:spcPts val="0"/>
+                  </a:spcAft>
+                  <a:buClrTx/>
+                  <a:buSzTx/>
+                  <a:buFontTx/>
+                  <a:buNone/>
+                  <a:tabLst/>
+                  <a:defRPr/>
+                </a:pPr>
+                <a:r>
+                  <a:rPr lang="en-US" sz="1400" b="0" i="0" kern="1200" dirty="0">
+                    <a:solidFill>
+                      <a:schemeClr val="tx1"/>
+                    </a:solidFill>
+                    <a:effectLst/>
+                    <a:latin typeface="+mn-lt"/>
+                    <a:ea typeface="+mn-ea"/>
+                    <a:cs typeface="+mn-cs"/>
+                  </a:rPr>
+                  <a:t>However, </a:t>
+                </a:r>
+                <a:r>
+                  <a:rPr lang="en-NL" sz="1400" b="0" i="0" kern="1200" dirty="0">
+                    <a:solidFill>
+                      <a:schemeClr val="tx1"/>
+                    </a:solidFill>
+                    <a:effectLst/>
+                    <a:latin typeface="+mn-lt"/>
+                    <a:ea typeface="+mn-ea"/>
+                    <a:cs typeface="+mn-cs"/>
+                  </a:rPr>
+                  <a:t>surprise</a:t>
+                </a:r>
+                <a:r>
+                  <a:rPr lang="en-US" sz="1400" b="0" i="0" kern="1200" dirty="0">
+                    <a:solidFill>
+                      <a:schemeClr val="tx1"/>
+                    </a:solidFill>
+                    <a:effectLst/>
+                    <a:latin typeface="+mn-lt"/>
+                    <a:ea typeface="+mn-ea"/>
+                    <a:cs typeface="+mn-cs"/>
+                  </a:rPr>
+                  <a:t>s based on </a:t>
+                </a:r>
+                <a:r>
+                  <a:rPr lang="en-NL" sz="1400" b="0" i="0" kern="1200" dirty="0">
+                    <a:solidFill>
+                      <a:schemeClr val="tx1"/>
+                    </a:solidFill>
+                    <a:effectLst/>
+                    <a:latin typeface="+mn-lt"/>
+                    <a:ea typeface="+mn-ea"/>
+                    <a:cs typeface="+mn-cs"/>
+                  </a:rPr>
+                  <a:t>Autumn</a:t>
+                </a:r>
+                <a:r>
+                  <a:rPr lang="en-US" sz="1400" b="0" i="0" kern="1200" dirty="0">
+                    <a:solidFill>
+                      <a:schemeClr val="tx1"/>
+                    </a:solidFill>
+                    <a:effectLst/>
+                    <a:latin typeface="+mn-lt"/>
+                    <a:ea typeface="+mn-ea"/>
+                    <a:cs typeface="+mn-cs"/>
+                  </a:rPr>
+                  <a:t> &amp; Spring</a:t>
+                </a:r>
+                <a:r>
+                  <a:rPr lang="en-US" sz="1400" b="0" i="0" kern="1200" baseline="0" dirty="0">
+                    <a:solidFill>
+                      <a:schemeClr val="tx1"/>
+                    </a:solidFill>
+                    <a:effectLst/>
+                    <a:latin typeface="+mn-lt"/>
+                    <a:ea typeface="+mn-ea"/>
+                    <a:cs typeface="+mn-cs"/>
+                  </a:rPr>
+                  <a:t> </a:t>
+                </a:r>
+                <a:r>
+                  <a:rPr lang="en-NL" sz="1400" b="0" i="0" kern="1200" dirty="0">
+                    <a:solidFill>
+                      <a:schemeClr val="tx1"/>
+                    </a:solidFill>
+                    <a:effectLst/>
+                    <a:latin typeface="+mn-lt"/>
+                    <a:ea typeface="+mn-ea"/>
+                    <a:cs typeface="+mn-cs"/>
+                  </a:rPr>
+                  <a:t>forecast </a:t>
+                </a:r>
+                <a:r>
+                  <a:rPr lang="en-US" sz="1400" b="0" i="0" kern="1200" dirty="0">
+                    <a:solidFill>
+                      <a:schemeClr val="tx1"/>
+                    </a:solidFill>
+                    <a:effectLst/>
+                    <a:latin typeface="+mn-lt"/>
+                    <a:ea typeface="+mn-ea"/>
+                    <a:cs typeface="+mn-cs"/>
+                  </a:rPr>
+                  <a:t>and t </a:t>
+                </a:r>
+                <a:r>
+                  <a:rPr lang="en-US" sz="1400" dirty="0"/>
+                  <a:t>&amp; </a:t>
+                </a:r>
+                <a:r>
+                  <a:rPr lang="en-US" sz="1400" b="0" i="0" kern="1200" dirty="0">
+                    <a:solidFill>
+                      <a:schemeClr val="tx1"/>
+                    </a:solidFill>
+                    <a:effectLst/>
+                    <a:latin typeface="+mn-lt"/>
+                    <a:ea typeface="+mn-ea"/>
+                    <a:cs typeface="+mn-cs"/>
+                  </a:rPr>
+                  <a:t> t+1 are </a:t>
+                </a:r>
+                <a:r>
+                  <a:rPr lang="en-NL" sz="1400" b="0" i="0" kern="1200" dirty="0">
+                    <a:solidFill>
+                      <a:schemeClr val="tx1"/>
+                    </a:solidFill>
+                    <a:effectLst/>
+                    <a:latin typeface="+mn-lt"/>
+                    <a:ea typeface="+mn-ea"/>
+                    <a:cs typeface="+mn-cs"/>
+                  </a:rPr>
+                  <a:t>not directly comparable</a:t>
+                </a:r>
+                <a:r>
+                  <a:rPr lang="en-US" sz="1400" b="0" i="0" kern="1200" dirty="0">
+                    <a:solidFill>
+                      <a:schemeClr val="tx1"/>
+                    </a:solidFill>
+                    <a:effectLst/>
+                    <a:latin typeface="+mn-lt"/>
+                    <a:ea typeface="+mn-ea"/>
+                    <a:cs typeface="+mn-cs"/>
+                  </a:rPr>
+                  <a:t>; for instance uncertainty about t+1 forecast is higher than forecast t and similarly for Spring vs Autumn</a:t>
+                </a:r>
+              </a:p>
+              <a:p>
+                <a:pPr marL="0" marR="0" lvl="0" indent="0" algn="l" defTabSz="914400" rtl="0" eaLnBrk="1" fontAlgn="auto" latinLnBrk="0" hangingPunct="1">
+                  <a:lnSpc>
+                    <a:spcPct val="100000"/>
+                  </a:lnSpc>
+                  <a:spcBef>
+                    <a:spcPts val="0"/>
+                  </a:spcBef>
+                  <a:spcAft>
+                    <a:spcPts val="0"/>
+                  </a:spcAft>
+                  <a:buClrTx/>
+                  <a:buSzTx/>
+                  <a:buFontTx/>
+                  <a:buNone/>
+                  <a:tabLst/>
+                  <a:defRPr/>
+                </a:pPr>
+                <a:endParaRPr lang="en-US" sz="1400" b="0" i="0" kern="1200" dirty="0">
+                  <a:solidFill>
+                    <a:schemeClr val="tx1"/>
+                  </a:solidFill>
+                  <a:effectLst/>
+                  <a:latin typeface="+mn-lt"/>
+                  <a:ea typeface="+mn-ea"/>
+                  <a:cs typeface="+mn-cs"/>
+                </a:endParaRPr>
+              </a:p>
+              <a:p>
+                <a:pPr fontAlgn="t"/>
+                <a:r>
+                  <a:rPr lang="en-US" sz="1400" b="0" i="0" kern="1200" dirty="0">
+                    <a:solidFill>
+                      <a:schemeClr val="tx1"/>
+                    </a:solidFill>
+                    <a:effectLst/>
+                    <a:latin typeface="+mn-lt"/>
+                    <a:ea typeface="+mn-ea"/>
+                    <a:cs typeface="+mn-cs"/>
+                  </a:rPr>
+                  <a:t>Solution</a:t>
+                </a:r>
+                <a:r>
+                  <a:rPr lang="en-US" sz="1400" dirty="0"/>
+                  <a:t> =&gt;</a:t>
+                </a:r>
+                <a:r>
+                  <a:rPr lang="en-US" sz="1400" b="0" i="0" kern="1200" dirty="0">
+                    <a:solidFill>
+                      <a:schemeClr val="tx1"/>
+                    </a:solidFill>
+                    <a:effectLst/>
+                    <a:latin typeface="+mn-lt"/>
+                    <a:ea typeface="+mn-ea"/>
+                    <a:cs typeface="+mn-cs"/>
+                  </a:rPr>
+                  <a:t> </a:t>
+                </a:r>
+                <a:r>
+                  <a:rPr lang="en-NL" sz="1400" b="0" i="0" kern="1200" dirty="0">
+                    <a:solidFill>
+                      <a:schemeClr val="tx1"/>
+                    </a:solidFill>
+                    <a:effectLst/>
+                    <a:latin typeface="+mn-lt"/>
+                    <a:ea typeface="+mn-ea"/>
+                    <a:cs typeface="+mn-cs"/>
+                  </a:rPr>
+                  <a:t>add forecast-vintage controls:</a:t>
+                </a:r>
+              </a:p>
+              <a:p>
+                <a:pPr/>
+                <a14:m>
+                  <m:oMathPara xmlns:m="http://schemas.openxmlformats.org/officeDocument/2006/math">
+                    <m:oMath>
+                      <m:r>
+                        <a:rPr lang="en-NL" sz="1400" i="1" kern="1200">
+                          <a:solidFill>
+                            <a:schemeClr val="tx1"/>
+                          </a:solidFill>
+                          <a:latin typeface="Cambria Math" panose="02040503050406030204" pitchFamily="18" charset="0"/>
+                          <a:ea typeface="+mn-ea"/>
+                          <a:cs typeface="+mn-cs"/>
+                        </a:rPr>
+                        <m:t>𝑃</m:t>
+                      </m:r>
+                      <m:d>
+                        <m:dPr>
+                          <m:ctrlPr>
+                            <a:rPr lang="en-NL" sz="1400" i="1" kern="1200">
+                              <a:solidFill>
+                                <a:schemeClr val="tx1"/>
+                              </a:solidFill>
+                              <a:latin typeface="Cambria Math" panose="02040503050406030204" pitchFamily="18" charset="0"/>
+                              <a:ea typeface="+mn-ea"/>
+                              <a:cs typeface="+mn-cs"/>
+                            </a:rPr>
+                          </m:ctrlPr>
+                        </m:dPr>
+                        <m:e>
+                          <m:r>
+                            <a:rPr lang="en-NL" sz="1400" i="1" kern="1200">
+                              <a:solidFill>
+                                <a:schemeClr val="tx1"/>
+                              </a:solidFill>
+                              <a:latin typeface="Cambria Math" panose="02040503050406030204" pitchFamily="18" charset="0"/>
+                              <a:ea typeface="+mn-ea"/>
+                              <a:cs typeface="+mn-cs"/>
+                            </a:rPr>
+                            <m:t>𝑦</m:t>
+                          </m:r>
+                          <m:r>
+                            <a:rPr lang="en-NL" sz="1400" i="0" kern="1200">
+                              <a:solidFill>
+                                <a:schemeClr val="tx1"/>
+                              </a:solidFill>
+                              <a:latin typeface="Cambria Math" panose="02040503050406030204" pitchFamily="18" charset="0"/>
+                              <a:ea typeface="+mn-ea"/>
+                              <a:cs typeface="+mn-cs"/>
+                            </a:rPr>
+                            <m:t>=1</m:t>
+                          </m:r>
+                        </m:e>
+                      </m:d>
+                      <m:r>
+                        <a:rPr lang="en-NL" sz="1400" i="0" kern="1200">
+                          <a:solidFill>
+                            <a:schemeClr val="tx1"/>
+                          </a:solidFill>
+                          <a:latin typeface="Cambria Math" panose="02040503050406030204" pitchFamily="18" charset="0"/>
+                          <a:ea typeface="+mn-ea"/>
+                          <a:cs typeface="+mn-cs"/>
+                        </a:rPr>
+                        <m:t>=</m:t>
+                      </m:r>
+                      <m:r>
+                        <m:rPr>
+                          <m:sty m:val="p"/>
+                        </m:rPr>
+                        <a:rPr lang="en-NL" sz="1400" i="0" kern="1200">
+                          <a:solidFill>
+                            <a:schemeClr val="tx1"/>
+                          </a:solidFill>
+                          <a:latin typeface="Cambria Math" panose="02040503050406030204" pitchFamily="18" charset="0"/>
+                          <a:ea typeface="+mn-ea"/>
+                          <a:cs typeface="+mn-cs"/>
+                        </a:rPr>
+                        <m:t>Φ</m:t>
+                      </m:r>
+                      <m:d>
+                        <m:dPr>
+                          <m:ctrlPr>
+                            <a:rPr lang="en-NL" sz="1400" i="1" kern="1200">
+                              <a:solidFill>
+                                <a:schemeClr val="tx1"/>
+                              </a:solidFill>
+                              <a:latin typeface="Cambria Math" panose="02040503050406030204" pitchFamily="18" charset="0"/>
+                              <a:ea typeface="+mn-ea"/>
+                              <a:cs typeface="+mn-cs"/>
+                            </a:rPr>
+                          </m:ctrlPr>
+                        </m:dPr>
+                        <m:e>
+                          <m:sSub>
+                            <m:sSubPr>
+                              <m:ctrlPr>
+                                <a:rPr lang="en-NL" sz="1400" i="1" kern="1200">
+                                  <a:solidFill>
+                                    <a:schemeClr val="tx1"/>
+                                  </a:solidFill>
+                                  <a:latin typeface="Cambria Math" panose="02040503050406030204" pitchFamily="18" charset="0"/>
+                                  <a:ea typeface="+mn-ea"/>
+                                  <a:cs typeface="+mn-cs"/>
+                                </a:rPr>
+                              </m:ctrlPr>
+                            </m:sSubPr>
+                            <m:e>
+                              <m:r>
+                                <a:rPr lang="en-NL" sz="1400" i="1" kern="1200">
+                                  <a:solidFill>
+                                    <a:schemeClr val="tx1"/>
+                                  </a:solidFill>
+                                  <a:latin typeface="Cambria Math" panose="02040503050406030204" pitchFamily="18" charset="0"/>
+                                  <a:ea typeface="+mn-ea"/>
+                                  <a:cs typeface="+mn-cs"/>
+                                </a:rPr>
+                                <m:t>𝛽</m:t>
+                              </m:r>
+                            </m:e>
+                            <m:sub>
+                              <m:r>
+                                <a:rPr lang="en-NL" sz="1400" i="0" kern="1200">
+                                  <a:solidFill>
+                                    <a:schemeClr val="tx1"/>
+                                  </a:solidFill>
+                                  <a:latin typeface="Cambria Math" panose="02040503050406030204" pitchFamily="18" charset="0"/>
+                                  <a:ea typeface="+mn-ea"/>
+                                  <a:cs typeface="+mn-cs"/>
+                                </a:rPr>
+                                <m:t>1</m:t>
+                              </m:r>
+                            </m:sub>
+                          </m:sSub>
+                          <m:r>
+                            <a:rPr lang="en-NL" sz="1400" i="1" kern="1200">
+                              <a:solidFill>
+                                <a:schemeClr val="tx1"/>
+                              </a:solidFill>
+                              <a:latin typeface="Cambria Math" panose="02040503050406030204" pitchFamily="18" charset="0"/>
+                              <a:ea typeface="+mn-ea"/>
+                              <a:cs typeface="+mn-cs"/>
+                            </a:rPr>
+                            <m:t>𝐴𝐼</m:t>
+                          </m:r>
+                          <m:r>
+                            <a:rPr lang="en-NL" sz="1400" i="0" kern="1200">
+                              <a:solidFill>
+                                <a:schemeClr val="tx1"/>
+                              </a:solidFill>
+                              <a:latin typeface="Cambria Math" panose="02040503050406030204" pitchFamily="18" charset="0"/>
+                              <a:ea typeface="+mn-ea"/>
+                              <a:cs typeface="+mn-cs"/>
+                            </a:rPr>
+                            <m:t>+</m:t>
+                          </m:r>
+                          <m:sSub>
+                            <m:sSubPr>
+                              <m:ctrlPr>
+                                <a:rPr lang="en-NL" sz="1400" i="1" kern="1200">
+                                  <a:solidFill>
+                                    <a:schemeClr val="tx1"/>
+                                  </a:solidFill>
+                                  <a:latin typeface="Cambria Math" panose="02040503050406030204" pitchFamily="18" charset="0"/>
+                                  <a:ea typeface="+mn-ea"/>
+                                  <a:cs typeface="+mn-cs"/>
+                                </a:rPr>
+                              </m:ctrlPr>
+                            </m:sSubPr>
+                            <m:e>
+                              <m:r>
+                                <a:rPr lang="en-NL" sz="1400" i="1" kern="1200">
+                                  <a:solidFill>
+                                    <a:schemeClr val="tx1"/>
+                                  </a:solidFill>
+                                  <a:latin typeface="Cambria Math" panose="02040503050406030204" pitchFamily="18" charset="0"/>
+                                  <a:ea typeface="+mn-ea"/>
+                                  <a:cs typeface="+mn-cs"/>
+                                </a:rPr>
+                                <m:t>𝛽</m:t>
+                              </m:r>
+                            </m:e>
+                            <m:sub>
+                              <m:r>
+                                <a:rPr lang="en-NL" sz="1400" i="0" kern="1200">
+                                  <a:solidFill>
+                                    <a:schemeClr val="tx1"/>
+                                  </a:solidFill>
+                                  <a:latin typeface="Cambria Math" panose="02040503050406030204" pitchFamily="18" charset="0"/>
+                                  <a:ea typeface="+mn-ea"/>
+                                  <a:cs typeface="+mn-cs"/>
+                                </a:rPr>
+                                <m:t>2</m:t>
+                              </m:r>
+                            </m:sub>
+                          </m:sSub>
+                          <m:r>
+                            <a:rPr lang="en-NL" sz="1400" i="1" kern="1200">
+                              <a:solidFill>
+                                <a:schemeClr val="tx1"/>
+                              </a:solidFill>
+                              <a:latin typeface="Cambria Math" panose="02040503050406030204" pitchFamily="18" charset="0"/>
+                              <a:ea typeface="+mn-ea"/>
+                              <a:cs typeface="+mn-cs"/>
+                            </a:rPr>
+                            <m:t>𝐼𝐶𝑇</m:t>
+                          </m:r>
+                          <m:r>
+                            <a:rPr lang="en-NL" sz="1400" i="0" kern="1200">
+                              <a:solidFill>
+                                <a:schemeClr val="tx1"/>
+                              </a:solidFill>
+                              <a:latin typeface="Cambria Math" panose="02040503050406030204" pitchFamily="18" charset="0"/>
+                              <a:ea typeface="+mn-ea"/>
+                              <a:cs typeface="+mn-cs"/>
+                            </a:rPr>
+                            <m:t>+</m:t>
+                          </m:r>
+                          <m:sSub>
+                            <m:sSubPr>
+                              <m:ctrlPr>
+                                <a:rPr lang="en-NL" sz="1400" i="1" kern="1200">
+                                  <a:solidFill>
+                                    <a:schemeClr val="tx1"/>
+                                  </a:solidFill>
+                                  <a:latin typeface="Cambria Math" panose="02040503050406030204" pitchFamily="18" charset="0"/>
+                                  <a:ea typeface="+mn-ea"/>
+                                  <a:cs typeface="+mn-cs"/>
+                                </a:rPr>
+                              </m:ctrlPr>
+                            </m:sSubPr>
+                            <m:e>
+                              <m:r>
+                                <a:rPr lang="en-NL" sz="1400" i="1" kern="1200">
+                                  <a:solidFill>
+                                    <a:schemeClr val="tx1"/>
+                                  </a:solidFill>
+                                  <a:latin typeface="Cambria Math" panose="02040503050406030204" pitchFamily="18" charset="0"/>
+                                  <a:ea typeface="+mn-ea"/>
+                                  <a:cs typeface="+mn-cs"/>
+                                </a:rPr>
+                                <m:t>𝛾</m:t>
+                              </m:r>
+                            </m:e>
+                            <m:sub>
+                              <m:r>
+                                <a:rPr lang="en-NL" sz="1400" i="0" kern="1200">
+                                  <a:solidFill>
+                                    <a:schemeClr val="tx1"/>
+                                  </a:solidFill>
+                                  <a:latin typeface="Cambria Math" panose="02040503050406030204" pitchFamily="18" charset="0"/>
+                                  <a:ea typeface="+mn-ea"/>
+                                  <a:cs typeface="+mn-cs"/>
+                                </a:rPr>
+                                <m:t>1</m:t>
+                              </m:r>
+                            </m:sub>
+                          </m:sSub>
+                          <m:r>
+                            <a:rPr lang="en-NL" sz="1400" i="1" kern="1200">
+                              <a:solidFill>
+                                <a:schemeClr val="tx1"/>
+                              </a:solidFill>
+                              <a:latin typeface="Cambria Math" panose="02040503050406030204" pitchFamily="18" charset="0"/>
+                              <a:ea typeface="+mn-ea"/>
+                              <a:cs typeface="+mn-cs"/>
+                            </a:rPr>
+                            <m:t>𝐴𝑢𝑡𝑢𝑚𝑛</m:t>
+                          </m:r>
+                          <m:r>
+                            <a:rPr lang="en-NL" sz="1400" i="0" kern="1200">
+                              <a:solidFill>
+                                <a:schemeClr val="tx1"/>
+                              </a:solidFill>
+                              <a:latin typeface="Cambria Math" panose="02040503050406030204" pitchFamily="18" charset="0"/>
+                              <a:ea typeface="+mn-ea"/>
+                              <a:cs typeface="+mn-cs"/>
+                            </a:rPr>
+                            <m:t>+</m:t>
+                          </m:r>
+                          <m:sSub>
+                            <m:sSubPr>
+                              <m:ctrlPr>
+                                <a:rPr lang="en-NL" sz="1400" i="1" kern="1200">
+                                  <a:solidFill>
+                                    <a:schemeClr val="tx1"/>
+                                  </a:solidFill>
+                                  <a:latin typeface="Cambria Math" panose="02040503050406030204" pitchFamily="18" charset="0"/>
+                                  <a:ea typeface="+mn-ea"/>
+                                  <a:cs typeface="+mn-cs"/>
+                                </a:rPr>
+                              </m:ctrlPr>
+                            </m:sSubPr>
+                            <m:e>
+                              <m:r>
+                                <a:rPr lang="en-NL" sz="1400" i="1" kern="1200">
+                                  <a:solidFill>
+                                    <a:schemeClr val="tx1"/>
+                                  </a:solidFill>
+                                  <a:latin typeface="Cambria Math" panose="02040503050406030204" pitchFamily="18" charset="0"/>
+                                  <a:ea typeface="+mn-ea"/>
+                                  <a:cs typeface="+mn-cs"/>
+                                </a:rPr>
+                                <m:t>𝛾</m:t>
+                              </m:r>
+                            </m:e>
+                            <m:sub>
+                              <m:r>
+                                <a:rPr lang="en-NL" sz="1400" i="0" kern="1200">
+                                  <a:solidFill>
+                                    <a:schemeClr val="tx1"/>
+                                  </a:solidFill>
+                                  <a:latin typeface="Cambria Math" panose="02040503050406030204" pitchFamily="18" charset="0"/>
+                                  <a:ea typeface="+mn-ea"/>
+                                  <a:cs typeface="+mn-cs"/>
+                                </a:rPr>
+                                <m:t>2</m:t>
+                              </m:r>
+                            </m:sub>
+                          </m:sSub>
+                          <m:r>
+                            <a:rPr lang="en-NL" sz="1400" i="1" kern="1200">
+                              <a:solidFill>
+                                <a:schemeClr val="tx1"/>
+                              </a:solidFill>
+                              <a:latin typeface="Cambria Math" panose="02040503050406030204" pitchFamily="18" charset="0"/>
+                              <a:ea typeface="+mn-ea"/>
+                              <a:cs typeface="+mn-cs"/>
+                            </a:rPr>
+                            <m:t>𝐻𝑜𝑟𝑖𝑧𝑜</m:t>
+                          </m:r>
+                          <m:sSub>
+                            <m:sSubPr>
+                              <m:ctrlPr>
+                                <a:rPr lang="en-NL" sz="1400" i="1" kern="1200">
+                                  <a:solidFill>
+                                    <a:schemeClr val="tx1"/>
+                                  </a:solidFill>
+                                  <a:latin typeface="Cambria Math" panose="02040503050406030204" pitchFamily="18" charset="0"/>
+                                  <a:ea typeface="+mn-ea"/>
+                                  <a:cs typeface="+mn-cs"/>
+                                </a:rPr>
+                              </m:ctrlPr>
+                            </m:sSubPr>
+                            <m:e>
+                              <m:r>
+                                <a:rPr lang="en-NL" sz="1400" i="1" kern="1200">
+                                  <a:solidFill>
+                                    <a:schemeClr val="tx1"/>
+                                  </a:solidFill>
+                                  <a:latin typeface="Cambria Math" panose="02040503050406030204" pitchFamily="18" charset="0"/>
+                                  <a:ea typeface="+mn-ea"/>
+                                  <a:cs typeface="+mn-cs"/>
+                                </a:rPr>
+                                <m:t>𝑛</m:t>
+                              </m:r>
+                            </m:e>
+                            <m:sub>
+                              <m:r>
+                                <a:rPr lang="en-NL" sz="1400" i="1" kern="1200">
+                                  <a:solidFill>
+                                    <a:schemeClr val="tx1"/>
+                                  </a:solidFill>
+                                  <a:latin typeface="Cambria Math" panose="02040503050406030204" pitchFamily="18" charset="0"/>
+                                  <a:ea typeface="+mn-ea"/>
+                                  <a:cs typeface="+mn-cs"/>
+                                </a:rPr>
+                                <m:t>𝑡</m:t>
+                              </m:r>
+                              <m:r>
+                                <a:rPr lang="en-NL" sz="1400" i="0" kern="1200">
+                                  <a:solidFill>
+                                    <a:schemeClr val="tx1"/>
+                                  </a:solidFill>
+                                  <a:latin typeface="Cambria Math" panose="02040503050406030204" pitchFamily="18" charset="0"/>
+                                  <a:ea typeface="+mn-ea"/>
+                                  <a:cs typeface="+mn-cs"/>
+                                </a:rPr>
+                                <m:t>+1</m:t>
+                              </m:r>
+                            </m:sub>
+                          </m:sSub>
+                          <m:r>
+                            <a:rPr lang="en-NL" sz="1400" i="0" kern="1200">
+                              <a:solidFill>
+                                <a:schemeClr val="tx1"/>
+                              </a:solidFill>
+                              <a:latin typeface="Cambria Math" panose="02040503050406030204" pitchFamily="18" charset="0"/>
+                              <a:ea typeface="+mn-ea"/>
+                              <a:cs typeface="+mn-cs"/>
+                            </a:rPr>
+                            <m:t>+</m:t>
+                          </m:r>
+                          <m:r>
+                            <m:rPr>
+                              <m:nor/>
+                            </m:rPr>
+                            <a:rPr lang="en-NL" sz="1400" b="0" i="0" kern="1200">
+                              <a:solidFill>
+                                <a:schemeClr val="tx1"/>
+                              </a:solidFill>
+                              <a:latin typeface="+mn-lt"/>
+                              <a:ea typeface="+mn-ea"/>
+                              <a:cs typeface="+mn-cs"/>
+                            </a:rPr>
+                            <m:t>controls</m:t>
+                          </m:r>
+                        </m:e>
+                      </m:d>
+                    </m:oMath>
+                  </m:oMathPara>
+                </a14:m>
+                <a:endParaRPr lang="en-NL" sz="1400" b="0" dirty="0"/>
+              </a:p>
+              <a:p>
+                <a:pPr lvl="0" fontAlgn="t"/>
+                <a14:m>
+                  <m:oMath xmlns:m="http://schemas.openxmlformats.org/officeDocument/2006/math">
+                    <m:r>
+                      <a:rPr lang="en-NL" sz="1400" i="1" kern="1200">
+                        <a:solidFill>
+                          <a:schemeClr val="tx1"/>
+                        </a:solidFill>
+                        <a:latin typeface="Cambria Math" panose="02040503050406030204" pitchFamily="18" charset="0"/>
+                        <a:ea typeface="+mn-ea"/>
+                        <a:cs typeface="+mn-cs"/>
+                      </a:rPr>
+                      <m:t>𝐴𝑢𝑡𝑢𝑚𝑛</m:t>
+                    </m:r>
+                    <m:r>
+                      <a:rPr lang="en-NL" sz="1400" i="0" kern="1200">
+                        <a:solidFill>
+                          <a:schemeClr val="tx1"/>
+                        </a:solidFill>
+                        <a:latin typeface="Cambria Math" panose="02040503050406030204" pitchFamily="18" charset="0"/>
+                        <a:ea typeface="+mn-ea"/>
+                        <a:cs typeface="+mn-cs"/>
+                      </a:rPr>
+                      <m:t>=1</m:t>
+                    </m:r>
+                  </m:oMath>
+                </a14:m>
+                <a:r>
+                  <a:rPr lang="en-NL" sz="1400" b="0" i="0" kern="1200" dirty="0">
+                    <a:solidFill>
+                      <a:schemeClr val="tx1"/>
+                    </a:solidFill>
+                    <a:effectLst/>
+                    <a:latin typeface="+mn-lt"/>
+                    <a:ea typeface="+mn-ea"/>
+                    <a:cs typeface="+mn-cs"/>
+                  </a:rPr>
+                  <a:t>for Autumn forecasts</a:t>
+                </a:r>
+                <a:r>
+                  <a:rPr lang="en-US" sz="1400" b="0" i="0" kern="1200" dirty="0">
+                    <a:solidFill>
+                      <a:schemeClr val="tx1"/>
+                    </a:solidFill>
+                    <a:effectLst/>
+                    <a:latin typeface="+mn-lt"/>
+                    <a:ea typeface="+mn-ea"/>
+                    <a:cs typeface="+mn-cs"/>
+                  </a:rPr>
+                  <a:t> // </a:t>
+                </a:r>
+                <a14:m>
+                  <m:oMath xmlns:m="http://schemas.openxmlformats.org/officeDocument/2006/math">
+                    <m:r>
+                      <a:rPr lang="en-NL" sz="1400" i="1" kern="1200">
+                        <a:solidFill>
+                          <a:schemeClr val="tx1"/>
+                        </a:solidFill>
+                        <a:latin typeface="Cambria Math" panose="02040503050406030204" pitchFamily="18" charset="0"/>
+                        <a:ea typeface="+mn-ea"/>
+                        <a:cs typeface="+mn-cs"/>
+                      </a:rPr>
+                      <m:t>𝐻𝑜𝑟𝑖𝑧𝑜</m:t>
+                    </m:r>
+                    <m:sSub>
+                      <m:sSubPr>
+                        <m:ctrlPr>
+                          <a:rPr lang="en-NL" sz="1400" i="1" kern="1200">
+                            <a:solidFill>
+                              <a:schemeClr val="tx1"/>
+                            </a:solidFill>
+                            <a:latin typeface="Cambria Math" panose="02040503050406030204" pitchFamily="18" charset="0"/>
+                            <a:ea typeface="+mn-ea"/>
+                            <a:cs typeface="+mn-cs"/>
+                          </a:rPr>
+                        </m:ctrlPr>
+                      </m:sSubPr>
+                      <m:e>
+                        <m:r>
+                          <a:rPr lang="en-NL" sz="1400" i="1" kern="1200">
+                            <a:solidFill>
+                              <a:schemeClr val="tx1"/>
+                            </a:solidFill>
+                            <a:latin typeface="Cambria Math" panose="02040503050406030204" pitchFamily="18" charset="0"/>
+                            <a:ea typeface="+mn-ea"/>
+                            <a:cs typeface="+mn-cs"/>
+                          </a:rPr>
+                          <m:t>𝑛</m:t>
+                        </m:r>
+                      </m:e>
+                      <m:sub>
+                        <m:r>
+                          <a:rPr lang="en-NL" sz="1400" i="1" kern="1200">
+                            <a:solidFill>
+                              <a:schemeClr val="tx1"/>
+                            </a:solidFill>
+                            <a:latin typeface="Cambria Math" panose="02040503050406030204" pitchFamily="18" charset="0"/>
+                            <a:ea typeface="+mn-ea"/>
+                            <a:cs typeface="+mn-cs"/>
+                          </a:rPr>
+                          <m:t>𝑡</m:t>
+                        </m:r>
+                        <m:r>
+                          <a:rPr lang="en-NL" sz="1400" i="0" kern="1200">
+                            <a:solidFill>
+                              <a:schemeClr val="tx1"/>
+                            </a:solidFill>
+                            <a:latin typeface="Cambria Math" panose="02040503050406030204" pitchFamily="18" charset="0"/>
+                            <a:ea typeface="+mn-ea"/>
+                            <a:cs typeface="+mn-cs"/>
+                          </a:rPr>
+                          <m:t>+1</m:t>
+                        </m:r>
+                      </m:sub>
+                    </m:sSub>
+                    <m:r>
+                      <a:rPr lang="en-NL" sz="1400" i="0" kern="1200">
+                        <a:solidFill>
+                          <a:schemeClr val="tx1"/>
+                        </a:solidFill>
+                        <a:latin typeface="Cambria Math" panose="02040503050406030204" pitchFamily="18" charset="0"/>
+                        <a:ea typeface="+mn-ea"/>
+                        <a:cs typeface="+mn-cs"/>
+                      </a:rPr>
+                      <m:t>=1</m:t>
+                    </m:r>
+                  </m:oMath>
+                </a14:m>
+                <a:r>
+                  <a:rPr lang="en-NL" sz="1400" b="0" i="0" kern="1200" dirty="0">
+                    <a:solidFill>
+                      <a:schemeClr val="tx1"/>
+                    </a:solidFill>
+                    <a:effectLst/>
+                    <a:latin typeface="+mn-lt"/>
+                    <a:ea typeface="+mn-ea"/>
+                    <a:cs typeface="+mn-cs"/>
+                  </a:rPr>
+                  <a:t>for next-year forecasts</a:t>
+                </a:r>
+              </a:p>
+              <a:p>
+                <a:pPr marL="0" marR="0" lvl="0" indent="0" algn="l" defTabSz="914400" rtl="0" eaLnBrk="1" fontAlgn="t" latinLnBrk="0" hangingPunct="1">
+                  <a:lnSpc>
+                    <a:spcPct val="100000"/>
+                  </a:lnSpc>
+                  <a:spcBef>
+                    <a:spcPts val="0"/>
+                  </a:spcBef>
+                  <a:spcAft>
+                    <a:spcPts val="0"/>
+                  </a:spcAft>
+                  <a:buClrTx/>
+                  <a:buSzTx/>
+                  <a:buFontTx/>
+                  <a:buNone/>
+                  <a:tabLst/>
+                  <a:defRPr/>
+                </a:pPr>
+                <a:r>
+                  <a:rPr lang="en-US" sz="1400" b="0" i="0" kern="1200" dirty="0">
+                    <a:solidFill>
+                      <a:schemeClr val="tx1"/>
+                    </a:solidFill>
+                    <a:effectLst/>
+                    <a:latin typeface="+mn-lt"/>
+                    <a:ea typeface="+mn-ea"/>
+                    <a:cs typeface="+mn-cs"/>
+                  </a:rPr>
+                  <a:t>….. t</a:t>
+                </a:r>
+                <a:r>
+                  <a:rPr lang="en-NL" sz="1400" b="0" i="0" kern="1200" dirty="0">
+                    <a:solidFill>
+                      <a:schemeClr val="tx1"/>
+                    </a:solidFill>
+                    <a:effectLst/>
+                    <a:latin typeface="+mn-lt"/>
+                    <a:ea typeface="+mn-ea"/>
+                    <a:cs typeface="+mn-cs"/>
+                  </a:rPr>
+                  <a:t>his removes systematic differences between forecast types</a:t>
+                </a:r>
+                <a:r>
+                  <a:rPr lang="en-US" sz="1400" b="0" i="0" kern="1200" dirty="0">
+                    <a:solidFill>
+                      <a:schemeClr val="tx1"/>
+                    </a:solidFill>
+                    <a:effectLst/>
+                    <a:latin typeface="+mn-lt"/>
+                    <a:ea typeface="+mn-ea"/>
+                    <a:cs typeface="+mn-cs"/>
+                  </a:rPr>
+                  <a:t> //  </a:t>
+                </a:r>
+                <a:r>
+                  <a:rPr lang="en-NL" sz="1400" b="0" i="0" kern="1200" dirty="0">
+                    <a:solidFill>
+                      <a:schemeClr val="tx1"/>
+                    </a:solidFill>
+                    <a:effectLst/>
+                    <a:latin typeface="+mn-lt"/>
+                    <a:ea typeface="+mn-ea"/>
+                    <a:cs typeface="+mn-cs"/>
+                  </a:rPr>
+                  <a:t>vintage controls absorb average differences in forecasting difficulty and information availability across forecast types</a:t>
+                </a:r>
+                <a:r>
+                  <a:rPr lang="en-US" sz="1400" b="0" i="0" kern="1200" dirty="0">
+                    <a:solidFill>
+                      <a:schemeClr val="tx1"/>
+                    </a:solidFill>
+                    <a:effectLst/>
+                    <a:latin typeface="+mn-lt"/>
+                    <a:ea typeface="+mn-ea"/>
+                    <a:cs typeface="+mn-cs"/>
+                  </a:rPr>
+                  <a:t> =&gt; controls </a:t>
+                </a:r>
+                <a:r>
+                  <a:rPr lang="en-NL" sz="1400" b="0" i="0" kern="1200" dirty="0">
+                    <a:solidFill>
+                      <a:schemeClr val="tx1"/>
+                    </a:solidFill>
+                    <a:effectLst/>
+                    <a:latin typeface="+mn-lt"/>
+                    <a:ea typeface="+mn-ea"/>
+                    <a:cs typeface="+mn-cs"/>
+                  </a:rPr>
+                  <a:t>capture the average difference between Spring </a:t>
+                </a:r>
+                <a:r>
+                  <a:rPr lang="en-US" sz="1400" b="0" i="0" kern="1200" dirty="0">
+                    <a:solidFill>
+                      <a:schemeClr val="tx1"/>
+                    </a:solidFill>
+                    <a:effectLst/>
+                    <a:latin typeface="+mn-lt"/>
+                    <a:ea typeface="+mn-ea"/>
+                    <a:cs typeface="+mn-cs"/>
+                  </a:rPr>
+                  <a:t>&amp;</a:t>
+                </a:r>
+                <a:r>
+                  <a:rPr lang="en-NL" sz="1400" b="0" i="0" kern="1200" dirty="0">
+                    <a:solidFill>
+                      <a:schemeClr val="tx1"/>
+                    </a:solidFill>
+                    <a:effectLst/>
+                    <a:latin typeface="+mn-lt"/>
+                    <a:ea typeface="+mn-ea"/>
+                    <a:cs typeface="+mn-cs"/>
+                  </a:rPr>
+                  <a:t> Autumn forecasts, holding AI constant</a:t>
+                </a:r>
+              </a:p>
+              <a:p>
+                <a:pPr marL="0" marR="0" lvl="0" indent="0" algn="l" defTabSz="914400" rtl="0" eaLnBrk="1" fontAlgn="t" latinLnBrk="0" hangingPunct="1">
+                  <a:lnSpc>
+                    <a:spcPct val="100000"/>
+                  </a:lnSpc>
+                  <a:spcBef>
+                    <a:spcPts val="0"/>
+                  </a:spcBef>
+                  <a:spcAft>
+                    <a:spcPts val="0"/>
+                  </a:spcAft>
+                  <a:buClrTx/>
+                  <a:buSzTx/>
+                  <a:buFontTx/>
+                  <a:buNone/>
+                  <a:tabLst/>
+                  <a:defRPr/>
+                </a:pPr>
+                <a:r>
+                  <a:rPr lang="en-US" sz="1400" b="0" i="0" kern="1200" dirty="0">
+                    <a:solidFill>
+                      <a:schemeClr val="tx1"/>
+                    </a:solidFill>
+                    <a:effectLst/>
+                    <a:latin typeface="+mn-lt"/>
+                    <a:ea typeface="+mn-ea"/>
+                    <a:cs typeface="+mn-cs"/>
+                  </a:rPr>
+                  <a:t>(w</a:t>
+                </a:r>
+                <a:r>
+                  <a:rPr lang="en-NL" sz="1400" b="0" i="0" kern="1200" dirty="0" err="1">
+                    <a:solidFill>
+                      <a:schemeClr val="tx1"/>
+                    </a:solidFill>
+                    <a:effectLst/>
+                    <a:latin typeface="+mn-lt"/>
+                    <a:ea typeface="+mn-ea"/>
+                    <a:cs typeface="+mn-cs"/>
+                  </a:rPr>
+                  <a:t>ithout</a:t>
+                </a:r>
+                <a:r>
+                  <a:rPr lang="en-NL" sz="1400" b="0" i="0" kern="1200" dirty="0">
+                    <a:solidFill>
+                      <a:schemeClr val="tx1"/>
+                    </a:solidFill>
+                    <a:effectLst/>
+                    <a:latin typeface="+mn-lt"/>
+                    <a:ea typeface="+mn-ea"/>
+                    <a:cs typeface="+mn-cs"/>
+                  </a:rPr>
+                  <a:t> controls, </a:t>
+                </a:r>
+                <a:r>
+                  <a:rPr lang="en-US" sz="1400" b="0" i="0" kern="1200" dirty="0">
+                    <a:solidFill>
+                      <a:schemeClr val="tx1"/>
+                    </a:solidFill>
+                    <a:effectLst/>
+                    <a:latin typeface="+mn-lt"/>
+                    <a:ea typeface="+mn-ea"/>
+                    <a:cs typeface="+mn-cs"/>
+                  </a:rPr>
+                  <a:t>for instance, the</a:t>
+                </a:r>
+                <a:r>
+                  <a:rPr lang="en-NL" sz="1400" b="0" i="0" kern="1200" dirty="0">
+                    <a:solidFill>
+                      <a:schemeClr val="tx1"/>
+                    </a:solidFill>
+                    <a:effectLst/>
+                    <a:latin typeface="+mn-lt"/>
+                    <a:ea typeface="+mn-ea"/>
+                    <a:cs typeface="+mn-cs"/>
+                  </a:rPr>
+                  <a:t> AI coefficient is </a:t>
+                </a:r>
+                <a:r>
+                  <a:rPr lang="en-US" sz="1400" b="0" i="0" kern="1200" dirty="0">
+                    <a:solidFill>
+                      <a:schemeClr val="tx1"/>
+                    </a:solidFill>
+                    <a:effectLst/>
+                    <a:latin typeface="+mn-lt"/>
+                    <a:ea typeface="+mn-ea"/>
+                    <a:cs typeface="+mn-cs"/>
+                  </a:rPr>
+                  <a:t>also </a:t>
+                </a:r>
+                <a:r>
+                  <a:rPr lang="en-NL" sz="1400" b="0" i="0" kern="1200" dirty="0">
+                    <a:solidFill>
+                      <a:schemeClr val="tx1"/>
+                    </a:solidFill>
+                    <a:effectLst/>
+                    <a:latin typeface="+mn-lt"/>
+                    <a:ea typeface="+mn-ea"/>
+                    <a:cs typeface="+mn-cs"/>
+                  </a:rPr>
+                  <a:t>estimated</a:t>
+                </a:r>
+                <a:r>
+                  <a:rPr lang="en-US" sz="1400" b="0" i="0" kern="1200" dirty="0">
+                    <a:solidFill>
+                      <a:schemeClr val="tx1"/>
+                    </a:solidFill>
+                    <a:effectLst/>
+                    <a:latin typeface="+mn-lt"/>
+                    <a:ea typeface="+mn-ea"/>
+                    <a:cs typeface="+mn-cs"/>
+                  </a:rPr>
+                  <a:t> </a:t>
+                </a:r>
+                <a:r>
+                  <a:rPr lang="en-NL" sz="1400" b="0" i="0" kern="1200" dirty="0">
+                    <a:solidFill>
+                      <a:schemeClr val="tx1"/>
+                    </a:solidFill>
+                    <a:effectLst/>
+                    <a:latin typeface="+mn-lt"/>
+                    <a:ea typeface="+mn-ea"/>
+                    <a:cs typeface="+mn-cs"/>
+                  </a:rPr>
+                  <a:t>from variation in</a:t>
+                </a:r>
+                <a:r>
+                  <a:rPr lang="en-US" sz="1400" b="0" i="0" kern="1200" dirty="0">
+                    <a:solidFill>
+                      <a:schemeClr val="tx1"/>
+                    </a:solidFill>
+                    <a:effectLst/>
+                    <a:latin typeface="+mn-lt"/>
+                    <a:ea typeface="+mn-ea"/>
+                    <a:cs typeface="+mn-cs"/>
+                  </a:rPr>
+                  <a:t> type of forecast)</a:t>
+                </a:r>
+                <a:endParaRPr lang="en-NL" sz="1400" b="0" i="0" kern="1200" dirty="0">
+                  <a:solidFill>
+                    <a:schemeClr val="tx1"/>
+                  </a:solidFill>
+                  <a:effectLst/>
+                  <a:latin typeface="+mn-lt"/>
+                  <a:ea typeface="+mn-ea"/>
+                  <a:cs typeface="+mn-cs"/>
+                </a:endParaRPr>
+              </a:p>
+              <a:p>
+                <a:pPr fontAlgn="t"/>
+                <a:r>
+                  <a:rPr lang="en-NL" sz="1400" dirty="0"/>
+                  <a:t>Suppose </a:t>
+                </a:r>
+                <a:r>
+                  <a:rPr lang="en-US" sz="1400" dirty="0"/>
+                  <a:t>that t+1 </a:t>
+                </a:r>
+                <a:r>
+                  <a:rPr lang="en-NL" sz="1400" dirty="0"/>
+                  <a:t>forecasts have more </a:t>
+                </a:r>
+                <a:r>
+                  <a:rPr lang="en-US" sz="1400" dirty="0"/>
+                  <a:t>positive</a:t>
+                </a:r>
+                <a:r>
+                  <a:rPr lang="en-NL" sz="1400" dirty="0"/>
+                  <a:t> surprises because they are harder to predict.</a:t>
+                </a:r>
+                <a:r>
+                  <a:rPr lang="en-US" sz="1400" dirty="0"/>
+                  <a:t> </a:t>
+                </a:r>
+                <a:r>
+                  <a:rPr lang="en-NL" sz="1400" dirty="0"/>
+                  <a:t>Then</a:t>
+                </a:r>
+                <a:r>
+                  <a:rPr lang="en-US" sz="1400" dirty="0"/>
+                  <a:t>: </a:t>
+                </a:r>
+                <a14:m>
+                  <m:oMath xmlns:m="http://schemas.openxmlformats.org/officeDocument/2006/math">
+                    <m:r>
+                      <a:rPr lang="en-US" sz="1400" b="0" i="0" smtClean="0">
+                        <a:latin typeface="Cambria Math" panose="02040503050406030204" pitchFamily="18" charset="0"/>
+                      </a:rPr>
+                      <m:t> </m:t>
+                    </m:r>
+                    <m:sSub>
+                      <m:sSubPr>
+                        <m:ctrlPr>
+                          <a:rPr lang="en-NL" sz="1400" i="1">
+                            <a:latin typeface="Cambria Math" panose="02040503050406030204" pitchFamily="18" charset="0"/>
+                          </a:rPr>
+                        </m:ctrlPr>
+                      </m:sSubPr>
+                      <m:e>
+                        <m:r>
+                          <a:rPr lang="en-NL" sz="1400" i="1">
+                            <a:latin typeface="Cambria Math" panose="02040503050406030204" pitchFamily="18" charset="0"/>
+                          </a:rPr>
+                          <m:t>𝛾</m:t>
+                        </m:r>
+                      </m:e>
+                      <m:sub>
+                        <m:r>
+                          <a:rPr lang="en-NL" sz="1400">
+                            <a:latin typeface="Cambria Math" panose="02040503050406030204" pitchFamily="18" charset="0"/>
+                          </a:rPr>
+                          <m:t>2</m:t>
+                        </m:r>
+                      </m:sub>
+                    </m:sSub>
+                    <m:r>
+                      <a:rPr lang="en-NL" sz="1400">
+                        <a:latin typeface="Cambria Math" panose="02040503050406030204" pitchFamily="18" charset="0"/>
+                      </a:rPr>
+                      <m:t>&lt;0</m:t>
+                    </m:r>
+                  </m:oMath>
+                </a14:m>
+                <a:r>
+                  <a:rPr lang="en-US" sz="1400" dirty="0"/>
+                  <a:t>    </a:t>
+                </a:r>
+                <a:r>
+                  <a:rPr lang="en-NL" sz="1400" dirty="0"/>
+                  <a:t>will absorb that systematic shift</a:t>
+                </a:r>
+                <a:r>
+                  <a:rPr lang="en-US" sz="1400" dirty="0"/>
+                  <a:t>.</a:t>
+                </a:r>
+              </a:p>
+              <a:p>
+                <a:pPr fontAlgn="t"/>
+                <a:r>
+                  <a:rPr lang="en-US" dirty="0"/>
+                  <a:t>Then you estimate </a:t>
+                </a:r>
+                <a:r>
+                  <a:rPr lang="en-NL" dirty="0"/>
+                  <a:t>how AI dependence </a:t>
+                </a:r>
+                <a:r>
+                  <a:rPr lang="en-US" dirty="0"/>
+                  <a:t>IS </a:t>
+                </a:r>
+                <a:r>
+                  <a:rPr lang="en-NL" dirty="0"/>
+                  <a:t>associated with probability of a positive GDP growth surprise</a:t>
+                </a:r>
+                <a:r>
+                  <a:rPr lang="en-US" dirty="0"/>
+                  <a:t>, </a:t>
+                </a:r>
+                <a:r>
+                  <a:rPr lang="en-NL" dirty="0"/>
+                  <a:t>Holding constant whether the forecast is Spring or Autumn and whether it refers to year </a:t>
+                </a:r>
+                <a14:m>
+                  <m:oMath xmlns:m="http://schemas.openxmlformats.org/officeDocument/2006/math">
+                    <m:r>
+                      <a:rPr lang="en-NL" i="1">
+                        <a:latin typeface="Cambria Math" panose="02040503050406030204" pitchFamily="18" charset="0"/>
+                      </a:rPr>
+                      <m:t>𝑡</m:t>
+                    </m:r>
+                  </m:oMath>
+                </a14:m>
+                <a:r>
+                  <a:rPr lang="en-NL" dirty="0"/>
+                  <a:t>or </a:t>
+                </a:r>
+                <a14:m>
+                  <m:oMath xmlns:m="http://schemas.openxmlformats.org/officeDocument/2006/math">
+                    <m:r>
+                      <a:rPr lang="en-NL" i="1">
+                        <a:latin typeface="Cambria Math" panose="02040503050406030204" pitchFamily="18" charset="0"/>
+                      </a:rPr>
+                      <m:t>𝑡</m:t>
+                    </m:r>
+                    <m:r>
+                      <a:rPr lang="en-NL">
+                        <a:latin typeface="Cambria Math" panose="02040503050406030204" pitchFamily="18" charset="0"/>
+                      </a:rPr>
+                      <m:t>+</m:t>
+                    </m:r>
+                    <m:r>
+                      <a:rPr lang="en-US" b="0" i="0" smtClean="0">
+                        <a:latin typeface="Cambria Math" panose="02040503050406030204" pitchFamily="18" charset="0"/>
+                      </a:rPr>
+                      <m:t>1</m:t>
+                    </m:r>
+                  </m:oMath>
+                </a14:m>
+                <a:endParaRPr lang="en-NL" dirty="0"/>
+              </a:p>
+              <a:p>
+                <a:pPr fontAlgn="t"/>
+                <a:endParaRPr lang="en-NL" sz="1200" b="0" i="0" kern="1200" dirty="0">
+                  <a:solidFill>
+                    <a:schemeClr val="tx1"/>
+                  </a:solidFill>
+                  <a:effectLst/>
+                  <a:latin typeface="+mn-lt"/>
+                  <a:ea typeface="+mn-ea"/>
+                  <a:cs typeface="+mn-cs"/>
+                </a:endParaRPr>
+              </a:p>
+              <a:p>
+                <a:pPr marL="0" indent="0">
+                  <a:buFontTx/>
+                  <a:buNone/>
+                </a:pPr>
+                <a:endParaRPr lang="nl-NL" i="0" baseline="0" dirty="0"/>
+              </a:p>
+            </p:txBody>
+          </p:sp>
+        </mc:Choice>
+        <mc:Fallback xmlns="">
+          <p:sp>
+            <p:nvSpPr>
+              <p:cNvPr id="3" name="Tijdelijke aanduiding voor notities 2">
+                <a:extLst>
+                  <a:ext uri="{FF2B5EF4-FFF2-40B4-BE49-F238E27FC236}">
+                    <a16:creationId xmlns:a16="http://schemas.microsoft.com/office/drawing/2014/main" id="{A6DA90D2-1A07-3CDD-DC37-B10D687FEBF4}"/>
+                  </a:ext>
+                </a:extLst>
+              </p:cNvPr>
+              <p:cNvSpPr>
+                <a:spLocks noGrp="1"/>
+              </p:cNvSpPr>
+              <p:nvPr>
+                <p:ph type="body" idx="1"/>
+              </p:nvPr>
+            </p:nvSpPr>
+            <p:spPr>
+              <a:xfrm>
+                <a:off x="474921" y="4785598"/>
+                <a:ext cx="5897525" cy="4847500"/>
+              </a:xfrm>
+            </p:spPr>
+            <p:txBody>
+              <a:bodyPr/>
+              <a:lstStyle/>
+              <a:p>
+                <a:pPr marL="0" marR="0" lvl="0" indent="0" algn="l" defTabSz="914400" rtl="0" eaLnBrk="1" fontAlgn="auto" latinLnBrk="0" hangingPunct="1">
+                  <a:lnSpc>
+                    <a:spcPct val="100000"/>
+                  </a:lnSpc>
+                  <a:spcBef>
+                    <a:spcPts val="0"/>
+                  </a:spcBef>
+                  <a:spcAft>
+                    <a:spcPts val="0"/>
+                  </a:spcAft>
+                  <a:buClrTx/>
+                  <a:buSzTx/>
+                  <a:buFontTx/>
+                  <a:buNone/>
+                  <a:tabLst/>
+                  <a:defRPr/>
+                </a:pPr>
+                <a:r>
+                  <a:rPr lang="en-US" sz="1400" b="0" i="0" kern="1200" dirty="0">
+                    <a:solidFill>
+                      <a:schemeClr val="tx1"/>
+                    </a:solidFill>
+                    <a:effectLst/>
+                    <a:latin typeface="+mn-lt"/>
+                    <a:ea typeface="+mn-ea"/>
+                    <a:cs typeface="+mn-cs"/>
+                  </a:rPr>
+                  <a:t>We pool the GDP growth realizations in year t &amp;  t+1 and Spring &amp;  Autumn forecasts. Advantage of </a:t>
+                </a:r>
+                <a:r>
+                  <a:rPr lang="en-NL" sz="1400" b="0" i="0" kern="1200" dirty="0">
+                    <a:solidFill>
+                      <a:schemeClr val="tx1"/>
+                    </a:solidFill>
+                    <a:effectLst/>
+                    <a:latin typeface="+mn-lt"/>
+                    <a:ea typeface="+mn-ea"/>
+                    <a:cs typeface="+mn-cs"/>
+                  </a:rPr>
+                  <a:t>pooling: it increases sample size and treats all forecasts as observations on the same forecasting problem.</a:t>
+                </a:r>
+                <a:r>
+                  <a:rPr lang="en-US" sz="1400" b="0" i="0" kern="1200" dirty="0">
+                    <a:solidFill>
+                      <a:schemeClr val="tx1"/>
+                    </a:solidFill>
+                    <a:effectLst/>
+                    <a:latin typeface="+mn-lt"/>
+                    <a:ea typeface="+mn-ea"/>
+                    <a:cs typeface="+mn-cs"/>
+                  </a:rPr>
+                  <a:t> </a:t>
+                </a:r>
+              </a:p>
+              <a:p>
+                <a:pPr marL="0" marR="0" lvl="0" indent="0" algn="l" defTabSz="914400" rtl="0" eaLnBrk="1" fontAlgn="auto" latinLnBrk="0" hangingPunct="1">
+                  <a:lnSpc>
+                    <a:spcPct val="100000"/>
+                  </a:lnSpc>
+                  <a:spcBef>
+                    <a:spcPts val="0"/>
+                  </a:spcBef>
+                  <a:spcAft>
+                    <a:spcPts val="0"/>
+                  </a:spcAft>
+                  <a:buClrTx/>
+                  <a:buSzTx/>
+                  <a:buFontTx/>
+                  <a:buNone/>
+                  <a:tabLst/>
+                  <a:defRPr/>
+                </a:pPr>
+                <a:endParaRPr lang="en-US" sz="1400" b="0" i="0" kern="1200" dirty="0">
+                  <a:solidFill>
+                    <a:schemeClr val="tx1"/>
+                  </a:solidFill>
+                  <a:effectLst/>
+                  <a:latin typeface="+mn-lt"/>
+                  <a:ea typeface="+mn-ea"/>
+                  <a:cs typeface="+mn-cs"/>
+                </a:endParaRPr>
+              </a:p>
+              <a:p>
+                <a:pPr marL="0" marR="0" lvl="0" indent="0" algn="l" defTabSz="914400" rtl="0" eaLnBrk="1" fontAlgn="auto" latinLnBrk="0" hangingPunct="1">
+                  <a:lnSpc>
+                    <a:spcPct val="100000"/>
+                  </a:lnSpc>
+                  <a:spcBef>
+                    <a:spcPts val="0"/>
+                  </a:spcBef>
+                  <a:spcAft>
+                    <a:spcPts val="0"/>
+                  </a:spcAft>
+                  <a:buClrTx/>
+                  <a:buSzTx/>
+                  <a:buFontTx/>
+                  <a:buNone/>
+                  <a:tabLst/>
+                  <a:defRPr/>
+                </a:pPr>
+                <a:r>
+                  <a:rPr lang="en-US" sz="1400" b="0" i="0" kern="1200" dirty="0">
+                    <a:solidFill>
+                      <a:schemeClr val="tx1"/>
+                    </a:solidFill>
+                    <a:effectLst/>
+                    <a:latin typeface="+mn-lt"/>
+                    <a:ea typeface="+mn-ea"/>
+                    <a:cs typeface="+mn-cs"/>
+                  </a:rPr>
+                  <a:t>However, </a:t>
+                </a:r>
+                <a:r>
+                  <a:rPr lang="en-NL" sz="1400" b="0" i="0" kern="1200" dirty="0">
+                    <a:solidFill>
+                      <a:schemeClr val="tx1"/>
+                    </a:solidFill>
+                    <a:effectLst/>
+                    <a:latin typeface="+mn-lt"/>
+                    <a:ea typeface="+mn-ea"/>
+                    <a:cs typeface="+mn-cs"/>
+                  </a:rPr>
+                  <a:t>surprise</a:t>
+                </a:r>
+                <a:r>
+                  <a:rPr lang="en-US" sz="1400" b="0" i="0" kern="1200" dirty="0">
+                    <a:solidFill>
+                      <a:schemeClr val="tx1"/>
+                    </a:solidFill>
+                    <a:effectLst/>
+                    <a:latin typeface="+mn-lt"/>
+                    <a:ea typeface="+mn-ea"/>
+                    <a:cs typeface="+mn-cs"/>
+                  </a:rPr>
+                  <a:t>s based on </a:t>
+                </a:r>
+                <a:r>
+                  <a:rPr lang="en-NL" sz="1400" b="0" i="0" kern="1200" dirty="0">
+                    <a:solidFill>
+                      <a:schemeClr val="tx1"/>
+                    </a:solidFill>
+                    <a:effectLst/>
+                    <a:latin typeface="+mn-lt"/>
+                    <a:ea typeface="+mn-ea"/>
+                    <a:cs typeface="+mn-cs"/>
+                  </a:rPr>
+                  <a:t>Autumn</a:t>
+                </a:r>
+                <a:r>
+                  <a:rPr lang="en-US" sz="1400" b="0" i="0" kern="1200" dirty="0">
+                    <a:solidFill>
+                      <a:schemeClr val="tx1"/>
+                    </a:solidFill>
+                    <a:effectLst/>
+                    <a:latin typeface="+mn-lt"/>
+                    <a:ea typeface="+mn-ea"/>
+                    <a:cs typeface="+mn-cs"/>
+                  </a:rPr>
+                  <a:t> &amp; Spring</a:t>
+                </a:r>
+                <a:r>
+                  <a:rPr lang="en-US" sz="1400" b="0" i="0" kern="1200" baseline="0" dirty="0">
+                    <a:solidFill>
+                      <a:schemeClr val="tx1"/>
+                    </a:solidFill>
+                    <a:effectLst/>
+                    <a:latin typeface="+mn-lt"/>
+                    <a:ea typeface="+mn-ea"/>
+                    <a:cs typeface="+mn-cs"/>
+                  </a:rPr>
+                  <a:t> </a:t>
+                </a:r>
+                <a:r>
+                  <a:rPr lang="en-NL" sz="1400" b="0" i="0" kern="1200" dirty="0">
+                    <a:solidFill>
+                      <a:schemeClr val="tx1"/>
+                    </a:solidFill>
+                    <a:effectLst/>
+                    <a:latin typeface="+mn-lt"/>
+                    <a:ea typeface="+mn-ea"/>
+                    <a:cs typeface="+mn-cs"/>
+                  </a:rPr>
+                  <a:t>forecast </a:t>
+                </a:r>
+                <a:r>
+                  <a:rPr lang="en-US" sz="1400" b="0" i="0" kern="1200" dirty="0">
+                    <a:solidFill>
+                      <a:schemeClr val="tx1"/>
+                    </a:solidFill>
+                    <a:effectLst/>
+                    <a:latin typeface="+mn-lt"/>
+                    <a:ea typeface="+mn-ea"/>
+                    <a:cs typeface="+mn-cs"/>
+                  </a:rPr>
+                  <a:t>and t </a:t>
+                </a:r>
+                <a:r>
+                  <a:rPr lang="en-US" sz="1400" dirty="0"/>
+                  <a:t>&amp; </a:t>
+                </a:r>
+                <a:r>
+                  <a:rPr lang="en-US" sz="1400" b="0" i="0" kern="1200" dirty="0">
+                    <a:solidFill>
+                      <a:schemeClr val="tx1"/>
+                    </a:solidFill>
+                    <a:effectLst/>
+                    <a:latin typeface="+mn-lt"/>
+                    <a:ea typeface="+mn-ea"/>
+                    <a:cs typeface="+mn-cs"/>
+                  </a:rPr>
+                  <a:t> t+1 are </a:t>
+                </a:r>
+                <a:r>
+                  <a:rPr lang="en-NL" sz="1400" b="0" i="0" kern="1200" dirty="0">
+                    <a:solidFill>
+                      <a:schemeClr val="tx1"/>
+                    </a:solidFill>
+                    <a:effectLst/>
+                    <a:latin typeface="+mn-lt"/>
+                    <a:ea typeface="+mn-ea"/>
+                    <a:cs typeface="+mn-cs"/>
+                  </a:rPr>
+                  <a:t>not directly comparable</a:t>
+                </a:r>
+                <a:r>
+                  <a:rPr lang="en-US" sz="1400" b="0" i="0" kern="1200" dirty="0">
+                    <a:solidFill>
+                      <a:schemeClr val="tx1"/>
+                    </a:solidFill>
+                    <a:effectLst/>
+                    <a:latin typeface="+mn-lt"/>
+                    <a:ea typeface="+mn-ea"/>
+                    <a:cs typeface="+mn-cs"/>
+                  </a:rPr>
+                  <a:t>; for instance uncertainty about t+1 forecast is higher than forecast t and similarly for Spring vs Autumn</a:t>
+                </a:r>
+              </a:p>
+              <a:p>
+                <a:pPr marL="0" marR="0" lvl="0" indent="0" algn="l" defTabSz="914400" rtl="0" eaLnBrk="1" fontAlgn="auto" latinLnBrk="0" hangingPunct="1">
+                  <a:lnSpc>
+                    <a:spcPct val="100000"/>
+                  </a:lnSpc>
+                  <a:spcBef>
+                    <a:spcPts val="0"/>
+                  </a:spcBef>
+                  <a:spcAft>
+                    <a:spcPts val="0"/>
+                  </a:spcAft>
+                  <a:buClrTx/>
+                  <a:buSzTx/>
+                  <a:buFontTx/>
+                  <a:buNone/>
+                  <a:tabLst/>
+                  <a:defRPr/>
+                </a:pPr>
+                <a:endParaRPr lang="en-US" sz="1400" b="0" i="0" kern="1200" dirty="0">
+                  <a:solidFill>
+                    <a:schemeClr val="tx1"/>
+                  </a:solidFill>
+                  <a:effectLst/>
+                  <a:latin typeface="+mn-lt"/>
+                  <a:ea typeface="+mn-ea"/>
+                  <a:cs typeface="+mn-cs"/>
+                </a:endParaRPr>
+              </a:p>
+              <a:p>
+                <a:pPr fontAlgn="t"/>
+                <a:r>
+                  <a:rPr lang="en-US" sz="1400" b="0" i="0" kern="1200" dirty="0">
+                    <a:solidFill>
+                      <a:schemeClr val="tx1"/>
+                    </a:solidFill>
+                    <a:effectLst/>
+                    <a:latin typeface="+mn-lt"/>
+                    <a:ea typeface="+mn-ea"/>
+                    <a:cs typeface="+mn-cs"/>
+                  </a:rPr>
+                  <a:t>Solution</a:t>
+                </a:r>
+                <a:r>
+                  <a:rPr lang="en-US" sz="1400" dirty="0"/>
+                  <a:t> =&gt;</a:t>
+                </a:r>
+                <a:r>
+                  <a:rPr lang="en-US" sz="1400" b="0" i="0" kern="1200" dirty="0">
+                    <a:solidFill>
+                      <a:schemeClr val="tx1"/>
+                    </a:solidFill>
+                    <a:effectLst/>
+                    <a:latin typeface="+mn-lt"/>
+                    <a:ea typeface="+mn-ea"/>
+                    <a:cs typeface="+mn-cs"/>
+                  </a:rPr>
+                  <a:t> </a:t>
+                </a:r>
+                <a:r>
+                  <a:rPr lang="en-NL" sz="1400" b="0" i="0" kern="1200" dirty="0">
+                    <a:solidFill>
+                      <a:schemeClr val="tx1"/>
+                    </a:solidFill>
+                    <a:effectLst/>
+                    <a:latin typeface="+mn-lt"/>
+                    <a:ea typeface="+mn-ea"/>
+                    <a:cs typeface="+mn-cs"/>
+                  </a:rPr>
+                  <a:t>add forecast-vintage controls:</a:t>
+                </a:r>
+              </a:p>
+              <a:p>
+                <a:pPr/>
+                <a:r>
+                  <a:rPr lang="en-NL" sz="1400" i="0" kern="1200">
+                    <a:solidFill>
+                      <a:schemeClr val="tx1"/>
+                    </a:solidFill>
+                    <a:latin typeface="Cambria Math" panose="02040503050406030204" pitchFamily="18" charset="0"/>
+                    <a:ea typeface="+mn-ea"/>
+                    <a:cs typeface="+mn-cs"/>
+                  </a:rPr>
+                  <a:t>𝑃(𝑦=1)=Φ(𝛽_1 𝐴𝐼+𝛽_2 𝐼𝐶𝑇+𝛾_1 𝐴𝑢𝑡𝑢𝑚𝑛+𝛾_2 𝐻𝑜𝑟𝑖𝑧𝑜𝑛_(𝑡+1)+</a:t>
+                </a:r>
+                <a:r>
+                  <a:rPr lang="en-NL" sz="1400" b="0" i="0" kern="1200">
+                    <a:solidFill>
+                      <a:schemeClr val="tx1"/>
+                    </a:solidFill>
+                    <a:latin typeface="+mn-lt"/>
+                    <a:ea typeface="+mn-ea"/>
+                    <a:cs typeface="+mn-cs"/>
+                  </a:rPr>
+                  <a:t>"controls</a:t>
+                </a:r>
+                <a:r>
+                  <a:rPr lang="en-NL" sz="1400" b="0" i="0" kern="1200">
+                    <a:solidFill>
+                      <a:schemeClr val="tx1"/>
+                    </a:solidFill>
+                    <a:latin typeface="Cambria Math" panose="02040503050406030204" pitchFamily="18" charset="0"/>
+                    <a:ea typeface="+mn-ea"/>
+                    <a:cs typeface="+mn-cs"/>
+                  </a:rPr>
+                  <a:t>" )</a:t>
+                </a:r>
+                <a:endParaRPr lang="en-NL" sz="1400" b="0" dirty="0"/>
+              </a:p>
+              <a:p>
+                <a:pPr lvl="0" fontAlgn="t"/>
+                <a:r>
+                  <a:rPr lang="en-NL" sz="1400" i="0" kern="1200">
+                    <a:solidFill>
+                      <a:schemeClr val="tx1"/>
+                    </a:solidFill>
+                    <a:latin typeface="Cambria Math" panose="02040503050406030204" pitchFamily="18" charset="0"/>
+                    <a:ea typeface="+mn-ea"/>
+                    <a:cs typeface="+mn-cs"/>
+                  </a:rPr>
+                  <a:t>𝐴𝑢𝑡𝑢𝑚𝑛=1</a:t>
+                </a:r>
+                <a:r>
+                  <a:rPr lang="en-NL" sz="1400" b="0" i="0" kern="1200" dirty="0">
+                    <a:solidFill>
+                      <a:schemeClr val="tx1"/>
+                    </a:solidFill>
+                    <a:effectLst/>
+                    <a:latin typeface="+mn-lt"/>
+                    <a:ea typeface="+mn-ea"/>
+                    <a:cs typeface="+mn-cs"/>
+                  </a:rPr>
+                  <a:t>for Autumn forecasts</a:t>
+                </a:r>
+                <a:r>
+                  <a:rPr lang="en-US" sz="1400" b="0" i="0" kern="1200" dirty="0">
+                    <a:solidFill>
+                      <a:schemeClr val="tx1"/>
+                    </a:solidFill>
+                    <a:effectLst/>
+                    <a:latin typeface="+mn-lt"/>
+                    <a:ea typeface="+mn-ea"/>
+                    <a:cs typeface="+mn-cs"/>
+                  </a:rPr>
+                  <a:t> // </a:t>
+                </a:r>
+                <a:r>
+                  <a:rPr lang="en-NL" sz="1400" i="0" kern="1200">
+                    <a:solidFill>
+                      <a:schemeClr val="tx1"/>
+                    </a:solidFill>
+                    <a:latin typeface="Cambria Math" panose="02040503050406030204" pitchFamily="18" charset="0"/>
+                    <a:ea typeface="+mn-ea"/>
+                    <a:cs typeface="+mn-cs"/>
+                  </a:rPr>
+                  <a:t>𝐻𝑜𝑟𝑖𝑧𝑜𝑛_(𝑡+1)=1</a:t>
+                </a:r>
+                <a:r>
+                  <a:rPr lang="en-NL" sz="1400" b="0" i="0" kern="1200" dirty="0">
+                    <a:solidFill>
+                      <a:schemeClr val="tx1"/>
+                    </a:solidFill>
+                    <a:effectLst/>
+                    <a:latin typeface="+mn-lt"/>
+                    <a:ea typeface="+mn-ea"/>
+                    <a:cs typeface="+mn-cs"/>
+                  </a:rPr>
+                  <a:t>for next-year forecasts</a:t>
+                </a:r>
+              </a:p>
+              <a:p>
+                <a:pPr marL="0" marR="0" lvl="0" indent="0" algn="l" defTabSz="914400" rtl="0" eaLnBrk="1" fontAlgn="t" latinLnBrk="0" hangingPunct="1">
+                  <a:lnSpc>
+                    <a:spcPct val="100000"/>
+                  </a:lnSpc>
+                  <a:spcBef>
+                    <a:spcPts val="0"/>
+                  </a:spcBef>
+                  <a:spcAft>
+                    <a:spcPts val="0"/>
+                  </a:spcAft>
+                  <a:buClrTx/>
+                  <a:buSzTx/>
+                  <a:buFontTx/>
+                  <a:buNone/>
+                  <a:tabLst/>
+                  <a:defRPr/>
+                </a:pPr>
+                <a:r>
+                  <a:rPr lang="en-US" sz="1400" b="0" i="0" kern="1200" dirty="0">
+                    <a:solidFill>
+                      <a:schemeClr val="tx1"/>
+                    </a:solidFill>
+                    <a:effectLst/>
+                    <a:latin typeface="+mn-lt"/>
+                    <a:ea typeface="+mn-ea"/>
+                    <a:cs typeface="+mn-cs"/>
+                  </a:rPr>
+                  <a:t>….. t</a:t>
+                </a:r>
+                <a:r>
+                  <a:rPr lang="en-NL" sz="1400" b="0" i="0" kern="1200" dirty="0">
+                    <a:solidFill>
+                      <a:schemeClr val="tx1"/>
+                    </a:solidFill>
+                    <a:effectLst/>
+                    <a:latin typeface="+mn-lt"/>
+                    <a:ea typeface="+mn-ea"/>
+                    <a:cs typeface="+mn-cs"/>
+                  </a:rPr>
+                  <a:t>his removes systematic differences between forecast types</a:t>
+                </a:r>
+                <a:r>
+                  <a:rPr lang="en-US" sz="1400" b="0" i="0" kern="1200" dirty="0">
+                    <a:solidFill>
+                      <a:schemeClr val="tx1"/>
+                    </a:solidFill>
+                    <a:effectLst/>
+                    <a:latin typeface="+mn-lt"/>
+                    <a:ea typeface="+mn-ea"/>
+                    <a:cs typeface="+mn-cs"/>
+                  </a:rPr>
+                  <a:t> //  </a:t>
+                </a:r>
+                <a:r>
+                  <a:rPr lang="en-NL" sz="1400" b="0" i="0" kern="1200" dirty="0">
+                    <a:solidFill>
+                      <a:schemeClr val="tx1"/>
+                    </a:solidFill>
+                    <a:effectLst/>
+                    <a:latin typeface="+mn-lt"/>
+                    <a:ea typeface="+mn-ea"/>
+                    <a:cs typeface="+mn-cs"/>
+                  </a:rPr>
+                  <a:t>vintage controls absorb average differences in forecasting difficulty and information availability across forecast types</a:t>
+                </a:r>
+                <a:r>
+                  <a:rPr lang="en-US" sz="1400" b="0" i="0" kern="1200" dirty="0">
+                    <a:solidFill>
+                      <a:schemeClr val="tx1"/>
+                    </a:solidFill>
+                    <a:effectLst/>
+                    <a:latin typeface="+mn-lt"/>
+                    <a:ea typeface="+mn-ea"/>
+                    <a:cs typeface="+mn-cs"/>
+                  </a:rPr>
+                  <a:t> =&gt; controls </a:t>
+                </a:r>
+                <a:r>
+                  <a:rPr lang="en-NL" sz="1400" b="0" i="0" kern="1200" dirty="0">
+                    <a:solidFill>
+                      <a:schemeClr val="tx1"/>
+                    </a:solidFill>
+                    <a:effectLst/>
+                    <a:latin typeface="+mn-lt"/>
+                    <a:ea typeface="+mn-ea"/>
+                    <a:cs typeface="+mn-cs"/>
+                  </a:rPr>
+                  <a:t>capture the average difference between Spring </a:t>
+                </a:r>
+                <a:r>
+                  <a:rPr lang="en-US" sz="1400" b="0" i="0" kern="1200" dirty="0">
+                    <a:solidFill>
+                      <a:schemeClr val="tx1"/>
+                    </a:solidFill>
+                    <a:effectLst/>
+                    <a:latin typeface="+mn-lt"/>
+                    <a:ea typeface="+mn-ea"/>
+                    <a:cs typeface="+mn-cs"/>
+                  </a:rPr>
+                  <a:t>&amp;</a:t>
+                </a:r>
+                <a:r>
+                  <a:rPr lang="en-NL" sz="1400" b="0" i="0" kern="1200" dirty="0">
+                    <a:solidFill>
+                      <a:schemeClr val="tx1"/>
+                    </a:solidFill>
+                    <a:effectLst/>
+                    <a:latin typeface="+mn-lt"/>
+                    <a:ea typeface="+mn-ea"/>
+                    <a:cs typeface="+mn-cs"/>
+                  </a:rPr>
+                  <a:t> Autumn forecasts, holding AI constant</a:t>
+                </a:r>
+              </a:p>
+              <a:p>
+                <a:pPr marL="0" marR="0" lvl="0" indent="0" algn="l" defTabSz="914400" rtl="0" eaLnBrk="1" fontAlgn="t" latinLnBrk="0" hangingPunct="1">
+                  <a:lnSpc>
+                    <a:spcPct val="100000"/>
+                  </a:lnSpc>
+                  <a:spcBef>
+                    <a:spcPts val="0"/>
+                  </a:spcBef>
+                  <a:spcAft>
+                    <a:spcPts val="0"/>
+                  </a:spcAft>
+                  <a:buClrTx/>
+                  <a:buSzTx/>
+                  <a:buFontTx/>
+                  <a:buNone/>
+                  <a:tabLst/>
+                  <a:defRPr/>
+                </a:pPr>
+                <a:r>
+                  <a:rPr lang="en-US" sz="1400" b="0" i="0" kern="1200" dirty="0">
+                    <a:solidFill>
+                      <a:schemeClr val="tx1"/>
+                    </a:solidFill>
+                    <a:effectLst/>
+                    <a:latin typeface="+mn-lt"/>
+                    <a:ea typeface="+mn-ea"/>
+                    <a:cs typeface="+mn-cs"/>
+                  </a:rPr>
+                  <a:t>(w</a:t>
+                </a:r>
+                <a:r>
+                  <a:rPr lang="en-NL" sz="1400" b="0" i="0" kern="1200" dirty="0" err="1">
+                    <a:solidFill>
+                      <a:schemeClr val="tx1"/>
+                    </a:solidFill>
+                    <a:effectLst/>
+                    <a:latin typeface="+mn-lt"/>
+                    <a:ea typeface="+mn-ea"/>
+                    <a:cs typeface="+mn-cs"/>
+                  </a:rPr>
+                  <a:t>ithout</a:t>
+                </a:r>
+                <a:r>
+                  <a:rPr lang="en-NL" sz="1400" b="0" i="0" kern="1200" dirty="0">
+                    <a:solidFill>
+                      <a:schemeClr val="tx1"/>
+                    </a:solidFill>
+                    <a:effectLst/>
+                    <a:latin typeface="+mn-lt"/>
+                    <a:ea typeface="+mn-ea"/>
+                    <a:cs typeface="+mn-cs"/>
+                  </a:rPr>
+                  <a:t> controls, </a:t>
+                </a:r>
+                <a:r>
+                  <a:rPr lang="en-US" sz="1400" b="0" i="0" kern="1200" dirty="0">
+                    <a:solidFill>
+                      <a:schemeClr val="tx1"/>
+                    </a:solidFill>
+                    <a:effectLst/>
+                    <a:latin typeface="+mn-lt"/>
+                    <a:ea typeface="+mn-ea"/>
+                    <a:cs typeface="+mn-cs"/>
+                  </a:rPr>
+                  <a:t>for instance, the</a:t>
+                </a:r>
+                <a:r>
+                  <a:rPr lang="en-NL" sz="1400" b="0" i="0" kern="1200" dirty="0">
+                    <a:solidFill>
+                      <a:schemeClr val="tx1"/>
+                    </a:solidFill>
+                    <a:effectLst/>
+                    <a:latin typeface="+mn-lt"/>
+                    <a:ea typeface="+mn-ea"/>
+                    <a:cs typeface="+mn-cs"/>
+                  </a:rPr>
+                  <a:t> AI coefficient is </a:t>
+                </a:r>
+                <a:r>
+                  <a:rPr lang="en-US" sz="1400" b="0" i="0" kern="1200" dirty="0">
+                    <a:solidFill>
+                      <a:schemeClr val="tx1"/>
+                    </a:solidFill>
+                    <a:effectLst/>
+                    <a:latin typeface="+mn-lt"/>
+                    <a:ea typeface="+mn-ea"/>
+                    <a:cs typeface="+mn-cs"/>
+                  </a:rPr>
+                  <a:t>also </a:t>
+                </a:r>
+                <a:r>
+                  <a:rPr lang="en-NL" sz="1400" b="0" i="0" kern="1200" dirty="0">
+                    <a:solidFill>
+                      <a:schemeClr val="tx1"/>
+                    </a:solidFill>
+                    <a:effectLst/>
+                    <a:latin typeface="+mn-lt"/>
+                    <a:ea typeface="+mn-ea"/>
+                    <a:cs typeface="+mn-cs"/>
+                  </a:rPr>
+                  <a:t>estimated</a:t>
+                </a:r>
+                <a:r>
+                  <a:rPr lang="en-US" sz="1400" b="0" i="0" kern="1200" dirty="0">
+                    <a:solidFill>
+                      <a:schemeClr val="tx1"/>
+                    </a:solidFill>
+                    <a:effectLst/>
+                    <a:latin typeface="+mn-lt"/>
+                    <a:ea typeface="+mn-ea"/>
+                    <a:cs typeface="+mn-cs"/>
+                  </a:rPr>
+                  <a:t> </a:t>
+                </a:r>
+                <a:r>
+                  <a:rPr lang="en-NL" sz="1400" b="0" i="0" kern="1200" dirty="0">
+                    <a:solidFill>
+                      <a:schemeClr val="tx1"/>
+                    </a:solidFill>
+                    <a:effectLst/>
+                    <a:latin typeface="+mn-lt"/>
+                    <a:ea typeface="+mn-ea"/>
+                    <a:cs typeface="+mn-cs"/>
+                  </a:rPr>
+                  <a:t>from variation in</a:t>
+                </a:r>
+                <a:r>
+                  <a:rPr lang="en-US" sz="1400" b="0" i="0" kern="1200" dirty="0">
+                    <a:solidFill>
+                      <a:schemeClr val="tx1"/>
+                    </a:solidFill>
+                    <a:effectLst/>
+                    <a:latin typeface="+mn-lt"/>
+                    <a:ea typeface="+mn-ea"/>
+                    <a:cs typeface="+mn-cs"/>
+                  </a:rPr>
+                  <a:t> type of forecast)</a:t>
+                </a:r>
+                <a:endParaRPr lang="en-NL" sz="1400" b="0" i="0" kern="1200" dirty="0">
+                  <a:solidFill>
+                    <a:schemeClr val="tx1"/>
+                  </a:solidFill>
+                  <a:effectLst/>
+                  <a:latin typeface="+mn-lt"/>
+                  <a:ea typeface="+mn-ea"/>
+                  <a:cs typeface="+mn-cs"/>
+                </a:endParaRPr>
+              </a:p>
+              <a:p>
+                <a:pPr fontAlgn="t"/>
+                <a:r>
+                  <a:rPr lang="en-NL" sz="1400" dirty="0"/>
+                  <a:t>Suppose </a:t>
+                </a:r>
+                <a:r>
+                  <a:rPr lang="en-US" sz="1400" dirty="0"/>
+                  <a:t>that t+1 </a:t>
+                </a:r>
+                <a:r>
+                  <a:rPr lang="en-NL" sz="1400" dirty="0"/>
+                  <a:t>forecasts have more </a:t>
+                </a:r>
+                <a:r>
+                  <a:rPr lang="en-US" sz="1400" dirty="0"/>
+                  <a:t>positive</a:t>
+                </a:r>
+                <a:r>
+                  <a:rPr lang="en-NL" sz="1400" dirty="0"/>
+                  <a:t> surprises because they are harder to predict.</a:t>
+                </a:r>
+                <a:r>
+                  <a:rPr lang="en-US" sz="1400" dirty="0"/>
+                  <a:t> </a:t>
+                </a:r>
+                <a:r>
+                  <a:rPr lang="en-NL" sz="1400" dirty="0"/>
+                  <a:t>Then</a:t>
+                </a:r>
+                <a:r>
+                  <a:rPr lang="en-US" sz="1400" dirty="0"/>
+                  <a:t>: </a:t>
+                </a:r>
+                <a:r>
+                  <a:rPr lang="en-US" sz="1400" b="0" i="0">
+                    <a:latin typeface="Cambria Math" panose="02040503050406030204" pitchFamily="18" charset="0"/>
+                  </a:rPr>
+                  <a:t> </a:t>
+                </a:r>
+                <a:r>
+                  <a:rPr lang="en-NL" sz="1400" i="0"/>
+                  <a:t>𝛾_2&lt;0</a:t>
+                </a:r>
+                <a:r>
+                  <a:rPr lang="en-US" sz="1400" dirty="0"/>
+                  <a:t>    </a:t>
+                </a:r>
+                <a:r>
+                  <a:rPr lang="en-NL" sz="1400" dirty="0"/>
+                  <a:t>will absorb that systematic shift</a:t>
+                </a:r>
+                <a:r>
+                  <a:rPr lang="en-US" sz="1400" dirty="0"/>
+                  <a:t>.</a:t>
+                </a:r>
+              </a:p>
+              <a:p>
+                <a:pPr fontAlgn="t"/>
+                <a:r>
+                  <a:rPr lang="en-US" dirty="0"/>
+                  <a:t>Then you estimate </a:t>
+                </a:r>
+                <a:r>
+                  <a:rPr lang="en-NL" dirty="0"/>
+                  <a:t>how AI dependence </a:t>
+                </a:r>
+                <a:r>
+                  <a:rPr lang="en-US" dirty="0"/>
+                  <a:t>IS </a:t>
+                </a:r>
+                <a:r>
+                  <a:rPr lang="en-NL" dirty="0"/>
+                  <a:t>associated with probability of a positive GDP growth surprise</a:t>
+                </a:r>
+                <a:r>
+                  <a:rPr lang="en-US" dirty="0"/>
+                  <a:t>, </a:t>
+                </a:r>
+                <a:r>
+                  <a:rPr lang="en-NL" dirty="0"/>
+                  <a:t>Holding constant whether the forecast is Spring or Autumn and whether it refers to year </a:t>
+                </a:r>
+                <a:r>
+                  <a:rPr lang="en-NL" i="0"/>
+                  <a:t>𝑡</a:t>
+                </a:r>
+                <a:r>
+                  <a:rPr lang="en-NL" dirty="0"/>
+                  <a:t>or </a:t>
+                </a:r>
+                <a:r>
+                  <a:rPr lang="en-NL" i="0"/>
+                  <a:t>𝑡+</a:t>
+                </a:r>
+                <a:r>
+                  <a:rPr lang="en-US" b="0" i="0">
+                    <a:latin typeface="Cambria Math" panose="02040503050406030204" pitchFamily="18" charset="0"/>
+                  </a:rPr>
+                  <a:t>1</a:t>
+                </a:r>
+                <a:endParaRPr lang="en-NL" dirty="0"/>
+              </a:p>
+              <a:p>
+                <a:pPr fontAlgn="t"/>
+                <a:endParaRPr lang="en-NL" sz="1200" b="0" i="0" kern="1200" dirty="0">
+                  <a:solidFill>
+                    <a:schemeClr val="tx1"/>
+                  </a:solidFill>
+                  <a:effectLst/>
+                  <a:latin typeface="+mn-lt"/>
+                  <a:ea typeface="+mn-ea"/>
+                  <a:cs typeface="+mn-cs"/>
+                </a:endParaRPr>
+              </a:p>
+              <a:p>
+                <a:pPr marL="0" indent="0">
+                  <a:buFontTx/>
+                  <a:buNone/>
+                </a:pPr>
+                <a:endParaRPr lang="nl-NL" i="0" baseline="0" dirty="0"/>
+              </a:p>
+            </p:txBody>
+          </p:sp>
+        </mc:Fallback>
+      </mc:AlternateContent>
       <p:sp>
         <p:nvSpPr>
           <p:cNvPr id="4" name="Tijdelijke aanduiding voor dianummer 3">
@@ -3222,6 +5389,311 @@
               <a:buChar char="-"/>
             </a:pPr>
             <a:r>
+              <a:rPr lang="nl-NL" dirty="0"/>
+              <a:t>GDP </a:t>
+            </a:r>
+            <a:r>
+              <a:rPr lang="nl-NL" dirty="0" err="1"/>
+              <a:t>growth</a:t>
+            </a:r>
+            <a:r>
+              <a:rPr lang="nl-NL" dirty="0"/>
+              <a:t> surprise (LH </a:t>
+            </a:r>
+            <a:r>
+              <a:rPr lang="nl-NL" dirty="0" err="1"/>
+              <a:t>variable</a:t>
+            </a:r>
+            <a:r>
+              <a:rPr lang="nl-NL" dirty="0"/>
+              <a:t>) is </a:t>
+            </a:r>
+            <a:r>
+              <a:rPr lang="nl-NL" dirty="0" err="1"/>
+              <a:t>similar</a:t>
+            </a:r>
+            <a:r>
+              <a:rPr lang="nl-NL" dirty="0"/>
+              <a:t> </a:t>
+            </a:r>
+            <a:r>
+              <a:rPr lang="nl-NL" dirty="0" err="1"/>
+              <a:t>to</a:t>
+            </a:r>
+            <a:r>
+              <a:rPr lang="nl-NL" dirty="0"/>
+              <a:t> a first </a:t>
+            </a:r>
+            <a:r>
+              <a:rPr lang="nl-NL" dirty="0" err="1"/>
+              <a:t>differenced</a:t>
+            </a:r>
+            <a:r>
+              <a:rPr lang="nl-NL" dirty="0"/>
+              <a:t> </a:t>
+            </a:r>
+            <a:r>
+              <a:rPr lang="nl-NL" dirty="0" err="1"/>
+              <a:t>variable</a:t>
+            </a:r>
+            <a:r>
+              <a:rPr lang="nl-NL" dirty="0"/>
+              <a:t>, making </a:t>
+            </a:r>
+            <a:r>
+              <a:rPr lang="nl-NL" dirty="0" err="1"/>
+              <a:t>endogeneity</a:t>
+            </a:r>
+            <a:r>
+              <a:rPr lang="nl-NL" dirty="0"/>
+              <a:t> </a:t>
+            </a:r>
+            <a:r>
+              <a:rPr lang="nl-NL" dirty="0" err="1"/>
+              <a:t>with</a:t>
+            </a:r>
+            <a:r>
+              <a:rPr lang="nl-NL" dirty="0"/>
+              <a:t> investment and export variables on the RH </a:t>
+            </a:r>
+            <a:r>
+              <a:rPr lang="nl-NL" dirty="0" err="1"/>
+              <a:t>less</a:t>
+            </a:r>
+            <a:r>
+              <a:rPr lang="nl-NL" dirty="0"/>
+              <a:t> </a:t>
+            </a:r>
+            <a:r>
+              <a:rPr lang="nl-NL" dirty="0" err="1"/>
+              <a:t>obvious</a:t>
+            </a:r>
+            <a:r>
+              <a:rPr lang="nl-NL" dirty="0"/>
+              <a:t> (</a:t>
+            </a:r>
+            <a:r>
+              <a:rPr lang="nl-NL" dirty="0" err="1"/>
+              <a:t>taking</a:t>
+            </a:r>
+            <a:r>
+              <a:rPr lang="nl-NL" dirty="0"/>
+              <a:t> </a:t>
+            </a:r>
+            <a:r>
+              <a:rPr lang="nl-NL" dirty="0" err="1"/>
+              <a:t>into</a:t>
+            </a:r>
+            <a:r>
+              <a:rPr lang="nl-NL" dirty="0"/>
+              <a:t> account </a:t>
+            </a:r>
+            <a:r>
+              <a:rPr lang="nl-NL" dirty="0" err="1"/>
+              <a:t>that</a:t>
+            </a:r>
+            <a:r>
+              <a:rPr lang="nl-NL" dirty="0"/>
+              <a:t> investment and exports are part of GDP </a:t>
+            </a:r>
+            <a:r>
+              <a:rPr lang="nl-NL" dirty="0" err="1"/>
+              <a:t>by</a:t>
+            </a:r>
+            <a:r>
+              <a:rPr lang="nl-NL" dirty="0"/>
+              <a:t> </a:t>
+            </a:r>
+            <a:r>
+              <a:rPr lang="nl-NL" dirty="0" err="1"/>
+              <a:t>definition</a:t>
+            </a:r>
+            <a:r>
+              <a:rPr lang="nl-NL" dirty="0"/>
+              <a:t>, but </a:t>
+            </a:r>
+            <a:r>
+              <a:rPr lang="nl-NL" dirty="0" err="1"/>
+              <a:t>not</a:t>
+            </a:r>
+            <a:r>
+              <a:rPr lang="nl-NL" dirty="0"/>
+              <a:t> </a:t>
+            </a:r>
+            <a:r>
+              <a:rPr lang="nl-NL" dirty="0" err="1"/>
+              <a:t>necesserily</a:t>
+            </a:r>
+            <a:r>
+              <a:rPr lang="nl-NL" dirty="0"/>
+              <a:t> part of </a:t>
+            </a:r>
+            <a:r>
+              <a:rPr lang="nl-NL" dirty="0" err="1"/>
+              <a:t>dif</a:t>
+            </a:r>
+            <a:r>
+              <a:rPr lang="nl-NL" dirty="0"/>
+              <a:t> </a:t>
+            </a:r>
+            <a:r>
+              <a:rPr lang="nl-NL" dirty="0" err="1"/>
+              <a:t>between</a:t>
+            </a:r>
+            <a:r>
+              <a:rPr lang="nl-NL" dirty="0"/>
+              <a:t> </a:t>
+            </a:r>
+            <a:r>
+              <a:rPr lang="nl-NL" dirty="0" err="1"/>
+              <a:t>realised</a:t>
+            </a:r>
+            <a:r>
+              <a:rPr lang="nl-NL" dirty="0"/>
+              <a:t> and </a:t>
+            </a:r>
+            <a:r>
+              <a:rPr lang="nl-NL" dirty="0" err="1"/>
+              <a:t>forecasted</a:t>
+            </a:r>
+            <a:r>
+              <a:rPr lang="nl-NL" dirty="0"/>
+              <a:t> GDP </a:t>
+            </a:r>
+            <a:r>
+              <a:rPr lang="nl-NL" dirty="0" err="1"/>
+              <a:t>growth</a:t>
+            </a:r>
+            <a:r>
+              <a:rPr lang="nl-NL" dirty="0"/>
+              <a:t>). </a:t>
+            </a:r>
+            <a:r>
+              <a:rPr lang="nl-NL" dirty="0" err="1"/>
+              <a:t>This</a:t>
+            </a:r>
+            <a:r>
+              <a:rPr lang="nl-NL" dirty="0"/>
+              <a:t> is </a:t>
+            </a:r>
+            <a:r>
+              <a:rPr lang="nl-NL" dirty="0" err="1"/>
+              <a:t>further</a:t>
+            </a:r>
+            <a:r>
+              <a:rPr lang="nl-NL" dirty="0"/>
+              <a:t> </a:t>
+            </a:r>
+            <a:r>
+              <a:rPr lang="nl-NL" dirty="0" err="1"/>
+              <a:t>addressed</a:t>
+            </a:r>
+            <a:r>
+              <a:rPr lang="nl-NL" dirty="0"/>
+              <a:t> </a:t>
+            </a:r>
+            <a:r>
+              <a:rPr lang="nl-NL" dirty="0" err="1"/>
+              <a:t>by</a:t>
+            </a:r>
+            <a:r>
+              <a:rPr lang="nl-NL" dirty="0"/>
+              <a:t> </a:t>
+            </a:r>
+            <a:r>
+              <a:rPr lang="nl-NL" dirty="0" err="1"/>
+              <a:t>taking</a:t>
+            </a:r>
+            <a:r>
+              <a:rPr lang="nl-NL" dirty="0"/>
+              <a:t> the </a:t>
+            </a:r>
+            <a:r>
+              <a:rPr lang="nl-NL" dirty="0" err="1"/>
+              <a:t>one</a:t>
+            </a:r>
+            <a:r>
+              <a:rPr lang="nl-NL" dirty="0"/>
+              <a:t> </a:t>
+            </a:r>
+            <a:r>
+              <a:rPr lang="nl-NL" dirty="0" err="1"/>
+              <a:t>period</a:t>
+            </a:r>
+            <a:r>
+              <a:rPr lang="nl-NL" dirty="0"/>
+              <a:t> lag of the </a:t>
+            </a:r>
+            <a:r>
+              <a:rPr lang="nl-NL" dirty="0" err="1"/>
+              <a:t>explanatory</a:t>
+            </a:r>
+            <a:r>
+              <a:rPr lang="nl-NL" dirty="0"/>
+              <a:t> variables, </a:t>
+            </a:r>
+            <a:r>
+              <a:rPr lang="nl-NL" dirty="0" err="1"/>
+              <a:t>meaning</a:t>
+            </a:r>
+            <a:r>
+              <a:rPr lang="nl-NL" dirty="0"/>
+              <a:t> </a:t>
+            </a:r>
+            <a:r>
+              <a:rPr lang="nl-NL" dirty="0" err="1"/>
+              <a:t>that</a:t>
+            </a:r>
+            <a:r>
+              <a:rPr lang="nl-NL" dirty="0"/>
+              <a:t> the GDP </a:t>
+            </a:r>
+            <a:r>
+              <a:rPr lang="nl-NL" dirty="0" err="1"/>
+              <a:t>growth</a:t>
+            </a:r>
+            <a:r>
+              <a:rPr lang="nl-NL" dirty="0"/>
+              <a:t> surprise in </a:t>
+            </a:r>
+            <a:r>
+              <a:rPr lang="nl-NL" dirty="0" err="1"/>
+              <a:t>year</a:t>
+            </a:r>
+            <a:r>
+              <a:rPr lang="nl-NL" dirty="0"/>
+              <a:t> t is </a:t>
+            </a:r>
+            <a:r>
+              <a:rPr lang="nl-NL" dirty="0" err="1"/>
+              <a:t>regressed</a:t>
+            </a:r>
+            <a:r>
+              <a:rPr lang="nl-NL" dirty="0"/>
+              <a:t> on </a:t>
+            </a:r>
+            <a:r>
+              <a:rPr lang="nl-NL" dirty="0" err="1"/>
+              <a:t>flows</a:t>
+            </a:r>
+            <a:r>
+              <a:rPr lang="nl-NL" dirty="0"/>
+              <a:t> of investment and exports of t-1.</a:t>
+            </a:r>
+          </a:p>
+          <a:p>
+            <a:pPr marL="171450" indent="-171450">
+              <a:buFontTx/>
+              <a:buChar char="-"/>
+            </a:pPr>
+            <a:endParaRPr lang="nl-NL" dirty="0"/>
+          </a:p>
+          <a:p>
+            <a:pPr marL="171450" indent="-171450">
+              <a:buFontTx/>
+              <a:buChar char="-"/>
+            </a:pPr>
+            <a:r>
               <a:rPr lang="nl-NL" dirty="0" err="1"/>
               <a:t>Each</a:t>
             </a:r>
@@ -3330,10 +5802,9 @@
               <a:t>differ</a:t>
             </a:r>
             <a:r>
-              <a:rPr lang="nl-NL"/>
+              <a:rPr lang="nl-NL" dirty="0"/>
               <a:t>.</a:t>
             </a:r>
-            <a:endParaRPr lang="nl-NL" dirty="0"/>
           </a:p>
         </p:txBody>
       </p:sp>
@@ -8251,8 +10722,8 @@
         </p:nvSpPr>
         <p:spPr>
           <a:xfrm>
-            <a:off x="438652" y="803135"/>
-            <a:ext cx="8129275" cy="5679439"/>
+            <a:off x="438652" y="803136"/>
+            <a:ext cx="8129275" cy="5287564"/>
           </a:xfrm>
         </p:spPr>
         <p:txBody>
@@ -8338,7 +10809,27 @@
                 <a:ea typeface="Verdana" panose="020B0604030504040204" pitchFamily="34" charset="0"/>
                 <a:cs typeface="Arial" panose="020B0604020202020204" pitchFamily="34" charset="0"/>
               </a:rPr>
-              <a:t>Modified stock correlation variable (to do)</a:t>
+              <a:t>Selection, different set of shock years (to do)</a:t>
+            </a:r>
+          </a:p>
+          <a:p>
+            <a:pPr marL="342900" indent="-342900">
+              <a:lnSpc>
+                <a:spcPct val="120000"/>
+              </a:lnSpc>
+              <a:spcAft>
+                <a:spcPts val="1200"/>
+              </a:spcAft>
+              <a:buFont typeface="Arial" panose="020B0604020202020204" pitchFamily="34" charset="0"/>
+              <a:buChar char="•"/>
+            </a:pPr>
+            <a:r>
+              <a:rPr lang="nl-NL" sz="2000" noProof="1">
+                <a:latin typeface="Arial" panose="020B0604020202020204" pitchFamily="34" charset="0"/>
+                <a:ea typeface="Verdana" panose="020B0604030504040204" pitchFamily="34" charset="0"/>
+                <a:cs typeface="Arial" panose="020B0604020202020204" pitchFamily="34" charset="0"/>
+              </a:rPr>
+              <a:t>Modified stock index correlation variable (to do)</a:t>
             </a:r>
           </a:p>
           <a:p>
@@ -9697,7 +12188,7 @@
         <p:spPr>
           <a:xfrm>
             <a:off x="3982421" y="5677421"/>
-            <a:ext cx="4942124" cy="830997"/>
+            <a:ext cx="4942124" cy="1015663"/>
           </a:xfrm>
           <a:prstGeom prst="rect">
             <a:avLst/>
@@ -9719,7 +12210,7 @@
                   <a:srgbClr val="002060"/>
                 </a:solidFill>
               </a:rPr>
-              <a:t>Based on European Commission Spring and Autumn forecasts of GDP growth. Surprise = realised GDP growth minus forecast (all years 2011-2025, 548 obs and shock years 2020, 2022, 2025, 120 obs).</a:t>
+              <a:t>Based on European Commission Spring and Autumn forecasts of GDP growth. Surprise = realised GDP growth minus forecast (all years 2011-2025, 548 obs and shock years 2020, 2022, 2025 (selection based on peaks in global uncertainty index, 120 obs).</a:t>
             </a:r>
           </a:p>
         </p:txBody>
@@ -10624,8 +13115,8 @@
           </a:p>
         </p:txBody>
       </p:sp>
-      <mc:AlternateContent xmlns:mc="http://schemas.openxmlformats.org/markup-compatibility/2006">
-        <mc:Choice xmlns:a14="http://schemas.microsoft.com/office/drawing/2010/main" Requires="a14">
+      <mc:AlternateContent xmlns:mc="http://schemas.openxmlformats.org/markup-compatibility/2006" xmlns:a14="http://schemas.microsoft.com/office/drawing/2010/main">
+        <mc:Choice Requires="a14">
           <p:sp>
             <p:nvSpPr>
               <p:cNvPr id="2" name="Content Placeholder 2">
@@ -13016,7 +15507,7 @@
             </p:txBody>
           </p:sp>
         </mc:Choice>
-        <mc:Fallback>
+        <mc:Fallback xmlns="">
           <p:sp>
             <p:nvSpPr>
               <p:cNvPr id="2" name="Content Placeholder 2">
@@ -13255,100 +15746,193 @@
           </a:p>
         </p:txBody>
       </p:sp>
-      <p:sp>
-        <p:nvSpPr>
-          <p:cNvPr id="6" name="Tekstvak 3">
+      <mc:AlternateContent xmlns:mc="http://schemas.openxmlformats.org/markup-compatibility/2006">
+        <mc:Choice xmlns:a14="http://schemas.microsoft.com/office/drawing/2010/main" Requires="a14">
+          <p:sp>
+            <p:nvSpPr>
+              <p:cNvPr id="6" name="Tekstvak 3">
+                <a:extLst>
+                  <a:ext uri="{FF2B5EF4-FFF2-40B4-BE49-F238E27FC236}">
+                    <a16:creationId xmlns:a16="http://schemas.microsoft.com/office/drawing/2014/main" id="{4ED6076C-5ED2-F560-9ECC-68A359BFC0CA}"/>
+                  </a:ext>
+                </a:extLst>
+              </p:cNvPr>
+              <p:cNvSpPr txBox="1"/>
+              <p:nvPr/>
+            </p:nvSpPr>
+            <p:spPr>
+              <a:xfrm>
+                <a:off x="197589" y="4854686"/>
+                <a:ext cx="8748822" cy="1284647"/>
+              </a:xfrm>
+              <a:prstGeom prst="rect">
+                <a:avLst/>
+              </a:prstGeom>
+              <a:noFill/>
+            </p:spPr>
+            <p:txBody>
+              <a:bodyPr wrap="square" rtlCol="0">
+                <a:spAutoFit/>
+              </a:bodyPr>
+              <a:lstStyle/>
+              <a:p>
+                <a:pPr algn="just">
+                  <a:defRPr/>
+                </a:pPr>
+                <a:r>
+                  <a:rPr lang="nl-NL" sz="1100" noProof="1">
+                    <a:solidFill>
+                      <a:srgbClr val="002060"/>
+                    </a:solidFill>
+                  </a:rPr>
+                  <a:t>***, **, * indicate 1%, 5%, 10% significance. Standard errors based on country-clustered sandwich covariance matrix (robust to heteroscedasticity and within country dependence, so countries (clusters) are assumed independent of each other). </a:t>
+                </a:r>
+                <a:r>
+                  <a:rPr lang="en-US" sz="1100" noProof="1">
+                    <a:solidFill>
+                      <a:srgbClr val="002060"/>
+                    </a:solidFill>
+                  </a:rPr>
+                  <a:t>Explanatory variables are standardised and included one period lagged (to address endogeneity concerns and numerator effects in the ratios based on GDP as numerator). In each equation, one of the AI/ICT-related variables is included in </a:t>
+                </a:r>
+                <a14:m>
+                  <m:oMath xmlns:m="http://schemas.openxmlformats.org/officeDocument/2006/math">
+                    <m:sSub>
+                      <m:sSubPr>
+                        <m:ctrlPr>
+                          <a:rPr lang="en-US" sz="1100" i="1" noProof="1">
+                            <a:latin typeface="Cambria Math" panose="02040503050406030204" pitchFamily="18" charset="0"/>
+                            <a:ea typeface="Verdana" panose="020B0604030504040204" pitchFamily="34" charset="0"/>
+                          </a:rPr>
+                        </m:ctrlPr>
+                      </m:sSubPr>
+                      <m:e>
+                        <m:r>
+                          <a:rPr lang="en-US" sz="1100" i="1" noProof="1">
+                            <a:latin typeface="Cambria Math" panose="02040503050406030204" pitchFamily="18" charset="0"/>
+                            <a:ea typeface="Verdana" panose="020B0604030504040204" pitchFamily="34" charset="0"/>
+                          </a:rPr>
+                          <m:t>𝑋</m:t>
+                        </m:r>
+                      </m:e>
+                      <m:sub>
+                        <m:r>
+                          <a:rPr lang="en-US" sz="1100" i="1" noProof="1">
+                            <a:latin typeface="Cambria Math" panose="02040503050406030204" pitchFamily="18" charset="0"/>
+                            <a:ea typeface="Verdana" panose="020B0604030504040204" pitchFamily="34" charset="0"/>
+                          </a:rPr>
+                          <m:t>𝑖</m:t>
+                        </m:r>
+                        <m:r>
+                          <a:rPr lang="en-US" sz="1100" i="1" noProof="1">
+                            <a:latin typeface="Cambria Math" panose="02040503050406030204" pitchFamily="18" charset="0"/>
+                            <a:ea typeface="Verdana" panose="020B0604030504040204" pitchFamily="34" charset="0"/>
+                          </a:rPr>
+                          <m:t>,</m:t>
+                        </m:r>
+                        <m:r>
+                          <a:rPr lang="en-US" sz="1100" i="1" noProof="1">
+                            <a:latin typeface="Cambria Math" panose="02040503050406030204" pitchFamily="18" charset="0"/>
+                            <a:ea typeface="Verdana" panose="020B0604030504040204" pitchFamily="34" charset="0"/>
+                          </a:rPr>
+                          <m:t>𝑡</m:t>
+                        </m:r>
+                      </m:sub>
+                    </m:sSub>
+                    <m:r>
+                      <a:rPr lang="en-US" sz="1100" b="0" i="0" noProof="1" smtClean="0">
+                        <a:latin typeface="Cambria Math" panose="02040503050406030204" pitchFamily="18" charset="0"/>
+                        <a:ea typeface="Verdana" panose="020B0604030504040204" pitchFamily="34" charset="0"/>
+                      </a:rPr>
+                      <m:t>.</m:t>
+                    </m:r>
+                  </m:oMath>
+                </a14:m>
+                <a:r>
+                  <a:rPr lang="en-US" sz="1100" noProof="1">
+                    <a:solidFill>
+                      <a:srgbClr val="002060"/>
+                    </a:solidFill>
+                  </a:rPr>
+                  <a:t> As control variables are included i) state aid as ratio of GDP (contemporaneous value of state aid and one period lagged GDP, source </a:t>
+                </a:r>
+                <a:r>
+                  <a:rPr lang="en-US" sz="1100" noProof="1">
+                    <a:solidFill>
+                      <a:srgbClr val="002060"/>
+                    </a:solidFill>
+                    <a:hlinkClick r:id="rId3"/>
+                  </a:rPr>
+                  <a:t>Eurostat</a:t>
+                </a:r>
+                <a:r>
+                  <a:rPr lang="en-US" sz="1100" noProof="1">
+                    <a:solidFill>
+                      <a:srgbClr val="002060"/>
+                    </a:solidFill>
+                  </a:rPr>
+                  <a:t>); ii) trade openness (exports + imports over GDP, source Worldbank); iii) forecast-vintage controls, with a dummy for Autumn forecasts. a dummy for t+1 forecasts and for their interaction. </a:t>
+                </a:r>
+                <a:endParaRPr lang="nl-NL" sz="1100" noProof="1">
+                  <a:solidFill>
+                    <a:srgbClr val="002060"/>
+                  </a:solidFill>
+                </a:endParaRPr>
+              </a:p>
+            </p:txBody>
+          </p:sp>
+        </mc:Choice>
+        <mc:Fallback>
+          <p:sp>
+            <p:nvSpPr>
+              <p:cNvPr id="6" name="Tekstvak 3">
+                <a:extLst>
+                  <a:ext uri="{FF2B5EF4-FFF2-40B4-BE49-F238E27FC236}">
+                    <a16:creationId xmlns:a16="http://schemas.microsoft.com/office/drawing/2014/main" id="{4ED6076C-5ED2-F560-9ECC-68A359BFC0CA}"/>
+                  </a:ext>
+                </a:extLst>
+              </p:cNvPr>
+              <p:cNvSpPr txBox="1">
+                <a:spLocks noRot="1" noChangeAspect="1" noMove="1" noResize="1" noEditPoints="1" noAdjustHandles="1" noChangeArrowheads="1" noChangeShapeType="1" noTextEdit="1"/>
+              </p:cNvSpPr>
+              <p:nvPr/>
+            </p:nvSpPr>
+            <p:spPr>
+              <a:xfrm>
+                <a:off x="197589" y="4854686"/>
+                <a:ext cx="8748822" cy="1284647"/>
+              </a:xfrm>
+              <a:prstGeom prst="rect">
+                <a:avLst/>
+              </a:prstGeom>
+              <a:blipFill>
+                <a:blip r:embed="rId4"/>
+                <a:stretch>
+                  <a:fillRect b="-2370"/>
+                </a:stretch>
+              </a:blipFill>
+            </p:spPr>
+            <p:txBody>
+              <a:bodyPr/>
+              <a:lstStyle/>
+              <a:p>
+                <a:r>
+                  <a:rPr lang="en-US">
+                    <a:noFill/>
+                  </a:rPr>
+                  <a:t> </a:t>
+                </a:r>
+              </a:p>
+            </p:txBody>
+          </p:sp>
+        </mc:Fallback>
+      </mc:AlternateContent>
+      <p:pic>
+        <p:nvPicPr>
+          <p:cNvPr id="3" name="Picture 2">
             <a:extLst>
               <a:ext uri="{FF2B5EF4-FFF2-40B4-BE49-F238E27FC236}">
-                <a16:creationId xmlns:a16="http://schemas.microsoft.com/office/drawing/2014/main" id="{4ED6076C-5ED2-F560-9ECC-68A359BFC0CA}"/>
-              </a:ext>
-            </a:extLst>
-          </p:cNvPr>
-          <p:cNvSpPr txBox="1"/>
-          <p:nvPr/>
-        </p:nvSpPr>
-        <p:spPr>
-          <a:xfrm>
-            <a:off x="163552" y="5061145"/>
-            <a:ext cx="8748822" cy="1107996"/>
-          </a:xfrm>
-          <a:prstGeom prst="rect">
-            <a:avLst/>
-          </a:prstGeom>
-          <a:noFill/>
-        </p:spPr>
-        <p:txBody>
-          <a:bodyPr wrap="square" rtlCol="0">
-            <a:spAutoFit/>
-          </a:bodyPr>
-          <a:lstStyle/>
-          <a:p>
-            <a:pPr algn="just">
-              <a:defRPr/>
-            </a:pPr>
-            <a:r>
-              <a:rPr lang="nl-NL" sz="1100" noProof="1">
-                <a:solidFill>
-                  <a:srgbClr val="002060"/>
-                </a:solidFill>
-              </a:rPr>
-              <a:t>***, **, * indicate 1%, 5%, 10% significance. Standard errors based on country-clustered sandwich covariance matrix (robust to heteroscedasticity and within country dependence, so countries (clusters) are assumed independent of each other). </a:t>
-            </a:r>
-            <a:r>
-              <a:rPr lang="en-US" sz="1100" noProof="1">
-                <a:solidFill>
-                  <a:srgbClr val="002060"/>
-                </a:solidFill>
-              </a:rPr>
-              <a:t>Explanatory variables are standardised and included one period lagged (to address endogeneity concerns and numerator effects in the ratios based on GDP as numerator). In each equation, one of the AI/ICT-related variables is included in </a:t>
-            </a:r>
-            <a:r>
-              <a:rPr lang="en-US" sz="1100" i="1" noProof="1">
-                <a:solidFill>
-                  <a:srgbClr val="002060"/>
-                </a:solidFill>
-              </a:rPr>
-              <a:t>X</a:t>
-            </a:r>
-            <a:r>
-              <a:rPr lang="en-US" sz="1100" noProof="1">
-                <a:solidFill>
-                  <a:srgbClr val="002060"/>
-                </a:solidFill>
-              </a:rPr>
-              <a:t>. As control variables we included i) state aid as ratio of GDP (contemporaneous value of state aid and one period lagged GDP, source </a:t>
-            </a:r>
-            <a:r>
-              <a:rPr lang="en-US" sz="1100" noProof="1">
-                <a:solidFill>
-                  <a:srgbClr val="002060"/>
-                </a:solidFill>
-                <a:hlinkClick r:id="rId3"/>
-              </a:rPr>
-              <a:t>Eurostat</a:t>
-            </a:r>
-            <a:r>
-              <a:rPr lang="en-US" sz="1100" noProof="1">
-                <a:solidFill>
-                  <a:srgbClr val="002060"/>
-                </a:solidFill>
-              </a:rPr>
-              <a:t>) and ii) trade openness (exposrts + imports over GDP. source Worldbank).</a:t>
-            </a:r>
-            <a:endParaRPr lang="nl-NL" sz="1100" noProof="1">
-              <a:solidFill>
-                <a:srgbClr val="002060"/>
-              </a:solidFill>
-            </a:endParaRPr>
-          </a:p>
-        </p:txBody>
-      </p:sp>
-      <p:pic>
-        <p:nvPicPr>
-          <p:cNvPr id="4" name="Picture 3">
-            <a:extLst>
-              <a:ext uri="{FF2B5EF4-FFF2-40B4-BE49-F238E27FC236}">
-                <a16:creationId xmlns:a16="http://schemas.microsoft.com/office/drawing/2014/main" id="{AD9689AB-CE82-70F1-7C47-1B6F79E64021}"/>
+                <a16:creationId xmlns:a16="http://schemas.microsoft.com/office/drawing/2014/main" id="{55B13636-9215-8A37-3974-917B9B355D12}"/>
               </a:ext>
             </a:extLst>
           </p:cNvPr>
@@ -13358,15 +15942,15 @@
           <p:nvPr/>
         </p:nvPicPr>
         <p:blipFill>
-          <a:blip r:embed="rId4"/>
+          <a:blip r:embed="rId5"/>
           <a:stretch>
             <a:fillRect/>
           </a:stretch>
         </p:blipFill>
         <p:spPr>
           <a:xfrm>
-            <a:off x="365381" y="2446883"/>
-            <a:ext cx="8413238" cy="2389505"/>
+            <a:off x="281720" y="2438041"/>
+            <a:ext cx="8546537" cy="2279692"/>
           </a:xfrm>
           <a:prstGeom prst="rect">
             <a:avLst/>

--- a/Resilience.pptx
+++ b/Resilience.pptx
@@ -159,7 +159,7 @@
 <file path=ppt/revisionInfo.xml><?xml version="1.0" encoding="utf-8"?>
 <p1510:revInfo xmlns:a="http://schemas.openxmlformats.org/drawingml/2006/main" xmlns:r="http://schemas.openxmlformats.org/officeDocument/2006/relationships" xmlns:p1510="http://schemas.microsoft.com/office/powerpoint/2015/10/main">
   <p1510:revLst>
-    <p1510:client id="{13B43BEF-9B9B-431D-9308-0B2B126B7992}" v="412" dt="2026-10-05T18:15:19.790"/>
+    <p1510:client id="{13B43BEF-9B9B-431D-9308-0B2B126B7992}" v="420" dt="2026-10-05T18:22:31.744"/>
   </p1510:revLst>
 </p1510:revInfo>
 </file>
@@ -169,12 +169,12 @@
   <pc:docChgLst>
     <pc:chgData name="Jan Willem van den End (EBO_CMA)" userId="32ade95a-e024-4672-952f-5ed8641a9e00" providerId="ADAL" clId="{3BBBE02E-ACD4-4586-9407-5E79BF620DF1}"/>
     <pc:docChg chg="undo redo custSel addSld modSld sldOrd">
-      <pc:chgData name="Jan Willem van den End (EBO_CMA)" userId="32ade95a-e024-4672-952f-5ed8641a9e00" providerId="ADAL" clId="{3BBBE02E-ACD4-4586-9407-5E79BF620DF1}" dt="2026-10-05T18:15:36.629" v="8580" actId="6549"/>
+      <pc:chgData name="Jan Willem van den End (EBO_CMA)" userId="32ade95a-e024-4672-952f-5ed8641a9e00" providerId="ADAL" clId="{3BBBE02E-ACD4-4586-9407-5E79BF620DF1}" dt="2026-10-05T18:22:31.744" v="8750"/>
       <pc:docMkLst>
         <pc:docMk/>
       </pc:docMkLst>
-      <pc:sldChg chg="delSp modSp mod modNotesTx">
-        <pc:chgData name="Jan Willem van den End (EBO_CMA)" userId="32ade95a-e024-4672-952f-5ed8641a9e00" providerId="ADAL" clId="{3BBBE02E-ACD4-4586-9407-5E79BF620DF1}" dt="2026-10-05T09:32:24.475" v="7022" actId="20577"/>
+      <pc:sldChg chg="delSp modSp mod modNotes modNotesTx">
+        <pc:chgData name="Jan Willem van den End (EBO_CMA)" userId="32ade95a-e024-4672-952f-5ed8641a9e00" providerId="ADAL" clId="{3BBBE02E-ACD4-4586-9407-5E79BF620DF1}" dt="2026-10-05T18:17:21.030" v="8587" actId="255"/>
         <pc:sldMkLst>
           <pc:docMk/>
           <pc:sldMk cId="3588697" sldId="657"/>
@@ -266,7 +266,7 @@
         </pc:picChg>
       </pc:sldChg>
       <pc:sldChg chg="modSp mod modNotes modNotesTx">
-        <pc:chgData name="Jan Willem van den End (EBO_CMA)" userId="32ade95a-e024-4672-952f-5ed8641a9e00" providerId="ADAL" clId="{3BBBE02E-ACD4-4586-9407-5E79BF620DF1}" dt="2026-10-05T12:29:08.034" v="8491" actId="20577"/>
+        <pc:chgData name="Jan Willem van den End (EBO_CMA)" userId="32ade95a-e024-4672-952f-5ed8641a9e00" providerId="ADAL" clId="{3BBBE02E-ACD4-4586-9407-5E79BF620DF1}" dt="2026-10-05T18:20:28.464" v="8673" actId="20577"/>
         <pc:sldMkLst>
           <pc:docMk/>
           <pc:sldMk cId="4129420739" sldId="786"/>
@@ -389,8 +389,8 @@
           </ac:picMkLst>
         </pc:picChg>
       </pc:sldChg>
-      <pc:sldChg chg="modSp mod modNotesTx">
-        <pc:chgData name="Jan Willem van den End (EBO_CMA)" userId="32ade95a-e024-4672-952f-5ed8641a9e00" providerId="ADAL" clId="{3BBBE02E-ACD4-4586-9407-5E79BF620DF1}" dt="2026-10-05T12:09:46.791" v="7927" actId="20577"/>
+      <pc:sldChg chg="modSp mod modNotes modNotesTx">
+        <pc:chgData name="Jan Willem van den End (EBO_CMA)" userId="32ade95a-e024-4672-952f-5ed8641a9e00" providerId="ADAL" clId="{3BBBE02E-ACD4-4586-9407-5E79BF620DF1}" dt="2026-10-05T18:20:55.721" v="8676" actId="20577"/>
         <pc:sldMkLst>
           <pc:docMk/>
           <pc:sldMk cId="515665883" sldId="793"/>
@@ -506,13 +506,13 @@
         </pc:picChg>
       </pc:sldChg>
       <pc:sldChg chg="modSp add mod modNotesTx">
-        <pc:chgData name="Jan Willem van den End (EBO_CMA)" userId="32ade95a-e024-4672-952f-5ed8641a9e00" providerId="ADAL" clId="{3BBBE02E-ACD4-4586-9407-5E79BF620DF1}" dt="2026-10-05T18:15:36.629" v="8580" actId="6549"/>
+        <pc:chgData name="Jan Willem van den End (EBO_CMA)" userId="32ade95a-e024-4672-952f-5ed8641a9e00" providerId="ADAL" clId="{3BBBE02E-ACD4-4586-9407-5E79BF620DF1}" dt="2026-10-05T18:22:31.744" v="8750"/>
         <pc:sldMkLst>
           <pc:docMk/>
           <pc:sldMk cId="341592472" sldId="797"/>
         </pc:sldMkLst>
         <pc:spChg chg="mod">
-          <ac:chgData name="Jan Willem van den End (EBO_CMA)" userId="32ade95a-e024-4672-952f-5ed8641a9e00" providerId="ADAL" clId="{3BBBE02E-ACD4-4586-9407-5E79BF620DF1}" dt="2026-10-05T18:15:36.629" v="8580" actId="6549"/>
+          <ac:chgData name="Jan Willem van den End (EBO_CMA)" userId="32ade95a-e024-4672-952f-5ed8641a9e00" providerId="ADAL" clId="{3BBBE02E-ACD4-4586-9407-5E79BF620DF1}" dt="2026-10-05T18:22:31.744" v="8750"/>
           <ac:spMkLst>
             <pc:docMk/>
             <pc:sldMk cId="341592472" sldId="797"/>
@@ -2636,79 +2636,79 @@
               <a:buChar char="-"/>
             </a:pPr>
             <a:r>
-              <a:rPr lang="nl-NL" dirty="0"/>
+              <a:rPr lang="nl-NL" sz="1400" dirty="0"/>
               <a:t>The variables </a:t>
             </a:r>
             <a:r>
-              <a:rPr lang="nl-NL" dirty="0" err="1"/>
+              <a:rPr lang="nl-NL" sz="1400" dirty="0" err="1"/>
               <a:t>for</a:t>
             </a:r>
             <a:r>
-              <a:rPr lang="nl-NL" dirty="0"/>
+              <a:rPr lang="nl-NL" sz="1400" dirty="0"/>
               <a:t> the investment </a:t>
             </a:r>
             <a:r>
-              <a:rPr lang="nl-NL" dirty="0" err="1"/>
+              <a:rPr lang="nl-NL" sz="1400" dirty="0" err="1"/>
               <a:t>channel</a:t>
             </a:r>
             <a:r>
-              <a:rPr lang="nl-NL" dirty="0"/>
+              <a:rPr lang="nl-NL" sz="1400" dirty="0"/>
               <a:t> are </a:t>
             </a:r>
             <a:r>
-              <a:rPr lang="nl-NL" dirty="0" err="1"/>
+              <a:rPr lang="nl-NL" sz="1400" dirty="0" err="1"/>
               <a:t>proxies</a:t>
             </a:r>
             <a:r>
-              <a:rPr lang="nl-NL" dirty="0"/>
+              <a:rPr lang="nl-NL" sz="1400" dirty="0"/>
               <a:t> </a:t>
             </a:r>
             <a:r>
-              <a:rPr lang="nl-NL" dirty="0" err="1"/>
+              <a:rPr lang="nl-NL" sz="1400" dirty="0" err="1"/>
               <a:t>for</a:t>
             </a:r>
             <a:r>
-              <a:rPr lang="nl-NL" dirty="0"/>
+              <a:rPr lang="nl-NL" sz="1400" dirty="0"/>
               <a:t> the </a:t>
             </a:r>
             <a:r>
-              <a:rPr lang="nl-NL" dirty="0" err="1"/>
+              <a:rPr lang="nl-NL" sz="1400" dirty="0" err="1"/>
               <a:t>use</a:t>
             </a:r>
             <a:r>
-              <a:rPr lang="nl-NL" dirty="0"/>
-              <a:t> and </a:t>
-            </a:r>
-            <a:r>
-              <a:rPr lang="nl-NL" dirty="0" err="1"/>
-              <a:t>extend</a:t>
-            </a:r>
-            <a:r>
-              <a:rPr lang="nl-NL" dirty="0"/>
+              <a:rPr lang="nl-NL" sz="1400" dirty="0"/>
+              <a:t> and the </a:t>
+            </a:r>
+            <a:r>
+              <a:rPr lang="nl-NL" sz="1400" dirty="0" err="1"/>
+              <a:t>extent</a:t>
+            </a:r>
+            <a:r>
+              <a:rPr lang="nl-NL" sz="1400" dirty="0"/>
               <a:t> of </a:t>
             </a:r>
             <a:r>
-              <a:rPr lang="nl-NL" dirty="0" err="1"/>
+              <a:rPr lang="nl-NL" sz="1400" dirty="0" err="1"/>
               <a:t>which</a:t>
             </a:r>
             <a:r>
-              <a:rPr lang="nl-NL" dirty="0"/>
+              <a:rPr lang="nl-NL" sz="1400" dirty="0"/>
               <a:t> AI/ICT is </a:t>
             </a:r>
             <a:r>
-              <a:rPr lang="nl-NL" dirty="0" err="1"/>
+              <a:rPr lang="nl-NL" sz="1400" dirty="0" err="1"/>
               <a:t>applied</a:t>
             </a:r>
             <a:r>
-              <a:rPr lang="nl-NL" dirty="0"/>
+              <a:rPr lang="nl-NL" sz="1400" dirty="0"/>
               <a:t> </a:t>
             </a:r>
             <a:r>
-              <a:rPr lang="nl-NL" dirty="0" err="1"/>
+              <a:rPr lang="nl-NL" sz="1400" dirty="0" err="1"/>
               <a:t>by</a:t>
             </a:r>
             <a:r>
-              <a:rPr lang="nl-NL" dirty="0"/>
+              <a:rPr lang="nl-NL" sz="1400" dirty="0"/>
               <a:t> companies. </a:t>
             </a:r>
           </a:p>
@@ -2858,8 +2858,8 @@
           </a:p>
         </p:txBody>
       </p:sp>
-      <mc:AlternateContent xmlns:mc="http://schemas.openxmlformats.org/markup-compatibility/2006" xmlns:a14="http://schemas.microsoft.com/office/drawing/2010/main">
-        <mc:Choice Requires="a14">
+      <mc:AlternateContent xmlns:mc="http://schemas.openxmlformats.org/markup-compatibility/2006">
+        <mc:Choice xmlns:a14="http://schemas.microsoft.com/office/drawing/2010/main" Requires="a14">
           <p:sp>
             <p:nvSpPr>
               <p:cNvPr id="3" name="Tijdelijke aanduiding voor notities 2">
@@ -2913,7 +2913,7 @@
                     <a:ea typeface="+mn-ea"/>
                     <a:cs typeface="+mn-cs"/>
                   </a:rPr>
-                  <a:t>We pool the GDP growth realizations in year t &amp;  t+1 and Spring &amp;  Autumn forecasts. Advantage of </a:t>
+                  <a:t>By pooling the GDP growth realizations in year t &amp;  t+1 and Spring &amp;  Autumn forecasts, you</a:t>
                 </a:r>
                 <a:r>
                   <a:rPr lang="en-NL" sz="1400" b="0" i="0" kern="1200" dirty="0">
@@ -2925,7 +2925,7 @@
                     <a:ea typeface="+mn-ea"/>
                     <a:cs typeface="+mn-cs"/>
                   </a:rPr>
-                  <a:t>pooling: it increases sample size and treats all forecasts as observations on the same forecasting problem.</a:t>
+                  <a:t> increases sample size and treats all forecasts as observations on the same forecasting problem.</a:t>
                 </a:r>
                 <a:r>
                   <a:rPr lang="en-US" sz="1400" b="0" i="0" kern="1200" dirty="0">
@@ -3193,460 +3193,6 @@
                   </a:rPr>
                   <a:t>add forecast-vintage controls:</a:t>
                 </a:r>
-              </a:p>
-              <a:p>
-                <a:pPr/>
-                <a14:m>
-                  <m:oMathPara xmlns:m="http://schemas.openxmlformats.org/officeDocument/2006/math">
-                    <m:oMath>
-                      <m:r>
-                        <a:rPr lang="en-NL" sz="1400" i="1" kern="1200">
-                          <a:solidFill>
-                            <a:schemeClr val="tx1"/>
-                          </a:solidFill>
-                          <a:latin typeface="Cambria Math" panose="02040503050406030204" pitchFamily="18" charset="0"/>
-                          <a:ea typeface="+mn-ea"/>
-                          <a:cs typeface="+mn-cs"/>
-                        </a:rPr>
-                        <m:t>𝑃</m:t>
-                      </m:r>
-                      <m:d>
-                        <m:dPr>
-                          <m:ctrlPr>
-                            <a:rPr lang="en-NL" sz="1400" i="1" kern="1200">
-                              <a:solidFill>
-                                <a:schemeClr val="tx1"/>
-                              </a:solidFill>
-                              <a:latin typeface="Cambria Math" panose="02040503050406030204" pitchFamily="18" charset="0"/>
-                              <a:ea typeface="+mn-ea"/>
-                              <a:cs typeface="+mn-cs"/>
-                            </a:rPr>
-                          </m:ctrlPr>
-                        </m:dPr>
-                        <m:e>
-                          <m:r>
-                            <a:rPr lang="en-NL" sz="1400" i="1" kern="1200">
-                              <a:solidFill>
-                                <a:schemeClr val="tx1"/>
-                              </a:solidFill>
-                              <a:latin typeface="Cambria Math" panose="02040503050406030204" pitchFamily="18" charset="0"/>
-                              <a:ea typeface="+mn-ea"/>
-                              <a:cs typeface="+mn-cs"/>
-                            </a:rPr>
-                            <m:t>𝑦</m:t>
-                          </m:r>
-                          <m:r>
-                            <a:rPr lang="en-NL" sz="1400" i="0" kern="1200">
-                              <a:solidFill>
-                                <a:schemeClr val="tx1"/>
-                              </a:solidFill>
-                              <a:latin typeface="Cambria Math" panose="02040503050406030204" pitchFamily="18" charset="0"/>
-                              <a:ea typeface="+mn-ea"/>
-                              <a:cs typeface="+mn-cs"/>
-                            </a:rPr>
-                            <m:t>=1</m:t>
-                          </m:r>
-                        </m:e>
-                      </m:d>
-                      <m:r>
-                        <a:rPr lang="en-NL" sz="1400" i="0" kern="1200">
-                          <a:solidFill>
-                            <a:schemeClr val="tx1"/>
-                          </a:solidFill>
-                          <a:latin typeface="Cambria Math" panose="02040503050406030204" pitchFamily="18" charset="0"/>
-                          <a:ea typeface="+mn-ea"/>
-                          <a:cs typeface="+mn-cs"/>
-                        </a:rPr>
-                        <m:t>=</m:t>
-                      </m:r>
-                      <m:r>
-                        <m:rPr>
-                          <m:sty m:val="p"/>
-                        </m:rPr>
-                        <a:rPr lang="en-NL" sz="1400" i="0" kern="1200">
-                          <a:solidFill>
-                            <a:schemeClr val="tx1"/>
-                          </a:solidFill>
-                          <a:latin typeface="Cambria Math" panose="02040503050406030204" pitchFamily="18" charset="0"/>
-                          <a:ea typeface="+mn-ea"/>
-                          <a:cs typeface="+mn-cs"/>
-                        </a:rPr>
-                        <m:t>Φ</m:t>
-                      </m:r>
-                      <m:d>
-                        <m:dPr>
-                          <m:ctrlPr>
-                            <a:rPr lang="en-NL" sz="1400" i="1" kern="1200">
-                              <a:solidFill>
-                                <a:schemeClr val="tx1"/>
-                              </a:solidFill>
-                              <a:latin typeface="Cambria Math" panose="02040503050406030204" pitchFamily="18" charset="0"/>
-                              <a:ea typeface="+mn-ea"/>
-                              <a:cs typeface="+mn-cs"/>
-                            </a:rPr>
-                          </m:ctrlPr>
-                        </m:dPr>
-                        <m:e>
-                          <m:sSub>
-                            <m:sSubPr>
-                              <m:ctrlPr>
-                                <a:rPr lang="en-NL" sz="1400" i="1" kern="1200">
-                                  <a:solidFill>
-                                    <a:schemeClr val="tx1"/>
-                                  </a:solidFill>
-                                  <a:latin typeface="Cambria Math" panose="02040503050406030204" pitchFamily="18" charset="0"/>
-                                  <a:ea typeface="+mn-ea"/>
-                                  <a:cs typeface="+mn-cs"/>
-                                </a:rPr>
-                              </m:ctrlPr>
-                            </m:sSubPr>
-                            <m:e>
-                              <m:r>
-                                <a:rPr lang="en-NL" sz="1400" i="1" kern="1200">
-                                  <a:solidFill>
-                                    <a:schemeClr val="tx1"/>
-                                  </a:solidFill>
-                                  <a:latin typeface="Cambria Math" panose="02040503050406030204" pitchFamily="18" charset="0"/>
-                                  <a:ea typeface="+mn-ea"/>
-                                  <a:cs typeface="+mn-cs"/>
-                                </a:rPr>
-                                <m:t>𝛽</m:t>
-                              </m:r>
-                            </m:e>
-                            <m:sub>
-                              <m:r>
-                                <a:rPr lang="en-NL" sz="1400" i="0" kern="1200">
-                                  <a:solidFill>
-                                    <a:schemeClr val="tx1"/>
-                                  </a:solidFill>
-                                  <a:latin typeface="Cambria Math" panose="02040503050406030204" pitchFamily="18" charset="0"/>
-                                  <a:ea typeface="+mn-ea"/>
-                                  <a:cs typeface="+mn-cs"/>
-                                </a:rPr>
-                                <m:t>1</m:t>
-                              </m:r>
-                            </m:sub>
-                          </m:sSub>
-                          <m:r>
-                            <a:rPr lang="en-NL" sz="1400" i="1" kern="1200">
-                              <a:solidFill>
-                                <a:schemeClr val="tx1"/>
-                              </a:solidFill>
-                              <a:latin typeface="Cambria Math" panose="02040503050406030204" pitchFamily="18" charset="0"/>
-                              <a:ea typeface="+mn-ea"/>
-                              <a:cs typeface="+mn-cs"/>
-                            </a:rPr>
-                            <m:t>𝐴𝐼</m:t>
-                          </m:r>
-                          <m:r>
-                            <a:rPr lang="en-NL" sz="1400" i="0" kern="1200">
-                              <a:solidFill>
-                                <a:schemeClr val="tx1"/>
-                              </a:solidFill>
-                              <a:latin typeface="Cambria Math" panose="02040503050406030204" pitchFamily="18" charset="0"/>
-                              <a:ea typeface="+mn-ea"/>
-                              <a:cs typeface="+mn-cs"/>
-                            </a:rPr>
-                            <m:t>+</m:t>
-                          </m:r>
-                          <m:sSub>
-                            <m:sSubPr>
-                              <m:ctrlPr>
-                                <a:rPr lang="en-NL" sz="1400" i="1" kern="1200">
-                                  <a:solidFill>
-                                    <a:schemeClr val="tx1"/>
-                                  </a:solidFill>
-                                  <a:latin typeface="Cambria Math" panose="02040503050406030204" pitchFamily="18" charset="0"/>
-                                  <a:ea typeface="+mn-ea"/>
-                                  <a:cs typeface="+mn-cs"/>
-                                </a:rPr>
-                              </m:ctrlPr>
-                            </m:sSubPr>
-                            <m:e>
-                              <m:r>
-                                <a:rPr lang="en-NL" sz="1400" i="1" kern="1200">
-                                  <a:solidFill>
-                                    <a:schemeClr val="tx1"/>
-                                  </a:solidFill>
-                                  <a:latin typeface="Cambria Math" panose="02040503050406030204" pitchFamily="18" charset="0"/>
-                                  <a:ea typeface="+mn-ea"/>
-                                  <a:cs typeface="+mn-cs"/>
-                                </a:rPr>
-                                <m:t>𝛽</m:t>
-                              </m:r>
-                            </m:e>
-                            <m:sub>
-                              <m:r>
-                                <a:rPr lang="en-NL" sz="1400" i="0" kern="1200">
-                                  <a:solidFill>
-                                    <a:schemeClr val="tx1"/>
-                                  </a:solidFill>
-                                  <a:latin typeface="Cambria Math" panose="02040503050406030204" pitchFamily="18" charset="0"/>
-                                  <a:ea typeface="+mn-ea"/>
-                                  <a:cs typeface="+mn-cs"/>
-                                </a:rPr>
-                                <m:t>2</m:t>
-                              </m:r>
-                            </m:sub>
-                          </m:sSub>
-                          <m:r>
-                            <a:rPr lang="en-NL" sz="1400" i="1" kern="1200">
-                              <a:solidFill>
-                                <a:schemeClr val="tx1"/>
-                              </a:solidFill>
-                              <a:latin typeface="Cambria Math" panose="02040503050406030204" pitchFamily="18" charset="0"/>
-                              <a:ea typeface="+mn-ea"/>
-                              <a:cs typeface="+mn-cs"/>
-                            </a:rPr>
-                            <m:t>𝐼𝐶𝑇</m:t>
-                          </m:r>
-                          <m:r>
-                            <a:rPr lang="en-NL" sz="1400" i="0" kern="1200">
-                              <a:solidFill>
-                                <a:schemeClr val="tx1"/>
-                              </a:solidFill>
-                              <a:latin typeface="Cambria Math" panose="02040503050406030204" pitchFamily="18" charset="0"/>
-                              <a:ea typeface="+mn-ea"/>
-                              <a:cs typeface="+mn-cs"/>
-                            </a:rPr>
-                            <m:t>+</m:t>
-                          </m:r>
-                          <m:sSub>
-                            <m:sSubPr>
-                              <m:ctrlPr>
-                                <a:rPr lang="en-NL" sz="1400" i="1" kern="1200">
-                                  <a:solidFill>
-                                    <a:schemeClr val="tx1"/>
-                                  </a:solidFill>
-                                  <a:latin typeface="Cambria Math" panose="02040503050406030204" pitchFamily="18" charset="0"/>
-                                  <a:ea typeface="+mn-ea"/>
-                                  <a:cs typeface="+mn-cs"/>
-                                </a:rPr>
-                              </m:ctrlPr>
-                            </m:sSubPr>
-                            <m:e>
-                              <m:r>
-                                <a:rPr lang="en-NL" sz="1400" i="1" kern="1200">
-                                  <a:solidFill>
-                                    <a:schemeClr val="tx1"/>
-                                  </a:solidFill>
-                                  <a:latin typeface="Cambria Math" panose="02040503050406030204" pitchFamily="18" charset="0"/>
-                                  <a:ea typeface="+mn-ea"/>
-                                  <a:cs typeface="+mn-cs"/>
-                                </a:rPr>
-                                <m:t>𝛾</m:t>
-                              </m:r>
-                            </m:e>
-                            <m:sub>
-                              <m:r>
-                                <a:rPr lang="en-NL" sz="1400" i="0" kern="1200">
-                                  <a:solidFill>
-                                    <a:schemeClr val="tx1"/>
-                                  </a:solidFill>
-                                  <a:latin typeface="Cambria Math" panose="02040503050406030204" pitchFamily="18" charset="0"/>
-                                  <a:ea typeface="+mn-ea"/>
-                                  <a:cs typeface="+mn-cs"/>
-                                </a:rPr>
-                                <m:t>1</m:t>
-                              </m:r>
-                            </m:sub>
-                          </m:sSub>
-                          <m:r>
-                            <a:rPr lang="en-NL" sz="1400" i="1" kern="1200">
-                              <a:solidFill>
-                                <a:schemeClr val="tx1"/>
-                              </a:solidFill>
-                              <a:latin typeface="Cambria Math" panose="02040503050406030204" pitchFamily="18" charset="0"/>
-                              <a:ea typeface="+mn-ea"/>
-                              <a:cs typeface="+mn-cs"/>
-                            </a:rPr>
-                            <m:t>𝐴𝑢𝑡𝑢𝑚𝑛</m:t>
-                          </m:r>
-                          <m:r>
-                            <a:rPr lang="en-NL" sz="1400" i="0" kern="1200">
-                              <a:solidFill>
-                                <a:schemeClr val="tx1"/>
-                              </a:solidFill>
-                              <a:latin typeface="Cambria Math" panose="02040503050406030204" pitchFamily="18" charset="0"/>
-                              <a:ea typeface="+mn-ea"/>
-                              <a:cs typeface="+mn-cs"/>
-                            </a:rPr>
-                            <m:t>+</m:t>
-                          </m:r>
-                          <m:sSub>
-                            <m:sSubPr>
-                              <m:ctrlPr>
-                                <a:rPr lang="en-NL" sz="1400" i="1" kern="1200">
-                                  <a:solidFill>
-                                    <a:schemeClr val="tx1"/>
-                                  </a:solidFill>
-                                  <a:latin typeface="Cambria Math" panose="02040503050406030204" pitchFamily="18" charset="0"/>
-                                  <a:ea typeface="+mn-ea"/>
-                                  <a:cs typeface="+mn-cs"/>
-                                </a:rPr>
-                              </m:ctrlPr>
-                            </m:sSubPr>
-                            <m:e>
-                              <m:r>
-                                <a:rPr lang="en-NL" sz="1400" i="1" kern="1200">
-                                  <a:solidFill>
-                                    <a:schemeClr val="tx1"/>
-                                  </a:solidFill>
-                                  <a:latin typeface="Cambria Math" panose="02040503050406030204" pitchFamily="18" charset="0"/>
-                                  <a:ea typeface="+mn-ea"/>
-                                  <a:cs typeface="+mn-cs"/>
-                                </a:rPr>
-                                <m:t>𝛾</m:t>
-                              </m:r>
-                            </m:e>
-                            <m:sub>
-                              <m:r>
-                                <a:rPr lang="en-NL" sz="1400" i="0" kern="1200">
-                                  <a:solidFill>
-                                    <a:schemeClr val="tx1"/>
-                                  </a:solidFill>
-                                  <a:latin typeface="Cambria Math" panose="02040503050406030204" pitchFamily="18" charset="0"/>
-                                  <a:ea typeface="+mn-ea"/>
-                                  <a:cs typeface="+mn-cs"/>
-                                </a:rPr>
-                                <m:t>2</m:t>
-                              </m:r>
-                            </m:sub>
-                          </m:sSub>
-                          <m:r>
-                            <a:rPr lang="en-NL" sz="1400" i="1" kern="1200">
-                              <a:solidFill>
-                                <a:schemeClr val="tx1"/>
-                              </a:solidFill>
-                              <a:latin typeface="Cambria Math" panose="02040503050406030204" pitchFamily="18" charset="0"/>
-                              <a:ea typeface="+mn-ea"/>
-                              <a:cs typeface="+mn-cs"/>
-                            </a:rPr>
-                            <m:t>𝐻𝑜𝑟𝑖𝑧𝑜</m:t>
-                          </m:r>
-                          <m:sSub>
-                            <m:sSubPr>
-                              <m:ctrlPr>
-                                <a:rPr lang="en-NL" sz="1400" i="1" kern="1200">
-                                  <a:solidFill>
-                                    <a:schemeClr val="tx1"/>
-                                  </a:solidFill>
-                                  <a:latin typeface="Cambria Math" panose="02040503050406030204" pitchFamily="18" charset="0"/>
-                                  <a:ea typeface="+mn-ea"/>
-                                  <a:cs typeface="+mn-cs"/>
-                                </a:rPr>
-                              </m:ctrlPr>
-                            </m:sSubPr>
-                            <m:e>
-                              <m:r>
-                                <a:rPr lang="en-NL" sz="1400" i="1" kern="1200">
-                                  <a:solidFill>
-                                    <a:schemeClr val="tx1"/>
-                                  </a:solidFill>
-                                  <a:latin typeface="Cambria Math" panose="02040503050406030204" pitchFamily="18" charset="0"/>
-                                  <a:ea typeface="+mn-ea"/>
-                                  <a:cs typeface="+mn-cs"/>
-                                </a:rPr>
-                                <m:t>𝑛</m:t>
-                              </m:r>
-                            </m:e>
-                            <m:sub>
-                              <m:r>
-                                <a:rPr lang="en-NL" sz="1400" i="1" kern="1200">
-                                  <a:solidFill>
-                                    <a:schemeClr val="tx1"/>
-                                  </a:solidFill>
-                                  <a:latin typeface="Cambria Math" panose="02040503050406030204" pitchFamily="18" charset="0"/>
-                                  <a:ea typeface="+mn-ea"/>
-                                  <a:cs typeface="+mn-cs"/>
-                                </a:rPr>
-                                <m:t>𝑡</m:t>
-                              </m:r>
-                              <m:r>
-                                <a:rPr lang="en-NL" sz="1400" i="0" kern="1200">
-                                  <a:solidFill>
-                                    <a:schemeClr val="tx1"/>
-                                  </a:solidFill>
-                                  <a:latin typeface="Cambria Math" panose="02040503050406030204" pitchFamily="18" charset="0"/>
-                                  <a:ea typeface="+mn-ea"/>
-                                  <a:cs typeface="+mn-cs"/>
-                                </a:rPr>
-                                <m:t>+1</m:t>
-                              </m:r>
-                            </m:sub>
-                          </m:sSub>
-                          <m:r>
-                            <a:rPr lang="en-NL" sz="1400" i="0" kern="1200">
-                              <a:solidFill>
-                                <a:schemeClr val="tx1"/>
-                              </a:solidFill>
-                              <a:latin typeface="Cambria Math" panose="02040503050406030204" pitchFamily="18" charset="0"/>
-                              <a:ea typeface="+mn-ea"/>
-                              <a:cs typeface="+mn-cs"/>
-                            </a:rPr>
-                            <m:t>+</m:t>
-                          </m:r>
-                          <m:r>
-                            <m:rPr>
-                              <m:nor/>
-                            </m:rPr>
-                            <a:rPr lang="en-NL" sz="1400" b="0" i="0" kern="1200">
-                              <a:solidFill>
-                                <a:schemeClr val="tx1"/>
-                              </a:solidFill>
-                              <a:latin typeface="+mn-lt"/>
-                              <a:ea typeface="+mn-ea"/>
-                              <a:cs typeface="+mn-cs"/>
-                            </a:rPr>
-                            <m:t>controls</m:t>
-                          </m:r>
-                        </m:e>
-                      </m:d>
-                    </m:oMath>
-                  </m:oMathPara>
-                </a14:m>
-                <a:endParaRPr lang="en-NL" sz="1400" b="0" dirty="0"/>
-              </a:p>
-              <a:p>
-                <a:pPr lvl="0" fontAlgn="t"/>
-                <a14:m>
-                  <m:oMath xmlns:m="http://schemas.openxmlformats.org/officeDocument/2006/math">
-                    <m:r>
-                      <a:rPr lang="en-NL" sz="1400" i="1" kern="1200">
-                        <a:solidFill>
-                          <a:schemeClr val="tx1"/>
-                        </a:solidFill>
-                        <a:latin typeface="Cambria Math" panose="02040503050406030204" pitchFamily="18" charset="0"/>
-                        <a:ea typeface="+mn-ea"/>
-                        <a:cs typeface="+mn-cs"/>
-                      </a:rPr>
-                      <m:t>𝐴𝑢𝑡𝑢𝑚𝑛</m:t>
-                    </m:r>
-                    <m:r>
-                      <a:rPr lang="en-NL" sz="1400" i="0" kern="1200">
-                        <a:solidFill>
-                          <a:schemeClr val="tx1"/>
-                        </a:solidFill>
-                        <a:latin typeface="Cambria Math" panose="02040503050406030204" pitchFamily="18" charset="0"/>
-                        <a:ea typeface="+mn-ea"/>
-                        <a:cs typeface="+mn-cs"/>
-                      </a:rPr>
-                      <m:t>=1</m:t>
-                    </m:r>
-                  </m:oMath>
-                </a14:m>
-                <a:r>
-                  <a:rPr lang="en-NL" sz="1400" b="0" i="0" kern="1200" dirty="0">
-                    <a:solidFill>
-                      <a:schemeClr val="tx1"/>
-                    </a:solidFill>
-                    <a:effectLst/>
-                    <a:latin typeface="+mn-lt"/>
-                    <a:ea typeface="+mn-ea"/>
-                    <a:cs typeface="+mn-cs"/>
-                  </a:rPr>
-                  <a:t>for Autumn forecasts</a:t>
-                </a:r>
                 <a:r>
                   <a:rPr lang="en-US" sz="1400" b="0" i="0" kern="1200" dirty="0">
                     <a:solidFill>
@@ -3657,127 +3203,7 @@
                     <a:ea typeface="+mn-ea"/>
                     <a:cs typeface="+mn-cs"/>
                   </a:rPr>
-                  <a:t> // </a:t>
-                </a:r>
-                <a14:m>
-                  <m:oMath xmlns:m="http://schemas.openxmlformats.org/officeDocument/2006/math">
-                    <m:r>
-                      <a:rPr lang="en-NL" sz="1400" i="1" kern="1200">
-                        <a:solidFill>
-                          <a:schemeClr val="tx1"/>
-                        </a:solidFill>
-                        <a:latin typeface="Cambria Math" panose="02040503050406030204" pitchFamily="18" charset="0"/>
-                        <a:ea typeface="+mn-ea"/>
-                        <a:cs typeface="+mn-cs"/>
-                      </a:rPr>
-                      <m:t>𝐻𝑜𝑟𝑖𝑧𝑜</m:t>
-                    </m:r>
-                    <m:sSub>
-                      <m:sSubPr>
-                        <m:ctrlPr>
-                          <a:rPr lang="en-NL" sz="1400" i="1" kern="1200">
-                            <a:solidFill>
-                              <a:schemeClr val="tx1"/>
-                            </a:solidFill>
-                            <a:latin typeface="Cambria Math" panose="02040503050406030204" pitchFamily="18" charset="0"/>
-                            <a:ea typeface="+mn-ea"/>
-                            <a:cs typeface="+mn-cs"/>
-                          </a:rPr>
-                        </m:ctrlPr>
-                      </m:sSubPr>
-                      <m:e>
-                        <m:r>
-                          <a:rPr lang="en-NL" sz="1400" i="1" kern="1200">
-                            <a:solidFill>
-                              <a:schemeClr val="tx1"/>
-                            </a:solidFill>
-                            <a:latin typeface="Cambria Math" panose="02040503050406030204" pitchFamily="18" charset="0"/>
-                            <a:ea typeface="+mn-ea"/>
-                            <a:cs typeface="+mn-cs"/>
-                          </a:rPr>
-                          <m:t>𝑛</m:t>
-                        </m:r>
-                      </m:e>
-                      <m:sub>
-                        <m:r>
-                          <a:rPr lang="en-NL" sz="1400" i="1" kern="1200">
-                            <a:solidFill>
-                              <a:schemeClr val="tx1"/>
-                            </a:solidFill>
-                            <a:latin typeface="Cambria Math" panose="02040503050406030204" pitchFamily="18" charset="0"/>
-                            <a:ea typeface="+mn-ea"/>
-                            <a:cs typeface="+mn-cs"/>
-                          </a:rPr>
-                          <m:t>𝑡</m:t>
-                        </m:r>
-                        <m:r>
-                          <a:rPr lang="en-NL" sz="1400" i="0" kern="1200">
-                            <a:solidFill>
-                              <a:schemeClr val="tx1"/>
-                            </a:solidFill>
-                            <a:latin typeface="Cambria Math" panose="02040503050406030204" pitchFamily="18" charset="0"/>
-                            <a:ea typeface="+mn-ea"/>
-                            <a:cs typeface="+mn-cs"/>
-                          </a:rPr>
-                          <m:t>+1</m:t>
-                        </m:r>
-                      </m:sub>
-                    </m:sSub>
-                    <m:r>
-                      <a:rPr lang="en-NL" sz="1400" i="0" kern="1200">
-                        <a:solidFill>
-                          <a:schemeClr val="tx1"/>
-                        </a:solidFill>
-                        <a:latin typeface="Cambria Math" panose="02040503050406030204" pitchFamily="18" charset="0"/>
-                        <a:ea typeface="+mn-ea"/>
-                        <a:cs typeface="+mn-cs"/>
-                      </a:rPr>
-                      <m:t>=1</m:t>
-                    </m:r>
-                  </m:oMath>
-                </a14:m>
-                <a:r>
-                  <a:rPr lang="en-NL" sz="1400" b="0" i="0" kern="1200" dirty="0">
-                    <a:solidFill>
-                      <a:schemeClr val="tx1"/>
-                    </a:solidFill>
-                    <a:effectLst/>
-                    <a:latin typeface="+mn-lt"/>
-                    <a:ea typeface="+mn-ea"/>
-                    <a:cs typeface="+mn-cs"/>
-                  </a:rPr>
-                  <a:t>for next-year forecasts</a:t>
-                </a:r>
-              </a:p>
-              <a:p>
-                <a:pPr marL="0" marR="0" lvl="0" indent="0" algn="l" defTabSz="914400" rtl="0" eaLnBrk="1" fontAlgn="t" latinLnBrk="0" hangingPunct="1">
-                  <a:lnSpc>
-                    <a:spcPct val="100000"/>
-                  </a:lnSpc>
-                  <a:spcBef>
-                    <a:spcPts val="0"/>
-                  </a:spcBef>
-                  <a:spcAft>
-                    <a:spcPts val="0"/>
-                  </a:spcAft>
-                  <a:buClrTx/>
-                  <a:buSzTx/>
-                  <a:buFontTx/>
-                  <a:buNone/>
-                  <a:tabLst/>
-                  <a:defRPr/>
-                </a:pPr>
-                <a:r>
-                  <a:rPr lang="en-US" sz="1400" b="0" i="0" kern="1200" dirty="0">
-                    <a:solidFill>
-                      <a:schemeClr val="tx1"/>
-                    </a:solidFill>
-                    <a:effectLst/>
-                    <a:latin typeface="+mn-lt"/>
-                    <a:ea typeface="+mn-ea"/>
-                    <a:cs typeface="+mn-cs"/>
-                  </a:rPr>
-                  <a:t>….. t</a:t>
+                  <a:t> Autumn, horizon t+1, Autumn x horizon t+1 (Spring forecasts &amp; forecasts for year t are the omitted reference categories). These terms control for systematic differences between Spring/Autumn forecasts and t/t+1 horizons….. t</a:t>
                 </a:r>
                 <a:r>
                   <a:rPr lang="en-NL" sz="1400" b="0" i="0" kern="1200" dirty="0">
@@ -3801,7 +3227,7 @@
                     <a:ea typeface="+mn-ea"/>
                     <a:cs typeface="+mn-cs"/>
                   </a:rPr>
-                  <a:t> //  </a:t>
+                  <a:t> //</a:t>
                 </a:r>
                 <a:r>
                   <a:rPr lang="en-NL" sz="1400" b="0" i="0" kern="1200" dirty="0">
@@ -3813,55 +3239,7 @@
                     <a:ea typeface="+mn-ea"/>
                     <a:cs typeface="+mn-cs"/>
                   </a:rPr>
-                  <a:t>vintage controls absorb average differences in forecasting difficulty and information availability across forecast types</a:t>
-                </a:r>
-                <a:r>
-                  <a:rPr lang="en-US" sz="1400" b="0" i="0" kern="1200" dirty="0">
-                    <a:solidFill>
-                      <a:schemeClr val="tx1"/>
-                    </a:solidFill>
-                    <a:effectLst/>
-                    <a:latin typeface="+mn-lt"/>
-                    <a:ea typeface="+mn-ea"/>
-                    <a:cs typeface="+mn-cs"/>
-                  </a:rPr>
-                  <a:t> =&gt; controls </a:t>
-                </a:r>
-                <a:r>
-                  <a:rPr lang="en-NL" sz="1400" b="0" i="0" kern="1200" dirty="0">
-                    <a:solidFill>
-                      <a:schemeClr val="tx1"/>
-                    </a:solidFill>
-                    <a:effectLst/>
-                    <a:latin typeface="+mn-lt"/>
-                    <a:ea typeface="+mn-ea"/>
-                    <a:cs typeface="+mn-cs"/>
-                  </a:rPr>
-                  <a:t>capture the average difference between Spring </a:t>
-                </a:r>
-                <a:r>
-                  <a:rPr lang="en-US" sz="1400" b="0" i="0" kern="1200" dirty="0">
-                    <a:solidFill>
-                      <a:schemeClr val="tx1"/>
-                    </a:solidFill>
-                    <a:effectLst/>
-                    <a:latin typeface="+mn-lt"/>
-                    <a:ea typeface="+mn-ea"/>
-                    <a:cs typeface="+mn-cs"/>
-                  </a:rPr>
-                  <a:t>&amp;</a:t>
-                </a:r>
-                <a:r>
-                  <a:rPr lang="en-NL" sz="1400" b="0" i="0" kern="1200" dirty="0">
-                    <a:solidFill>
-                      <a:schemeClr val="tx1"/>
-                    </a:solidFill>
-                    <a:effectLst/>
-                    <a:latin typeface="+mn-lt"/>
-                    <a:ea typeface="+mn-ea"/>
-                    <a:cs typeface="+mn-cs"/>
-                  </a:rPr>
-                  <a:t> Autumn forecasts, holding AI constant</a:t>
+                  <a:t> holding AI constant</a:t>
                 </a:r>
               </a:p>
               <a:p>
@@ -4186,7 +3564,7 @@
             </p:txBody>
           </p:sp>
         </mc:Choice>
-        <mc:Fallback xmlns="">
+        <mc:Fallback>
           <p:sp>
             <p:nvSpPr>
               <p:cNvPr id="3" name="Tijdelijke aanduiding voor notities 2">
@@ -4240,7 +3618,7 @@
                     <a:ea typeface="+mn-ea"/>
                     <a:cs typeface="+mn-cs"/>
                   </a:rPr>
-                  <a:t>We pool the GDP growth realizations in year t &amp;  t+1 and Spring &amp;  Autumn forecasts. Advantage of </a:t>
+                  <a:t>By pooling the GDP growth realizations in year t &amp;  t+1 and Spring &amp;  Autumn forecasts, you</a:t>
                 </a:r>
                 <a:r>
                   <a:rPr lang="en-NL" sz="1400" b="0" i="0" kern="1200" dirty="0">
@@ -4252,7 +3630,7 @@
                     <a:ea typeface="+mn-ea"/>
                     <a:cs typeface="+mn-cs"/>
                   </a:rPr>
-                  <a:t>pooling: it increases sample size and treats all forecasts as observations on the same forecasting problem.</a:t>
+                  <a:t> increases sample size and treats all forecasts as observations on the same forecasting problem.</a:t>
                 </a:r>
                 <a:r>
                   <a:rPr lang="en-US" sz="1400" b="0" i="0" kern="1200" dirty="0">
@@ -4520,69 +3898,6 @@
                   </a:rPr>
                   <a:t>add forecast-vintage controls:</a:t>
                 </a:r>
-              </a:p>
-              <a:p>
-                <a:pPr/>
-                <a:r>
-                  <a:rPr lang="en-NL" sz="1400" i="0" kern="1200">
-                    <a:solidFill>
-                      <a:schemeClr val="tx1"/>
-                    </a:solidFill>
-                    <a:latin typeface="Cambria Math" panose="02040503050406030204" pitchFamily="18" charset="0"/>
-                    <a:ea typeface="+mn-ea"/>
-                    <a:cs typeface="+mn-cs"/>
-                  </a:rPr>
-                  <a:t>𝑃(𝑦=1)=Φ(𝛽_1 𝐴𝐼+𝛽_2 𝐼𝐶𝑇+𝛾_1 𝐴𝑢𝑡𝑢𝑚𝑛+𝛾_2 𝐻𝑜𝑟𝑖𝑧𝑜𝑛_(𝑡+1)+</a:t>
-                </a:r>
-                <a:r>
-                  <a:rPr lang="en-NL" sz="1400" b="0" i="0" kern="1200">
-                    <a:solidFill>
-                      <a:schemeClr val="tx1"/>
-                    </a:solidFill>
-                    <a:latin typeface="+mn-lt"/>
-                    <a:ea typeface="+mn-ea"/>
-                    <a:cs typeface="+mn-cs"/>
-                  </a:rPr>
-                  <a:t>"controls</a:t>
-                </a:r>
-                <a:r>
-                  <a:rPr lang="en-NL" sz="1400" b="0" i="0" kern="1200">
-                    <a:solidFill>
-                      <a:schemeClr val="tx1"/>
-                    </a:solidFill>
-                    <a:latin typeface="Cambria Math" panose="02040503050406030204" pitchFamily="18" charset="0"/>
-                    <a:ea typeface="+mn-ea"/>
-                    <a:cs typeface="+mn-cs"/>
-                  </a:rPr>
-                  <a:t>" )</a:t>
-                </a:r>
-                <a:endParaRPr lang="en-NL" sz="1400" b="0" dirty="0"/>
-              </a:p>
-              <a:p>
-                <a:pPr lvl="0" fontAlgn="t"/>
-                <a:r>
-                  <a:rPr lang="en-NL" sz="1400" i="0" kern="1200">
-                    <a:solidFill>
-                      <a:schemeClr val="tx1"/>
-                    </a:solidFill>
-                    <a:latin typeface="Cambria Math" panose="02040503050406030204" pitchFamily="18" charset="0"/>
-                    <a:ea typeface="+mn-ea"/>
-                    <a:cs typeface="+mn-cs"/>
-                  </a:rPr>
-                  <a:t>𝐴𝑢𝑡𝑢𝑚𝑛=1</a:t>
-                </a:r>
-                <a:r>
-                  <a:rPr lang="en-NL" sz="1400" b="0" i="0" kern="1200" dirty="0">
-                    <a:solidFill>
-                      <a:schemeClr val="tx1"/>
-                    </a:solidFill>
-                    <a:effectLst/>
-                    <a:latin typeface="+mn-lt"/>
-                    <a:ea typeface="+mn-ea"/>
-                    <a:cs typeface="+mn-cs"/>
-                  </a:rPr>
-                  <a:t>for Autumn forecasts</a:t>
-                </a:r>
                 <a:r>
                   <a:rPr lang="en-US" sz="1400" b="0" i="0" kern="1200" dirty="0">
                     <a:solidFill>
@@ -4593,61 +3908,7 @@
                     <a:ea typeface="+mn-ea"/>
                     <a:cs typeface="+mn-cs"/>
                   </a:rPr>
-                  <a:t> // </a:t>
-                </a:r>
-                <a:r>
-                  <a:rPr lang="en-NL" sz="1400" i="0" kern="1200">
-                    <a:solidFill>
-                      <a:schemeClr val="tx1"/>
-                    </a:solidFill>
-                    <a:latin typeface="Cambria Math" panose="02040503050406030204" pitchFamily="18" charset="0"/>
-                    <a:ea typeface="+mn-ea"/>
-                    <a:cs typeface="+mn-cs"/>
-                  </a:rPr>
-                  <a:t>𝐻𝑜𝑟𝑖𝑧𝑜𝑛_(𝑡+1)=1</a:t>
-                </a:r>
-                <a:r>
-                  <a:rPr lang="en-NL" sz="1400" b="0" i="0" kern="1200" dirty="0">
-                    <a:solidFill>
-                      <a:schemeClr val="tx1"/>
-                    </a:solidFill>
-                    <a:effectLst/>
-                    <a:latin typeface="+mn-lt"/>
-                    <a:ea typeface="+mn-ea"/>
-                    <a:cs typeface="+mn-cs"/>
-                  </a:rPr>
-                  <a:t>for next-year forecasts</a:t>
-                </a:r>
-              </a:p>
-              <a:p>
-                <a:pPr marL="0" marR="0" lvl="0" indent="0" algn="l" defTabSz="914400" rtl="0" eaLnBrk="1" fontAlgn="t" latinLnBrk="0" hangingPunct="1">
-                  <a:lnSpc>
-                    <a:spcPct val="100000"/>
-                  </a:lnSpc>
-                  <a:spcBef>
-                    <a:spcPts val="0"/>
-                  </a:spcBef>
-                  <a:spcAft>
-                    <a:spcPts val="0"/>
-                  </a:spcAft>
-                  <a:buClrTx/>
-                  <a:buSzTx/>
-                  <a:buFontTx/>
-                  <a:buNone/>
-                  <a:tabLst/>
-                  <a:defRPr/>
-                </a:pPr>
-                <a:r>
-                  <a:rPr lang="en-US" sz="1400" b="0" i="0" kern="1200" dirty="0">
-                    <a:solidFill>
-                      <a:schemeClr val="tx1"/>
-                    </a:solidFill>
-                    <a:effectLst/>
-                    <a:latin typeface="+mn-lt"/>
-                    <a:ea typeface="+mn-ea"/>
-                    <a:cs typeface="+mn-cs"/>
-                  </a:rPr>
-                  <a:t>….. t</a:t>
+                  <a:t> Autumn, horizon t+1, Autumn x horizon t+1 (Spring forecasts &amp; forecasts for year t are the omitted reference categories). These terms control for systematic differences between Spring/Autumn forecasts and t/t+1 horizons….. t</a:t>
                 </a:r>
                 <a:r>
                   <a:rPr lang="en-NL" sz="1400" b="0" i="0" kern="1200" dirty="0">
@@ -4671,7 +3932,7 @@
                     <a:ea typeface="+mn-ea"/>
                     <a:cs typeface="+mn-cs"/>
                   </a:rPr>
-                  <a:t> //  </a:t>
+                  <a:t> //</a:t>
                 </a:r>
                 <a:r>
                   <a:rPr lang="en-NL" sz="1400" b="0" i="0" kern="1200" dirty="0">
@@ -4683,55 +3944,7 @@
                     <a:ea typeface="+mn-ea"/>
                     <a:cs typeface="+mn-cs"/>
                   </a:rPr>
-                  <a:t>vintage controls absorb average differences in forecasting difficulty and information availability across forecast types</a:t>
-                </a:r>
-                <a:r>
-                  <a:rPr lang="en-US" sz="1400" b="0" i="0" kern="1200" dirty="0">
-                    <a:solidFill>
-                      <a:schemeClr val="tx1"/>
-                    </a:solidFill>
-                    <a:effectLst/>
-                    <a:latin typeface="+mn-lt"/>
-                    <a:ea typeface="+mn-ea"/>
-                    <a:cs typeface="+mn-cs"/>
-                  </a:rPr>
-                  <a:t> =&gt; controls </a:t>
-                </a:r>
-                <a:r>
-                  <a:rPr lang="en-NL" sz="1400" b="0" i="0" kern="1200" dirty="0">
-                    <a:solidFill>
-                      <a:schemeClr val="tx1"/>
-                    </a:solidFill>
-                    <a:effectLst/>
-                    <a:latin typeface="+mn-lt"/>
-                    <a:ea typeface="+mn-ea"/>
-                    <a:cs typeface="+mn-cs"/>
-                  </a:rPr>
-                  <a:t>capture the average difference between Spring </a:t>
-                </a:r>
-                <a:r>
-                  <a:rPr lang="en-US" sz="1400" b="0" i="0" kern="1200" dirty="0">
-                    <a:solidFill>
-                      <a:schemeClr val="tx1"/>
-                    </a:solidFill>
-                    <a:effectLst/>
-                    <a:latin typeface="+mn-lt"/>
-                    <a:ea typeface="+mn-ea"/>
-                    <a:cs typeface="+mn-cs"/>
-                  </a:rPr>
-                  <a:t>&amp;</a:t>
-                </a:r>
-                <a:r>
-                  <a:rPr lang="en-NL" sz="1400" b="0" i="0" kern="1200" dirty="0">
-                    <a:solidFill>
-                      <a:schemeClr val="tx1"/>
-                    </a:solidFill>
-                    <a:effectLst/>
-                    <a:latin typeface="+mn-lt"/>
-                    <a:ea typeface="+mn-ea"/>
-                    <a:cs typeface="+mn-cs"/>
-                  </a:rPr>
-                  <a:t> Autumn forecasts, holding AI constant</a:t>
+                  <a:t> holding AI constant</a:t>
                 </a:r>
               </a:p>
               <a:p>
@@ -4923,7 +4136,9 @@
                   <a:t> </a:t>
                 </a:r>
                 <a:r>
-                  <a:rPr lang="en-NL" sz="1400" i="0"/>
+                  <a:rPr lang="en-NL" sz="1400" i="0">
+                    <a:latin typeface="Cambria Math" panose="02040503050406030204" pitchFamily="18" charset="0"/>
+                  </a:rPr>
                   <a:t>𝛾_2&lt;0</a:t>
                 </a:r>
                 <a:r>
@@ -4966,7 +4181,9 @@
                   <a:t>Holding constant whether the forecast is Spring or Autumn and whether it refers to year </a:t>
                 </a:r>
                 <a:r>
-                  <a:rPr lang="en-NL" i="0"/>
+                  <a:rPr lang="en-NL" i="0">
+                    <a:latin typeface="Cambria Math" panose="02040503050406030204" pitchFamily="18" charset="0"/>
+                  </a:rPr>
                   <a:t>𝑡</a:t>
                 </a:r>
                 <a:r>
@@ -4974,7 +4191,9 @@
                   <a:t>or </a:t>
                 </a:r>
                 <a:r>
-                  <a:rPr lang="en-NL" i="0"/>
+                  <a:rPr lang="en-NL" i="0">
+                    <a:latin typeface="Cambria Math" panose="02040503050406030204" pitchFamily="18" charset="0"/>
+                  </a:rPr>
                   <a:t>𝑡+</a:t>
                 </a:r>
                 <a:r>
@@ -5389,295 +4608,295 @@
               <a:buChar char="-"/>
             </a:pPr>
             <a:r>
-              <a:rPr lang="nl-NL" dirty="0"/>
+              <a:rPr lang="nl-NL" sz="1400" dirty="0"/>
               <a:t>GDP </a:t>
             </a:r>
             <a:r>
-              <a:rPr lang="nl-NL" dirty="0" err="1"/>
+              <a:rPr lang="nl-NL" sz="1400" dirty="0" err="1"/>
               <a:t>growth</a:t>
             </a:r>
             <a:r>
-              <a:rPr lang="nl-NL" dirty="0"/>
+              <a:rPr lang="nl-NL" sz="1400" dirty="0"/>
               <a:t> surprise (LH </a:t>
             </a:r>
             <a:r>
-              <a:rPr lang="nl-NL" dirty="0" err="1"/>
+              <a:rPr lang="nl-NL" sz="1400" dirty="0" err="1"/>
               <a:t>variable</a:t>
             </a:r>
             <a:r>
-              <a:rPr lang="nl-NL" dirty="0"/>
+              <a:rPr lang="nl-NL" sz="1400" dirty="0"/>
               <a:t>) is </a:t>
             </a:r>
             <a:r>
-              <a:rPr lang="nl-NL" dirty="0" err="1"/>
+              <a:rPr lang="nl-NL" sz="1400" dirty="0" err="1"/>
               <a:t>similar</a:t>
             </a:r>
             <a:r>
-              <a:rPr lang="nl-NL" dirty="0"/>
+              <a:rPr lang="nl-NL" sz="1400" dirty="0"/>
               <a:t> </a:t>
             </a:r>
             <a:r>
-              <a:rPr lang="nl-NL" dirty="0" err="1"/>
+              <a:rPr lang="nl-NL" sz="1400" dirty="0" err="1"/>
               <a:t>to</a:t>
             </a:r>
             <a:r>
-              <a:rPr lang="nl-NL" dirty="0"/>
+              <a:rPr lang="nl-NL" sz="1400" dirty="0"/>
               <a:t> a first </a:t>
             </a:r>
             <a:r>
-              <a:rPr lang="nl-NL" dirty="0" err="1"/>
+              <a:rPr lang="nl-NL" sz="1400" dirty="0" err="1"/>
               <a:t>differenced</a:t>
             </a:r>
             <a:r>
-              <a:rPr lang="nl-NL" dirty="0"/>
+              <a:rPr lang="nl-NL" sz="1400" dirty="0"/>
               <a:t> </a:t>
             </a:r>
             <a:r>
-              <a:rPr lang="nl-NL" dirty="0" err="1"/>
+              <a:rPr lang="nl-NL" sz="1400" dirty="0" err="1"/>
               <a:t>variable</a:t>
             </a:r>
             <a:r>
-              <a:rPr lang="nl-NL" dirty="0"/>
+              <a:rPr lang="nl-NL" sz="1400" dirty="0"/>
               <a:t>, making </a:t>
             </a:r>
             <a:r>
-              <a:rPr lang="nl-NL" dirty="0" err="1"/>
+              <a:rPr lang="nl-NL" sz="1400" dirty="0" err="1"/>
               <a:t>endogeneity</a:t>
             </a:r>
             <a:r>
-              <a:rPr lang="nl-NL" dirty="0"/>
+              <a:rPr lang="nl-NL" sz="1400" dirty="0"/>
               <a:t> </a:t>
             </a:r>
             <a:r>
-              <a:rPr lang="nl-NL" dirty="0" err="1"/>
+              <a:rPr lang="nl-NL" sz="1400" dirty="0" err="1"/>
               <a:t>with</a:t>
             </a:r>
             <a:r>
-              <a:rPr lang="nl-NL" dirty="0"/>
+              <a:rPr lang="nl-NL" sz="1400" dirty="0"/>
               <a:t> investment and export variables on the RH </a:t>
             </a:r>
             <a:r>
-              <a:rPr lang="nl-NL" dirty="0" err="1"/>
+              <a:rPr lang="nl-NL" sz="1400" dirty="0" err="1"/>
               <a:t>less</a:t>
             </a:r>
             <a:r>
-              <a:rPr lang="nl-NL" dirty="0"/>
+              <a:rPr lang="nl-NL" sz="1400" dirty="0"/>
               <a:t> </a:t>
             </a:r>
             <a:r>
-              <a:rPr lang="nl-NL" dirty="0" err="1"/>
+              <a:rPr lang="nl-NL" sz="1400" dirty="0" err="1"/>
               <a:t>obvious</a:t>
             </a:r>
             <a:r>
-              <a:rPr lang="nl-NL" dirty="0"/>
+              <a:rPr lang="nl-NL" sz="1400" dirty="0"/>
               <a:t> (</a:t>
             </a:r>
             <a:r>
-              <a:rPr lang="nl-NL" dirty="0" err="1"/>
+              <a:rPr lang="nl-NL" sz="1400" dirty="0" err="1"/>
               <a:t>taking</a:t>
             </a:r>
             <a:r>
-              <a:rPr lang="nl-NL" dirty="0"/>
+              <a:rPr lang="nl-NL" sz="1400" dirty="0"/>
               <a:t> </a:t>
             </a:r>
             <a:r>
-              <a:rPr lang="nl-NL" dirty="0" err="1"/>
+              <a:rPr lang="nl-NL" sz="1400" dirty="0" err="1"/>
               <a:t>into</a:t>
             </a:r>
             <a:r>
-              <a:rPr lang="nl-NL" dirty="0"/>
+              <a:rPr lang="nl-NL" sz="1400" dirty="0"/>
               <a:t> account </a:t>
             </a:r>
             <a:r>
-              <a:rPr lang="nl-NL" dirty="0" err="1"/>
+              <a:rPr lang="nl-NL" sz="1400" dirty="0" err="1"/>
               <a:t>that</a:t>
             </a:r>
             <a:r>
-              <a:rPr lang="nl-NL" dirty="0"/>
+              <a:rPr lang="nl-NL" sz="1400" dirty="0"/>
               <a:t> investment and exports are part of GDP </a:t>
             </a:r>
             <a:r>
-              <a:rPr lang="nl-NL" dirty="0" err="1"/>
+              <a:rPr lang="nl-NL" sz="1400" dirty="0" err="1"/>
               <a:t>by</a:t>
             </a:r>
             <a:r>
-              <a:rPr lang="nl-NL" dirty="0"/>
+              <a:rPr lang="nl-NL" sz="1400" dirty="0"/>
               <a:t> </a:t>
             </a:r>
             <a:r>
-              <a:rPr lang="nl-NL" dirty="0" err="1"/>
+              <a:rPr lang="nl-NL" sz="1400" dirty="0" err="1"/>
               <a:t>definition</a:t>
             </a:r>
             <a:r>
-              <a:rPr lang="nl-NL" dirty="0"/>
+              <a:rPr lang="nl-NL" sz="1400" dirty="0"/>
               <a:t>, but </a:t>
             </a:r>
             <a:r>
-              <a:rPr lang="nl-NL" dirty="0" err="1"/>
+              <a:rPr lang="nl-NL" sz="1400" dirty="0" err="1"/>
               <a:t>not</a:t>
             </a:r>
             <a:r>
-              <a:rPr lang="nl-NL" dirty="0"/>
+              <a:rPr lang="nl-NL" sz="1400" dirty="0"/>
               <a:t> </a:t>
             </a:r>
             <a:r>
-              <a:rPr lang="nl-NL" dirty="0" err="1"/>
+              <a:rPr lang="nl-NL" sz="1400" dirty="0" err="1"/>
               <a:t>necesserily</a:t>
             </a:r>
             <a:r>
-              <a:rPr lang="nl-NL" dirty="0"/>
+              <a:rPr lang="nl-NL" sz="1400" dirty="0"/>
               <a:t> part of </a:t>
             </a:r>
             <a:r>
-              <a:rPr lang="nl-NL" dirty="0" err="1"/>
+              <a:rPr lang="nl-NL" sz="1400" dirty="0" err="1"/>
               <a:t>dif</a:t>
             </a:r>
             <a:r>
-              <a:rPr lang="nl-NL" dirty="0"/>
+              <a:rPr lang="nl-NL" sz="1400" dirty="0"/>
               <a:t> </a:t>
             </a:r>
             <a:r>
-              <a:rPr lang="nl-NL" dirty="0" err="1"/>
+              <a:rPr lang="nl-NL" sz="1400" dirty="0" err="1"/>
               <a:t>between</a:t>
             </a:r>
             <a:r>
-              <a:rPr lang="nl-NL" dirty="0"/>
+              <a:rPr lang="nl-NL" sz="1400" dirty="0"/>
               <a:t> </a:t>
             </a:r>
             <a:r>
-              <a:rPr lang="nl-NL" dirty="0" err="1"/>
+              <a:rPr lang="nl-NL" sz="1400" dirty="0" err="1"/>
               <a:t>realised</a:t>
             </a:r>
             <a:r>
-              <a:rPr lang="nl-NL" dirty="0"/>
+              <a:rPr lang="nl-NL" sz="1400" dirty="0"/>
               <a:t> and </a:t>
             </a:r>
             <a:r>
-              <a:rPr lang="nl-NL" dirty="0" err="1"/>
+              <a:rPr lang="nl-NL" sz="1400" dirty="0" err="1"/>
               <a:t>forecasted</a:t>
             </a:r>
             <a:r>
-              <a:rPr lang="nl-NL" dirty="0"/>
+              <a:rPr lang="nl-NL" sz="1400" dirty="0"/>
               <a:t> GDP </a:t>
             </a:r>
             <a:r>
-              <a:rPr lang="nl-NL" dirty="0" err="1"/>
+              <a:rPr lang="nl-NL" sz="1400" dirty="0" err="1"/>
               <a:t>growth</a:t>
             </a:r>
             <a:r>
-              <a:rPr lang="nl-NL" dirty="0"/>
+              <a:rPr lang="nl-NL" sz="1400" dirty="0"/>
               <a:t>). </a:t>
             </a:r>
             <a:r>
-              <a:rPr lang="nl-NL" dirty="0" err="1"/>
+              <a:rPr lang="nl-NL" sz="1400" dirty="0" err="1"/>
               <a:t>This</a:t>
             </a:r>
             <a:r>
-              <a:rPr lang="nl-NL" dirty="0"/>
+              <a:rPr lang="nl-NL" sz="1400" dirty="0"/>
               <a:t> is </a:t>
             </a:r>
             <a:r>
-              <a:rPr lang="nl-NL" dirty="0" err="1"/>
+              <a:rPr lang="nl-NL" sz="1400" dirty="0" err="1"/>
               <a:t>further</a:t>
             </a:r>
             <a:r>
-              <a:rPr lang="nl-NL" dirty="0"/>
+              <a:rPr lang="nl-NL" sz="1400" dirty="0"/>
               <a:t> </a:t>
             </a:r>
             <a:r>
-              <a:rPr lang="nl-NL" dirty="0" err="1"/>
+              <a:rPr lang="nl-NL" sz="1400" dirty="0" err="1"/>
               <a:t>addressed</a:t>
             </a:r>
             <a:r>
-              <a:rPr lang="nl-NL" dirty="0"/>
+              <a:rPr lang="nl-NL" sz="1400" dirty="0"/>
               <a:t> </a:t>
             </a:r>
             <a:r>
-              <a:rPr lang="nl-NL" dirty="0" err="1"/>
+              <a:rPr lang="nl-NL" sz="1400" dirty="0" err="1"/>
               <a:t>by</a:t>
             </a:r>
             <a:r>
-              <a:rPr lang="nl-NL" dirty="0"/>
+              <a:rPr lang="nl-NL" sz="1400" dirty="0"/>
               <a:t> </a:t>
             </a:r>
             <a:r>
-              <a:rPr lang="nl-NL" dirty="0" err="1"/>
+              <a:rPr lang="nl-NL" sz="1400" dirty="0" err="1"/>
               <a:t>taking</a:t>
             </a:r>
             <a:r>
-              <a:rPr lang="nl-NL" dirty="0"/>
+              <a:rPr lang="nl-NL" sz="1400" dirty="0"/>
               <a:t> the </a:t>
             </a:r>
             <a:r>
-              <a:rPr lang="nl-NL" dirty="0" err="1"/>
+              <a:rPr lang="nl-NL" sz="1400" dirty="0" err="1"/>
               <a:t>one</a:t>
             </a:r>
             <a:r>
-              <a:rPr lang="nl-NL" dirty="0"/>
+              <a:rPr lang="nl-NL" sz="1400" dirty="0"/>
               <a:t> </a:t>
             </a:r>
             <a:r>
-              <a:rPr lang="nl-NL" dirty="0" err="1"/>
+              <a:rPr lang="nl-NL" sz="1400" dirty="0" err="1"/>
               <a:t>period</a:t>
             </a:r>
             <a:r>
-              <a:rPr lang="nl-NL" dirty="0"/>
+              <a:rPr lang="nl-NL" sz="1400" dirty="0"/>
               <a:t> lag of the </a:t>
             </a:r>
             <a:r>
-              <a:rPr lang="nl-NL" dirty="0" err="1"/>
+              <a:rPr lang="nl-NL" sz="1400" dirty="0" err="1"/>
               <a:t>explanatory</a:t>
             </a:r>
             <a:r>
-              <a:rPr lang="nl-NL" dirty="0"/>
+              <a:rPr lang="nl-NL" sz="1400" dirty="0"/>
               <a:t> variables, </a:t>
             </a:r>
             <a:r>
-              <a:rPr lang="nl-NL" dirty="0" err="1"/>
+              <a:rPr lang="nl-NL" sz="1400" dirty="0" err="1"/>
               <a:t>meaning</a:t>
             </a:r>
             <a:r>
-              <a:rPr lang="nl-NL" dirty="0"/>
+              <a:rPr lang="nl-NL" sz="1400" dirty="0"/>
               <a:t> </a:t>
             </a:r>
             <a:r>
-              <a:rPr lang="nl-NL" dirty="0" err="1"/>
+              <a:rPr lang="nl-NL" sz="1400" dirty="0" err="1"/>
               <a:t>that</a:t>
             </a:r>
             <a:r>
-              <a:rPr lang="nl-NL" dirty="0"/>
+              <a:rPr lang="nl-NL" sz="1400" dirty="0"/>
               <a:t> the GDP </a:t>
             </a:r>
             <a:r>
-              <a:rPr lang="nl-NL" dirty="0" err="1"/>
+              <a:rPr lang="nl-NL" sz="1400" dirty="0" err="1"/>
               <a:t>growth</a:t>
             </a:r>
             <a:r>
-              <a:rPr lang="nl-NL" dirty="0"/>
+              <a:rPr lang="nl-NL" sz="1400" dirty="0"/>
               <a:t> surprise in </a:t>
             </a:r>
             <a:r>
-              <a:rPr lang="nl-NL" dirty="0" err="1"/>
+              <a:rPr lang="nl-NL" sz="1400" dirty="0" err="1"/>
               <a:t>year</a:t>
             </a:r>
             <a:r>
-              <a:rPr lang="nl-NL" dirty="0"/>
+              <a:rPr lang="nl-NL" sz="1400" dirty="0"/>
               <a:t> t is </a:t>
             </a:r>
             <a:r>
-              <a:rPr lang="nl-NL" dirty="0" err="1"/>
+              <a:rPr lang="nl-NL" sz="1400" dirty="0" err="1"/>
               <a:t>regressed</a:t>
             </a:r>
             <a:r>
-              <a:rPr lang="nl-NL" dirty="0"/>
+              <a:rPr lang="nl-NL" sz="1400" dirty="0"/>
               <a:t> on </a:t>
             </a:r>
             <a:r>
-              <a:rPr lang="nl-NL" dirty="0" err="1"/>
+              <a:rPr lang="nl-NL" sz="1400" dirty="0" err="1"/>
               <a:t>flows</a:t>
             </a:r>
             <a:r>
-              <a:rPr lang="nl-NL" dirty="0"/>
+              <a:rPr lang="nl-NL" sz="1400" dirty="0"/>
               <a:t> of investment and exports of t-1.</a:t>
             </a:r>
           </a:p>
@@ -5686,7 +4905,7 @@
               <a:buFontTx/>
               <a:buChar char="-"/>
             </a:pPr>
-            <a:endParaRPr lang="nl-NL" dirty="0"/>
+            <a:endParaRPr lang="nl-NL" sz="1400" dirty="0"/>
           </a:p>
           <a:p>
             <a:pPr marL="171450" indent="-171450">
@@ -5694,115 +4913,115 @@
               <a:buChar char="-"/>
             </a:pPr>
             <a:r>
-              <a:rPr lang="nl-NL" dirty="0" err="1"/>
+              <a:rPr lang="nl-NL" sz="1400" dirty="0" err="1"/>
               <a:t>Each</a:t>
             </a:r>
             <a:r>
-              <a:rPr lang="nl-NL" dirty="0"/>
+              <a:rPr lang="nl-NL" sz="1400" dirty="0"/>
               <a:t> </a:t>
             </a:r>
             <a:r>
-              <a:rPr lang="nl-NL" dirty="0" err="1"/>
+              <a:rPr lang="nl-NL" sz="1400" dirty="0" err="1"/>
               <a:t>year</a:t>
             </a:r>
             <a:r>
-              <a:rPr lang="nl-NL" dirty="0"/>
+              <a:rPr lang="nl-NL" sz="1400" dirty="0"/>
               <a:t> the </a:t>
             </a:r>
             <a:r>
-              <a:rPr lang="nl-NL" dirty="0" err="1"/>
+              <a:rPr lang="nl-NL" sz="1400" dirty="0" err="1"/>
               <a:t>median</a:t>
             </a:r>
             <a:r>
-              <a:rPr lang="nl-NL" dirty="0"/>
+              <a:rPr lang="nl-NL" sz="1400" dirty="0"/>
               <a:t> </a:t>
             </a:r>
             <a:r>
-              <a:rPr lang="nl-NL" dirty="0" err="1"/>
+              <a:rPr lang="nl-NL" sz="1400" dirty="0" err="1"/>
               <a:t>threshold</a:t>
             </a:r>
             <a:r>
-              <a:rPr lang="nl-NL" dirty="0"/>
+              <a:rPr lang="nl-NL" sz="1400" dirty="0"/>
               <a:t> </a:t>
             </a:r>
             <a:r>
-              <a:rPr lang="nl-NL" dirty="0" err="1"/>
+              <a:rPr lang="nl-NL" sz="1400" dirty="0" err="1"/>
               <a:t>for</a:t>
             </a:r>
             <a:r>
-              <a:rPr lang="nl-NL" dirty="0"/>
+              <a:rPr lang="nl-NL" sz="1400" dirty="0"/>
               <a:t> </a:t>
             </a:r>
             <a:r>
-              <a:rPr lang="nl-NL" dirty="0" err="1"/>
+              <a:rPr lang="nl-NL" sz="1400" dirty="0" err="1"/>
               <a:t>Above</a:t>
             </a:r>
             <a:r>
-              <a:rPr lang="nl-NL" dirty="0"/>
+              <a:rPr lang="nl-NL" sz="1400" dirty="0"/>
               <a:t> </a:t>
             </a:r>
             <a:r>
-              <a:rPr lang="nl-NL" dirty="0" err="1"/>
+              <a:rPr lang="nl-NL" sz="1400" dirty="0" err="1"/>
               <a:t>vs</a:t>
             </a:r>
             <a:r>
-              <a:rPr lang="nl-NL" dirty="0"/>
+              <a:rPr lang="nl-NL" sz="1400" dirty="0"/>
               <a:t> Below changes, </a:t>
             </a:r>
             <a:r>
-              <a:rPr lang="nl-NL" dirty="0" err="1"/>
+              <a:rPr lang="nl-NL" sz="1400" dirty="0" err="1"/>
               <a:t>so</a:t>
             </a:r>
             <a:r>
-              <a:rPr lang="nl-NL" dirty="0"/>
+              <a:rPr lang="nl-NL" sz="1400" dirty="0"/>
               <a:t>: </a:t>
             </a:r>
             <a:r>
-              <a:rPr lang="nl-NL" dirty="0" err="1"/>
+              <a:rPr lang="nl-NL" sz="1400" dirty="0" err="1"/>
               <a:t>each</a:t>
             </a:r>
             <a:r>
-              <a:rPr lang="nl-NL" dirty="0"/>
+              <a:rPr lang="nl-NL" sz="1400" dirty="0"/>
               <a:t> </a:t>
             </a:r>
             <a:r>
-              <a:rPr lang="nl-NL" dirty="0" err="1"/>
+              <a:rPr lang="nl-NL" sz="1400" dirty="0" err="1"/>
               <a:t>year</a:t>
             </a:r>
             <a:r>
-              <a:rPr lang="nl-NL" dirty="0"/>
+              <a:rPr lang="nl-NL" sz="1400" dirty="0"/>
               <a:t> the </a:t>
             </a:r>
             <a:r>
-              <a:rPr lang="nl-NL" dirty="0" err="1"/>
+              <a:rPr lang="nl-NL" sz="1400" dirty="0" err="1"/>
               <a:t>Above</a:t>
             </a:r>
             <a:r>
-              <a:rPr lang="nl-NL" dirty="0"/>
+              <a:rPr lang="nl-NL" sz="1400" dirty="0"/>
               <a:t> and Below </a:t>
             </a:r>
             <a:r>
-              <a:rPr lang="nl-NL" dirty="0" err="1"/>
+              <a:rPr lang="nl-NL" sz="1400" dirty="0" err="1"/>
               <a:t>groups</a:t>
             </a:r>
             <a:r>
-              <a:rPr lang="nl-NL" dirty="0"/>
+              <a:rPr lang="nl-NL" sz="1400" dirty="0"/>
               <a:t> of </a:t>
             </a:r>
             <a:r>
-              <a:rPr lang="nl-NL" dirty="0" err="1"/>
+              <a:rPr lang="nl-NL" sz="1400" dirty="0" err="1"/>
               <a:t>countries</a:t>
             </a:r>
             <a:r>
-              <a:rPr lang="nl-NL" dirty="0"/>
+              <a:rPr lang="nl-NL" sz="1400" dirty="0"/>
               <a:t> </a:t>
             </a:r>
             <a:r>
-              <a:rPr lang="nl-NL" dirty="0" err="1"/>
+              <a:rPr lang="nl-NL" sz="1400" dirty="0" err="1"/>
               <a:t>differ</a:t>
             </a:r>
             <a:r>
-              <a:rPr lang="nl-NL" dirty="0"/>
+              <a:rPr lang="nl-NL" sz="1400" dirty="0"/>
               <a:t>.</a:t>
             </a:r>
           </a:p>
@@ -10809,7 +10028,27 @@
                 <a:ea typeface="Verdana" panose="020B0604030504040204" pitchFamily="34" charset="0"/>
                 <a:cs typeface="Arial" panose="020B0604020202020204" pitchFamily="34" charset="0"/>
               </a:rPr>
-              <a:t>Selection, different set of shock years (to do)</a:t>
+              <a:t>Forecast vintage controls → similar results</a:t>
+            </a:r>
+          </a:p>
+          <a:p>
+            <a:pPr marL="342900" indent="-342900">
+              <a:lnSpc>
+                <a:spcPct val="120000"/>
+              </a:lnSpc>
+              <a:spcAft>
+                <a:spcPts val="1200"/>
+              </a:spcAft>
+              <a:buFont typeface="Arial" panose="020B0604020202020204" pitchFamily="34" charset="0"/>
+              <a:buChar char="•"/>
+            </a:pPr>
+            <a:r>
+              <a:rPr lang="nl-NL" sz="2000" noProof="1">
+                <a:latin typeface="Arial" panose="020B0604020202020204" pitchFamily="34" charset="0"/>
+                <a:ea typeface="Verdana" panose="020B0604030504040204" pitchFamily="34" charset="0"/>
+                <a:cs typeface="Arial" panose="020B0604020202020204" pitchFamily="34" charset="0"/>
+              </a:rPr>
+              <a:t>Different choice of shock years (to do)</a:t>
             </a:r>
           </a:p>
           <a:p>
@@ -15746,8 +14985,8 @@
           </a:p>
         </p:txBody>
       </p:sp>
-      <mc:AlternateContent xmlns:mc="http://schemas.openxmlformats.org/markup-compatibility/2006">
-        <mc:Choice xmlns:a14="http://schemas.microsoft.com/office/drawing/2010/main" Requires="a14">
+      <mc:AlternateContent xmlns:mc="http://schemas.openxmlformats.org/markup-compatibility/2006" xmlns:a14="http://schemas.microsoft.com/office/drawing/2010/main">
+        <mc:Choice Requires="a14">
           <p:sp>
             <p:nvSpPr>
               <p:cNvPr id="6" name="Tekstvak 3">
@@ -15882,7 +15121,7 @@
             </p:txBody>
           </p:sp>
         </mc:Choice>
-        <mc:Fallback>
+        <mc:Fallback xmlns="">
           <p:sp>
             <p:nvSpPr>
               <p:cNvPr id="6" name="Tekstvak 3">

--- a/Resilience.pptx
+++ b/Resilience.pptx
@@ -6,10 +6,10 @@
     <p:sldMasterId id="2147483708" r:id="rId2"/>
   </p:sldMasterIdLst>
   <p:notesMasterIdLst>
-    <p:notesMasterId r:id="rId18"/>
+    <p:notesMasterId r:id="rId20"/>
   </p:notesMasterIdLst>
   <p:handoutMasterIdLst>
-    <p:handoutMasterId r:id="rId19"/>
+    <p:handoutMasterId r:id="rId21"/>
   </p:handoutMasterIdLst>
   <p:sldIdLst>
     <p:sldId id="781" r:id="rId3"/>
@@ -21,12 +21,14 @@
     <p:sldId id="792" r:id="rId9"/>
     <p:sldId id="793" r:id="rId10"/>
     <p:sldId id="796" r:id="rId11"/>
-    <p:sldId id="790" r:id="rId12"/>
-    <p:sldId id="783" r:id="rId13"/>
-    <p:sldId id="782" r:id="rId14"/>
-    <p:sldId id="791" r:id="rId15"/>
-    <p:sldId id="794" r:id="rId16"/>
-    <p:sldId id="797" r:id="rId17"/>
+    <p:sldId id="798" r:id="rId12"/>
+    <p:sldId id="799" r:id="rId13"/>
+    <p:sldId id="790" r:id="rId14"/>
+    <p:sldId id="783" r:id="rId15"/>
+    <p:sldId id="782" r:id="rId16"/>
+    <p:sldId id="791" r:id="rId17"/>
+    <p:sldId id="794" r:id="rId18"/>
+    <p:sldId id="797" r:id="rId19"/>
   </p:sldIdLst>
   <p:sldSz cx="9144000" cy="6858000" type="screen4x3"/>
   <p:notesSz cx="6805613" cy="9944100"/>
@@ -159,7 +161,7 @@
 <file path=ppt/revisionInfo.xml><?xml version="1.0" encoding="utf-8"?>
 <p1510:revInfo xmlns:a="http://schemas.openxmlformats.org/drawingml/2006/main" xmlns:r="http://schemas.openxmlformats.org/officeDocument/2006/relationships" xmlns:p1510="http://schemas.microsoft.com/office/powerpoint/2015/10/main">
   <p1510:revLst>
-    <p1510:client id="{13B43BEF-9B9B-431D-9308-0B2B126B7992}" v="420" dt="2026-10-05T18:22:31.744"/>
+    <p1510:client id="{13B43BEF-9B9B-431D-9308-0B2B126B7992}" v="603" dt="2026-10-10T09:50:47.429"/>
   </p1510:revLst>
 </p1510:revInfo>
 </file>
@@ -169,7 +171,7 @@
   <pc:docChgLst>
     <pc:chgData name="Jan Willem van den End (EBO_CMA)" userId="32ade95a-e024-4672-952f-5ed8641a9e00" providerId="ADAL" clId="{3BBBE02E-ACD4-4586-9407-5E79BF620DF1}"/>
     <pc:docChg chg="undo redo custSel addSld modSld sldOrd">
-      <pc:chgData name="Jan Willem van den End (EBO_CMA)" userId="32ade95a-e024-4672-952f-5ed8641a9e00" providerId="ADAL" clId="{3BBBE02E-ACD4-4586-9407-5E79BF620DF1}" dt="2026-10-05T18:22:31.744" v="8750"/>
+      <pc:chgData name="Jan Willem van den End (EBO_CMA)" userId="32ade95a-e024-4672-952f-5ed8641a9e00" providerId="ADAL" clId="{3BBBE02E-ACD4-4586-9407-5E79BF620DF1}" dt="2026-10-10T09:53:52.912" v="9780" actId="20577"/>
       <pc:docMkLst>
         <pc:docMk/>
       </pc:docMkLst>
@@ -202,6 +204,13 @@
             <ac:spMk id="8" creationId="{545BE5F7-F057-18CF-DA77-201D8BAEDAF2}"/>
           </ac:spMkLst>
         </pc:spChg>
+      </pc:sldChg>
+      <pc:sldChg chg="modNotesTx">
+        <pc:chgData name="Jan Willem van den End (EBO_CMA)" userId="32ade95a-e024-4672-952f-5ed8641a9e00" providerId="ADAL" clId="{3BBBE02E-ACD4-4586-9407-5E79BF620DF1}" dt="2026-10-06T07:05:40.929" v="8819" actId="20577"/>
+        <pc:sldMkLst>
+          <pc:docMk/>
+          <pc:sldMk cId="2835017235" sldId="781"/>
+        </pc:sldMkLst>
       </pc:sldChg>
       <pc:sldChg chg="modSp mod">
         <pc:chgData name="Jan Willem van den End (EBO_CMA)" userId="32ade95a-e024-4672-952f-5ed8641a9e00" providerId="ADAL" clId="{3BBBE02E-ACD4-4586-9407-5E79BF620DF1}" dt="2026-09-24T09:53:12.219" v="4093"/>
@@ -266,7 +275,7 @@
         </pc:picChg>
       </pc:sldChg>
       <pc:sldChg chg="modSp mod modNotes modNotesTx">
-        <pc:chgData name="Jan Willem van den End (EBO_CMA)" userId="32ade95a-e024-4672-952f-5ed8641a9e00" providerId="ADAL" clId="{3BBBE02E-ACD4-4586-9407-5E79BF620DF1}" dt="2026-10-05T18:20:28.464" v="8673" actId="20577"/>
+        <pc:chgData name="Jan Willem van den End (EBO_CMA)" userId="32ade95a-e024-4672-952f-5ed8641a9e00" providerId="ADAL" clId="{3BBBE02E-ACD4-4586-9407-5E79BF620DF1}" dt="2026-10-06T07:27:52.456" v="8906" actId="6549"/>
         <pc:sldMkLst>
           <pc:docMk/>
           <pc:sldMk cId="4129420739" sldId="786"/>
@@ -390,17 +399,25 @@
         </pc:picChg>
       </pc:sldChg>
       <pc:sldChg chg="modSp mod modNotes modNotesTx">
-        <pc:chgData name="Jan Willem van den End (EBO_CMA)" userId="32ade95a-e024-4672-952f-5ed8641a9e00" providerId="ADAL" clId="{3BBBE02E-ACD4-4586-9407-5E79BF620DF1}" dt="2026-10-05T18:20:55.721" v="8676" actId="20577"/>
+        <pc:chgData name="Jan Willem van den End (EBO_CMA)" userId="32ade95a-e024-4672-952f-5ed8641a9e00" providerId="ADAL" clId="{3BBBE02E-ACD4-4586-9407-5E79BF620DF1}" dt="2026-10-10T09:43:47.731" v="9700" actId="20577"/>
         <pc:sldMkLst>
           <pc:docMk/>
           <pc:sldMk cId="515665883" sldId="793"/>
         </pc:sldMkLst>
         <pc:spChg chg="mod">
-          <ac:chgData name="Jan Willem van den End (EBO_CMA)" userId="32ade95a-e024-4672-952f-5ed8641a9e00" providerId="ADAL" clId="{3BBBE02E-ACD4-4586-9407-5E79BF620DF1}" dt="2026-09-30T07:03:06.476" v="6084" actId="20577"/>
+          <ac:chgData name="Jan Willem van den End (EBO_CMA)" userId="32ade95a-e024-4672-952f-5ed8641a9e00" providerId="ADAL" clId="{3BBBE02E-ACD4-4586-9407-5E79BF620DF1}" dt="2026-10-10T09:43:47.731" v="9700" actId="20577"/>
           <ac:spMkLst>
             <pc:docMk/>
             <pc:sldMk cId="515665883" sldId="793"/>
             <ac:spMk id="2" creationId="{6B853D72-57E4-54DF-F916-E87E4C65C99E}"/>
+          </ac:spMkLst>
+        </pc:spChg>
+        <pc:spChg chg="mod">
+          <ac:chgData name="Jan Willem van den End (EBO_CMA)" userId="32ade95a-e024-4672-952f-5ed8641a9e00" providerId="ADAL" clId="{3BBBE02E-ACD4-4586-9407-5E79BF620DF1}" dt="2026-10-10T08:31:21.054" v="8971" actId="20577"/>
+          <ac:spMkLst>
+            <pc:docMk/>
+            <pc:sldMk cId="515665883" sldId="793"/>
+            <ac:spMk id="9" creationId="{279E6971-F8C1-CE73-F846-F4CD2F9BE489}"/>
           </ac:spMkLst>
         </pc:spChg>
       </pc:sldChg>
@@ -444,13 +461,13 @@
         </pc:picChg>
       </pc:sldChg>
       <pc:sldChg chg="modSp mod">
-        <pc:chgData name="Jan Willem van den End (EBO_CMA)" userId="32ade95a-e024-4672-952f-5ed8641a9e00" providerId="ADAL" clId="{3BBBE02E-ACD4-4586-9407-5E79BF620DF1}" dt="2026-09-22T06:51:42.256" v="2752" actId="20577"/>
+        <pc:chgData name="Jan Willem van den End (EBO_CMA)" userId="32ade95a-e024-4672-952f-5ed8641a9e00" providerId="ADAL" clId="{3BBBE02E-ACD4-4586-9407-5E79BF620DF1}" dt="2026-10-10T09:53:52.912" v="9780" actId="20577"/>
         <pc:sldMkLst>
           <pc:docMk/>
           <pc:sldMk cId="165802264" sldId="795"/>
         </pc:sldMkLst>
         <pc:spChg chg="mod">
-          <ac:chgData name="Jan Willem van den End (EBO_CMA)" userId="32ade95a-e024-4672-952f-5ed8641a9e00" providerId="ADAL" clId="{3BBBE02E-ACD4-4586-9407-5E79BF620DF1}" dt="2026-09-22T06:51:42.256" v="2752" actId="20577"/>
+          <ac:chgData name="Jan Willem van den End (EBO_CMA)" userId="32ade95a-e024-4672-952f-5ed8641a9e00" providerId="ADAL" clId="{3BBBE02E-ACD4-4586-9407-5E79BF620DF1}" dt="2026-10-10T09:53:52.912" v="9780" actId="20577"/>
           <ac:spMkLst>
             <pc:docMk/>
             <pc:sldMk cId="165802264" sldId="795"/>
@@ -459,7 +476,7 @@
         </pc:spChg>
       </pc:sldChg>
       <pc:sldChg chg="addSp delSp modSp mod">
-        <pc:chgData name="Jan Willem van den End (EBO_CMA)" userId="32ade95a-e024-4672-952f-5ed8641a9e00" providerId="ADAL" clId="{3BBBE02E-ACD4-4586-9407-5E79BF620DF1}" dt="2026-10-05T18:15:19.790" v="8579" actId="20577"/>
+        <pc:chgData name="Jan Willem van den End (EBO_CMA)" userId="32ade95a-e024-4672-952f-5ed8641a9e00" providerId="ADAL" clId="{3BBBE02E-ACD4-4586-9407-5E79BF620DF1}" dt="2026-10-10T08:37:15.146" v="9089" actId="1036"/>
         <pc:sldMkLst>
           <pc:docMk/>
           <pc:sldMk cId="909146083" sldId="796"/>
@@ -473,46 +490,54 @@
           </ac:spMkLst>
         </pc:spChg>
         <pc:spChg chg="add mod">
-          <ac:chgData name="Jan Willem van den End (EBO_CMA)" userId="32ade95a-e024-4672-952f-5ed8641a9e00" providerId="ADAL" clId="{3BBBE02E-ACD4-4586-9407-5E79BF620DF1}" dt="2026-10-05T18:15:19.790" v="8579" actId="20577"/>
+          <ac:chgData name="Jan Willem van den End (EBO_CMA)" userId="32ade95a-e024-4672-952f-5ed8641a9e00" providerId="ADAL" clId="{3BBBE02E-ACD4-4586-9407-5E79BF620DF1}" dt="2026-10-10T08:35:18.609" v="9075" actId="20577"/>
           <ac:spMkLst>
             <pc:docMk/>
             <pc:sldMk cId="909146083" sldId="796"/>
             <ac:spMk id="6" creationId="{4ED6076C-5ED2-F560-9ECC-68A359BFC0CA}"/>
           </ac:spMkLst>
         </pc:spChg>
-        <pc:picChg chg="mod">
-          <ac:chgData name="Jan Willem van den End (EBO_CMA)" userId="32ade95a-e024-4672-952f-5ed8641a9e00" providerId="ADAL" clId="{3BBBE02E-ACD4-4586-9407-5E79BF620DF1}" dt="2026-10-05T18:14:19.678" v="8513" actId="1076"/>
+        <pc:spChg chg="mod">
+          <ac:chgData name="Jan Willem van den End (EBO_CMA)" userId="32ade95a-e024-4672-952f-5ed8641a9e00" providerId="ADAL" clId="{3BBBE02E-ACD4-4586-9407-5E79BF620DF1}" dt="2026-10-10T08:34:09.979" v="9069" actId="20577"/>
+          <ac:spMkLst>
+            <pc:docMk/>
+            <pc:sldMk cId="909146083" sldId="796"/>
+            <ac:spMk id="9" creationId="{784B30AC-5ECB-6948-E309-0039374246EA}"/>
+          </ac:spMkLst>
+        </pc:spChg>
+        <pc:picChg chg="del mod">
+          <ac:chgData name="Jan Willem van den End (EBO_CMA)" userId="32ade95a-e024-4672-952f-5ed8641a9e00" providerId="ADAL" clId="{3BBBE02E-ACD4-4586-9407-5E79BF620DF1}" dt="2026-10-10T08:31:52.584" v="8972" actId="478"/>
           <ac:picMkLst>
             <pc:docMk/>
             <pc:sldMk cId="909146083" sldId="796"/>
             <ac:picMk id="3" creationId="{55B13636-9215-8A37-3974-917B9B355D12}"/>
           </ac:picMkLst>
         </pc:picChg>
-        <pc:picChg chg="del mod">
-          <ac:chgData name="Jan Willem van den End (EBO_CMA)" userId="32ade95a-e024-4672-952f-5ed8641a9e00" providerId="ADAL" clId="{3BBBE02E-ACD4-4586-9407-5E79BF620DF1}" dt="2026-10-05T18:13:55.538" v="8507" actId="478"/>
+        <pc:picChg chg="mod">
+          <ac:chgData name="Jan Willem van den End (EBO_CMA)" userId="32ade95a-e024-4672-952f-5ed8641a9e00" providerId="ADAL" clId="{3BBBE02E-ACD4-4586-9407-5E79BF620DF1}" dt="2026-10-10T08:37:15.146" v="9089" actId="1036"/>
           <ac:picMkLst>
             <pc:docMk/>
             <pc:sldMk cId="909146083" sldId="796"/>
-            <ac:picMk id="4" creationId="{AD9689AB-CE82-70F1-7C47-1B6F79E64021}"/>
+            <ac:picMk id="4" creationId="{CC406C6F-97A4-2854-9FCD-FD08F187902C}"/>
           </ac:picMkLst>
         </pc:picChg>
-        <pc:picChg chg="add del">
-          <ac:chgData name="Jan Willem van den End (EBO_CMA)" userId="32ade95a-e024-4672-952f-5ed8641a9e00" providerId="ADAL" clId="{3BBBE02E-ACD4-4586-9407-5E79BF620DF1}" dt="2026-10-05T12:23:22.279" v="8327" actId="22"/>
+        <pc:picChg chg="mod">
+          <ac:chgData name="Jan Willem van den End (EBO_CMA)" userId="32ade95a-e024-4672-952f-5ed8641a9e00" providerId="ADAL" clId="{3BBBE02E-ACD4-4586-9407-5E79BF620DF1}" dt="2026-10-10T08:37:15.146" v="9089" actId="1036"/>
           <ac:picMkLst>
             <pc:docMk/>
             <pc:sldMk cId="909146083" sldId="796"/>
-            <ac:picMk id="5" creationId="{3A4A43AF-74F3-97B8-385C-7F2921822E61}"/>
+            <ac:picMk id="5" creationId="{E062AC67-D726-4D45-300A-EB28E70BA46D}"/>
           </ac:picMkLst>
         </pc:picChg>
       </pc:sldChg>
       <pc:sldChg chg="modSp add mod modNotesTx">
-        <pc:chgData name="Jan Willem van den End (EBO_CMA)" userId="32ade95a-e024-4672-952f-5ed8641a9e00" providerId="ADAL" clId="{3BBBE02E-ACD4-4586-9407-5E79BF620DF1}" dt="2026-10-05T18:22:31.744" v="8750"/>
+        <pc:chgData name="Jan Willem van den End (EBO_CMA)" userId="32ade95a-e024-4672-952f-5ed8641a9e00" providerId="ADAL" clId="{3BBBE02E-ACD4-4586-9407-5E79BF620DF1}" dt="2026-10-10T08:37:42.051" v="9131" actId="6549"/>
         <pc:sldMkLst>
           <pc:docMk/>
           <pc:sldMk cId="341592472" sldId="797"/>
         </pc:sldMkLst>
         <pc:spChg chg="mod">
-          <ac:chgData name="Jan Willem van den End (EBO_CMA)" userId="32ade95a-e024-4672-952f-5ed8641a9e00" providerId="ADAL" clId="{3BBBE02E-ACD4-4586-9407-5E79BF620DF1}" dt="2026-10-05T18:22:31.744" v="8750"/>
+          <ac:chgData name="Jan Willem van den End (EBO_CMA)" userId="32ade95a-e024-4672-952f-5ed8641a9e00" providerId="ADAL" clId="{3BBBE02E-ACD4-4586-9407-5E79BF620DF1}" dt="2026-10-10T08:37:42.051" v="9131" actId="6549"/>
           <ac:spMkLst>
             <pc:docMk/>
             <pc:sldMk cId="341592472" sldId="797"/>
@@ -527,6 +552,68 @@
             <ac:spMk id="9" creationId="{03204D0B-CF7E-0BFC-4F0F-962010862E03}"/>
           </ac:spMkLst>
         </pc:spChg>
+      </pc:sldChg>
+      <pc:sldChg chg="modSp add mod">
+        <pc:chgData name="Jan Willem van den End (EBO_CMA)" userId="32ade95a-e024-4672-952f-5ed8641a9e00" providerId="ADAL" clId="{3BBBE02E-ACD4-4586-9407-5E79BF620DF1}" dt="2026-10-10T09:46:55.958" v="9708" actId="20577"/>
+        <pc:sldMkLst>
+          <pc:docMk/>
+          <pc:sldMk cId="3745319895" sldId="798"/>
+        </pc:sldMkLst>
+        <pc:spChg chg="mod">
+          <ac:chgData name="Jan Willem van den End (EBO_CMA)" userId="32ade95a-e024-4672-952f-5ed8641a9e00" providerId="ADAL" clId="{3BBBE02E-ACD4-4586-9407-5E79BF620DF1}" dt="2026-10-10T09:46:55.958" v="9708" actId="20577"/>
+          <ac:spMkLst>
+            <pc:docMk/>
+            <pc:sldMk cId="3745319895" sldId="798"/>
+            <ac:spMk id="2" creationId="{4E2FFC46-D6F5-41BF-DECB-9FA98C0F56DD}"/>
+          </ac:spMkLst>
+        </pc:spChg>
+        <pc:spChg chg="mod">
+          <ac:chgData name="Jan Willem van den End (EBO_CMA)" userId="32ade95a-e024-4672-952f-5ed8641a9e00" providerId="ADAL" clId="{3BBBE02E-ACD4-4586-9407-5E79BF620DF1}" dt="2026-10-10T08:55:46.068" v="9232" actId="20577"/>
+          <ac:spMkLst>
+            <pc:docMk/>
+            <pc:sldMk cId="3745319895" sldId="798"/>
+            <ac:spMk id="9" creationId="{B1A8A21F-73A6-21A9-7607-658345AEC559}"/>
+          </ac:spMkLst>
+        </pc:spChg>
+      </pc:sldChg>
+      <pc:sldChg chg="delSp modSp add mod">
+        <pc:chgData name="Jan Willem van den End (EBO_CMA)" userId="32ade95a-e024-4672-952f-5ed8641a9e00" providerId="ADAL" clId="{3BBBE02E-ACD4-4586-9407-5E79BF620DF1}" dt="2026-10-10T09:53:09.812" v="9754" actId="20577"/>
+        <pc:sldMkLst>
+          <pc:docMk/>
+          <pc:sldMk cId="2790278619" sldId="799"/>
+        </pc:sldMkLst>
+        <pc:spChg chg="mod">
+          <ac:chgData name="Jan Willem van den End (EBO_CMA)" userId="32ade95a-e024-4672-952f-5ed8641a9e00" providerId="ADAL" clId="{3BBBE02E-ACD4-4586-9407-5E79BF620DF1}" dt="2026-10-10T09:53:09.812" v="9754" actId="20577"/>
+          <ac:spMkLst>
+            <pc:docMk/>
+            <pc:sldMk cId="2790278619" sldId="799"/>
+            <ac:spMk id="9" creationId="{E303A361-90E1-35B2-AE64-2B40EE87BE60}"/>
+          </ac:spMkLst>
+        </pc:spChg>
+        <pc:picChg chg="mod">
+          <ac:chgData name="Jan Willem van den End (EBO_CMA)" userId="32ade95a-e024-4672-952f-5ed8641a9e00" providerId="ADAL" clId="{3BBBE02E-ACD4-4586-9407-5E79BF620DF1}" dt="2026-10-10T09:51:28.557" v="9718" actId="1035"/>
+          <ac:picMkLst>
+            <pc:docMk/>
+            <pc:sldMk cId="2790278619" sldId="799"/>
+            <ac:picMk id="3" creationId="{BA1AEE6B-C3CF-FAEB-FF58-BBA90707E8D1}"/>
+          </ac:picMkLst>
+        </pc:picChg>
+        <pc:picChg chg="del">
+          <ac:chgData name="Jan Willem van den End (EBO_CMA)" userId="32ade95a-e024-4672-952f-5ed8641a9e00" providerId="ADAL" clId="{3BBBE02E-ACD4-4586-9407-5E79BF620DF1}" dt="2026-10-10T08:56:53.227" v="9243" actId="478"/>
+          <ac:picMkLst>
+            <pc:docMk/>
+            <pc:sldMk cId="2790278619" sldId="799"/>
+            <ac:picMk id="4" creationId="{38FE1EB0-0B67-BA03-98DA-03667A2455DC}"/>
+          </ac:picMkLst>
+        </pc:picChg>
+        <pc:picChg chg="mod">
+          <ac:chgData name="Jan Willem van den End (EBO_CMA)" userId="32ade95a-e024-4672-952f-5ed8641a9e00" providerId="ADAL" clId="{3BBBE02E-ACD4-4586-9407-5E79BF620DF1}" dt="2026-10-10T09:51:18.722" v="9717" actId="1076"/>
+          <ac:picMkLst>
+            <pc:docMk/>
+            <pc:sldMk cId="2790278619" sldId="799"/>
+            <ac:picMk id="5" creationId="{1934FC63-0880-B9C7-3990-4C41059B0EE7}"/>
+          </ac:picMkLst>
+        </pc:picChg>
       </pc:sldChg>
     </pc:docChg>
   </pc:docChgLst>
@@ -615,7 +702,7 @@
           <a:p>
             <a:fld id="{C26BBE9F-2231-4498-A3E5-DFB02EDDD594}" type="datetimeFigureOut">
               <a:rPr lang="nl-NL" smtClean="0"/>
-              <a:t>5-10-2026</a:t>
+              <a:t>10-10-2026</a:t>
             </a:fld>
             <a:endParaRPr lang="nl-NL"/>
           </a:p>
@@ -780,7 +867,7 @@
           <a:p>
             <a:fld id="{900D5B51-A3C5-4FC7-8A0D-54EFEFAFACD3}" type="datetimeFigureOut">
               <a:rPr lang="nl-NL" smtClean="0"/>
-              <a:t>5-10-2026</a:t>
+              <a:t>10-10-2026</a:t>
             </a:fld>
             <a:endParaRPr lang="nl-NL"/>
           </a:p>
@@ -1098,7 +1185,14 @@
           <a:bodyPr/>
           <a:lstStyle/>
           <a:p>
-            <a:endParaRPr lang="nl-NL"/>
+            <a:r>
+              <a:rPr lang="nl-NL" dirty="0"/>
+              <a:t>Commentaar</a:t>
+            </a:r>
+            <a:r>
+              <a:rPr lang="nl-NL"/>
+              <a:t>: Berben, Bun, Mink</a:t>
+            </a:r>
           </a:p>
         </p:txBody>
       </p:sp>
@@ -1139,6 +1233,509 @@
 </file>
 
 <file path=ppt/notesSlides/notesSlide10.xml><?xml version="1.0" encoding="utf-8"?>
+<p:notes xmlns:a="http://schemas.openxmlformats.org/drawingml/2006/main" xmlns:r="http://schemas.openxmlformats.org/officeDocument/2006/relationships" xmlns:p="http://schemas.openxmlformats.org/presentationml/2006/main">
+  <p:cSld>
+    <p:spTree>
+      <p:nvGrpSpPr>
+        <p:cNvPr id="1" name="">
+          <a:extLst>
+            <a:ext uri="{FF2B5EF4-FFF2-40B4-BE49-F238E27FC236}">
+              <a16:creationId xmlns:a16="http://schemas.microsoft.com/office/drawing/2014/main" id="{93376A53-A44A-40F9-6AEB-D4604691F90E}"/>
+            </a:ext>
+          </a:extLst>
+        </p:cNvPr>
+        <p:cNvGrpSpPr/>
+        <p:nvPr/>
+      </p:nvGrpSpPr>
+      <p:grpSpPr>
+        <a:xfrm>
+          <a:off x="0" y="0"/>
+          <a:ext cx="0" cy="0"/>
+          <a:chOff x="0" y="0"/>
+          <a:chExt cx="0" cy="0"/>
+        </a:xfrm>
+      </p:grpSpPr>
+      <p:sp>
+        <p:nvSpPr>
+          <p:cNvPr id="2" name="Tijdelijke aanduiding voor dia-afbeelding 1">
+            <a:extLst>
+              <a:ext uri="{FF2B5EF4-FFF2-40B4-BE49-F238E27FC236}">
+                <a16:creationId xmlns:a16="http://schemas.microsoft.com/office/drawing/2014/main" id="{41A525D6-CCD9-BB08-433C-BC82E9D4D224}"/>
+              </a:ext>
+            </a:extLst>
+          </p:cNvPr>
+          <p:cNvSpPr>
+            <a:spLocks noGrp="1" noRot="1" noChangeAspect="1"/>
+          </p:cNvSpPr>
+          <p:nvPr>
+            <p:ph type="sldImg"/>
+          </p:nvPr>
+        </p:nvSpPr>
+        <p:spPr/>
+        <p:txBody>
+          <a:bodyPr/>
+          <a:lstStyle/>
+          <a:p>
+            <a:endParaRPr lang="en-US"/>
+          </a:p>
+        </p:txBody>
+      </p:sp>
+      <p:sp>
+        <p:nvSpPr>
+          <p:cNvPr id="3" name="Tijdelijke aanduiding voor notities 2">
+            <a:extLst>
+              <a:ext uri="{FF2B5EF4-FFF2-40B4-BE49-F238E27FC236}">
+                <a16:creationId xmlns:a16="http://schemas.microsoft.com/office/drawing/2014/main" id="{641B7F79-C5DD-F3BA-D516-7A8B8AF19412}"/>
+              </a:ext>
+            </a:extLst>
+          </p:cNvPr>
+          <p:cNvSpPr>
+            <a:spLocks noGrp="1"/>
+          </p:cNvSpPr>
+          <p:nvPr>
+            <p:ph type="body" idx="1"/>
+          </p:nvPr>
+        </p:nvSpPr>
+        <p:spPr/>
+        <p:txBody>
+          <a:bodyPr/>
+          <a:lstStyle/>
+          <a:p>
+            <a:pPr marL="171450" indent="-171450">
+              <a:buFontTx/>
+              <a:buChar char="-"/>
+            </a:pPr>
+            <a:r>
+              <a:rPr lang="en-US" sz="1400" dirty="0"/>
+              <a:t>Dependent variable is the unexpected component of GDP growth, while the explanatory variables describe the composition of GDP (investment or exports as a share of GDP). In doing so, the relationship does not describe an accounting identity. In addition, the ICT variables are recorded with a delay (previous ICT exposures explain later growth surprises).</a:t>
+            </a:r>
+          </a:p>
+          <a:p>
+            <a:pPr marL="171450" indent="-171450">
+              <a:buFontTx/>
+              <a:buChar char="-"/>
+            </a:pPr>
+            <a:endParaRPr lang="en-US" sz="1400" dirty="0"/>
+          </a:p>
+          <a:p>
+            <a:pPr marL="171450" indent="-171450">
+              <a:buFontTx/>
+              <a:buChar char="-"/>
+            </a:pPr>
+            <a:r>
+              <a:rPr lang="en-US" sz="1400" dirty="0"/>
+              <a:t>Investing in ICT does not yet equal its effective application. It is a proxy, also for a country's exposure to the ICT factor without having to change economic processes.</a:t>
+            </a:r>
+          </a:p>
+          <a:p>
+            <a:pPr marL="171450" indent="-171450">
+              <a:buFontTx/>
+              <a:buChar char="-"/>
+            </a:pPr>
+            <a:endParaRPr lang="nl-NL" sz="1400" dirty="0"/>
+          </a:p>
+          <a:p>
+            <a:pPr marL="171450" indent="-171450">
+              <a:buFontTx/>
+              <a:buChar char="-"/>
+            </a:pPr>
+            <a:r>
+              <a:rPr lang="nl-NL" sz="1400" dirty="0" err="1"/>
+              <a:t>Each</a:t>
+            </a:r>
+            <a:r>
+              <a:rPr lang="nl-NL" sz="1400" dirty="0"/>
+              <a:t> </a:t>
+            </a:r>
+            <a:r>
+              <a:rPr lang="nl-NL" sz="1400" dirty="0" err="1"/>
+              <a:t>year</a:t>
+            </a:r>
+            <a:r>
+              <a:rPr lang="nl-NL" sz="1400" dirty="0"/>
+              <a:t> the </a:t>
+            </a:r>
+            <a:r>
+              <a:rPr lang="nl-NL" sz="1400" dirty="0" err="1"/>
+              <a:t>median</a:t>
+            </a:r>
+            <a:r>
+              <a:rPr lang="nl-NL" sz="1400" dirty="0"/>
+              <a:t> </a:t>
+            </a:r>
+            <a:r>
+              <a:rPr lang="nl-NL" sz="1400" dirty="0" err="1"/>
+              <a:t>threshold</a:t>
+            </a:r>
+            <a:r>
+              <a:rPr lang="nl-NL" sz="1400" dirty="0"/>
+              <a:t> </a:t>
+            </a:r>
+            <a:r>
+              <a:rPr lang="nl-NL" sz="1400" dirty="0" err="1"/>
+              <a:t>for</a:t>
+            </a:r>
+            <a:r>
+              <a:rPr lang="nl-NL" sz="1400" dirty="0"/>
+              <a:t> </a:t>
+            </a:r>
+            <a:r>
+              <a:rPr lang="nl-NL" sz="1400" dirty="0" err="1"/>
+              <a:t>Above</a:t>
+            </a:r>
+            <a:r>
+              <a:rPr lang="nl-NL" sz="1400" dirty="0"/>
+              <a:t> </a:t>
+            </a:r>
+            <a:r>
+              <a:rPr lang="nl-NL" sz="1400" dirty="0" err="1"/>
+              <a:t>vs</a:t>
+            </a:r>
+            <a:r>
+              <a:rPr lang="nl-NL" sz="1400" dirty="0"/>
+              <a:t> Below changes, </a:t>
+            </a:r>
+            <a:r>
+              <a:rPr lang="nl-NL" sz="1400" dirty="0" err="1"/>
+              <a:t>so</a:t>
+            </a:r>
+            <a:r>
+              <a:rPr lang="nl-NL" sz="1400" dirty="0"/>
+              <a:t>: </a:t>
+            </a:r>
+            <a:r>
+              <a:rPr lang="nl-NL" sz="1400" dirty="0" err="1"/>
+              <a:t>each</a:t>
+            </a:r>
+            <a:r>
+              <a:rPr lang="nl-NL" sz="1400" dirty="0"/>
+              <a:t> </a:t>
+            </a:r>
+            <a:r>
+              <a:rPr lang="nl-NL" sz="1400" dirty="0" err="1"/>
+              <a:t>year</a:t>
+            </a:r>
+            <a:r>
+              <a:rPr lang="nl-NL" sz="1400" dirty="0"/>
+              <a:t> the </a:t>
+            </a:r>
+            <a:r>
+              <a:rPr lang="nl-NL" sz="1400" dirty="0" err="1"/>
+              <a:t>Above</a:t>
+            </a:r>
+            <a:r>
+              <a:rPr lang="nl-NL" sz="1400" dirty="0"/>
+              <a:t> and Below </a:t>
+            </a:r>
+            <a:r>
+              <a:rPr lang="nl-NL" sz="1400" dirty="0" err="1"/>
+              <a:t>groups</a:t>
+            </a:r>
+            <a:r>
+              <a:rPr lang="nl-NL" sz="1400" dirty="0"/>
+              <a:t> of </a:t>
+            </a:r>
+            <a:r>
+              <a:rPr lang="nl-NL" sz="1400" dirty="0" err="1"/>
+              <a:t>countries</a:t>
+            </a:r>
+            <a:r>
+              <a:rPr lang="nl-NL" sz="1400" dirty="0"/>
+              <a:t> </a:t>
+            </a:r>
+            <a:r>
+              <a:rPr lang="nl-NL" sz="1400" dirty="0" err="1"/>
+              <a:t>differ</a:t>
+            </a:r>
+            <a:r>
+              <a:rPr lang="nl-NL" sz="1400" dirty="0"/>
+              <a:t>.</a:t>
+            </a:r>
+          </a:p>
+        </p:txBody>
+      </p:sp>
+      <p:sp>
+        <p:nvSpPr>
+          <p:cNvPr id="4" name="Tijdelijke aanduiding voor dianummer 3">
+            <a:extLst>
+              <a:ext uri="{FF2B5EF4-FFF2-40B4-BE49-F238E27FC236}">
+                <a16:creationId xmlns:a16="http://schemas.microsoft.com/office/drawing/2014/main" id="{7337F1BA-05B0-AA9C-28F9-DF416BB0B68E}"/>
+              </a:ext>
+            </a:extLst>
+          </p:cNvPr>
+          <p:cNvSpPr>
+            <a:spLocks noGrp="1"/>
+          </p:cNvSpPr>
+          <p:nvPr>
+            <p:ph type="sldNum" sz="quarter" idx="10"/>
+          </p:nvPr>
+        </p:nvSpPr>
+        <p:spPr/>
+        <p:txBody>
+          <a:bodyPr/>
+          <a:lstStyle/>
+          <a:p>
+            <a:pPr marL="0" marR="0" lvl="0" indent="0" algn="r" defTabSz="914400" rtl="0" eaLnBrk="1" fontAlgn="auto" latinLnBrk="0" hangingPunct="1">
+              <a:lnSpc>
+                <a:spcPct val="100000"/>
+              </a:lnSpc>
+              <a:spcBef>
+                <a:spcPts val="0"/>
+              </a:spcBef>
+              <a:spcAft>
+                <a:spcPts val="0"/>
+              </a:spcAft>
+              <a:buClrTx/>
+              <a:buSzTx/>
+              <a:buFontTx/>
+              <a:buNone/>
+              <a:tabLst/>
+              <a:defRPr/>
+            </a:pPr>
+            <a:fld id="{F9513F78-5509-4637-B397-C3DEABA56153}" type="slidenum">
+              <a:rPr kumimoji="0" lang="nl-NL" sz="1200" b="0" i="0" u="none" strike="noStrike" kern="1200" cap="none" spc="0" normalizeH="0" baseline="0" noProof="0" smtClean="0">
+                <a:ln>
+                  <a:noFill/>
+                </a:ln>
+                <a:solidFill>
+                  <a:prstClr val="black"/>
+                </a:solidFill>
+                <a:effectLst/>
+                <a:uLnTx/>
+                <a:uFillTx/>
+                <a:latin typeface="Calibri" panose="020F0502020204030204"/>
+                <a:ea typeface="+mn-ea"/>
+                <a:cs typeface="+mn-cs"/>
+              </a:rPr>
+              <a:pPr marL="0" marR="0" lvl="0" indent="0" algn="r" defTabSz="914400" rtl="0" eaLnBrk="1" fontAlgn="auto" latinLnBrk="0" hangingPunct="1">
+                <a:lnSpc>
+                  <a:spcPct val="100000"/>
+                </a:lnSpc>
+                <a:spcBef>
+                  <a:spcPts val="0"/>
+                </a:spcBef>
+                <a:spcAft>
+                  <a:spcPts val="0"/>
+                </a:spcAft>
+                <a:buClrTx/>
+                <a:buSzTx/>
+                <a:buFontTx/>
+                <a:buNone/>
+                <a:tabLst/>
+                <a:defRPr/>
+              </a:pPr>
+              <a:t>10</a:t>
+            </a:fld>
+            <a:endParaRPr kumimoji="0" lang="nl-NL" sz="1200" b="0" i="0" u="none" strike="noStrike" kern="1200" cap="none" spc="0" normalizeH="0" baseline="0" noProof="0">
+              <a:ln>
+                <a:noFill/>
+              </a:ln>
+              <a:solidFill>
+                <a:prstClr val="black"/>
+              </a:solidFill>
+              <a:effectLst/>
+              <a:uLnTx/>
+              <a:uFillTx/>
+              <a:latin typeface="Calibri" panose="020F0502020204030204"/>
+              <a:ea typeface="+mn-ea"/>
+              <a:cs typeface="+mn-cs"/>
+            </a:endParaRPr>
+          </a:p>
+        </p:txBody>
+      </p:sp>
+    </p:spTree>
+    <p:extLst>
+      <p:ext uri="{BB962C8B-B14F-4D97-AF65-F5344CB8AC3E}">
+        <p14:creationId xmlns:p14="http://schemas.microsoft.com/office/powerpoint/2010/main" val="2774336006"/>
+      </p:ext>
+    </p:extLst>
+  </p:cSld>
+  <p:clrMapOvr>
+    <a:masterClrMapping/>
+  </p:clrMapOvr>
+</p:notes>
+</file>
+
+<file path=ppt/notesSlides/notesSlide11.xml><?xml version="1.0" encoding="utf-8"?>
+<p:notes xmlns:a="http://schemas.openxmlformats.org/drawingml/2006/main" xmlns:r="http://schemas.openxmlformats.org/officeDocument/2006/relationships" xmlns:p="http://schemas.openxmlformats.org/presentationml/2006/main">
+  <p:cSld>
+    <p:spTree>
+      <p:nvGrpSpPr>
+        <p:cNvPr id="1" name="">
+          <a:extLst>
+            <a:ext uri="{FF2B5EF4-FFF2-40B4-BE49-F238E27FC236}">
+              <a16:creationId xmlns:a16="http://schemas.microsoft.com/office/drawing/2014/main" id="{43F894C5-5DF8-CF0D-9F40-18220F46836D}"/>
+            </a:ext>
+          </a:extLst>
+        </p:cNvPr>
+        <p:cNvGrpSpPr/>
+        <p:nvPr/>
+      </p:nvGrpSpPr>
+      <p:grpSpPr>
+        <a:xfrm>
+          <a:off x="0" y="0"/>
+          <a:ext cx="0" cy="0"/>
+          <a:chOff x="0" y="0"/>
+          <a:chExt cx="0" cy="0"/>
+        </a:xfrm>
+      </p:grpSpPr>
+      <p:sp>
+        <p:nvSpPr>
+          <p:cNvPr id="2" name="Tijdelijke aanduiding voor dia-afbeelding 1">
+            <a:extLst>
+              <a:ext uri="{FF2B5EF4-FFF2-40B4-BE49-F238E27FC236}">
+                <a16:creationId xmlns:a16="http://schemas.microsoft.com/office/drawing/2014/main" id="{8585E70F-86F1-ABB3-C0A5-851B721BADB8}"/>
+              </a:ext>
+            </a:extLst>
+          </p:cNvPr>
+          <p:cNvSpPr>
+            <a:spLocks noGrp="1" noRot="1" noChangeAspect="1"/>
+          </p:cNvSpPr>
+          <p:nvPr>
+            <p:ph type="sldImg"/>
+          </p:nvPr>
+        </p:nvSpPr>
+        <p:spPr/>
+        <p:txBody>
+          <a:bodyPr/>
+          <a:lstStyle/>
+          <a:p>
+            <a:endParaRPr lang="en-US"/>
+          </a:p>
+        </p:txBody>
+      </p:sp>
+      <p:sp>
+        <p:nvSpPr>
+          <p:cNvPr id="3" name="Tijdelijke aanduiding voor notities 2">
+            <a:extLst>
+              <a:ext uri="{FF2B5EF4-FFF2-40B4-BE49-F238E27FC236}">
+                <a16:creationId xmlns:a16="http://schemas.microsoft.com/office/drawing/2014/main" id="{0EE9CC7E-C39E-CD4E-A766-7DBE8097F989}"/>
+              </a:ext>
+            </a:extLst>
+          </p:cNvPr>
+          <p:cNvSpPr>
+            <a:spLocks noGrp="1"/>
+          </p:cNvSpPr>
+          <p:nvPr>
+            <p:ph type="body" idx="1"/>
+          </p:nvPr>
+        </p:nvSpPr>
+        <p:spPr/>
+        <p:txBody>
+          <a:bodyPr/>
+          <a:lstStyle/>
+          <a:p>
+            <a:pPr marL="171450" indent="-171450">
+              <a:buFontTx/>
+              <a:buChar char="-"/>
+            </a:pPr>
+            <a:endParaRPr lang="nl-NL" dirty="0"/>
+          </a:p>
+        </p:txBody>
+      </p:sp>
+      <p:sp>
+        <p:nvSpPr>
+          <p:cNvPr id="4" name="Tijdelijke aanduiding voor dianummer 3">
+            <a:extLst>
+              <a:ext uri="{FF2B5EF4-FFF2-40B4-BE49-F238E27FC236}">
+                <a16:creationId xmlns:a16="http://schemas.microsoft.com/office/drawing/2014/main" id="{DFAF7B08-4D7D-35A3-3C73-1281369EA460}"/>
+              </a:ext>
+            </a:extLst>
+          </p:cNvPr>
+          <p:cNvSpPr>
+            <a:spLocks noGrp="1"/>
+          </p:cNvSpPr>
+          <p:nvPr>
+            <p:ph type="sldNum" sz="quarter" idx="10"/>
+          </p:nvPr>
+        </p:nvSpPr>
+        <p:spPr/>
+        <p:txBody>
+          <a:bodyPr/>
+          <a:lstStyle/>
+          <a:p>
+            <a:pPr marL="0" marR="0" lvl="0" indent="0" algn="r" defTabSz="914400" rtl="0" eaLnBrk="1" fontAlgn="auto" latinLnBrk="0" hangingPunct="1">
+              <a:lnSpc>
+                <a:spcPct val="100000"/>
+              </a:lnSpc>
+              <a:spcBef>
+                <a:spcPts val="0"/>
+              </a:spcBef>
+              <a:spcAft>
+                <a:spcPts val="0"/>
+              </a:spcAft>
+              <a:buClrTx/>
+              <a:buSzTx/>
+              <a:buFontTx/>
+              <a:buNone/>
+              <a:tabLst/>
+              <a:defRPr/>
+            </a:pPr>
+            <a:fld id="{F9513F78-5509-4637-B397-C3DEABA56153}" type="slidenum">
+              <a:rPr kumimoji="0" lang="nl-NL" sz="1200" b="0" i="0" u="none" strike="noStrike" kern="1200" cap="none" spc="0" normalizeH="0" baseline="0" noProof="0" smtClean="0">
+                <a:ln>
+                  <a:noFill/>
+                </a:ln>
+                <a:solidFill>
+                  <a:prstClr val="black"/>
+                </a:solidFill>
+                <a:effectLst/>
+                <a:uLnTx/>
+                <a:uFillTx/>
+                <a:latin typeface="Calibri" panose="020F0502020204030204"/>
+                <a:ea typeface="+mn-ea"/>
+                <a:cs typeface="+mn-cs"/>
+              </a:rPr>
+              <a:pPr marL="0" marR="0" lvl="0" indent="0" algn="r" defTabSz="914400" rtl="0" eaLnBrk="1" fontAlgn="auto" latinLnBrk="0" hangingPunct="1">
+                <a:lnSpc>
+                  <a:spcPct val="100000"/>
+                </a:lnSpc>
+                <a:spcBef>
+                  <a:spcPts val="0"/>
+                </a:spcBef>
+                <a:spcAft>
+                  <a:spcPts val="0"/>
+                </a:spcAft>
+                <a:buClrTx/>
+                <a:buSzTx/>
+                <a:buFontTx/>
+                <a:buNone/>
+                <a:tabLst/>
+                <a:defRPr/>
+              </a:pPr>
+              <a:t>11</a:t>
+            </a:fld>
+            <a:endParaRPr kumimoji="0" lang="nl-NL" sz="1200" b="0" i="0" u="none" strike="noStrike" kern="1200" cap="none" spc="0" normalizeH="0" baseline="0" noProof="0">
+              <a:ln>
+                <a:noFill/>
+              </a:ln>
+              <a:solidFill>
+                <a:prstClr val="black"/>
+              </a:solidFill>
+              <a:effectLst/>
+              <a:uLnTx/>
+              <a:uFillTx/>
+              <a:latin typeface="Calibri" panose="020F0502020204030204"/>
+              <a:ea typeface="+mn-ea"/>
+              <a:cs typeface="+mn-cs"/>
+            </a:endParaRPr>
+          </a:p>
+        </p:txBody>
+      </p:sp>
+    </p:spTree>
+    <p:extLst>
+      <p:ext uri="{BB962C8B-B14F-4D97-AF65-F5344CB8AC3E}">
+        <p14:creationId xmlns:p14="http://schemas.microsoft.com/office/powerpoint/2010/main" val="2683627817"/>
+      </p:ext>
+    </p:extLst>
+  </p:cSld>
+  <p:clrMapOvr>
+    <a:masterClrMapping/>
+  </p:clrMapOvr>
+</p:notes>
+</file>
+
+<file path=ppt/notesSlides/notesSlide12.xml><?xml version="1.0" encoding="utf-8"?>
 <p:notes xmlns:a="http://schemas.openxmlformats.org/drawingml/2006/main" xmlns:r="http://schemas.openxmlformats.org/officeDocument/2006/relationships" xmlns:p="http://schemas.openxmlformats.org/presentationml/2006/main">
   <p:cSld>
     <p:spTree>
@@ -1285,7 +1882,7 @@
                 <a:tabLst/>
                 <a:defRPr/>
               </a:pPr>
-              <a:t>10</a:t>
+              <a:t>12</a:t>
             </a:fld>
             <a:endParaRPr kumimoji="0" lang="nl-NL" sz="1200" b="0" i="0" u="none" strike="noStrike" kern="1200" cap="none" spc="0" normalizeH="0" baseline="0" noProof="0">
               <a:ln>
@@ -1317,7 +1914,7 @@
 </p:notes>
 </file>
 
-<file path=ppt/notesSlides/notesSlide11.xml><?xml version="1.0" encoding="utf-8"?>
+<file path=ppt/notesSlides/notesSlide13.xml><?xml version="1.0" encoding="utf-8"?>
 <p:notes xmlns:a="http://schemas.openxmlformats.org/drawingml/2006/main" xmlns:r="http://schemas.openxmlformats.org/officeDocument/2006/relationships" xmlns:p="http://schemas.openxmlformats.org/presentationml/2006/main">
   <p:cSld>
     <p:spTree>
@@ -1464,7 +2061,7 @@
                 <a:tabLst/>
                 <a:defRPr/>
               </a:pPr>
-              <a:t>11</a:t>
+              <a:t>13</a:t>
             </a:fld>
             <a:endParaRPr kumimoji="0" lang="nl-NL" sz="1200" b="0" i="0" u="none" strike="noStrike" kern="1200" cap="none" spc="0" normalizeH="0" baseline="0" noProof="0">
               <a:ln>
@@ -1496,7 +2093,7 @@
 </p:notes>
 </file>
 
-<file path=ppt/notesSlides/notesSlide12.xml><?xml version="1.0" encoding="utf-8"?>
+<file path=ppt/notesSlides/notesSlide14.xml><?xml version="1.0" encoding="utf-8"?>
 <p:notes xmlns:a="http://schemas.openxmlformats.org/drawingml/2006/main" xmlns:r="http://schemas.openxmlformats.org/officeDocument/2006/relationships" xmlns:p="http://schemas.openxmlformats.org/presentationml/2006/main">
   <p:cSld>
     <p:spTree>
@@ -1601,7 +2198,7 @@
                 </a:solidFill>
               </a:rPr>
               <a:pPr/>
-              <a:t>12</a:t>
+              <a:t>14</a:t>
             </a:fld>
             <a:endParaRPr lang="nl-NL">
               <a:solidFill>
@@ -1624,7 +2221,7 @@
 </p:notes>
 </file>
 
-<file path=ppt/notesSlides/notesSlide13.xml><?xml version="1.0" encoding="utf-8"?>
+<file path=ppt/notesSlides/notesSlide15.xml><?xml version="1.0" encoding="utf-8"?>
 <p:notes xmlns:a="http://schemas.openxmlformats.org/drawingml/2006/main" xmlns:r="http://schemas.openxmlformats.org/officeDocument/2006/relationships" xmlns:p="http://schemas.openxmlformats.org/presentationml/2006/main">
   <p:cSld>
     <p:spTree>
@@ -1729,7 +2326,7 @@
                 </a:solidFill>
               </a:rPr>
               <a:pPr/>
-              <a:t>13</a:t>
+              <a:t>15</a:t>
             </a:fld>
             <a:endParaRPr lang="nl-NL">
               <a:solidFill>
@@ -1752,7 +2349,7 @@
 </p:notes>
 </file>
 
-<file path=ppt/notesSlides/notesSlide14.xml><?xml version="1.0" encoding="utf-8"?>
+<file path=ppt/notesSlides/notesSlide16.xml><?xml version="1.0" encoding="utf-8"?>
 <p:notes xmlns:a="http://schemas.openxmlformats.org/drawingml/2006/main" xmlns:r="http://schemas.openxmlformats.org/officeDocument/2006/relationships" xmlns:p="http://schemas.openxmlformats.org/presentationml/2006/main">
   <p:cSld>
     <p:spTree>
@@ -1870,7 +2467,7 @@
                 </a:solidFill>
               </a:rPr>
               <a:pPr/>
-              <a:t>14</a:t>
+              <a:t>16</a:t>
             </a:fld>
             <a:endParaRPr lang="nl-NL">
               <a:solidFill>
@@ -1893,7 +2490,7 @@
 </p:notes>
 </file>
 
-<file path=ppt/notesSlides/notesSlide15.xml><?xml version="1.0" encoding="utf-8"?>
+<file path=ppt/notesSlides/notesSlide17.xml><?xml version="1.0" encoding="utf-8"?>
 <p:notes xmlns:a="http://schemas.openxmlformats.org/drawingml/2006/main" xmlns:r="http://schemas.openxmlformats.org/officeDocument/2006/relationships" xmlns:p="http://schemas.openxmlformats.org/presentationml/2006/main">
   <p:cSld>
     <p:spTree>
@@ -2265,7 +2862,7 @@
                 <a:tabLst/>
                 <a:defRPr/>
               </a:pPr>
-              <a:t>15</a:t>
+              <a:t>17</a:t>
             </a:fld>
             <a:endParaRPr kumimoji="0" lang="nl-NL" sz="1200" b="0" i="0" u="none" strike="noStrike" kern="1200" cap="none" spc="0" normalizeH="0" baseline="0" noProof="0">
               <a:ln>
@@ -2858,8 +3455,8 @@
           </a:p>
         </p:txBody>
       </p:sp>
-      <mc:AlternateContent xmlns:mc="http://schemas.openxmlformats.org/markup-compatibility/2006">
-        <mc:Choice xmlns:a14="http://schemas.microsoft.com/office/drawing/2010/main" Requires="a14">
+      <mc:AlternateContent xmlns:mc="http://schemas.openxmlformats.org/markup-compatibility/2006" xmlns:a14="http://schemas.microsoft.com/office/drawing/2010/main">
+        <mc:Choice Requires="a14">
           <p:sp>
             <p:nvSpPr>
               <p:cNvPr id="3" name="Tijdelijke aanduiding voor notities 2">
@@ -3239,27 +3836,56 @@
                     <a:ea typeface="+mn-ea"/>
                     <a:cs typeface="+mn-cs"/>
                   </a:rPr>
-                  <a:t> holding AI constant</a:t>
+                  <a:t> </a:t>
                 </a:r>
-              </a:p>
-              <a:p>
-                <a:pPr marL="0" marR="0" lvl="0" indent="0" algn="l" defTabSz="914400" rtl="0" eaLnBrk="1" fontAlgn="t" latinLnBrk="0" hangingPunct="1">
-                  <a:lnSpc>
-                    <a:spcPct val="100000"/>
-                  </a:lnSpc>
-                  <a:spcBef>
-                    <a:spcPts val="0"/>
-                  </a:spcBef>
-                  <a:spcAft>
-                    <a:spcPts val="0"/>
-                  </a:spcAft>
-                  <a:buClrTx/>
-                  <a:buSzTx/>
-                  <a:buFontTx/>
-                  <a:buNone/>
-                  <a:tabLst/>
-                  <a:defRPr/>
-                </a:pPr>
+                <a:r>
+                  <a:rPr lang="nl-NL" sz="1400" b="0" i="0" kern="1200" dirty="0">
+                    <a:solidFill>
+                      <a:schemeClr val="tx1"/>
+                    </a:solidFill>
+                    <a:effectLst/>
+                    <a:latin typeface="+mn-lt"/>
+                    <a:ea typeface="+mn-ea"/>
+                    <a:cs typeface="+mn-cs"/>
+                  </a:rPr>
+                  <a:t>interactieterm =&gt; </a:t>
+                </a:r>
+                <a:r>
+                  <a:rPr lang="nl-NL" sz="1400" b="0" i="0" kern="1200" dirty="0" err="1">
+                    <a:solidFill>
+                      <a:schemeClr val="tx1"/>
+                    </a:solidFill>
+                    <a:effectLst/>
+                    <a:latin typeface="+mn-lt"/>
+                    <a:ea typeface="+mn-ea"/>
+                    <a:cs typeface="+mn-cs"/>
+                  </a:rPr>
+                  <a:t>Autumn</a:t>
+                </a:r>
+                <a:r>
+                  <a:rPr lang="nl-NL" sz="1400" b="0" i="0" kern="1200" dirty="0">
+                    <a:solidFill>
+                      <a:schemeClr val="tx1"/>
+                    </a:solidFill>
+                    <a:effectLst/>
+                    <a:latin typeface="+mn-lt"/>
+                    <a:ea typeface="+mn-ea"/>
+                    <a:cs typeface="+mn-cs"/>
+                  </a:rPr>
+                  <a:t>-effect is anders  voor t+1 dan voor t  // </a:t>
+                </a:r>
+                <a:r>
+                  <a:rPr lang="en-NL" sz="1400" b="0" i="0" kern="1200" dirty="0">
+                    <a:solidFill>
+                      <a:schemeClr val="tx1"/>
+                    </a:solidFill>
+                    <a:effectLst/>
+                    <a:latin typeface="+mn-lt"/>
+                    <a:ea typeface="+mn-ea"/>
+                    <a:cs typeface="+mn-cs"/>
+                  </a:rPr>
+                  <a:t>holding AI constant</a:t>
+                </a:r>
                 <a:r>
                   <a:rPr lang="en-US" sz="1400" b="0" i="0" kern="1200" dirty="0">
                     <a:solidFill>
@@ -3270,7 +3896,7 @@
                     <a:ea typeface="+mn-ea"/>
                     <a:cs typeface="+mn-cs"/>
                   </a:rPr>
-                  <a:t>(w</a:t>
+                  <a:t> (w</a:t>
                 </a:r>
                 <a:r>
                   <a:rPr lang="en-NL" sz="1400" b="0" i="0" kern="1200" dirty="0" err="1">
@@ -3482,7 +4108,7 @@
                 <a:pPr fontAlgn="t"/>
                 <a:r>
                   <a:rPr lang="en-US" dirty="0"/>
-                  <a:t>Then you estimate </a:t>
+                  <a:t>estimate </a:t>
                 </a:r>
                 <a:r>
                   <a:rPr lang="en-NL" dirty="0"/>
@@ -3494,7 +4120,15 @@
                 </a:r>
                 <a:r>
                   <a:rPr lang="en-NL" dirty="0"/>
-                  <a:t>associated with probability of a positive GDP growth surprise</a:t>
+                  <a:t>associated with probability of </a:t>
+                </a:r>
+                <a:r>
+                  <a:rPr lang="en-US" dirty="0"/>
+                  <a:t>positive </a:t>
+                </a:r>
+                <a:r>
+                  <a:rPr lang="en-NL" dirty="0"/>
+                  <a:t>GDP growth surprise</a:t>
                 </a:r>
                 <a:r>
                   <a:rPr lang="en-US" dirty="0"/>
@@ -3564,7 +4198,7 @@
             </p:txBody>
           </p:sp>
         </mc:Choice>
-        <mc:Fallback>
+        <mc:Fallback xmlns="">
           <p:sp>
             <p:nvSpPr>
               <p:cNvPr id="3" name="Tijdelijke aanduiding voor notities 2">
@@ -3944,27 +4578,56 @@
                     <a:ea typeface="+mn-ea"/>
                     <a:cs typeface="+mn-cs"/>
                   </a:rPr>
-                  <a:t> holding AI constant</a:t>
+                  <a:t> </a:t>
                 </a:r>
-              </a:p>
-              <a:p>
-                <a:pPr marL="0" marR="0" lvl="0" indent="0" algn="l" defTabSz="914400" rtl="0" eaLnBrk="1" fontAlgn="t" latinLnBrk="0" hangingPunct="1">
-                  <a:lnSpc>
-                    <a:spcPct val="100000"/>
-                  </a:lnSpc>
-                  <a:spcBef>
-                    <a:spcPts val="0"/>
-                  </a:spcBef>
-                  <a:spcAft>
-                    <a:spcPts val="0"/>
-                  </a:spcAft>
-                  <a:buClrTx/>
-                  <a:buSzTx/>
-                  <a:buFontTx/>
-                  <a:buNone/>
-                  <a:tabLst/>
-                  <a:defRPr/>
-                </a:pPr>
+                <a:r>
+                  <a:rPr lang="nl-NL" sz="1400" b="0" i="0" kern="1200" dirty="0">
+                    <a:solidFill>
+                      <a:schemeClr val="tx1"/>
+                    </a:solidFill>
+                    <a:effectLst/>
+                    <a:latin typeface="+mn-lt"/>
+                    <a:ea typeface="+mn-ea"/>
+                    <a:cs typeface="+mn-cs"/>
+                  </a:rPr>
+                  <a:t>interactieterm =&gt; </a:t>
+                </a:r>
+                <a:r>
+                  <a:rPr lang="nl-NL" sz="1400" b="0" i="0" kern="1200" dirty="0" err="1">
+                    <a:solidFill>
+                      <a:schemeClr val="tx1"/>
+                    </a:solidFill>
+                    <a:effectLst/>
+                    <a:latin typeface="+mn-lt"/>
+                    <a:ea typeface="+mn-ea"/>
+                    <a:cs typeface="+mn-cs"/>
+                  </a:rPr>
+                  <a:t>Autumn</a:t>
+                </a:r>
+                <a:r>
+                  <a:rPr lang="nl-NL" sz="1400" b="0" i="0" kern="1200" dirty="0">
+                    <a:solidFill>
+                      <a:schemeClr val="tx1"/>
+                    </a:solidFill>
+                    <a:effectLst/>
+                    <a:latin typeface="+mn-lt"/>
+                    <a:ea typeface="+mn-ea"/>
+                    <a:cs typeface="+mn-cs"/>
+                  </a:rPr>
+                  <a:t>-effect is anders  voor t+1 dan voor t  // </a:t>
+                </a:r>
+                <a:r>
+                  <a:rPr lang="en-NL" sz="1400" b="0" i="0" kern="1200" dirty="0">
+                    <a:solidFill>
+                      <a:schemeClr val="tx1"/>
+                    </a:solidFill>
+                    <a:effectLst/>
+                    <a:latin typeface="+mn-lt"/>
+                    <a:ea typeface="+mn-ea"/>
+                    <a:cs typeface="+mn-cs"/>
+                  </a:rPr>
+                  <a:t>holding AI constant</a:t>
+                </a:r>
                 <a:r>
                   <a:rPr lang="en-US" sz="1400" b="0" i="0" kern="1200" dirty="0">
                     <a:solidFill>
@@ -3975,7 +4638,7 @@
                     <a:ea typeface="+mn-ea"/>
                     <a:cs typeface="+mn-cs"/>
                   </a:rPr>
-                  <a:t>(w</a:t>
+                  <a:t> (w</a:t>
                 </a:r>
                 <a:r>
                   <a:rPr lang="en-NL" sz="1400" b="0" i="0" kern="1200" dirty="0" err="1">
@@ -4158,7 +4821,7 @@
                 <a:pPr fontAlgn="t"/>
                 <a:r>
                   <a:rPr lang="en-US" dirty="0"/>
-                  <a:t>Then you estimate </a:t>
+                  <a:t>estimate </a:t>
                 </a:r>
                 <a:r>
                   <a:rPr lang="en-NL" dirty="0"/>
@@ -4170,7 +4833,15 @@
                 </a:r>
                 <a:r>
                   <a:rPr lang="en-NL" dirty="0"/>
-                  <a:t>associated with probability of a positive GDP growth surprise</a:t>
+                  <a:t>associated with probability of </a:t>
+                </a:r>
+                <a:r>
+                  <a:rPr lang="en-US" dirty="0"/>
+                  <a:t>positive </a:t>
+                </a:r>
+                <a:r>
+                  <a:rPr lang="en-NL" dirty="0"/>
+                  <a:t>GDP growth surprise</a:t>
                 </a:r>
                 <a:r>
                   <a:rPr lang="en-US" dirty="0"/>
@@ -4608,296 +5279,25 @@
               <a:buChar char="-"/>
             </a:pPr>
             <a:r>
-              <a:rPr lang="nl-NL" sz="1400" dirty="0"/>
-              <a:t>GDP </a:t>
-            </a:r>
-            <a:r>
-              <a:rPr lang="nl-NL" sz="1400" dirty="0" err="1"/>
-              <a:t>growth</a:t>
-            </a:r>
-            <a:r>
-              <a:rPr lang="nl-NL" sz="1400" dirty="0"/>
-              <a:t> surprise (LH </a:t>
-            </a:r>
-            <a:r>
-              <a:rPr lang="nl-NL" sz="1400" dirty="0" err="1"/>
-              <a:t>variable</a:t>
-            </a:r>
-            <a:r>
-              <a:rPr lang="nl-NL" sz="1400" dirty="0"/>
-              <a:t>) is </a:t>
-            </a:r>
-            <a:r>
-              <a:rPr lang="nl-NL" sz="1400" dirty="0" err="1"/>
-              <a:t>similar</a:t>
-            </a:r>
-            <a:r>
-              <a:rPr lang="nl-NL" sz="1400" dirty="0"/>
-              <a:t> </a:t>
-            </a:r>
-            <a:r>
-              <a:rPr lang="nl-NL" sz="1400" dirty="0" err="1"/>
-              <a:t>to</a:t>
-            </a:r>
-            <a:r>
-              <a:rPr lang="nl-NL" sz="1400" dirty="0"/>
-              <a:t> a first </a:t>
-            </a:r>
-            <a:r>
-              <a:rPr lang="nl-NL" sz="1400" dirty="0" err="1"/>
-              <a:t>differenced</a:t>
-            </a:r>
-            <a:r>
-              <a:rPr lang="nl-NL" sz="1400" dirty="0"/>
-              <a:t> </a:t>
-            </a:r>
-            <a:r>
-              <a:rPr lang="nl-NL" sz="1400" dirty="0" err="1"/>
-              <a:t>variable</a:t>
-            </a:r>
-            <a:r>
-              <a:rPr lang="nl-NL" sz="1400" dirty="0"/>
-              <a:t>, making </a:t>
-            </a:r>
-            <a:r>
-              <a:rPr lang="nl-NL" sz="1400" dirty="0" err="1"/>
-              <a:t>endogeneity</a:t>
-            </a:r>
-            <a:r>
-              <a:rPr lang="nl-NL" sz="1400" dirty="0"/>
-              <a:t> </a:t>
-            </a:r>
-            <a:r>
-              <a:rPr lang="nl-NL" sz="1400" dirty="0" err="1"/>
-              <a:t>with</a:t>
-            </a:r>
-            <a:r>
-              <a:rPr lang="nl-NL" sz="1400" dirty="0"/>
-              <a:t> investment and export variables on the RH </a:t>
-            </a:r>
-            <a:r>
-              <a:rPr lang="nl-NL" sz="1400" dirty="0" err="1"/>
-              <a:t>less</a:t>
-            </a:r>
-            <a:r>
-              <a:rPr lang="nl-NL" sz="1400" dirty="0"/>
-              <a:t> </a:t>
-            </a:r>
-            <a:r>
-              <a:rPr lang="nl-NL" sz="1400" dirty="0" err="1"/>
-              <a:t>obvious</a:t>
-            </a:r>
-            <a:r>
-              <a:rPr lang="nl-NL" sz="1400" dirty="0"/>
-              <a:t> (</a:t>
-            </a:r>
-            <a:r>
-              <a:rPr lang="nl-NL" sz="1400" dirty="0" err="1"/>
-              <a:t>taking</a:t>
-            </a:r>
-            <a:r>
-              <a:rPr lang="nl-NL" sz="1400" dirty="0"/>
-              <a:t> </a:t>
-            </a:r>
-            <a:r>
-              <a:rPr lang="nl-NL" sz="1400" dirty="0" err="1"/>
-              <a:t>into</a:t>
-            </a:r>
-            <a:r>
-              <a:rPr lang="nl-NL" sz="1400" dirty="0"/>
-              <a:t> account </a:t>
-            </a:r>
-            <a:r>
-              <a:rPr lang="nl-NL" sz="1400" dirty="0" err="1"/>
-              <a:t>that</a:t>
-            </a:r>
-            <a:r>
-              <a:rPr lang="nl-NL" sz="1400" dirty="0"/>
-              <a:t> investment and exports are part of GDP </a:t>
-            </a:r>
-            <a:r>
-              <a:rPr lang="nl-NL" sz="1400" dirty="0" err="1"/>
-              <a:t>by</a:t>
-            </a:r>
-            <a:r>
-              <a:rPr lang="nl-NL" sz="1400" dirty="0"/>
-              <a:t> </a:t>
-            </a:r>
-            <a:r>
-              <a:rPr lang="nl-NL" sz="1400" dirty="0" err="1"/>
-              <a:t>definition</a:t>
-            </a:r>
-            <a:r>
-              <a:rPr lang="nl-NL" sz="1400" dirty="0"/>
-              <a:t>, but </a:t>
-            </a:r>
-            <a:r>
-              <a:rPr lang="nl-NL" sz="1400" dirty="0" err="1"/>
-              <a:t>not</a:t>
-            </a:r>
-            <a:r>
-              <a:rPr lang="nl-NL" sz="1400" dirty="0"/>
-              <a:t> </a:t>
-            </a:r>
-            <a:r>
-              <a:rPr lang="nl-NL" sz="1400" dirty="0" err="1"/>
-              <a:t>necesserily</a:t>
-            </a:r>
-            <a:r>
-              <a:rPr lang="nl-NL" sz="1400" dirty="0"/>
-              <a:t> part of </a:t>
-            </a:r>
-            <a:r>
-              <a:rPr lang="nl-NL" sz="1400" dirty="0" err="1"/>
-              <a:t>dif</a:t>
-            </a:r>
-            <a:r>
-              <a:rPr lang="nl-NL" sz="1400" dirty="0"/>
-              <a:t> </a:t>
-            </a:r>
-            <a:r>
-              <a:rPr lang="nl-NL" sz="1400" dirty="0" err="1"/>
-              <a:t>between</a:t>
-            </a:r>
-            <a:r>
-              <a:rPr lang="nl-NL" sz="1400" dirty="0"/>
-              <a:t> </a:t>
-            </a:r>
-            <a:r>
-              <a:rPr lang="nl-NL" sz="1400" dirty="0" err="1"/>
-              <a:t>realised</a:t>
-            </a:r>
-            <a:r>
-              <a:rPr lang="nl-NL" sz="1400" dirty="0"/>
-              <a:t> and </a:t>
-            </a:r>
-            <a:r>
-              <a:rPr lang="nl-NL" sz="1400" dirty="0" err="1"/>
-              <a:t>forecasted</a:t>
-            </a:r>
-            <a:r>
-              <a:rPr lang="nl-NL" sz="1400" dirty="0"/>
-              <a:t> GDP </a:t>
-            </a:r>
-            <a:r>
-              <a:rPr lang="nl-NL" sz="1400" dirty="0" err="1"/>
-              <a:t>growth</a:t>
-            </a:r>
-            <a:r>
-              <a:rPr lang="nl-NL" sz="1400" dirty="0"/>
-              <a:t>). </a:t>
-            </a:r>
-            <a:r>
-              <a:rPr lang="nl-NL" sz="1400" dirty="0" err="1"/>
-              <a:t>This</a:t>
-            </a:r>
-            <a:r>
-              <a:rPr lang="nl-NL" sz="1400" dirty="0"/>
-              <a:t> is </a:t>
-            </a:r>
-            <a:r>
-              <a:rPr lang="nl-NL" sz="1400" dirty="0" err="1"/>
-              <a:t>further</a:t>
-            </a:r>
-            <a:r>
-              <a:rPr lang="nl-NL" sz="1400" dirty="0"/>
-              <a:t> </a:t>
-            </a:r>
-            <a:r>
-              <a:rPr lang="nl-NL" sz="1400" dirty="0" err="1"/>
-              <a:t>addressed</a:t>
-            </a:r>
-            <a:r>
-              <a:rPr lang="nl-NL" sz="1400" dirty="0"/>
-              <a:t> </a:t>
-            </a:r>
-            <a:r>
-              <a:rPr lang="nl-NL" sz="1400" dirty="0" err="1"/>
-              <a:t>by</a:t>
-            </a:r>
-            <a:r>
-              <a:rPr lang="nl-NL" sz="1400" dirty="0"/>
-              <a:t> </a:t>
-            </a:r>
-            <a:r>
-              <a:rPr lang="nl-NL" sz="1400" dirty="0" err="1"/>
-              <a:t>taking</a:t>
-            </a:r>
-            <a:r>
-              <a:rPr lang="nl-NL" sz="1400" dirty="0"/>
-              <a:t> the </a:t>
-            </a:r>
-            <a:r>
-              <a:rPr lang="nl-NL" sz="1400" dirty="0" err="1"/>
-              <a:t>one</a:t>
-            </a:r>
-            <a:r>
-              <a:rPr lang="nl-NL" sz="1400" dirty="0"/>
-              <a:t> </a:t>
-            </a:r>
-            <a:r>
-              <a:rPr lang="nl-NL" sz="1400" dirty="0" err="1"/>
-              <a:t>period</a:t>
-            </a:r>
-            <a:r>
-              <a:rPr lang="nl-NL" sz="1400" dirty="0"/>
-              <a:t> lag of the </a:t>
-            </a:r>
-            <a:r>
-              <a:rPr lang="nl-NL" sz="1400" dirty="0" err="1"/>
-              <a:t>explanatory</a:t>
-            </a:r>
-            <a:r>
-              <a:rPr lang="nl-NL" sz="1400" dirty="0"/>
-              <a:t> variables, </a:t>
-            </a:r>
-            <a:r>
-              <a:rPr lang="nl-NL" sz="1400" dirty="0" err="1"/>
-              <a:t>meaning</a:t>
-            </a:r>
-            <a:r>
-              <a:rPr lang="nl-NL" sz="1400" dirty="0"/>
-              <a:t> </a:t>
-            </a:r>
-            <a:r>
-              <a:rPr lang="nl-NL" sz="1400" dirty="0" err="1"/>
-              <a:t>that</a:t>
-            </a:r>
-            <a:r>
-              <a:rPr lang="nl-NL" sz="1400" dirty="0"/>
-              <a:t> the GDP </a:t>
-            </a:r>
-            <a:r>
-              <a:rPr lang="nl-NL" sz="1400" dirty="0" err="1"/>
-              <a:t>growth</a:t>
-            </a:r>
-            <a:r>
-              <a:rPr lang="nl-NL" sz="1400" dirty="0"/>
-              <a:t> surprise in </a:t>
-            </a:r>
-            <a:r>
-              <a:rPr lang="nl-NL" sz="1400" dirty="0" err="1"/>
-              <a:t>year</a:t>
-            </a:r>
-            <a:r>
-              <a:rPr lang="nl-NL" sz="1400" dirty="0"/>
-              <a:t> t is </a:t>
-            </a:r>
-            <a:r>
-              <a:rPr lang="nl-NL" sz="1400" dirty="0" err="1"/>
-              <a:t>regressed</a:t>
-            </a:r>
-            <a:r>
-              <a:rPr lang="nl-NL" sz="1400" dirty="0"/>
-              <a:t> on </a:t>
-            </a:r>
-            <a:r>
-              <a:rPr lang="nl-NL" sz="1400" dirty="0" err="1"/>
-              <a:t>flows</a:t>
-            </a:r>
-            <a:r>
-              <a:rPr lang="nl-NL" sz="1400" dirty="0"/>
-              <a:t> of investment and exports of t-1.</a:t>
+              <a:rPr lang="en-US" sz="1400" dirty="0"/>
+              <a:t>Dependent variable is the unexpected component of GDP growth, while the explanatory variables describe the composition of GDP (investment or exports as a share of GDP). In doing so, the relationship does not describe an accounting identity. In addition, the ICT variables are recorded with a delay (previous ICT exposures explain later growth surprises).</a:t>
+            </a:r>
+          </a:p>
+          <a:p>
+            <a:pPr marL="171450" indent="-171450">
+              <a:buFontTx/>
+              <a:buChar char="-"/>
+            </a:pPr>
+            <a:endParaRPr lang="en-US" sz="1400" dirty="0"/>
+          </a:p>
+          <a:p>
+            <a:pPr marL="171450" indent="-171450">
+              <a:buFontTx/>
+              <a:buChar char="-"/>
+            </a:pPr>
+            <a:r>
+              <a:rPr lang="en-US" sz="1400" dirty="0"/>
+              <a:t>Investing in ICT does not yet equal its effective application. It is a proxy, also for a country's exposure to the ICT factor without having to change economic processes.</a:t>
             </a:r>
           </a:p>
           <a:p>
@@ -7855,6 +8255,3445 @@
         <p:cNvPr id="1" name="">
           <a:extLst>
             <a:ext uri="{FF2B5EF4-FFF2-40B4-BE49-F238E27FC236}">
+              <a16:creationId xmlns:a16="http://schemas.microsoft.com/office/drawing/2014/main" id="{26B21DBA-7690-8D1C-0099-C415D51B024D}"/>
+            </a:ext>
+          </a:extLst>
+        </p:cNvPr>
+        <p:cNvGrpSpPr/>
+        <p:nvPr/>
+      </p:nvGrpSpPr>
+      <p:grpSpPr>
+        <a:xfrm>
+          <a:off x="0" y="0"/>
+          <a:ext cx="0" cy="0"/>
+          <a:chOff x="0" y="0"/>
+          <a:chExt cx="0" cy="0"/>
+        </a:xfrm>
+      </p:grpSpPr>
+      <p:sp>
+        <p:nvSpPr>
+          <p:cNvPr id="9" name="Titel 1">
+            <a:extLst>
+              <a:ext uri="{FF2B5EF4-FFF2-40B4-BE49-F238E27FC236}">
+                <a16:creationId xmlns:a16="http://schemas.microsoft.com/office/drawing/2014/main" id="{B1A8A21F-73A6-21A9-7607-658345AEC559}"/>
+              </a:ext>
+            </a:extLst>
+          </p:cNvPr>
+          <p:cNvSpPr>
+            <a:spLocks noGrp="1"/>
+          </p:cNvSpPr>
+          <p:nvPr>
+            <p:ph type="title"/>
+          </p:nvPr>
+        </p:nvSpPr>
+        <p:spPr>
+          <a:xfrm>
+            <a:off x="0" y="0"/>
+            <a:ext cx="9144000" cy="566928"/>
+          </a:xfrm>
+          <a:solidFill>
+            <a:srgbClr val="44287F"/>
+          </a:solidFill>
+        </p:spPr>
+        <p:txBody>
+          <a:bodyPr anchor="ctr"/>
+          <a:lstStyle/>
+          <a:p>
+            <a:pPr algn="ctr">
+              <a:lnSpc>
+                <a:spcPct val="100000"/>
+              </a:lnSpc>
+            </a:pPr>
+            <a:r>
+              <a:rPr lang="en-US" sz="2400" noProof="1">
+                <a:solidFill>
+                  <a:schemeClr val="bg1"/>
+                </a:solidFill>
+              </a:rPr>
+              <a:t>Correlated random-effects probit models (CRE)</a:t>
+            </a:r>
+          </a:p>
+        </p:txBody>
+      </p:sp>
+      <mc:AlternateContent xmlns:mc="http://schemas.openxmlformats.org/markup-compatibility/2006">
+        <mc:Choice xmlns:a14="http://schemas.microsoft.com/office/drawing/2010/main" Requires="a14">
+          <p:sp>
+            <p:nvSpPr>
+              <p:cNvPr id="2" name="Content Placeholder 2">
+                <a:extLst>
+                  <a:ext uri="{FF2B5EF4-FFF2-40B4-BE49-F238E27FC236}">
+                    <a16:creationId xmlns:a16="http://schemas.microsoft.com/office/drawing/2014/main" id="{4E2FFC46-D6F5-41BF-DECB-9FA98C0F56DD}"/>
+                  </a:ext>
+                </a:extLst>
+              </p:cNvPr>
+              <p:cNvSpPr>
+                <a:spLocks noGrp="1"/>
+              </p:cNvSpPr>
+              <p:nvPr>
+                <p:ph idx="1"/>
+              </p:nvPr>
+            </p:nvSpPr>
+            <p:spPr>
+              <a:xfrm>
+                <a:off x="310896" y="877824"/>
+                <a:ext cx="8723376" cy="6364224"/>
+              </a:xfrm>
+            </p:spPr>
+            <p:txBody>
+              <a:bodyPr>
+                <a:normAutofit fontScale="85000" lnSpcReduction="10000"/>
+              </a:bodyPr>
+              <a:lstStyle/>
+              <a:p>
+                <a:pPr>
+                  <a:lnSpc>
+                    <a:spcPct val="120000"/>
+                  </a:lnSpc>
+                  <a:spcAft>
+                    <a:spcPts val="300"/>
+                  </a:spcAft>
+                </a:pPr>
+                <a:r>
+                  <a:rPr lang="en-GB" sz="2400" noProof="1">
+                    <a:latin typeface="Verdana" panose="020B0604030504040204" pitchFamily="34" charset="0"/>
+                    <a:ea typeface="Verdana" panose="020B0604030504040204" pitchFamily="34" charset="0"/>
+                  </a:rPr>
+                  <a:t>1. Average effect (</a:t>
+                </a:r>
+                <a14:m>
+                  <m:oMath xmlns:m="http://schemas.openxmlformats.org/officeDocument/2006/math">
+                    <m:r>
+                      <a:rPr lang="en-GB" sz="2400" i="1" noProof="1" smtClean="0">
+                        <a:latin typeface="Cambria Math" panose="02040503050406030204" pitchFamily="18" charset="0"/>
+                        <a:ea typeface="Cambria Math" panose="02040503050406030204" pitchFamily="18" charset="0"/>
+                      </a:rPr>
+                      <m:t>𝛽</m:t>
+                    </m:r>
+                  </m:oMath>
+                </a14:m>
+                <a:r>
+                  <a:rPr lang="en-GB" sz="2400" noProof="1">
+                    <a:latin typeface="Verdana" panose="020B0604030504040204" pitchFamily="34" charset="0"/>
+                    <a:ea typeface="Verdana" panose="020B0604030504040204" pitchFamily="34" charset="0"/>
+                  </a:rPr>
+                  <a:t>) of ICT/AI in all years</a:t>
+                </a:r>
+              </a:p>
+              <a:p>
+                <a:pPr>
+                  <a:lnSpc>
+                    <a:spcPct val="120000"/>
+                  </a:lnSpc>
+                  <a:spcAft>
+                    <a:spcPts val="300"/>
+                  </a:spcAft>
+                </a:pPr>
+                <a:r>
+                  <a:rPr lang="en-GB" sz="2400" b="0" noProof="1">
+                    <a:solidFill>
+                      <a:schemeClr val="tx1"/>
+                    </a:solidFill>
+                    <a:ea typeface="Verdana" panose="020B0604030504040204" pitchFamily="34" charset="0"/>
+                  </a:rPr>
+                  <a:t>	</a:t>
+                </a:r>
+                <a14:m>
+                  <m:oMath xmlns:m="http://schemas.openxmlformats.org/officeDocument/2006/math">
+                    <m:sSub>
+                      <m:sSubPr>
+                        <m:ctrlPr>
+                          <a:rPr lang="en-GB" sz="2600" b="0" i="1" noProof="1" smtClean="0">
+                            <a:solidFill>
+                              <a:schemeClr val="tx1"/>
+                            </a:solidFill>
+                            <a:latin typeface="Cambria Math" panose="02040503050406030204" pitchFamily="18" charset="0"/>
+                            <a:ea typeface="Verdana" panose="020B0604030504040204" pitchFamily="34" charset="0"/>
+                          </a:rPr>
+                        </m:ctrlPr>
+                      </m:sSubPr>
+                      <m:e>
+                        <m:r>
+                          <a:rPr lang="en-GB" sz="2600" b="0" i="1" noProof="1" smtClean="0">
+                            <a:solidFill>
+                              <a:schemeClr val="tx1"/>
+                            </a:solidFill>
+                            <a:latin typeface="Cambria Math" panose="02040503050406030204" pitchFamily="18" charset="0"/>
+                            <a:ea typeface="Verdana" panose="020B0604030504040204" pitchFamily="34" charset="0"/>
+                          </a:rPr>
+                          <m:t>𝑃</m:t>
+                        </m:r>
+                        <m:r>
+                          <a:rPr lang="en-GB" sz="2600" b="0" i="1" noProof="1" smtClean="0">
+                            <a:solidFill>
+                              <a:schemeClr val="tx1"/>
+                            </a:solidFill>
+                            <a:latin typeface="Cambria Math" panose="02040503050406030204" pitchFamily="18" charset="0"/>
+                            <a:ea typeface="Verdana" panose="020B0604030504040204" pitchFamily="34" charset="0"/>
+                          </a:rPr>
+                          <m:t>(</m:t>
+                        </m:r>
+                        <m:r>
+                          <a:rPr lang="en-GB" sz="2600" b="0" i="1" noProof="1" smtClean="0">
+                            <a:solidFill>
+                              <a:schemeClr val="tx1"/>
+                            </a:solidFill>
+                            <a:latin typeface="Cambria Math" panose="02040503050406030204" pitchFamily="18" charset="0"/>
+                            <a:ea typeface="Verdana" panose="020B0604030504040204" pitchFamily="34" charset="0"/>
+                          </a:rPr>
+                          <m:t>𝑆</m:t>
+                        </m:r>
+                      </m:e>
+                      <m:sub>
+                        <m:r>
+                          <a:rPr lang="en-GB" sz="2600" b="0" i="1" noProof="1" smtClean="0">
+                            <a:solidFill>
+                              <a:schemeClr val="tx1"/>
+                            </a:solidFill>
+                            <a:latin typeface="Cambria Math" panose="02040503050406030204" pitchFamily="18" charset="0"/>
+                            <a:ea typeface="Verdana" panose="020B0604030504040204" pitchFamily="34" charset="0"/>
+                          </a:rPr>
+                          <m:t>𝑖</m:t>
+                        </m:r>
+                        <m:r>
+                          <a:rPr lang="en-GB" sz="2600" b="0" i="1" noProof="1" smtClean="0">
+                            <a:solidFill>
+                              <a:schemeClr val="tx1"/>
+                            </a:solidFill>
+                            <a:latin typeface="Cambria Math" panose="02040503050406030204" pitchFamily="18" charset="0"/>
+                            <a:ea typeface="Verdana" panose="020B0604030504040204" pitchFamily="34" charset="0"/>
+                          </a:rPr>
+                          <m:t>,</m:t>
+                        </m:r>
+                        <m:r>
+                          <a:rPr lang="en-GB" sz="2600" b="0" i="1" noProof="1" smtClean="0">
+                            <a:solidFill>
+                              <a:schemeClr val="tx1"/>
+                            </a:solidFill>
+                            <a:latin typeface="Cambria Math" panose="02040503050406030204" pitchFamily="18" charset="0"/>
+                            <a:ea typeface="Verdana" panose="020B0604030504040204" pitchFamily="34" charset="0"/>
+                          </a:rPr>
+                          <m:t>𝑡</m:t>
+                        </m:r>
+                      </m:sub>
+                    </m:sSub>
+                    <m:r>
+                      <a:rPr lang="en-GB" sz="2600" b="0" i="1" noProof="1" smtClean="0">
+                        <a:solidFill>
+                          <a:schemeClr val="tx1"/>
+                        </a:solidFill>
+                        <a:latin typeface="Cambria Math" panose="02040503050406030204" pitchFamily="18" charset="0"/>
+                        <a:ea typeface="Verdana" panose="020B0604030504040204" pitchFamily="34" charset="0"/>
+                      </a:rPr>
+                      <m:t>=1| </m:t>
+                    </m:r>
+                    <m:r>
+                      <a:rPr lang="en-GB" sz="2600" b="0" i="1" noProof="1" smtClean="0">
+                        <a:solidFill>
+                          <a:schemeClr val="tx1"/>
+                        </a:solidFill>
+                        <a:latin typeface="Cambria Math" panose="02040503050406030204" pitchFamily="18" charset="0"/>
+                        <a:ea typeface="Verdana" panose="020B0604030504040204" pitchFamily="34" charset="0"/>
+                      </a:rPr>
+                      <m:t>𝑋</m:t>
+                    </m:r>
+                    <m:r>
+                      <a:rPr lang="en-GB" sz="2600" b="0" i="1" noProof="1" smtClean="0">
+                        <a:solidFill>
+                          <a:schemeClr val="tx1"/>
+                        </a:solidFill>
+                        <a:latin typeface="Cambria Math" panose="02040503050406030204" pitchFamily="18" charset="0"/>
+                        <a:ea typeface="Verdana" panose="020B0604030504040204" pitchFamily="34" charset="0"/>
+                      </a:rPr>
+                      <m:t>, </m:t>
+                    </m:r>
+                    <m:r>
+                      <a:rPr lang="en-GB" sz="2600" b="0" i="1" noProof="1" smtClean="0">
+                        <a:solidFill>
+                          <a:schemeClr val="tx1"/>
+                        </a:solidFill>
+                        <a:latin typeface="Cambria Math" panose="02040503050406030204" pitchFamily="18" charset="0"/>
+                        <a:ea typeface="Verdana" panose="020B0604030504040204" pitchFamily="34" charset="0"/>
+                      </a:rPr>
+                      <m:t>𝑍</m:t>
+                    </m:r>
+                    <m:r>
+                      <a:rPr lang="en-GB" sz="2600" b="0" i="1" noProof="1" smtClean="0">
+                        <a:solidFill>
+                          <a:schemeClr val="tx1"/>
+                        </a:solidFill>
+                        <a:latin typeface="Cambria Math" panose="02040503050406030204" pitchFamily="18" charset="0"/>
+                        <a:ea typeface="Verdana" panose="020B0604030504040204" pitchFamily="34" charset="0"/>
+                      </a:rPr>
+                      <m:t>,</m:t>
+                    </m:r>
+                    <m:sSub>
+                      <m:sSubPr>
+                        <m:ctrlPr>
+                          <a:rPr lang="en-GB" sz="2600" i="1" noProof="1" smtClean="0">
+                            <a:latin typeface="Cambria Math" panose="02040503050406030204" pitchFamily="18" charset="0"/>
+                            <a:ea typeface="Cambria Math" panose="02040503050406030204" pitchFamily="18" charset="0"/>
+                          </a:rPr>
+                        </m:ctrlPr>
+                      </m:sSubPr>
+                      <m:e>
+                        <m:r>
+                          <a:rPr lang="en-GB" sz="2600" i="1" noProof="1" smtClean="0">
+                            <a:latin typeface="Cambria Math" panose="02040503050406030204" pitchFamily="18" charset="0"/>
+                            <a:ea typeface="Cambria Math" panose="02040503050406030204" pitchFamily="18" charset="0"/>
+                          </a:rPr>
+                          <m:t>𝛼</m:t>
+                        </m:r>
+                      </m:e>
+                      <m:sub>
+                        <m:r>
+                          <a:rPr lang="en-GB" sz="2600" i="1" noProof="1" smtClean="0">
+                            <a:latin typeface="Cambria Math" panose="02040503050406030204" pitchFamily="18" charset="0"/>
+                            <a:ea typeface="Verdana" panose="020B0604030504040204" pitchFamily="34" charset="0"/>
+                          </a:rPr>
+                          <m:t>𝑖</m:t>
+                        </m:r>
+                      </m:sub>
+                    </m:sSub>
+                    <m:r>
+                      <a:rPr lang="en-GB" sz="2600" b="0" i="1" noProof="1" smtClean="0">
+                        <a:latin typeface="Cambria Math" panose="02040503050406030204" pitchFamily="18" charset="0"/>
+                        <a:ea typeface="Verdana" panose="020B0604030504040204" pitchFamily="34" charset="0"/>
+                      </a:rPr>
+                      <m:t>)</m:t>
+                    </m:r>
+                    <m:r>
+                      <a:rPr lang="en-GB" sz="2600" i="1" noProof="1" smtClean="0">
+                        <a:solidFill>
+                          <a:schemeClr val="tx1"/>
+                        </a:solidFill>
+                        <a:latin typeface="Cambria Math" panose="02040503050406030204" pitchFamily="18" charset="0"/>
+                        <a:ea typeface="Verdana" panose="020B0604030504040204" pitchFamily="34" charset="0"/>
+                      </a:rPr>
+                      <m:t>=</m:t>
+                    </m:r>
+                  </m:oMath>
+                </a14:m>
+                <a:r>
+                  <a:rPr lang="en-GB" sz="2600" noProof="1">
+                    <a:ea typeface="Verdana" panose="020B0604030504040204" pitchFamily="34" charset="0"/>
+                  </a:rPr>
+                  <a:t> </a:t>
+                </a:r>
+                <a:r>
+                  <a:rPr lang="en-GB" sz="2600" noProof="1">
+                    <a:latin typeface="Cambria Math" panose="02040503050406030204" pitchFamily="18" charset="0"/>
+                    <a:ea typeface="Cambria Math" panose="02040503050406030204" pitchFamily="18" charset="0"/>
+                  </a:rPr>
+                  <a:t>𝛼 +</a:t>
+                </a:r>
+                <a14:m>
+                  <m:oMath xmlns:m="http://schemas.openxmlformats.org/officeDocument/2006/math">
+                    <m:sSub>
+                      <m:sSubPr>
+                        <m:ctrlPr>
+                          <a:rPr lang="en-GB" sz="2600" b="0" i="1" noProof="1" smtClean="0">
+                            <a:latin typeface="Cambria Math" panose="02040503050406030204" pitchFamily="18" charset="0"/>
+                            <a:ea typeface="Cambria Math" panose="02040503050406030204" pitchFamily="18" charset="0"/>
+                          </a:rPr>
+                        </m:ctrlPr>
+                      </m:sSubPr>
+                      <m:e>
+                        <m:r>
+                          <a:rPr lang="en-GB" sz="2600" b="0" i="1" noProof="1" smtClean="0">
+                            <a:latin typeface="Cambria Math" panose="02040503050406030204" pitchFamily="18" charset="0"/>
+                            <a:ea typeface="Cambria Math" panose="02040503050406030204" pitchFamily="18" charset="0"/>
+                          </a:rPr>
+                          <m:t> </m:t>
+                        </m:r>
+                        <m:r>
+                          <a:rPr lang="en-GB" sz="2600" i="1" noProof="1" smtClean="0">
+                            <a:latin typeface="Cambria Math" panose="02040503050406030204" pitchFamily="18" charset="0"/>
+                            <a:ea typeface="Cambria Math" panose="02040503050406030204" pitchFamily="18" charset="0"/>
+                          </a:rPr>
+                          <m:t>𝜇</m:t>
+                        </m:r>
+                      </m:e>
+                      <m:sub>
+                        <m:r>
+                          <a:rPr lang="en-GB" sz="2600" i="1" noProof="1" smtClean="0">
+                            <a:latin typeface="Cambria Math" panose="02040503050406030204" pitchFamily="18" charset="0"/>
+                            <a:ea typeface="Verdana" panose="020B0604030504040204" pitchFamily="34" charset="0"/>
+                          </a:rPr>
+                          <m:t>𝑖</m:t>
+                        </m:r>
+                      </m:sub>
+                    </m:sSub>
+                    <m:r>
+                      <a:rPr lang="en-GB" sz="2600" b="0" i="1" noProof="1" smtClean="0">
+                        <a:latin typeface="Cambria Math" panose="02040503050406030204" pitchFamily="18" charset="0"/>
+                        <a:ea typeface="Verdana" panose="020B0604030504040204" pitchFamily="34" charset="0"/>
+                      </a:rPr>
+                      <m:t> </m:t>
+                    </m:r>
+                    <m:r>
+                      <a:rPr lang="en-GB" sz="2600" b="0" i="1" noProof="1" smtClean="0">
+                        <a:latin typeface="Cambria Math" panose="02040503050406030204" pitchFamily="18" charset="0"/>
+                        <a:ea typeface="Verdana" panose="020B0604030504040204" pitchFamily="34" charset="0"/>
+                      </a:rPr>
+                      <m:t>+</m:t>
+                    </m:r>
+                  </m:oMath>
+                </a14:m>
+                <a:r>
+                  <a:rPr lang="en-GB" sz="2600" noProof="1">
+                    <a:ea typeface="Cambria Math" panose="02040503050406030204" pitchFamily="18" charset="0"/>
+                  </a:rPr>
+                  <a:t> </a:t>
+                </a:r>
+                <a14:m>
+                  <m:oMath xmlns:m="http://schemas.openxmlformats.org/officeDocument/2006/math">
+                    <m:sSub>
+                      <m:sSubPr>
+                        <m:ctrlPr>
+                          <a:rPr lang="en-GB" sz="2600" i="1" noProof="1" smtClean="0">
+                            <a:latin typeface="Cambria Math" panose="02040503050406030204" pitchFamily="18" charset="0"/>
+                            <a:ea typeface="Cambria Math" panose="02040503050406030204" pitchFamily="18" charset="0"/>
+                          </a:rPr>
+                        </m:ctrlPr>
+                      </m:sSubPr>
+                      <m:e>
+                        <m:r>
+                          <a:rPr lang="en-GB" sz="2600" i="1" noProof="1" smtClean="0">
+                            <a:latin typeface="Cambria Math" panose="02040503050406030204" pitchFamily="18" charset="0"/>
+                            <a:ea typeface="Cambria Math" panose="02040503050406030204" pitchFamily="18" charset="0"/>
+                          </a:rPr>
+                          <m:t>𝜏</m:t>
+                        </m:r>
+                      </m:e>
+                      <m:sub>
+                        <m:r>
+                          <a:rPr lang="en-GB" sz="2600" b="0" i="1" noProof="1" smtClean="0">
+                            <a:latin typeface="Cambria Math" panose="02040503050406030204" pitchFamily="18" charset="0"/>
+                            <a:ea typeface="Verdana" panose="020B0604030504040204" pitchFamily="34" charset="0"/>
+                          </a:rPr>
+                          <m:t>𝑡</m:t>
+                        </m:r>
+                      </m:sub>
+                    </m:sSub>
+                    <m:r>
+                      <a:rPr lang="en-GB" sz="2600" b="0" i="1" noProof="1" smtClean="0">
+                        <a:latin typeface="Cambria Math" panose="02040503050406030204" pitchFamily="18" charset="0"/>
+                        <a:ea typeface="Verdana" panose="020B0604030504040204" pitchFamily="34" charset="0"/>
+                      </a:rPr>
+                      <m:t>+ </m:t>
+                    </m:r>
+                    <m:sSub>
+                      <m:sSubPr>
+                        <m:ctrlPr>
+                          <a:rPr lang="en-GB" sz="2600" i="1" noProof="1" smtClean="0">
+                            <a:latin typeface="Cambria Math" panose="02040503050406030204" pitchFamily="18" charset="0"/>
+                            <a:ea typeface="Cambria Math" panose="02040503050406030204" pitchFamily="18" charset="0"/>
+                          </a:rPr>
+                        </m:ctrlPr>
+                      </m:sSubPr>
+                      <m:e>
+                        <m:r>
+                          <a:rPr lang="en-GB" sz="2600" i="1" noProof="1" smtClean="0">
+                            <a:latin typeface="Cambria Math" panose="02040503050406030204" pitchFamily="18" charset="0"/>
+                            <a:ea typeface="Cambria Math" panose="02040503050406030204" pitchFamily="18" charset="0"/>
+                          </a:rPr>
+                          <m:t>𝛽</m:t>
+                        </m:r>
+                      </m:e>
+                      <m:sub>
+                        <m:r>
+                          <a:rPr lang="en-GB" sz="2600" b="0" i="1" noProof="1" smtClean="0">
+                            <a:latin typeface="Cambria Math" panose="02040503050406030204" pitchFamily="18" charset="0"/>
+                            <a:ea typeface="Verdana" panose="020B0604030504040204" pitchFamily="34" charset="0"/>
+                          </a:rPr>
+                          <m:t>𝑤</m:t>
+                        </m:r>
+                      </m:sub>
+                    </m:sSub>
+                    <m:sSubSup>
+                      <m:sSubSupPr>
+                        <m:ctrlPr>
+                          <a:rPr lang="en-GB" sz="2600" b="0" i="1" noProof="1" smtClean="0">
+                            <a:latin typeface="Cambria Math" panose="02040503050406030204" pitchFamily="18" charset="0"/>
+                            <a:ea typeface="Verdana" panose="020B0604030504040204" pitchFamily="34" charset="0"/>
+                          </a:rPr>
+                        </m:ctrlPr>
+                      </m:sSubSupPr>
+                      <m:e>
+                        <m:r>
+                          <a:rPr lang="en-GB" sz="2600" b="0" i="1" noProof="1" smtClean="0">
+                            <a:latin typeface="Cambria Math" panose="02040503050406030204" pitchFamily="18" charset="0"/>
+                            <a:ea typeface="Verdana" panose="020B0604030504040204" pitchFamily="34" charset="0"/>
+                          </a:rPr>
+                          <m:t> </m:t>
+                        </m:r>
+                        <m:r>
+                          <a:rPr lang="en-GB" sz="2600" b="0" i="1" noProof="1" smtClean="0">
+                            <a:latin typeface="Cambria Math" panose="02040503050406030204" pitchFamily="18" charset="0"/>
+                            <a:ea typeface="Verdana" panose="020B0604030504040204" pitchFamily="34" charset="0"/>
+                          </a:rPr>
+                          <m:t>𝑋</m:t>
+                        </m:r>
+                      </m:e>
+                      <m:sub>
+                        <m:r>
+                          <a:rPr lang="en-GB" sz="2600" i="1" noProof="1" smtClean="0">
+                            <a:latin typeface="Cambria Math" panose="02040503050406030204" pitchFamily="18" charset="0"/>
+                            <a:ea typeface="Verdana" panose="020B0604030504040204" pitchFamily="34" charset="0"/>
+                          </a:rPr>
+                          <m:t>𝑖</m:t>
+                        </m:r>
+                        <m:r>
+                          <a:rPr lang="en-GB" sz="2600" i="1" noProof="1" smtClean="0">
+                            <a:latin typeface="Cambria Math" panose="02040503050406030204" pitchFamily="18" charset="0"/>
+                            <a:ea typeface="Verdana" panose="020B0604030504040204" pitchFamily="34" charset="0"/>
+                          </a:rPr>
+                          <m:t>,</m:t>
+                        </m:r>
+                        <m:r>
+                          <a:rPr lang="en-GB" sz="2600" i="1" noProof="1" smtClean="0">
+                            <a:latin typeface="Cambria Math" panose="02040503050406030204" pitchFamily="18" charset="0"/>
+                            <a:ea typeface="Verdana" panose="020B0604030504040204" pitchFamily="34" charset="0"/>
+                          </a:rPr>
+                          <m:t>𝑡</m:t>
+                        </m:r>
+                        <m:r>
+                          <a:rPr lang="en-GB" sz="2600" i="1" noProof="1" smtClean="0">
+                            <a:latin typeface="Cambria Math" panose="02040503050406030204" pitchFamily="18" charset="0"/>
+                            <a:ea typeface="Verdana" panose="020B0604030504040204" pitchFamily="34" charset="0"/>
+                          </a:rPr>
+                          <m:t>−1</m:t>
+                        </m:r>
+                      </m:sub>
+                      <m:sup>
+                        <m:r>
+                          <a:rPr lang="en-GB" sz="2600" b="0" i="1" noProof="1" smtClean="0">
+                            <a:latin typeface="Cambria Math" panose="02040503050406030204" pitchFamily="18" charset="0"/>
+                            <a:ea typeface="Verdana" panose="020B0604030504040204" pitchFamily="34" charset="0"/>
+                          </a:rPr>
+                          <m:t>𝑤</m:t>
+                        </m:r>
+                      </m:sup>
+                    </m:sSubSup>
+                    <m:r>
+                      <a:rPr lang="en-GB" sz="2600" b="0" i="1" noProof="1" smtClean="0">
+                        <a:latin typeface="Cambria Math" panose="02040503050406030204" pitchFamily="18" charset="0"/>
+                        <a:ea typeface="Verdana" panose="020B0604030504040204" pitchFamily="34" charset="0"/>
+                      </a:rPr>
+                      <m:t>+</m:t>
+                    </m:r>
+                    <m:sSub>
+                      <m:sSubPr>
+                        <m:ctrlPr>
+                          <a:rPr lang="en-GB" sz="2600" i="1" noProof="1" smtClean="0">
+                            <a:latin typeface="Cambria Math" panose="02040503050406030204" pitchFamily="18" charset="0"/>
+                            <a:ea typeface="Cambria Math" panose="02040503050406030204" pitchFamily="18" charset="0"/>
+                          </a:rPr>
+                        </m:ctrlPr>
+                      </m:sSubPr>
+                      <m:e>
+                        <m:r>
+                          <a:rPr lang="en-GB" sz="2600" i="1" noProof="1" smtClean="0">
+                            <a:latin typeface="Cambria Math" panose="02040503050406030204" pitchFamily="18" charset="0"/>
+                            <a:ea typeface="Cambria Math" panose="02040503050406030204" pitchFamily="18" charset="0"/>
+                          </a:rPr>
+                          <m:t>𝛽</m:t>
+                        </m:r>
+                      </m:e>
+                      <m:sub>
+                        <m:r>
+                          <a:rPr lang="en-GB" sz="2600" b="0" i="1" noProof="1" smtClean="0">
+                            <a:latin typeface="Cambria Math" panose="02040503050406030204" pitchFamily="18" charset="0"/>
+                            <a:ea typeface="Verdana" panose="020B0604030504040204" pitchFamily="34" charset="0"/>
+                          </a:rPr>
+                          <m:t>𝐵</m:t>
+                        </m:r>
+                      </m:sub>
+                    </m:sSub>
+                    <m:r>
+                      <a:rPr lang="en-GB" sz="2600" b="0" i="1" noProof="1" smtClean="0">
+                        <a:latin typeface="Cambria Math" panose="02040503050406030204" pitchFamily="18" charset="0"/>
+                        <a:ea typeface="Verdana" panose="020B0604030504040204" pitchFamily="34" charset="0"/>
+                      </a:rPr>
+                      <m:t> </m:t>
+                    </m:r>
+                    <m:sSubSup>
+                      <m:sSubSupPr>
+                        <m:ctrlPr>
+                          <a:rPr lang="en-GB" sz="2600" i="1" noProof="1" smtClean="0">
+                            <a:latin typeface="Cambria Math" panose="02040503050406030204" pitchFamily="18" charset="0"/>
+                            <a:ea typeface="Verdana" panose="020B0604030504040204" pitchFamily="34" charset="0"/>
+                          </a:rPr>
+                        </m:ctrlPr>
+                      </m:sSubSupPr>
+                      <m:e>
+                        <m:r>
+                          <a:rPr lang="en-GB" sz="2600" i="1" noProof="1" smtClean="0">
+                            <a:latin typeface="Cambria Math" panose="02040503050406030204" pitchFamily="18" charset="0"/>
+                            <a:ea typeface="Verdana" panose="020B0604030504040204" pitchFamily="34" charset="0"/>
+                          </a:rPr>
+                          <m:t>𝑋</m:t>
+                        </m:r>
+                      </m:e>
+                      <m:sub>
+                        <m:r>
+                          <a:rPr lang="en-GB" sz="2600" i="1" noProof="1" smtClean="0">
+                            <a:latin typeface="Cambria Math" panose="02040503050406030204" pitchFamily="18" charset="0"/>
+                            <a:ea typeface="Verdana" panose="020B0604030504040204" pitchFamily="34" charset="0"/>
+                          </a:rPr>
+                          <m:t>𝑖</m:t>
+                        </m:r>
+                      </m:sub>
+                      <m:sup>
+                        <m:r>
+                          <a:rPr lang="en-GB" sz="2600" b="0" i="1" noProof="1" smtClean="0">
+                            <a:latin typeface="Cambria Math" panose="02040503050406030204" pitchFamily="18" charset="0"/>
+                            <a:ea typeface="Verdana" panose="020B0604030504040204" pitchFamily="34" charset="0"/>
+                          </a:rPr>
+                          <m:t>𝐵</m:t>
+                        </m:r>
+                      </m:sup>
+                    </m:sSubSup>
+                  </m:oMath>
+                </a14:m>
+                <a:endParaRPr lang="en-GB" sz="2600" i="1" noProof="1">
+                  <a:latin typeface="Cambria Math" panose="02040503050406030204" pitchFamily="18" charset="0"/>
+                  <a:ea typeface="Verdana" panose="020B0604030504040204" pitchFamily="34" charset="0"/>
+                </a:endParaRPr>
+              </a:p>
+              <a:p>
+                <a:pPr>
+                  <a:lnSpc>
+                    <a:spcPct val="120000"/>
+                  </a:lnSpc>
+                  <a:spcAft>
+                    <a:spcPts val="300"/>
+                  </a:spcAft>
+                </a:pPr>
+                <a14:m>
+                  <m:oMathPara xmlns:m="http://schemas.openxmlformats.org/officeDocument/2006/math">
+                    <m:oMath>
+                      <m:r>
+                        <a:rPr lang="en-GB" sz="2600" i="1" noProof="1" smtClean="0">
+                          <a:latin typeface="Cambria Math" panose="02040503050406030204" pitchFamily="18" charset="0"/>
+                          <a:ea typeface="Verdana" panose="020B0604030504040204" pitchFamily="34" charset="0"/>
+                        </a:rPr>
+                        <m:t>+</m:t>
+                      </m:r>
+                      <m:r>
+                        <a:rPr lang="en-GB" sz="2600" b="0" i="1" noProof="1" smtClean="0">
+                          <a:latin typeface="Cambria Math" panose="02040503050406030204" pitchFamily="18" charset="0"/>
+                          <a:ea typeface="Verdana" panose="020B0604030504040204" pitchFamily="34" charset="0"/>
+                        </a:rPr>
+                        <m:t> </m:t>
+                      </m:r>
+                      <m:sSubSup>
+                        <m:sSubSupPr>
+                          <m:ctrlPr>
+                            <a:rPr lang="en-GB" sz="2600" i="1" noProof="1" smtClean="0">
+                              <a:latin typeface="Cambria Math" panose="02040503050406030204" pitchFamily="18" charset="0"/>
+                              <a:ea typeface="Cambria Math" panose="02040503050406030204" pitchFamily="18" charset="0"/>
+                            </a:rPr>
+                          </m:ctrlPr>
+                        </m:sSubSupPr>
+                        <m:e>
+                          <m:r>
+                            <a:rPr lang="en-GB" sz="2600" i="1" noProof="1" smtClean="0">
+                              <a:latin typeface="Cambria Math" panose="02040503050406030204" pitchFamily="18" charset="0"/>
+                              <a:ea typeface="Cambria Math" panose="02040503050406030204" pitchFamily="18" charset="0"/>
+                            </a:rPr>
+                            <m:t>𝜑</m:t>
+                          </m:r>
+                        </m:e>
+                        <m:sub>
+                          <m:r>
+                            <a:rPr lang="en-GB" sz="2600" b="0" i="1" noProof="1" smtClean="0">
+                              <a:latin typeface="Cambria Math" panose="02040503050406030204" pitchFamily="18" charset="0"/>
+                              <a:ea typeface="Verdana" panose="020B0604030504040204" pitchFamily="34" charset="0"/>
+                            </a:rPr>
+                            <m:t>𝑤</m:t>
+                          </m:r>
+                        </m:sub>
+                        <m:sup>
+                          <m:r>
+                            <a:rPr lang="en-GB" sz="2600" b="0" i="1" noProof="1" smtClean="0">
+                              <a:latin typeface="Cambria Math" panose="02040503050406030204" pitchFamily="18" charset="0"/>
+                              <a:ea typeface="Verdana" panose="020B0604030504040204" pitchFamily="34" charset="0"/>
+                            </a:rPr>
+                            <m:t>′</m:t>
+                          </m:r>
+                        </m:sup>
+                      </m:sSubSup>
+                      <m:sSubSup>
+                        <m:sSubSupPr>
+                          <m:ctrlPr>
+                            <a:rPr lang="en-GB" sz="2600" b="0" i="1" noProof="1" smtClean="0">
+                              <a:latin typeface="Cambria Math" panose="02040503050406030204" pitchFamily="18" charset="0"/>
+                              <a:ea typeface="Verdana" panose="020B0604030504040204" pitchFamily="34" charset="0"/>
+                            </a:rPr>
+                          </m:ctrlPr>
+                        </m:sSubSupPr>
+                        <m:e>
+                          <m:r>
+                            <a:rPr lang="en-GB" sz="2600" b="0" i="1" noProof="1" smtClean="0">
+                              <a:latin typeface="Cambria Math" panose="02040503050406030204" pitchFamily="18" charset="0"/>
+                              <a:ea typeface="Verdana" panose="020B0604030504040204" pitchFamily="34" charset="0"/>
+                            </a:rPr>
+                            <m:t> </m:t>
+                          </m:r>
+                          <m:r>
+                            <a:rPr lang="en-GB" sz="2600" b="0" i="1" noProof="1" smtClean="0">
+                              <a:latin typeface="Cambria Math" panose="02040503050406030204" pitchFamily="18" charset="0"/>
+                              <a:ea typeface="Verdana" panose="020B0604030504040204" pitchFamily="34" charset="0"/>
+                            </a:rPr>
+                            <m:t>𝑍</m:t>
+                          </m:r>
+                        </m:e>
+                        <m:sub>
+                          <m:r>
+                            <a:rPr lang="en-GB" sz="2600" i="1" noProof="1" smtClean="0">
+                              <a:latin typeface="Cambria Math" panose="02040503050406030204" pitchFamily="18" charset="0"/>
+                              <a:ea typeface="Verdana" panose="020B0604030504040204" pitchFamily="34" charset="0"/>
+                            </a:rPr>
+                            <m:t>𝑖</m:t>
+                          </m:r>
+                          <m:r>
+                            <a:rPr lang="en-GB" sz="2600" i="1" noProof="1" smtClean="0">
+                              <a:latin typeface="Cambria Math" panose="02040503050406030204" pitchFamily="18" charset="0"/>
+                              <a:ea typeface="Verdana" panose="020B0604030504040204" pitchFamily="34" charset="0"/>
+                            </a:rPr>
+                            <m:t>,</m:t>
+                          </m:r>
+                          <m:r>
+                            <a:rPr lang="en-GB" sz="2600" i="1" noProof="1" smtClean="0">
+                              <a:latin typeface="Cambria Math" panose="02040503050406030204" pitchFamily="18" charset="0"/>
+                              <a:ea typeface="Verdana" panose="020B0604030504040204" pitchFamily="34" charset="0"/>
+                            </a:rPr>
+                            <m:t>𝑡</m:t>
+                          </m:r>
+                          <m:r>
+                            <a:rPr lang="en-GB" sz="2600" i="1" noProof="1" smtClean="0">
+                              <a:latin typeface="Cambria Math" panose="02040503050406030204" pitchFamily="18" charset="0"/>
+                              <a:ea typeface="Verdana" panose="020B0604030504040204" pitchFamily="34" charset="0"/>
+                            </a:rPr>
+                            <m:t>−1</m:t>
+                          </m:r>
+                        </m:sub>
+                        <m:sup>
+                          <m:r>
+                            <a:rPr lang="en-GB" sz="2600" i="1" noProof="1" smtClean="0">
+                              <a:latin typeface="Cambria Math" panose="02040503050406030204" pitchFamily="18" charset="0"/>
+                              <a:ea typeface="Verdana" panose="020B0604030504040204" pitchFamily="34" charset="0"/>
+                            </a:rPr>
+                            <m:t>𝑤</m:t>
+                          </m:r>
+                        </m:sup>
+                      </m:sSubSup>
+                      <m:r>
+                        <a:rPr lang="en-GB" sz="2600" i="1" noProof="1" smtClean="0">
+                          <a:latin typeface="Cambria Math" panose="02040503050406030204" pitchFamily="18" charset="0"/>
+                          <a:ea typeface="Verdana" panose="020B0604030504040204" pitchFamily="34" charset="0"/>
+                        </a:rPr>
+                        <m:t>+</m:t>
+                      </m:r>
+                      <m:sSubSup>
+                        <m:sSubSupPr>
+                          <m:ctrlPr>
+                            <a:rPr lang="en-GB" sz="2600" i="1" noProof="1" smtClean="0">
+                              <a:latin typeface="Cambria Math" panose="02040503050406030204" pitchFamily="18" charset="0"/>
+                              <a:ea typeface="Cambria Math" panose="02040503050406030204" pitchFamily="18" charset="0"/>
+                            </a:rPr>
+                          </m:ctrlPr>
+                        </m:sSubSupPr>
+                        <m:e>
+                          <m:r>
+                            <a:rPr lang="en-GB" sz="2600" i="1" noProof="1" smtClean="0">
+                              <a:latin typeface="Cambria Math" panose="02040503050406030204" pitchFamily="18" charset="0"/>
+                              <a:ea typeface="Cambria Math" panose="02040503050406030204" pitchFamily="18" charset="0"/>
+                            </a:rPr>
+                            <m:t>𝜑</m:t>
+                          </m:r>
+                        </m:e>
+                        <m:sub>
+                          <m:r>
+                            <a:rPr lang="en-GB" sz="2600" b="0" i="1" noProof="1" smtClean="0">
+                              <a:latin typeface="Cambria Math" panose="02040503050406030204" pitchFamily="18" charset="0"/>
+                              <a:ea typeface="Verdana" panose="020B0604030504040204" pitchFamily="34" charset="0"/>
+                            </a:rPr>
+                            <m:t>𝐵</m:t>
+                          </m:r>
+                        </m:sub>
+                        <m:sup>
+                          <m:r>
+                            <a:rPr lang="en-GB" sz="2600" i="1" noProof="1" smtClean="0">
+                              <a:latin typeface="Cambria Math" panose="02040503050406030204" pitchFamily="18" charset="0"/>
+                              <a:ea typeface="Verdana" panose="020B0604030504040204" pitchFamily="34" charset="0"/>
+                            </a:rPr>
+                            <m:t>′</m:t>
+                          </m:r>
+                        </m:sup>
+                      </m:sSubSup>
+                      <m:sSubSup>
+                        <m:sSubSupPr>
+                          <m:ctrlPr>
+                            <a:rPr lang="en-GB" sz="2600" b="0" i="1" noProof="1" smtClean="0">
+                              <a:latin typeface="Cambria Math" panose="02040503050406030204" pitchFamily="18" charset="0"/>
+                              <a:ea typeface="Verdana" panose="020B0604030504040204" pitchFamily="34" charset="0"/>
+                            </a:rPr>
+                          </m:ctrlPr>
+                        </m:sSubSupPr>
+                        <m:e>
+                          <m:r>
+                            <a:rPr lang="en-GB" sz="2600" b="0" i="1" noProof="1" smtClean="0">
+                              <a:latin typeface="Cambria Math" panose="02040503050406030204" pitchFamily="18" charset="0"/>
+                              <a:ea typeface="Verdana" panose="020B0604030504040204" pitchFamily="34" charset="0"/>
+                            </a:rPr>
+                            <m:t> </m:t>
+                          </m:r>
+                          <m:r>
+                            <a:rPr lang="en-GB" sz="2600" b="0" i="1" noProof="1" smtClean="0">
+                              <a:latin typeface="Cambria Math" panose="02040503050406030204" pitchFamily="18" charset="0"/>
+                              <a:ea typeface="Verdana" panose="020B0604030504040204" pitchFamily="34" charset="0"/>
+                            </a:rPr>
+                            <m:t>𝑍</m:t>
+                          </m:r>
+                        </m:e>
+                        <m:sub>
+                          <m:r>
+                            <a:rPr lang="en-GB" sz="2600" i="1" noProof="1" smtClean="0">
+                              <a:latin typeface="Cambria Math" panose="02040503050406030204" pitchFamily="18" charset="0"/>
+                              <a:ea typeface="Verdana" panose="020B0604030504040204" pitchFamily="34" charset="0"/>
+                            </a:rPr>
+                            <m:t>𝑖</m:t>
+                          </m:r>
+                        </m:sub>
+                        <m:sup>
+                          <m:r>
+                            <a:rPr lang="en-GB" sz="2600" i="1" noProof="1" smtClean="0">
+                              <a:latin typeface="Cambria Math" panose="02040503050406030204" pitchFamily="18" charset="0"/>
+                              <a:ea typeface="Verdana" panose="020B0604030504040204" pitchFamily="34" charset="0"/>
+                            </a:rPr>
+                            <m:t>𝐵</m:t>
+                          </m:r>
+                        </m:sup>
+                      </m:sSubSup>
+                      <m:r>
+                        <a:rPr lang="en-GB" sz="2600" i="1" noProof="1" smtClean="0">
+                          <a:latin typeface="Cambria Math" panose="02040503050406030204" pitchFamily="18" charset="0"/>
+                          <a:ea typeface="Verdana" panose="020B0604030504040204" pitchFamily="34" charset="0"/>
+                        </a:rPr>
+                        <m:t>+</m:t>
+                      </m:r>
+                      <m:r>
+                        <m:rPr>
+                          <m:nor/>
+                        </m:rPr>
+                        <a:rPr lang="en-GB" sz="2600" noProof="1" smtClean="0">
+                          <a:ea typeface="Cambria Math" panose="02040503050406030204" pitchFamily="18" charset="0"/>
+                        </a:rPr>
+                        <m:t> </m:t>
+                      </m:r>
+                      <m:sSub>
+                        <m:sSubPr>
+                          <m:ctrlPr>
+                            <a:rPr lang="en-GB" sz="2600" i="1" noProof="1" smtClean="0">
+                              <a:latin typeface="Cambria Math" panose="02040503050406030204" pitchFamily="18" charset="0"/>
+                              <a:ea typeface="Cambria Math" panose="02040503050406030204" pitchFamily="18" charset="0"/>
+                            </a:rPr>
+                          </m:ctrlPr>
+                        </m:sSubPr>
+                        <m:e>
+                          <m:r>
+                            <a:rPr lang="en-GB" sz="2600" i="1" noProof="1" smtClean="0">
+                              <a:latin typeface="Cambria Math" panose="02040503050406030204" pitchFamily="18" charset="0"/>
+                              <a:ea typeface="Cambria Math" panose="02040503050406030204" pitchFamily="18" charset="0"/>
+                            </a:rPr>
+                            <m:t>𝜀</m:t>
+                          </m:r>
+                        </m:e>
+                        <m:sub>
+                          <m:r>
+                            <a:rPr lang="en-GB" sz="2600" b="0" i="1" noProof="1" smtClean="0">
+                              <a:latin typeface="Cambria Math" panose="02040503050406030204" pitchFamily="18" charset="0"/>
+                              <a:ea typeface="Cambria Math" panose="02040503050406030204" pitchFamily="18" charset="0"/>
+                            </a:rPr>
+                            <m:t>𝑖</m:t>
+                          </m:r>
+                          <m:r>
+                            <a:rPr lang="en-GB" sz="2600" b="0" i="1" noProof="1" smtClean="0">
+                              <a:latin typeface="Cambria Math" panose="02040503050406030204" pitchFamily="18" charset="0"/>
+                              <a:ea typeface="Cambria Math" panose="02040503050406030204" pitchFamily="18" charset="0"/>
+                            </a:rPr>
+                            <m:t>,</m:t>
+                          </m:r>
+                          <m:r>
+                            <a:rPr lang="en-GB" sz="2600" i="1" noProof="1" smtClean="0">
+                              <a:latin typeface="Cambria Math" panose="02040503050406030204" pitchFamily="18" charset="0"/>
+                              <a:ea typeface="Verdana" panose="020B0604030504040204" pitchFamily="34" charset="0"/>
+                            </a:rPr>
+                            <m:t>𝑡</m:t>
+                          </m:r>
+                        </m:sub>
+                      </m:sSub>
+                    </m:oMath>
+                  </m:oMathPara>
+                </a14:m>
+                <a:endParaRPr lang="en-GB" sz="2600" noProof="1">
+                  <a:solidFill>
+                    <a:schemeClr val="tx1"/>
+                  </a:solidFill>
+                  <a:latin typeface="Verdana" panose="020B0604030504040204" pitchFamily="34" charset="0"/>
+                  <a:ea typeface="Verdana" panose="020B0604030504040204" pitchFamily="34" charset="0"/>
+                </a:endParaRPr>
+              </a:p>
+              <a:p>
+                <a:pPr>
+                  <a:lnSpc>
+                    <a:spcPct val="120000"/>
+                  </a:lnSpc>
+                  <a:spcAft>
+                    <a:spcPts val="300"/>
+                  </a:spcAft>
+                </a:pPr>
+                <a:endParaRPr lang="en-GB" sz="1800" noProof="1">
+                  <a:latin typeface="Verdana" panose="020B0604030504040204" pitchFamily="34" charset="0"/>
+                  <a:ea typeface="Verdana" panose="020B0604030504040204" pitchFamily="34" charset="0"/>
+                </a:endParaRPr>
+              </a:p>
+              <a:p>
+                <a:pPr>
+                  <a:lnSpc>
+                    <a:spcPct val="120000"/>
+                  </a:lnSpc>
+                  <a:spcAft>
+                    <a:spcPts val="300"/>
+                  </a:spcAft>
+                </a:pPr>
+                <a:r>
+                  <a:rPr lang="en-GB" sz="2400" noProof="1">
+                    <a:latin typeface="Verdana" panose="020B0604030504040204" pitchFamily="34" charset="0"/>
+                    <a:ea typeface="Verdana" panose="020B0604030504040204" pitchFamily="34" charset="0"/>
+                  </a:rPr>
+                  <a:t>2. Additional effect (</a:t>
+                </a:r>
+                <a14:m>
+                  <m:oMath xmlns:m="http://schemas.openxmlformats.org/officeDocument/2006/math">
+                    <m:r>
+                      <a:rPr lang="en-GB" sz="2400" i="1" noProof="1" smtClean="0">
+                        <a:latin typeface="Cambria Math" panose="02040503050406030204" pitchFamily="18" charset="0"/>
+                        <a:ea typeface="Cambria Math" panose="02040503050406030204" pitchFamily="18" charset="0"/>
+                      </a:rPr>
+                      <m:t>𝛾</m:t>
+                    </m:r>
+                  </m:oMath>
+                </a14:m>
+                <a:r>
+                  <a:rPr lang="en-GB" sz="2400" noProof="1">
+                    <a:latin typeface="Verdana" panose="020B0604030504040204" pitchFamily="34" charset="0"/>
+                    <a:ea typeface="Verdana" panose="020B0604030504040204" pitchFamily="34" charset="0"/>
+                  </a:rPr>
+                  <a:t>) of ICT/AI in shock years</a:t>
+                </a:r>
+              </a:p>
+              <a:p>
+                <a:pPr>
+                  <a:lnSpc>
+                    <a:spcPct val="120000"/>
+                  </a:lnSpc>
+                  <a:spcAft>
+                    <a:spcPts val="300"/>
+                  </a:spcAft>
+                </a:pPr>
+                <a:r>
+                  <a:rPr lang="en-GB" sz="2400" noProof="1">
+                    <a:latin typeface="Verdana" panose="020B0604030504040204" pitchFamily="34" charset="0"/>
+                    <a:ea typeface="Verdana" panose="020B0604030504040204" pitchFamily="34" charset="0"/>
+                  </a:rPr>
+                  <a:t>	 </a:t>
+                </a:r>
+                <a14:m>
+                  <m:oMath xmlns:m="http://schemas.openxmlformats.org/officeDocument/2006/math">
+                    <m:sSub>
+                      <m:sSubPr>
+                        <m:ctrlPr>
+                          <a:rPr lang="en-GB" sz="2600" i="1" noProof="1" smtClean="0">
+                            <a:latin typeface="Cambria Math" panose="02040503050406030204" pitchFamily="18" charset="0"/>
+                            <a:ea typeface="Verdana" panose="020B0604030504040204" pitchFamily="34" charset="0"/>
+                          </a:rPr>
+                        </m:ctrlPr>
+                      </m:sSubPr>
+                      <m:e>
+                        <m:r>
+                          <a:rPr lang="en-GB" sz="2600" i="1" noProof="1" smtClean="0">
+                            <a:latin typeface="Cambria Math" panose="02040503050406030204" pitchFamily="18" charset="0"/>
+                            <a:ea typeface="Verdana" panose="020B0604030504040204" pitchFamily="34" charset="0"/>
+                          </a:rPr>
+                          <m:t>𝑃</m:t>
+                        </m:r>
+                        <m:r>
+                          <a:rPr lang="en-GB" sz="2600" i="1" noProof="1" smtClean="0">
+                            <a:latin typeface="Cambria Math" panose="02040503050406030204" pitchFamily="18" charset="0"/>
+                            <a:ea typeface="Verdana" panose="020B0604030504040204" pitchFamily="34" charset="0"/>
+                          </a:rPr>
+                          <m:t>(</m:t>
+                        </m:r>
+                        <m:r>
+                          <a:rPr lang="en-GB" sz="2600" i="1" noProof="1" smtClean="0">
+                            <a:latin typeface="Cambria Math" panose="02040503050406030204" pitchFamily="18" charset="0"/>
+                            <a:ea typeface="Verdana" panose="020B0604030504040204" pitchFamily="34" charset="0"/>
+                          </a:rPr>
+                          <m:t>𝑆</m:t>
+                        </m:r>
+                      </m:e>
+                      <m:sub>
+                        <m:r>
+                          <a:rPr lang="en-GB" sz="2600" i="1" noProof="1" smtClean="0">
+                            <a:latin typeface="Cambria Math" panose="02040503050406030204" pitchFamily="18" charset="0"/>
+                            <a:ea typeface="Verdana" panose="020B0604030504040204" pitchFamily="34" charset="0"/>
+                          </a:rPr>
+                          <m:t>𝑖</m:t>
+                        </m:r>
+                        <m:r>
+                          <a:rPr lang="en-GB" sz="2600" i="1" noProof="1" smtClean="0">
+                            <a:latin typeface="Cambria Math" panose="02040503050406030204" pitchFamily="18" charset="0"/>
+                            <a:ea typeface="Verdana" panose="020B0604030504040204" pitchFamily="34" charset="0"/>
+                          </a:rPr>
+                          <m:t>,</m:t>
+                        </m:r>
+                        <m:r>
+                          <a:rPr lang="en-GB" sz="2600" i="1" noProof="1" smtClean="0">
+                            <a:latin typeface="Cambria Math" panose="02040503050406030204" pitchFamily="18" charset="0"/>
+                            <a:ea typeface="Verdana" panose="020B0604030504040204" pitchFamily="34" charset="0"/>
+                          </a:rPr>
+                          <m:t>𝑡</m:t>
+                        </m:r>
+                      </m:sub>
+                    </m:sSub>
+                    <m:r>
+                      <a:rPr lang="en-GB" sz="2600" i="1" noProof="1" smtClean="0">
+                        <a:latin typeface="Cambria Math" panose="02040503050406030204" pitchFamily="18" charset="0"/>
+                        <a:ea typeface="Verdana" panose="020B0604030504040204" pitchFamily="34" charset="0"/>
+                      </a:rPr>
+                      <m:t>=1| </m:t>
+                    </m:r>
+                    <m:r>
+                      <a:rPr lang="en-GB" sz="2600" i="1" noProof="1" smtClean="0">
+                        <a:latin typeface="Cambria Math" panose="02040503050406030204" pitchFamily="18" charset="0"/>
+                        <a:ea typeface="Verdana" panose="020B0604030504040204" pitchFamily="34" charset="0"/>
+                      </a:rPr>
+                      <m:t>𝑋</m:t>
+                    </m:r>
+                    <m:r>
+                      <a:rPr lang="en-GB" sz="2600" i="1" noProof="1" smtClean="0">
+                        <a:latin typeface="Cambria Math" panose="02040503050406030204" pitchFamily="18" charset="0"/>
+                        <a:ea typeface="Verdana" panose="020B0604030504040204" pitchFamily="34" charset="0"/>
+                      </a:rPr>
+                      <m:t>, </m:t>
+                    </m:r>
+                    <m:r>
+                      <a:rPr lang="en-GB" sz="2600" i="1" noProof="1" smtClean="0">
+                        <a:latin typeface="Cambria Math" panose="02040503050406030204" pitchFamily="18" charset="0"/>
+                        <a:ea typeface="Verdana" panose="020B0604030504040204" pitchFamily="34" charset="0"/>
+                      </a:rPr>
+                      <m:t>𝑍</m:t>
+                    </m:r>
+                    <m:r>
+                      <a:rPr lang="en-GB" sz="2600" i="1" noProof="1" smtClean="0">
+                        <a:latin typeface="Cambria Math" panose="02040503050406030204" pitchFamily="18" charset="0"/>
+                        <a:ea typeface="Verdana" panose="020B0604030504040204" pitchFamily="34" charset="0"/>
+                      </a:rPr>
+                      <m:t>,</m:t>
+                    </m:r>
+                    <m:r>
+                      <a:rPr lang="en-GB" sz="2600" b="0" i="1" noProof="1" smtClean="0">
+                        <a:latin typeface="Cambria Math" panose="02040503050406030204" pitchFamily="18" charset="0"/>
+                        <a:ea typeface="Verdana" panose="020B0604030504040204" pitchFamily="34" charset="0"/>
+                      </a:rPr>
+                      <m:t>𝑌</m:t>
+                    </m:r>
+                    <m:r>
+                      <a:rPr lang="en-GB" sz="2600" b="0" i="1" noProof="1" smtClean="0">
+                        <a:latin typeface="Cambria Math" panose="02040503050406030204" pitchFamily="18" charset="0"/>
+                        <a:ea typeface="Verdana" panose="020B0604030504040204" pitchFamily="34" charset="0"/>
+                      </a:rPr>
+                      <m:t>,</m:t>
+                    </m:r>
+                    <m:sSub>
+                      <m:sSubPr>
+                        <m:ctrlPr>
+                          <a:rPr lang="en-GB" sz="2600" i="1" noProof="1" smtClean="0">
+                            <a:latin typeface="Cambria Math" panose="02040503050406030204" pitchFamily="18" charset="0"/>
+                            <a:ea typeface="Cambria Math" panose="02040503050406030204" pitchFamily="18" charset="0"/>
+                          </a:rPr>
+                        </m:ctrlPr>
+                      </m:sSubPr>
+                      <m:e>
+                        <m:r>
+                          <a:rPr lang="en-GB" sz="2600" i="1" noProof="1" smtClean="0">
+                            <a:latin typeface="Cambria Math" panose="02040503050406030204" pitchFamily="18" charset="0"/>
+                            <a:ea typeface="Cambria Math" panose="02040503050406030204" pitchFamily="18" charset="0"/>
+                          </a:rPr>
+                          <m:t>𝛼</m:t>
+                        </m:r>
+                      </m:e>
+                      <m:sub>
+                        <m:r>
+                          <a:rPr lang="en-GB" sz="2600" i="1" noProof="1" smtClean="0">
+                            <a:latin typeface="Cambria Math" panose="02040503050406030204" pitchFamily="18" charset="0"/>
+                            <a:ea typeface="Verdana" panose="020B0604030504040204" pitchFamily="34" charset="0"/>
+                          </a:rPr>
+                          <m:t>𝑖</m:t>
+                        </m:r>
+                      </m:sub>
+                    </m:sSub>
+                    <m:r>
+                      <a:rPr lang="en-GB" sz="2600" i="1" noProof="1" smtClean="0">
+                        <a:latin typeface="Cambria Math" panose="02040503050406030204" pitchFamily="18" charset="0"/>
+                        <a:ea typeface="Verdana" panose="020B0604030504040204" pitchFamily="34" charset="0"/>
+                      </a:rPr>
+                      <m:t>)=</m:t>
+                    </m:r>
+                  </m:oMath>
+                </a14:m>
+                <a:r>
+                  <a:rPr lang="en-GB" sz="2600" noProof="1">
+                    <a:ea typeface="Verdana" panose="020B0604030504040204" pitchFamily="34" charset="0"/>
+                  </a:rPr>
+                  <a:t> ... </a:t>
+                </a:r>
+                <a14:m>
+                  <m:oMath xmlns:m="http://schemas.openxmlformats.org/officeDocument/2006/math">
+                    <m:r>
+                      <a:rPr lang="en-GB" sz="2600" i="1" noProof="1" smtClean="0">
+                        <a:latin typeface="Cambria Math" panose="02040503050406030204" pitchFamily="18" charset="0"/>
+                        <a:ea typeface="Verdana" panose="020B0604030504040204" pitchFamily="34" charset="0"/>
+                      </a:rPr>
+                      <m:t>+</m:t>
+                    </m:r>
+                    <m:r>
+                      <a:rPr lang="en-GB" sz="2600" b="0" i="1" noProof="1" smtClean="0">
+                        <a:latin typeface="Cambria Math" panose="02040503050406030204" pitchFamily="18" charset="0"/>
+                        <a:ea typeface="Verdana" panose="020B0604030504040204" pitchFamily="34" charset="0"/>
+                      </a:rPr>
+                      <m:t> </m:t>
+                    </m:r>
+                    <m:sSubSup>
+                      <m:sSubSupPr>
+                        <m:ctrlPr>
+                          <a:rPr lang="en-GB" sz="2600" i="1" noProof="1" smtClean="0">
+                            <a:latin typeface="Cambria Math" panose="02040503050406030204" pitchFamily="18" charset="0"/>
+                            <a:ea typeface="Cambria Math" panose="02040503050406030204" pitchFamily="18" charset="0"/>
+                          </a:rPr>
+                        </m:ctrlPr>
+                      </m:sSubSupPr>
+                      <m:e>
+                        <m:r>
+                          <a:rPr lang="en-GB" sz="2600" i="1" noProof="1" smtClean="0">
+                            <a:latin typeface="Cambria Math" panose="02040503050406030204" pitchFamily="18" charset="0"/>
+                            <a:ea typeface="Cambria Math" panose="02040503050406030204" pitchFamily="18" charset="0"/>
+                          </a:rPr>
+                          <m:t>𝛾</m:t>
+                        </m:r>
+                      </m:e>
+                      <m:sub>
+                        <m:r>
+                          <a:rPr lang="en-GB" sz="2600" i="1" noProof="1" smtClean="0">
+                            <a:latin typeface="Cambria Math" panose="02040503050406030204" pitchFamily="18" charset="0"/>
+                            <a:ea typeface="Verdana" panose="020B0604030504040204" pitchFamily="34" charset="0"/>
+                          </a:rPr>
+                          <m:t>𝑤</m:t>
+                        </m:r>
+                      </m:sub>
+                      <m:sup>
+                        <m:r>
+                          <a:rPr lang="en-GB" sz="2600" i="1" noProof="1" smtClean="0">
+                            <a:latin typeface="Cambria Math" panose="02040503050406030204" pitchFamily="18" charset="0"/>
+                            <a:ea typeface="Verdana" panose="020B0604030504040204" pitchFamily="34" charset="0"/>
+                          </a:rPr>
+                          <m:t>′</m:t>
+                        </m:r>
+                      </m:sup>
+                    </m:sSubSup>
+                    <m:sSubSup>
+                      <m:sSubSupPr>
+                        <m:ctrlPr>
+                          <a:rPr lang="en-GB" sz="2600" i="1" noProof="1" smtClean="0">
+                            <a:latin typeface="Cambria Math" panose="02040503050406030204" pitchFamily="18" charset="0"/>
+                            <a:ea typeface="Verdana" panose="020B0604030504040204" pitchFamily="34" charset="0"/>
+                          </a:rPr>
+                        </m:ctrlPr>
+                      </m:sSubSupPr>
+                      <m:e>
+                        <m:r>
+                          <a:rPr lang="en-GB" sz="2600" i="1" noProof="1" smtClean="0">
+                            <a:latin typeface="Cambria Math" panose="02040503050406030204" pitchFamily="18" charset="0"/>
+                            <a:ea typeface="Verdana" panose="020B0604030504040204" pitchFamily="34" charset="0"/>
+                          </a:rPr>
+                          <m:t> </m:t>
+                        </m:r>
+                        <m:r>
+                          <a:rPr lang="en-GB" sz="2600" b="0" i="1" noProof="1" smtClean="0">
+                            <a:latin typeface="Cambria Math" panose="02040503050406030204" pitchFamily="18" charset="0"/>
+                            <a:ea typeface="Verdana" panose="020B0604030504040204" pitchFamily="34" charset="0"/>
+                          </a:rPr>
+                          <m:t>𝑌</m:t>
+                        </m:r>
+                      </m:e>
+                      <m:sub>
+                        <m:r>
+                          <a:rPr lang="en-GB" sz="2600" i="1" noProof="1" smtClean="0">
+                            <a:latin typeface="Cambria Math" panose="02040503050406030204" pitchFamily="18" charset="0"/>
+                            <a:ea typeface="Verdana" panose="020B0604030504040204" pitchFamily="34" charset="0"/>
+                          </a:rPr>
+                          <m:t>𝑖</m:t>
+                        </m:r>
+                        <m:r>
+                          <a:rPr lang="en-GB" sz="2600" i="1" noProof="1" smtClean="0">
+                            <a:latin typeface="Cambria Math" panose="02040503050406030204" pitchFamily="18" charset="0"/>
+                            <a:ea typeface="Verdana" panose="020B0604030504040204" pitchFamily="34" charset="0"/>
+                          </a:rPr>
+                          <m:t>,</m:t>
+                        </m:r>
+                        <m:r>
+                          <a:rPr lang="en-GB" sz="2600" i="1" noProof="1" smtClean="0">
+                            <a:latin typeface="Cambria Math" panose="02040503050406030204" pitchFamily="18" charset="0"/>
+                            <a:ea typeface="Verdana" panose="020B0604030504040204" pitchFamily="34" charset="0"/>
+                          </a:rPr>
+                          <m:t>𝑡</m:t>
+                        </m:r>
+                        <m:r>
+                          <a:rPr lang="en-GB" sz="2600" i="1" noProof="1" smtClean="0">
+                            <a:latin typeface="Cambria Math" panose="02040503050406030204" pitchFamily="18" charset="0"/>
+                            <a:ea typeface="Verdana" panose="020B0604030504040204" pitchFamily="34" charset="0"/>
+                          </a:rPr>
+                          <m:t>−1</m:t>
+                        </m:r>
+                      </m:sub>
+                      <m:sup>
+                        <m:r>
+                          <a:rPr lang="en-GB" sz="2600" i="1" noProof="1" smtClean="0">
+                            <a:latin typeface="Cambria Math" panose="02040503050406030204" pitchFamily="18" charset="0"/>
+                            <a:ea typeface="Verdana" panose="020B0604030504040204" pitchFamily="34" charset="0"/>
+                          </a:rPr>
+                          <m:t>𝑤</m:t>
+                        </m:r>
+                      </m:sup>
+                    </m:sSubSup>
+                    <m:r>
+                      <a:rPr lang="en-GB" sz="2600" b="0" i="1" noProof="1" smtClean="0">
+                        <a:latin typeface="Cambria Math" panose="02040503050406030204" pitchFamily="18" charset="0"/>
+                        <a:ea typeface="Verdana" panose="020B0604030504040204" pitchFamily="34" charset="0"/>
+                      </a:rPr>
+                      <m:t> </m:t>
+                    </m:r>
+                    <m:r>
+                      <a:rPr lang="en-GB" sz="2600" i="1" noProof="1" smtClean="0">
+                        <a:latin typeface="Cambria Math" panose="02040503050406030204" pitchFamily="18" charset="0"/>
+                        <a:ea typeface="Verdana" panose="020B0604030504040204" pitchFamily="34" charset="0"/>
+                      </a:rPr>
+                      <m:t>+</m:t>
+                    </m:r>
+                    <m:r>
+                      <a:rPr lang="en-GB" sz="2600" b="0" i="1" noProof="1" smtClean="0">
+                        <a:latin typeface="Cambria Math" panose="02040503050406030204" pitchFamily="18" charset="0"/>
+                        <a:ea typeface="Verdana" panose="020B0604030504040204" pitchFamily="34" charset="0"/>
+                      </a:rPr>
+                      <m:t> </m:t>
+                    </m:r>
+                    <m:sSubSup>
+                      <m:sSubSupPr>
+                        <m:ctrlPr>
+                          <a:rPr lang="en-GB" sz="2600" i="1" noProof="1" smtClean="0">
+                            <a:latin typeface="Cambria Math" panose="02040503050406030204" pitchFamily="18" charset="0"/>
+                            <a:ea typeface="Cambria Math" panose="02040503050406030204" pitchFamily="18" charset="0"/>
+                          </a:rPr>
+                        </m:ctrlPr>
+                      </m:sSubSupPr>
+                      <m:e>
+                        <m:r>
+                          <a:rPr lang="en-GB" sz="2600" i="1" noProof="1" smtClean="0">
+                            <a:latin typeface="Cambria Math" panose="02040503050406030204" pitchFamily="18" charset="0"/>
+                            <a:ea typeface="Cambria Math" panose="02040503050406030204" pitchFamily="18" charset="0"/>
+                          </a:rPr>
+                          <m:t>𝛾</m:t>
+                        </m:r>
+                      </m:e>
+                      <m:sub>
+                        <m:r>
+                          <a:rPr lang="en-GB" sz="2600" i="1" noProof="1" smtClean="0">
+                            <a:latin typeface="Cambria Math" panose="02040503050406030204" pitchFamily="18" charset="0"/>
+                            <a:ea typeface="Verdana" panose="020B0604030504040204" pitchFamily="34" charset="0"/>
+                          </a:rPr>
+                          <m:t>𝐵</m:t>
+                        </m:r>
+                      </m:sub>
+                      <m:sup>
+                        <m:r>
+                          <a:rPr lang="en-GB" sz="2600" i="1" noProof="1" smtClean="0">
+                            <a:latin typeface="Cambria Math" panose="02040503050406030204" pitchFamily="18" charset="0"/>
+                            <a:ea typeface="Verdana" panose="020B0604030504040204" pitchFamily="34" charset="0"/>
+                          </a:rPr>
+                          <m:t>′</m:t>
+                        </m:r>
+                      </m:sup>
+                    </m:sSubSup>
+                    <m:sSubSup>
+                      <m:sSubSupPr>
+                        <m:ctrlPr>
+                          <a:rPr lang="en-GB" sz="2600" i="1" noProof="1" smtClean="0">
+                            <a:latin typeface="Cambria Math" panose="02040503050406030204" pitchFamily="18" charset="0"/>
+                            <a:ea typeface="Verdana" panose="020B0604030504040204" pitchFamily="34" charset="0"/>
+                          </a:rPr>
+                        </m:ctrlPr>
+                      </m:sSubSupPr>
+                      <m:e>
+                        <m:r>
+                          <a:rPr lang="en-GB" sz="2600" i="1" noProof="1" smtClean="0">
+                            <a:latin typeface="Cambria Math" panose="02040503050406030204" pitchFamily="18" charset="0"/>
+                            <a:ea typeface="Verdana" panose="020B0604030504040204" pitchFamily="34" charset="0"/>
+                          </a:rPr>
+                          <m:t> </m:t>
+                        </m:r>
+                        <m:r>
+                          <a:rPr lang="en-GB" sz="2600" b="0" i="1" noProof="1" smtClean="0">
+                            <a:latin typeface="Cambria Math" panose="02040503050406030204" pitchFamily="18" charset="0"/>
+                            <a:ea typeface="Verdana" panose="020B0604030504040204" pitchFamily="34" charset="0"/>
+                          </a:rPr>
+                          <m:t>𝑌</m:t>
+                        </m:r>
+                      </m:e>
+                      <m:sub>
+                        <m:r>
+                          <a:rPr lang="en-GB" sz="2600" i="1" noProof="1" smtClean="0">
+                            <a:latin typeface="Cambria Math" panose="02040503050406030204" pitchFamily="18" charset="0"/>
+                            <a:ea typeface="Verdana" panose="020B0604030504040204" pitchFamily="34" charset="0"/>
+                          </a:rPr>
+                          <m:t>𝑖</m:t>
+                        </m:r>
+                      </m:sub>
+                      <m:sup>
+                        <m:r>
+                          <a:rPr lang="en-GB" sz="2600" i="1" noProof="1" smtClean="0">
+                            <a:latin typeface="Cambria Math" panose="02040503050406030204" pitchFamily="18" charset="0"/>
+                            <a:ea typeface="Verdana" panose="020B0604030504040204" pitchFamily="34" charset="0"/>
+                          </a:rPr>
+                          <m:t>𝐵</m:t>
+                        </m:r>
+                      </m:sup>
+                    </m:sSubSup>
+                    <m:r>
+                      <a:rPr lang="en-GB" sz="2600" b="0" i="1" noProof="1" smtClean="0">
+                        <a:latin typeface="Cambria Math" panose="02040503050406030204" pitchFamily="18" charset="0"/>
+                        <a:ea typeface="Verdana" panose="020B0604030504040204" pitchFamily="34" charset="0"/>
+                      </a:rPr>
+                      <m:t> </m:t>
+                    </m:r>
+                  </m:oMath>
+                </a14:m>
+                <a:r>
+                  <a:rPr lang="en-GB" sz="2600" noProof="1">
+                    <a:latin typeface="Verdana" panose="020B0604030504040204" pitchFamily="34" charset="0"/>
+                    <a:ea typeface="Verdana" panose="020B0604030504040204" pitchFamily="34" charset="0"/>
+                  </a:rPr>
+                  <a:t>…</a:t>
+                </a:r>
+              </a:p>
+              <a:p>
+                <a:pPr>
+                  <a:lnSpc>
+                    <a:spcPct val="120000"/>
+                  </a:lnSpc>
+                  <a:spcAft>
+                    <a:spcPts val="300"/>
+                  </a:spcAft>
+                </a:pPr>
+                <a:endParaRPr lang="en-GB" sz="2000" noProof="1">
+                  <a:latin typeface="Verdana" panose="020B0604030504040204" pitchFamily="34" charset="0"/>
+                  <a:ea typeface="Verdana" panose="020B0604030504040204" pitchFamily="34" charset="0"/>
+                </a:endParaRPr>
+              </a:p>
+              <a:p>
+                <a:pPr>
+                  <a:lnSpc>
+                    <a:spcPct val="120000"/>
+                  </a:lnSpc>
+                  <a:spcAft>
+                    <a:spcPts val="300"/>
+                  </a:spcAft>
+                </a:pPr>
+                <a:r>
+                  <a:rPr lang="en-GB" sz="2400" noProof="1">
+                    <a:latin typeface="Verdana" panose="020B0604030504040204" pitchFamily="34" charset="0"/>
+                    <a:ea typeface="Verdana" panose="020B0604030504040204" pitchFamily="34" charset="0"/>
+                  </a:rPr>
+                  <a:t>3. Additional effect (</a:t>
+                </a:r>
+                <a14:m>
+                  <m:oMath xmlns:m="http://schemas.openxmlformats.org/officeDocument/2006/math">
+                    <m:r>
+                      <a:rPr lang="en-GB" sz="2400" noProof="1" smtClean="0">
+                        <a:latin typeface="Cambria Math" panose="02040503050406030204" pitchFamily="18" charset="0"/>
+                        <a:ea typeface="Verdana" panose="020B0604030504040204" pitchFamily="34" charset="0"/>
+                      </a:rPr>
+                      <m:t>𝛾</m:t>
+                    </m:r>
+                  </m:oMath>
+                </a14:m>
+                <a:r>
+                  <a:rPr lang="en-GB" sz="2400" noProof="1">
+                    <a:latin typeface="Verdana" panose="020B0604030504040204" pitchFamily="34" charset="0"/>
+                    <a:ea typeface="Verdana" panose="020B0604030504040204" pitchFamily="34" charset="0"/>
+                  </a:rPr>
+                  <a:t>) specific to high ICT/AI in shock years</a:t>
+                </a:r>
+              </a:p>
+              <a:p>
+                <a:pPr>
+                  <a:lnSpc>
+                    <a:spcPct val="120000"/>
+                  </a:lnSpc>
+                  <a:spcAft>
+                    <a:spcPts val="300"/>
+                  </a:spcAft>
+                </a:pPr>
+                <a:r>
+                  <a:rPr lang="en-GB" sz="2000" noProof="1">
+                    <a:latin typeface="Verdana" panose="020B0604030504040204" pitchFamily="34" charset="0"/>
+                    <a:ea typeface="Verdana" panose="020B0604030504040204" pitchFamily="34" charset="0"/>
+                  </a:rPr>
+                  <a:t>	</a:t>
+                </a:r>
+                <a:r>
+                  <a:rPr lang="en-GB" sz="2200" noProof="1">
+                    <a:latin typeface="Verdana" panose="020B0604030504040204" pitchFamily="34" charset="0"/>
+                    <a:ea typeface="Verdana" panose="020B0604030504040204" pitchFamily="34" charset="0"/>
+                  </a:rPr>
+                  <a:t> </a:t>
+                </a:r>
+                <a14:m>
+                  <m:oMath xmlns:m="http://schemas.openxmlformats.org/officeDocument/2006/math">
+                    <m:sSub>
+                      <m:sSubPr>
+                        <m:ctrlPr>
+                          <a:rPr lang="en-GB" sz="2600" i="1" noProof="1" smtClean="0">
+                            <a:latin typeface="Cambria Math" panose="02040503050406030204" pitchFamily="18" charset="0"/>
+                            <a:ea typeface="Verdana" panose="020B0604030504040204" pitchFamily="34" charset="0"/>
+                          </a:rPr>
+                        </m:ctrlPr>
+                      </m:sSubPr>
+                      <m:e>
+                        <m:r>
+                          <a:rPr lang="en-GB" sz="2600" i="1" noProof="1" smtClean="0">
+                            <a:latin typeface="Cambria Math" panose="02040503050406030204" pitchFamily="18" charset="0"/>
+                            <a:ea typeface="Verdana" panose="020B0604030504040204" pitchFamily="34" charset="0"/>
+                          </a:rPr>
+                          <m:t>𝑃</m:t>
+                        </m:r>
+                        <m:r>
+                          <a:rPr lang="en-GB" sz="2600" i="1" noProof="1" smtClean="0">
+                            <a:latin typeface="Cambria Math" panose="02040503050406030204" pitchFamily="18" charset="0"/>
+                            <a:ea typeface="Verdana" panose="020B0604030504040204" pitchFamily="34" charset="0"/>
+                          </a:rPr>
+                          <m:t>(</m:t>
+                        </m:r>
+                        <m:r>
+                          <a:rPr lang="en-GB" sz="2600" i="1" noProof="1" smtClean="0">
+                            <a:latin typeface="Cambria Math" panose="02040503050406030204" pitchFamily="18" charset="0"/>
+                            <a:ea typeface="Verdana" panose="020B0604030504040204" pitchFamily="34" charset="0"/>
+                          </a:rPr>
+                          <m:t>𝑆</m:t>
+                        </m:r>
+                      </m:e>
+                      <m:sub>
+                        <m:r>
+                          <a:rPr lang="en-GB" sz="2600" i="1" noProof="1" smtClean="0">
+                            <a:latin typeface="Cambria Math" panose="02040503050406030204" pitchFamily="18" charset="0"/>
+                            <a:ea typeface="Verdana" panose="020B0604030504040204" pitchFamily="34" charset="0"/>
+                          </a:rPr>
+                          <m:t>𝑖</m:t>
+                        </m:r>
+                        <m:r>
+                          <a:rPr lang="en-GB" sz="2600" i="1" noProof="1" smtClean="0">
+                            <a:latin typeface="Cambria Math" panose="02040503050406030204" pitchFamily="18" charset="0"/>
+                            <a:ea typeface="Verdana" panose="020B0604030504040204" pitchFamily="34" charset="0"/>
+                          </a:rPr>
+                          <m:t>,</m:t>
+                        </m:r>
+                        <m:r>
+                          <a:rPr lang="en-GB" sz="2600" i="1" noProof="1" smtClean="0">
+                            <a:latin typeface="Cambria Math" panose="02040503050406030204" pitchFamily="18" charset="0"/>
+                            <a:ea typeface="Verdana" panose="020B0604030504040204" pitchFamily="34" charset="0"/>
+                          </a:rPr>
+                          <m:t>𝑡</m:t>
+                        </m:r>
+                      </m:sub>
+                    </m:sSub>
+                    <m:r>
+                      <a:rPr lang="en-GB" sz="2600" i="1" noProof="1" smtClean="0">
+                        <a:latin typeface="Cambria Math" panose="02040503050406030204" pitchFamily="18" charset="0"/>
+                        <a:ea typeface="Verdana" panose="020B0604030504040204" pitchFamily="34" charset="0"/>
+                      </a:rPr>
+                      <m:t>=1| </m:t>
+                    </m:r>
+                    <m:r>
+                      <a:rPr lang="en-GB" sz="2600" i="1" noProof="1" smtClean="0">
+                        <a:latin typeface="Cambria Math" panose="02040503050406030204" pitchFamily="18" charset="0"/>
+                        <a:ea typeface="Verdana" panose="020B0604030504040204" pitchFamily="34" charset="0"/>
+                      </a:rPr>
+                      <m:t>𝑋</m:t>
+                    </m:r>
+                    <m:r>
+                      <a:rPr lang="en-GB" sz="2600" i="1" noProof="1" smtClean="0">
+                        <a:latin typeface="Cambria Math" panose="02040503050406030204" pitchFamily="18" charset="0"/>
+                        <a:ea typeface="Verdana" panose="020B0604030504040204" pitchFamily="34" charset="0"/>
+                      </a:rPr>
+                      <m:t>, </m:t>
+                    </m:r>
+                    <m:r>
+                      <a:rPr lang="en-GB" sz="2600" i="1" noProof="1" smtClean="0">
+                        <a:latin typeface="Cambria Math" panose="02040503050406030204" pitchFamily="18" charset="0"/>
+                        <a:ea typeface="Verdana" panose="020B0604030504040204" pitchFamily="34" charset="0"/>
+                      </a:rPr>
+                      <m:t>𝑍</m:t>
+                    </m:r>
+                    <m:r>
+                      <a:rPr lang="en-GB" sz="2600" i="1" noProof="1" smtClean="0">
+                        <a:latin typeface="Cambria Math" panose="02040503050406030204" pitchFamily="18" charset="0"/>
+                        <a:ea typeface="Verdana" panose="020B0604030504040204" pitchFamily="34" charset="0"/>
+                      </a:rPr>
+                      <m:t>,</m:t>
+                    </m:r>
+                    <m:sSup>
+                      <m:sSupPr>
+                        <m:ctrlPr>
+                          <a:rPr lang="en-GB" sz="2600" b="0" i="1" noProof="1" smtClean="0">
+                            <a:latin typeface="Cambria Math" panose="02040503050406030204" pitchFamily="18" charset="0"/>
+                            <a:ea typeface="Verdana" panose="020B0604030504040204" pitchFamily="34" charset="0"/>
+                          </a:rPr>
+                        </m:ctrlPr>
+                      </m:sSupPr>
+                      <m:e>
+                        <m:r>
+                          <a:rPr lang="en-GB" sz="2600" b="0" i="1" noProof="1" smtClean="0">
+                            <a:latin typeface="Cambria Math" panose="02040503050406030204" pitchFamily="18" charset="0"/>
+                            <a:ea typeface="Verdana" panose="020B0604030504040204" pitchFamily="34" charset="0"/>
+                          </a:rPr>
+                          <m:t>𝑌</m:t>
+                        </m:r>
+                      </m:e>
+                      <m:sup>
+                        <m:r>
+                          <a:rPr lang="en-GB" sz="2600" b="0" i="1" noProof="1" smtClean="0">
+                            <a:latin typeface="Cambria Math" panose="02040503050406030204" pitchFamily="18" charset="0"/>
+                            <a:ea typeface="Verdana" panose="020B0604030504040204" pitchFamily="34" charset="0"/>
+                          </a:rPr>
+                          <m:t>ℎ𝑖𝑔ℎ</m:t>
+                        </m:r>
+                      </m:sup>
+                    </m:sSup>
+                    <m:r>
+                      <a:rPr lang="en-GB" sz="2600" b="0" i="1" noProof="1" smtClean="0">
+                        <a:latin typeface="Cambria Math" panose="02040503050406030204" pitchFamily="18" charset="0"/>
+                        <a:ea typeface="Verdana" panose="020B0604030504040204" pitchFamily="34" charset="0"/>
+                      </a:rPr>
+                      <m:t>,</m:t>
+                    </m:r>
+                    <m:sSub>
+                      <m:sSubPr>
+                        <m:ctrlPr>
+                          <a:rPr lang="en-GB" sz="2600" i="1" noProof="1" smtClean="0">
+                            <a:latin typeface="Cambria Math" panose="02040503050406030204" pitchFamily="18" charset="0"/>
+                            <a:ea typeface="Verdana" panose="020B0604030504040204" pitchFamily="34" charset="0"/>
+                          </a:rPr>
+                        </m:ctrlPr>
+                      </m:sSubPr>
+                      <m:e>
+                        <m:r>
+                          <a:rPr lang="en-GB" sz="2600" i="1" noProof="1" smtClean="0">
+                            <a:latin typeface="Cambria Math" panose="02040503050406030204" pitchFamily="18" charset="0"/>
+                            <a:ea typeface="Verdana" panose="020B0604030504040204" pitchFamily="34" charset="0"/>
+                          </a:rPr>
+                          <m:t>𝛼</m:t>
+                        </m:r>
+                      </m:e>
+                      <m:sub>
+                        <m:r>
+                          <a:rPr lang="en-GB" sz="2600" i="1" noProof="1" smtClean="0">
+                            <a:latin typeface="Cambria Math" panose="02040503050406030204" pitchFamily="18" charset="0"/>
+                            <a:ea typeface="Verdana" panose="020B0604030504040204" pitchFamily="34" charset="0"/>
+                          </a:rPr>
+                          <m:t>𝑖</m:t>
+                        </m:r>
+                      </m:sub>
+                    </m:sSub>
+                    <m:r>
+                      <a:rPr lang="en-GB" sz="2600" i="1" noProof="1" smtClean="0">
+                        <a:latin typeface="Cambria Math" panose="02040503050406030204" pitchFamily="18" charset="0"/>
+                        <a:ea typeface="Verdana" panose="020B0604030504040204" pitchFamily="34" charset="0"/>
+                      </a:rPr>
+                      <m:t>)=</m:t>
+                    </m:r>
+                  </m:oMath>
+                </a14:m>
+                <a:r>
+                  <a:rPr lang="en-GB" sz="2600" i="1" noProof="1">
+                    <a:latin typeface="Cambria Math" panose="02040503050406030204" pitchFamily="18" charset="0"/>
+                    <a:ea typeface="Verdana" panose="020B0604030504040204" pitchFamily="34" charset="0"/>
+                  </a:rPr>
+                  <a:t>  ... </a:t>
+                </a:r>
+                <a14:m>
+                  <m:oMath xmlns:m="http://schemas.openxmlformats.org/officeDocument/2006/math">
+                    <m:r>
+                      <a:rPr lang="en-GB" sz="2600" i="1" noProof="1" smtClean="0">
+                        <a:latin typeface="Cambria Math" panose="02040503050406030204" pitchFamily="18" charset="0"/>
+                        <a:ea typeface="Verdana" panose="020B0604030504040204" pitchFamily="34" charset="0"/>
+                      </a:rPr>
+                      <m:t>+ </m:t>
+                    </m:r>
+                    <m:sSubSup>
+                      <m:sSubSupPr>
+                        <m:ctrlPr>
+                          <a:rPr lang="en-GB" sz="2600" i="1" noProof="1" smtClean="0">
+                            <a:latin typeface="Cambria Math" panose="02040503050406030204" pitchFamily="18" charset="0"/>
+                            <a:ea typeface="Verdana" panose="020B0604030504040204" pitchFamily="34" charset="0"/>
+                          </a:rPr>
+                        </m:ctrlPr>
+                      </m:sSubSupPr>
+                      <m:e>
+                        <m:r>
+                          <a:rPr lang="en-GB" sz="2600" i="1" noProof="1" smtClean="0">
+                            <a:latin typeface="Cambria Math" panose="02040503050406030204" pitchFamily="18" charset="0"/>
+                            <a:ea typeface="Verdana" panose="020B0604030504040204" pitchFamily="34" charset="0"/>
+                          </a:rPr>
+                          <m:t>𝛾</m:t>
+                        </m:r>
+                      </m:e>
+                      <m:sub>
+                        <m:r>
+                          <a:rPr lang="en-GB" sz="2600" i="1" noProof="1" smtClean="0">
+                            <a:latin typeface="Cambria Math" panose="02040503050406030204" pitchFamily="18" charset="0"/>
+                            <a:ea typeface="Verdana" panose="020B0604030504040204" pitchFamily="34" charset="0"/>
+                          </a:rPr>
+                          <m:t>𝑤</m:t>
+                        </m:r>
+                      </m:sub>
+                      <m:sup>
+                        <m:r>
+                          <a:rPr lang="en-GB" sz="2600" i="1" noProof="1" smtClean="0">
+                            <a:latin typeface="Cambria Math" panose="02040503050406030204" pitchFamily="18" charset="0"/>
+                            <a:ea typeface="Verdana" panose="020B0604030504040204" pitchFamily="34" charset="0"/>
+                          </a:rPr>
+                          <m:t>′</m:t>
+                        </m:r>
+                      </m:sup>
+                    </m:sSubSup>
+                    <m:sSubSup>
+                      <m:sSubSupPr>
+                        <m:ctrlPr>
+                          <a:rPr lang="en-GB" sz="2600" b="0" i="1" noProof="1" smtClean="0">
+                            <a:latin typeface="Cambria Math" panose="02040503050406030204" pitchFamily="18" charset="0"/>
+                            <a:ea typeface="Verdana" panose="020B0604030504040204" pitchFamily="34" charset="0"/>
+                          </a:rPr>
+                        </m:ctrlPr>
+                      </m:sSubSupPr>
+                      <m:e>
+                        <m:r>
+                          <a:rPr lang="en-GB" sz="2600" b="0" i="1" noProof="1" smtClean="0">
+                            <a:latin typeface="Cambria Math" panose="02040503050406030204" pitchFamily="18" charset="0"/>
+                            <a:ea typeface="Verdana" panose="020B0604030504040204" pitchFamily="34" charset="0"/>
+                          </a:rPr>
+                          <m:t> </m:t>
+                        </m:r>
+                        <m:r>
+                          <a:rPr lang="en-GB" sz="2600" b="0" i="1" noProof="1" smtClean="0">
+                            <a:latin typeface="Cambria Math" panose="02040503050406030204" pitchFamily="18" charset="0"/>
+                            <a:ea typeface="Verdana" panose="020B0604030504040204" pitchFamily="34" charset="0"/>
+                          </a:rPr>
+                          <m:t>𝑌</m:t>
+                        </m:r>
+                      </m:e>
+                      <m:sub>
+                        <m:r>
+                          <a:rPr lang="en-GB" sz="2600" i="1" noProof="1" smtClean="0">
+                            <a:latin typeface="Cambria Math" panose="02040503050406030204" pitchFamily="18" charset="0"/>
+                            <a:ea typeface="Verdana" panose="020B0604030504040204" pitchFamily="34" charset="0"/>
+                          </a:rPr>
+                          <m:t>𝑖</m:t>
+                        </m:r>
+                        <m:r>
+                          <a:rPr lang="en-GB" sz="2600" i="1" noProof="1" smtClean="0">
+                            <a:latin typeface="Cambria Math" panose="02040503050406030204" pitchFamily="18" charset="0"/>
+                            <a:ea typeface="Verdana" panose="020B0604030504040204" pitchFamily="34" charset="0"/>
+                          </a:rPr>
+                          <m:t>,</m:t>
+                        </m:r>
+                        <m:r>
+                          <a:rPr lang="en-GB" sz="2600" i="1" noProof="1" smtClean="0">
+                            <a:latin typeface="Cambria Math" panose="02040503050406030204" pitchFamily="18" charset="0"/>
+                            <a:ea typeface="Verdana" panose="020B0604030504040204" pitchFamily="34" charset="0"/>
+                          </a:rPr>
+                          <m:t>𝑡</m:t>
+                        </m:r>
+                        <m:r>
+                          <a:rPr lang="en-GB" sz="2600" i="1" noProof="1" smtClean="0">
+                            <a:latin typeface="Cambria Math" panose="02040503050406030204" pitchFamily="18" charset="0"/>
+                            <a:ea typeface="Verdana" panose="020B0604030504040204" pitchFamily="34" charset="0"/>
+                          </a:rPr>
+                          <m:t>−1</m:t>
+                        </m:r>
+                      </m:sub>
+                      <m:sup>
+                        <m:r>
+                          <a:rPr lang="en-GB" sz="2600" b="0" i="1" noProof="1" smtClean="0">
+                            <a:latin typeface="Cambria Math" panose="02040503050406030204" pitchFamily="18" charset="0"/>
+                            <a:ea typeface="Verdana" panose="020B0604030504040204" pitchFamily="34" charset="0"/>
+                          </a:rPr>
+                          <m:t>𝑤</m:t>
+                        </m:r>
+                        <m:r>
+                          <a:rPr lang="en-GB" sz="2600" b="0" i="1" noProof="1" smtClean="0">
+                            <a:latin typeface="Cambria Math" panose="02040503050406030204" pitchFamily="18" charset="0"/>
+                            <a:ea typeface="Verdana" panose="020B0604030504040204" pitchFamily="34" charset="0"/>
+                          </a:rPr>
+                          <m:t>,  </m:t>
+                        </m:r>
+                        <m:r>
+                          <a:rPr lang="en-GB" sz="2600" i="1" noProof="1" smtClean="0">
+                            <a:latin typeface="Cambria Math" panose="02040503050406030204" pitchFamily="18" charset="0"/>
+                            <a:ea typeface="Verdana" panose="020B0604030504040204" pitchFamily="34" charset="0"/>
+                          </a:rPr>
+                          <m:t>ℎ𝑖𝑔ℎ</m:t>
+                        </m:r>
+                      </m:sup>
+                    </m:sSubSup>
+                    <m:r>
+                      <a:rPr lang="en-GB" sz="2600" i="1" noProof="1" smtClean="0">
+                        <a:latin typeface="Cambria Math" panose="02040503050406030204" pitchFamily="18" charset="0"/>
+                        <a:ea typeface="Verdana" panose="020B0604030504040204" pitchFamily="34" charset="0"/>
+                      </a:rPr>
+                      <m:t>+</m:t>
+                    </m:r>
+                    <m:r>
+                      <a:rPr lang="en-GB" sz="2600" b="0" i="1" noProof="1" smtClean="0">
+                        <a:latin typeface="Cambria Math" panose="02040503050406030204" pitchFamily="18" charset="0"/>
+                        <a:ea typeface="Verdana" panose="020B0604030504040204" pitchFamily="34" charset="0"/>
+                      </a:rPr>
+                      <m:t> </m:t>
+                    </m:r>
+                    <m:sSubSup>
+                      <m:sSubSupPr>
+                        <m:ctrlPr>
+                          <a:rPr lang="en-GB" sz="2600" i="1" noProof="1" smtClean="0">
+                            <a:latin typeface="Cambria Math" panose="02040503050406030204" pitchFamily="18" charset="0"/>
+                            <a:ea typeface="Verdana" panose="020B0604030504040204" pitchFamily="34" charset="0"/>
+                          </a:rPr>
+                        </m:ctrlPr>
+                      </m:sSubSupPr>
+                      <m:e>
+                        <m:r>
+                          <a:rPr lang="en-GB" sz="2600" i="1" noProof="1" smtClean="0">
+                            <a:latin typeface="Cambria Math" panose="02040503050406030204" pitchFamily="18" charset="0"/>
+                            <a:ea typeface="Verdana" panose="020B0604030504040204" pitchFamily="34" charset="0"/>
+                          </a:rPr>
+                          <m:t>𝛾</m:t>
+                        </m:r>
+                      </m:e>
+                      <m:sub>
+                        <m:r>
+                          <a:rPr lang="en-GB" sz="2600" b="0" i="1" noProof="1" smtClean="0">
+                            <a:latin typeface="Cambria Math" panose="02040503050406030204" pitchFamily="18" charset="0"/>
+                            <a:ea typeface="Verdana" panose="020B0604030504040204" pitchFamily="34" charset="0"/>
+                          </a:rPr>
+                          <m:t>𝐵</m:t>
+                        </m:r>
+                      </m:sub>
+                      <m:sup>
+                        <m:r>
+                          <a:rPr lang="en-GB" sz="2600" i="1" noProof="1" smtClean="0">
+                            <a:latin typeface="Cambria Math" panose="02040503050406030204" pitchFamily="18" charset="0"/>
+                            <a:ea typeface="Verdana" panose="020B0604030504040204" pitchFamily="34" charset="0"/>
+                          </a:rPr>
+                          <m:t>′</m:t>
+                        </m:r>
+                      </m:sup>
+                    </m:sSubSup>
+                    <m:sSubSup>
+                      <m:sSubSupPr>
+                        <m:ctrlPr>
+                          <a:rPr lang="en-GB" sz="2600" i="1" noProof="1" smtClean="0">
+                            <a:latin typeface="Cambria Math" panose="02040503050406030204" pitchFamily="18" charset="0"/>
+                            <a:ea typeface="Verdana" panose="020B0604030504040204" pitchFamily="34" charset="0"/>
+                          </a:rPr>
+                        </m:ctrlPr>
+                      </m:sSubSupPr>
+                      <m:e>
+                        <m:r>
+                          <a:rPr lang="en-GB" sz="2600" i="1" noProof="1" smtClean="0">
+                            <a:latin typeface="Cambria Math" panose="02040503050406030204" pitchFamily="18" charset="0"/>
+                            <a:ea typeface="Verdana" panose="020B0604030504040204" pitchFamily="34" charset="0"/>
+                          </a:rPr>
+                          <m:t> </m:t>
+                        </m:r>
+                        <m:r>
+                          <a:rPr lang="en-GB" sz="2600" i="1" noProof="1" smtClean="0">
+                            <a:latin typeface="Cambria Math" panose="02040503050406030204" pitchFamily="18" charset="0"/>
+                            <a:ea typeface="Verdana" panose="020B0604030504040204" pitchFamily="34" charset="0"/>
+                          </a:rPr>
+                          <m:t>𝑌</m:t>
+                        </m:r>
+                      </m:e>
+                      <m:sub>
+                        <m:r>
+                          <a:rPr lang="en-GB" sz="2600" i="1" noProof="1" smtClean="0">
+                            <a:latin typeface="Cambria Math" panose="02040503050406030204" pitchFamily="18" charset="0"/>
+                            <a:ea typeface="Verdana" panose="020B0604030504040204" pitchFamily="34" charset="0"/>
+                          </a:rPr>
+                          <m:t>𝑖</m:t>
+                        </m:r>
+                        <m:r>
+                          <a:rPr lang="en-GB" sz="2600" i="1" noProof="1" smtClean="0">
+                            <a:latin typeface="Cambria Math" panose="02040503050406030204" pitchFamily="18" charset="0"/>
+                            <a:ea typeface="Verdana" panose="020B0604030504040204" pitchFamily="34" charset="0"/>
+                          </a:rPr>
+                          <m:t>,</m:t>
+                        </m:r>
+                        <m:r>
+                          <a:rPr lang="en-GB" sz="2600" i="1" noProof="1" smtClean="0">
+                            <a:latin typeface="Cambria Math" panose="02040503050406030204" pitchFamily="18" charset="0"/>
+                            <a:ea typeface="Verdana" panose="020B0604030504040204" pitchFamily="34" charset="0"/>
+                          </a:rPr>
+                          <m:t>𝑡</m:t>
+                        </m:r>
+                        <m:r>
+                          <a:rPr lang="en-GB" sz="2600" i="1" noProof="1" smtClean="0">
+                            <a:latin typeface="Cambria Math" panose="02040503050406030204" pitchFamily="18" charset="0"/>
+                            <a:ea typeface="Verdana" panose="020B0604030504040204" pitchFamily="34" charset="0"/>
+                          </a:rPr>
+                          <m:t>−1</m:t>
+                        </m:r>
+                      </m:sub>
+                      <m:sup>
+                        <m:r>
+                          <a:rPr lang="en-GB" sz="2600" b="0" i="1" noProof="1" smtClean="0">
+                            <a:latin typeface="Cambria Math" panose="02040503050406030204" pitchFamily="18" charset="0"/>
+                            <a:ea typeface="Verdana" panose="020B0604030504040204" pitchFamily="34" charset="0"/>
+                          </a:rPr>
+                          <m:t>𝐵</m:t>
+                        </m:r>
+                        <m:r>
+                          <a:rPr lang="en-GB" sz="2600" i="1" noProof="1" smtClean="0">
+                            <a:latin typeface="Cambria Math" panose="02040503050406030204" pitchFamily="18" charset="0"/>
+                            <a:ea typeface="Verdana" panose="020B0604030504040204" pitchFamily="34" charset="0"/>
+                          </a:rPr>
+                          <m:t>,  </m:t>
+                        </m:r>
+                        <m:r>
+                          <a:rPr lang="en-GB" sz="2600" i="1" noProof="1" smtClean="0">
+                            <a:latin typeface="Cambria Math" panose="02040503050406030204" pitchFamily="18" charset="0"/>
+                            <a:ea typeface="Verdana" panose="020B0604030504040204" pitchFamily="34" charset="0"/>
+                          </a:rPr>
+                          <m:t>ℎ𝑖𝑔ℎ</m:t>
+                        </m:r>
+                      </m:sup>
+                    </m:sSubSup>
+                  </m:oMath>
+                </a14:m>
+                <a:r>
+                  <a:rPr lang="en-GB" sz="2600" i="1" noProof="1">
+                    <a:latin typeface="Cambria Math" panose="02040503050406030204" pitchFamily="18" charset="0"/>
+                    <a:ea typeface="Verdana" panose="020B0604030504040204" pitchFamily="34" charset="0"/>
+                  </a:rPr>
+                  <a:t>…</a:t>
+                </a:r>
+              </a:p>
+              <a:p>
+                <a:pPr>
+                  <a:lnSpc>
+                    <a:spcPct val="120000"/>
+                  </a:lnSpc>
+                  <a:spcAft>
+                    <a:spcPts val="300"/>
+                  </a:spcAft>
+                </a:pPr>
+                <a:endParaRPr lang="en-GB" sz="2200" noProof="1">
+                  <a:solidFill>
+                    <a:schemeClr val="tx1"/>
+                  </a:solidFill>
+                  <a:latin typeface="Verdana" panose="020B0604030504040204" pitchFamily="34" charset="0"/>
+                  <a:ea typeface="Verdana" panose="020B0604030504040204" pitchFamily="34" charset="0"/>
+                </a:endParaRPr>
+              </a:p>
+              <a:p>
+                <a:pPr>
+                  <a:lnSpc>
+                    <a:spcPct val="120000"/>
+                  </a:lnSpc>
+                  <a:spcAft>
+                    <a:spcPts val="1200"/>
+                  </a:spcAft>
+                </a:pPr>
+                <a14:m>
+                  <m:oMath xmlns:m="http://schemas.openxmlformats.org/officeDocument/2006/math">
+                    <m:sSub>
+                      <m:sSubPr>
+                        <m:ctrlPr>
+                          <a:rPr lang="en-GB" sz="1900" b="0" i="1" noProof="1" smtClean="0">
+                            <a:solidFill>
+                              <a:schemeClr val="tx1"/>
+                            </a:solidFill>
+                            <a:latin typeface="Cambria Math" panose="02040503050406030204" pitchFamily="18" charset="0"/>
+                            <a:ea typeface="Verdana" panose="020B0604030504040204" pitchFamily="34" charset="0"/>
+                          </a:rPr>
+                        </m:ctrlPr>
+                      </m:sSubPr>
+                      <m:e>
+                        <m:r>
+                          <a:rPr lang="en-GB" sz="1900" b="0" i="1" noProof="1" smtClean="0">
+                            <a:solidFill>
+                              <a:schemeClr val="tx1"/>
+                            </a:solidFill>
+                            <a:latin typeface="Cambria Math" panose="02040503050406030204" pitchFamily="18" charset="0"/>
+                            <a:ea typeface="Verdana" panose="020B0604030504040204" pitchFamily="34" charset="0"/>
+                          </a:rPr>
+                          <m:t>𝑆</m:t>
+                        </m:r>
+                      </m:e>
+                      <m:sub>
+                        <m:r>
+                          <a:rPr lang="en-GB" sz="1900" i="1" noProof="1" smtClean="0">
+                            <a:solidFill>
+                              <a:schemeClr val="tx1"/>
+                            </a:solidFill>
+                            <a:latin typeface="Cambria Math" panose="02040503050406030204" pitchFamily="18" charset="0"/>
+                            <a:ea typeface="Verdana" panose="020B0604030504040204" pitchFamily="34" charset="0"/>
+                          </a:rPr>
+                          <m:t>𝑖</m:t>
+                        </m:r>
+                        <m:r>
+                          <a:rPr lang="en-GB" sz="1900" i="1" noProof="1" smtClean="0">
+                            <a:solidFill>
+                              <a:schemeClr val="tx1"/>
+                            </a:solidFill>
+                            <a:latin typeface="Cambria Math" panose="02040503050406030204" pitchFamily="18" charset="0"/>
+                            <a:ea typeface="Verdana" panose="020B0604030504040204" pitchFamily="34" charset="0"/>
+                          </a:rPr>
+                          <m:t>,</m:t>
+                        </m:r>
+                        <m:r>
+                          <a:rPr lang="en-GB" sz="1900" i="1" noProof="1" smtClean="0">
+                            <a:solidFill>
+                              <a:schemeClr val="tx1"/>
+                            </a:solidFill>
+                            <a:latin typeface="Cambria Math" panose="02040503050406030204" pitchFamily="18" charset="0"/>
+                            <a:ea typeface="Verdana" panose="020B0604030504040204" pitchFamily="34" charset="0"/>
+                          </a:rPr>
+                          <m:t>𝑡</m:t>
+                        </m:r>
+                      </m:sub>
+                    </m:sSub>
+                    <m:r>
+                      <a:rPr lang="en-GB" sz="1900" b="0" i="1" noProof="1" smtClean="0">
+                        <a:solidFill>
+                          <a:schemeClr val="tx1"/>
+                        </a:solidFill>
+                        <a:latin typeface="Cambria Math" panose="02040503050406030204" pitchFamily="18" charset="0"/>
+                        <a:ea typeface="Verdana" panose="020B0604030504040204" pitchFamily="34" charset="0"/>
+                      </a:rPr>
+                      <m:t>=1 </m:t>
+                    </m:r>
+                    <m:r>
+                      <a:rPr lang="en-GB" sz="1900" b="0" i="0" noProof="1" smtClean="0">
+                        <a:solidFill>
+                          <a:schemeClr val="tx1"/>
+                        </a:solidFill>
+                        <a:latin typeface="Cambria Math" panose="02040503050406030204" pitchFamily="18" charset="0"/>
+                        <a:ea typeface="Verdana" panose="020B0604030504040204" pitchFamily="34" charset="0"/>
+                      </a:rPr>
+                      <m:t> </m:t>
+                    </m:r>
+                  </m:oMath>
+                </a14:m>
+                <a:r>
+                  <a:rPr lang="en-GB" sz="1900" dirty="0">
+                    <a:solidFill>
+                      <a:schemeClr val="tx1"/>
+                    </a:solidFill>
+                  </a:rPr>
+                  <a:t>if growth surprise &gt;0 (otherwise 0)</a:t>
+                </a:r>
+                <a:r>
+                  <a:rPr lang="en-GB" sz="1900" dirty="0"/>
+                  <a:t>; </a:t>
+                </a:r>
+                <a14:m>
+                  <m:oMath xmlns:m="http://schemas.openxmlformats.org/officeDocument/2006/math">
+                    <m:sSub>
+                      <m:sSubPr>
+                        <m:ctrlPr>
+                          <a:rPr lang="en-GB" sz="1900" i="1" noProof="1" smtClean="0">
+                            <a:latin typeface="Cambria Math" panose="02040503050406030204" pitchFamily="18" charset="0"/>
+                            <a:ea typeface="Verdana" panose="020B0604030504040204" pitchFamily="34" charset="0"/>
+                          </a:rPr>
+                        </m:ctrlPr>
+                      </m:sSubPr>
+                      <m:e>
+                        <m:r>
+                          <a:rPr lang="en-GB" sz="1900" i="1" noProof="1" smtClean="0">
+                            <a:latin typeface="Cambria Math" panose="02040503050406030204" pitchFamily="18" charset="0"/>
+                            <a:ea typeface="Verdana" panose="020B0604030504040204" pitchFamily="34" charset="0"/>
+                          </a:rPr>
+                          <m:t>𝑋</m:t>
+                        </m:r>
+                      </m:e>
+                      <m:sub>
+                        <m:r>
+                          <a:rPr lang="en-GB" sz="1900" i="1" noProof="1" smtClean="0">
+                            <a:latin typeface="Cambria Math" panose="02040503050406030204" pitchFamily="18" charset="0"/>
+                            <a:ea typeface="Verdana" panose="020B0604030504040204" pitchFamily="34" charset="0"/>
+                          </a:rPr>
+                          <m:t>𝑖</m:t>
+                        </m:r>
+                        <m:r>
+                          <a:rPr lang="en-GB" sz="1900" i="1" noProof="1" smtClean="0">
+                            <a:latin typeface="Cambria Math" panose="02040503050406030204" pitchFamily="18" charset="0"/>
+                            <a:ea typeface="Verdana" panose="020B0604030504040204" pitchFamily="34" charset="0"/>
+                          </a:rPr>
+                          <m:t>,</m:t>
+                        </m:r>
+                        <m:r>
+                          <a:rPr lang="en-GB" sz="1900" i="1" noProof="1" smtClean="0">
+                            <a:latin typeface="Cambria Math" panose="02040503050406030204" pitchFamily="18" charset="0"/>
+                            <a:ea typeface="Verdana" panose="020B0604030504040204" pitchFamily="34" charset="0"/>
+                          </a:rPr>
+                          <m:t>𝑡</m:t>
+                        </m:r>
+                      </m:sub>
+                    </m:sSub>
+                  </m:oMath>
+                </a14:m>
+                <a:r>
+                  <a:rPr lang="en-GB" sz="1900" dirty="0">
+                    <a:solidFill>
+                      <a:schemeClr val="tx1"/>
+                    </a:solidFill>
+                  </a:rPr>
+                  <a:t> is ICT/AI-related variable</a:t>
+                </a:r>
+              </a:p>
+              <a:p>
+                <a:pPr>
+                  <a:lnSpc>
+                    <a:spcPct val="120000"/>
+                  </a:lnSpc>
+                  <a:spcAft>
+                    <a:spcPts val="1200"/>
+                  </a:spcAft>
+                </a:pPr>
+                <a14:m>
+                  <m:oMath xmlns:m="http://schemas.openxmlformats.org/officeDocument/2006/math">
+                    <m:sSub>
+                      <m:sSubPr>
+                        <m:ctrlPr>
+                          <a:rPr lang="en-GB" sz="1900" i="1" noProof="1" smtClean="0">
+                            <a:latin typeface="Cambria Math" panose="02040503050406030204" pitchFamily="18" charset="0"/>
+                            <a:ea typeface="Cambria Math" panose="02040503050406030204" pitchFamily="18" charset="0"/>
+                          </a:rPr>
+                        </m:ctrlPr>
+                      </m:sSubPr>
+                      <m:e>
+                        <m:r>
+                          <a:rPr lang="en-GB" sz="1900" i="1" noProof="1" smtClean="0">
+                            <a:latin typeface="Cambria Math" panose="02040503050406030204" pitchFamily="18" charset="0"/>
+                            <a:ea typeface="Cambria Math" panose="02040503050406030204" pitchFamily="18" charset="0"/>
+                          </a:rPr>
+                          <m:t>𝛽</m:t>
+                        </m:r>
+                      </m:e>
+                      <m:sub>
+                        <m:r>
+                          <a:rPr lang="en-GB" sz="1900" i="1" noProof="1" smtClean="0">
+                            <a:latin typeface="Cambria Math" panose="02040503050406030204" pitchFamily="18" charset="0"/>
+                            <a:ea typeface="Verdana" panose="020B0604030504040204" pitchFamily="34" charset="0"/>
+                          </a:rPr>
+                          <m:t>𝑤</m:t>
+                        </m:r>
+                      </m:sub>
+                    </m:sSub>
+                    <m:r>
+                      <a:rPr lang="en-GB" sz="1900" i="1" noProof="1" smtClean="0">
+                        <a:latin typeface="Cambria Math" panose="02040503050406030204" pitchFamily="18" charset="0"/>
+                        <a:ea typeface="Verdana" panose="020B0604030504040204" pitchFamily="34" charset="0"/>
+                      </a:rPr>
+                      <m:t>=</m:t>
+                    </m:r>
+                  </m:oMath>
+                </a14:m>
+                <a:r>
+                  <a:rPr lang="en-GB" sz="1900" noProof="1">
+                    <a:ea typeface="Verdana" panose="020B0604030504040204" pitchFamily="34" charset="0"/>
+                  </a:rPr>
+                  <a:t> </a:t>
+                </a:r>
+                <a:r>
+                  <a:rPr lang="en-GB" sz="1900" dirty="0"/>
+                  <a:t>(within-country ICT/AI exposure coefficient); </a:t>
+                </a:r>
+                <a14:m>
+                  <m:oMath xmlns:m="http://schemas.openxmlformats.org/officeDocument/2006/math">
+                    <m:sSub>
+                      <m:sSubPr>
+                        <m:ctrlPr>
+                          <a:rPr lang="en-GB" sz="1900" i="1" noProof="1" smtClean="0">
+                            <a:latin typeface="Cambria Math" panose="02040503050406030204" pitchFamily="18" charset="0"/>
+                            <a:ea typeface="Cambria Math" panose="02040503050406030204" pitchFamily="18" charset="0"/>
+                          </a:rPr>
+                        </m:ctrlPr>
+                      </m:sSubPr>
+                      <m:e>
+                        <m:r>
+                          <a:rPr lang="en-GB" sz="1900" i="1" noProof="1" smtClean="0">
+                            <a:latin typeface="Cambria Math" panose="02040503050406030204" pitchFamily="18" charset="0"/>
+                            <a:ea typeface="Cambria Math" panose="02040503050406030204" pitchFamily="18" charset="0"/>
+                          </a:rPr>
+                          <m:t>𝛽</m:t>
+                        </m:r>
+                      </m:e>
+                      <m:sub>
+                        <m:r>
+                          <a:rPr lang="en-GB" sz="1900" i="1" noProof="1" smtClean="0">
+                            <a:latin typeface="Cambria Math" panose="02040503050406030204" pitchFamily="18" charset="0"/>
+                            <a:ea typeface="Verdana" panose="020B0604030504040204" pitchFamily="34" charset="0"/>
+                          </a:rPr>
+                          <m:t>𝐵</m:t>
+                        </m:r>
+                      </m:sub>
+                    </m:sSub>
+                  </m:oMath>
+                </a14:m>
+                <a:r>
+                  <a:rPr lang="en-GB" sz="1900" dirty="0"/>
+                  <a:t> (between-country coefficient)</a:t>
+                </a:r>
+                <a:endParaRPr lang="en-GB" sz="1900" dirty="0">
+                  <a:solidFill>
+                    <a:schemeClr val="tx1"/>
+                  </a:solidFill>
+                </a:endParaRPr>
+              </a:p>
+              <a:p>
+                <a:pPr>
+                  <a:lnSpc>
+                    <a:spcPct val="120000"/>
+                  </a:lnSpc>
+                  <a:spcAft>
+                    <a:spcPts val="1200"/>
+                  </a:spcAft>
+                </a:pPr>
+                <a14:m>
+                  <m:oMath xmlns:m="http://schemas.openxmlformats.org/officeDocument/2006/math">
+                    <m:sSubSup>
+                      <m:sSubSupPr>
+                        <m:ctrlPr>
+                          <a:rPr lang="en-GB" sz="1900" i="1" noProof="1" smtClean="0">
+                            <a:latin typeface="Cambria Math" panose="02040503050406030204" pitchFamily="18" charset="0"/>
+                            <a:ea typeface="Verdana" panose="020B0604030504040204" pitchFamily="34" charset="0"/>
+                          </a:rPr>
+                        </m:ctrlPr>
+                      </m:sSubSupPr>
+                      <m:e>
+                        <m:r>
+                          <a:rPr lang="en-GB" sz="1900" i="1" noProof="1" smtClean="0">
+                            <a:latin typeface="Cambria Math" panose="02040503050406030204" pitchFamily="18" charset="0"/>
+                            <a:ea typeface="Verdana" panose="020B0604030504040204" pitchFamily="34" charset="0"/>
+                          </a:rPr>
+                          <m:t> </m:t>
+                        </m:r>
+                        <m:r>
+                          <a:rPr lang="en-GB" sz="1900" i="1" noProof="1" smtClean="0">
+                            <a:latin typeface="Cambria Math" panose="02040503050406030204" pitchFamily="18" charset="0"/>
+                            <a:ea typeface="Verdana" panose="020B0604030504040204" pitchFamily="34" charset="0"/>
+                          </a:rPr>
+                          <m:t>𝑋</m:t>
+                        </m:r>
+                      </m:e>
+                      <m:sub>
+                        <m:r>
+                          <a:rPr lang="en-GB" sz="1900" i="1" noProof="1" smtClean="0">
+                            <a:latin typeface="Cambria Math" panose="02040503050406030204" pitchFamily="18" charset="0"/>
+                            <a:ea typeface="Verdana" panose="020B0604030504040204" pitchFamily="34" charset="0"/>
+                          </a:rPr>
+                          <m:t>𝑖</m:t>
+                        </m:r>
+                        <m:r>
+                          <a:rPr lang="en-GB" sz="1900" i="1" noProof="1" smtClean="0">
+                            <a:latin typeface="Cambria Math" panose="02040503050406030204" pitchFamily="18" charset="0"/>
+                            <a:ea typeface="Verdana" panose="020B0604030504040204" pitchFamily="34" charset="0"/>
+                          </a:rPr>
+                          <m:t>,</m:t>
+                        </m:r>
+                        <m:r>
+                          <a:rPr lang="en-GB" sz="1900" i="1" noProof="1" smtClean="0">
+                            <a:latin typeface="Cambria Math" panose="02040503050406030204" pitchFamily="18" charset="0"/>
+                            <a:ea typeface="Verdana" panose="020B0604030504040204" pitchFamily="34" charset="0"/>
+                          </a:rPr>
+                          <m:t>𝑡</m:t>
+                        </m:r>
+                        <m:r>
+                          <a:rPr lang="en-GB" sz="1900" i="1" noProof="1" smtClean="0">
+                            <a:latin typeface="Cambria Math" panose="02040503050406030204" pitchFamily="18" charset="0"/>
+                            <a:ea typeface="Verdana" panose="020B0604030504040204" pitchFamily="34" charset="0"/>
+                          </a:rPr>
+                          <m:t>−1</m:t>
+                        </m:r>
+                      </m:sub>
+                      <m:sup>
+                        <m:r>
+                          <a:rPr lang="en-GB" sz="1900" i="1" noProof="1" smtClean="0">
+                            <a:latin typeface="Cambria Math" panose="02040503050406030204" pitchFamily="18" charset="0"/>
+                            <a:ea typeface="Verdana" panose="020B0604030504040204" pitchFamily="34" charset="0"/>
+                          </a:rPr>
+                          <m:t>𝑤</m:t>
+                        </m:r>
+                      </m:sup>
+                    </m:sSubSup>
+                    <m:r>
+                      <a:rPr lang="en-GB" sz="1900" b="0" i="1" noProof="1" smtClean="0">
+                        <a:latin typeface="Cambria Math" panose="02040503050406030204" pitchFamily="18" charset="0"/>
+                        <a:ea typeface="Verdana" panose="020B0604030504040204" pitchFamily="34" charset="0"/>
+                      </a:rPr>
+                      <m:t>=</m:t>
+                    </m:r>
+                  </m:oMath>
+                </a14:m>
+                <a:r>
+                  <a:rPr lang="en-GB" sz="1900" noProof="1">
+                    <a:ea typeface="Verdana" panose="020B0604030504040204" pitchFamily="34" charset="0"/>
+                  </a:rPr>
+                  <a:t> </a:t>
+                </a:r>
+                <a14:m>
+                  <m:oMath xmlns:m="http://schemas.openxmlformats.org/officeDocument/2006/math">
+                    <m:sSub>
+                      <m:sSubPr>
+                        <m:ctrlPr>
+                          <a:rPr lang="en-GB" sz="1900" i="1" noProof="1" smtClean="0">
+                            <a:latin typeface="Cambria Math" panose="02040503050406030204" pitchFamily="18" charset="0"/>
+                            <a:ea typeface="Verdana" panose="020B0604030504040204" pitchFamily="34" charset="0"/>
+                          </a:rPr>
+                        </m:ctrlPr>
+                      </m:sSubPr>
+                      <m:e>
+                        <m:r>
+                          <a:rPr lang="en-GB" sz="1900" i="1" noProof="1" smtClean="0">
+                            <a:latin typeface="Cambria Math" panose="02040503050406030204" pitchFamily="18" charset="0"/>
+                            <a:ea typeface="Verdana" panose="020B0604030504040204" pitchFamily="34" charset="0"/>
+                          </a:rPr>
+                          <m:t>𝑋</m:t>
+                        </m:r>
+                      </m:e>
+                      <m:sub>
+                        <m:r>
+                          <a:rPr lang="en-GB" sz="1900" i="1" noProof="1" smtClean="0">
+                            <a:latin typeface="Cambria Math" panose="02040503050406030204" pitchFamily="18" charset="0"/>
+                            <a:ea typeface="Verdana" panose="020B0604030504040204" pitchFamily="34" charset="0"/>
+                          </a:rPr>
+                          <m:t>𝑖</m:t>
+                        </m:r>
+                        <m:r>
+                          <a:rPr lang="en-GB" sz="1900" i="1" noProof="1" smtClean="0">
+                            <a:latin typeface="Cambria Math" panose="02040503050406030204" pitchFamily="18" charset="0"/>
+                            <a:ea typeface="Verdana" panose="020B0604030504040204" pitchFamily="34" charset="0"/>
+                          </a:rPr>
+                          <m:t>,</m:t>
+                        </m:r>
+                        <m:r>
+                          <a:rPr lang="en-GB" sz="1900" i="1" noProof="1" smtClean="0">
+                            <a:latin typeface="Cambria Math" panose="02040503050406030204" pitchFamily="18" charset="0"/>
+                            <a:ea typeface="Verdana" panose="020B0604030504040204" pitchFamily="34" charset="0"/>
+                          </a:rPr>
+                          <m:t>𝑡</m:t>
+                        </m:r>
+                        <m:r>
+                          <a:rPr lang="en-GB" sz="1900" b="0" i="1" noProof="1" smtClean="0">
+                            <a:latin typeface="Cambria Math" panose="02040503050406030204" pitchFamily="18" charset="0"/>
+                            <a:ea typeface="Verdana" panose="020B0604030504040204" pitchFamily="34" charset="0"/>
+                          </a:rPr>
+                          <m:t>−1</m:t>
+                        </m:r>
+                      </m:sub>
+                    </m:sSub>
+                    <m:r>
+                      <a:rPr lang="en-GB" sz="1900" b="0" i="1" noProof="1" smtClean="0">
+                        <a:latin typeface="Cambria Math" panose="02040503050406030204" pitchFamily="18" charset="0"/>
+                        <a:ea typeface="Verdana" panose="020B0604030504040204" pitchFamily="34" charset="0"/>
+                      </a:rPr>
+                      <m:t>−</m:t>
+                    </m:r>
+                    <m:r>
+                      <a:rPr lang="en-GB" sz="1900" i="1" noProof="1" smtClean="0">
+                        <a:latin typeface="Cambria Math" panose="02040503050406030204" pitchFamily="18" charset="0"/>
+                        <a:ea typeface="Verdana" panose="020B0604030504040204" pitchFamily="34" charset="0"/>
+                      </a:rPr>
+                      <m:t> </m:t>
+                    </m:r>
+                    <m:acc>
+                      <m:accPr>
+                        <m:chr m:val="̅"/>
+                        <m:ctrlPr>
+                          <a:rPr lang="en-GB" sz="1900" i="1" noProof="1" smtClean="0">
+                            <a:latin typeface="Cambria Math" panose="02040503050406030204" pitchFamily="18" charset="0"/>
+                            <a:ea typeface="Verdana" panose="020B0604030504040204" pitchFamily="34" charset="0"/>
+                          </a:rPr>
+                        </m:ctrlPr>
+                      </m:accPr>
+                      <m:e>
+                        <m:sSub>
+                          <m:sSubPr>
+                            <m:ctrlPr>
+                              <a:rPr lang="en-GB" sz="1900" b="0" i="1" noProof="1" smtClean="0">
+                                <a:latin typeface="Cambria Math" panose="02040503050406030204" pitchFamily="18" charset="0"/>
+                                <a:ea typeface="Verdana" panose="020B0604030504040204" pitchFamily="34" charset="0"/>
+                              </a:rPr>
+                            </m:ctrlPr>
+                          </m:sSubPr>
+                          <m:e>
+                            <m:r>
+                              <a:rPr lang="en-GB" sz="1900" b="0" i="1" noProof="1" smtClean="0">
+                                <a:latin typeface="Cambria Math" panose="02040503050406030204" pitchFamily="18" charset="0"/>
+                                <a:ea typeface="Verdana" panose="020B0604030504040204" pitchFamily="34" charset="0"/>
+                              </a:rPr>
+                              <m:t>𝑋</m:t>
+                            </m:r>
+                          </m:e>
+                          <m:sub>
+                            <m:r>
+                              <a:rPr lang="en-GB" sz="1900" b="0" i="1" noProof="1" smtClean="0">
+                                <a:latin typeface="Cambria Math" panose="02040503050406030204" pitchFamily="18" charset="0"/>
+                                <a:ea typeface="Verdana" panose="020B0604030504040204" pitchFamily="34" charset="0"/>
+                              </a:rPr>
+                              <m:t>𝑖</m:t>
+                            </m:r>
+                          </m:sub>
+                        </m:sSub>
+                      </m:e>
+                    </m:acc>
+                    <m:r>
+                      <a:rPr lang="en-GB" sz="1900" b="0" i="0" noProof="1" smtClean="0">
+                        <a:latin typeface="Cambria Math" panose="02040503050406030204" pitchFamily="18" charset="0"/>
+                        <a:ea typeface="Verdana" panose="020B0604030504040204" pitchFamily="34" charset="0"/>
+                      </a:rPr>
+                      <m:t> </m:t>
+                    </m:r>
+                  </m:oMath>
+                </a14:m>
+                <a:r>
+                  <a:rPr lang="en-GB" sz="1900" dirty="0"/>
+                  <a:t>(within-country change)</a:t>
+                </a:r>
+                <a:r>
+                  <a:rPr lang="en-GB" sz="1900" dirty="0">
+                    <a:solidFill>
+                      <a:schemeClr val="tx1"/>
+                    </a:solidFill>
+                  </a:rPr>
+                  <a:t>; </a:t>
+                </a:r>
+                <a14:m>
+                  <m:oMath xmlns:m="http://schemas.openxmlformats.org/officeDocument/2006/math">
+                    <m:sSubSup>
+                      <m:sSubSupPr>
+                        <m:ctrlPr>
+                          <a:rPr lang="en-GB" sz="1900" b="0" i="1" noProof="1" smtClean="0">
+                            <a:latin typeface="Cambria Math" panose="02040503050406030204" pitchFamily="18" charset="0"/>
+                            <a:ea typeface="Verdana" panose="020B0604030504040204" pitchFamily="34" charset="0"/>
+                          </a:rPr>
+                        </m:ctrlPr>
+                      </m:sSubSupPr>
+                      <m:e>
+                        <m:r>
+                          <a:rPr lang="en-GB" sz="1900" b="0" i="1" noProof="1" smtClean="0">
+                            <a:latin typeface="Cambria Math" panose="02040503050406030204" pitchFamily="18" charset="0"/>
+                            <a:ea typeface="Verdana" panose="020B0604030504040204" pitchFamily="34" charset="0"/>
+                          </a:rPr>
+                          <m:t> </m:t>
+                        </m:r>
+                        <m:r>
+                          <a:rPr lang="en-GB" sz="1900" i="1" noProof="1" smtClean="0">
+                            <a:latin typeface="Cambria Math" panose="02040503050406030204" pitchFamily="18" charset="0"/>
+                            <a:ea typeface="Verdana" panose="020B0604030504040204" pitchFamily="34" charset="0"/>
+                          </a:rPr>
+                          <m:t> </m:t>
+                        </m:r>
+                        <m:r>
+                          <a:rPr lang="en-GB" sz="1900" i="1" noProof="1" smtClean="0">
+                            <a:latin typeface="Cambria Math" panose="02040503050406030204" pitchFamily="18" charset="0"/>
+                            <a:ea typeface="Verdana" panose="020B0604030504040204" pitchFamily="34" charset="0"/>
+                          </a:rPr>
+                          <m:t>𝑋</m:t>
+                        </m:r>
+                      </m:e>
+                      <m:sub>
+                        <m:r>
+                          <a:rPr lang="en-GB" sz="1900" i="1" noProof="1" smtClean="0">
+                            <a:latin typeface="Cambria Math" panose="02040503050406030204" pitchFamily="18" charset="0"/>
+                            <a:ea typeface="Verdana" panose="020B0604030504040204" pitchFamily="34" charset="0"/>
+                          </a:rPr>
+                          <m:t>𝑖</m:t>
+                        </m:r>
+                      </m:sub>
+                      <m:sup>
+                        <m:r>
+                          <a:rPr lang="en-GB" sz="1900" b="0" i="1" noProof="1" smtClean="0">
+                            <a:latin typeface="Cambria Math" panose="02040503050406030204" pitchFamily="18" charset="0"/>
+                            <a:ea typeface="Verdana" panose="020B0604030504040204" pitchFamily="34" charset="0"/>
+                          </a:rPr>
+                          <m:t>𝐵</m:t>
+                        </m:r>
+                      </m:sup>
+                    </m:sSubSup>
+                    <m:r>
+                      <a:rPr lang="en-GB" sz="1900" i="1" noProof="1" smtClean="0">
+                        <a:latin typeface="Cambria Math" panose="02040503050406030204" pitchFamily="18" charset="0"/>
+                        <a:ea typeface="Verdana" panose="020B0604030504040204" pitchFamily="34" charset="0"/>
+                      </a:rPr>
+                      <m:t>=</m:t>
+                    </m:r>
+                  </m:oMath>
+                </a14:m>
+                <a:r>
+                  <a:rPr lang="en-GB" sz="1900" noProof="1">
+                    <a:ea typeface="Verdana" panose="020B0604030504040204" pitchFamily="34" charset="0"/>
+                  </a:rPr>
+                  <a:t> </a:t>
+                </a:r>
+                <a14:m>
+                  <m:oMath xmlns:m="http://schemas.openxmlformats.org/officeDocument/2006/math">
+                    <m:acc>
+                      <m:accPr>
+                        <m:chr m:val="̅"/>
+                        <m:ctrlPr>
+                          <a:rPr lang="en-GB" sz="1900" i="1" noProof="1" smtClean="0">
+                            <a:latin typeface="Cambria Math" panose="02040503050406030204" pitchFamily="18" charset="0"/>
+                            <a:ea typeface="Verdana" panose="020B0604030504040204" pitchFamily="34" charset="0"/>
+                          </a:rPr>
+                        </m:ctrlPr>
+                      </m:accPr>
+                      <m:e>
+                        <m:sSub>
+                          <m:sSubPr>
+                            <m:ctrlPr>
+                              <a:rPr lang="en-GB" sz="1900" i="1" noProof="1" smtClean="0">
+                                <a:latin typeface="Cambria Math" panose="02040503050406030204" pitchFamily="18" charset="0"/>
+                                <a:ea typeface="Verdana" panose="020B0604030504040204" pitchFamily="34" charset="0"/>
+                              </a:rPr>
+                            </m:ctrlPr>
+                          </m:sSubPr>
+                          <m:e>
+                            <m:r>
+                              <a:rPr lang="en-GB" sz="1900" i="1" noProof="1" smtClean="0">
+                                <a:latin typeface="Cambria Math" panose="02040503050406030204" pitchFamily="18" charset="0"/>
+                                <a:ea typeface="Verdana" panose="020B0604030504040204" pitchFamily="34" charset="0"/>
+                              </a:rPr>
+                              <m:t>𝑋</m:t>
+                            </m:r>
+                          </m:e>
+                          <m:sub>
+                            <m:r>
+                              <a:rPr lang="en-GB" sz="1900" i="1" noProof="1" smtClean="0">
+                                <a:latin typeface="Cambria Math" panose="02040503050406030204" pitchFamily="18" charset="0"/>
+                                <a:ea typeface="Verdana" panose="020B0604030504040204" pitchFamily="34" charset="0"/>
+                              </a:rPr>
+                              <m:t>𝑖</m:t>
+                            </m:r>
+                          </m:sub>
+                        </m:sSub>
+                      </m:e>
+                    </m:acc>
+                  </m:oMath>
+                </a14:m>
+                <a:r>
+                  <a:rPr lang="en-GB" sz="1900" dirty="0"/>
+                  <a:t> (between-country differences)</a:t>
+                </a:r>
+              </a:p>
+              <a:p>
+                <a:pPr>
+                  <a:lnSpc>
+                    <a:spcPct val="120000"/>
+                  </a:lnSpc>
+                  <a:spcAft>
+                    <a:spcPts val="1200"/>
+                  </a:spcAft>
+                </a:pPr>
+                <a:r>
+                  <a:rPr lang="en-GB" sz="1900" dirty="0"/>
+                  <a:t>			</a:t>
+                </a:r>
+                <a14:m>
+                  <m:oMath xmlns:m="http://schemas.openxmlformats.org/officeDocument/2006/math">
+                    <m:sSub>
+                      <m:sSubPr>
+                        <m:ctrlPr>
+                          <a:rPr lang="en-GB" sz="1900" b="0" i="1" noProof="1" smtClean="0">
+                            <a:latin typeface="Cambria Math" panose="02040503050406030204" pitchFamily="18" charset="0"/>
+                            <a:ea typeface="Verdana" panose="020B0604030504040204" pitchFamily="34" charset="0"/>
+                          </a:rPr>
+                        </m:ctrlPr>
+                      </m:sSubPr>
+                      <m:e>
+                        <m:r>
+                          <a:rPr lang="en-GB" sz="1900" b="0" i="1" noProof="1" smtClean="0">
+                            <a:latin typeface="Cambria Math" panose="02040503050406030204" pitchFamily="18" charset="0"/>
+                            <a:ea typeface="Verdana" panose="020B0604030504040204" pitchFamily="34" charset="0"/>
+                          </a:rPr>
+                          <m:t>𝑌</m:t>
+                        </m:r>
+                      </m:e>
+                      <m:sub>
+                        <m:r>
+                          <a:rPr lang="en-GB" sz="1900" i="1" noProof="1" smtClean="0">
+                            <a:latin typeface="Cambria Math" panose="02040503050406030204" pitchFamily="18" charset="0"/>
+                            <a:ea typeface="Verdana" panose="020B0604030504040204" pitchFamily="34" charset="0"/>
+                          </a:rPr>
+                          <m:t>𝑖</m:t>
+                        </m:r>
+                        <m:r>
+                          <a:rPr lang="en-GB" sz="1900" i="1" noProof="1" smtClean="0">
+                            <a:latin typeface="Cambria Math" panose="02040503050406030204" pitchFamily="18" charset="0"/>
+                            <a:ea typeface="Verdana" panose="020B0604030504040204" pitchFamily="34" charset="0"/>
+                          </a:rPr>
+                          <m:t>,</m:t>
+                        </m:r>
+                        <m:r>
+                          <a:rPr lang="en-GB" sz="1900" i="1" noProof="1" smtClean="0">
+                            <a:latin typeface="Cambria Math" panose="02040503050406030204" pitchFamily="18" charset="0"/>
+                            <a:ea typeface="Verdana" panose="020B0604030504040204" pitchFamily="34" charset="0"/>
+                          </a:rPr>
+                          <m:t>𝑡</m:t>
+                        </m:r>
+                        <m:r>
+                          <a:rPr lang="en-GB" sz="1900" i="1" noProof="1" smtClean="0">
+                            <a:latin typeface="Cambria Math" panose="02040503050406030204" pitchFamily="18" charset="0"/>
+                            <a:ea typeface="Verdana" panose="020B0604030504040204" pitchFamily="34" charset="0"/>
+                          </a:rPr>
+                          <m:t>−1</m:t>
+                        </m:r>
+                      </m:sub>
+                    </m:sSub>
+                    <m:r>
+                      <a:rPr lang="en-GB" sz="1900" b="0" i="1" noProof="1" smtClean="0">
+                        <a:latin typeface="Cambria Math" panose="02040503050406030204" pitchFamily="18" charset="0"/>
+                        <a:ea typeface="Verdana" panose="020B0604030504040204" pitchFamily="34" charset="0"/>
+                      </a:rPr>
+                      <m:t>= </m:t>
+                    </m:r>
+                    <m:sSub>
+                      <m:sSubPr>
+                        <m:ctrlPr>
+                          <a:rPr lang="en-GB" sz="1900" i="1" noProof="1" smtClean="0">
+                            <a:latin typeface="Cambria Math" panose="02040503050406030204" pitchFamily="18" charset="0"/>
+                            <a:ea typeface="Verdana" panose="020B0604030504040204" pitchFamily="34" charset="0"/>
+                          </a:rPr>
+                        </m:ctrlPr>
+                      </m:sSubPr>
+                      <m:e>
+                        <m:r>
+                          <a:rPr lang="en-GB" sz="1900" i="1" noProof="1" smtClean="0">
+                            <a:latin typeface="Cambria Math" panose="02040503050406030204" pitchFamily="18" charset="0"/>
+                            <a:ea typeface="Verdana" panose="020B0604030504040204" pitchFamily="34" charset="0"/>
+                          </a:rPr>
+                          <m:t>𝑋</m:t>
+                        </m:r>
+                      </m:e>
+                      <m:sub>
+                        <m:r>
+                          <a:rPr lang="en-GB" sz="1900" i="1" noProof="1" smtClean="0">
+                            <a:latin typeface="Cambria Math" panose="02040503050406030204" pitchFamily="18" charset="0"/>
+                            <a:ea typeface="Verdana" panose="020B0604030504040204" pitchFamily="34" charset="0"/>
+                          </a:rPr>
+                          <m:t>𝑖</m:t>
+                        </m:r>
+                        <m:r>
+                          <a:rPr lang="en-GB" sz="1900" i="1" noProof="1" smtClean="0">
+                            <a:latin typeface="Cambria Math" panose="02040503050406030204" pitchFamily="18" charset="0"/>
+                            <a:ea typeface="Verdana" panose="020B0604030504040204" pitchFamily="34" charset="0"/>
+                          </a:rPr>
+                          <m:t>,</m:t>
+                        </m:r>
+                        <m:r>
+                          <a:rPr lang="en-GB" sz="1900" i="1" noProof="1" smtClean="0">
+                            <a:latin typeface="Cambria Math" panose="02040503050406030204" pitchFamily="18" charset="0"/>
+                            <a:ea typeface="Verdana" panose="020B0604030504040204" pitchFamily="34" charset="0"/>
+                          </a:rPr>
+                          <m:t>𝑡</m:t>
+                        </m:r>
+                        <m:r>
+                          <a:rPr lang="en-GB" sz="1900" i="1" noProof="1" smtClean="0">
+                            <a:latin typeface="Cambria Math" panose="02040503050406030204" pitchFamily="18" charset="0"/>
+                            <a:ea typeface="Verdana" panose="020B0604030504040204" pitchFamily="34" charset="0"/>
+                          </a:rPr>
+                          <m:t>−1</m:t>
+                        </m:r>
+                      </m:sub>
+                    </m:sSub>
+                    <m:sSub>
+                      <m:sSubPr>
+                        <m:ctrlPr>
+                          <a:rPr lang="en-GB" sz="1900" i="1" noProof="1" smtClean="0">
+                            <a:latin typeface="Cambria Math" panose="02040503050406030204" pitchFamily="18" charset="0"/>
+                            <a:ea typeface="Verdana" panose="020B0604030504040204" pitchFamily="34" charset="0"/>
+                          </a:rPr>
+                        </m:ctrlPr>
+                      </m:sSubPr>
+                      <m:e>
+                        <m:r>
+                          <a:rPr lang="en-GB" sz="1900" i="1" noProof="1" smtClean="0">
+                            <a:latin typeface="Cambria Math" panose="02040503050406030204" pitchFamily="18" charset="0"/>
+                            <a:ea typeface="Verdana" panose="020B0604030504040204" pitchFamily="34" charset="0"/>
+                          </a:rPr>
+                          <m:t>𝐷</m:t>
+                        </m:r>
+                      </m:e>
+                      <m:sub>
+                        <m:r>
+                          <a:rPr lang="en-GB" sz="1900" i="1" noProof="1" smtClean="0">
+                            <a:latin typeface="Cambria Math" panose="02040503050406030204" pitchFamily="18" charset="0"/>
+                            <a:ea typeface="Verdana" panose="020B0604030504040204" pitchFamily="34" charset="0"/>
+                          </a:rPr>
+                          <m:t>𝑡</m:t>
+                        </m:r>
+                      </m:sub>
+                    </m:sSub>
+                  </m:oMath>
+                </a14:m>
+                <a:r>
+                  <a:rPr lang="en-GB" sz="1900" noProof="1"/>
+                  <a:t> ;    </a:t>
+                </a:r>
+                <a14:m>
+                  <m:oMath xmlns:m="http://schemas.openxmlformats.org/officeDocument/2006/math">
+                    <m:sSubSup>
+                      <m:sSubSupPr>
+                        <m:ctrlPr>
+                          <a:rPr lang="en-GB" sz="1900" i="1" noProof="1" smtClean="0">
+                            <a:latin typeface="Cambria Math" panose="02040503050406030204" pitchFamily="18" charset="0"/>
+                            <a:ea typeface="Verdana" panose="020B0604030504040204" pitchFamily="34" charset="0"/>
+                          </a:rPr>
+                        </m:ctrlPr>
+                      </m:sSubSupPr>
+                      <m:e>
+                        <m:r>
+                          <a:rPr lang="en-GB" sz="1900" i="1" noProof="1" smtClean="0">
+                            <a:latin typeface="Cambria Math" panose="02040503050406030204" pitchFamily="18" charset="0"/>
+                            <a:ea typeface="Verdana" panose="020B0604030504040204" pitchFamily="34" charset="0"/>
+                          </a:rPr>
+                          <m:t> </m:t>
+                        </m:r>
+                        <m:r>
+                          <a:rPr lang="en-GB" sz="1900" i="1" noProof="1" smtClean="0">
+                            <a:latin typeface="Cambria Math" panose="02040503050406030204" pitchFamily="18" charset="0"/>
+                            <a:ea typeface="Verdana" panose="020B0604030504040204" pitchFamily="34" charset="0"/>
+                          </a:rPr>
+                          <m:t>𝑌</m:t>
+                        </m:r>
+                      </m:e>
+                      <m:sub>
+                        <m:r>
+                          <a:rPr lang="en-GB" sz="1900" i="1" noProof="1" smtClean="0">
+                            <a:latin typeface="Cambria Math" panose="02040503050406030204" pitchFamily="18" charset="0"/>
+                            <a:ea typeface="Verdana" panose="020B0604030504040204" pitchFamily="34" charset="0"/>
+                          </a:rPr>
+                          <m:t>𝑖</m:t>
+                        </m:r>
+                        <m:r>
+                          <a:rPr lang="en-GB" sz="1900" i="1" noProof="1" smtClean="0">
+                            <a:latin typeface="Cambria Math" panose="02040503050406030204" pitchFamily="18" charset="0"/>
+                            <a:ea typeface="Verdana" panose="020B0604030504040204" pitchFamily="34" charset="0"/>
+                          </a:rPr>
+                          <m:t>,</m:t>
+                        </m:r>
+                        <m:r>
+                          <a:rPr lang="en-GB" sz="1900" i="1" noProof="1" smtClean="0">
+                            <a:latin typeface="Cambria Math" panose="02040503050406030204" pitchFamily="18" charset="0"/>
+                            <a:ea typeface="Verdana" panose="020B0604030504040204" pitchFamily="34" charset="0"/>
+                          </a:rPr>
+                          <m:t>𝑡</m:t>
+                        </m:r>
+                        <m:r>
+                          <a:rPr lang="en-GB" sz="1900" i="1" noProof="1" smtClean="0">
+                            <a:latin typeface="Cambria Math" panose="02040503050406030204" pitchFamily="18" charset="0"/>
+                            <a:ea typeface="Verdana" panose="020B0604030504040204" pitchFamily="34" charset="0"/>
+                          </a:rPr>
+                          <m:t>−1</m:t>
+                        </m:r>
+                      </m:sub>
+                      <m:sup>
+                        <m:r>
+                          <a:rPr lang="en-GB" sz="1900" i="1" noProof="1" smtClean="0">
+                            <a:latin typeface="Cambria Math" panose="02040503050406030204" pitchFamily="18" charset="0"/>
+                            <a:ea typeface="Verdana" panose="020B0604030504040204" pitchFamily="34" charset="0"/>
+                          </a:rPr>
+                          <m:t>𝑤</m:t>
+                        </m:r>
+                      </m:sup>
+                    </m:sSubSup>
+                    <m:sSub>
+                      <m:sSubPr>
+                        <m:ctrlPr>
+                          <a:rPr lang="en-GB" sz="1900" b="0" i="1" noProof="1" smtClean="0">
+                            <a:latin typeface="Cambria Math" panose="02040503050406030204" pitchFamily="18" charset="0"/>
+                            <a:ea typeface="Verdana" panose="020B0604030504040204" pitchFamily="34" charset="0"/>
+                          </a:rPr>
+                        </m:ctrlPr>
+                      </m:sSubPr>
+                      <m:e>
+                        <m:r>
+                          <a:rPr lang="en-GB" sz="1900" b="0" i="1" noProof="1" smtClean="0">
+                            <a:latin typeface="Cambria Math" panose="02040503050406030204" pitchFamily="18" charset="0"/>
+                            <a:ea typeface="Verdana" panose="020B0604030504040204" pitchFamily="34" charset="0"/>
+                          </a:rPr>
+                          <m:t>=</m:t>
+                        </m:r>
+                        <m:r>
+                          <a:rPr lang="en-GB" sz="1900" b="0" i="1" noProof="1" smtClean="0">
+                            <a:latin typeface="Cambria Math" panose="02040503050406030204" pitchFamily="18" charset="0"/>
+                            <a:ea typeface="Verdana" panose="020B0604030504040204" pitchFamily="34" charset="0"/>
+                          </a:rPr>
+                          <m:t>𝑌</m:t>
+                        </m:r>
+                      </m:e>
+                      <m:sub>
+                        <m:r>
+                          <a:rPr lang="en-GB" sz="1900" i="1" noProof="1" smtClean="0">
+                            <a:latin typeface="Cambria Math" panose="02040503050406030204" pitchFamily="18" charset="0"/>
+                            <a:ea typeface="Verdana" panose="020B0604030504040204" pitchFamily="34" charset="0"/>
+                          </a:rPr>
+                          <m:t>𝑖</m:t>
+                        </m:r>
+                        <m:r>
+                          <a:rPr lang="en-GB" sz="1900" i="1" noProof="1" smtClean="0">
+                            <a:latin typeface="Cambria Math" panose="02040503050406030204" pitchFamily="18" charset="0"/>
+                            <a:ea typeface="Verdana" panose="020B0604030504040204" pitchFamily="34" charset="0"/>
+                          </a:rPr>
+                          <m:t>,</m:t>
+                        </m:r>
+                        <m:r>
+                          <a:rPr lang="en-GB" sz="1900" i="1" noProof="1" smtClean="0">
+                            <a:latin typeface="Cambria Math" panose="02040503050406030204" pitchFamily="18" charset="0"/>
+                            <a:ea typeface="Verdana" panose="020B0604030504040204" pitchFamily="34" charset="0"/>
+                          </a:rPr>
+                          <m:t>𝑡</m:t>
+                        </m:r>
+                        <m:r>
+                          <a:rPr lang="en-GB" sz="1900" i="1" noProof="1" smtClean="0">
+                            <a:latin typeface="Cambria Math" panose="02040503050406030204" pitchFamily="18" charset="0"/>
+                            <a:ea typeface="Verdana" panose="020B0604030504040204" pitchFamily="34" charset="0"/>
+                          </a:rPr>
+                          <m:t>−1</m:t>
+                        </m:r>
+                      </m:sub>
+                    </m:sSub>
+                    <m:r>
+                      <a:rPr lang="en-GB" sz="1900" i="1" noProof="1" smtClean="0">
+                        <a:latin typeface="Cambria Math" panose="02040503050406030204" pitchFamily="18" charset="0"/>
+                        <a:ea typeface="Verdana" panose="020B0604030504040204" pitchFamily="34" charset="0"/>
+                      </a:rPr>
+                      <m:t>−</m:t>
+                    </m:r>
+                    <m:acc>
+                      <m:accPr>
+                        <m:chr m:val="̅"/>
+                        <m:ctrlPr>
+                          <a:rPr lang="en-GB" sz="1900" i="1" noProof="1" smtClean="0">
+                            <a:latin typeface="Cambria Math" panose="02040503050406030204" pitchFamily="18" charset="0"/>
+                            <a:ea typeface="Verdana" panose="020B0604030504040204" pitchFamily="34" charset="0"/>
+                          </a:rPr>
+                        </m:ctrlPr>
+                      </m:accPr>
+                      <m:e>
+                        <m:sSub>
+                          <m:sSubPr>
+                            <m:ctrlPr>
+                              <a:rPr lang="en-GB" sz="1900" i="1" noProof="1" smtClean="0">
+                                <a:latin typeface="Cambria Math" panose="02040503050406030204" pitchFamily="18" charset="0"/>
+                                <a:ea typeface="Verdana" panose="020B0604030504040204" pitchFamily="34" charset="0"/>
+                              </a:rPr>
+                            </m:ctrlPr>
+                          </m:sSubPr>
+                          <m:e>
+                            <m:r>
+                              <a:rPr lang="en-GB" sz="1900" i="1" noProof="1" smtClean="0">
+                                <a:latin typeface="Cambria Math" panose="02040503050406030204" pitchFamily="18" charset="0"/>
+                                <a:ea typeface="Verdana" panose="020B0604030504040204" pitchFamily="34" charset="0"/>
+                              </a:rPr>
+                              <m:t>𝑌</m:t>
+                            </m:r>
+                          </m:e>
+                          <m:sub>
+                            <m:r>
+                              <a:rPr lang="en-GB" sz="1900" i="1" noProof="1" smtClean="0">
+                                <a:latin typeface="Cambria Math" panose="02040503050406030204" pitchFamily="18" charset="0"/>
+                                <a:ea typeface="Verdana" panose="020B0604030504040204" pitchFamily="34" charset="0"/>
+                              </a:rPr>
+                              <m:t>𝑖</m:t>
+                            </m:r>
+                          </m:sub>
+                        </m:sSub>
+                      </m:e>
+                    </m:acc>
+                  </m:oMath>
+                </a14:m>
+                <a:r>
+                  <a:rPr lang="en-GB" sz="1900" noProof="1"/>
+                  <a:t> ;   </a:t>
+                </a:r>
+                <a14:m>
+                  <m:oMath xmlns:m="http://schemas.openxmlformats.org/officeDocument/2006/math">
+                    <m:sSubSup>
+                      <m:sSubSupPr>
+                        <m:ctrlPr>
+                          <a:rPr lang="en-GB" sz="1900" i="1" noProof="1" smtClean="0">
+                            <a:latin typeface="Cambria Math" panose="02040503050406030204" pitchFamily="18" charset="0"/>
+                            <a:ea typeface="Verdana" panose="020B0604030504040204" pitchFamily="34" charset="0"/>
+                          </a:rPr>
+                        </m:ctrlPr>
+                      </m:sSubSupPr>
+                      <m:e>
+                        <m:r>
+                          <a:rPr lang="en-GB" sz="1900" i="1" noProof="1" smtClean="0">
+                            <a:latin typeface="Cambria Math" panose="02040503050406030204" pitchFamily="18" charset="0"/>
+                            <a:ea typeface="Verdana" panose="020B0604030504040204" pitchFamily="34" charset="0"/>
+                          </a:rPr>
+                          <m:t>  </m:t>
+                        </m:r>
+                        <m:r>
+                          <a:rPr lang="en-GB" sz="1900" b="0" i="1" noProof="1" smtClean="0">
+                            <a:latin typeface="Cambria Math" panose="02040503050406030204" pitchFamily="18" charset="0"/>
+                            <a:ea typeface="Verdana" panose="020B0604030504040204" pitchFamily="34" charset="0"/>
+                          </a:rPr>
+                          <m:t>𝑌</m:t>
+                        </m:r>
+                      </m:e>
+                      <m:sub>
+                        <m:r>
+                          <a:rPr lang="en-GB" sz="1900" i="1" noProof="1" smtClean="0">
+                            <a:latin typeface="Cambria Math" panose="02040503050406030204" pitchFamily="18" charset="0"/>
+                            <a:ea typeface="Verdana" panose="020B0604030504040204" pitchFamily="34" charset="0"/>
+                          </a:rPr>
+                          <m:t>𝑖</m:t>
+                        </m:r>
+                      </m:sub>
+                      <m:sup>
+                        <m:r>
+                          <a:rPr lang="en-GB" sz="1900" i="1" noProof="1" smtClean="0">
+                            <a:latin typeface="Cambria Math" panose="02040503050406030204" pitchFamily="18" charset="0"/>
+                            <a:ea typeface="Verdana" panose="020B0604030504040204" pitchFamily="34" charset="0"/>
+                          </a:rPr>
+                          <m:t>𝐵</m:t>
+                        </m:r>
+                      </m:sup>
+                    </m:sSubSup>
+                    <m:r>
+                      <a:rPr lang="en-GB" sz="1900" i="1" noProof="1" smtClean="0">
+                        <a:latin typeface="Cambria Math" panose="02040503050406030204" pitchFamily="18" charset="0"/>
+                        <a:ea typeface="Verdana" panose="020B0604030504040204" pitchFamily="34" charset="0"/>
+                      </a:rPr>
+                      <m:t>=</m:t>
+                    </m:r>
+                  </m:oMath>
+                </a14:m>
+                <a:r>
+                  <a:rPr lang="en-GB" sz="1900" noProof="1">
+                    <a:ea typeface="Verdana" panose="020B0604030504040204" pitchFamily="34" charset="0"/>
+                  </a:rPr>
+                  <a:t> </a:t>
+                </a:r>
+                <a14:m>
+                  <m:oMath xmlns:m="http://schemas.openxmlformats.org/officeDocument/2006/math">
+                    <m:acc>
+                      <m:accPr>
+                        <m:chr m:val="̅"/>
+                        <m:ctrlPr>
+                          <a:rPr lang="en-GB" sz="1900" i="1" noProof="1" smtClean="0">
+                            <a:latin typeface="Cambria Math" panose="02040503050406030204" pitchFamily="18" charset="0"/>
+                            <a:ea typeface="Verdana" panose="020B0604030504040204" pitchFamily="34" charset="0"/>
+                          </a:rPr>
+                        </m:ctrlPr>
+                      </m:accPr>
+                      <m:e>
+                        <m:sSub>
+                          <m:sSubPr>
+                            <m:ctrlPr>
+                              <a:rPr lang="en-GB" sz="1900" b="0" i="1" noProof="1" smtClean="0">
+                                <a:latin typeface="Cambria Math" panose="02040503050406030204" pitchFamily="18" charset="0"/>
+                                <a:ea typeface="Verdana" panose="020B0604030504040204" pitchFamily="34" charset="0"/>
+                              </a:rPr>
+                            </m:ctrlPr>
+                          </m:sSubPr>
+                          <m:e>
+                            <m:r>
+                              <a:rPr lang="en-GB" sz="1900" b="0" i="1" noProof="1" smtClean="0">
+                                <a:latin typeface="Cambria Math" panose="02040503050406030204" pitchFamily="18" charset="0"/>
+                                <a:ea typeface="Verdana" panose="020B0604030504040204" pitchFamily="34" charset="0"/>
+                              </a:rPr>
+                              <m:t>𝑌</m:t>
+                            </m:r>
+                          </m:e>
+                          <m:sub>
+                            <m:r>
+                              <a:rPr lang="en-GB" sz="1900" i="1" noProof="1" smtClean="0">
+                                <a:latin typeface="Cambria Math" panose="02040503050406030204" pitchFamily="18" charset="0"/>
+                                <a:ea typeface="Verdana" panose="020B0604030504040204" pitchFamily="34" charset="0"/>
+                              </a:rPr>
+                              <m:t>𝑖</m:t>
+                            </m:r>
+                          </m:sub>
+                        </m:sSub>
+                      </m:e>
+                    </m:acc>
+                  </m:oMath>
+                </a14:m>
+                <a:endParaRPr lang="en-GB" sz="1900" noProof="1"/>
+              </a:p>
+              <a:p>
+                <a:pPr>
+                  <a:lnSpc>
+                    <a:spcPct val="120000"/>
+                  </a:lnSpc>
+                  <a:spcAft>
+                    <a:spcPts val="1200"/>
+                  </a:spcAft>
+                </a:pPr>
+                <a:r>
+                  <a:rPr lang="en-GB" sz="1800" dirty="0"/>
+                  <a:t>		</a:t>
+                </a:r>
+                <a:endParaRPr lang="en-GB" sz="1800" dirty="0">
+                  <a:solidFill>
+                    <a:schemeClr val="tx1"/>
+                  </a:solidFill>
+                </a:endParaRPr>
+              </a:p>
+              <a:p>
+                <a:pPr>
+                  <a:lnSpc>
+                    <a:spcPct val="120000"/>
+                  </a:lnSpc>
+                  <a:spcAft>
+                    <a:spcPts val="1200"/>
+                  </a:spcAft>
+                </a:pPr>
+                <a:endParaRPr lang="en-GB" sz="1800" dirty="0">
+                  <a:solidFill>
+                    <a:schemeClr val="tx1"/>
+                  </a:solidFill>
+                </a:endParaRPr>
+              </a:p>
+            </p:txBody>
+          </p:sp>
+        </mc:Choice>
+        <mc:Fallback>
+          <p:sp>
+            <p:nvSpPr>
+              <p:cNvPr id="2" name="Content Placeholder 2">
+                <a:extLst>
+                  <a:ext uri="{FF2B5EF4-FFF2-40B4-BE49-F238E27FC236}">
+                    <a16:creationId xmlns:a16="http://schemas.microsoft.com/office/drawing/2014/main" id="{4E2FFC46-D6F5-41BF-DECB-9FA98C0F56DD}"/>
+                  </a:ext>
+                </a:extLst>
+              </p:cNvPr>
+              <p:cNvSpPr>
+                <a:spLocks noGrp="1" noRot="1" noChangeAspect="1" noMove="1" noResize="1" noEditPoints="1" noAdjustHandles="1" noChangeArrowheads="1" noChangeShapeType="1" noTextEdit="1"/>
+              </p:cNvSpPr>
+              <p:nvPr>
+                <p:ph idx="1"/>
+              </p:nvPr>
+            </p:nvSpPr>
+            <p:spPr>
+              <a:xfrm>
+                <a:off x="310896" y="877824"/>
+                <a:ext cx="8723376" cy="6364224"/>
+              </a:xfrm>
+              <a:blipFill>
+                <a:blip r:embed="rId3"/>
+                <a:stretch>
+                  <a:fillRect l="-1747" t="-1245"/>
+                </a:stretch>
+              </a:blipFill>
+            </p:spPr>
+            <p:txBody>
+              <a:bodyPr/>
+              <a:lstStyle/>
+              <a:p>
+                <a:r>
+                  <a:rPr lang="en-US">
+                    <a:noFill/>
+                  </a:rPr>
+                  <a:t> </a:t>
+                </a:r>
+              </a:p>
+            </p:txBody>
+          </p:sp>
+        </mc:Fallback>
+      </mc:AlternateContent>
+    </p:spTree>
+    <p:extLst>
+      <p:ext uri="{BB962C8B-B14F-4D97-AF65-F5344CB8AC3E}">
+        <p14:creationId xmlns:p14="http://schemas.microsoft.com/office/powerpoint/2010/main" val="3745319895"/>
+      </p:ext>
+    </p:extLst>
+  </p:cSld>
+  <p:clrMapOvr>
+    <a:masterClrMapping/>
+  </p:clrMapOvr>
+</p:sld>
+</file>
+
+<file path=ppt/slides/slide11.xml><?xml version="1.0" encoding="utf-8"?>
+<p:sld xmlns:a="http://schemas.openxmlformats.org/drawingml/2006/main" xmlns:r="http://schemas.openxmlformats.org/officeDocument/2006/relationships" xmlns:p="http://schemas.openxmlformats.org/presentationml/2006/main">
+  <p:cSld>
+    <p:spTree>
+      <p:nvGrpSpPr>
+        <p:cNvPr id="1" name="">
+          <a:extLst>
+            <a:ext uri="{FF2B5EF4-FFF2-40B4-BE49-F238E27FC236}">
+              <a16:creationId xmlns:a16="http://schemas.microsoft.com/office/drawing/2014/main" id="{A84EA225-5025-E775-0BD3-776D66DBA8A8}"/>
+            </a:ext>
+          </a:extLst>
+        </p:cNvPr>
+        <p:cNvGrpSpPr/>
+        <p:nvPr/>
+      </p:nvGrpSpPr>
+      <p:grpSpPr>
+        <a:xfrm>
+          <a:off x="0" y="0"/>
+          <a:ext cx="0" cy="0"/>
+          <a:chOff x="0" y="0"/>
+          <a:chExt cx="0" cy="0"/>
+        </a:xfrm>
+      </p:grpSpPr>
+      <p:sp>
+        <p:nvSpPr>
+          <p:cNvPr id="9" name="Titel 1">
+            <a:extLst>
+              <a:ext uri="{FF2B5EF4-FFF2-40B4-BE49-F238E27FC236}">
+                <a16:creationId xmlns:a16="http://schemas.microsoft.com/office/drawing/2014/main" id="{E303A361-90E1-35B2-AE64-2B40EE87BE60}"/>
+              </a:ext>
+            </a:extLst>
+          </p:cNvPr>
+          <p:cNvSpPr>
+            <a:spLocks noGrp="1"/>
+          </p:cNvSpPr>
+          <p:nvPr>
+            <p:ph type="title"/>
+          </p:nvPr>
+        </p:nvSpPr>
+        <p:spPr>
+          <a:xfrm>
+            <a:off x="0" y="0"/>
+            <a:ext cx="9144000" cy="566928"/>
+          </a:xfrm>
+          <a:solidFill>
+            <a:srgbClr val="44287F"/>
+          </a:solidFill>
+        </p:spPr>
+        <p:txBody>
+          <a:bodyPr anchor="ctr"/>
+          <a:lstStyle/>
+          <a:p>
+            <a:pPr algn="ctr">
+              <a:lnSpc>
+                <a:spcPct val="100000"/>
+              </a:lnSpc>
+            </a:pPr>
+            <a:r>
+              <a:rPr lang="en-US" sz="2400" noProof="1">
+                <a:solidFill>
+                  <a:schemeClr val="bg1"/>
+                </a:solidFill>
+              </a:rPr>
+              <a:t>Results CRE probit models</a:t>
+            </a:r>
+          </a:p>
+        </p:txBody>
+      </p:sp>
+      <p:sp>
+        <p:nvSpPr>
+          <p:cNvPr id="2" name="Content Placeholder 2">
+            <a:extLst>
+              <a:ext uri="{FF2B5EF4-FFF2-40B4-BE49-F238E27FC236}">
+                <a16:creationId xmlns:a16="http://schemas.microsoft.com/office/drawing/2014/main" id="{A3001772-3E0A-65B5-1F29-4C5CF7BC0C4D}"/>
+              </a:ext>
+            </a:extLst>
+          </p:cNvPr>
+          <p:cNvSpPr>
+            <a:spLocks noGrp="1"/>
+          </p:cNvSpPr>
+          <p:nvPr>
+            <p:ph idx="1"/>
+          </p:nvPr>
+        </p:nvSpPr>
+        <p:spPr>
+          <a:xfrm>
+            <a:off x="105536" y="1016441"/>
+            <a:ext cx="8756744" cy="5679439"/>
+          </a:xfrm>
+        </p:spPr>
+        <p:txBody>
+          <a:bodyPr>
+            <a:normAutofit/>
+          </a:bodyPr>
+          <a:lstStyle/>
+          <a:p>
+            <a:pPr marL="285750" indent="-285750">
+              <a:lnSpc>
+                <a:spcPct val="120000"/>
+              </a:lnSpc>
+              <a:spcAft>
+                <a:spcPts val="1200"/>
+              </a:spcAft>
+              <a:buFont typeface="Arial" panose="020B0604020202020204" pitchFamily="34" charset="0"/>
+              <a:buChar char="•"/>
+            </a:pPr>
+            <a:r>
+              <a:rPr lang="en-US" sz="1800" noProof="1">
+                <a:latin typeface="Verdana" panose="020B0604030504040204" pitchFamily="34" charset="0"/>
+                <a:ea typeface="Verdana" panose="020B0604030504040204" pitchFamily="34" charset="0"/>
+              </a:rPr>
+              <a:t>ICT/AI-related investment </a:t>
+            </a:r>
+            <a:r>
+              <a:rPr lang="en-US" sz="1800" noProof="1">
+                <a:latin typeface="Arial" panose="020B0604020202020204" pitchFamily="34" charset="0"/>
+                <a:ea typeface="Verdana" panose="020B0604030504040204" pitchFamily="34" charset="0"/>
+                <a:cs typeface="Arial" panose="020B0604020202020204" pitchFamily="34" charset="0"/>
+              </a:rPr>
+              <a:t>→</a:t>
+            </a:r>
+            <a:r>
+              <a:rPr lang="en-US" sz="1800" noProof="1">
+                <a:latin typeface="Verdana" panose="020B0604030504040204" pitchFamily="34" charset="0"/>
+                <a:ea typeface="Verdana" panose="020B0604030504040204" pitchFamily="34" charset="0"/>
+              </a:rPr>
+              <a:t> positive average effect on growth surprises</a:t>
+            </a:r>
+          </a:p>
+          <a:p>
+            <a:pPr marL="285750" indent="-285750">
+              <a:lnSpc>
+                <a:spcPct val="120000"/>
+              </a:lnSpc>
+              <a:spcAft>
+                <a:spcPts val="1200"/>
+              </a:spcAft>
+              <a:buFont typeface="Arial" panose="020B0604020202020204" pitchFamily="34" charset="0"/>
+              <a:buChar char="•"/>
+            </a:pPr>
+            <a:r>
+              <a:rPr lang="en-US" sz="1800" noProof="1">
+                <a:latin typeface="Verdana" panose="020B0604030504040204" pitchFamily="34" charset="0"/>
+                <a:ea typeface="Verdana" panose="020B0604030504040204" pitchFamily="34" charset="0"/>
+              </a:rPr>
+              <a:t>ICT/AI-related trade exposure </a:t>
+            </a:r>
+            <a:r>
+              <a:rPr lang="en-US" sz="1800" noProof="1">
+                <a:latin typeface="Arial" panose="020B0604020202020204" pitchFamily="34" charset="0"/>
+                <a:ea typeface="Verdana" panose="020B0604030504040204" pitchFamily="34" charset="0"/>
+                <a:cs typeface="Arial" panose="020B0604020202020204" pitchFamily="34" charset="0"/>
+              </a:rPr>
+              <a:t>→</a:t>
+            </a:r>
+            <a:r>
+              <a:rPr lang="en-US" sz="1800" noProof="1">
+                <a:latin typeface="Verdana" panose="020B0604030504040204" pitchFamily="34" charset="0"/>
+                <a:ea typeface="Verdana" panose="020B0604030504040204" pitchFamily="34" charset="0"/>
+              </a:rPr>
+              <a:t> additional effect on positive growth surprise in shock years, confirming the unconditional tests</a:t>
+            </a:r>
+          </a:p>
+          <a:p>
+            <a:pPr>
+              <a:lnSpc>
+                <a:spcPct val="120000"/>
+              </a:lnSpc>
+              <a:spcAft>
+                <a:spcPts val="1200"/>
+              </a:spcAft>
+            </a:pPr>
+            <a:endParaRPr lang="nl-NL" sz="1600" dirty="0">
+              <a:solidFill>
+                <a:schemeClr val="accent1">
+                  <a:lumMod val="50000"/>
+                </a:schemeClr>
+              </a:solidFill>
+            </a:endParaRPr>
+          </a:p>
+        </p:txBody>
+      </p:sp>
+      <mc:AlternateContent xmlns:mc="http://schemas.openxmlformats.org/markup-compatibility/2006">
+        <mc:Choice xmlns:a14="http://schemas.microsoft.com/office/drawing/2010/main" Requires="a14">
+          <p:sp>
+            <p:nvSpPr>
+              <p:cNvPr id="6" name="Tekstvak 3">
+                <a:extLst>
+                  <a:ext uri="{FF2B5EF4-FFF2-40B4-BE49-F238E27FC236}">
+                    <a16:creationId xmlns:a16="http://schemas.microsoft.com/office/drawing/2014/main" id="{A7CF6141-D8EB-7171-49B8-DB2C33D6D240}"/>
+                  </a:ext>
+                </a:extLst>
+              </p:cNvPr>
+              <p:cNvSpPr txBox="1"/>
+              <p:nvPr/>
+            </p:nvSpPr>
+            <p:spPr>
+              <a:xfrm>
+                <a:off x="197589" y="4744958"/>
+                <a:ext cx="8664691" cy="1453924"/>
+              </a:xfrm>
+              <a:prstGeom prst="rect">
+                <a:avLst/>
+              </a:prstGeom>
+              <a:noFill/>
+            </p:spPr>
+            <p:txBody>
+              <a:bodyPr wrap="square" rtlCol="0">
+                <a:spAutoFit/>
+              </a:bodyPr>
+              <a:lstStyle/>
+              <a:p>
+                <a:pPr algn="just">
+                  <a:defRPr/>
+                </a:pPr>
+                <a:r>
+                  <a:rPr lang="nl-NL" sz="1100" noProof="1">
+                    <a:solidFill>
+                      <a:srgbClr val="002060"/>
+                    </a:solidFill>
+                  </a:rPr>
+                  <a:t>Average marginal effect (AME) of 1 stdev change of ICT/AI variable. ***, **, * indicate 1%, 5%, 10% significance. Standard errors based on country-clustered sandwich covariance matrix (robust to heteroscedasticity and within country dependence, so countries (clusters) are assumed independent of each other). </a:t>
+                </a:r>
+                <a:r>
+                  <a:rPr lang="en-US" sz="1100" noProof="1">
+                    <a:solidFill>
+                      <a:srgbClr val="002060"/>
+                    </a:solidFill>
+                  </a:rPr>
+                  <a:t>Explanatory variables are standardised and included one period lagged (to address endogeneity concerns and numerator effects in the ratios based on GDP as numerator). In each equation, one of the AI/ICT-related variables is included in </a:t>
+                </a:r>
+                <a14:m>
+                  <m:oMath xmlns:m="http://schemas.openxmlformats.org/officeDocument/2006/math">
+                    <m:sSub>
+                      <m:sSubPr>
+                        <m:ctrlPr>
+                          <a:rPr lang="en-US" sz="1100" i="1" noProof="1">
+                            <a:latin typeface="Cambria Math" panose="02040503050406030204" pitchFamily="18" charset="0"/>
+                            <a:ea typeface="Verdana" panose="020B0604030504040204" pitchFamily="34" charset="0"/>
+                          </a:rPr>
+                        </m:ctrlPr>
+                      </m:sSubPr>
+                      <m:e>
+                        <m:r>
+                          <a:rPr lang="en-US" sz="1100" i="1" noProof="1">
+                            <a:latin typeface="Cambria Math" panose="02040503050406030204" pitchFamily="18" charset="0"/>
+                            <a:ea typeface="Verdana" panose="020B0604030504040204" pitchFamily="34" charset="0"/>
+                          </a:rPr>
+                          <m:t>𝑋</m:t>
+                        </m:r>
+                      </m:e>
+                      <m:sub>
+                        <m:r>
+                          <a:rPr lang="en-US" sz="1100" i="1" noProof="1">
+                            <a:latin typeface="Cambria Math" panose="02040503050406030204" pitchFamily="18" charset="0"/>
+                            <a:ea typeface="Verdana" panose="020B0604030504040204" pitchFamily="34" charset="0"/>
+                          </a:rPr>
+                          <m:t>𝑖</m:t>
+                        </m:r>
+                        <m:r>
+                          <a:rPr lang="en-US" sz="1100" i="1" noProof="1">
+                            <a:latin typeface="Cambria Math" panose="02040503050406030204" pitchFamily="18" charset="0"/>
+                            <a:ea typeface="Verdana" panose="020B0604030504040204" pitchFamily="34" charset="0"/>
+                          </a:rPr>
+                          <m:t>,</m:t>
+                        </m:r>
+                        <m:r>
+                          <a:rPr lang="en-US" sz="1100" i="1" noProof="1">
+                            <a:latin typeface="Cambria Math" panose="02040503050406030204" pitchFamily="18" charset="0"/>
+                            <a:ea typeface="Verdana" panose="020B0604030504040204" pitchFamily="34" charset="0"/>
+                          </a:rPr>
+                          <m:t>𝑡</m:t>
+                        </m:r>
+                      </m:sub>
+                    </m:sSub>
+                    <m:r>
+                      <a:rPr lang="en-US" sz="1100" b="0" i="0" noProof="1" smtClean="0">
+                        <a:latin typeface="Cambria Math" panose="02040503050406030204" pitchFamily="18" charset="0"/>
+                        <a:ea typeface="Verdana" panose="020B0604030504040204" pitchFamily="34" charset="0"/>
+                      </a:rPr>
+                      <m:t>.</m:t>
+                    </m:r>
+                  </m:oMath>
+                </a14:m>
+                <a:r>
+                  <a:rPr lang="en-US" sz="1100" noProof="1">
+                    <a:solidFill>
+                      <a:srgbClr val="002060"/>
+                    </a:solidFill>
+                  </a:rPr>
+                  <a:t> As control variables are included i) state aid as ratio of GDP (contemporaneous value of state aid and one period lagged GDP, source </a:t>
+                </a:r>
+                <a:r>
+                  <a:rPr lang="en-US" sz="1100" noProof="1">
+                    <a:solidFill>
+                      <a:srgbClr val="002060"/>
+                    </a:solidFill>
+                    <a:hlinkClick r:id="rId3"/>
+                  </a:rPr>
+                  <a:t>Eurostat</a:t>
+                </a:r>
+                <a:r>
+                  <a:rPr lang="en-US" sz="1100" noProof="1">
+                    <a:solidFill>
+                      <a:srgbClr val="002060"/>
+                    </a:solidFill>
+                  </a:rPr>
+                  <a:t>); ii) trade openness (exports + imports over GDP, source Worldbank); iii) forecast-vintage controls, with a dummy for Autumn forecasts. a dummy for t+1 forecasts and for their interaction. </a:t>
+                </a:r>
+                <a:endParaRPr lang="nl-NL" sz="1100" noProof="1">
+                  <a:solidFill>
+                    <a:srgbClr val="002060"/>
+                  </a:solidFill>
+                </a:endParaRPr>
+              </a:p>
+            </p:txBody>
+          </p:sp>
+        </mc:Choice>
+        <mc:Fallback>
+          <p:sp>
+            <p:nvSpPr>
+              <p:cNvPr id="6" name="Tekstvak 3">
+                <a:extLst>
+                  <a:ext uri="{FF2B5EF4-FFF2-40B4-BE49-F238E27FC236}">
+                    <a16:creationId xmlns:a16="http://schemas.microsoft.com/office/drawing/2014/main" id="{A7CF6141-D8EB-7171-49B8-DB2C33D6D240}"/>
+                  </a:ext>
+                </a:extLst>
+              </p:cNvPr>
+              <p:cNvSpPr txBox="1">
+                <a:spLocks noRot="1" noChangeAspect="1" noMove="1" noResize="1" noEditPoints="1" noAdjustHandles="1" noChangeArrowheads="1" noChangeShapeType="1" noTextEdit="1"/>
+              </p:cNvSpPr>
+              <p:nvPr/>
+            </p:nvSpPr>
+            <p:spPr>
+              <a:xfrm>
+                <a:off x="197589" y="4744958"/>
+                <a:ext cx="8664691" cy="1453924"/>
+              </a:xfrm>
+              <a:prstGeom prst="rect">
+                <a:avLst/>
+              </a:prstGeom>
+              <a:blipFill>
+                <a:blip r:embed="rId4"/>
+                <a:stretch>
+                  <a:fillRect b="-1674"/>
+                </a:stretch>
+              </a:blipFill>
+            </p:spPr>
+            <p:txBody>
+              <a:bodyPr/>
+              <a:lstStyle/>
+              <a:p>
+                <a:r>
+                  <a:rPr lang="en-US">
+                    <a:noFill/>
+                  </a:rPr>
+                  <a:t> </a:t>
+                </a:r>
+              </a:p>
+            </p:txBody>
+          </p:sp>
+        </mc:Fallback>
+      </mc:AlternateContent>
+      <p:pic>
+        <p:nvPicPr>
+          <p:cNvPr id="5" name="Picture 4">
+            <a:extLst>
+              <a:ext uri="{FF2B5EF4-FFF2-40B4-BE49-F238E27FC236}">
+                <a16:creationId xmlns:a16="http://schemas.microsoft.com/office/drawing/2014/main" id="{1934FC63-0880-B9C7-3990-4C41059B0EE7}"/>
+              </a:ext>
+            </a:extLst>
+          </p:cNvPr>
+          <p:cNvPicPr>
+            <a:picLocks noChangeAspect="1"/>
+          </p:cNvPicPr>
+          <p:nvPr/>
+        </p:nvPicPr>
+        <p:blipFill>
+          <a:blip r:embed="rId5"/>
+          <a:stretch>
+            <a:fillRect/>
+          </a:stretch>
+        </p:blipFill>
+        <p:spPr>
+          <a:xfrm>
+            <a:off x="512826" y="2435733"/>
+            <a:ext cx="3077972" cy="2169414"/>
+          </a:xfrm>
+          <a:prstGeom prst="rect">
+            <a:avLst/>
+          </a:prstGeom>
+        </p:spPr>
+      </p:pic>
+      <p:pic>
+        <p:nvPicPr>
+          <p:cNvPr id="3" name="Picture 2">
+            <a:extLst>
+              <a:ext uri="{FF2B5EF4-FFF2-40B4-BE49-F238E27FC236}">
+                <a16:creationId xmlns:a16="http://schemas.microsoft.com/office/drawing/2014/main" id="{BA1AEE6B-C3CF-FAEB-FF58-BBA90707E8D1}"/>
+              </a:ext>
+            </a:extLst>
+          </p:cNvPr>
+          <p:cNvPicPr>
+            <a:picLocks noChangeAspect="1"/>
+          </p:cNvPicPr>
+          <p:nvPr/>
+        </p:nvPicPr>
+        <p:blipFill>
+          <a:blip r:embed="rId6"/>
+          <a:stretch>
+            <a:fillRect/>
+          </a:stretch>
+        </p:blipFill>
+        <p:spPr>
+          <a:xfrm>
+            <a:off x="3525121" y="2435733"/>
+            <a:ext cx="4858006" cy="2169415"/>
+          </a:xfrm>
+          <a:prstGeom prst="rect">
+            <a:avLst/>
+          </a:prstGeom>
+        </p:spPr>
+      </p:pic>
+    </p:spTree>
+    <p:extLst>
+      <p:ext uri="{BB962C8B-B14F-4D97-AF65-F5344CB8AC3E}">
+        <p14:creationId xmlns:p14="http://schemas.microsoft.com/office/powerpoint/2010/main" val="2790278619"/>
+      </p:ext>
+    </p:extLst>
+  </p:cSld>
+  <p:clrMapOvr>
+    <a:masterClrMapping/>
+  </p:clrMapOvr>
+</p:sld>
+</file>
+
+<file path=ppt/slides/slide12.xml><?xml version="1.0" encoding="utf-8"?>
+<p:sld xmlns:a="http://schemas.openxmlformats.org/drawingml/2006/main" xmlns:r="http://schemas.openxmlformats.org/officeDocument/2006/relationships" xmlns:p="http://schemas.openxmlformats.org/presentationml/2006/main">
+  <p:cSld>
+    <p:spTree>
+      <p:nvGrpSpPr>
+        <p:cNvPr id="1" name="">
+          <a:extLst>
+            <a:ext uri="{FF2B5EF4-FFF2-40B4-BE49-F238E27FC236}">
               <a16:creationId xmlns:a16="http://schemas.microsoft.com/office/drawing/2014/main" id="{385CD0D6-1CFA-E426-08B0-AF5055AC2BF0}"/>
             </a:ext>
           </a:extLst>
@@ -8153,7 +11992,7 @@
 </p:sld>
 </file>
 
-<file path=ppt/slides/slide11.xml><?xml version="1.0" encoding="utf-8"?>
+<file path=ppt/slides/slide13.xml><?xml version="1.0" encoding="utf-8"?>
 <p:sld xmlns:a="http://schemas.openxmlformats.org/drawingml/2006/main" xmlns:r="http://schemas.openxmlformats.org/officeDocument/2006/relationships" xmlns:p="http://schemas.openxmlformats.org/presentationml/2006/main">
   <p:cSld>
     <p:spTree>
@@ -8234,7 +12073,7 @@
 </p:sld>
 </file>
 
-<file path=ppt/slides/slide12.xml><?xml version="1.0" encoding="utf-8"?>
+<file path=ppt/slides/slide14.xml><?xml version="1.0" encoding="utf-8"?>
 <p:sld xmlns:a="http://schemas.openxmlformats.org/drawingml/2006/main" xmlns:r="http://schemas.openxmlformats.org/officeDocument/2006/relationships" xmlns:p="http://schemas.openxmlformats.org/presentationml/2006/main">
   <p:cSld>
     <p:spTree>
@@ -8512,7 +12351,7 @@
 </p:sld>
 </file>
 
-<file path=ppt/slides/slide13.xml><?xml version="1.0" encoding="utf-8"?>
+<file path=ppt/slides/slide15.xml><?xml version="1.0" encoding="utf-8"?>
 <p:sld xmlns:a="http://schemas.openxmlformats.org/drawingml/2006/main" xmlns:r="http://schemas.openxmlformats.org/officeDocument/2006/relationships" xmlns:p="http://schemas.openxmlformats.org/presentationml/2006/main">
   <p:cSld>
     <p:spTree>
@@ -9244,7 +13083,7 @@
 </p:sld>
 </file>
 
-<file path=ppt/slides/slide14.xml><?xml version="1.0" encoding="utf-8"?>
+<file path=ppt/slides/slide16.xml><?xml version="1.0" encoding="utf-8"?>
 <p:sld xmlns:a="http://schemas.openxmlformats.org/drawingml/2006/main" xmlns:r="http://schemas.openxmlformats.org/officeDocument/2006/relationships" xmlns:p="http://schemas.openxmlformats.org/presentationml/2006/main">
   <p:cSld>
     <p:spTree>
@@ -9855,7 +13694,7 @@
 </p:sld>
 </file>
 
-<file path=ppt/slides/slide15.xml><?xml version="1.0" encoding="utf-8"?>
+<file path=ppt/slides/slide17.xml><?xml version="1.0" encoding="utf-8"?>
 <p:sld xmlns:a="http://schemas.openxmlformats.org/drawingml/2006/main" xmlns:r="http://schemas.openxmlformats.org/officeDocument/2006/relationships" xmlns:p="http://schemas.openxmlformats.org/presentationml/2006/main">
   <p:cSld>
     <p:spTree>
@@ -9970,26 +13809,6 @@
               <a:latin typeface="Verdana" panose="020B0604030504040204" pitchFamily="34" charset="0"/>
               <a:ea typeface="Verdana" panose="020B0604030504040204" pitchFamily="34" charset="0"/>
             </a:endParaRPr>
-          </a:p>
-          <a:p>
-            <a:pPr marL="342900" indent="-342900">
-              <a:lnSpc>
-                <a:spcPct val="120000"/>
-              </a:lnSpc>
-              <a:spcAft>
-                <a:spcPts val="1200"/>
-              </a:spcAft>
-              <a:buFont typeface="Arial" panose="020B0604020202020204" pitchFamily="34" charset="0"/>
-              <a:buChar char="•"/>
-            </a:pPr>
-            <a:r>
-              <a:rPr lang="nl-NL" sz="2000" noProof="1">
-                <a:latin typeface="Arial" panose="020B0604020202020204" pitchFamily="34" charset="0"/>
-                <a:ea typeface="Verdana" panose="020B0604030504040204" pitchFamily="34" charset="0"/>
-                <a:cs typeface="Arial" panose="020B0604020202020204" pitchFamily="34" charset="0"/>
-              </a:rPr>
-              <a:t>Panel logit regressions → similar results</a:t>
-            </a:r>
           </a:p>
           <a:p>
             <a:pPr marL="342900" indent="-342900">
@@ -10858,7 +14677,7 @@
                 <a:latin typeface="Verdana" panose="020B0604030504040204" pitchFamily="34" charset="0"/>
                 <a:ea typeface="Verdana" panose="020B0604030504040204" pitchFamily="34" charset="0"/>
               </a:rPr>
-              <a:t>Panel probit regressions</a:t>
+              <a:t>Panel regression models (linear and non-linear)</a:t>
             </a:r>
           </a:p>
           <a:p>
@@ -12349,13 +16168,13 @@
                   <a:schemeClr val="bg1"/>
                 </a:solidFill>
               </a:rPr>
-              <a:t>Probit models</a:t>
+              <a:t>Linear panel models (LPM)</a:t>
             </a:r>
           </a:p>
         </p:txBody>
       </p:sp>
-      <mc:AlternateContent xmlns:mc="http://schemas.openxmlformats.org/markup-compatibility/2006" xmlns:a14="http://schemas.microsoft.com/office/drawing/2010/main">
-        <mc:Choice Requires="a14">
+      <mc:AlternateContent xmlns:mc="http://schemas.openxmlformats.org/markup-compatibility/2006">
+        <mc:Choice xmlns:a14="http://schemas.microsoft.com/office/drawing/2010/main" Requires="a14">
           <p:sp>
             <p:nvSpPr>
               <p:cNvPr id="2" name="Content Placeholder 2">
@@ -12374,13 +16193,13 @@
             </p:nvSpPr>
             <p:spPr>
               <a:xfrm>
-                <a:off x="420624" y="770798"/>
-                <a:ext cx="8505051" cy="6087202"/>
+                <a:off x="347472" y="935390"/>
+                <a:ext cx="8723376" cy="6087202"/>
               </a:xfrm>
             </p:spPr>
             <p:txBody>
               <a:bodyPr>
-                <a:normAutofit/>
+                <a:normAutofit lnSpcReduction="10000"/>
               </a:bodyPr>
               <a:lstStyle/>
               <a:p>
@@ -12393,7 +16212,7 @@
                   </a:spcAft>
                 </a:pPr>
                 <a:r>
-                  <a:rPr lang="en-US" sz="2000" noProof="1">
+                  <a:rPr lang="en-GB" sz="2000" noProof="1">
                     <a:latin typeface="Verdana" panose="020B0604030504040204" pitchFamily="34" charset="0"/>
                     <a:ea typeface="Verdana" panose="020B0604030504040204" pitchFamily="34" charset="0"/>
                   </a:rPr>
@@ -12402,7 +16221,7 @@
                 <a14:m>
                   <m:oMath xmlns:m="http://schemas.openxmlformats.org/officeDocument/2006/math">
                     <m:r>
-                      <a:rPr lang="en-US" sz="2000" i="1" noProof="1">
+                      <a:rPr lang="en-GB" sz="2000" i="1" noProof="1" dirty="0" smtClean="0">
                         <a:latin typeface="Cambria Math" panose="02040503050406030204" pitchFamily="18" charset="0"/>
                         <a:ea typeface="Cambria Math" panose="02040503050406030204" pitchFamily="18" charset="0"/>
                       </a:rPr>
@@ -12411,7 +16230,7 @@
                   </m:oMath>
                 </a14:m>
                 <a:r>
-                  <a:rPr lang="en-US" sz="2000" noProof="1">
+                  <a:rPr lang="en-GB" sz="2000" noProof="1">
                     <a:latin typeface="Verdana" panose="020B0604030504040204" pitchFamily="34" charset="0"/>
                     <a:ea typeface="Verdana" panose="020B0604030504040204" pitchFamily="34" charset="0"/>
                   </a:rPr>
@@ -12428,7 +16247,7 @@
                   </a:spcAft>
                 </a:pPr>
                 <a:r>
-                  <a:rPr lang="en-US" sz="1800" noProof="1">
+                  <a:rPr lang="en-GB" sz="1800" noProof="1">
                     <a:latin typeface="Verdana" panose="020B0604030504040204" pitchFamily="34" charset="0"/>
                     <a:ea typeface="Verdana" panose="020B0604030504040204" pitchFamily="34" charset="0"/>
                   </a:rPr>
@@ -12436,30 +16255,10 @@
                 </a:r>
                 <a14:m>
                   <m:oMath xmlns:m="http://schemas.openxmlformats.org/officeDocument/2006/math">
-                    <m:r>
-                      <a:rPr lang="en-US" sz="2200" b="0" i="1" noProof="1" smtClean="0">
-                        <a:solidFill>
-                          <a:schemeClr val="tx1"/>
-                        </a:solidFill>
-                        <a:latin typeface="Cambria Math" panose="02040503050406030204" pitchFamily="18" charset="0"/>
-                        <a:ea typeface="Verdana" panose="020B0604030504040204" pitchFamily="34" charset="0"/>
-                      </a:rPr>
-                      <m:t>𝑃</m:t>
-                    </m:r>
-                    <m:r>
-                      <a:rPr lang="en-US" sz="2200" b="0" i="1" noProof="1" smtClean="0">
-                        <a:solidFill>
-                          <a:schemeClr val="tx1"/>
-                        </a:solidFill>
-                        <a:latin typeface="Cambria Math" panose="02040503050406030204" pitchFamily="18" charset="0"/>
-                        <a:ea typeface="Verdana" panose="020B0604030504040204" pitchFamily="34" charset="0"/>
-                      </a:rPr>
-                      <m:t>(</m:t>
-                    </m:r>
                     <m:sSub>
                       <m:sSubPr>
                         <m:ctrlPr>
-                          <a:rPr lang="en-US" sz="2200" b="0" i="1" noProof="1" smtClean="0">
+                          <a:rPr lang="en-GB" sz="2200" b="0" i="1" noProof="1" dirty="0" smtClean="0">
                             <a:solidFill>
                               <a:schemeClr val="tx1"/>
                             </a:solidFill>
@@ -12470,19 +16269,19 @@
                       </m:sSubPr>
                       <m:e>
                         <m:r>
-                          <a:rPr lang="en-US" sz="2200" b="0" i="1" noProof="1" smtClean="0">
+                          <a:rPr lang="en-GB" sz="2200" b="0" i="1" noProof="1" dirty="0" smtClean="0">
                             <a:solidFill>
                               <a:schemeClr val="tx1"/>
                             </a:solidFill>
                             <a:latin typeface="Cambria Math" panose="02040503050406030204" pitchFamily="18" charset="0"/>
                             <a:ea typeface="Verdana" panose="020B0604030504040204" pitchFamily="34" charset="0"/>
                           </a:rPr>
-                          <m:t>𝑌</m:t>
+                          <m:t>𝑆</m:t>
                         </m:r>
                       </m:e>
                       <m:sub>
                         <m:r>
-                          <a:rPr lang="en-US" sz="2200" b="0" i="1" noProof="1" smtClean="0">
+                          <a:rPr lang="en-GB" sz="2200" b="0" i="1" noProof="1" dirty="0" smtClean="0">
                             <a:solidFill>
                               <a:schemeClr val="tx1"/>
                             </a:solidFill>
@@ -12492,7 +16291,7 @@
                           <m:t>𝑖</m:t>
                         </m:r>
                         <m:r>
-                          <a:rPr lang="en-US" sz="2200" b="0" i="1" noProof="1" smtClean="0">
+                          <a:rPr lang="en-GB" sz="2200" b="0" i="1" noProof="1" dirty="0" smtClean="0">
                             <a:solidFill>
                               <a:schemeClr val="tx1"/>
                             </a:solidFill>
@@ -12502,7 +16301,7 @@
                           <m:t>,</m:t>
                         </m:r>
                         <m:r>
-                          <a:rPr lang="en-US" sz="2200" b="0" i="1" noProof="1" smtClean="0">
+                          <a:rPr lang="en-GB" sz="2200" b="0" i="1" noProof="1" dirty="0" smtClean="0">
                             <a:solidFill>
                               <a:schemeClr val="tx1"/>
                             </a:solidFill>
@@ -12514,17 +16313,7 @@
                       </m:sub>
                     </m:sSub>
                     <m:r>
-                      <a:rPr lang="en-US" sz="2200" b="0" i="1" noProof="1" smtClean="0">
-                        <a:solidFill>
-                          <a:schemeClr val="tx1"/>
-                        </a:solidFill>
-                        <a:latin typeface="Cambria Math" panose="02040503050406030204" pitchFamily="18" charset="0"/>
-                        <a:ea typeface="Verdana" panose="020B0604030504040204" pitchFamily="34" charset="0"/>
-                      </a:rPr>
-                      <m:t>)</m:t>
-                    </m:r>
-                    <m:r>
-                      <a:rPr lang="en-US" sz="2200" i="1" noProof="1" smtClean="0">
+                      <a:rPr lang="en-GB" sz="2200" i="1" noProof="1" dirty="0" smtClean="0">
                         <a:solidFill>
                           <a:schemeClr val="tx1"/>
                         </a:solidFill>
@@ -12533,70 +16322,10 @@
                       </a:rPr>
                       <m:t>=</m:t>
                     </m:r>
-                    <m:r>
-                      <a:rPr lang="el-GR" sz="2200" i="1" noProof="1" smtClean="0">
-                        <a:solidFill>
-                          <a:schemeClr val="tx1"/>
-                        </a:solidFill>
-                        <a:latin typeface="Cambria Math" panose="02040503050406030204" pitchFamily="18" charset="0"/>
-                        <a:ea typeface="Cambria Math" panose="02040503050406030204" pitchFamily="18" charset="0"/>
-                      </a:rPr>
-                      <m:t>𝜃</m:t>
-                    </m:r>
-                    <m:r>
-                      <a:rPr lang="en-US" sz="2200" b="0" i="1" noProof="1" smtClean="0">
-                        <a:solidFill>
-                          <a:schemeClr val="tx1"/>
-                        </a:solidFill>
-                        <a:latin typeface="Cambria Math" panose="02040503050406030204" pitchFamily="18" charset="0"/>
-                        <a:ea typeface="Cambria Math" panose="02040503050406030204" pitchFamily="18" charset="0"/>
-                      </a:rPr>
-                      <m:t> </m:t>
-                    </m:r>
-                    <m:r>
-                      <a:rPr lang="en-US" sz="2200" b="0" i="1" noProof="1" smtClean="0">
-                        <a:solidFill>
-                          <a:schemeClr val="tx1"/>
-                        </a:solidFill>
-                        <a:latin typeface="Cambria Math" panose="02040503050406030204" pitchFamily="18" charset="0"/>
-                        <a:ea typeface="Verdana" panose="020B0604030504040204" pitchFamily="34" charset="0"/>
-                      </a:rPr>
-                      <m:t>(</m:t>
-                    </m:r>
-                    <m:r>
-                      <a:rPr lang="en-US" sz="2200" i="1" noProof="1" smtClean="0">
-                        <a:solidFill>
-                          <a:schemeClr val="tx1"/>
-                        </a:solidFill>
-                        <a:latin typeface="Cambria Math" panose="02040503050406030204" pitchFamily="18" charset="0"/>
-                        <a:ea typeface="Cambria Math" panose="02040503050406030204" pitchFamily="18" charset="0"/>
-                      </a:rPr>
-                      <m:t>𝛼</m:t>
-                    </m:r>
-                    <m:r>
-                      <a:rPr lang="en-US" sz="2200" b="0" i="1" noProof="1" smtClean="0">
-                        <a:solidFill>
-                          <a:schemeClr val="tx1"/>
-                        </a:solidFill>
-                        <a:latin typeface="Cambria Math" panose="02040503050406030204" pitchFamily="18" charset="0"/>
-                        <a:ea typeface="Cambria Math" panose="02040503050406030204" pitchFamily="18" charset="0"/>
-                      </a:rPr>
-                      <m:t> </m:t>
-                    </m:r>
-                    <m:r>
-                      <a:rPr lang="en-US" sz="2200" b="0" i="1" noProof="1" smtClean="0">
-                        <a:solidFill>
-                          <a:schemeClr val="tx1"/>
-                        </a:solidFill>
-                        <a:latin typeface="Cambria Math" panose="02040503050406030204" pitchFamily="18" charset="0"/>
-                        <a:ea typeface="Verdana" panose="020B0604030504040204" pitchFamily="34" charset="0"/>
-                      </a:rPr>
-                      <m:t>+</m:t>
-                    </m:r>
                   </m:oMath>
                 </a14:m>
                 <a:r>
-                  <a:rPr lang="en-US" sz="2200" noProof="1">
+                  <a:rPr lang="en-GB" sz="2200" noProof="1">
                     <a:ea typeface="Verdana" panose="020B0604030504040204" pitchFamily="34" charset="0"/>
                   </a:rPr>
                   <a:t> </a:t>
@@ -12606,7 +16335,7 @@
                     <m:sSub>
                       <m:sSubPr>
                         <m:ctrlPr>
-                          <a:rPr lang="en-US" sz="2200" i="1" noProof="1" smtClean="0">
+                          <a:rPr lang="en-GB" sz="2200" i="1" noProof="1" dirty="0" smtClean="0">
                             <a:latin typeface="Cambria Math" panose="02040503050406030204" pitchFamily="18" charset="0"/>
                             <a:ea typeface="Cambria Math" panose="02040503050406030204" pitchFamily="18" charset="0"/>
                           </a:rPr>
@@ -12614,16 +16343,16 @@
                       </m:sSubPr>
                       <m:e>
                         <m:r>
-                          <a:rPr lang="en-US" sz="2200" i="1" noProof="1" smtClean="0">
+                          <a:rPr lang="en-GB" sz="2200" i="1" noProof="1" dirty="0" smtClean="0">
                             <a:latin typeface="Cambria Math" panose="02040503050406030204" pitchFamily="18" charset="0"/>
                             <a:ea typeface="Cambria Math" panose="02040503050406030204" pitchFamily="18" charset="0"/>
                           </a:rPr>
-                          <m:t>𝜇</m:t>
+                          <m:t>𝛼</m:t>
                         </m:r>
                       </m:e>
                       <m:sub>
                         <m:r>
-                          <a:rPr lang="en-US" sz="2200" b="0" i="1" noProof="1" smtClean="0">
+                          <a:rPr lang="en-GB" sz="2200" b="0" i="1" noProof="1" dirty="0" smtClean="0">
                             <a:latin typeface="Cambria Math" panose="02040503050406030204" pitchFamily="18" charset="0"/>
                             <a:ea typeface="Verdana" panose="020B0604030504040204" pitchFamily="34" charset="0"/>
                           </a:rPr>
@@ -12632,7 +16361,7 @@
                       </m:sub>
                     </m:sSub>
                     <m:r>
-                      <a:rPr lang="en-US" sz="2200" b="0" i="1" noProof="1" smtClean="0">
+                      <a:rPr lang="en-GB" sz="2200" b="0" i="1" noProof="1" dirty="0" smtClean="0">
                         <a:latin typeface="Cambria Math" panose="02040503050406030204" pitchFamily="18" charset="0"/>
                         <a:ea typeface="Verdana" panose="020B0604030504040204" pitchFamily="34" charset="0"/>
                       </a:rPr>
@@ -12641,7 +16370,7 @@
                   </m:oMath>
                 </a14:m>
                 <a:r>
-                  <a:rPr lang="en-US" sz="2200" noProof="1">
+                  <a:rPr lang="en-GB" sz="2200" noProof="1">
                     <a:ea typeface="Cambria Math" panose="02040503050406030204" pitchFamily="18" charset="0"/>
                   </a:rPr>
                   <a:t> </a:t>
@@ -12651,7 +16380,7 @@
                     <m:sSub>
                       <m:sSubPr>
                         <m:ctrlPr>
-                          <a:rPr lang="en-US" sz="2200" i="1" noProof="1" smtClean="0">
+                          <a:rPr lang="en-GB" sz="2200" i="1" noProof="1" dirty="0" smtClean="0">
                             <a:latin typeface="Cambria Math" panose="02040503050406030204" pitchFamily="18" charset="0"/>
                             <a:ea typeface="Cambria Math" panose="02040503050406030204" pitchFamily="18" charset="0"/>
                           </a:rPr>
@@ -12659,7 +16388,7 @@
                       </m:sSubPr>
                       <m:e>
                         <m:r>
-                          <a:rPr lang="en-US" sz="2200" i="1" noProof="1" smtClean="0">
+                          <a:rPr lang="en-GB" sz="2200" i="1" noProof="1" dirty="0" smtClean="0">
                             <a:latin typeface="Cambria Math" panose="02040503050406030204" pitchFamily="18" charset="0"/>
                             <a:ea typeface="Cambria Math" panose="02040503050406030204" pitchFamily="18" charset="0"/>
                           </a:rPr>
@@ -12668,7 +16397,7 @@
                       </m:e>
                       <m:sub>
                         <m:r>
-                          <a:rPr lang="en-US" sz="2200" b="0" i="1" noProof="1" smtClean="0">
+                          <a:rPr lang="en-GB" sz="2200" b="0" i="1" noProof="1" dirty="0" smtClean="0">
                             <a:latin typeface="Cambria Math" panose="02040503050406030204" pitchFamily="18" charset="0"/>
                             <a:ea typeface="Verdana" panose="020B0604030504040204" pitchFamily="34" charset="0"/>
                           </a:rPr>
@@ -12677,14 +16406,14 @@
                       </m:sub>
                     </m:sSub>
                     <m:r>
-                      <a:rPr lang="en-US" sz="2200" b="0" i="1" noProof="1" smtClean="0">
+                      <a:rPr lang="en-GB" sz="2200" b="0" i="1" noProof="1" dirty="0" smtClean="0">
                         <a:latin typeface="Cambria Math" panose="02040503050406030204" pitchFamily="18" charset="0"/>
                         <a:ea typeface="Verdana" panose="020B0604030504040204" pitchFamily="34" charset="0"/>
                       </a:rPr>
                       <m:t>+ </m:t>
                     </m:r>
                     <m:r>
-                      <a:rPr lang="en-US" sz="2200" b="0" i="1" noProof="1" smtClean="0">
+                      <a:rPr lang="en-GB" sz="2200" b="0" i="1" noProof="1" dirty="0" smtClean="0">
                         <a:latin typeface="Cambria Math" panose="02040503050406030204" pitchFamily="18" charset="0"/>
                         <a:ea typeface="Cambria Math" panose="02040503050406030204" pitchFamily="18" charset="0"/>
                       </a:rPr>
@@ -12693,7 +16422,7 @@
                     <m:sSub>
                       <m:sSubPr>
                         <m:ctrlPr>
-                          <a:rPr lang="en-US" sz="2200" b="0" i="1" noProof="1" smtClean="0">
+                          <a:rPr lang="en-GB" sz="2200" b="0" i="1" noProof="1" dirty="0" smtClean="0">
                             <a:latin typeface="Cambria Math" panose="02040503050406030204" pitchFamily="18" charset="0"/>
                             <a:ea typeface="Verdana" panose="020B0604030504040204" pitchFamily="34" charset="0"/>
                           </a:rPr>
@@ -12701,14 +16430,14 @@
                       </m:sSubPr>
                       <m:e>
                         <m:r>
-                          <a:rPr lang="en-US" sz="2200" b="0" i="1" noProof="1" smtClean="0">
+                          <a:rPr lang="en-GB" sz="2200" b="0" i="1" noProof="1" dirty="0" smtClean="0">
                             <a:latin typeface="Cambria Math" panose="02040503050406030204" pitchFamily="18" charset="0"/>
                             <a:ea typeface="Verdana" panose="020B0604030504040204" pitchFamily="34" charset="0"/>
                           </a:rPr>
                           <m:t> </m:t>
                         </m:r>
                         <m:r>
-                          <a:rPr lang="en-US" sz="2200" b="0" i="1" noProof="1" smtClean="0">
+                          <a:rPr lang="en-GB" sz="2200" b="0" i="1" noProof="1" dirty="0" smtClean="0">
                             <a:latin typeface="Cambria Math" panose="02040503050406030204" pitchFamily="18" charset="0"/>
                             <a:ea typeface="Verdana" panose="020B0604030504040204" pitchFamily="34" charset="0"/>
                           </a:rPr>
@@ -12717,28 +16446,28 @@
                       </m:e>
                       <m:sub>
                         <m:r>
-                          <a:rPr lang="en-US" sz="2200" i="1" noProof="1">
+                          <a:rPr lang="en-GB" sz="2200" i="1" noProof="1" dirty="0" smtClean="0">
                             <a:latin typeface="Cambria Math" panose="02040503050406030204" pitchFamily="18" charset="0"/>
                             <a:ea typeface="Verdana" panose="020B0604030504040204" pitchFamily="34" charset="0"/>
                           </a:rPr>
                           <m:t>𝑖</m:t>
                         </m:r>
                         <m:r>
-                          <a:rPr lang="en-US" sz="2200" i="1" noProof="1">
+                          <a:rPr lang="en-GB" sz="2200" i="1" noProof="1" dirty="0" smtClean="0">
                             <a:latin typeface="Cambria Math" panose="02040503050406030204" pitchFamily="18" charset="0"/>
                             <a:ea typeface="Verdana" panose="020B0604030504040204" pitchFamily="34" charset="0"/>
                           </a:rPr>
                           <m:t>,</m:t>
                         </m:r>
                         <m:r>
-                          <a:rPr lang="en-US" sz="2200" i="1" noProof="1">
+                          <a:rPr lang="en-GB" sz="2200" i="1" noProof="1" dirty="0" smtClean="0">
                             <a:latin typeface="Cambria Math" panose="02040503050406030204" pitchFamily="18" charset="0"/>
                             <a:ea typeface="Verdana" panose="020B0604030504040204" pitchFamily="34" charset="0"/>
                           </a:rPr>
                           <m:t>𝑡</m:t>
                         </m:r>
                         <m:r>
-                          <a:rPr lang="en-US" sz="2200" b="0" i="1" noProof="1" smtClean="0">
+                          <a:rPr lang="en-GB" sz="2200" b="0" i="1" noProof="1" dirty="0" smtClean="0">
                             <a:latin typeface="Cambria Math" panose="02040503050406030204" pitchFamily="18" charset="0"/>
                             <a:ea typeface="Verdana" panose="020B0604030504040204" pitchFamily="34" charset="0"/>
                           </a:rPr>
@@ -12747,14 +16476,14 @@
                       </m:sub>
                     </m:sSub>
                     <m:r>
-                      <a:rPr lang="en-US" sz="2200" i="1" noProof="1" smtClean="0">
+                      <a:rPr lang="en-GB" sz="2200" i="1" noProof="1" dirty="0" smtClean="0">
                         <a:latin typeface="Cambria Math" panose="02040503050406030204" pitchFamily="18" charset="0"/>
                         <a:ea typeface="Verdana" panose="020B0604030504040204" pitchFamily="34" charset="0"/>
                       </a:rPr>
                       <m:t>+</m:t>
                     </m:r>
                     <m:r>
-                      <a:rPr lang="en-US" sz="2200" i="1" noProof="1" smtClean="0">
+                      <a:rPr lang="en-GB" sz="2200" i="1" noProof="1" dirty="0" smtClean="0">
                         <a:latin typeface="Cambria Math" panose="02040503050406030204" pitchFamily="18" charset="0"/>
                         <a:ea typeface="Cambria Math" panose="02040503050406030204" pitchFamily="18" charset="0"/>
                       </a:rPr>
@@ -12763,7 +16492,7 @@
                     <m:sSub>
                       <m:sSubPr>
                         <m:ctrlPr>
-                          <a:rPr lang="en-US" sz="2200" i="1" noProof="1">
+                          <a:rPr lang="en-GB" sz="2200" i="1" noProof="1" dirty="0" smtClean="0">
                             <a:latin typeface="Cambria Math" panose="02040503050406030204" pitchFamily="18" charset="0"/>
                             <a:ea typeface="Verdana" panose="020B0604030504040204" pitchFamily="34" charset="0"/>
                           </a:rPr>
@@ -12771,14 +16500,14 @@
                       </m:sSubPr>
                       <m:e>
                         <m:r>
-                          <a:rPr lang="en-US" sz="2200" i="1" noProof="1">
+                          <a:rPr lang="en-GB" sz="2200" i="1" noProof="1" dirty="0" smtClean="0">
                             <a:latin typeface="Cambria Math" panose="02040503050406030204" pitchFamily="18" charset="0"/>
                             <a:ea typeface="Verdana" panose="020B0604030504040204" pitchFamily="34" charset="0"/>
                           </a:rPr>
                           <m:t> </m:t>
                         </m:r>
                         <m:r>
-                          <a:rPr lang="en-US" sz="2200" b="0" i="1" noProof="1" smtClean="0">
+                          <a:rPr lang="en-GB" sz="2200" b="0" i="1" noProof="1" dirty="0" smtClean="0">
                             <a:latin typeface="Cambria Math" panose="02040503050406030204" pitchFamily="18" charset="0"/>
                             <a:ea typeface="Verdana" panose="020B0604030504040204" pitchFamily="34" charset="0"/>
                           </a:rPr>
@@ -12787,28 +16516,28 @@
                       </m:e>
                       <m:sub>
                         <m:r>
-                          <a:rPr lang="en-US" sz="2200" i="1" noProof="1">
+                          <a:rPr lang="en-GB" sz="2200" i="1" noProof="1" dirty="0" smtClean="0">
                             <a:latin typeface="Cambria Math" panose="02040503050406030204" pitchFamily="18" charset="0"/>
                             <a:ea typeface="Verdana" panose="020B0604030504040204" pitchFamily="34" charset="0"/>
                           </a:rPr>
                           <m:t>𝑖</m:t>
                         </m:r>
                         <m:r>
-                          <a:rPr lang="en-US" sz="2200" i="1" noProof="1">
+                          <a:rPr lang="en-GB" sz="2200" i="1" noProof="1" dirty="0" smtClean="0">
                             <a:latin typeface="Cambria Math" panose="02040503050406030204" pitchFamily="18" charset="0"/>
                             <a:ea typeface="Verdana" panose="020B0604030504040204" pitchFamily="34" charset="0"/>
                           </a:rPr>
                           <m:t>,</m:t>
                         </m:r>
                         <m:r>
-                          <a:rPr lang="en-US" sz="2200" i="1" noProof="1">
+                          <a:rPr lang="en-GB" sz="2200" i="1" noProof="1" dirty="0" smtClean="0">
                             <a:latin typeface="Cambria Math" panose="02040503050406030204" pitchFamily="18" charset="0"/>
                             <a:ea typeface="Verdana" panose="020B0604030504040204" pitchFamily="34" charset="0"/>
                           </a:rPr>
                           <m:t>𝑡</m:t>
                         </m:r>
                         <m:r>
-                          <a:rPr lang="en-US" sz="2200" b="0" i="1" noProof="1" smtClean="0">
+                          <a:rPr lang="en-GB" sz="2200" b="0" i="1" noProof="1" dirty="0" smtClean="0">
                             <a:latin typeface="Cambria Math" panose="02040503050406030204" pitchFamily="18" charset="0"/>
                             <a:ea typeface="Verdana" panose="020B0604030504040204" pitchFamily="34" charset="0"/>
                           </a:rPr>
@@ -12817,15 +16546,66 @@
                       </m:sub>
                     </m:sSub>
                     <m:r>
-                      <a:rPr lang="en-US" sz="2200" b="0" i="1" noProof="1" smtClean="0">
+                      <a:rPr lang="en-GB" sz="2200" i="1" noProof="1" dirty="0" smtClean="0">
                         <a:latin typeface="Cambria Math" panose="02040503050406030204" pitchFamily="18" charset="0"/>
                         <a:ea typeface="Verdana" panose="020B0604030504040204" pitchFamily="34" charset="0"/>
                       </a:rPr>
-                      <m:t>)</m:t>
+                      <m:t>+</m:t>
                     </m:r>
+                    <m:r>
+                      <m:rPr>
+                        <m:nor/>
+                      </m:rPr>
+                      <a:rPr lang="en-GB" sz="2200" noProof="1" dirty="0" smtClean="0">
+                        <a:ea typeface="Cambria Math" panose="02040503050406030204" pitchFamily="18" charset="0"/>
+                      </a:rPr>
+                      <m:t> </m:t>
+                    </m:r>
+                    <m:sSub>
+                      <m:sSubPr>
+                        <m:ctrlPr>
+                          <a:rPr lang="en-GB" sz="2200" i="1" noProof="1" dirty="0" smtClean="0">
+                            <a:latin typeface="Cambria Math" panose="02040503050406030204" pitchFamily="18" charset="0"/>
+                            <a:ea typeface="Cambria Math" panose="02040503050406030204" pitchFamily="18" charset="0"/>
+                          </a:rPr>
+                        </m:ctrlPr>
+                      </m:sSubPr>
+                      <m:e>
+                        <m:r>
+                          <a:rPr lang="en-GB" sz="2200" i="1" noProof="1" dirty="0" smtClean="0">
+                            <a:latin typeface="Cambria Math" panose="02040503050406030204" pitchFamily="18" charset="0"/>
+                            <a:ea typeface="Cambria Math" panose="02040503050406030204" pitchFamily="18" charset="0"/>
+                          </a:rPr>
+                          <m:t>𝜀</m:t>
+                        </m:r>
+                      </m:e>
+                      <m:sub>
+                        <m:r>
+                          <a:rPr lang="en-GB" sz="2200" b="0" i="1" noProof="1" dirty="0" smtClean="0">
+                            <a:latin typeface="Cambria Math" panose="02040503050406030204" pitchFamily="18" charset="0"/>
+                            <a:ea typeface="Cambria Math" panose="02040503050406030204" pitchFamily="18" charset="0"/>
+                          </a:rPr>
+                          <m:t>𝑖</m:t>
+                        </m:r>
+                        <m:r>
+                          <a:rPr lang="en-GB" sz="2200" b="0" i="1" noProof="1" dirty="0" smtClean="0">
+                            <a:latin typeface="Cambria Math" panose="02040503050406030204" pitchFamily="18" charset="0"/>
+                            <a:ea typeface="Cambria Math" panose="02040503050406030204" pitchFamily="18" charset="0"/>
+                          </a:rPr>
+                          <m:t>,</m:t>
+                        </m:r>
+                        <m:r>
+                          <a:rPr lang="en-GB" sz="2200" i="1" noProof="1" dirty="0" smtClean="0">
+                            <a:latin typeface="Cambria Math" panose="02040503050406030204" pitchFamily="18" charset="0"/>
+                            <a:ea typeface="Verdana" panose="020B0604030504040204" pitchFamily="34" charset="0"/>
+                          </a:rPr>
+                          <m:t>𝑡</m:t>
+                        </m:r>
+                      </m:sub>
+                    </m:sSub>
                   </m:oMath>
                 </a14:m>
-                <a:endParaRPr lang="en-US" sz="2200" noProof="1">
+                <a:endParaRPr lang="en-GB" sz="2200" noProof="1">
                   <a:solidFill>
                     <a:schemeClr val="tx1"/>
                   </a:solidFill>
@@ -12842,7 +16622,7 @@
                     <a:spcPts val="300"/>
                   </a:spcAft>
                 </a:pPr>
-                <a:endParaRPr lang="en-US" sz="1800" noProof="1">
+                <a:endParaRPr lang="en-GB" sz="1800" noProof="1">
                   <a:latin typeface="Verdana" panose="020B0604030504040204" pitchFamily="34" charset="0"/>
                   <a:ea typeface="Verdana" panose="020B0604030504040204" pitchFamily="34" charset="0"/>
                 </a:endParaRPr>
@@ -12857,14 +16637,14 @@
                   </a:spcAft>
                 </a:pPr>
                 <a:r>
-                  <a:rPr lang="en-US" sz="1800" noProof="1">
+                  <a:rPr lang="en-GB" sz="1800" noProof="1">
                     <a:latin typeface="Verdana" panose="020B0604030504040204" pitchFamily="34" charset="0"/>
                     <a:ea typeface="Verdana" panose="020B0604030504040204" pitchFamily="34" charset="0"/>
                   </a:rPr>
                   <a:t>2. </a:t>
                 </a:r>
                 <a:r>
-                  <a:rPr lang="en-US" sz="2000" noProof="1">
+                  <a:rPr lang="en-GB" sz="2000" noProof="1">
                     <a:latin typeface="Verdana" panose="020B0604030504040204" pitchFamily="34" charset="0"/>
                     <a:ea typeface="Verdana" panose="020B0604030504040204" pitchFamily="34" charset="0"/>
                   </a:rPr>
@@ -12873,7 +16653,7 @@
                 <a14:m>
                   <m:oMath xmlns:m="http://schemas.openxmlformats.org/officeDocument/2006/math">
                     <m:r>
-                      <a:rPr lang="en-US" sz="2000" i="1" noProof="1" smtClean="0">
+                      <a:rPr lang="en-GB" sz="2000" i="1" noProof="1" dirty="0" smtClean="0">
                         <a:latin typeface="Cambria Math" panose="02040503050406030204" pitchFamily="18" charset="0"/>
                         <a:ea typeface="Cambria Math" panose="02040503050406030204" pitchFamily="18" charset="0"/>
                       </a:rPr>
@@ -12882,7 +16662,7 @@
                   </m:oMath>
                 </a14:m>
                 <a:r>
-                  <a:rPr lang="en-US" sz="2000" noProof="1">
+                  <a:rPr lang="en-GB" sz="2000" noProof="1">
                     <a:latin typeface="Verdana" panose="020B0604030504040204" pitchFamily="34" charset="0"/>
                     <a:ea typeface="Verdana" panose="020B0604030504040204" pitchFamily="34" charset="0"/>
                   </a:rPr>
@@ -12899,7 +16679,7 @@
                   </a:spcAft>
                 </a:pPr>
                 <a:r>
-                  <a:rPr lang="en-US" sz="1800" noProof="1">
+                  <a:rPr lang="en-GB" sz="1800" noProof="1">
                     <a:latin typeface="Verdana" panose="020B0604030504040204" pitchFamily="34" charset="0"/>
                     <a:ea typeface="Verdana" panose="020B0604030504040204" pitchFamily="34" charset="0"/>
                   </a:rPr>
@@ -12907,24 +16687,10 @@
                 </a:r>
                 <a14:m>
                   <m:oMath xmlns:m="http://schemas.openxmlformats.org/officeDocument/2006/math">
-                    <m:r>
-                      <a:rPr lang="en-US" sz="2200" b="0" i="1" noProof="1" smtClean="0">
-                        <a:latin typeface="Cambria Math" panose="02040503050406030204" pitchFamily="18" charset="0"/>
-                        <a:ea typeface="Verdana" panose="020B0604030504040204" pitchFamily="34" charset="0"/>
-                      </a:rPr>
-                      <m:t>𝑃</m:t>
-                    </m:r>
-                    <m:r>
-                      <a:rPr lang="en-US" sz="2200" b="0" i="0" noProof="1" smtClean="0">
-                        <a:latin typeface="Cambria Math" panose="02040503050406030204" pitchFamily="18" charset="0"/>
-                        <a:ea typeface="Verdana" panose="020B0604030504040204" pitchFamily="34" charset="0"/>
-                      </a:rPr>
-                      <m:t>(</m:t>
-                    </m:r>
                     <m:sSub>
                       <m:sSubPr>
                         <m:ctrlPr>
-                          <a:rPr lang="en-US" sz="2200" i="1" noProof="1">
+                          <a:rPr lang="en-GB" sz="2200" i="1" noProof="1" dirty="0" smtClean="0">
                             <a:latin typeface="Cambria Math" panose="02040503050406030204" pitchFamily="18" charset="0"/>
                             <a:ea typeface="Verdana" panose="020B0604030504040204" pitchFamily="34" charset="0"/>
                           </a:rPr>
@@ -12932,30 +16698,30 @@
                       </m:sSubPr>
                       <m:e>
                         <m:r>
-                          <a:rPr lang="en-US" sz="2200" i="1" noProof="1">
-                            <a:latin typeface="Cambria Math" panose="02040503050406030204" pitchFamily="18" charset="0"/>
-                            <a:ea typeface="Verdana" panose="020B0604030504040204" pitchFamily="34" charset="0"/>
-                          </a:rPr>
-                          <m:t>𝑌</m:t>
+                          <a:rPr lang="en-GB" sz="2200" i="1" noProof="1" dirty="0" smtClean="0">
+                            <a:latin typeface="Cambria Math" panose="02040503050406030204" pitchFamily="18" charset="0"/>
+                            <a:ea typeface="Verdana" panose="020B0604030504040204" pitchFamily="34" charset="0"/>
+                          </a:rPr>
+                          <m:t>𝑆</m:t>
                         </m:r>
                       </m:e>
                       <m:sub>
                         <m:r>
-                          <a:rPr lang="en-US" sz="2200" i="1" noProof="1">
+                          <a:rPr lang="en-GB" sz="2200" i="1" noProof="1" dirty="0" smtClean="0">
                             <a:latin typeface="Cambria Math" panose="02040503050406030204" pitchFamily="18" charset="0"/>
                             <a:ea typeface="Verdana" panose="020B0604030504040204" pitchFamily="34" charset="0"/>
                           </a:rPr>
                           <m:t>𝑖</m:t>
                         </m:r>
                         <m:r>
-                          <a:rPr lang="en-US" sz="2200" i="1" noProof="1">
+                          <a:rPr lang="en-GB" sz="2200" i="1" noProof="1" dirty="0" smtClean="0">
                             <a:latin typeface="Cambria Math" panose="02040503050406030204" pitchFamily="18" charset="0"/>
                             <a:ea typeface="Verdana" panose="020B0604030504040204" pitchFamily="34" charset="0"/>
                           </a:rPr>
                           <m:t>,</m:t>
                         </m:r>
                         <m:r>
-                          <a:rPr lang="en-US" sz="2200" i="1" noProof="1">
+                          <a:rPr lang="en-GB" sz="2200" i="1" noProof="1" dirty="0" smtClean="0">
                             <a:latin typeface="Cambria Math" panose="02040503050406030204" pitchFamily="18" charset="0"/>
                             <a:ea typeface="Verdana" panose="020B0604030504040204" pitchFamily="34" charset="0"/>
                           </a:rPr>
@@ -12964,65 +16730,16 @@
                       </m:sub>
                     </m:sSub>
                     <m:r>
-                      <a:rPr lang="en-US" sz="2200" b="0" i="1" noProof="1" smtClean="0">
-                        <a:latin typeface="Cambria Math" panose="02040503050406030204" pitchFamily="18" charset="0"/>
-                        <a:ea typeface="Verdana" panose="020B0604030504040204" pitchFamily="34" charset="0"/>
-                      </a:rPr>
-                      <m:t>)</m:t>
-                    </m:r>
-                    <m:r>
-                      <a:rPr lang="en-US" sz="2200" i="1" noProof="1">
+                      <a:rPr lang="en-GB" sz="2200" i="1" noProof="1" dirty="0" smtClean="0">
                         <a:latin typeface="Cambria Math" panose="02040503050406030204" pitchFamily="18" charset="0"/>
                         <a:ea typeface="Verdana" panose="020B0604030504040204" pitchFamily="34" charset="0"/>
                       </a:rPr>
                       <m:t>=</m:t>
                     </m:r>
-                    <m:r>
-                      <a:rPr lang="el-GR" sz="2200" i="1" noProof="1">
-                        <a:latin typeface="Cambria Math" panose="02040503050406030204" pitchFamily="18" charset="0"/>
-                        <a:ea typeface="Cambria Math" panose="02040503050406030204" pitchFamily="18" charset="0"/>
-                      </a:rPr>
-                      <m:t>𝜃</m:t>
-                    </m:r>
-                    <m:r>
-                      <a:rPr lang="en-US" sz="2200" b="0" i="1" noProof="1" smtClean="0">
-                        <a:latin typeface="Cambria Math" panose="02040503050406030204" pitchFamily="18" charset="0"/>
-                        <a:ea typeface="Cambria Math" panose="02040503050406030204" pitchFamily="18" charset="0"/>
-                      </a:rPr>
-                      <m:t> </m:t>
-                    </m:r>
-                    <m:r>
-                      <a:rPr lang="en-US" sz="2200" i="1" noProof="1">
-                        <a:latin typeface="Cambria Math" panose="02040503050406030204" pitchFamily="18" charset="0"/>
-                        <a:ea typeface="Verdana" panose="020B0604030504040204" pitchFamily="34" charset="0"/>
-                      </a:rPr>
-                      <m:t>(</m:t>
-                    </m:r>
-                    <m:r>
-                      <a:rPr lang="en-US" sz="2200" i="1" noProof="1">
-                        <a:latin typeface="Cambria Math" panose="02040503050406030204" pitchFamily="18" charset="0"/>
-                        <a:ea typeface="Cambria Math" panose="02040503050406030204" pitchFamily="18" charset="0"/>
-                      </a:rPr>
-                      <m:t>𝛼</m:t>
-                    </m:r>
-                    <m:r>
-                      <a:rPr lang="en-US" sz="2200" b="0" i="1" noProof="1" smtClean="0">
-                        <a:latin typeface="Cambria Math" panose="02040503050406030204" pitchFamily="18" charset="0"/>
-                        <a:ea typeface="Cambria Math" panose="02040503050406030204" pitchFamily="18" charset="0"/>
-                      </a:rPr>
-                      <m:t> </m:t>
-                    </m:r>
-                    <m:r>
-                      <a:rPr lang="en-US" sz="2200" i="1" noProof="1">
-                        <a:latin typeface="Cambria Math" panose="02040503050406030204" pitchFamily="18" charset="0"/>
-                        <a:ea typeface="Verdana" panose="020B0604030504040204" pitchFamily="34" charset="0"/>
-                      </a:rPr>
-                      <m:t>+</m:t>
-                    </m:r>
                   </m:oMath>
                 </a14:m>
                 <a:r>
-                  <a:rPr lang="en-US" sz="2200" noProof="1">
+                  <a:rPr lang="en-GB" sz="2200" noProof="1">
                     <a:ea typeface="Verdana" panose="020B0604030504040204" pitchFamily="34" charset="0"/>
                   </a:rPr>
                   <a:t> </a:t>
@@ -13032,7 +16749,7 @@
                     <m:sSub>
                       <m:sSubPr>
                         <m:ctrlPr>
-                          <a:rPr lang="en-US" sz="2200" i="1" noProof="1">
+                          <a:rPr lang="en-GB" sz="2200" i="1" noProof="1" dirty="0" smtClean="0">
                             <a:latin typeface="Cambria Math" panose="02040503050406030204" pitchFamily="18" charset="0"/>
                             <a:ea typeface="Cambria Math" panose="02040503050406030204" pitchFamily="18" charset="0"/>
                           </a:rPr>
@@ -13040,16 +16757,16 @@
                       </m:sSubPr>
                       <m:e>
                         <m:r>
-                          <a:rPr lang="en-US" sz="2200" i="1" noProof="1">
+                          <a:rPr lang="en-GB" sz="2200" i="1" noProof="1" dirty="0" smtClean="0">
                             <a:latin typeface="Cambria Math" panose="02040503050406030204" pitchFamily="18" charset="0"/>
                             <a:ea typeface="Cambria Math" panose="02040503050406030204" pitchFamily="18" charset="0"/>
                           </a:rPr>
-                          <m:t>𝜇</m:t>
+                          <m:t>𝛼</m:t>
                         </m:r>
                       </m:e>
                       <m:sub>
                         <m:r>
-                          <a:rPr lang="en-US" sz="2200" i="1" noProof="1">
+                          <a:rPr lang="en-GB" sz="2200" i="1" noProof="1" dirty="0" smtClean="0">
                             <a:latin typeface="Cambria Math" panose="02040503050406030204" pitchFamily="18" charset="0"/>
                             <a:ea typeface="Verdana" panose="020B0604030504040204" pitchFamily="34" charset="0"/>
                           </a:rPr>
@@ -13058,7 +16775,7 @@
                       </m:sub>
                     </m:sSub>
                     <m:r>
-                      <a:rPr lang="en-US" sz="2200" i="1" noProof="1">
+                      <a:rPr lang="en-GB" sz="2200" i="1" noProof="1" dirty="0" smtClean="0">
                         <a:latin typeface="Cambria Math" panose="02040503050406030204" pitchFamily="18" charset="0"/>
                         <a:ea typeface="Verdana" panose="020B0604030504040204" pitchFamily="34" charset="0"/>
                       </a:rPr>
@@ -13067,7 +16784,7 @@
                   </m:oMath>
                 </a14:m>
                 <a:r>
-                  <a:rPr lang="en-US" sz="2200" noProof="1">
+                  <a:rPr lang="en-GB" sz="2200" noProof="1">
                     <a:ea typeface="Cambria Math" panose="02040503050406030204" pitchFamily="18" charset="0"/>
                   </a:rPr>
                   <a:t> </a:t>
@@ -13077,7 +16794,7 @@
                     <m:sSub>
                       <m:sSubPr>
                         <m:ctrlPr>
-                          <a:rPr lang="en-US" sz="2200" i="1" noProof="1">
+                          <a:rPr lang="en-GB" sz="2200" i="1" noProof="1" dirty="0" smtClean="0">
                             <a:latin typeface="Cambria Math" panose="02040503050406030204" pitchFamily="18" charset="0"/>
                             <a:ea typeface="Cambria Math" panose="02040503050406030204" pitchFamily="18" charset="0"/>
                           </a:rPr>
@@ -13085,7 +16802,7 @@
                       </m:sSubPr>
                       <m:e>
                         <m:r>
-                          <a:rPr lang="en-US" sz="2200" i="1" noProof="1">
+                          <a:rPr lang="en-GB" sz="2200" i="1" noProof="1" dirty="0" smtClean="0">
                             <a:latin typeface="Cambria Math" panose="02040503050406030204" pitchFamily="18" charset="0"/>
                             <a:ea typeface="Cambria Math" panose="02040503050406030204" pitchFamily="18" charset="0"/>
                           </a:rPr>
@@ -13094,7 +16811,7 @@
                       </m:e>
                       <m:sub>
                         <m:r>
-                          <a:rPr lang="en-US" sz="2200" b="0" i="1" noProof="1" smtClean="0">
+                          <a:rPr lang="en-GB" sz="2200" i="1" noProof="1" dirty="0" smtClean="0">
                             <a:latin typeface="Cambria Math" panose="02040503050406030204" pitchFamily="18" charset="0"/>
                             <a:ea typeface="Verdana" panose="020B0604030504040204" pitchFamily="34" charset="0"/>
                           </a:rPr>
@@ -13103,14 +16820,14 @@
                       </m:sub>
                     </m:sSub>
                     <m:r>
-                      <a:rPr lang="en-US" sz="2200" i="1" noProof="1">
+                      <a:rPr lang="en-GB" sz="2200" i="1" noProof="1" dirty="0" smtClean="0">
                         <a:latin typeface="Cambria Math" panose="02040503050406030204" pitchFamily="18" charset="0"/>
                         <a:ea typeface="Verdana" panose="020B0604030504040204" pitchFamily="34" charset="0"/>
                       </a:rPr>
-                      <m:t>+</m:t>
+                      <m:t>+ </m:t>
                     </m:r>
                     <m:r>
-                      <a:rPr lang="en-US" sz="2200" i="1" noProof="1">
+                      <a:rPr lang="en-GB" sz="2200" i="1" noProof="1" dirty="0" smtClean="0">
                         <a:latin typeface="Cambria Math" panose="02040503050406030204" pitchFamily="18" charset="0"/>
                         <a:ea typeface="Cambria Math" panose="02040503050406030204" pitchFamily="18" charset="0"/>
                       </a:rPr>
@@ -13119,7 +16836,7 @@
                     <m:sSub>
                       <m:sSubPr>
                         <m:ctrlPr>
-                          <a:rPr lang="en-US" sz="2200" i="1" noProof="1">
+                          <a:rPr lang="en-GB" sz="2200" i="1" noProof="1" dirty="0" smtClean="0">
                             <a:latin typeface="Cambria Math" panose="02040503050406030204" pitchFamily="18" charset="0"/>
                             <a:ea typeface="Verdana" panose="020B0604030504040204" pitchFamily="34" charset="0"/>
                           </a:rPr>
@@ -13127,14 +16844,14 @@
                       </m:sSubPr>
                       <m:e>
                         <m:r>
-                          <a:rPr lang="en-US" sz="2200" i="1" noProof="1">
+                          <a:rPr lang="en-GB" sz="2200" i="1" noProof="1" dirty="0" smtClean="0">
                             <a:latin typeface="Cambria Math" panose="02040503050406030204" pitchFamily="18" charset="0"/>
                             <a:ea typeface="Verdana" panose="020B0604030504040204" pitchFamily="34" charset="0"/>
                           </a:rPr>
                           <m:t> </m:t>
                         </m:r>
                         <m:r>
-                          <a:rPr lang="en-US" sz="2200" i="1" noProof="1">
+                          <a:rPr lang="en-GB" sz="2200" i="1" noProof="1" dirty="0" smtClean="0">
                             <a:latin typeface="Cambria Math" panose="02040503050406030204" pitchFamily="18" charset="0"/>
                             <a:ea typeface="Verdana" panose="020B0604030504040204" pitchFamily="34" charset="0"/>
                           </a:rPr>
@@ -13143,28 +16860,28 @@
                       </m:e>
                       <m:sub>
                         <m:r>
-                          <a:rPr lang="en-US" sz="2200" i="1" noProof="1">
+                          <a:rPr lang="en-GB" sz="2200" i="1" noProof="1" dirty="0" smtClean="0">
                             <a:latin typeface="Cambria Math" panose="02040503050406030204" pitchFamily="18" charset="0"/>
                             <a:ea typeface="Verdana" panose="020B0604030504040204" pitchFamily="34" charset="0"/>
                           </a:rPr>
                           <m:t>𝑖</m:t>
                         </m:r>
                         <m:r>
-                          <a:rPr lang="en-US" sz="2200" i="1" noProof="1">
+                          <a:rPr lang="en-GB" sz="2200" i="1" noProof="1" dirty="0" smtClean="0">
                             <a:latin typeface="Cambria Math" panose="02040503050406030204" pitchFamily="18" charset="0"/>
                             <a:ea typeface="Verdana" panose="020B0604030504040204" pitchFamily="34" charset="0"/>
                           </a:rPr>
                           <m:t>,</m:t>
                         </m:r>
                         <m:r>
-                          <a:rPr lang="en-US" sz="2200" i="1" noProof="1">
+                          <a:rPr lang="en-GB" sz="2200" i="1" noProof="1" dirty="0" smtClean="0">
                             <a:latin typeface="Cambria Math" panose="02040503050406030204" pitchFamily="18" charset="0"/>
                             <a:ea typeface="Verdana" panose="020B0604030504040204" pitchFamily="34" charset="0"/>
                           </a:rPr>
                           <m:t>𝑡</m:t>
                         </m:r>
                         <m:r>
-                          <a:rPr lang="en-US" sz="2200" b="0" i="1" noProof="1" smtClean="0">
+                          <a:rPr lang="en-GB" sz="2200" i="1" noProof="1" dirty="0" smtClean="0">
                             <a:latin typeface="Cambria Math" panose="02040503050406030204" pitchFamily="18" charset="0"/>
                             <a:ea typeface="Verdana" panose="020B0604030504040204" pitchFamily="34" charset="0"/>
                           </a:rPr>
@@ -13173,33 +16890,30 @@
                       </m:sub>
                     </m:sSub>
                     <m:r>
-                      <a:rPr lang="en-US" sz="2200" i="1" noProof="1">
+                      <a:rPr lang="en-GB" sz="2200" b="0" i="1" noProof="1" dirty="0" smtClean="0">
                         <a:latin typeface="Cambria Math" panose="02040503050406030204" pitchFamily="18" charset="0"/>
                         <a:ea typeface="Verdana" panose="020B0604030504040204" pitchFamily="34" charset="0"/>
                       </a:rPr>
-                      <m:t>+</m:t>
+                      <m:t>+ </m:t>
                     </m:r>
-                  </m:oMath>
-                </a14:m>
-                <a:r>
-                  <a:rPr lang="en-US" sz="2000" noProof="1">
-                    <a:ea typeface="Cambria Math" panose="02040503050406030204" pitchFamily="18" charset="0"/>
-                  </a:rPr>
-                  <a:t> </a:t>
-                </a:r>
-                <a14:m>
-                  <m:oMath xmlns:m="http://schemas.openxmlformats.org/officeDocument/2006/math">
                     <m:r>
-                      <a:rPr lang="en-US" sz="2000" i="1" noProof="1">
+                      <a:rPr lang="en-GB" sz="2400" i="1" noProof="1" dirty="0" smtClean="0">
                         <a:latin typeface="Cambria Math" panose="02040503050406030204" pitchFamily="18" charset="0"/>
                         <a:ea typeface="Cambria Math" panose="02040503050406030204" pitchFamily="18" charset="0"/>
                       </a:rPr>
                       <m:t>𝛾</m:t>
                     </m:r>
+                    <m:r>
+                      <a:rPr lang="en-GB" sz="2400" b="0" i="1" noProof="1" dirty="0" smtClean="0">
+                        <a:latin typeface="Cambria Math" panose="02040503050406030204" pitchFamily="18" charset="0"/>
+                        <a:ea typeface="Cambria Math" panose="02040503050406030204" pitchFamily="18" charset="0"/>
+                      </a:rPr>
+                      <m:t> </m:t>
+                    </m:r>
                     <m:sSub>
                       <m:sSubPr>
                         <m:ctrlPr>
-                          <a:rPr lang="en-US" sz="2000" i="1" noProof="1">
+                          <a:rPr lang="en-GB" sz="2400" i="1" noProof="1" dirty="0" smtClean="0">
                             <a:latin typeface="Cambria Math" panose="02040503050406030204" pitchFamily="18" charset="0"/>
                             <a:ea typeface="Verdana" panose="020B0604030504040204" pitchFamily="34" charset="0"/>
                           </a:rPr>
@@ -13207,14 +16921,7 @@
                       </m:sSubPr>
                       <m:e>
                         <m:r>
-                          <a:rPr lang="en-US" sz="2000" i="1" noProof="1">
-                            <a:latin typeface="Cambria Math" panose="02040503050406030204" pitchFamily="18" charset="0"/>
-                            <a:ea typeface="Verdana" panose="020B0604030504040204" pitchFamily="34" charset="0"/>
-                          </a:rPr>
-                          <m:t> </m:t>
-                        </m:r>
-                        <m:r>
-                          <a:rPr lang="en-US" sz="2000" i="1" noProof="1">
+                          <a:rPr lang="en-GB" sz="2400" i="1" noProof="1" dirty="0" smtClean="0">
                             <a:latin typeface="Cambria Math" panose="02040503050406030204" pitchFamily="18" charset="0"/>
                             <a:ea typeface="Verdana" panose="020B0604030504040204" pitchFamily="34" charset="0"/>
                           </a:rPr>
@@ -13223,28 +16930,28 @@
                       </m:e>
                       <m:sub>
                         <m:r>
-                          <a:rPr lang="en-US" sz="2000" i="1" noProof="1">
+                          <a:rPr lang="en-GB" sz="2400" i="1" noProof="1" dirty="0" smtClean="0">
                             <a:latin typeface="Cambria Math" panose="02040503050406030204" pitchFamily="18" charset="0"/>
                             <a:ea typeface="Verdana" panose="020B0604030504040204" pitchFamily="34" charset="0"/>
                           </a:rPr>
                           <m:t>𝑖</m:t>
                         </m:r>
                         <m:r>
-                          <a:rPr lang="en-US" sz="2000" i="1" noProof="1">
+                          <a:rPr lang="en-GB" sz="2400" i="1" noProof="1" dirty="0" smtClean="0">
                             <a:latin typeface="Cambria Math" panose="02040503050406030204" pitchFamily="18" charset="0"/>
                             <a:ea typeface="Verdana" panose="020B0604030504040204" pitchFamily="34" charset="0"/>
                           </a:rPr>
                           <m:t>,</m:t>
                         </m:r>
                         <m:r>
-                          <a:rPr lang="en-US" sz="2000" i="1" noProof="1">
+                          <a:rPr lang="en-GB" sz="2400" i="1" noProof="1" dirty="0" smtClean="0">
                             <a:latin typeface="Cambria Math" panose="02040503050406030204" pitchFamily="18" charset="0"/>
                             <a:ea typeface="Verdana" panose="020B0604030504040204" pitchFamily="34" charset="0"/>
                           </a:rPr>
                           <m:t>𝑡</m:t>
                         </m:r>
                         <m:r>
-                          <a:rPr lang="en-US" sz="2000" b="0" i="1" noProof="1" smtClean="0">
+                          <a:rPr lang="en-GB" sz="2400" i="1" noProof="1" dirty="0" smtClean="0">
                             <a:latin typeface="Cambria Math" panose="02040503050406030204" pitchFamily="18" charset="0"/>
                             <a:ea typeface="Verdana" panose="020B0604030504040204" pitchFamily="34" charset="0"/>
                           </a:rPr>
@@ -13255,7 +16962,7 @@
                     <m:sSub>
                       <m:sSubPr>
                         <m:ctrlPr>
-                          <a:rPr lang="en-US" sz="2000" i="1" noProof="1">
+                          <a:rPr lang="en-GB" sz="2400" i="1" noProof="1" dirty="0" smtClean="0">
                             <a:latin typeface="Cambria Math" panose="02040503050406030204" pitchFamily="18" charset="0"/>
                             <a:ea typeface="Verdana" panose="020B0604030504040204" pitchFamily="34" charset="0"/>
                           </a:rPr>
@@ -13263,7 +16970,7 @@
                       </m:sSubPr>
                       <m:e>
                         <m:r>
-                          <a:rPr lang="en-US" sz="2000" i="1" noProof="1">
+                          <a:rPr lang="en-GB" sz="2400" i="1" noProof="1" dirty="0" smtClean="0">
                             <a:latin typeface="Cambria Math" panose="02040503050406030204" pitchFamily="18" charset="0"/>
                             <a:ea typeface="Verdana" panose="020B0604030504040204" pitchFamily="34" charset="0"/>
                           </a:rPr>
@@ -13272,7 +16979,7 @@
                       </m:e>
                       <m:sub>
                         <m:r>
-                          <a:rPr lang="en-US" sz="2000" i="1" noProof="1">
+                          <a:rPr lang="en-GB" sz="2400" i="1" noProof="1" dirty="0" smtClean="0">
                             <a:latin typeface="Cambria Math" panose="02040503050406030204" pitchFamily="18" charset="0"/>
                             <a:ea typeface="Verdana" panose="020B0604030504040204" pitchFamily="34" charset="0"/>
                           </a:rPr>
@@ -13281,14 +16988,21 @@
                       </m:sub>
                     </m:sSub>
                     <m:r>
-                      <a:rPr lang="en-US" sz="2000" i="1" noProof="1">
+                      <a:rPr lang="en-GB" sz="2400" b="0" i="1" noProof="1" dirty="0" smtClean="0">
+                        <a:latin typeface="Cambria Math" panose="02040503050406030204" pitchFamily="18" charset="0"/>
+                        <a:ea typeface="Verdana" panose="020B0604030504040204" pitchFamily="34" charset="0"/>
+                      </a:rPr>
+                      <m:t> </m:t>
+                    </m:r>
+                    <m:r>
+                      <a:rPr lang="en-GB" sz="2200" i="1" noProof="1" dirty="0" smtClean="0">
                         <a:latin typeface="Cambria Math" panose="02040503050406030204" pitchFamily="18" charset="0"/>
                         <a:ea typeface="Verdana" panose="020B0604030504040204" pitchFamily="34" charset="0"/>
                       </a:rPr>
                       <m:t>+</m:t>
                     </m:r>
                     <m:r>
-                      <a:rPr lang="en-US" sz="2000" i="1" noProof="1">
+                      <a:rPr lang="en-GB" sz="2200" i="1" noProof="1" dirty="0" smtClean="0">
                         <a:latin typeface="Cambria Math" panose="02040503050406030204" pitchFamily="18" charset="0"/>
                         <a:ea typeface="Cambria Math" panose="02040503050406030204" pitchFamily="18" charset="0"/>
                       </a:rPr>
@@ -13297,7 +17011,7 @@
                     <m:sSub>
                       <m:sSubPr>
                         <m:ctrlPr>
-                          <a:rPr lang="en-US" sz="2000" i="1" noProof="1">
+                          <a:rPr lang="en-GB" sz="2200" i="1" noProof="1" dirty="0" smtClean="0">
                             <a:latin typeface="Cambria Math" panose="02040503050406030204" pitchFamily="18" charset="0"/>
                             <a:ea typeface="Verdana" panose="020B0604030504040204" pitchFamily="34" charset="0"/>
                           </a:rPr>
@@ -13305,14 +17019,14 @@
                       </m:sSubPr>
                       <m:e>
                         <m:r>
-                          <a:rPr lang="en-US" sz="2000" i="1" noProof="1">
+                          <a:rPr lang="en-GB" sz="2200" i="1" noProof="1" dirty="0" smtClean="0">
                             <a:latin typeface="Cambria Math" panose="02040503050406030204" pitchFamily="18" charset="0"/>
                             <a:ea typeface="Verdana" panose="020B0604030504040204" pitchFamily="34" charset="0"/>
                           </a:rPr>
                           <m:t> </m:t>
                         </m:r>
                         <m:r>
-                          <a:rPr lang="en-US" sz="2000" i="1" noProof="1">
+                          <a:rPr lang="en-GB" sz="2200" i="1" noProof="1" dirty="0" smtClean="0">
                             <a:latin typeface="Cambria Math" panose="02040503050406030204" pitchFamily="18" charset="0"/>
                             <a:ea typeface="Verdana" panose="020B0604030504040204" pitchFamily="34" charset="0"/>
                           </a:rPr>
@@ -13321,28 +17035,28 @@
                       </m:e>
                       <m:sub>
                         <m:r>
-                          <a:rPr lang="en-US" sz="2000" i="1" noProof="1">
+                          <a:rPr lang="en-GB" sz="2200" i="1" noProof="1" dirty="0" smtClean="0">
                             <a:latin typeface="Cambria Math" panose="02040503050406030204" pitchFamily="18" charset="0"/>
                             <a:ea typeface="Verdana" panose="020B0604030504040204" pitchFamily="34" charset="0"/>
                           </a:rPr>
                           <m:t>𝑖</m:t>
                         </m:r>
                         <m:r>
-                          <a:rPr lang="en-US" sz="2000" i="1" noProof="1">
+                          <a:rPr lang="en-GB" sz="2200" i="1" noProof="1" dirty="0" smtClean="0">
                             <a:latin typeface="Cambria Math" panose="02040503050406030204" pitchFamily="18" charset="0"/>
                             <a:ea typeface="Verdana" panose="020B0604030504040204" pitchFamily="34" charset="0"/>
                           </a:rPr>
                           <m:t>,</m:t>
                         </m:r>
                         <m:r>
-                          <a:rPr lang="en-US" sz="2000" i="1" noProof="1">
+                          <a:rPr lang="en-GB" sz="2200" i="1" noProof="1" dirty="0" smtClean="0">
                             <a:latin typeface="Cambria Math" panose="02040503050406030204" pitchFamily="18" charset="0"/>
                             <a:ea typeface="Verdana" panose="020B0604030504040204" pitchFamily="34" charset="0"/>
                           </a:rPr>
                           <m:t>𝑡</m:t>
                         </m:r>
                         <m:r>
-                          <a:rPr lang="en-US" sz="2000" b="0" i="1" noProof="1" smtClean="0">
+                          <a:rPr lang="en-GB" sz="2200" i="1" noProof="1" dirty="0" smtClean="0">
                             <a:latin typeface="Cambria Math" panose="02040503050406030204" pitchFamily="18" charset="0"/>
                             <a:ea typeface="Verdana" panose="020B0604030504040204" pitchFamily="34" charset="0"/>
                           </a:rPr>
@@ -13351,15 +17065,58 @@
                       </m:sub>
                     </m:sSub>
                     <m:r>
-                      <a:rPr lang="en-US" sz="2000" i="1" noProof="1">
+                      <a:rPr lang="en-GB" sz="2200" i="1" noProof="1" dirty="0" smtClean="0">
                         <a:latin typeface="Cambria Math" panose="02040503050406030204" pitchFamily="18" charset="0"/>
                         <a:ea typeface="Verdana" panose="020B0604030504040204" pitchFamily="34" charset="0"/>
                       </a:rPr>
-                      <m:t>)</m:t>
+                      <m:t>+</m:t>
                     </m:r>
+                    <m:sSub>
+                      <m:sSubPr>
+                        <m:ctrlPr>
+                          <a:rPr lang="en-GB" sz="2200" i="1" noProof="1" dirty="0" smtClean="0">
+                            <a:latin typeface="Cambria Math" panose="02040503050406030204" pitchFamily="18" charset="0"/>
+                            <a:ea typeface="Cambria Math" panose="02040503050406030204" pitchFamily="18" charset="0"/>
+                          </a:rPr>
+                        </m:ctrlPr>
+                      </m:sSubPr>
+                      <m:e>
+                        <m:r>
+                          <a:rPr lang="en-GB" sz="2200" i="1" noProof="1" dirty="0" smtClean="0">
+                            <a:latin typeface="Cambria Math" panose="02040503050406030204" pitchFamily="18" charset="0"/>
+                            <a:ea typeface="Cambria Math" panose="02040503050406030204" pitchFamily="18" charset="0"/>
+                          </a:rPr>
+                          <m:t>𝜀</m:t>
+                        </m:r>
+                      </m:e>
+                      <m:sub>
+                        <m:r>
+                          <a:rPr lang="en-GB" sz="2200" i="1" noProof="1" dirty="0" smtClean="0">
+                            <a:latin typeface="Cambria Math" panose="02040503050406030204" pitchFamily="18" charset="0"/>
+                            <a:ea typeface="Cambria Math" panose="02040503050406030204" pitchFamily="18" charset="0"/>
+                          </a:rPr>
+                          <m:t>𝑖</m:t>
+                        </m:r>
+                        <m:r>
+                          <a:rPr lang="en-GB" sz="2200" i="1" noProof="1" dirty="0" smtClean="0">
+                            <a:latin typeface="Cambria Math" panose="02040503050406030204" pitchFamily="18" charset="0"/>
+                            <a:ea typeface="Cambria Math" panose="02040503050406030204" pitchFamily="18" charset="0"/>
+                          </a:rPr>
+                          <m:t>,</m:t>
+                        </m:r>
+                        <m:r>
+                          <a:rPr lang="en-GB" sz="2200" i="1" noProof="1" dirty="0" smtClean="0">
+                            <a:latin typeface="Cambria Math" panose="02040503050406030204" pitchFamily="18" charset="0"/>
+                            <a:ea typeface="Verdana" panose="020B0604030504040204" pitchFamily="34" charset="0"/>
+                          </a:rPr>
+                          <m:t>𝑡</m:t>
+                        </m:r>
+                      </m:sub>
+                    </m:sSub>
                   </m:oMath>
                 </a14:m>
-                <a:endParaRPr lang="en-US" sz="2000" noProof="1">
+                <a:endParaRPr lang="en-GB" sz="2000" noProof="1">
+                  <a:latin typeface="Verdana" panose="020B0604030504040204" pitchFamily="34" charset="0"/>
                   <a:ea typeface="Verdana" panose="020B0604030504040204" pitchFamily="34" charset="0"/>
                 </a:endParaRPr>
               </a:p>
@@ -13372,7 +17129,7 @@
                     <a:spcPts val="300"/>
                   </a:spcAft>
                 </a:pPr>
-                <a:endParaRPr lang="en-US" sz="2000" noProof="1">
+                <a:endParaRPr lang="en-GB" sz="2000" noProof="1">
                   <a:latin typeface="Verdana" panose="020B0604030504040204" pitchFamily="34" charset="0"/>
                   <a:ea typeface="Verdana" panose="020B0604030504040204" pitchFamily="34" charset="0"/>
                 </a:endParaRPr>
@@ -13387,7 +17144,7 @@
                   </a:spcAft>
                 </a:pPr>
                 <a:r>
-                  <a:rPr lang="en-US" sz="2000" noProof="1">
+                  <a:rPr lang="en-GB" sz="2000" noProof="1">
                     <a:latin typeface="Verdana" panose="020B0604030504040204" pitchFamily="34" charset="0"/>
                     <a:ea typeface="Verdana" panose="020B0604030504040204" pitchFamily="34" charset="0"/>
                   </a:rPr>
@@ -13396,7 +17153,7 @@
                 <a14:m>
                   <m:oMath xmlns:m="http://schemas.openxmlformats.org/officeDocument/2006/math">
                     <m:r>
-                      <a:rPr lang="en-US" sz="2000" noProof="1">
+                      <a:rPr lang="en-GB" sz="2000" noProof="1" dirty="0" smtClean="0">
                         <a:latin typeface="Cambria Math" panose="02040503050406030204" pitchFamily="18" charset="0"/>
                         <a:ea typeface="Verdana" panose="020B0604030504040204" pitchFamily="34" charset="0"/>
                       </a:rPr>
@@ -13405,11 +17162,11 @@
                   </m:oMath>
                 </a14:m>
                 <a:r>
-                  <a:rPr lang="en-US" sz="2000" noProof="1">
+                  <a:rPr lang="en-GB" sz="2000" noProof="1">
                     <a:latin typeface="Verdana" panose="020B0604030504040204" pitchFamily="34" charset="0"/>
                     <a:ea typeface="Verdana" panose="020B0604030504040204" pitchFamily="34" charset="0"/>
                   </a:rPr>
-                  <a:t>) of high ICT/AI in shock years</a:t>
+                  <a:t>) specific to high ICT/AI in shock years</a:t>
                 </a:r>
               </a:p>
               <a:p>
@@ -13422,14 +17179,14 @@
                   </a:spcAft>
                 </a:pPr>
                 <a:r>
-                  <a:rPr lang="en-US" sz="2000" noProof="1">
+                  <a:rPr lang="en-GB" sz="2000" noProof="1">
                     <a:latin typeface="Verdana" panose="020B0604030504040204" pitchFamily="34" charset="0"/>
                     <a:ea typeface="Verdana" panose="020B0604030504040204" pitchFamily="34" charset="0"/>
                   </a:rPr>
                   <a:t>	</a:t>
                 </a:r>
                 <a:r>
-                  <a:rPr lang="en-US" sz="2200" noProof="1">
+                  <a:rPr lang="en-GB" sz="2200" noProof="1">
                     <a:latin typeface="Verdana" panose="020B0604030504040204" pitchFamily="34" charset="0"/>
                     <a:ea typeface="Verdana" panose="020B0604030504040204" pitchFamily="34" charset="0"/>
                   </a:rPr>
@@ -13440,7 +17197,7 @@
                     <m:sSub>
                       <m:sSubPr>
                         <m:ctrlPr>
-                          <a:rPr lang="en-US" sz="2200" b="0" i="1" noProof="1" smtClean="0">
+                          <a:rPr lang="en-GB" sz="2200" i="1" noProof="1" dirty="0" smtClean="0">
                             <a:latin typeface="Cambria Math" panose="02040503050406030204" pitchFamily="18" charset="0"/>
                             <a:ea typeface="Verdana" panose="020B0604030504040204" pitchFamily="34" charset="0"/>
                           </a:rPr>
@@ -13448,44 +17205,30 @@
                       </m:sSubPr>
                       <m:e>
                         <m:r>
-                          <a:rPr lang="en-US" sz="2200" b="0" i="1" noProof="1" smtClean="0">
-                            <a:latin typeface="Cambria Math" panose="02040503050406030204" pitchFamily="18" charset="0"/>
-                            <a:ea typeface="Verdana" panose="020B0604030504040204" pitchFamily="34" charset="0"/>
-                          </a:rPr>
-                          <m:t>𝑃</m:t>
-                        </m:r>
-                        <m:r>
-                          <a:rPr lang="en-US" sz="2200" b="0" i="1" noProof="1" smtClean="0">
-                            <a:latin typeface="Cambria Math" panose="02040503050406030204" pitchFamily="18" charset="0"/>
-                            <a:ea typeface="Verdana" panose="020B0604030504040204" pitchFamily="34" charset="0"/>
-                          </a:rPr>
-                          <m:t>(</m:t>
-                        </m:r>
-                        <m:r>
-                          <a:rPr lang="en-US" sz="2200" i="1" noProof="1">
-                            <a:latin typeface="Cambria Math" panose="02040503050406030204" pitchFamily="18" charset="0"/>
-                            <a:ea typeface="Verdana" panose="020B0604030504040204" pitchFamily="34" charset="0"/>
-                          </a:rPr>
-                          <m:t>𝑌</m:t>
+                          <a:rPr lang="en-GB" sz="2200" i="1" noProof="1" dirty="0" smtClean="0">
+                            <a:latin typeface="Cambria Math" panose="02040503050406030204" pitchFamily="18" charset="0"/>
+                            <a:ea typeface="Verdana" panose="020B0604030504040204" pitchFamily="34" charset="0"/>
+                          </a:rPr>
+                          <m:t>𝑆</m:t>
                         </m:r>
                       </m:e>
                       <m:sub>
                         <m:r>
-                          <a:rPr lang="en-US" sz="2200" i="1" noProof="1">
+                          <a:rPr lang="en-GB" sz="2200" i="1" noProof="1" dirty="0" smtClean="0">
                             <a:latin typeface="Cambria Math" panose="02040503050406030204" pitchFamily="18" charset="0"/>
                             <a:ea typeface="Verdana" panose="020B0604030504040204" pitchFamily="34" charset="0"/>
                           </a:rPr>
                           <m:t>𝑖</m:t>
                         </m:r>
                         <m:r>
-                          <a:rPr lang="en-US" sz="2200" i="1" noProof="1">
+                          <a:rPr lang="en-GB" sz="2200" i="1" noProof="1" dirty="0" smtClean="0">
                             <a:latin typeface="Cambria Math" panose="02040503050406030204" pitchFamily="18" charset="0"/>
                             <a:ea typeface="Verdana" panose="020B0604030504040204" pitchFamily="34" charset="0"/>
                           </a:rPr>
                           <m:t>,</m:t>
                         </m:r>
                         <m:r>
-                          <a:rPr lang="en-US" sz="2200" i="1" noProof="1">
+                          <a:rPr lang="en-GB" sz="2200" i="1" noProof="1" dirty="0" smtClean="0">
                             <a:latin typeface="Cambria Math" panose="02040503050406030204" pitchFamily="18" charset="0"/>
                             <a:ea typeface="Verdana" panose="020B0604030504040204" pitchFamily="34" charset="0"/>
                           </a:rPr>
@@ -13494,58 +17237,16 @@
                       </m:sub>
                     </m:sSub>
                     <m:r>
-                      <a:rPr lang="en-US" sz="2200" b="0" i="1" noProof="1" smtClean="0">
-                        <a:latin typeface="Cambria Math" panose="02040503050406030204" pitchFamily="18" charset="0"/>
-                        <a:ea typeface="Verdana" panose="020B0604030504040204" pitchFamily="34" charset="0"/>
-                      </a:rPr>
-                      <m:t>)</m:t>
-                    </m:r>
-                    <m:r>
-                      <a:rPr lang="en-US" sz="2200" i="1" noProof="1">
+                      <a:rPr lang="en-GB" sz="2200" i="1" noProof="1" dirty="0" smtClean="0">
                         <a:latin typeface="Cambria Math" panose="02040503050406030204" pitchFamily="18" charset="0"/>
                         <a:ea typeface="Verdana" panose="020B0604030504040204" pitchFamily="34" charset="0"/>
                       </a:rPr>
                       <m:t>=</m:t>
                     </m:r>
-                    <m:r>
-                      <a:rPr lang="el-GR" sz="2200" i="1" noProof="1">
-                        <a:latin typeface="Cambria Math" panose="02040503050406030204" pitchFamily="18" charset="0"/>
-                        <a:ea typeface="Cambria Math" panose="02040503050406030204" pitchFamily="18" charset="0"/>
-                      </a:rPr>
-                      <m:t>𝜃</m:t>
-                    </m:r>
-                    <m:r>
-                      <a:rPr lang="en-US" sz="2200" b="0" i="1" noProof="1" smtClean="0">
-                        <a:latin typeface="Cambria Math" panose="02040503050406030204" pitchFamily="18" charset="0"/>
-                        <a:ea typeface="Cambria Math" panose="02040503050406030204" pitchFamily="18" charset="0"/>
-                      </a:rPr>
-                      <m:t> </m:t>
-                    </m:r>
-                    <m:r>
-                      <a:rPr lang="en-US" sz="2200" i="1" noProof="1">
-                        <a:latin typeface="Cambria Math" panose="02040503050406030204" pitchFamily="18" charset="0"/>
-                        <a:ea typeface="Cambria Math" panose="02040503050406030204" pitchFamily="18" charset="0"/>
-                      </a:rPr>
-                      <m:t>(</m:t>
-                    </m:r>
-                    <m:r>
-                      <a:rPr lang="en-US" sz="2200" i="1" noProof="1">
-                        <a:latin typeface="Cambria Math" panose="02040503050406030204" pitchFamily="18" charset="0"/>
-                        <a:ea typeface="Cambria Math" panose="02040503050406030204" pitchFamily="18" charset="0"/>
-                      </a:rPr>
-                      <m:t>𝛼</m:t>
-                    </m:r>
-                    <m:r>
-                      <a:rPr lang="en-US" sz="2200" i="1" noProof="1">
-                        <a:latin typeface="Cambria Math" panose="02040503050406030204" pitchFamily="18" charset="0"/>
-                        <a:ea typeface="Verdana" panose="020B0604030504040204" pitchFamily="34" charset="0"/>
-                      </a:rPr>
-                      <m:t>+</m:t>
-                    </m:r>
                   </m:oMath>
                 </a14:m>
                 <a:r>
-                  <a:rPr lang="en-US" sz="2200" noProof="1">
+                  <a:rPr lang="en-GB" sz="2200" noProof="1">
                     <a:ea typeface="Verdana" panose="020B0604030504040204" pitchFamily="34" charset="0"/>
                   </a:rPr>
                   <a:t> </a:t>
@@ -13555,7 +17256,7 @@
                     <m:sSub>
                       <m:sSubPr>
                         <m:ctrlPr>
-                          <a:rPr lang="en-US" sz="2200" i="1" noProof="1">
+                          <a:rPr lang="en-GB" sz="2200" i="1" noProof="1" dirty="0" smtClean="0">
                             <a:latin typeface="Cambria Math" panose="02040503050406030204" pitchFamily="18" charset="0"/>
                             <a:ea typeface="Cambria Math" panose="02040503050406030204" pitchFamily="18" charset="0"/>
                           </a:rPr>
@@ -13563,32 +17264,25 @@
                       </m:sSubPr>
                       <m:e>
                         <m:r>
-                          <a:rPr lang="en-US" sz="2200" i="1" noProof="1">
+                          <a:rPr lang="en-GB" sz="2200" i="1" noProof="1" dirty="0" smtClean="0">
                             <a:latin typeface="Cambria Math" panose="02040503050406030204" pitchFamily="18" charset="0"/>
                             <a:ea typeface="Cambria Math" panose="02040503050406030204" pitchFamily="18" charset="0"/>
                           </a:rPr>
-                          <m:t>𝜇</m:t>
+                          <m:t>𝛼</m:t>
                         </m:r>
                       </m:e>
                       <m:sub>
                         <m:r>
-                          <a:rPr lang="en-US" sz="2200" i="1" noProof="1">
+                          <a:rPr lang="en-GB" sz="2200" i="1" noProof="1" dirty="0" smtClean="0">
                             <a:latin typeface="Cambria Math" panose="02040503050406030204" pitchFamily="18" charset="0"/>
                             <a:ea typeface="Verdana" panose="020B0604030504040204" pitchFamily="34" charset="0"/>
                           </a:rPr>
                           <m:t>𝑖</m:t>
-                        </m:r>
-                        <m:r>
-                          <a:rPr lang="en-US" sz="2200" b="0" i="1" noProof="1" smtClean="0">
-                            <a:latin typeface="Cambria Math" panose="02040503050406030204" pitchFamily="18" charset="0"/>
-                            <a:ea typeface="Verdana" panose="020B0604030504040204" pitchFamily="34" charset="0"/>
-                          </a:rPr>
-                          <m:t> </m:t>
                         </m:r>
                       </m:sub>
                     </m:sSub>
                     <m:r>
-                      <a:rPr lang="en-US" sz="2200" i="1" noProof="1">
+                      <a:rPr lang="en-GB" sz="2200" i="1" noProof="1" dirty="0" smtClean="0">
                         <a:latin typeface="Cambria Math" panose="02040503050406030204" pitchFamily="18" charset="0"/>
                         <a:ea typeface="Verdana" panose="020B0604030504040204" pitchFamily="34" charset="0"/>
                       </a:rPr>
@@ -13597,7 +17291,7 @@
                   </m:oMath>
                 </a14:m>
                 <a:r>
-                  <a:rPr lang="en-US" sz="2200" noProof="1">
+                  <a:rPr lang="en-GB" sz="2200" noProof="1">
                     <a:ea typeface="Cambria Math" panose="02040503050406030204" pitchFamily="18" charset="0"/>
                   </a:rPr>
                   <a:t> </a:t>
@@ -13607,7 +17301,7 @@
                     <m:sSub>
                       <m:sSubPr>
                         <m:ctrlPr>
-                          <a:rPr lang="en-US" sz="2200" i="1" noProof="1">
+                          <a:rPr lang="en-GB" sz="2200" i="1" noProof="1" dirty="0" smtClean="0">
                             <a:latin typeface="Cambria Math" panose="02040503050406030204" pitchFamily="18" charset="0"/>
                             <a:ea typeface="Cambria Math" panose="02040503050406030204" pitchFamily="18" charset="0"/>
                           </a:rPr>
@@ -13615,7 +17309,7 @@
                       </m:sSubPr>
                       <m:e>
                         <m:r>
-                          <a:rPr lang="en-US" sz="2200" i="1" noProof="1">
+                          <a:rPr lang="en-GB" sz="2200" i="1" noProof="1" dirty="0" smtClean="0">
                             <a:latin typeface="Cambria Math" panose="02040503050406030204" pitchFamily="18" charset="0"/>
                             <a:ea typeface="Cambria Math" panose="02040503050406030204" pitchFamily="18" charset="0"/>
                           </a:rPr>
@@ -13624,7 +17318,7 @@
                       </m:e>
                       <m:sub>
                         <m:r>
-                          <a:rPr lang="en-US" sz="2200" b="0" i="1" noProof="1" smtClean="0">
+                          <a:rPr lang="en-GB" sz="2200" i="1" noProof="1" dirty="0" smtClean="0">
                             <a:latin typeface="Cambria Math" panose="02040503050406030204" pitchFamily="18" charset="0"/>
                             <a:ea typeface="Verdana" panose="020B0604030504040204" pitchFamily="34" charset="0"/>
                           </a:rPr>
@@ -13633,21 +17327,14 @@
                       </m:sub>
                     </m:sSub>
                     <m:r>
-                      <a:rPr lang="en-US" sz="2200" i="1" noProof="1">
+                      <a:rPr lang="en-GB" sz="2200" i="1" noProof="1" dirty="0" smtClean="0">
                         <a:latin typeface="Cambria Math" panose="02040503050406030204" pitchFamily="18" charset="0"/>
                         <a:ea typeface="Verdana" panose="020B0604030504040204" pitchFamily="34" charset="0"/>
                       </a:rPr>
                       <m:t>+</m:t>
                     </m:r>
                     <m:r>
-                      <a:rPr lang="en-US" sz="2200" b="0" i="1" noProof="1" smtClean="0">
-                        <a:latin typeface="Cambria Math" panose="02040503050406030204" pitchFamily="18" charset="0"/>
-                        <a:ea typeface="Verdana" panose="020B0604030504040204" pitchFamily="34" charset="0"/>
-                      </a:rPr>
-                      <m:t> </m:t>
-                    </m:r>
-                    <m:r>
-                      <a:rPr lang="en-US" sz="2200" i="1" noProof="1">
+                      <a:rPr lang="en-GB" sz="2200" i="1" noProof="1" dirty="0" smtClean="0">
                         <a:latin typeface="Cambria Math" panose="02040503050406030204" pitchFamily="18" charset="0"/>
                         <a:ea typeface="Cambria Math" panose="02040503050406030204" pitchFamily="18" charset="0"/>
                       </a:rPr>
@@ -13656,7 +17343,7 @@
                     <m:sSub>
                       <m:sSubPr>
                         <m:ctrlPr>
-                          <a:rPr lang="en-US" sz="2200" i="1" noProof="1">
+                          <a:rPr lang="en-GB" sz="2200" i="1" noProof="1" dirty="0" smtClean="0">
                             <a:latin typeface="Cambria Math" panose="02040503050406030204" pitchFamily="18" charset="0"/>
                             <a:ea typeface="Verdana" panose="020B0604030504040204" pitchFamily="34" charset="0"/>
                           </a:rPr>
@@ -13664,7 +17351,7 @@
                       </m:sSubPr>
                       <m:e>
                         <m:r>
-                          <a:rPr lang="en-US" sz="2200" i="1" noProof="1">
+                          <a:rPr lang="en-GB" sz="2200" i="1" noProof="1" dirty="0" smtClean="0">
                             <a:latin typeface="Cambria Math" panose="02040503050406030204" pitchFamily="18" charset="0"/>
                             <a:ea typeface="Verdana" panose="020B0604030504040204" pitchFamily="34" charset="0"/>
                           </a:rPr>
@@ -13673,7 +17360,7 @@
                         <m:sSubSup>
                           <m:sSubSupPr>
                             <m:ctrlPr>
-                              <a:rPr lang="en-US" sz="2200" b="0" i="1" noProof="1" smtClean="0">
+                              <a:rPr lang="en-GB" sz="2200" i="1" noProof="1" dirty="0" smtClean="0">
                                 <a:latin typeface="Cambria Math" panose="02040503050406030204" pitchFamily="18" charset="0"/>
                                 <a:ea typeface="Verdana" panose="020B0604030504040204" pitchFamily="34" charset="0"/>
                               </a:rPr>
@@ -13681,7 +17368,7 @@
                           </m:sSubSupPr>
                           <m:e>
                             <m:r>
-                              <a:rPr lang="en-US" sz="2200" b="0" i="1" noProof="1" smtClean="0">
+                              <a:rPr lang="en-GB" sz="2200" i="1" noProof="1" dirty="0" smtClean="0">
                                 <a:latin typeface="Cambria Math" panose="02040503050406030204" pitchFamily="18" charset="0"/>
                                 <a:ea typeface="Verdana" panose="020B0604030504040204" pitchFamily="34" charset="0"/>
                               </a:rPr>
@@ -13690,28 +17377,28 @@
                           </m:e>
                           <m:sub>
                             <m:r>
-                              <a:rPr lang="en-US" sz="2200" b="0" i="1" noProof="1" smtClean="0">
+                              <a:rPr lang="en-GB" sz="2200" i="1" noProof="1" dirty="0" smtClean="0">
                                 <a:latin typeface="Cambria Math" panose="02040503050406030204" pitchFamily="18" charset="0"/>
                                 <a:ea typeface="Verdana" panose="020B0604030504040204" pitchFamily="34" charset="0"/>
                               </a:rPr>
                               <m:t>𝑖</m:t>
                             </m:r>
                             <m:r>
-                              <a:rPr lang="en-US" sz="2200" b="0" i="1" noProof="1" smtClean="0">
+                              <a:rPr lang="en-GB" sz="2200" i="1" noProof="1" dirty="0" smtClean="0">
                                 <a:latin typeface="Cambria Math" panose="02040503050406030204" pitchFamily="18" charset="0"/>
                                 <a:ea typeface="Verdana" panose="020B0604030504040204" pitchFamily="34" charset="0"/>
                               </a:rPr>
                               <m:t>,</m:t>
                             </m:r>
                             <m:r>
-                              <a:rPr lang="en-US" sz="2200" b="0" i="1" noProof="1" smtClean="0">
+                              <a:rPr lang="en-GB" sz="2200" i="1" noProof="1" dirty="0" smtClean="0">
                                 <a:latin typeface="Cambria Math" panose="02040503050406030204" pitchFamily="18" charset="0"/>
                                 <a:ea typeface="Verdana" panose="020B0604030504040204" pitchFamily="34" charset="0"/>
                               </a:rPr>
                               <m:t>𝑡</m:t>
                             </m:r>
                             <m:r>
-                              <a:rPr lang="en-US" sz="2200" b="0" i="1" noProof="1" smtClean="0">
+                              <a:rPr lang="en-GB" sz="2200" i="1" noProof="1" dirty="0" smtClean="0">
                                 <a:latin typeface="Cambria Math" panose="02040503050406030204" pitchFamily="18" charset="0"/>
                                 <a:ea typeface="Verdana" panose="020B0604030504040204" pitchFamily="34" charset="0"/>
                               </a:rPr>
@@ -13720,7 +17407,7 @@
                           </m:sub>
                           <m:sup>
                             <m:r>
-                              <a:rPr lang="en-US" sz="2200" b="0" i="1" noProof="1" smtClean="0">
+                              <a:rPr lang="en-GB" sz="2200" i="1" noProof="1" dirty="0" smtClean="0">
                                 <a:latin typeface="Cambria Math" panose="02040503050406030204" pitchFamily="18" charset="0"/>
                                 <a:ea typeface="Verdana" panose="020B0604030504040204" pitchFamily="34" charset="0"/>
                               </a:rPr>
@@ -13731,7 +17418,7 @@
                       </m:e>
                       <m:sub>
                         <m:r>
-                          <a:rPr lang="en-US" sz="2200" i="1" noProof="1" smtClean="0">
+                          <a:rPr lang="en-GB" sz="2200" i="1" noProof="1" dirty="0" smtClean="0">
                             <a:latin typeface="Cambria Math" panose="02040503050406030204" pitchFamily="18" charset="0"/>
                             <a:ea typeface="Verdana" panose="020B0604030504040204" pitchFamily="34" charset="0"/>
                           </a:rPr>
@@ -13740,21 +17427,21 @@
                       </m:sub>
                     </m:sSub>
                     <m:r>
-                      <a:rPr lang="en-US" sz="2200" i="1" noProof="1">
+                      <a:rPr lang="en-GB" sz="2200" i="1" noProof="1" dirty="0" smtClean="0">
                         <a:latin typeface="Cambria Math" panose="02040503050406030204" pitchFamily="18" charset="0"/>
                         <a:ea typeface="Verdana" panose="020B0604030504040204" pitchFamily="34" charset="0"/>
                       </a:rPr>
                       <m:t>+</m:t>
                     </m:r>
                     <m:r>
-                      <a:rPr lang="en-US" sz="2200" i="1" noProof="1">
+                      <a:rPr lang="en-GB" sz="2200" i="1" noProof="1" dirty="0" smtClean="0">
                         <a:latin typeface="Cambria Math" panose="02040503050406030204" pitchFamily="18" charset="0"/>
                         <a:ea typeface="Cambria Math" panose="02040503050406030204" pitchFamily="18" charset="0"/>
                       </a:rPr>
                       <m:t>𝛾</m:t>
                     </m:r>
                     <m:r>
-                      <a:rPr lang="en-US" sz="2200" i="1" noProof="1">
+                      <a:rPr lang="en-GB" sz="2200" i="1" noProof="1" dirty="0" smtClean="0">
                         <a:latin typeface="Cambria Math" panose="02040503050406030204" pitchFamily="18" charset="0"/>
                         <a:ea typeface="Cambria Math" panose="02040503050406030204" pitchFamily="18" charset="0"/>
                       </a:rPr>
@@ -13763,7 +17450,7 @@
                     <m:sSubSup>
                       <m:sSubSupPr>
                         <m:ctrlPr>
-                          <a:rPr lang="en-US" sz="2200" i="1" noProof="1">
+                          <a:rPr lang="en-GB" sz="2200" i="1" noProof="1" dirty="0" smtClean="0">
                             <a:latin typeface="Cambria Math" panose="02040503050406030204" pitchFamily="18" charset="0"/>
                             <a:ea typeface="Verdana" panose="020B0604030504040204" pitchFamily="34" charset="0"/>
                           </a:rPr>
@@ -13771,7 +17458,7 @@
                       </m:sSubSupPr>
                       <m:e>
                         <m:r>
-                          <a:rPr lang="en-US" sz="2200" i="1" noProof="1">
+                          <a:rPr lang="en-GB" sz="2200" i="1" noProof="1" dirty="0" smtClean="0">
                             <a:latin typeface="Cambria Math" panose="02040503050406030204" pitchFamily="18" charset="0"/>
                             <a:ea typeface="Verdana" panose="020B0604030504040204" pitchFamily="34" charset="0"/>
                           </a:rPr>
@@ -13780,28 +17467,28 @@
                       </m:e>
                       <m:sub>
                         <m:r>
-                          <a:rPr lang="en-US" sz="2200" i="1" noProof="1">
+                          <a:rPr lang="en-GB" sz="2200" i="1" noProof="1" dirty="0" smtClean="0">
                             <a:latin typeface="Cambria Math" panose="02040503050406030204" pitchFamily="18" charset="0"/>
                             <a:ea typeface="Verdana" panose="020B0604030504040204" pitchFamily="34" charset="0"/>
                           </a:rPr>
                           <m:t>𝑖</m:t>
                         </m:r>
                         <m:r>
-                          <a:rPr lang="en-US" sz="2200" i="1" noProof="1">
+                          <a:rPr lang="en-GB" sz="2200" i="1" noProof="1" dirty="0" smtClean="0">
                             <a:latin typeface="Cambria Math" panose="02040503050406030204" pitchFamily="18" charset="0"/>
                             <a:ea typeface="Verdana" panose="020B0604030504040204" pitchFamily="34" charset="0"/>
                           </a:rPr>
                           <m:t>,</m:t>
                         </m:r>
                         <m:r>
-                          <a:rPr lang="en-US" sz="2200" i="1" noProof="1">
+                          <a:rPr lang="en-GB" sz="2200" i="1" noProof="1" dirty="0" smtClean="0">
                             <a:latin typeface="Cambria Math" panose="02040503050406030204" pitchFamily="18" charset="0"/>
                             <a:ea typeface="Verdana" panose="020B0604030504040204" pitchFamily="34" charset="0"/>
                           </a:rPr>
                           <m:t>𝑡</m:t>
                         </m:r>
                         <m:r>
-                          <a:rPr lang="en-US" sz="2200" b="0" i="1" noProof="1" smtClean="0">
+                          <a:rPr lang="en-GB" sz="2200" i="1" noProof="1" dirty="0" smtClean="0">
                             <a:latin typeface="Cambria Math" panose="02040503050406030204" pitchFamily="18" charset="0"/>
                             <a:ea typeface="Verdana" panose="020B0604030504040204" pitchFamily="34" charset="0"/>
                           </a:rPr>
@@ -13810,7 +17497,7 @@
                       </m:sub>
                       <m:sup>
                         <m:r>
-                          <a:rPr lang="en-US" sz="2200" i="1" noProof="1">
+                          <a:rPr lang="en-GB" sz="2200" i="1" noProof="1" dirty="0" smtClean="0">
                             <a:latin typeface="Cambria Math" panose="02040503050406030204" pitchFamily="18" charset="0"/>
                             <a:ea typeface="Verdana" panose="020B0604030504040204" pitchFamily="34" charset="0"/>
                           </a:rPr>
@@ -13821,7 +17508,7 @@
                     <m:sSub>
                       <m:sSubPr>
                         <m:ctrlPr>
-                          <a:rPr lang="en-US" sz="2200" i="1" noProof="1">
+                          <a:rPr lang="en-GB" sz="2200" i="1" noProof="1" dirty="0" smtClean="0">
                             <a:latin typeface="Cambria Math" panose="02040503050406030204" pitchFamily="18" charset="0"/>
                             <a:ea typeface="Verdana" panose="020B0604030504040204" pitchFamily="34" charset="0"/>
                           </a:rPr>
@@ -13829,7 +17516,7 @@
                       </m:sSubPr>
                       <m:e>
                         <m:r>
-                          <a:rPr lang="en-US" sz="2200" i="1" noProof="1">
+                          <a:rPr lang="en-GB" sz="2200" i="1" noProof="1" dirty="0" smtClean="0">
                             <a:latin typeface="Cambria Math" panose="02040503050406030204" pitchFamily="18" charset="0"/>
                             <a:ea typeface="Verdana" panose="020B0604030504040204" pitchFamily="34" charset="0"/>
                           </a:rPr>
@@ -13838,7 +17525,7 @@
                       </m:e>
                       <m:sub>
                         <m:r>
-                          <a:rPr lang="en-US" sz="2200" i="1" noProof="1">
+                          <a:rPr lang="en-GB" sz="2200" i="1" noProof="1" dirty="0" smtClean="0">
                             <a:latin typeface="Cambria Math" panose="02040503050406030204" pitchFamily="18" charset="0"/>
                             <a:ea typeface="Verdana" panose="020B0604030504040204" pitchFamily="34" charset="0"/>
                           </a:rPr>
@@ -13847,14 +17534,14 @@
                       </m:sub>
                     </m:sSub>
                     <m:r>
-                      <a:rPr lang="en-US" sz="2200" i="1" noProof="1">
+                      <a:rPr lang="en-GB" sz="2200" b="0" i="1" noProof="1" dirty="0" smtClean="0">
                         <a:latin typeface="Cambria Math" panose="02040503050406030204" pitchFamily="18" charset="0"/>
                         <a:ea typeface="Verdana" panose="020B0604030504040204" pitchFamily="34" charset="0"/>
                       </a:rPr>
                       <m:t>+</m:t>
                     </m:r>
                     <m:r>
-                      <a:rPr lang="en-US" sz="2200" i="1" noProof="1">
+                      <a:rPr lang="en-GB" sz="2200" i="1" noProof="1" dirty="0" smtClean="0">
                         <a:latin typeface="Cambria Math" panose="02040503050406030204" pitchFamily="18" charset="0"/>
                         <a:ea typeface="Cambria Math" panose="02040503050406030204" pitchFamily="18" charset="0"/>
                       </a:rPr>
@@ -13863,7 +17550,7 @@
                     <m:sSub>
                       <m:sSubPr>
                         <m:ctrlPr>
-                          <a:rPr lang="en-US" sz="2200" i="1" noProof="1">
+                          <a:rPr lang="en-GB" sz="2200" i="1" noProof="1" dirty="0" smtClean="0">
                             <a:latin typeface="Cambria Math" panose="02040503050406030204" pitchFamily="18" charset="0"/>
                             <a:ea typeface="Verdana" panose="020B0604030504040204" pitchFamily="34" charset="0"/>
                           </a:rPr>
@@ -13871,14 +17558,14 @@
                       </m:sSubPr>
                       <m:e>
                         <m:r>
-                          <a:rPr lang="en-US" sz="2200" i="1" noProof="1">
+                          <a:rPr lang="en-GB" sz="2200" i="1" noProof="1" dirty="0" smtClean="0">
                             <a:latin typeface="Cambria Math" panose="02040503050406030204" pitchFamily="18" charset="0"/>
                             <a:ea typeface="Verdana" panose="020B0604030504040204" pitchFamily="34" charset="0"/>
                           </a:rPr>
                           <m:t> </m:t>
                         </m:r>
                         <m:r>
-                          <a:rPr lang="en-US" sz="2200" i="1" noProof="1">
+                          <a:rPr lang="en-GB" sz="2200" i="1" noProof="1" dirty="0" smtClean="0">
                             <a:latin typeface="Cambria Math" panose="02040503050406030204" pitchFamily="18" charset="0"/>
                             <a:ea typeface="Verdana" panose="020B0604030504040204" pitchFamily="34" charset="0"/>
                           </a:rPr>
@@ -13887,28 +17574,28 @@
                       </m:e>
                       <m:sub>
                         <m:r>
-                          <a:rPr lang="en-US" sz="2200" i="1" noProof="1">
+                          <a:rPr lang="en-GB" sz="2200" i="1" noProof="1" dirty="0" smtClean="0">
                             <a:latin typeface="Cambria Math" panose="02040503050406030204" pitchFamily="18" charset="0"/>
                             <a:ea typeface="Verdana" panose="020B0604030504040204" pitchFamily="34" charset="0"/>
                           </a:rPr>
                           <m:t>𝑖</m:t>
                         </m:r>
                         <m:r>
-                          <a:rPr lang="en-US" sz="2200" i="1" noProof="1">
+                          <a:rPr lang="en-GB" sz="2200" i="1" noProof="1" dirty="0" smtClean="0">
                             <a:latin typeface="Cambria Math" panose="02040503050406030204" pitchFamily="18" charset="0"/>
                             <a:ea typeface="Verdana" panose="020B0604030504040204" pitchFamily="34" charset="0"/>
                           </a:rPr>
                           <m:t>,</m:t>
                         </m:r>
                         <m:r>
-                          <a:rPr lang="en-US" sz="2200" i="1" noProof="1">
+                          <a:rPr lang="en-GB" sz="2200" i="1" noProof="1" dirty="0" smtClean="0">
                             <a:latin typeface="Cambria Math" panose="02040503050406030204" pitchFamily="18" charset="0"/>
                             <a:ea typeface="Verdana" panose="020B0604030504040204" pitchFamily="34" charset="0"/>
                           </a:rPr>
                           <m:t>𝑡</m:t>
                         </m:r>
                         <m:r>
-                          <a:rPr lang="en-US" sz="2200" b="0" i="1" noProof="1" smtClean="0">
+                          <a:rPr lang="en-GB" sz="2200" i="1" noProof="1" dirty="0" smtClean="0">
                             <a:latin typeface="Cambria Math" panose="02040503050406030204" pitchFamily="18" charset="0"/>
                             <a:ea typeface="Verdana" panose="020B0604030504040204" pitchFamily="34" charset="0"/>
                           </a:rPr>
@@ -13917,19 +17604,57 @@
                       </m:sub>
                     </m:sSub>
                     <m:r>
-                      <a:rPr lang="en-US" sz="2200" b="0" i="1" noProof="1" smtClean="0">
+                      <a:rPr lang="en-GB" sz="2200" i="1" noProof="1" dirty="0" smtClean="0">
                         <a:latin typeface="Cambria Math" panose="02040503050406030204" pitchFamily="18" charset="0"/>
                         <a:ea typeface="Verdana" panose="020B0604030504040204" pitchFamily="34" charset="0"/>
                       </a:rPr>
-                      <m:t>)</m:t>
+                      <m:t>+</m:t>
                     </m:r>
+                    <m:sSub>
+                      <m:sSubPr>
+                        <m:ctrlPr>
+                          <a:rPr lang="en-GB" sz="2200" i="1" noProof="1" dirty="0" smtClean="0">
+                            <a:latin typeface="Cambria Math" panose="02040503050406030204" pitchFamily="18" charset="0"/>
+                            <a:ea typeface="Cambria Math" panose="02040503050406030204" pitchFamily="18" charset="0"/>
+                          </a:rPr>
+                        </m:ctrlPr>
+                      </m:sSubPr>
+                      <m:e>
+                        <m:r>
+                          <a:rPr lang="en-GB" sz="2200" i="1" noProof="1" dirty="0" smtClean="0">
+                            <a:latin typeface="Cambria Math" panose="02040503050406030204" pitchFamily="18" charset="0"/>
+                            <a:ea typeface="Cambria Math" panose="02040503050406030204" pitchFamily="18" charset="0"/>
+                          </a:rPr>
+                          <m:t>𝜀</m:t>
+                        </m:r>
+                      </m:e>
+                      <m:sub>
+                        <m:r>
+                          <a:rPr lang="en-GB" sz="2200" i="1" noProof="1" dirty="0" smtClean="0">
+                            <a:latin typeface="Cambria Math" panose="02040503050406030204" pitchFamily="18" charset="0"/>
+                            <a:ea typeface="Cambria Math" panose="02040503050406030204" pitchFamily="18" charset="0"/>
+                          </a:rPr>
+                          <m:t>𝑖</m:t>
+                        </m:r>
+                        <m:r>
+                          <a:rPr lang="en-GB" sz="2200" i="1" noProof="1" dirty="0" smtClean="0">
+                            <a:latin typeface="Cambria Math" panose="02040503050406030204" pitchFamily="18" charset="0"/>
+                            <a:ea typeface="Cambria Math" panose="02040503050406030204" pitchFamily="18" charset="0"/>
+                          </a:rPr>
+                          <m:t>,</m:t>
+                        </m:r>
+                        <m:r>
+                          <a:rPr lang="en-GB" sz="2200" i="1" noProof="1" dirty="0" smtClean="0">
+                            <a:latin typeface="Cambria Math" panose="02040503050406030204" pitchFamily="18" charset="0"/>
+                            <a:ea typeface="Verdana" panose="020B0604030504040204" pitchFamily="34" charset="0"/>
+                          </a:rPr>
+                          <m:t>𝑡</m:t>
+                        </m:r>
+                      </m:sub>
+                    </m:sSub>
                   </m:oMath>
                 </a14:m>
-                <a:endParaRPr lang="en-US" sz="2200" noProof="1">
-                  <a:solidFill>
-                    <a:schemeClr val="tx1"/>
-                  </a:solidFill>
-                  <a:latin typeface="Verdana" panose="020B0604030504040204" pitchFamily="34" charset="0"/>
+                <a:endParaRPr lang="en-GB" sz="2200" noProof="1">
                   <a:ea typeface="Verdana" panose="020B0604030504040204" pitchFamily="34" charset="0"/>
                 </a:endParaRPr>
               </a:p>
@@ -13942,7 +17667,7 @@
                     <a:spcPts val="300"/>
                   </a:spcAft>
                 </a:pPr>
-                <a:endParaRPr lang="en-US" sz="2200" noProof="1">
+                <a:endParaRPr lang="en-GB" sz="2200" noProof="1">
                   <a:solidFill>
                     <a:schemeClr val="tx1"/>
                   </a:solidFill>
@@ -13964,7 +17689,7 @@
                     <m:sSub>
                       <m:sSubPr>
                         <m:ctrlPr>
-                          <a:rPr lang="en-US" sz="1900" i="1" noProof="1">
+                          <a:rPr lang="en-GB" sz="1900" b="0" i="1" noProof="1" dirty="0" smtClean="0">
                             <a:solidFill>
                               <a:schemeClr val="tx1"/>
                             </a:solidFill>
@@ -13975,19 +17700,19 @@
                       </m:sSubPr>
                       <m:e>
                         <m:r>
-                          <a:rPr lang="en-US" sz="1900" i="1" noProof="1">
+                          <a:rPr lang="en-GB" sz="1900" b="0" i="1" noProof="1" dirty="0" smtClean="0">
                             <a:solidFill>
                               <a:schemeClr val="tx1"/>
                             </a:solidFill>
                             <a:latin typeface="Cambria Math" panose="02040503050406030204" pitchFamily="18" charset="0"/>
                             <a:ea typeface="Verdana" panose="020B0604030504040204" pitchFamily="34" charset="0"/>
                           </a:rPr>
-                          <m:t>𝑌</m:t>
+                          <m:t>𝑆</m:t>
                         </m:r>
                       </m:e>
                       <m:sub>
                         <m:r>
-                          <a:rPr lang="en-US" sz="1900" i="1" noProof="1">
+                          <a:rPr lang="en-GB" sz="1900" i="1" noProof="1" dirty="0" smtClean="0">
                             <a:solidFill>
                               <a:schemeClr val="tx1"/>
                             </a:solidFill>
@@ -13997,7 +17722,7 @@
                           <m:t>𝑖</m:t>
                         </m:r>
                         <m:r>
-                          <a:rPr lang="en-US" sz="1900" i="1" noProof="1">
+                          <a:rPr lang="en-GB" sz="1900" i="1" noProof="1" dirty="0" smtClean="0">
                             <a:solidFill>
                               <a:schemeClr val="tx1"/>
                             </a:solidFill>
@@ -14007,7 +17732,7 @@
                           <m:t>,</m:t>
                         </m:r>
                         <m:r>
-                          <a:rPr lang="en-US" sz="1900" i="1" noProof="1">
+                          <a:rPr lang="en-GB" sz="1900" i="1" noProof="1" dirty="0" smtClean="0">
                             <a:solidFill>
                               <a:schemeClr val="tx1"/>
                             </a:solidFill>
@@ -14019,7 +17744,7 @@
                       </m:sub>
                     </m:sSub>
                     <m:r>
-                      <a:rPr lang="en-US" sz="1900" b="0" i="1" noProof="1" smtClean="0">
+                      <a:rPr lang="en-GB" sz="1900" b="0" i="1" noProof="1" dirty="0" smtClean="0">
                         <a:solidFill>
                           <a:schemeClr val="tx1"/>
                         </a:solidFill>
@@ -14029,7 +17754,7 @@
                       <m:t>=1 </m:t>
                     </m:r>
                     <m:r>
-                      <a:rPr lang="en-US" sz="1900" b="0" i="0" noProof="1" smtClean="0">
+                      <a:rPr lang="en-GB" sz="1900" b="0" i="0" noProof="1" dirty="0" smtClean="0">
                         <a:solidFill>
                           <a:schemeClr val="tx1"/>
                         </a:solidFill>
@@ -14041,86 +17766,88 @@
                   </m:oMath>
                 </a14:m>
                 <a:r>
-                  <a:rPr lang="nl-NL" sz="1800" dirty="0">
+                  <a:rPr lang="en-GB" sz="1800" noProof="1">
                     <a:solidFill>
                       <a:schemeClr val="tx1"/>
                     </a:solidFill>
                   </a:rPr>
-                  <a:t>if </a:t>
+                  <a:t>if growth surprise &gt;0 (otherwise 0)</a:t>
                 </a:r>
                 <a:r>
-                  <a:rPr lang="nl-NL" sz="1800" dirty="0" err="1">
-                    <a:solidFill>
-                      <a:schemeClr val="tx1"/>
-                    </a:solidFill>
-                  </a:rPr>
-                  <a:t>growth</a:t>
-                </a:r>
-                <a:r>
-                  <a:rPr lang="nl-NL" sz="1800" dirty="0">
-                    <a:solidFill>
-                      <a:schemeClr val="tx1"/>
-                    </a:solidFill>
-                  </a:rPr>
-                  <a:t> surprise &gt; 0 (</a:t>
-                </a:r>
-                <a:r>
-                  <a:rPr lang="nl-NL" sz="1800" dirty="0" err="1">
-                    <a:solidFill>
-                      <a:schemeClr val="tx1"/>
-                    </a:solidFill>
-                  </a:rPr>
-                  <a:t>otherwise</a:t>
-                </a:r>
-                <a:r>
-                  <a:rPr lang="nl-NL" sz="1800" dirty="0">
-                    <a:solidFill>
-                      <a:schemeClr val="tx1"/>
-                    </a:solidFill>
-                  </a:rPr>
-                  <a:t> 0)</a:t>
-                </a:r>
-                <a:r>
-                  <a:rPr lang="nl-NL" sz="1800" dirty="0"/>
-                  <a:t>;</a:t>
-                </a:r>
-                <a:r>
-                  <a:rPr lang="nl-NL" sz="1800" dirty="0">
-                    <a:solidFill>
-                      <a:schemeClr val="tx1"/>
-                    </a:solidFill>
-                  </a:rPr>
-                  <a:t> </a:t>
+                  <a:rPr lang="en-GB" sz="1800" noProof="1"/>
+                  <a:t>; </a:t>
                 </a:r>
                 <a14:m>
                   <m:oMath xmlns:m="http://schemas.openxmlformats.org/officeDocument/2006/math">
-                    <m:r>
-                      <a:rPr lang="en-US" sz="2000" b="0" i="0" noProof="1" smtClean="0">
-                        <a:latin typeface="Cambria Math" panose="02040503050406030204" pitchFamily="18" charset="0"/>
-                        <a:ea typeface="Cambria Math" panose="02040503050406030204" pitchFamily="18" charset="0"/>
-                      </a:rPr>
-                      <m:t> </m:t>
-                    </m:r>
-                    <m:r>
-                      <a:rPr lang="el-GR" sz="2000" i="1" noProof="1">
-                        <a:latin typeface="Cambria Math" panose="02040503050406030204" pitchFamily="18" charset="0"/>
-                        <a:ea typeface="Cambria Math" panose="02040503050406030204" pitchFamily="18" charset="0"/>
-                      </a:rPr>
-                      <m:t>𝜃</m:t>
-                    </m:r>
+                    <m:sSub>
+                      <m:sSubPr>
+                        <m:ctrlPr>
+                          <a:rPr lang="en-GB" sz="1800" i="1" noProof="1" dirty="0" smtClean="0">
+                            <a:latin typeface="Cambria Math" panose="02040503050406030204" pitchFamily="18" charset="0"/>
+                            <a:ea typeface="Cambria Math" panose="02040503050406030204" pitchFamily="18" charset="0"/>
+                          </a:rPr>
+                        </m:ctrlPr>
+                      </m:sSubPr>
+                      <m:e>
+                        <m:r>
+                          <a:rPr lang="en-GB" sz="1800" i="1" noProof="1" dirty="0" smtClean="0">
+                            <a:latin typeface="Cambria Math" panose="02040503050406030204" pitchFamily="18" charset="0"/>
+                            <a:ea typeface="Cambria Math" panose="02040503050406030204" pitchFamily="18" charset="0"/>
+                          </a:rPr>
+                          <m:t>𝜇</m:t>
+                        </m:r>
+                      </m:e>
+                      <m:sub>
+                        <m:r>
+                          <a:rPr lang="en-GB" sz="1800" i="1" noProof="1" dirty="0" smtClean="0">
+                            <a:latin typeface="Cambria Math" panose="02040503050406030204" pitchFamily="18" charset="0"/>
+                            <a:ea typeface="Verdana" panose="020B0604030504040204" pitchFamily="34" charset="0"/>
+                          </a:rPr>
+                          <m:t>𝑖</m:t>
+                        </m:r>
+                      </m:sub>
+                    </m:sSub>
                   </m:oMath>
                 </a14:m>
                 <a:r>
-                  <a:rPr lang="nl-NL" sz="1800" dirty="0"/>
-                  <a:t> is standard </a:t>
+                  <a:rPr lang="en-GB" sz="1800" noProof="1"/>
+                  <a:t> is country FE; </a:t>
                 </a:r>
+                <a14:m>
+                  <m:oMath xmlns:m="http://schemas.openxmlformats.org/officeDocument/2006/math">
+                    <m:sSub>
+                      <m:sSubPr>
+                        <m:ctrlPr>
+                          <a:rPr lang="en-GB" sz="1800" i="1" noProof="1" dirty="0" smtClean="0">
+                            <a:latin typeface="Cambria Math" panose="02040503050406030204" pitchFamily="18" charset="0"/>
+                            <a:ea typeface="Cambria Math" panose="02040503050406030204" pitchFamily="18" charset="0"/>
+                          </a:rPr>
+                        </m:ctrlPr>
+                      </m:sSubPr>
+                      <m:e>
+                        <m:r>
+                          <a:rPr lang="en-GB" sz="1800" i="1" noProof="1" dirty="0" smtClean="0">
+                            <a:latin typeface="Cambria Math" panose="02040503050406030204" pitchFamily="18" charset="0"/>
+                            <a:ea typeface="Cambria Math" panose="02040503050406030204" pitchFamily="18" charset="0"/>
+                          </a:rPr>
+                          <m:t>𝜏</m:t>
+                        </m:r>
+                      </m:e>
+                      <m:sub>
+                        <m:r>
+                          <a:rPr lang="en-GB" sz="1800" i="1" noProof="1" dirty="0" smtClean="0">
+                            <a:latin typeface="Cambria Math" panose="02040503050406030204" pitchFamily="18" charset="0"/>
+                            <a:ea typeface="Verdana" panose="020B0604030504040204" pitchFamily="34" charset="0"/>
+                          </a:rPr>
+                          <m:t>𝑡</m:t>
+                        </m:r>
+                      </m:sub>
+                    </m:sSub>
+                  </m:oMath>
+                </a14:m>
                 <a:r>
-                  <a:rPr lang="nl-NL" sz="1800" dirty="0" err="1"/>
-                  <a:t>normal</a:t>
-                </a:r>
-                <a:r>
-                  <a:rPr lang="nl-NL" sz="1800" dirty="0"/>
-                  <a:t> CDF</a:t>
+                  <a:rPr lang="en-GB" sz="1800" noProof="1"/>
+                  <a:t> is time FE</a:t>
                 </a:r>
               </a:p>
               <a:p>
@@ -14137,7 +17864,7 @@
                     <m:sSub>
                       <m:sSubPr>
                         <m:ctrlPr>
-                          <a:rPr lang="en-US" sz="1900" i="1" noProof="1">
+                          <a:rPr lang="en-GB" sz="1900" i="1" noProof="1" dirty="0" smtClean="0">
                             <a:latin typeface="Cambria Math" panose="02040503050406030204" pitchFamily="18" charset="0"/>
                             <a:ea typeface="Verdana" panose="020B0604030504040204" pitchFamily="34" charset="0"/>
                           </a:rPr>
@@ -14145,7 +17872,7 @@
                       </m:sSubPr>
                       <m:e>
                         <m:r>
-                          <a:rPr lang="en-US" sz="1900" i="1" noProof="1">
+                          <a:rPr lang="en-GB" sz="1900" i="1" noProof="1" dirty="0" smtClean="0">
                             <a:latin typeface="Cambria Math" panose="02040503050406030204" pitchFamily="18" charset="0"/>
                             <a:ea typeface="Verdana" panose="020B0604030504040204" pitchFamily="34" charset="0"/>
                           </a:rPr>
@@ -14154,21 +17881,21 @@
                       </m:e>
                       <m:sub>
                         <m:r>
-                          <a:rPr lang="en-US" sz="1900" i="1" noProof="1">
+                          <a:rPr lang="en-GB" sz="1900" i="1" noProof="1" dirty="0" smtClean="0">
                             <a:latin typeface="Cambria Math" panose="02040503050406030204" pitchFamily="18" charset="0"/>
                             <a:ea typeface="Verdana" panose="020B0604030504040204" pitchFamily="34" charset="0"/>
                           </a:rPr>
                           <m:t>𝑖</m:t>
                         </m:r>
                         <m:r>
-                          <a:rPr lang="en-US" sz="1900" i="1" noProof="1">
+                          <a:rPr lang="en-GB" sz="1900" i="1" noProof="1" dirty="0" smtClean="0">
                             <a:latin typeface="Cambria Math" panose="02040503050406030204" pitchFamily="18" charset="0"/>
                             <a:ea typeface="Verdana" panose="020B0604030504040204" pitchFamily="34" charset="0"/>
                           </a:rPr>
                           <m:t>,</m:t>
                         </m:r>
                         <m:r>
-                          <a:rPr lang="en-US" sz="1900" i="1" noProof="1">
+                          <a:rPr lang="en-GB" sz="1900" i="1" noProof="1" dirty="0" smtClean="0">
                             <a:latin typeface="Cambria Math" panose="02040503050406030204" pitchFamily="18" charset="0"/>
                             <a:ea typeface="Verdana" panose="020B0604030504040204" pitchFamily="34" charset="0"/>
                           </a:rPr>
@@ -14179,51 +17906,31 @@
                   </m:oMath>
                 </a14:m>
                 <a:r>
-                  <a:rPr lang="nl-NL" sz="1800" dirty="0">
+                  <a:rPr lang="en-GB" sz="1800" noProof="1">
                     <a:solidFill>
                       <a:schemeClr val="tx1"/>
                     </a:solidFill>
                   </a:rPr>
-                  <a:t> is ICT/AI-</a:t>
+                  <a:t> is ICT/AI-related variable</a:t>
                 </a:r>
                 <a:r>
-                  <a:rPr lang="nl-NL" sz="1800" dirty="0" err="1">
-                    <a:solidFill>
-                      <a:schemeClr val="tx1"/>
-                    </a:solidFill>
-                  </a:rPr>
-                  <a:t>related</a:t>
+                  <a:rPr lang="en-GB" sz="1800" noProof="1"/>
+                  <a:t>; </a:t>
                 </a:r>
                 <a:r>
-                  <a:rPr lang="nl-NL" sz="1800" dirty="0">
+                  <a:rPr lang="en-GB" sz="1800" noProof="1">
                     <a:solidFill>
                       <a:schemeClr val="tx1"/>
                     </a:solidFill>
                   </a:rPr>
                   <a:t> </a:t>
                 </a:r>
-                <a:r>
-                  <a:rPr lang="nl-NL" sz="1800" dirty="0" err="1">
-                    <a:solidFill>
-                      <a:schemeClr val="tx1"/>
-                    </a:solidFill>
-                  </a:rPr>
-                  <a:t>variable</a:t>
-                </a:r>
-                <a:r>
-                  <a:rPr lang="nl-NL" sz="1800" dirty="0">
-                    <a:solidFill>
-                      <a:schemeClr val="tx1"/>
-                    </a:solidFill>
-                  </a:rPr>
-                  <a:t>. </a:t>
-                </a:r>
                 <a14:m>
                   <m:oMath xmlns:m="http://schemas.openxmlformats.org/officeDocument/2006/math">
                     <m:sSubSup>
                       <m:sSubSupPr>
                         <m:ctrlPr>
-                          <a:rPr lang="en-US" sz="1900" i="1" noProof="1">
+                          <a:rPr lang="en-GB" sz="2000" i="1" noProof="1" dirty="0" smtClean="0">
                             <a:latin typeface="Cambria Math" panose="02040503050406030204" pitchFamily="18" charset="0"/>
                             <a:ea typeface="Verdana" panose="020B0604030504040204" pitchFamily="34" charset="0"/>
                           </a:rPr>
@@ -14231,7 +17938,7 @@
                       </m:sSubSupPr>
                       <m:e>
                         <m:r>
-                          <a:rPr lang="en-US" sz="1900" i="1" noProof="1">
+                          <a:rPr lang="en-GB" sz="2000" i="1" noProof="1" dirty="0" smtClean="0">
                             <a:latin typeface="Cambria Math" panose="02040503050406030204" pitchFamily="18" charset="0"/>
                             <a:ea typeface="Verdana" panose="020B0604030504040204" pitchFamily="34" charset="0"/>
                           </a:rPr>
@@ -14240,21 +17947,21 @@
                       </m:e>
                       <m:sub>
                         <m:r>
-                          <a:rPr lang="en-US" sz="1900" i="1" noProof="1">
+                          <a:rPr lang="en-GB" sz="2000" i="1" noProof="1" dirty="0" smtClean="0">
                             <a:latin typeface="Cambria Math" panose="02040503050406030204" pitchFamily="18" charset="0"/>
                             <a:ea typeface="Verdana" panose="020B0604030504040204" pitchFamily="34" charset="0"/>
                           </a:rPr>
                           <m:t>𝑖</m:t>
                         </m:r>
                         <m:r>
-                          <a:rPr lang="en-US" sz="1900" i="1" noProof="1">
+                          <a:rPr lang="en-GB" sz="2000" i="1" noProof="1" dirty="0" smtClean="0">
                             <a:latin typeface="Cambria Math" panose="02040503050406030204" pitchFamily="18" charset="0"/>
                             <a:ea typeface="Verdana" panose="020B0604030504040204" pitchFamily="34" charset="0"/>
                           </a:rPr>
                           <m:t>,</m:t>
                         </m:r>
                         <m:r>
-                          <a:rPr lang="en-US" sz="1900" i="1" noProof="1">
+                          <a:rPr lang="en-GB" sz="2000" i="1" noProof="1" dirty="0" smtClean="0">
                             <a:latin typeface="Cambria Math" panose="02040503050406030204" pitchFamily="18" charset="0"/>
                             <a:ea typeface="Verdana" panose="020B0604030504040204" pitchFamily="34" charset="0"/>
                           </a:rPr>
@@ -14263,7 +17970,7 @@
                       </m:sub>
                       <m:sup>
                         <m:r>
-                          <a:rPr lang="en-US" sz="1900" i="1" noProof="1">
+                          <a:rPr lang="en-GB" sz="2000" i="1" noProof="1" dirty="0" smtClean="0">
                             <a:latin typeface="Cambria Math" panose="02040503050406030204" pitchFamily="18" charset="0"/>
                             <a:ea typeface="Verdana" panose="020B0604030504040204" pitchFamily="34" charset="0"/>
                           </a:rPr>
@@ -14272,7 +17979,7 @@
                       </m:sup>
                     </m:sSubSup>
                     <m:r>
-                      <a:rPr lang="en-US" sz="1900" b="0" i="1" noProof="1" smtClean="0">
+                      <a:rPr lang="en-GB" sz="2000" b="0" i="1" noProof="1" dirty="0" smtClean="0">
                         <a:latin typeface="Cambria Math" panose="02040503050406030204" pitchFamily="18" charset="0"/>
                         <a:ea typeface="Verdana" panose="020B0604030504040204" pitchFamily="34" charset="0"/>
                       </a:rPr>
@@ -14281,7 +17988,7 @@
                   </m:oMath>
                 </a14:m>
                 <a:r>
-                  <a:rPr lang="en-US" sz="1900" noProof="1">
+                  <a:rPr lang="en-GB" sz="2000" noProof="1">
                     <a:ea typeface="Verdana" panose="020B0604030504040204" pitchFamily="34" charset="0"/>
                   </a:rPr>
                   <a:t> </a:t>
@@ -14291,7 +17998,7 @@
                     <m:sSub>
                       <m:sSubPr>
                         <m:ctrlPr>
-                          <a:rPr lang="en-US" sz="1900" i="1" noProof="1">
+                          <a:rPr lang="en-GB" sz="2000" i="1" noProof="1" dirty="0" smtClean="0">
                             <a:latin typeface="Cambria Math" panose="02040503050406030204" pitchFamily="18" charset="0"/>
                             <a:ea typeface="Verdana" panose="020B0604030504040204" pitchFamily="34" charset="0"/>
                           </a:rPr>
@@ -14299,7 +18006,7 @@
                       </m:sSubPr>
                       <m:e>
                         <m:r>
-                          <a:rPr lang="en-US" sz="1900" i="1" noProof="1">
+                          <a:rPr lang="en-GB" sz="2000" i="1" noProof="1" dirty="0" smtClean="0">
                             <a:latin typeface="Cambria Math" panose="02040503050406030204" pitchFamily="18" charset="0"/>
                             <a:ea typeface="Verdana" panose="020B0604030504040204" pitchFamily="34" charset="0"/>
                           </a:rPr>
@@ -14308,21 +18015,21 @@
                       </m:e>
                       <m:sub>
                         <m:r>
-                          <a:rPr lang="en-US" sz="1900" i="1" noProof="1">
+                          <a:rPr lang="en-GB" sz="2000" i="1" noProof="1" dirty="0" smtClean="0">
                             <a:latin typeface="Cambria Math" panose="02040503050406030204" pitchFamily="18" charset="0"/>
                             <a:ea typeface="Verdana" panose="020B0604030504040204" pitchFamily="34" charset="0"/>
                           </a:rPr>
                           <m:t>𝑖</m:t>
                         </m:r>
                         <m:r>
-                          <a:rPr lang="en-US" sz="1900" i="1" noProof="1">
+                          <a:rPr lang="en-GB" sz="2000" i="1" noProof="1" dirty="0" smtClean="0">
                             <a:latin typeface="Cambria Math" panose="02040503050406030204" pitchFamily="18" charset="0"/>
                             <a:ea typeface="Verdana" panose="020B0604030504040204" pitchFamily="34" charset="0"/>
                           </a:rPr>
                           <m:t>,</m:t>
                         </m:r>
                         <m:r>
-                          <a:rPr lang="en-US" sz="1900" i="1" noProof="1">
+                          <a:rPr lang="en-GB" sz="2000" i="1" noProof="1" dirty="0" smtClean="0">
                             <a:latin typeface="Cambria Math" panose="02040503050406030204" pitchFamily="18" charset="0"/>
                             <a:ea typeface="Verdana" panose="020B0604030504040204" pitchFamily="34" charset="0"/>
                           </a:rPr>
@@ -14333,7 +18040,7 @@
                   </m:oMath>
                 </a14:m>
                 <a:r>
-                  <a:rPr lang="nl-NL" sz="1800" dirty="0"/>
+                  <a:rPr lang="en-GB" sz="2000" noProof="1"/>
                   <a:t> if </a:t>
                 </a:r>
                 <a14:m>
@@ -14341,7 +18048,7 @@
                     <m:sSub>
                       <m:sSubPr>
                         <m:ctrlPr>
-                          <a:rPr lang="en-US" sz="1900" i="1" noProof="1">
+                          <a:rPr lang="en-GB" sz="2000" i="1" noProof="1" dirty="0" smtClean="0">
                             <a:latin typeface="Cambria Math" panose="02040503050406030204" pitchFamily="18" charset="0"/>
                             <a:ea typeface="Verdana" panose="020B0604030504040204" pitchFamily="34" charset="0"/>
                           </a:rPr>
@@ -14349,7 +18056,7 @@
                       </m:sSubPr>
                       <m:e>
                         <m:r>
-                          <a:rPr lang="en-US" sz="1900" i="1" noProof="1">
+                          <a:rPr lang="en-GB" sz="2000" i="1" noProof="1" dirty="0" smtClean="0">
                             <a:latin typeface="Cambria Math" panose="02040503050406030204" pitchFamily="18" charset="0"/>
                             <a:ea typeface="Verdana" panose="020B0604030504040204" pitchFamily="34" charset="0"/>
                           </a:rPr>
@@ -14358,21 +18065,21 @@
                       </m:e>
                       <m:sub>
                         <m:r>
-                          <a:rPr lang="en-US" sz="1900" i="1" noProof="1">
+                          <a:rPr lang="en-GB" sz="2000" i="1" noProof="1" dirty="0" smtClean="0">
                             <a:latin typeface="Cambria Math" panose="02040503050406030204" pitchFamily="18" charset="0"/>
                             <a:ea typeface="Verdana" panose="020B0604030504040204" pitchFamily="34" charset="0"/>
                           </a:rPr>
                           <m:t>𝑖</m:t>
                         </m:r>
                         <m:r>
-                          <a:rPr lang="en-US" sz="1900" i="1" noProof="1">
+                          <a:rPr lang="en-GB" sz="2000" i="1" noProof="1" dirty="0" smtClean="0">
                             <a:latin typeface="Cambria Math" panose="02040503050406030204" pitchFamily="18" charset="0"/>
                             <a:ea typeface="Verdana" panose="020B0604030504040204" pitchFamily="34" charset="0"/>
                           </a:rPr>
                           <m:t>,</m:t>
                         </m:r>
                         <m:r>
-                          <a:rPr lang="en-US" sz="1900" i="1" noProof="1">
+                          <a:rPr lang="en-GB" sz="2000" i="1" noProof="1" dirty="0" smtClean="0">
                             <a:latin typeface="Cambria Math" panose="02040503050406030204" pitchFamily="18" charset="0"/>
                             <a:ea typeface="Verdana" panose="020B0604030504040204" pitchFamily="34" charset="0"/>
                           </a:rPr>
@@ -14381,7 +18088,7 @@
                       </m:sub>
                     </m:sSub>
                     <m:r>
-                      <a:rPr lang="en-US" sz="1900" b="0" i="1" noProof="1" smtClean="0">
+                      <a:rPr lang="en-GB" sz="2000" b="0" i="1" noProof="1" dirty="0" smtClean="0">
                         <a:latin typeface="Cambria Math" panose="02040503050406030204" pitchFamily="18" charset="0"/>
                         <a:ea typeface="Verdana" panose="020B0604030504040204" pitchFamily="34" charset="0"/>
                       </a:rPr>
@@ -14391,7 +18098,7 @@
                       <m:rPr>
                         <m:sty m:val="p"/>
                       </m:rPr>
-                      <a:rPr lang="en-US" sz="1900" b="0" i="0" noProof="1" smtClean="0">
+                      <a:rPr lang="en-GB" sz="2000" b="0" i="0" noProof="1" dirty="0" smtClean="0">
                         <a:latin typeface="Cambria Math" panose="02040503050406030204" pitchFamily="18" charset="0"/>
                         <a:ea typeface="Verdana" panose="020B0604030504040204" pitchFamily="34" charset="0"/>
                       </a:rPr>
@@ -14400,7 +18107,7 @@
                     <m:d>
                       <m:dPr>
                         <m:ctrlPr>
-                          <a:rPr lang="en-US" sz="1900" b="0" i="1" noProof="1" smtClean="0">
+                          <a:rPr lang="en-GB" sz="2000" b="0" i="1" noProof="1" dirty="0" smtClean="0">
                             <a:latin typeface="Cambria Math" panose="02040503050406030204" pitchFamily="18" charset="0"/>
                             <a:ea typeface="Verdana" panose="020B0604030504040204" pitchFamily="34" charset="0"/>
                           </a:rPr>
@@ -14408,7 +18115,7 @@
                       </m:dPr>
                       <m:e>
                         <m:r>
-                          <a:rPr lang="en-US" sz="1900" b="0" i="1" noProof="1" smtClean="0">
+                          <a:rPr lang="en-GB" sz="2000" b="0" i="1" noProof="1" dirty="0" smtClean="0">
                             <a:latin typeface="Cambria Math" panose="02040503050406030204" pitchFamily="18" charset="0"/>
                             <a:ea typeface="Verdana" panose="020B0604030504040204" pitchFamily="34" charset="0"/>
                           </a:rPr>
@@ -14417,7 +18124,7 @@
                       </m:e>
                     </m:d>
                     <m:r>
-                      <a:rPr lang="en-US" sz="1900" b="0" i="1" noProof="1" smtClean="0">
+                      <a:rPr lang="en-GB" sz="2000" b="0" i="1" noProof="1" dirty="0" smtClean="0">
                         <a:latin typeface="Cambria Math" panose="02040503050406030204" pitchFamily="18" charset="0"/>
                         <a:ea typeface="Verdana" panose="020B0604030504040204" pitchFamily="34" charset="0"/>
                       </a:rPr>
@@ -14427,14 +18134,14 @@
                       <m:rPr>
                         <m:sty m:val="p"/>
                       </m:rPr>
-                      <a:rPr lang="en-US" sz="1900" b="0" i="0" noProof="1" smtClean="0">
+                      <a:rPr lang="en-GB" sz="2000" b="0" i="0" noProof="1" dirty="0" smtClean="0">
                         <a:latin typeface="Cambria Math" panose="02040503050406030204" pitchFamily="18" charset="0"/>
                         <a:ea typeface="Verdana" panose="020B0604030504040204" pitchFamily="34" charset="0"/>
                       </a:rPr>
                       <m:t>otherwise</m:t>
                     </m:r>
                     <m:r>
-                      <a:rPr lang="en-US" sz="1900" b="0" i="1" noProof="1" smtClean="0">
+                      <a:rPr lang="en-GB" sz="2000" b="0" i="1" noProof="1" dirty="0" smtClean="0">
                         <a:latin typeface="Cambria Math" panose="02040503050406030204" pitchFamily="18" charset="0"/>
                         <a:ea typeface="Verdana" panose="020B0604030504040204" pitchFamily="34" charset="0"/>
                       </a:rPr>
@@ -14443,7 +18150,7 @@
                   </m:oMath>
                 </a14:m>
                 <a:r>
-                  <a:rPr lang="nl-NL" sz="2000" dirty="0"/>
+                  <a:rPr lang="en-GB" sz="2000" noProof="1"/>
                   <a:t> </a:t>
                 </a:r>
               </a:p>
@@ -14461,7 +18168,7 @@
                     <m:sSub>
                       <m:sSubPr>
                         <m:ctrlPr>
-                          <a:rPr lang="en-US" sz="1900" i="1" noProof="1">
+                          <a:rPr lang="en-GB" sz="1900" i="1" noProof="1" dirty="0" smtClean="0">
                             <a:latin typeface="Cambria Math" panose="02040503050406030204" pitchFamily="18" charset="0"/>
                             <a:ea typeface="Verdana" panose="020B0604030504040204" pitchFamily="34" charset="0"/>
                           </a:rPr>
@@ -14469,7 +18176,7 @@
                       </m:sSubPr>
                       <m:e>
                         <m:r>
-                          <a:rPr lang="en-US" sz="1900" i="1" noProof="1">
+                          <a:rPr lang="en-GB" sz="1900" i="1" noProof="1" dirty="0" smtClean="0">
                             <a:latin typeface="Cambria Math" panose="02040503050406030204" pitchFamily="18" charset="0"/>
                             <a:ea typeface="Verdana" panose="020B0604030504040204" pitchFamily="34" charset="0"/>
                           </a:rPr>
@@ -14478,7 +18185,7 @@
                       </m:e>
                       <m:sub>
                         <m:r>
-                          <a:rPr lang="en-US" sz="1900" i="1" noProof="1">
+                          <a:rPr lang="en-GB" sz="1900" i="1" noProof="1" dirty="0" smtClean="0">
                             <a:latin typeface="Cambria Math" panose="02040503050406030204" pitchFamily="18" charset="0"/>
                             <a:ea typeface="Verdana" panose="020B0604030504040204" pitchFamily="34" charset="0"/>
                           </a:rPr>
@@ -14487,7 +18194,7 @@
                       </m:sub>
                     </m:sSub>
                     <m:r>
-                      <a:rPr lang="en-US" sz="1900" b="0" i="1" noProof="1" smtClean="0">
+                      <a:rPr lang="en-GB" sz="1900" b="0" i="1" noProof="1" dirty="0" smtClean="0">
                         <a:latin typeface="Cambria Math" panose="02040503050406030204" pitchFamily="18" charset="0"/>
                         <a:ea typeface="Verdana" panose="020B0604030504040204" pitchFamily="34" charset="0"/>
                       </a:rPr>
@@ -14496,7 +18203,7 @@
                   </m:oMath>
                 </a14:m>
                 <a:r>
-                  <a:rPr lang="nl-NL" sz="1800" dirty="0">
+                  <a:rPr lang="en-GB" sz="1800" noProof="1">
                     <a:solidFill>
                       <a:schemeClr val="tx1"/>
                     </a:solidFill>
@@ -14508,7 +18215,7 @@
                     <m:sSub>
                       <m:sSubPr>
                         <m:ctrlPr>
-                          <a:rPr lang="en-US" sz="1900" i="1" noProof="1">
+                          <a:rPr lang="en-GB" sz="1900" i="1" noProof="1" dirty="0" smtClean="0">
                             <a:latin typeface="Cambria Math" panose="02040503050406030204" pitchFamily="18" charset="0"/>
                             <a:ea typeface="Verdana" panose="020B0604030504040204" pitchFamily="34" charset="0"/>
                           </a:rPr>
@@ -14516,7 +18223,7 @@
                       </m:sSubPr>
                       <m:e>
                         <m:r>
-                          <a:rPr lang="en-US" sz="1900" i="1" noProof="1">
+                          <a:rPr lang="en-GB" sz="1900" i="1" noProof="1" dirty="0" smtClean="0">
                             <a:latin typeface="Cambria Math" panose="02040503050406030204" pitchFamily="18" charset="0"/>
                             <a:ea typeface="Verdana" panose="020B0604030504040204" pitchFamily="34" charset="0"/>
                           </a:rPr>
@@ -14525,7 +18232,7 @@
                       </m:e>
                       <m:sub>
                         <m:r>
-                          <a:rPr lang="en-US" sz="1900" i="1" noProof="1">
+                          <a:rPr lang="en-GB" sz="1900" i="1" noProof="1" dirty="0" smtClean="0">
                             <a:latin typeface="Cambria Math" panose="02040503050406030204" pitchFamily="18" charset="0"/>
                             <a:ea typeface="Verdana" panose="020B0604030504040204" pitchFamily="34" charset="0"/>
                           </a:rPr>
@@ -14534,7 +18241,7 @@
                       </m:sub>
                     </m:sSub>
                     <m:r>
-                      <a:rPr lang="en-US" sz="1900" b="0" i="1" noProof="1" smtClean="0">
+                      <a:rPr lang="en-GB" sz="1900" b="0" i="1" noProof="1" dirty="0" smtClean="0">
                         <a:latin typeface="Cambria Math" panose="02040503050406030204" pitchFamily="18" charset="0"/>
                         <a:ea typeface="Verdana" panose="020B0604030504040204" pitchFamily="34" charset="0"/>
                       </a:rPr>
@@ -14543,31 +18250,15 @@
                   </m:oMath>
                 </a14:m>
                 <a:r>
-                  <a:rPr lang="nl-NL" sz="1800" dirty="0"/>
-                  <a:t>for shock </a:t>
-                </a:r>
-                <a:r>
-                  <a:rPr lang="nl-NL" sz="1800" dirty="0" err="1"/>
-                  <a:t>years</a:t>
-                </a:r>
-                <a:r>
-                  <a:rPr lang="nl-NL" sz="1800" dirty="0"/>
-                  <a:t>, </a:t>
-                </a:r>
-                <a:r>
-                  <a:rPr lang="nl-NL" sz="1800" dirty="0" err="1"/>
-                  <a:t>otherwise</a:t>
-                </a:r>
-                <a:r>
-                  <a:rPr lang="nl-NL" sz="1800" dirty="0"/>
-                  <a:t> 0); </a:t>
+                  <a:rPr lang="en-GB" sz="1800" noProof="1"/>
+                  <a:t>for shock years, otherwise 0); </a:t>
                 </a:r>
                 <a14:m>
                   <m:oMath xmlns:m="http://schemas.openxmlformats.org/officeDocument/2006/math">
                     <m:sSub>
                       <m:sSubPr>
                         <m:ctrlPr>
-                          <a:rPr lang="en-US" sz="1900" i="1" noProof="1">
+                          <a:rPr lang="en-GB" sz="1900" i="1" noProof="1" dirty="0" smtClean="0">
                             <a:latin typeface="Cambria Math" panose="02040503050406030204" pitchFamily="18" charset="0"/>
                             <a:ea typeface="Verdana" panose="020B0604030504040204" pitchFamily="34" charset="0"/>
                           </a:rPr>
@@ -14575,14 +18266,14 @@
                       </m:sSubPr>
                       <m:e>
                         <m:r>
-                          <a:rPr lang="en-US" sz="1900" i="1" noProof="1">
+                          <a:rPr lang="en-GB" sz="1900" i="1" noProof="1" dirty="0" smtClean="0">
                             <a:latin typeface="Cambria Math" panose="02040503050406030204" pitchFamily="18" charset="0"/>
                             <a:ea typeface="Verdana" panose="020B0604030504040204" pitchFamily="34" charset="0"/>
                           </a:rPr>
                           <m:t> </m:t>
                         </m:r>
                         <m:r>
-                          <a:rPr lang="en-US" sz="1900" i="1" noProof="1">
+                          <a:rPr lang="en-GB" sz="1900" i="1" noProof="1" dirty="0" smtClean="0">
                             <a:latin typeface="Cambria Math" panose="02040503050406030204" pitchFamily="18" charset="0"/>
                             <a:ea typeface="Verdana" panose="020B0604030504040204" pitchFamily="34" charset="0"/>
                           </a:rPr>
@@ -14591,21 +18282,21 @@
                       </m:e>
                       <m:sub>
                         <m:r>
-                          <a:rPr lang="en-US" sz="1900" i="1" noProof="1">
+                          <a:rPr lang="en-GB" sz="1900" i="1" noProof="1" dirty="0" smtClean="0">
                             <a:latin typeface="Cambria Math" panose="02040503050406030204" pitchFamily="18" charset="0"/>
                             <a:ea typeface="Verdana" panose="020B0604030504040204" pitchFamily="34" charset="0"/>
                           </a:rPr>
                           <m:t>𝑖</m:t>
                         </m:r>
                         <m:r>
-                          <a:rPr lang="en-US" sz="1900" i="1" noProof="1">
+                          <a:rPr lang="en-GB" sz="1900" i="1" noProof="1" dirty="0" smtClean="0">
                             <a:latin typeface="Cambria Math" panose="02040503050406030204" pitchFamily="18" charset="0"/>
                             <a:ea typeface="Verdana" panose="020B0604030504040204" pitchFamily="34" charset="0"/>
                           </a:rPr>
                           <m:t>,</m:t>
                         </m:r>
                         <m:r>
-                          <a:rPr lang="en-US" sz="1900" i="1" noProof="1">
+                          <a:rPr lang="en-GB" sz="1900" i="1" noProof="1" dirty="0" smtClean="0">
                             <a:latin typeface="Cambria Math" panose="02040503050406030204" pitchFamily="18" charset="0"/>
                             <a:ea typeface="Verdana" panose="020B0604030504040204" pitchFamily="34" charset="0"/>
                           </a:rPr>
@@ -14616,7 +18307,7 @@
                   </m:oMath>
                 </a14:m>
                 <a:r>
-                  <a:rPr lang="nl-NL" sz="1800" dirty="0">
+                  <a:rPr lang="en-GB" sz="1800" noProof="1">
                     <a:solidFill>
                       <a:schemeClr val="tx1"/>
                     </a:solidFill>
@@ -14634,99 +18325,14 @@
                   </a:spcAft>
                 </a:pPr>
                 <a:r>
-                  <a:rPr lang="nl-NL" sz="1800" dirty="0"/>
+                  <a:rPr lang="en-GB" sz="1800" noProof="1"/>
                   <a:t>		</a:t>
                 </a:r>
-                <a:r>
-                  <a:rPr lang="en-US" sz="1800" noProof="1">
-                    <a:ea typeface="Cambria Math" panose="02040503050406030204" pitchFamily="18" charset="0"/>
-                  </a:rPr>
-                  <a:t> </a:t>
-                </a:r>
-                <a14:m>
-                  <m:oMath xmlns:m="http://schemas.openxmlformats.org/officeDocument/2006/math">
-                    <m:sSub>
-                      <m:sSubPr>
-                        <m:ctrlPr>
-                          <a:rPr lang="en-US" sz="1800" i="1" noProof="1">
-                            <a:latin typeface="Cambria Math" panose="02040503050406030204" pitchFamily="18" charset="0"/>
-                            <a:ea typeface="Cambria Math" panose="02040503050406030204" pitchFamily="18" charset="0"/>
-                          </a:rPr>
-                        </m:ctrlPr>
-                      </m:sSubPr>
-                      <m:e>
-                        <m:r>
-                          <a:rPr lang="en-US" sz="1800" i="1" noProof="1">
-                            <a:latin typeface="Cambria Math" panose="02040503050406030204" pitchFamily="18" charset="0"/>
-                            <a:ea typeface="Cambria Math" panose="02040503050406030204" pitchFamily="18" charset="0"/>
-                          </a:rPr>
-                          <m:t>𝜇</m:t>
-                        </m:r>
-                      </m:e>
-                      <m:sub>
-                        <m:r>
-                          <a:rPr lang="en-US" sz="1800" i="1" noProof="1">
-                            <a:latin typeface="Cambria Math" panose="02040503050406030204" pitchFamily="18" charset="0"/>
-                            <a:ea typeface="Verdana" panose="020B0604030504040204" pitchFamily="34" charset="0"/>
-                          </a:rPr>
-                          <m:t>𝑖</m:t>
-                        </m:r>
-                      </m:sub>
-                    </m:sSub>
-                  </m:oMath>
-                </a14:m>
-                <a:r>
-                  <a:rPr lang="nl-NL" sz="1800" dirty="0">
-                    <a:solidFill>
-                      <a:schemeClr val="tx1"/>
-                    </a:solidFill>
-                  </a:rPr>
-                  <a:t> </a:t>
-                </a:r>
-                <a:r>
-                  <a:rPr lang="nl-NL" sz="1800" dirty="0"/>
-                  <a:t>is country FE; </a:t>
-                </a:r>
-                <a14:m>
-                  <m:oMath xmlns:m="http://schemas.openxmlformats.org/officeDocument/2006/math">
-                    <m:sSub>
-                      <m:sSubPr>
-                        <m:ctrlPr>
-                          <a:rPr lang="en-US" sz="1800" i="1" noProof="1">
-                            <a:latin typeface="Cambria Math" panose="02040503050406030204" pitchFamily="18" charset="0"/>
-                            <a:ea typeface="Cambria Math" panose="02040503050406030204" pitchFamily="18" charset="0"/>
-                          </a:rPr>
-                        </m:ctrlPr>
-                      </m:sSubPr>
-                      <m:e>
-                        <m:r>
-                          <a:rPr lang="en-US" sz="1800" i="1" noProof="1">
-                            <a:latin typeface="Cambria Math" panose="02040503050406030204" pitchFamily="18" charset="0"/>
-                            <a:ea typeface="Cambria Math" panose="02040503050406030204" pitchFamily="18" charset="0"/>
-                          </a:rPr>
-                          <m:t>𝜏</m:t>
-                        </m:r>
-                      </m:e>
-                      <m:sub>
-                        <m:r>
-                          <a:rPr lang="en-US" sz="1800" i="1" noProof="1">
-                            <a:latin typeface="Cambria Math" panose="02040503050406030204" pitchFamily="18" charset="0"/>
-                            <a:ea typeface="Verdana" panose="020B0604030504040204" pitchFamily="34" charset="0"/>
-                          </a:rPr>
-                          <m:t>𝑡</m:t>
-                        </m:r>
-                      </m:sub>
-                    </m:sSub>
-                  </m:oMath>
-                </a14:m>
-                <a:r>
-                  <a:rPr lang="nl-NL" sz="1800" dirty="0">
-                    <a:solidFill>
-                      <a:schemeClr val="tx1"/>
-                    </a:solidFill>
-                  </a:rPr>
-                  <a:t> is time FE</a:t>
-                </a:r>
+                <a:endParaRPr lang="en-GB" sz="1800" noProof="1">
+                  <a:solidFill>
+                    <a:schemeClr val="tx1"/>
+                  </a:solidFill>
+                </a:endParaRPr>
               </a:p>
               <a:p>
                 <a:pPr>
@@ -14737,7 +18343,7 @@
                     <a:spcPts val="1200"/>
                   </a:spcAft>
                 </a:pPr>
-                <a:endParaRPr lang="nl-NL" sz="1800" dirty="0">
+                <a:endParaRPr lang="en-GB" sz="1800" noProof="1">
                   <a:solidFill>
                     <a:schemeClr val="tx1"/>
                   </a:solidFill>
@@ -14746,7 +18352,7 @@
             </p:txBody>
           </p:sp>
         </mc:Choice>
-        <mc:Fallback xmlns="">
+        <mc:Fallback>
           <p:sp>
             <p:nvSpPr>
               <p:cNvPr id="2" name="Content Placeholder 2">
@@ -14765,13 +18371,13 @@
             </p:nvSpPr>
             <p:spPr>
               <a:xfrm>
-                <a:off x="420624" y="770798"/>
-                <a:ext cx="8505051" cy="6087202"/>
+                <a:off x="347472" y="935390"/>
+                <a:ext cx="8723376" cy="6087202"/>
               </a:xfrm>
               <a:blipFill>
                 <a:blip r:embed="rId3"/>
                 <a:stretch>
-                  <a:fillRect l="-1792" t="-901"/>
+                  <a:fillRect l="-1747" t="-1301"/>
                 </a:stretch>
               </a:blipFill>
             </p:spPr>
@@ -14780,7 +18386,7 @@
               <a:lstStyle/>
               <a:p>
                 <a:r>
-                  <a:rPr lang="en-GB">
+                  <a:rPr lang="en-US">
                     <a:noFill/>
                   </a:rPr>
                   <a:t> </a:t>
@@ -14866,7 +18472,7 @@
                   <a:schemeClr val="bg1"/>
                 </a:solidFill>
               </a:rPr>
-              <a:t>Results</a:t>
+              <a:t>Results LPM models</a:t>
             </a:r>
           </a:p>
         </p:txBody>
@@ -14985,8 +18591,8 @@
           </a:p>
         </p:txBody>
       </p:sp>
-      <mc:AlternateContent xmlns:mc="http://schemas.openxmlformats.org/markup-compatibility/2006" xmlns:a14="http://schemas.microsoft.com/office/drawing/2010/main">
-        <mc:Choice Requires="a14">
+      <mc:AlternateContent xmlns:mc="http://schemas.openxmlformats.org/markup-compatibility/2006">
+        <mc:Choice xmlns:a14="http://schemas.microsoft.com/office/drawing/2010/main" Requires="a14">
           <p:sp>
             <p:nvSpPr>
               <p:cNvPr id="6" name="Tekstvak 3">
@@ -15001,8 +18607,8 @@
             </p:nvSpPr>
             <p:spPr>
               <a:xfrm>
-                <a:off x="197589" y="4854686"/>
-                <a:ext cx="8748822" cy="1284647"/>
+                <a:off x="197589" y="4744958"/>
+                <a:ext cx="8664691" cy="1453924"/>
               </a:xfrm>
               <a:prstGeom prst="rect">
                 <a:avLst/>
@@ -15024,7 +18630,7 @@
                       <a:srgbClr val="002060"/>
                     </a:solidFill>
                   </a:rPr>
-                  <a:t>***, **, * indicate 1%, 5%, 10% significance. Standard errors based on country-clustered sandwich covariance matrix (robust to heteroscedasticity and within country dependence, so countries (clusters) are assumed independent of each other). </a:t>
+                  <a:t>Average marginal effect (AME) of 1 stdev change of ICT/AI variable. ***, **, * indicate 1%, 5%, 10% significance. Standard errors based on country-clustered sandwich covariance matrix (robust to heteroscedasticity and within country dependence, so countries (clusters) are assumed independent of each other). </a:t>
                 </a:r>
                 <a:r>
                   <a:rPr lang="en-US" sz="1100" noProof="1">
@@ -15121,7 +18727,7 @@
             </p:txBody>
           </p:sp>
         </mc:Choice>
-        <mc:Fallback xmlns="">
+        <mc:Fallback>
           <p:sp>
             <p:nvSpPr>
               <p:cNvPr id="6" name="Tekstvak 3">
@@ -15138,8 +18744,8 @@
             </p:nvSpPr>
             <p:spPr>
               <a:xfrm>
-                <a:off x="197589" y="4854686"/>
-                <a:ext cx="8748822" cy="1284647"/>
+                <a:off x="197589" y="4744958"/>
+                <a:ext cx="8664691" cy="1453924"/>
               </a:xfrm>
               <a:prstGeom prst="rect">
                 <a:avLst/>
@@ -15147,7 +18753,7 @@
               <a:blipFill>
                 <a:blip r:embed="rId4"/>
                 <a:stretch>
-                  <a:fillRect b="-2370"/>
+                  <a:fillRect b="-1674"/>
                 </a:stretch>
               </a:blipFill>
             </p:spPr>
@@ -15168,10 +18774,10 @@
       </mc:AlternateContent>
       <p:pic>
         <p:nvPicPr>
-          <p:cNvPr id="3" name="Picture 2">
+          <p:cNvPr id="4" name="Picture 3">
             <a:extLst>
               <a:ext uri="{FF2B5EF4-FFF2-40B4-BE49-F238E27FC236}">
-                <a16:creationId xmlns:a16="http://schemas.microsoft.com/office/drawing/2014/main" id="{55B13636-9215-8A37-3974-917B9B355D12}"/>
+                <a16:creationId xmlns:a16="http://schemas.microsoft.com/office/drawing/2014/main" id="{CC406C6F-97A4-2854-9FCD-FD08F187902C}"/>
               </a:ext>
             </a:extLst>
           </p:cNvPr>
@@ -15188,8 +18794,38 @@
         </p:blipFill>
         <p:spPr>
           <a:xfrm>
-            <a:off x="281720" y="2438041"/>
-            <a:ext cx="8546537" cy="2279692"/>
+            <a:off x="3441776" y="2435733"/>
+            <a:ext cx="5136134" cy="2169414"/>
+          </a:xfrm>
+          <a:prstGeom prst="rect">
+            <a:avLst/>
+          </a:prstGeom>
+        </p:spPr>
+      </p:pic>
+      <p:pic>
+        <p:nvPicPr>
+          <p:cNvPr id="5" name="Picture 4">
+            <a:extLst>
+              <a:ext uri="{FF2B5EF4-FFF2-40B4-BE49-F238E27FC236}">
+                <a16:creationId xmlns:a16="http://schemas.microsoft.com/office/drawing/2014/main" id="{E062AC67-D726-4D45-300A-EB28E70BA46D}"/>
+              </a:ext>
+            </a:extLst>
+          </p:cNvPr>
+          <p:cNvPicPr>
+            <a:picLocks noChangeAspect="1"/>
+          </p:cNvPicPr>
+          <p:nvPr/>
+        </p:nvPicPr>
+        <p:blipFill>
+          <a:blip r:embed="rId6"/>
+          <a:stretch>
+            <a:fillRect/>
+          </a:stretch>
+        </p:blipFill>
+        <p:spPr>
+          <a:xfrm>
+            <a:off x="448818" y="2435733"/>
+            <a:ext cx="3077972" cy="2169414"/>
           </a:xfrm>
           <a:prstGeom prst="rect">
             <a:avLst/>

--- a/Resilience.pptx
+++ b/Resilience.pptx
@@ -161,7 +161,7 @@
 <file path=ppt/revisionInfo.xml><?xml version="1.0" encoding="utf-8"?>
 <p1510:revInfo xmlns:a="http://schemas.openxmlformats.org/drawingml/2006/main" xmlns:r="http://schemas.openxmlformats.org/officeDocument/2006/relationships" xmlns:p1510="http://schemas.microsoft.com/office/powerpoint/2015/10/main">
   <p1510:revLst>
-    <p1510:client id="{13B43BEF-9B9B-431D-9308-0B2B126B7992}" v="603" dt="2026-10-10T09:50:47.429"/>
+    <p1510:client id="{13B43BEF-9B9B-431D-9308-0B2B126B7992}" v="640" dt="2026-10-10T11:20:38.171"/>
   </p1510:revLst>
 </p1510:revInfo>
 </file>
@@ -171,7 +171,7 @@
   <pc:docChgLst>
     <pc:chgData name="Jan Willem van den End (EBO_CMA)" userId="32ade95a-e024-4672-952f-5ed8641a9e00" providerId="ADAL" clId="{3BBBE02E-ACD4-4586-9407-5E79BF620DF1}"/>
     <pc:docChg chg="undo redo custSel addSld modSld sldOrd">
-      <pc:chgData name="Jan Willem van den End (EBO_CMA)" userId="32ade95a-e024-4672-952f-5ed8641a9e00" providerId="ADAL" clId="{3BBBE02E-ACD4-4586-9407-5E79BF620DF1}" dt="2026-10-10T09:53:52.912" v="9780" actId="20577"/>
+      <pc:chgData name="Jan Willem van den End (EBO_CMA)" userId="32ade95a-e024-4672-952f-5ed8641a9e00" providerId="ADAL" clId="{3BBBE02E-ACD4-4586-9407-5E79BF620DF1}" dt="2026-10-10T11:20:38.165" v="9817" actId="20577"/>
       <pc:docMkLst>
         <pc:docMk/>
       </pc:docMkLst>
@@ -554,13 +554,13 @@
         </pc:spChg>
       </pc:sldChg>
       <pc:sldChg chg="modSp add mod">
-        <pc:chgData name="Jan Willem van den End (EBO_CMA)" userId="32ade95a-e024-4672-952f-5ed8641a9e00" providerId="ADAL" clId="{3BBBE02E-ACD4-4586-9407-5E79BF620DF1}" dt="2026-10-10T09:46:55.958" v="9708" actId="20577"/>
+        <pc:chgData name="Jan Willem van den End (EBO_CMA)" userId="32ade95a-e024-4672-952f-5ed8641a9e00" providerId="ADAL" clId="{3BBBE02E-ACD4-4586-9407-5E79BF620DF1}" dt="2026-10-10T11:20:38.165" v="9817" actId="20577"/>
         <pc:sldMkLst>
           <pc:docMk/>
           <pc:sldMk cId="3745319895" sldId="798"/>
         </pc:sldMkLst>
         <pc:spChg chg="mod">
-          <ac:chgData name="Jan Willem van den End (EBO_CMA)" userId="32ade95a-e024-4672-952f-5ed8641a9e00" providerId="ADAL" clId="{3BBBE02E-ACD4-4586-9407-5E79BF620DF1}" dt="2026-10-10T09:46:55.958" v="9708" actId="20577"/>
+          <ac:chgData name="Jan Willem van den End (EBO_CMA)" userId="32ade95a-e024-4672-952f-5ed8641a9e00" providerId="ADAL" clId="{3BBBE02E-ACD4-4586-9407-5E79BF620DF1}" dt="2026-10-10T11:20:38.165" v="9817" actId="20577"/>
           <ac:spMkLst>
             <pc:docMk/>
             <pc:sldMk cId="3745319895" sldId="798"/>
@@ -8529,7 +8529,7 @@
                     <m:sSub>
                       <m:sSubPr>
                         <m:ctrlPr>
-                          <a:rPr lang="en-GB" sz="2600" i="1" noProof="1" smtClean="0">
+                          <a:rPr lang="en-GB" sz="2600" i="1" noProof="1">
                             <a:latin typeface="Cambria Math" panose="02040503050406030204" pitchFamily="18" charset="0"/>
                             <a:ea typeface="Cambria Math" panose="02040503050406030204" pitchFamily="18" charset="0"/>
                           </a:rPr>
@@ -8537,11 +8537,11 @@
                       </m:sSubPr>
                       <m:e>
                         <m:r>
-                          <a:rPr lang="en-GB" sz="2600" i="1" noProof="1" smtClean="0">
+                          <a:rPr lang="en-GB" sz="2600" i="1" noProof="1">
                             <a:latin typeface="Cambria Math" panose="02040503050406030204" pitchFamily="18" charset="0"/>
                             <a:ea typeface="Cambria Math" panose="02040503050406030204" pitchFamily="18" charset="0"/>
                           </a:rPr>
-                          <m:t>𝛼</m:t>
+                          <m:t>𝜇</m:t>
                         </m:r>
                       </m:e>
                       <m:sub>
@@ -8579,12 +8579,23 @@
                   </a:rPr>
                   <a:t> </a:t>
                 </a:r>
+                <a14:m>
+                  <m:oMath xmlns:m="http://schemas.openxmlformats.org/officeDocument/2006/math">
+                    <m:r>
+                      <a:rPr lang="en-GB" sz="2600" i="1" noProof="1">
+                        <a:latin typeface="Cambria Math" panose="02040503050406030204" pitchFamily="18" charset="0"/>
+                        <a:ea typeface="Cambria Math" panose="02040503050406030204" pitchFamily="18" charset="0"/>
+                      </a:rPr>
+                      <m:t>𝜇</m:t>
+                    </m:r>
+                  </m:oMath>
+                </a14:m>
                 <a:r>
                   <a:rPr lang="en-GB" sz="2600" noProof="1">
                     <a:latin typeface="Cambria Math" panose="02040503050406030204" pitchFamily="18" charset="0"/>
                     <a:ea typeface="Cambria Math" panose="02040503050406030204" pitchFamily="18" charset="0"/>
                   </a:rPr>
-                  <a:t>𝛼 +</a:t>
+                  <a:t> +</a:t>
                 </a:r>
                 <a14:m>
                   <m:oMath xmlns:m="http://schemas.openxmlformats.org/officeDocument/2006/math">
@@ -8628,14 +8639,7 @@
                         <a:latin typeface="Cambria Math" panose="02040503050406030204" pitchFamily="18" charset="0"/>
                         <a:ea typeface="Verdana" panose="020B0604030504040204" pitchFamily="34" charset="0"/>
                       </a:rPr>
-                      <m:t> </m:t>
-                    </m:r>
-                    <m:r>
-                      <a:rPr lang="en-GB" sz="2600" b="0" i="1" noProof="1" smtClean="0">
-                        <a:latin typeface="Cambria Math" panose="02040503050406030204" pitchFamily="18" charset="0"/>
-                        <a:ea typeface="Verdana" panose="020B0604030504040204" pitchFamily="34" charset="0"/>
-                      </a:rPr>
-                      <m:t>+</m:t>
+                      <m:t> +</m:t>
                     </m:r>
                   </m:oMath>
                 </a14:m>
@@ -9088,7 +9092,7 @@
                         <m:rPr>
                           <m:nor/>
                         </m:rPr>
-                        <a:rPr lang="en-GB" sz="2600" noProof="1" smtClean="0">
+                        <a:rPr lang="en-GB" sz="2600" i="0" noProof="1" smtClean="0">
                           <a:ea typeface="Cambria Math" panose="02040503050406030204" pitchFamily="18" charset="0"/>
                         </a:rPr>
                         <m:t> </m:t>
@@ -9321,7 +9325,7 @@
                     <m:sSub>
                       <m:sSubPr>
                         <m:ctrlPr>
-                          <a:rPr lang="en-GB" sz="2600" i="1" noProof="1" smtClean="0">
+                          <a:rPr lang="en-GB" sz="2600" i="1" noProof="1">
                             <a:latin typeface="Cambria Math" panose="02040503050406030204" pitchFamily="18" charset="0"/>
                             <a:ea typeface="Cambria Math" panose="02040503050406030204" pitchFamily="18" charset="0"/>
                           </a:rPr>
@@ -9329,7 +9333,7 @@
                       </m:sSubPr>
                       <m:e>
                         <m:r>
-                          <a:rPr lang="en-GB" sz="2600" i="1" noProof="1" smtClean="0">
+                          <a:rPr lang="en-GB" sz="2600" i="1" noProof="1">
                             <a:latin typeface="Cambria Math" panose="02040503050406030204" pitchFamily="18" charset="0"/>
                             <a:ea typeface="Cambria Math" panose="02040503050406030204" pitchFamily="18" charset="0"/>
                           </a:rPr>
@@ -9801,17 +9805,17 @@
                     <m:sSub>
                       <m:sSubPr>
                         <m:ctrlPr>
-                          <a:rPr lang="en-GB" sz="2600" i="1" noProof="1" smtClean="0">
-                            <a:latin typeface="Cambria Math" panose="02040503050406030204" pitchFamily="18" charset="0"/>
-                            <a:ea typeface="Verdana" panose="020B0604030504040204" pitchFamily="34" charset="0"/>
+                          <a:rPr lang="en-GB" sz="2600" i="1" noProof="1">
+                            <a:latin typeface="Cambria Math" panose="02040503050406030204" pitchFamily="18" charset="0"/>
+                            <a:ea typeface="Cambria Math" panose="02040503050406030204" pitchFamily="18" charset="0"/>
                           </a:rPr>
                         </m:ctrlPr>
                       </m:sSubPr>
                       <m:e>
                         <m:r>
-                          <a:rPr lang="en-GB" sz="2600" i="1" noProof="1" smtClean="0">
-                            <a:latin typeface="Cambria Math" panose="02040503050406030204" pitchFamily="18" charset="0"/>
-                            <a:ea typeface="Verdana" panose="020B0604030504040204" pitchFamily="34" charset="0"/>
+                          <a:rPr lang="en-GB" sz="2600" i="1" noProof="1">
+                            <a:latin typeface="Cambria Math" panose="02040503050406030204" pitchFamily="18" charset="0"/>
+                            <a:ea typeface="Cambria Math" panose="02040503050406030204" pitchFamily="18" charset="0"/>
                           </a:rPr>
                           <m:t>𝛼</m:t>
                         </m:r>
@@ -10541,7 +10545,7 @@
                       <m:accPr>
                         <m:chr m:val="̅"/>
                         <m:ctrlPr>
-                          <a:rPr lang="en-GB" sz="1900" i="1" noProof="1" smtClean="0">
+                          <a:rPr lang="en-GB" sz="1900" b="0" i="1" noProof="1" smtClean="0">
                             <a:latin typeface="Cambria Math" panose="02040503050406030204" pitchFamily="18" charset="0"/>
                             <a:ea typeface="Verdana" panose="020B0604030504040204" pitchFamily="34" charset="0"/>
                           </a:rPr>
@@ -10728,7 +10732,7 @@
                 </a:pPr>
                 <a:r>
                   <a:rPr lang="en-GB" sz="1900" dirty="0"/>
-                  <a:t>			</a:t>
+                  <a:t>		</a:t>
                 </a:r>
                 <a14:m>
                   <m:oMath xmlns:m="http://schemas.openxmlformats.org/officeDocument/2006/math">
@@ -11046,7 +11050,7 @@
                 </a14:m>
                 <a:r>
                   <a:rPr lang="en-GB" sz="1900" noProof="1"/>
-                  <a:t> ;   </a:t>
+                  <a:t> ;  </a:t>
                 </a:r>
                 <a14:m>
                   <m:oMath xmlns:m="http://schemas.openxmlformats.org/officeDocument/2006/math">
@@ -11115,7 +11119,7 @@
                       <m:accPr>
                         <m:chr m:val="̅"/>
                         <m:ctrlPr>
-                          <a:rPr lang="en-GB" sz="1900" i="1" noProof="1" smtClean="0">
+                          <a:rPr lang="en-GB" sz="1900" b="0" i="1" noProof="1" smtClean="0">
                             <a:latin typeface="Cambria Math" panose="02040503050406030204" pitchFamily="18" charset="0"/>
                             <a:ea typeface="Verdana" panose="020B0604030504040204" pitchFamily="34" charset="0"/>
                           </a:rPr>
@@ -11154,7 +11158,46 @@
                     </m:acc>
                   </m:oMath>
                 </a14:m>
-                <a:endParaRPr lang="en-GB" sz="1900" noProof="1"/>
+                <a:r>
+                  <a:rPr lang="en-GB" sz="1900" noProof="1"/>
+                  <a:t>	; </a:t>
+                </a:r>
+                <a14:m>
+                  <m:oMath xmlns:m="http://schemas.openxmlformats.org/officeDocument/2006/math">
+                    <m:sSub>
+                      <m:sSubPr>
+                        <m:ctrlPr>
+                          <a:rPr lang="en-GB" sz="2000" i="1" noProof="1">
+                            <a:latin typeface="Cambria Math" panose="02040503050406030204" pitchFamily="18" charset="0"/>
+                            <a:ea typeface="Cambria Math" panose="02040503050406030204" pitchFamily="18" charset="0"/>
+                          </a:rPr>
+                        </m:ctrlPr>
+                      </m:sSubPr>
+                      <m:e>
+                        <m:r>
+                          <a:rPr lang="en-GB" sz="2000" i="1" noProof="1">
+                            <a:latin typeface="Cambria Math" panose="02040503050406030204" pitchFamily="18" charset="0"/>
+                            <a:ea typeface="Cambria Math" panose="02040503050406030204" pitchFamily="18" charset="0"/>
+                          </a:rPr>
+                          <m:t>𝜇</m:t>
+                        </m:r>
+                      </m:e>
+                      <m:sub>
+                        <m:r>
+                          <a:rPr lang="en-GB" sz="2000" i="1" noProof="1">
+                            <a:latin typeface="Cambria Math" panose="02040503050406030204" pitchFamily="18" charset="0"/>
+                            <a:ea typeface="Verdana" panose="020B0604030504040204" pitchFamily="34" charset="0"/>
+                          </a:rPr>
+                          <m:t>𝑖</m:t>
+                        </m:r>
+                      </m:sub>
+                    </m:sSub>
+                  </m:oMath>
+                </a14:m>
+                <a:r>
+                  <a:rPr lang="en-GB" sz="1900" noProof="1"/>
+                  <a:t> is random effect</a:t>
+                </a:r>
               </a:p>
               <a:p>
                 <a:pPr>
@@ -11227,7 +11270,7 @@
               <a:lstStyle/>
               <a:p>
                 <a:r>
-                  <a:rPr lang="en-US">
+                  <a:rPr lang="en-GB">
                     <a:noFill/>
                   </a:rPr>
                   <a:t> </a:t>
@@ -11432,8 +11475,8 @@
           </a:p>
         </p:txBody>
       </p:sp>
-      <mc:AlternateContent xmlns:mc="http://schemas.openxmlformats.org/markup-compatibility/2006">
-        <mc:Choice xmlns:a14="http://schemas.microsoft.com/office/drawing/2010/main" Requires="a14">
+      <mc:AlternateContent xmlns:mc="http://schemas.openxmlformats.org/markup-compatibility/2006" xmlns:a14="http://schemas.microsoft.com/office/drawing/2010/main">
+        <mc:Choice Requires="a14">
           <p:sp>
             <p:nvSpPr>
               <p:cNvPr id="6" name="Tekstvak 3">
@@ -11568,7 +11611,7 @@
             </p:txBody>
           </p:sp>
         </mc:Choice>
-        <mc:Fallback>
+        <mc:Fallback xmlns="">
           <p:sp>
             <p:nvSpPr>
               <p:cNvPr id="6" name="Tekstvak 3">
@@ -16173,8 +16216,8 @@
           </a:p>
         </p:txBody>
       </p:sp>
-      <mc:AlternateContent xmlns:mc="http://schemas.openxmlformats.org/markup-compatibility/2006">
-        <mc:Choice xmlns:a14="http://schemas.microsoft.com/office/drawing/2010/main" Requires="a14">
+      <mc:AlternateContent xmlns:mc="http://schemas.openxmlformats.org/markup-compatibility/2006" xmlns:a14="http://schemas.microsoft.com/office/drawing/2010/main">
+        <mc:Choice Requires="a14">
           <p:sp>
             <p:nvSpPr>
               <p:cNvPr id="2" name="Content Placeholder 2">
@@ -16556,7 +16599,7 @@
                       <m:rPr>
                         <m:nor/>
                       </m:rPr>
-                      <a:rPr lang="en-GB" sz="2200" noProof="1" dirty="0" smtClean="0">
+                      <a:rPr lang="en-GB" sz="2200" i="0" noProof="1" dirty="0" smtClean="0">
                         <a:ea typeface="Cambria Math" panose="02040503050406030204" pitchFamily="18" charset="0"/>
                       </a:rPr>
                       <m:t> </m:t>
@@ -18352,7 +18395,7 @@
             </p:txBody>
           </p:sp>
         </mc:Choice>
-        <mc:Fallback>
+        <mc:Fallback xmlns="">
           <p:sp>
             <p:nvSpPr>
               <p:cNvPr id="2" name="Content Placeholder 2">
@@ -18591,8 +18634,8 @@
           </a:p>
         </p:txBody>
       </p:sp>
-      <mc:AlternateContent xmlns:mc="http://schemas.openxmlformats.org/markup-compatibility/2006">
-        <mc:Choice xmlns:a14="http://schemas.microsoft.com/office/drawing/2010/main" Requires="a14">
+      <mc:AlternateContent xmlns:mc="http://schemas.openxmlformats.org/markup-compatibility/2006" xmlns:a14="http://schemas.microsoft.com/office/drawing/2010/main">
+        <mc:Choice Requires="a14">
           <p:sp>
             <p:nvSpPr>
               <p:cNvPr id="6" name="Tekstvak 3">
@@ -18727,7 +18770,7 @@
             </p:txBody>
           </p:sp>
         </mc:Choice>
-        <mc:Fallback>
+        <mc:Fallback xmlns="">
           <p:sp>
             <p:nvSpPr>
               <p:cNvPr id="6" name="Tekstvak 3">

--- a/Resilience.pptx
+++ b/Resilience.pptx
@@ -161,7 +161,7 @@
 <file path=ppt/revisionInfo.xml><?xml version="1.0" encoding="utf-8"?>
 <p1510:revInfo xmlns:a="http://schemas.openxmlformats.org/drawingml/2006/main" xmlns:r="http://schemas.openxmlformats.org/officeDocument/2006/relationships" xmlns:p1510="http://schemas.microsoft.com/office/powerpoint/2015/10/main">
   <p1510:revLst>
-    <p1510:client id="{13B43BEF-9B9B-431D-9308-0B2B126B7992}" v="640" dt="2026-10-10T11:20:38.171"/>
+    <p1510:client id="{13B43BEF-9B9B-431D-9308-0B2B126B7992}" v="648" dt="2026-10-10T11:24:37.872"/>
   </p1510:revLst>
 </p1510:revInfo>
 </file>
@@ -171,7 +171,7 @@
   <pc:docChgLst>
     <pc:chgData name="Jan Willem van den End (EBO_CMA)" userId="32ade95a-e024-4672-952f-5ed8641a9e00" providerId="ADAL" clId="{3BBBE02E-ACD4-4586-9407-5E79BF620DF1}"/>
     <pc:docChg chg="undo redo custSel addSld modSld sldOrd">
-      <pc:chgData name="Jan Willem van den End (EBO_CMA)" userId="32ade95a-e024-4672-952f-5ed8641a9e00" providerId="ADAL" clId="{3BBBE02E-ACD4-4586-9407-5E79BF620DF1}" dt="2026-10-10T11:20:38.165" v="9817" actId="20577"/>
+      <pc:chgData name="Jan Willem van den End (EBO_CMA)" userId="32ade95a-e024-4672-952f-5ed8641a9e00" providerId="ADAL" clId="{3BBBE02E-ACD4-4586-9407-5E79BF620DF1}" dt="2026-10-10T11:24:37.872" v="9825" actId="20577"/>
       <pc:docMkLst>
         <pc:docMk/>
       </pc:docMkLst>
@@ -399,13 +399,13 @@
         </pc:picChg>
       </pc:sldChg>
       <pc:sldChg chg="modSp mod modNotes modNotesTx">
-        <pc:chgData name="Jan Willem van den End (EBO_CMA)" userId="32ade95a-e024-4672-952f-5ed8641a9e00" providerId="ADAL" clId="{3BBBE02E-ACD4-4586-9407-5E79BF620DF1}" dt="2026-10-10T09:43:47.731" v="9700" actId="20577"/>
+        <pc:chgData name="Jan Willem van den End (EBO_CMA)" userId="32ade95a-e024-4672-952f-5ed8641a9e00" providerId="ADAL" clId="{3BBBE02E-ACD4-4586-9407-5E79BF620DF1}" dt="2026-10-10T11:23:49.385" v="9818"/>
         <pc:sldMkLst>
           <pc:docMk/>
           <pc:sldMk cId="515665883" sldId="793"/>
         </pc:sldMkLst>
         <pc:spChg chg="mod">
-          <ac:chgData name="Jan Willem van den End (EBO_CMA)" userId="32ade95a-e024-4672-952f-5ed8641a9e00" providerId="ADAL" clId="{3BBBE02E-ACD4-4586-9407-5E79BF620DF1}" dt="2026-10-10T09:43:47.731" v="9700" actId="20577"/>
+          <ac:chgData name="Jan Willem van den End (EBO_CMA)" userId="32ade95a-e024-4672-952f-5ed8641a9e00" providerId="ADAL" clId="{3BBBE02E-ACD4-4586-9407-5E79BF620DF1}" dt="2026-10-10T11:23:49.385" v="9818"/>
           <ac:spMkLst>
             <pc:docMk/>
             <pc:sldMk cId="515665883" sldId="793"/>
@@ -554,13 +554,13 @@
         </pc:spChg>
       </pc:sldChg>
       <pc:sldChg chg="modSp add mod">
-        <pc:chgData name="Jan Willem van den End (EBO_CMA)" userId="32ade95a-e024-4672-952f-5ed8641a9e00" providerId="ADAL" clId="{3BBBE02E-ACD4-4586-9407-5E79BF620DF1}" dt="2026-10-10T11:20:38.165" v="9817" actId="20577"/>
+        <pc:chgData name="Jan Willem van den End (EBO_CMA)" userId="32ade95a-e024-4672-952f-5ed8641a9e00" providerId="ADAL" clId="{3BBBE02E-ACD4-4586-9407-5E79BF620DF1}" dt="2026-10-10T11:24:37.872" v="9825" actId="20577"/>
         <pc:sldMkLst>
           <pc:docMk/>
           <pc:sldMk cId="3745319895" sldId="798"/>
         </pc:sldMkLst>
         <pc:spChg chg="mod">
-          <ac:chgData name="Jan Willem van den End (EBO_CMA)" userId="32ade95a-e024-4672-952f-5ed8641a9e00" providerId="ADAL" clId="{3BBBE02E-ACD4-4586-9407-5E79BF620DF1}" dt="2026-10-10T11:20:38.165" v="9817" actId="20577"/>
+          <ac:chgData name="Jan Willem van den End (EBO_CMA)" userId="32ade95a-e024-4672-952f-5ed8641a9e00" providerId="ADAL" clId="{3BBBE02E-ACD4-4586-9407-5E79BF620DF1}" dt="2026-10-10T11:24:37.872" v="9825" actId="20577"/>
           <ac:spMkLst>
             <pc:docMk/>
             <pc:sldMk cId="3745319895" sldId="798"/>
@@ -8529,7 +8529,7 @@
                     <m:sSub>
                       <m:sSubPr>
                         <m:ctrlPr>
-                          <a:rPr lang="en-GB" sz="2600" i="1" noProof="1">
+                          <a:rPr lang="en-GB" sz="2800" i="1" noProof="1" dirty="0">
                             <a:latin typeface="Cambria Math" panose="02040503050406030204" pitchFamily="18" charset="0"/>
                             <a:ea typeface="Cambria Math" panose="02040503050406030204" pitchFamily="18" charset="0"/>
                           </a:rPr>
@@ -8537,11 +8537,11 @@
                       </m:sSubPr>
                       <m:e>
                         <m:r>
-                          <a:rPr lang="en-GB" sz="2600" i="1" noProof="1">
+                          <a:rPr lang="en-GB" sz="2800" i="1" noProof="1" dirty="0">
                             <a:latin typeface="Cambria Math" panose="02040503050406030204" pitchFamily="18" charset="0"/>
                             <a:ea typeface="Cambria Math" panose="02040503050406030204" pitchFamily="18" charset="0"/>
                           </a:rPr>
-                          <m:t>𝜇</m:t>
+                          <m:t>𝛼</m:t>
                         </m:r>
                       </m:e>
                       <m:sub>
@@ -8571,22 +8571,12 @@
                       </a:rPr>
                       <m:t>=</m:t>
                     </m:r>
-                  </m:oMath>
-                </a14:m>
-                <a:r>
-                  <a:rPr lang="en-GB" sz="2600" noProof="1">
-                    <a:ea typeface="Verdana" panose="020B0604030504040204" pitchFamily="34" charset="0"/>
-                  </a:rPr>
-                  <a:t> </a:t>
-                </a:r>
-                <a14:m>
-                  <m:oMath xmlns:m="http://schemas.openxmlformats.org/officeDocument/2006/math">
                     <m:r>
-                      <a:rPr lang="en-GB" sz="2600" i="1" noProof="1">
+                      <a:rPr lang="en-GB" sz="2800" i="1" noProof="1" dirty="0">
                         <a:latin typeface="Cambria Math" panose="02040503050406030204" pitchFamily="18" charset="0"/>
                         <a:ea typeface="Cambria Math" panose="02040503050406030204" pitchFamily="18" charset="0"/>
                       </a:rPr>
-                      <m:t>𝜇</m:t>
+                      <m:t>𝛼</m:t>
                     </m:r>
                   </m:oMath>
                 </a14:m>
@@ -8599,10 +8589,17 @@
                 </a:r>
                 <a14:m>
                   <m:oMath xmlns:m="http://schemas.openxmlformats.org/officeDocument/2006/math">
+                    <m:r>
+                      <a:rPr lang="en-US" sz="2600" b="0" i="0" noProof="1" smtClean="0">
+                        <a:latin typeface="Cambria Math" panose="02040503050406030204" pitchFamily="18" charset="0"/>
+                        <a:ea typeface="Cambria Math" panose="02040503050406030204" pitchFamily="18" charset="0"/>
+                      </a:rPr>
+                      <m:t> </m:t>
+                    </m:r>
                     <m:sSub>
                       <m:sSubPr>
                         <m:ctrlPr>
-                          <a:rPr lang="en-GB" sz="2600" b="0" i="1" noProof="1" smtClean="0">
+                          <a:rPr lang="en-GB" sz="2800" i="1" noProof="1" dirty="0">
                             <a:latin typeface="Cambria Math" panose="02040503050406030204" pitchFamily="18" charset="0"/>
                             <a:ea typeface="Cambria Math" panose="02040503050406030204" pitchFamily="18" charset="0"/>
                           </a:rPr>
@@ -8610,18 +8607,11 @@
                       </m:sSubPr>
                       <m:e>
                         <m:r>
-                          <a:rPr lang="en-GB" sz="2600" b="0" i="1" noProof="1" smtClean="0">
+                          <a:rPr lang="en-GB" sz="2800" i="1" noProof="1" dirty="0">
                             <a:latin typeface="Cambria Math" panose="02040503050406030204" pitchFamily="18" charset="0"/>
                             <a:ea typeface="Cambria Math" panose="02040503050406030204" pitchFamily="18" charset="0"/>
                           </a:rPr>
-                          <m:t> </m:t>
-                        </m:r>
-                        <m:r>
-                          <a:rPr lang="en-GB" sz="2600" i="1" noProof="1" smtClean="0">
-                            <a:latin typeface="Cambria Math" panose="02040503050406030204" pitchFamily="18" charset="0"/>
-                            <a:ea typeface="Cambria Math" panose="02040503050406030204" pitchFamily="18" charset="0"/>
-                          </a:rPr>
-                          <m:t>𝜇</m:t>
+                          <m:t>𝛼</m:t>
                         </m:r>
                       </m:e>
                       <m:sub>
@@ -9325,7 +9315,7 @@
                     <m:sSub>
                       <m:sSubPr>
                         <m:ctrlPr>
-                          <a:rPr lang="en-GB" sz="2600" i="1" noProof="1">
+                          <a:rPr lang="en-GB" sz="2800" i="1" noProof="1" dirty="0">
                             <a:latin typeface="Cambria Math" panose="02040503050406030204" pitchFamily="18" charset="0"/>
                             <a:ea typeface="Cambria Math" panose="02040503050406030204" pitchFamily="18" charset="0"/>
                           </a:rPr>
@@ -9333,7 +9323,7 @@
                       </m:sSubPr>
                       <m:e>
                         <m:r>
-                          <a:rPr lang="en-GB" sz="2600" i="1" noProof="1">
+                          <a:rPr lang="en-GB" sz="2800" i="1" noProof="1" dirty="0">
                             <a:latin typeface="Cambria Math" panose="02040503050406030204" pitchFamily="18" charset="0"/>
                             <a:ea typeface="Cambria Math" panose="02040503050406030204" pitchFamily="18" charset="0"/>
                           </a:rPr>
@@ -11167,7 +11157,7 @@
                     <m:sSub>
                       <m:sSubPr>
                         <m:ctrlPr>
-                          <a:rPr lang="en-GB" sz="2000" i="1" noProof="1">
+                          <a:rPr lang="en-GB" sz="2000" i="1" noProof="1" dirty="0">
                             <a:latin typeface="Cambria Math" panose="02040503050406030204" pitchFamily="18" charset="0"/>
                             <a:ea typeface="Cambria Math" panose="02040503050406030204" pitchFamily="18" charset="0"/>
                           </a:rPr>
@@ -11175,11 +11165,11 @@
                       </m:sSubPr>
                       <m:e>
                         <m:r>
-                          <a:rPr lang="en-GB" sz="2000" i="1" noProof="1">
+                          <a:rPr lang="en-GB" sz="2000" i="1" noProof="1" dirty="0">
                             <a:latin typeface="Cambria Math" panose="02040503050406030204" pitchFamily="18" charset="0"/>
                             <a:ea typeface="Cambria Math" panose="02040503050406030204" pitchFamily="18" charset="0"/>
                           </a:rPr>
-                          <m:t>𝜇</m:t>
+                          <m:t>𝛼</m:t>
                         </m:r>
                       </m:e>
                       <m:sub>
@@ -16216,8 +16206,8 @@
           </a:p>
         </p:txBody>
       </p:sp>
-      <mc:AlternateContent xmlns:mc="http://schemas.openxmlformats.org/markup-compatibility/2006" xmlns:a14="http://schemas.microsoft.com/office/drawing/2010/main">
-        <mc:Choice Requires="a14">
+      <mc:AlternateContent xmlns:mc="http://schemas.openxmlformats.org/markup-compatibility/2006">
+        <mc:Choice xmlns:a14="http://schemas.microsoft.com/office/drawing/2010/main" Requires="a14">
           <p:sp>
             <p:nvSpPr>
               <p:cNvPr id="2" name="Content Placeholder 2">
@@ -17825,7 +17815,7 @@
                     <m:sSub>
                       <m:sSubPr>
                         <m:ctrlPr>
-                          <a:rPr lang="en-GB" sz="1800" i="1" noProof="1" dirty="0" smtClean="0">
+                          <a:rPr lang="en-GB" sz="1800" i="1" noProof="1" dirty="0">
                             <a:latin typeface="Cambria Math" panose="02040503050406030204" pitchFamily="18" charset="0"/>
                             <a:ea typeface="Cambria Math" panose="02040503050406030204" pitchFamily="18" charset="0"/>
                           </a:rPr>
@@ -17833,11 +17823,11 @@
                       </m:sSubPr>
                       <m:e>
                         <m:r>
-                          <a:rPr lang="en-GB" sz="1800" i="1" noProof="1" dirty="0" smtClean="0">
+                          <a:rPr lang="en-GB" sz="1800" i="1" noProof="1" dirty="0">
                             <a:latin typeface="Cambria Math" panose="02040503050406030204" pitchFamily="18" charset="0"/>
                             <a:ea typeface="Cambria Math" panose="02040503050406030204" pitchFamily="18" charset="0"/>
                           </a:rPr>
-                          <m:t>𝜇</m:t>
+                          <m:t>𝛼</m:t>
                         </m:r>
                       </m:e>
                       <m:sub>
@@ -18395,7 +18385,7 @@
             </p:txBody>
           </p:sp>
         </mc:Choice>
-        <mc:Fallback xmlns="">
+        <mc:Fallback>
           <p:sp>
             <p:nvSpPr>
               <p:cNvPr id="2" name="Content Placeholder 2">
@@ -18429,7 +18419,7 @@
               <a:lstStyle/>
               <a:p>
                 <a:r>
-                  <a:rPr lang="en-US">
+                  <a:rPr lang="en-GB">
                     <a:noFill/>
                   </a:rPr>
                   <a:t> </a:t>

--- a/Resilience.pptx
+++ b/Resilience.pptx
@@ -161,7 +161,7 @@
 <file path=ppt/revisionInfo.xml><?xml version="1.0" encoding="utf-8"?>
 <p1510:revInfo xmlns:a="http://schemas.openxmlformats.org/drawingml/2006/main" xmlns:r="http://schemas.openxmlformats.org/officeDocument/2006/relationships" xmlns:p1510="http://schemas.microsoft.com/office/powerpoint/2015/10/main">
   <p1510:revLst>
-    <p1510:client id="{13B43BEF-9B9B-431D-9308-0B2B126B7992}" v="648" dt="2026-10-10T11:24:37.872"/>
+    <p1510:client id="{13B43BEF-9B9B-431D-9308-0B2B126B7992}" v="691" dt="2026-10-10T15:12:41.481"/>
   </p1510:revLst>
 </p1510:revInfo>
 </file>
@@ -171,7 +171,7 @@
   <pc:docChgLst>
     <pc:chgData name="Jan Willem van den End (EBO_CMA)" userId="32ade95a-e024-4672-952f-5ed8641a9e00" providerId="ADAL" clId="{3BBBE02E-ACD4-4586-9407-5E79BF620DF1}"/>
     <pc:docChg chg="undo redo custSel addSld modSld sldOrd">
-      <pc:chgData name="Jan Willem van den End (EBO_CMA)" userId="32ade95a-e024-4672-952f-5ed8641a9e00" providerId="ADAL" clId="{3BBBE02E-ACD4-4586-9407-5E79BF620DF1}" dt="2026-10-10T11:24:37.872" v="9825" actId="20577"/>
+      <pc:chgData name="Jan Willem van den End (EBO_CMA)" userId="32ade95a-e024-4672-952f-5ed8641a9e00" providerId="ADAL" clId="{3BBBE02E-ACD4-4586-9407-5E79BF620DF1}" dt="2026-10-10T15:12:41.481" v="10488" actId="6549"/>
       <pc:docMkLst>
         <pc:docMk/>
       </pc:docMkLst>
@@ -399,7 +399,7 @@
         </pc:picChg>
       </pc:sldChg>
       <pc:sldChg chg="modSp mod modNotes modNotesTx">
-        <pc:chgData name="Jan Willem van den End (EBO_CMA)" userId="32ade95a-e024-4672-952f-5ed8641a9e00" providerId="ADAL" clId="{3BBBE02E-ACD4-4586-9407-5E79BF620DF1}" dt="2026-10-10T11:23:49.385" v="9818"/>
+        <pc:chgData name="Jan Willem van den End (EBO_CMA)" userId="32ade95a-e024-4672-952f-5ed8641a9e00" providerId="ADAL" clId="{3BBBE02E-ACD4-4586-9407-5E79BF620DF1}" dt="2026-10-10T15:07:42.912" v="10466" actId="20577"/>
         <pc:sldMkLst>
           <pc:docMk/>
           <pc:sldMk cId="515665883" sldId="793"/>
@@ -413,7 +413,7 @@
           </ac:spMkLst>
         </pc:spChg>
         <pc:spChg chg="mod">
-          <ac:chgData name="Jan Willem van den End (EBO_CMA)" userId="32ade95a-e024-4672-952f-5ed8641a9e00" providerId="ADAL" clId="{3BBBE02E-ACD4-4586-9407-5E79BF620DF1}" dt="2026-10-10T08:31:21.054" v="8971" actId="20577"/>
+          <ac:chgData name="Jan Willem van den End (EBO_CMA)" userId="32ade95a-e024-4672-952f-5ed8641a9e00" providerId="ADAL" clId="{3BBBE02E-ACD4-4586-9407-5E79BF620DF1}" dt="2026-10-10T15:07:42.912" v="10466" actId="20577"/>
           <ac:spMkLst>
             <pc:docMk/>
             <pc:sldMk cId="515665883" sldId="793"/>
@@ -553,14 +553,14 @@
           </ac:spMkLst>
         </pc:spChg>
       </pc:sldChg>
-      <pc:sldChg chg="modSp add mod">
-        <pc:chgData name="Jan Willem van den End (EBO_CMA)" userId="32ade95a-e024-4672-952f-5ed8641a9e00" providerId="ADAL" clId="{3BBBE02E-ACD4-4586-9407-5E79BF620DF1}" dt="2026-10-10T11:24:37.872" v="9825" actId="20577"/>
+      <pc:sldChg chg="modSp add mod modNotesTx">
+        <pc:chgData name="Jan Willem van den End (EBO_CMA)" userId="32ade95a-e024-4672-952f-5ed8641a9e00" providerId="ADAL" clId="{3BBBE02E-ACD4-4586-9407-5E79BF620DF1}" dt="2026-10-10T15:12:41.481" v="10488" actId="6549"/>
         <pc:sldMkLst>
           <pc:docMk/>
           <pc:sldMk cId="3745319895" sldId="798"/>
         </pc:sldMkLst>
         <pc:spChg chg="mod">
-          <ac:chgData name="Jan Willem van den End (EBO_CMA)" userId="32ade95a-e024-4672-952f-5ed8641a9e00" providerId="ADAL" clId="{3BBBE02E-ACD4-4586-9407-5E79BF620DF1}" dt="2026-10-10T11:24:37.872" v="9825" actId="20577"/>
+          <ac:chgData name="Jan Willem van den End (EBO_CMA)" userId="32ade95a-e024-4672-952f-5ed8641a9e00" providerId="ADAL" clId="{3BBBE02E-ACD4-4586-9407-5E79BF620DF1}" dt="2026-10-10T15:12:41.481" v="10488" actId="6549"/>
           <ac:spMkLst>
             <pc:docMk/>
             <pc:sldMk cId="3745319895" sldId="798"/>
@@ -568,7 +568,7 @@
           </ac:spMkLst>
         </pc:spChg>
         <pc:spChg chg="mod">
-          <ac:chgData name="Jan Willem van den End (EBO_CMA)" userId="32ade95a-e024-4672-952f-5ed8641a9e00" providerId="ADAL" clId="{3BBBE02E-ACD4-4586-9407-5E79BF620DF1}" dt="2026-10-10T08:55:46.068" v="9232" actId="20577"/>
+          <ac:chgData name="Jan Willem van den End (EBO_CMA)" userId="32ade95a-e024-4672-952f-5ed8641a9e00" providerId="ADAL" clId="{3BBBE02E-ACD4-4586-9407-5E79BF620DF1}" dt="2026-10-10T13:04:02.055" v="10289" actId="20577"/>
           <ac:spMkLst>
             <pc:docMk/>
             <pc:sldMk cId="3745319895" sldId="798"/>
@@ -1301,13 +1301,181 @@
           <a:bodyPr/>
           <a:lstStyle/>
           <a:p>
-            <a:pPr marL="171450" indent="-171450">
+            <a:pPr marL="171450" marR="0" lvl="0" indent="-171450" algn="l" defTabSz="914400" rtl="0" eaLnBrk="1" fontAlgn="auto" latinLnBrk="0" hangingPunct="1">
+              <a:lnSpc>
+                <a:spcPct val="100000"/>
+              </a:lnSpc>
+              <a:spcBef>
+                <a:spcPts val="0"/>
+              </a:spcBef>
+              <a:spcAft>
+                <a:spcPts val="0"/>
+              </a:spcAft>
+              <a:buClrTx/>
+              <a:buSzTx/>
               <a:buFontTx/>
               <a:buChar char="-"/>
+              <a:tabLst/>
+              <a:defRPr/>
             </a:pPr>
             <a:r>
-              <a:rPr lang="en-US" sz="1400" dirty="0"/>
-              <a:t>Dependent variable is the unexpected component of GDP growth, while the explanatory variables describe the composition of GDP (investment or exports as a share of GDP). In doing so, the relationship does not describe an accounting identity. In addition, the ICT variables are recorded with a delay (previous ICT exposures explain later growth surprises).</a:t>
+              <a:rPr lang="en-NL" sz="1200" b="0" i="0" u="sng" kern="1200" dirty="0">
+                <a:solidFill>
+                  <a:schemeClr val="tx1"/>
+                </a:solidFill>
+                <a:effectLst/>
+                <a:latin typeface="+mn-lt"/>
+                <a:ea typeface="+mn-ea"/>
+                <a:cs typeface="+mn-cs"/>
+              </a:rPr>
+              <a:t>The CRE probit, also known as the </a:t>
+            </a:r>
+            <a:r>
+              <a:rPr lang="en-NL" sz="1200" b="0" i="0" u="sng" kern="1200" dirty="0" err="1">
+                <a:solidFill>
+                  <a:schemeClr val="tx1"/>
+                </a:solidFill>
+                <a:effectLst/>
+                <a:latin typeface="+mn-lt"/>
+                <a:ea typeface="+mn-ea"/>
+                <a:cs typeface="+mn-cs"/>
+              </a:rPr>
+              <a:t>Mundlak</a:t>
+            </a:r>
+            <a:r>
+              <a:rPr lang="en-NL" sz="1200" b="0" i="0" u="sng" kern="1200" dirty="0">
+                <a:solidFill>
+                  <a:schemeClr val="tx1"/>
+                </a:solidFill>
+                <a:effectLst/>
+                <a:latin typeface="+mn-lt"/>
+                <a:ea typeface="+mn-ea"/>
+                <a:cs typeface="+mn-cs"/>
+              </a:rPr>
+              <a:t> approach, is the </a:t>
+            </a:r>
+            <a:r>
+              <a:rPr lang="en-NL" sz="1200" b="1" i="0" u="sng" kern="1200" dirty="0">
+                <a:solidFill>
+                  <a:schemeClr val="tx1"/>
+                </a:solidFill>
+                <a:effectLst/>
+                <a:latin typeface="+mn-lt"/>
+                <a:ea typeface="+mn-ea"/>
+                <a:cs typeface="+mn-cs"/>
+              </a:rPr>
+              <a:t>nonlinear</a:t>
+            </a:r>
+            <a:r>
+              <a:rPr lang="en-NL" sz="1200" b="0" i="0" u="sng" kern="1200" dirty="0">
+                <a:solidFill>
+                  <a:schemeClr val="tx1"/>
+                </a:solidFill>
+                <a:effectLst/>
+                <a:latin typeface="+mn-lt"/>
+                <a:ea typeface="+mn-ea"/>
+                <a:cs typeface="+mn-cs"/>
+              </a:rPr>
+              <a:t> analogue of the fixed-effects LPM</a:t>
+            </a:r>
+            <a:r>
+              <a:rPr lang="en-US" sz="1200" b="0" i="0" u="sng" kern="1200" dirty="0">
+                <a:solidFill>
+                  <a:schemeClr val="tx1"/>
+                </a:solidFill>
+                <a:effectLst/>
+                <a:latin typeface="+mn-lt"/>
+                <a:ea typeface="+mn-ea"/>
+                <a:cs typeface="+mn-cs"/>
+              </a:rPr>
+              <a:t>.</a:t>
+            </a:r>
+            <a:endParaRPr lang="en-NL" sz="1200" b="0" i="0" u="sng" kern="1200" dirty="0">
+              <a:solidFill>
+                <a:schemeClr val="tx1"/>
+              </a:solidFill>
+              <a:effectLst/>
+              <a:latin typeface="+mn-lt"/>
+              <a:ea typeface="+mn-ea"/>
+              <a:cs typeface="+mn-cs"/>
+            </a:endParaRPr>
+          </a:p>
+          <a:p>
+            <a:pPr marL="0" indent="0">
+              <a:buFontTx/>
+              <a:buNone/>
+            </a:pPr>
+            <a:r>
+              <a:rPr lang="en-US" sz="1200" u="sng" kern="1200" dirty="0">
+                <a:solidFill>
+                  <a:schemeClr val="tx1"/>
+                </a:solidFill>
+                <a:effectLst/>
+                <a:latin typeface="+mn-lt"/>
+                <a:ea typeface="+mn-ea"/>
+                <a:cs typeface="+mn-cs"/>
+              </a:rPr>
+              <a:t>  CRE probit using </a:t>
+            </a:r>
+            <a:r>
+              <a:rPr lang="en-US" sz="1200" u="sng" kern="1200" dirty="0" err="1">
+                <a:solidFill>
+                  <a:schemeClr val="tx1"/>
+                </a:solidFill>
+                <a:effectLst/>
+                <a:latin typeface="+mn-lt"/>
+                <a:ea typeface="+mn-ea"/>
+                <a:cs typeface="+mn-cs"/>
+              </a:rPr>
+              <a:t>Mundlak</a:t>
+            </a:r>
+            <a:r>
+              <a:rPr lang="en-US" sz="1200" u="sng" kern="1200" dirty="0">
+                <a:solidFill>
+                  <a:schemeClr val="tx1"/>
+                </a:solidFill>
+                <a:effectLst/>
+                <a:latin typeface="+mn-lt"/>
+                <a:ea typeface="+mn-ea"/>
+                <a:cs typeface="+mn-cs"/>
+              </a:rPr>
+              <a:t> formulation</a:t>
+            </a:r>
+            <a:r>
+              <a:rPr lang="en-US" sz="1200" kern="1200" dirty="0">
+                <a:solidFill>
+                  <a:schemeClr val="tx1"/>
+                </a:solidFill>
+                <a:effectLst/>
+                <a:latin typeface="+mn-lt"/>
+                <a:ea typeface="+mn-ea"/>
+                <a:cs typeface="+mn-cs"/>
+              </a:rPr>
+              <a:t>, including country means of the time-varying explanatory variables and controls (within/between decompositions of ICT and the enabled time-varying controls.). This permits persistent unobserved country heterogeneity to be correlated with ICT exposure. Inference accounts for within-country dependence. Including means of explanatory variables makes random component </a:t>
+            </a:r>
+            <a:r>
+              <a:rPr lang="en-US" sz="1200" kern="1200" dirty="0" err="1">
+                <a:solidFill>
+                  <a:schemeClr val="tx1"/>
+                </a:solidFill>
+                <a:effectLst/>
+                <a:latin typeface="+mn-lt"/>
+                <a:ea typeface="+mn-ea"/>
+                <a:cs typeface="+mn-cs"/>
+              </a:rPr>
+              <a:t>alpha_i</a:t>
+            </a:r>
+            <a:r>
+              <a:rPr lang="en-US" sz="1200" kern="1200" dirty="0">
+                <a:solidFill>
+                  <a:schemeClr val="tx1"/>
+                </a:solidFill>
+                <a:effectLst/>
+                <a:latin typeface="+mn-lt"/>
+                <a:ea typeface="+mn-ea"/>
+                <a:cs typeface="+mn-cs"/>
+              </a:rPr>
+              <a:t> (=remaining unobserved country heterogeneity, = country random effect) independent of the regressors. </a:t>
             </a:r>
           </a:p>
           <a:p>
@@ -1315,142 +1483,301 @@
               <a:buFontTx/>
               <a:buChar char="-"/>
             </a:pPr>
-            <a:endParaRPr lang="en-US" sz="1400" dirty="0"/>
+            <a:r>
+              <a:rPr lang="en-US" sz="1200" kern="1200" dirty="0">
+                <a:solidFill>
+                  <a:schemeClr val="tx1"/>
+                </a:solidFill>
+                <a:effectLst/>
+                <a:latin typeface="+mn-lt"/>
+                <a:ea typeface="+mn-ea"/>
+                <a:cs typeface="+mn-cs"/>
+              </a:rPr>
+              <a:t>.</a:t>
+            </a:r>
+            <a:r>
+              <a:rPr lang="en-US" sz="1200" kern="1200" dirty="0" err="1">
+                <a:solidFill>
+                  <a:schemeClr val="tx1"/>
+                </a:solidFill>
+                <a:effectLst/>
+                <a:latin typeface="+mn-lt"/>
+                <a:ea typeface="+mn-ea"/>
+                <a:cs typeface="+mn-cs"/>
+              </a:rPr>
+              <a:t>Beta_w</a:t>
+            </a:r>
+            <a:r>
+              <a:rPr lang="en-US" sz="1200" kern="1200" dirty="0">
+                <a:solidFill>
+                  <a:schemeClr val="tx1"/>
+                </a:solidFill>
+                <a:effectLst/>
+                <a:latin typeface="+mn-lt"/>
+                <a:ea typeface="+mn-ea"/>
+                <a:cs typeface="+mn-cs"/>
+              </a:rPr>
+              <a:t> = within country effect (</a:t>
+            </a:r>
+            <a:r>
+              <a:rPr lang="en-US" sz="1200" kern="1200" dirty="0" err="1">
+                <a:solidFill>
+                  <a:schemeClr val="tx1"/>
+                </a:solidFill>
+                <a:effectLst/>
+                <a:latin typeface="+mn-lt"/>
+                <a:ea typeface="+mn-ea"/>
+                <a:cs typeface="+mn-cs"/>
+              </a:rPr>
+              <a:t>Beta_w</a:t>
+            </a:r>
+            <a:r>
+              <a:rPr lang="en-US" sz="1200" kern="1200" dirty="0">
+                <a:solidFill>
+                  <a:schemeClr val="tx1"/>
+                </a:solidFill>
+                <a:effectLst/>
+                <a:latin typeface="+mn-lt"/>
+                <a:ea typeface="+mn-ea"/>
+                <a:cs typeface="+mn-cs"/>
+              </a:rPr>
+              <a:t> * (</a:t>
+            </a:r>
+            <a:r>
+              <a:rPr lang="en-US" sz="1200" kern="1200" dirty="0" err="1">
+                <a:solidFill>
+                  <a:schemeClr val="tx1"/>
+                </a:solidFill>
+                <a:effectLst/>
+                <a:latin typeface="+mn-lt"/>
+                <a:ea typeface="+mn-ea"/>
+                <a:cs typeface="+mn-cs"/>
+              </a:rPr>
+              <a:t>X_t</a:t>
+            </a:r>
+            <a:r>
+              <a:rPr lang="en-US" sz="1200" kern="1200" dirty="0">
+                <a:solidFill>
+                  <a:schemeClr val="tx1"/>
+                </a:solidFill>
+                <a:effectLst/>
+                <a:latin typeface="+mn-lt"/>
+                <a:ea typeface="+mn-ea"/>
+                <a:cs typeface="+mn-cs"/>
+              </a:rPr>
+              <a:t> - </a:t>
+            </a:r>
+            <a:r>
+              <a:rPr lang="en-US" sz="1200" kern="1200" dirty="0" err="1">
+                <a:solidFill>
+                  <a:schemeClr val="tx1"/>
+                </a:solidFill>
+                <a:effectLst/>
+                <a:latin typeface="+mn-lt"/>
+                <a:ea typeface="+mn-ea"/>
+                <a:cs typeface="+mn-cs"/>
+              </a:rPr>
+              <a:t>X_mean</a:t>
+            </a:r>
+            <a:r>
+              <a:rPr lang="en-US" sz="1200" kern="1200" dirty="0">
+                <a:solidFill>
+                  <a:schemeClr val="tx1"/>
+                </a:solidFill>
+                <a:effectLst/>
+                <a:latin typeface="+mn-lt"/>
+                <a:ea typeface="+mn-ea"/>
+                <a:cs typeface="+mn-cs"/>
+              </a:rPr>
+              <a:t>): what happens when X changes within a country</a:t>
+            </a:r>
           </a:p>
           <a:p>
-            <a:pPr marL="171450" indent="-171450">
+            <a:pPr marL="0" indent="0">
               <a:buFontTx/>
-              <a:buChar char="-"/>
+              <a:buNone/>
             </a:pPr>
             <a:r>
-              <a:rPr lang="en-US" sz="1400" dirty="0"/>
-              <a:t>Investing in ICT does not yet equal its effective application. It is a proxy, also for a country's exposure to the ICT factor without having to change economic processes.</a:t>
-            </a:r>
-          </a:p>
-          <a:p>
-            <a:pPr marL="171450" indent="-171450">
-              <a:buFontTx/>
-              <a:buChar char="-"/>
-            </a:pPr>
-            <a:endParaRPr lang="nl-NL" sz="1400" dirty="0"/>
-          </a:p>
-          <a:p>
-            <a:pPr marL="171450" indent="-171450">
-              <a:buFontTx/>
-              <a:buChar char="-"/>
-            </a:pPr>
-            <a:r>
-              <a:rPr lang="nl-NL" sz="1400" dirty="0" err="1"/>
-              <a:t>Each</a:t>
-            </a:r>
-            <a:r>
-              <a:rPr lang="nl-NL" sz="1400" dirty="0"/>
-              <a:t> </a:t>
-            </a:r>
-            <a:r>
-              <a:rPr lang="nl-NL" sz="1400" dirty="0" err="1"/>
-              <a:t>year</a:t>
-            </a:r>
-            <a:r>
-              <a:rPr lang="nl-NL" sz="1400" dirty="0"/>
-              <a:t> the </a:t>
-            </a:r>
-            <a:r>
-              <a:rPr lang="nl-NL" sz="1400" dirty="0" err="1"/>
-              <a:t>median</a:t>
-            </a:r>
-            <a:r>
-              <a:rPr lang="nl-NL" sz="1400" dirty="0"/>
-              <a:t> </a:t>
-            </a:r>
-            <a:r>
-              <a:rPr lang="nl-NL" sz="1400" dirty="0" err="1"/>
-              <a:t>threshold</a:t>
-            </a:r>
-            <a:r>
-              <a:rPr lang="nl-NL" sz="1400" dirty="0"/>
-              <a:t> </a:t>
-            </a:r>
-            <a:r>
-              <a:rPr lang="nl-NL" sz="1400" dirty="0" err="1"/>
-              <a:t>for</a:t>
-            </a:r>
-            <a:r>
-              <a:rPr lang="nl-NL" sz="1400" dirty="0"/>
-              <a:t> </a:t>
-            </a:r>
-            <a:r>
-              <a:rPr lang="nl-NL" sz="1400" dirty="0" err="1"/>
-              <a:t>Above</a:t>
-            </a:r>
-            <a:r>
-              <a:rPr lang="nl-NL" sz="1400" dirty="0"/>
-              <a:t> </a:t>
-            </a:r>
-            <a:r>
-              <a:rPr lang="nl-NL" sz="1400" dirty="0" err="1"/>
-              <a:t>vs</a:t>
-            </a:r>
-            <a:r>
-              <a:rPr lang="nl-NL" sz="1400" dirty="0"/>
-              <a:t> Below changes, </a:t>
-            </a:r>
-            <a:r>
-              <a:rPr lang="nl-NL" sz="1400" dirty="0" err="1"/>
-              <a:t>so</a:t>
-            </a:r>
-            <a:r>
-              <a:rPr lang="nl-NL" sz="1400" dirty="0"/>
-              <a:t>: </a:t>
-            </a:r>
-            <a:r>
-              <a:rPr lang="nl-NL" sz="1400" dirty="0" err="1"/>
+              <a:rPr lang="en-NL" sz="1400" u="sng" kern="1200" dirty="0" err="1">
+                <a:solidFill>
+                  <a:schemeClr val="tx1"/>
+                </a:solidFill>
+                <a:effectLst/>
+                <a:latin typeface="+mn-lt"/>
+                <a:ea typeface="+mn-ea"/>
+                <a:cs typeface="+mn-cs"/>
+              </a:rPr>
+              <a:t>Mundlak</a:t>
+            </a:r>
+            <a:r>
+              <a:rPr lang="en-NL" sz="1400" u="sng" kern="1200" dirty="0">
+                <a:solidFill>
+                  <a:schemeClr val="tx1"/>
+                </a:solidFill>
+                <a:effectLst/>
+                <a:latin typeface="+mn-lt"/>
+                <a:ea typeface="+mn-ea"/>
+                <a:cs typeface="+mn-cs"/>
+              </a:rPr>
+              <a:t> country </a:t>
+            </a:r>
+            <a:r>
+              <a:rPr lang="en-NL" sz="1400" b="1" u="sng" kern="1200" dirty="0">
+                <a:solidFill>
+                  <a:schemeClr val="tx1"/>
+                </a:solidFill>
+                <a:effectLst/>
+                <a:latin typeface="+mn-lt"/>
+                <a:ea typeface="+mn-ea"/>
+                <a:cs typeface="+mn-cs"/>
+              </a:rPr>
+              <a:t>means</a:t>
+            </a:r>
+            <a:r>
+              <a:rPr lang="en-NL" sz="1400" u="sng" kern="1200" dirty="0">
+                <a:solidFill>
+                  <a:schemeClr val="tx1"/>
+                </a:solidFill>
+                <a:effectLst/>
+                <a:latin typeface="+mn-lt"/>
+                <a:ea typeface="+mn-ea"/>
+                <a:cs typeface="+mn-cs"/>
+              </a:rPr>
+              <a:t> adequately capture the </a:t>
+            </a:r>
+            <a:r>
+              <a:rPr lang="en-NL" sz="1400" b="1" u="sng" kern="1200" dirty="0">
+                <a:solidFill>
+                  <a:schemeClr val="tx1"/>
+                </a:solidFill>
+                <a:effectLst/>
+                <a:latin typeface="+mn-lt"/>
+                <a:ea typeface="+mn-ea"/>
+                <a:cs typeface="+mn-cs"/>
+              </a:rPr>
+              <a:t>correlation</a:t>
+            </a:r>
+            <a:r>
+              <a:rPr lang="en-NL" sz="1400" u="sng" kern="1200" dirty="0">
+                <a:solidFill>
+                  <a:schemeClr val="tx1"/>
+                </a:solidFill>
+                <a:effectLst/>
+                <a:latin typeface="+mn-lt"/>
+                <a:ea typeface="+mn-ea"/>
+                <a:cs typeface="+mn-cs"/>
+              </a:rPr>
+              <a:t> between ICT exposure and persistent country heterogeneity</a:t>
+            </a:r>
+            <a:r>
+              <a:rPr lang="en-US" sz="1400" u="sng" kern="1200" dirty="0">
+                <a:solidFill>
+                  <a:schemeClr val="tx1"/>
+                </a:solidFill>
+                <a:effectLst/>
+                <a:latin typeface="+mn-lt"/>
+                <a:ea typeface="+mn-ea"/>
+                <a:cs typeface="+mn-cs"/>
+              </a:rPr>
+              <a:t> =&gt;  </a:t>
+            </a:r>
+            <a:r>
+              <a:rPr lang="en-NL" sz="1200" kern="1200" dirty="0">
+                <a:solidFill>
+                  <a:schemeClr val="tx1"/>
+                </a:solidFill>
+                <a:effectLst/>
+                <a:latin typeface="+mn-lt"/>
+                <a:ea typeface="+mn-ea"/>
+                <a:cs typeface="+mn-cs"/>
+              </a:rPr>
+              <a:t>FE probit </a:t>
+            </a:r>
+            <a:r>
+              <a:rPr lang="en-US" sz="1200" kern="1200" dirty="0">
+                <a:solidFill>
+                  <a:schemeClr val="tx1"/>
+                </a:solidFill>
+                <a:effectLst/>
+                <a:latin typeface="+mn-lt"/>
+                <a:ea typeface="+mn-ea"/>
+                <a:cs typeface="+mn-cs"/>
+              </a:rPr>
+              <a:t>model </a:t>
+            </a:r>
+            <a:r>
+              <a:rPr lang="en-NL" sz="1200" kern="1200" dirty="0">
+                <a:solidFill>
+                  <a:schemeClr val="tx1"/>
+                </a:solidFill>
+                <a:effectLst/>
+                <a:latin typeface="+mn-lt"/>
+                <a:ea typeface="+mn-ea"/>
+                <a:cs typeface="+mn-cs"/>
+              </a:rPr>
+              <a:t>estimates a separate intercept for </a:t>
+            </a:r>
+            <a:r>
+              <a:rPr lang="en-US" sz="1200" kern="1200" dirty="0">
+                <a:solidFill>
+                  <a:schemeClr val="tx1"/>
+                </a:solidFill>
+                <a:effectLst/>
+                <a:latin typeface="+mn-lt"/>
+                <a:ea typeface="+mn-ea"/>
+                <a:cs typeface="+mn-cs"/>
+              </a:rPr>
               <a:t>each</a:t>
             </a:r>
             <a:r>
-              <a:rPr lang="nl-NL" sz="1400" dirty="0"/>
-              <a:t> </a:t>
-            </a:r>
-            <a:r>
-              <a:rPr lang="nl-NL" sz="1400" dirty="0" err="1"/>
-              <a:t>year</a:t>
-            </a:r>
-            <a:r>
-              <a:rPr lang="nl-NL" sz="1400" dirty="0"/>
-              <a:t> the </a:t>
-            </a:r>
-            <a:r>
-              <a:rPr lang="nl-NL" sz="1400" dirty="0" err="1"/>
-              <a:t>Above</a:t>
-            </a:r>
-            <a:r>
-              <a:rPr lang="nl-NL" sz="1400" dirty="0"/>
-              <a:t> and Below </a:t>
-            </a:r>
-            <a:r>
-              <a:rPr lang="nl-NL" sz="1400" dirty="0" err="1"/>
-              <a:t>groups</a:t>
-            </a:r>
-            <a:r>
-              <a:rPr lang="nl-NL" sz="1400" dirty="0"/>
-              <a:t> of </a:t>
-            </a:r>
-            <a:r>
-              <a:rPr lang="nl-NL" sz="1400" dirty="0" err="1"/>
-              <a:t>countries</a:t>
-            </a:r>
-            <a:r>
-              <a:rPr lang="nl-NL" sz="1400" dirty="0"/>
-              <a:t> </a:t>
-            </a:r>
-            <a:r>
-              <a:rPr lang="nl-NL" sz="1400" dirty="0" err="1"/>
-              <a:t>differ</a:t>
-            </a:r>
-            <a:r>
-              <a:rPr lang="nl-NL" sz="1400" dirty="0"/>
-              <a:t>.</a:t>
-            </a:r>
+              <a:rPr lang="en-NL" sz="1200" kern="1200" dirty="0">
+                <a:solidFill>
+                  <a:schemeClr val="tx1"/>
+                </a:solidFill>
+                <a:effectLst/>
+                <a:latin typeface="+mn-lt"/>
+                <a:ea typeface="+mn-ea"/>
+                <a:cs typeface="+mn-cs"/>
+              </a:rPr>
+              <a:t> country, whereas CRE probit assumes a normally distributed </a:t>
+            </a:r>
+            <a:r>
+              <a:rPr lang="en-NL" sz="1200" b="1" kern="1200" dirty="0">
+                <a:solidFill>
+                  <a:schemeClr val="tx1"/>
+                </a:solidFill>
+                <a:effectLst/>
+                <a:latin typeface="+mn-lt"/>
+                <a:ea typeface="+mn-ea"/>
+                <a:cs typeface="+mn-cs"/>
+              </a:rPr>
+              <a:t>country random intercept </a:t>
+            </a:r>
+            <a:r>
+              <a:rPr lang="en-NL" sz="1200" kern="1200" dirty="0">
+                <a:solidFill>
+                  <a:schemeClr val="tx1"/>
+                </a:solidFill>
+                <a:effectLst/>
+                <a:latin typeface="+mn-lt"/>
+                <a:ea typeface="+mn-ea"/>
+                <a:cs typeface="+mn-cs"/>
+              </a:rPr>
+              <a:t>and models its </a:t>
+            </a:r>
+            <a:r>
+              <a:rPr lang="en-NL" sz="1200" b="1" kern="1200" dirty="0">
+                <a:solidFill>
+                  <a:schemeClr val="tx1"/>
+                </a:solidFill>
+                <a:effectLst/>
+                <a:latin typeface="+mn-lt"/>
+                <a:ea typeface="+mn-ea"/>
+                <a:cs typeface="+mn-cs"/>
+              </a:rPr>
+              <a:t>correlation with the regressors through their country means</a:t>
+            </a:r>
+            <a:endParaRPr lang="nl-NL" sz="1400" b="1" dirty="0"/>
           </a:p>
         </p:txBody>
       </p:sp>
@@ -5253,180 +5580,2311 @@
           </a:p>
         </p:txBody>
       </p:sp>
-      <p:sp>
-        <p:nvSpPr>
-          <p:cNvPr id="3" name="Tijdelijke aanduiding voor notities 2">
-            <a:extLst>
-              <a:ext uri="{FF2B5EF4-FFF2-40B4-BE49-F238E27FC236}">
-                <a16:creationId xmlns:a16="http://schemas.microsoft.com/office/drawing/2014/main" id="{8F9248E1-2394-BB6E-ACF7-C8BB520C4467}"/>
-              </a:ext>
-            </a:extLst>
-          </p:cNvPr>
-          <p:cNvSpPr>
-            <a:spLocks noGrp="1"/>
-          </p:cNvSpPr>
-          <p:nvPr>
-            <p:ph type="body" idx="1"/>
-          </p:nvPr>
-        </p:nvSpPr>
-        <p:spPr/>
-        <p:txBody>
-          <a:bodyPr/>
-          <a:lstStyle/>
-          <a:p>
-            <a:pPr marL="171450" indent="-171450">
-              <a:buFontTx/>
-              <a:buChar char="-"/>
-            </a:pPr>
-            <a:r>
-              <a:rPr lang="en-US" sz="1400" dirty="0"/>
-              <a:t>Dependent variable is the unexpected component of GDP growth, while the explanatory variables describe the composition of GDP (investment or exports as a share of GDP). In doing so, the relationship does not describe an accounting identity. In addition, the ICT variables are recorded with a delay (previous ICT exposures explain later growth surprises).</a:t>
-            </a:r>
-          </a:p>
-          <a:p>
-            <a:pPr marL="171450" indent="-171450">
-              <a:buFontTx/>
-              <a:buChar char="-"/>
-            </a:pPr>
-            <a:endParaRPr lang="en-US" sz="1400" dirty="0"/>
-          </a:p>
-          <a:p>
-            <a:pPr marL="171450" indent="-171450">
-              <a:buFontTx/>
-              <a:buChar char="-"/>
-            </a:pPr>
-            <a:r>
-              <a:rPr lang="en-US" sz="1400" dirty="0"/>
-              <a:t>Investing in ICT does not yet equal its effective application. It is a proxy, also for a country's exposure to the ICT factor without having to change economic processes.</a:t>
-            </a:r>
-          </a:p>
-          <a:p>
-            <a:pPr marL="171450" indent="-171450">
-              <a:buFontTx/>
-              <a:buChar char="-"/>
-            </a:pPr>
-            <a:endParaRPr lang="nl-NL" sz="1400" dirty="0"/>
-          </a:p>
-          <a:p>
-            <a:pPr marL="171450" indent="-171450">
-              <a:buFontTx/>
-              <a:buChar char="-"/>
-            </a:pPr>
-            <a:r>
-              <a:rPr lang="nl-NL" sz="1400" dirty="0" err="1"/>
-              <a:t>Each</a:t>
-            </a:r>
-            <a:r>
-              <a:rPr lang="nl-NL" sz="1400" dirty="0"/>
-              <a:t> </a:t>
-            </a:r>
-            <a:r>
-              <a:rPr lang="nl-NL" sz="1400" dirty="0" err="1"/>
-              <a:t>year</a:t>
-            </a:r>
-            <a:r>
-              <a:rPr lang="nl-NL" sz="1400" dirty="0"/>
-              <a:t> the </a:t>
-            </a:r>
-            <a:r>
-              <a:rPr lang="nl-NL" sz="1400" dirty="0" err="1"/>
-              <a:t>median</a:t>
-            </a:r>
-            <a:r>
-              <a:rPr lang="nl-NL" sz="1400" dirty="0"/>
-              <a:t> </a:t>
-            </a:r>
-            <a:r>
-              <a:rPr lang="nl-NL" sz="1400" dirty="0" err="1"/>
-              <a:t>threshold</a:t>
-            </a:r>
-            <a:r>
-              <a:rPr lang="nl-NL" sz="1400" dirty="0"/>
-              <a:t> </a:t>
-            </a:r>
-            <a:r>
-              <a:rPr lang="nl-NL" sz="1400" dirty="0" err="1"/>
-              <a:t>for</a:t>
-            </a:r>
-            <a:r>
-              <a:rPr lang="nl-NL" sz="1400" dirty="0"/>
-              <a:t> </a:t>
-            </a:r>
-            <a:r>
-              <a:rPr lang="nl-NL" sz="1400" dirty="0" err="1"/>
-              <a:t>Above</a:t>
-            </a:r>
-            <a:r>
-              <a:rPr lang="nl-NL" sz="1400" dirty="0"/>
-              <a:t> </a:t>
-            </a:r>
-            <a:r>
-              <a:rPr lang="nl-NL" sz="1400" dirty="0" err="1"/>
-              <a:t>vs</a:t>
-            </a:r>
-            <a:r>
-              <a:rPr lang="nl-NL" sz="1400" dirty="0"/>
-              <a:t> Below changes, </a:t>
-            </a:r>
-            <a:r>
-              <a:rPr lang="nl-NL" sz="1400" dirty="0" err="1"/>
-              <a:t>so</a:t>
-            </a:r>
-            <a:r>
-              <a:rPr lang="nl-NL" sz="1400" dirty="0"/>
-              <a:t>: </a:t>
-            </a:r>
-            <a:r>
-              <a:rPr lang="nl-NL" sz="1400" dirty="0" err="1"/>
-              <a:t>each</a:t>
-            </a:r>
-            <a:r>
-              <a:rPr lang="nl-NL" sz="1400" dirty="0"/>
-              <a:t> </a:t>
-            </a:r>
-            <a:r>
-              <a:rPr lang="nl-NL" sz="1400" dirty="0" err="1"/>
-              <a:t>year</a:t>
-            </a:r>
-            <a:r>
-              <a:rPr lang="nl-NL" sz="1400" dirty="0"/>
-              <a:t> the </a:t>
-            </a:r>
-            <a:r>
-              <a:rPr lang="nl-NL" sz="1400" dirty="0" err="1"/>
-              <a:t>Above</a:t>
-            </a:r>
-            <a:r>
-              <a:rPr lang="nl-NL" sz="1400" dirty="0"/>
-              <a:t> and Below </a:t>
-            </a:r>
-            <a:r>
-              <a:rPr lang="nl-NL" sz="1400" dirty="0" err="1"/>
-              <a:t>groups</a:t>
-            </a:r>
-            <a:r>
-              <a:rPr lang="nl-NL" sz="1400" dirty="0"/>
-              <a:t> of </a:t>
-            </a:r>
-            <a:r>
-              <a:rPr lang="nl-NL" sz="1400" dirty="0" err="1"/>
-              <a:t>countries</a:t>
-            </a:r>
-            <a:r>
-              <a:rPr lang="nl-NL" sz="1400" dirty="0"/>
-              <a:t> </a:t>
-            </a:r>
-            <a:r>
-              <a:rPr lang="nl-NL" sz="1400" dirty="0" err="1"/>
-              <a:t>differ</a:t>
-            </a:r>
-            <a:r>
-              <a:rPr lang="nl-NL" sz="1400" dirty="0"/>
-              <a:t>.</a:t>
-            </a:r>
-          </a:p>
-        </p:txBody>
-      </p:sp>
+      <mc:AlternateContent xmlns:mc="http://schemas.openxmlformats.org/markup-compatibility/2006">
+        <mc:Choice xmlns:a14="http://schemas.microsoft.com/office/drawing/2010/main" Requires="a14">
+          <p:sp>
+            <p:nvSpPr>
+              <p:cNvPr id="3" name="Tijdelijke aanduiding voor notities 2">
+                <a:extLst>
+                  <a:ext uri="{FF2B5EF4-FFF2-40B4-BE49-F238E27FC236}">
+                    <a16:creationId xmlns:a16="http://schemas.microsoft.com/office/drawing/2014/main" id="{8F9248E1-2394-BB6E-ACF7-C8BB520C4467}"/>
+                  </a:ext>
+                </a:extLst>
+              </p:cNvPr>
+              <p:cNvSpPr>
+                <a:spLocks noGrp="1"/>
+              </p:cNvSpPr>
+              <p:nvPr>
+                <p:ph type="body" idx="1"/>
+              </p:nvPr>
+            </p:nvSpPr>
+            <p:spPr>
+              <a:xfrm>
+                <a:off x="233917" y="4785598"/>
+                <a:ext cx="6223590" cy="3915489"/>
+              </a:xfrm>
+            </p:spPr>
+            <p:txBody>
+              <a:bodyPr/>
+              <a:lstStyle/>
+              <a:p>
+                <a:r>
+                  <a:rPr lang="en-US" sz="1300" dirty="0"/>
+                  <a:t>Dependent variable is the unexpected component of GDP growth, while the explanatory variables describe the composition of GDP (investment or exports as a share of GDP). In doing so, the relationship does not describe an accounting identity. In addition, the ICT variables are recorded with a delay (previous ICT exposures explain later growth surprises).</a:t>
+                </a:r>
+              </a:p>
+              <a:p>
+                <a:pPr marL="171450" indent="-171450">
+                  <a:buFontTx/>
+                  <a:buChar char="-"/>
+                </a:pPr>
+                <a:endParaRPr lang="en-US" sz="1300" dirty="0"/>
+              </a:p>
+              <a:p>
+                <a:pPr marL="171450" indent="-171450">
+                  <a:buFontTx/>
+                  <a:buChar char="-"/>
+                </a:pPr>
+                <a:r>
+                  <a:rPr lang="en-US" sz="1300" dirty="0"/>
+                  <a:t>Investing in ICT does not yet equal its effective application. It is a proxy, also for a country's exposure to the ICT factor without having to change economic processes.</a:t>
+                </a:r>
+              </a:p>
+              <a:p>
+                <a:pPr marL="171450" indent="-171450">
+                  <a:buFontTx/>
+                  <a:buChar char="-"/>
+                </a:pPr>
+                <a:r>
+                  <a:rPr lang="nl-NL" sz="1300" dirty="0" err="1"/>
+                  <a:t>Each</a:t>
+                </a:r>
+                <a:r>
+                  <a:rPr lang="nl-NL" sz="1300" dirty="0"/>
+                  <a:t> </a:t>
+                </a:r>
+                <a:r>
+                  <a:rPr lang="nl-NL" sz="1300" dirty="0" err="1"/>
+                  <a:t>year</a:t>
+                </a:r>
+                <a:r>
+                  <a:rPr lang="nl-NL" sz="1300" dirty="0"/>
+                  <a:t> the </a:t>
+                </a:r>
+                <a:r>
+                  <a:rPr lang="nl-NL" sz="1300" dirty="0" err="1"/>
+                  <a:t>median</a:t>
+                </a:r>
+                <a:r>
+                  <a:rPr lang="nl-NL" sz="1300" dirty="0"/>
+                  <a:t> </a:t>
+                </a:r>
+                <a:r>
+                  <a:rPr lang="nl-NL" sz="1300" dirty="0" err="1"/>
+                  <a:t>threshold</a:t>
+                </a:r>
+                <a:r>
+                  <a:rPr lang="nl-NL" sz="1300" dirty="0"/>
+                  <a:t> </a:t>
+                </a:r>
+                <a:r>
+                  <a:rPr lang="nl-NL" sz="1300" dirty="0" err="1"/>
+                  <a:t>for</a:t>
+                </a:r>
+                <a:r>
+                  <a:rPr lang="nl-NL" sz="1300" dirty="0"/>
+                  <a:t> </a:t>
+                </a:r>
+                <a:r>
+                  <a:rPr lang="nl-NL" sz="1300" dirty="0" err="1"/>
+                  <a:t>Above</a:t>
+                </a:r>
+                <a:r>
+                  <a:rPr lang="nl-NL" sz="1300" dirty="0"/>
+                  <a:t> </a:t>
+                </a:r>
+                <a:r>
+                  <a:rPr lang="nl-NL" sz="1300" dirty="0" err="1"/>
+                  <a:t>vs</a:t>
+                </a:r>
+                <a:r>
+                  <a:rPr lang="nl-NL" sz="1300" dirty="0"/>
+                  <a:t> Below changes, </a:t>
+                </a:r>
+                <a:r>
+                  <a:rPr lang="nl-NL" sz="1300" dirty="0" err="1"/>
+                  <a:t>so</a:t>
+                </a:r>
+                <a:r>
+                  <a:rPr lang="nl-NL" sz="1300" dirty="0"/>
+                  <a:t>: </a:t>
+                </a:r>
+                <a:r>
+                  <a:rPr lang="nl-NL" sz="1300" dirty="0" err="1"/>
+                  <a:t>each</a:t>
+                </a:r>
+                <a:r>
+                  <a:rPr lang="nl-NL" sz="1300" dirty="0"/>
+                  <a:t> </a:t>
+                </a:r>
+                <a:r>
+                  <a:rPr lang="nl-NL" sz="1300" dirty="0" err="1"/>
+                  <a:t>year</a:t>
+                </a:r>
+                <a:r>
+                  <a:rPr lang="nl-NL" sz="1300" dirty="0"/>
+                  <a:t> the </a:t>
+                </a:r>
+                <a:r>
+                  <a:rPr lang="nl-NL" sz="1300" dirty="0" err="1"/>
+                  <a:t>Above</a:t>
+                </a:r>
+                <a:r>
+                  <a:rPr lang="nl-NL" sz="1300" dirty="0"/>
+                  <a:t> and Below </a:t>
+                </a:r>
+                <a:r>
+                  <a:rPr lang="nl-NL" sz="1300" dirty="0" err="1"/>
+                  <a:t>groups</a:t>
+                </a:r>
+                <a:r>
+                  <a:rPr lang="nl-NL" sz="1300" dirty="0"/>
+                  <a:t> of </a:t>
+                </a:r>
+                <a:r>
+                  <a:rPr lang="nl-NL" sz="1300" dirty="0" err="1"/>
+                  <a:t>countries</a:t>
+                </a:r>
+                <a:r>
+                  <a:rPr lang="nl-NL" sz="1300" dirty="0"/>
+                  <a:t> </a:t>
+                </a:r>
+                <a:r>
+                  <a:rPr lang="nl-NL" sz="1300" dirty="0" err="1"/>
+                  <a:t>differ</a:t>
+                </a:r>
+                <a:endParaRPr lang="nl-NL" sz="1300" dirty="0"/>
+              </a:p>
+              <a:p>
+                <a:pPr marL="171450" indent="-171450">
+                  <a:buFontTx/>
+                  <a:buChar char="-"/>
+                </a:pPr>
+                <a:endParaRPr lang="nl-NL" sz="1300" dirty="0"/>
+              </a:p>
+              <a:p>
+                <a:pPr lvl="0"/>
+                <a:r>
+                  <a:rPr lang="en-NL" sz="1300" kern="1200" dirty="0">
+                    <a:solidFill>
+                      <a:schemeClr val="tx1"/>
+                    </a:solidFill>
+                    <a:effectLst/>
+                    <a:ea typeface="+mn-ea"/>
+                    <a:cs typeface="+mn-cs"/>
+                  </a:rPr>
+                  <a:t>The LPM-FE is attractive because</a:t>
+                </a:r>
+                <a:r>
+                  <a:rPr lang="en-US" sz="1300" kern="1200" dirty="0">
+                    <a:solidFill>
+                      <a:schemeClr val="tx1"/>
+                    </a:solidFill>
+                    <a:effectLst/>
+                    <a:ea typeface="+mn-ea"/>
+                    <a:cs typeface="+mn-cs"/>
+                  </a:rPr>
+                  <a:t> c</a:t>
+                </a:r>
+                <a:r>
+                  <a:rPr lang="en-NL" sz="1300" kern="1200" dirty="0" err="1">
+                    <a:solidFill>
+                      <a:schemeClr val="tx1"/>
+                    </a:solidFill>
+                    <a:effectLst/>
+                    <a:ea typeface="+mn-ea"/>
+                    <a:cs typeface="+mn-cs"/>
+                  </a:rPr>
+                  <a:t>ountry</a:t>
+                </a:r>
+                <a:r>
+                  <a:rPr lang="en-NL" sz="1300" kern="1200" dirty="0">
+                    <a:solidFill>
+                      <a:schemeClr val="tx1"/>
+                    </a:solidFill>
+                    <a:effectLst/>
+                    <a:ea typeface="+mn-ea"/>
+                    <a:cs typeface="+mn-cs"/>
+                  </a:rPr>
+                  <a:t> fixed effects can be included without the nonlinear incidental-parameters problem.</a:t>
+                </a:r>
+                <a:r>
+                  <a:rPr lang="en-US" sz="1300" kern="1200" dirty="0">
+                    <a:solidFill>
+                      <a:schemeClr val="tx1"/>
+                    </a:solidFill>
+                    <a:effectLst/>
+                    <a:ea typeface="+mn-ea"/>
+                    <a:cs typeface="+mn-cs"/>
+                  </a:rPr>
+                  <a:t>/ </a:t>
+                </a:r>
+                <a:r>
+                  <a:rPr lang="en-NL" sz="1300" kern="1200" dirty="0">
+                    <a:solidFill>
+                      <a:schemeClr val="tx1"/>
+                    </a:solidFill>
+                    <a:effectLst/>
+                    <a:ea typeface="+mn-ea"/>
+                    <a:cs typeface="+mn-cs"/>
+                  </a:rPr>
+                  <a:t>It allows the country effects to be arbitrarily correlated with ICT exposure</a:t>
+                </a:r>
+                <a:endParaRPr lang="en-US" sz="1300" kern="1200" dirty="0">
+                  <a:solidFill>
+                    <a:schemeClr val="tx1"/>
+                  </a:solidFill>
+                  <a:effectLst/>
+                  <a:ea typeface="+mn-ea"/>
+                  <a:cs typeface="+mn-cs"/>
+                </a:endParaRPr>
+              </a:p>
+              <a:p>
+                <a:pPr marL="0" marR="0" lvl="0" indent="0" algn="l" defTabSz="914400" rtl="0" eaLnBrk="1" fontAlgn="auto" latinLnBrk="0" hangingPunct="1">
+                  <a:lnSpc>
+                    <a:spcPct val="100000"/>
+                  </a:lnSpc>
+                  <a:spcBef>
+                    <a:spcPts val="0"/>
+                  </a:spcBef>
+                  <a:spcAft>
+                    <a:spcPts val="0"/>
+                  </a:spcAft>
+                  <a:buClrTx/>
+                  <a:buSzTx/>
+                  <a:buFontTx/>
+                  <a:buNone/>
+                  <a:tabLst/>
+                  <a:defRPr/>
+                </a:pPr>
+                <a:r>
+                  <a:rPr lang="en-US" sz="1300" b="0" i="0" kern="1200" dirty="0">
+                    <a:solidFill>
+                      <a:schemeClr val="tx1"/>
+                    </a:solidFill>
+                    <a:effectLst/>
+                    <a:ea typeface="+mn-ea"/>
+                    <a:cs typeface="+mn-cs"/>
+                  </a:rPr>
+                  <a:t>In LPM with FE </a:t>
+                </a:r>
+                <a:r>
+                  <a:rPr lang="en-NL" sz="1300" b="0" i="0" kern="1200" dirty="0">
+                    <a:solidFill>
+                      <a:schemeClr val="tx1"/>
+                    </a:solidFill>
+                    <a:effectLst/>
+                    <a:ea typeface="+mn-ea"/>
+                    <a:cs typeface="+mn-cs"/>
+                  </a:rPr>
+                  <a:t>the country-specific effect is treated as an unrestricted parameter that is eliminated through the </a:t>
+                </a:r>
+                <a:r>
+                  <a:rPr lang="en-NL" sz="1300" b="0" i="0" u="sng" kern="1200" dirty="0">
+                    <a:solidFill>
+                      <a:schemeClr val="tx1"/>
+                    </a:solidFill>
+                    <a:effectLst/>
+                    <a:ea typeface="+mn-ea"/>
+                    <a:cs typeface="+mn-cs"/>
+                  </a:rPr>
+                  <a:t>within transformation.</a:t>
+                </a:r>
+                <a:r>
+                  <a:rPr lang="en-NL" sz="1300" b="0" i="0" kern="1200" dirty="0">
+                    <a:solidFill>
+                      <a:schemeClr val="tx1"/>
+                    </a:solidFill>
+                    <a:effectLst/>
+                    <a:ea typeface="+mn-ea"/>
+                    <a:cs typeface="+mn-cs"/>
+                  </a:rPr>
+                  <a:t> As a result, you do </a:t>
+                </a:r>
+                <a:r>
+                  <a:rPr lang="en-NL" sz="1300" b="1" i="0" kern="1200" dirty="0">
+                    <a:solidFill>
+                      <a:schemeClr val="tx1"/>
+                    </a:solidFill>
+                    <a:effectLst/>
+                    <a:ea typeface="+mn-ea"/>
+                    <a:cs typeface="+mn-cs"/>
+                  </a:rPr>
+                  <a:t>not</a:t>
+                </a:r>
+                <a:r>
+                  <a:rPr lang="en-NL" sz="1300" b="0" i="0" kern="1200" dirty="0">
+                    <a:solidFill>
+                      <a:schemeClr val="tx1"/>
+                    </a:solidFill>
+                    <a:effectLst/>
+                    <a:ea typeface="+mn-ea"/>
+                    <a:cs typeface="+mn-cs"/>
+                  </a:rPr>
+                  <a:t> need the assumption that the country effect is uncorrelated with ICT exposure</a:t>
+                </a:r>
+                <a:r>
+                  <a:rPr lang="en-US" sz="1300" b="0" i="0" kern="1200" dirty="0">
+                    <a:solidFill>
+                      <a:schemeClr val="tx1"/>
+                    </a:solidFill>
+                    <a:effectLst/>
+                    <a:ea typeface="+mn-ea"/>
+                    <a:cs typeface="+mn-cs"/>
+                  </a:rPr>
+                  <a:t> (</a:t>
+                </a:r>
+                <a:r>
+                  <a:rPr lang="en-NL" sz="1300" b="0" i="0" kern="1200" dirty="0">
+                    <a:solidFill>
+                      <a:schemeClr val="tx1"/>
+                    </a:solidFill>
+                    <a:effectLst/>
+                    <a:ea typeface="+mn-ea"/>
+                    <a:cs typeface="+mn-cs"/>
+                  </a:rPr>
+                  <a:t>In a </a:t>
+                </a:r>
+                <a:r>
+                  <a:rPr lang="en-US" sz="1300" b="0" i="0" kern="1200" dirty="0">
+                    <a:solidFill>
+                      <a:schemeClr val="tx1"/>
+                    </a:solidFill>
+                    <a:effectLst/>
+                    <a:ea typeface="+mn-ea"/>
+                    <a:cs typeface="+mn-cs"/>
+                  </a:rPr>
+                  <a:t>FE</a:t>
+                </a:r>
+                <a:r>
+                  <a:rPr lang="en-NL" sz="1300" b="0" i="0" kern="1200" dirty="0">
+                    <a:solidFill>
+                      <a:schemeClr val="tx1"/>
+                    </a:solidFill>
+                    <a:effectLst/>
+                    <a:ea typeface="+mn-ea"/>
+                    <a:cs typeface="+mn-cs"/>
+                  </a:rPr>
+                  <a:t> LPM, </a:t>
+                </a:r>
+                <a:r>
+                  <a:rPr lang="en-US" sz="1300" b="0" i="0" kern="1200" dirty="0">
+                    <a:solidFill>
+                      <a:schemeClr val="tx1"/>
+                    </a:solidFill>
+                    <a:effectLst/>
+                    <a:ea typeface="+mn-ea"/>
+                    <a:cs typeface="+mn-cs"/>
+                  </a:rPr>
+                  <a:t>you</a:t>
+                </a:r>
+                <a:r>
+                  <a:rPr lang="en-NL" sz="1300" b="0" i="0" kern="1200" dirty="0">
+                    <a:solidFill>
+                      <a:schemeClr val="tx1"/>
+                    </a:solidFill>
+                    <a:effectLst/>
+                    <a:ea typeface="+mn-ea"/>
+                    <a:cs typeface="+mn-cs"/>
+                  </a:rPr>
+                  <a:t> transform the data by subtracting country means:</a:t>
+                </a:r>
+                <a:r>
+                  <a:rPr lang="en-US" sz="1300" b="0" i="0" kern="1200" dirty="0">
+                    <a:solidFill>
+                      <a:schemeClr val="tx1"/>
+                    </a:solidFill>
+                    <a:effectLst/>
+                    <a:ea typeface="+mn-ea"/>
+                    <a:cs typeface="+mn-cs"/>
+                  </a:rPr>
+                  <a:t> // </a:t>
+                </a:r>
+                <a:r>
+                  <a:rPr lang="en-NL" sz="1300" b="0" i="0" kern="1200" dirty="0">
+                    <a:solidFill>
+                      <a:schemeClr val="tx1"/>
+                    </a:solidFill>
+                    <a:effectLst/>
+                    <a:ea typeface="+mn-ea"/>
+                    <a:cs typeface="+mn-cs"/>
+                  </a:rPr>
+                  <a:t>Therefore, estimation uses only </a:t>
+                </a:r>
+                <a:r>
+                  <a:rPr lang="en-NL" sz="1300" b="1" i="0" kern="1200" dirty="0">
+                    <a:solidFill>
+                      <a:schemeClr val="tx1"/>
+                    </a:solidFill>
+                    <a:effectLst/>
+                    <a:ea typeface="+mn-ea"/>
+                    <a:cs typeface="+mn-cs"/>
+                  </a:rPr>
+                  <a:t>within-country variation over time</a:t>
+                </a:r>
+                <a:r>
+                  <a:rPr lang="en-NL" sz="1300" b="0" i="0" kern="1200" dirty="0">
+                    <a:solidFill>
+                      <a:schemeClr val="tx1"/>
+                    </a:solidFill>
+                    <a:effectLst/>
+                    <a:ea typeface="+mn-ea"/>
+                    <a:cs typeface="+mn-cs"/>
+                  </a:rPr>
+                  <a:t>. Whether high-ICT countries have systematically larger or smaller </a:t>
+                </a:r>
+                <a14:m>
+                  <m:oMath xmlns:m="http://schemas.openxmlformats.org/officeDocument/2006/math">
+                    <m:sSub>
+                      <m:sSubPr>
+                        <m:ctrlPr>
+                          <a:rPr lang="en-NL" sz="1300" i="1" kern="1200">
+                            <a:solidFill>
+                              <a:schemeClr val="tx1"/>
+                            </a:solidFill>
+                            <a:ea typeface="+mn-ea"/>
+                            <a:cs typeface="+mn-cs"/>
+                          </a:rPr>
+                        </m:ctrlPr>
+                      </m:sSubPr>
+                      <m:e>
+                        <m:r>
+                          <a:rPr lang="en-NL" sz="1300" i="1" kern="1200">
+                            <a:solidFill>
+                              <a:schemeClr val="tx1"/>
+                            </a:solidFill>
+                            <a:ea typeface="+mn-ea"/>
+                            <a:cs typeface="+mn-cs"/>
+                          </a:rPr>
+                          <m:t>𝛼</m:t>
+                        </m:r>
+                      </m:e>
+                      <m:sub>
+                        <m:r>
+                          <a:rPr lang="en-NL" sz="1300" i="1" kern="1200">
+                            <a:solidFill>
+                              <a:schemeClr val="tx1"/>
+                            </a:solidFill>
+                            <a:ea typeface="+mn-ea"/>
+                            <a:cs typeface="+mn-cs"/>
+                          </a:rPr>
+                          <m:t>𝑖</m:t>
+                        </m:r>
+                      </m:sub>
+                    </m:sSub>
+                  </m:oMath>
+                </a14:m>
+                <a:r>
+                  <a:rPr lang="en-NL" sz="1300" b="0" i="0" kern="1200" dirty="0">
+                    <a:solidFill>
+                      <a:schemeClr val="tx1"/>
+                    </a:solidFill>
+                    <a:effectLst/>
+                    <a:ea typeface="+mn-ea"/>
+                    <a:cs typeface="+mn-cs"/>
+                  </a:rPr>
+                  <a:t>is irrelevant, because </a:t>
+                </a:r>
+                <a14:m>
+                  <m:oMath xmlns:m="http://schemas.openxmlformats.org/officeDocument/2006/math">
+                    <m:sSub>
+                      <m:sSubPr>
+                        <m:ctrlPr>
+                          <a:rPr lang="en-NL" sz="1300" i="1" kern="1200">
+                            <a:solidFill>
+                              <a:schemeClr val="tx1"/>
+                            </a:solidFill>
+                            <a:ea typeface="+mn-ea"/>
+                            <a:cs typeface="+mn-cs"/>
+                          </a:rPr>
+                        </m:ctrlPr>
+                      </m:sSubPr>
+                      <m:e>
+                        <m:r>
+                          <a:rPr lang="en-NL" sz="1300" i="1" kern="1200">
+                            <a:solidFill>
+                              <a:schemeClr val="tx1"/>
+                            </a:solidFill>
+                            <a:ea typeface="+mn-ea"/>
+                            <a:cs typeface="+mn-cs"/>
+                          </a:rPr>
+                          <m:t>𝛼</m:t>
+                        </m:r>
+                      </m:e>
+                      <m:sub>
+                        <m:r>
+                          <a:rPr lang="en-NL" sz="1300" i="1" kern="1200">
+                            <a:solidFill>
+                              <a:schemeClr val="tx1"/>
+                            </a:solidFill>
+                            <a:ea typeface="+mn-ea"/>
+                            <a:cs typeface="+mn-cs"/>
+                          </a:rPr>
+                          <m:t>𝑖</m:t>
+                        </m:r>
+                      </m:sub>
+                    </m:sSub>
+                  </m:oMath>
+                </a14:m>
+                <a:r>
+                  <a:rPr lang="en-NL" sz="1300" b="0" i="0" kern="1200" dirty="0">
+                    <a:solidFill>
+                      <a:schemeClr val="tx1"/>
+                    </a:solidFill>
+                    <a:effectLst/>
+                    <a:ea typeface="+mn-ea"/>
+                    <a:cs typeface="+mn-cs"/>
+                  </a:rPr>
+                  <a:t>has been removed</a:t>
+                </a:r>
+                <a:r>
+                  <a:rPr lang="en-US" sz="1300" b="0" i="0" kern="1200" dirty="0">
+                    <a:solidFill>
+                      <a:schemeClr val="tx1"/>
+                    </a:solidFill>
+                    <a:effectLst/>
+                    <a:ea typeface="+mn-ea"/>
+                    <a:cs typeface="+mn-cs"/>
+                  </a:rPr>
+                  <a:t>)</a:t>
+                </a:r>
+              </a:p>
+              <a:p>
+                <a:pPr marL="0" marR="0" lvl="0" indent="0" algn="l" defTabSz="914400" rtl="0" eaLnBrk="1" fontAlgn="auto" latinLnBrk="0" hangingPunct="1">
+                  <a:lnSpc>
+                    <a:spcPct val="100000"/>
+                  </a:lnSpc>
+                  <a:spcBef>
+                    <a:spcPts val="0"/>
+                  </a:spcBef>
+                  <a:spcAft>
+                    <a:spcPts val="0"/>
+                  </a:spcAft>
+                  <a:buClrTx/>
+                  <a:buSzTx/>
+                  <a:buFontTx/>
+                  <a:buNone/>
+                  <a:tabLst/>
+                  <a:defRPr/>
+                </a:pPr>
+                <a:r>
+                  <a:rPr lang="en-NL" sz="1300" b="0" i="0" kern="1200" dirty="0" err="1">
+                    <a:solidFill>
+                      <a:schemeClr val="tx1"/>
+                    </a:solidFill>
+                    <a:effectLst/>
+                    <a:ea typeface="+mn-ea"/>
+                    <a:cs typeface="+mn-cs"/>
+                  </a:rPr>
+                  <a:t>bij</a:t>
+                </a:r>
+                <a:r>
+                  <a:rPr lang="en-NL" sz="1300" b="0" i="0" kern="1200" dirty="0">
+                    <a:solidFill>
+                      <a:schemeClr val="tx1"/>
+                    </a:solidFill>
+                    <a:effectLst/>
+                    <a:ea typeface="+mn-ea"/>
+                    <a:cs typeface="+mn-cs"/>
+                  </a:rPr>
+                  <a:t> </a:t>
+                </a:r>
+                <a:r>
+                  <a:rPr lang="en-NL" sz="1300" b="0" i="0" kern="1200" dirty="0" err="1">
+                    <a:solidFill>
+                      <a:schemeClr val="tx1"/>
+                    </a:solidFill>
+                    <a:effectLst/>
+                    <a:ea typeface="+mn-ea"/>
+                    <a:cs typeface="+mn-cs"/>
+                  </a:rPr>
+                  <a:t>een</a:t>
+                </a:r>
+                <a:r>
+                  <a:rPr lang="en-NL" sz="1300" b="0" i="0" kern="1200" dirty="0">
+                    <a:solidFill>
+                      <a:schemeClr val="tx1"/>
+                    </a:solidFill>
+                    <a:effectLst/>
+                    <a:ea typeface="+mn-ea"/>
+                    <a:cs typeface="+mn-cs"/>
+                  </a:rPr>
+                  <a:t> </a:t>
+                </a:r>
+                <a:r>
+                  <a:rPr lang="en-NL" sz="1300" b="1" i="0" kern="1200" dirty="0" err="1">
+                    <a:solidFill>
+                      <a:schemeClr val="tx1"/>
+                    </a:solidFill>
+                    <a:effectLst/>
+                    <a:ea typeface="+mn-ea"/>
+                    <a:cs typeface="+mn-cs"/>
+                  </a:rPr>
+                  <a:t>lineair</a:t>
+                </a:r>
+                <a:r>
+                  <a:rPr lang="en-NL" sz="1300" b="1" i="0" kern="1200" dirty="0">
+                    <a:solidFill>
+                      <a:schemeClr val="tx1"/>
+                    </a:solidFill>
+                    <a:effectLst/>
+                    <a:ea typeface="+mn-ea"/>
+                    <a:cs typeface="+mn-cs"/>
+                  </a:rPr>
+                  <a:t> model</a:t>
+                </a:r>
+                <a:r>
+                  <a:rPr lang="en-NL" sz="1300" b="0" i="0" kern="1200" dirty="0">
+                    <a:solidFill>
+                      <a:schemeClr val="tx1"/>
+                    </a:solidFill>
+                    <a:effectLst/>
+                    <a:ea typeface="+mn-ea"/>
+                    <a:cs typeface="+mn-cs"/>
+                  </a:rPr>
+                  <a:t> </a:t>
+                </a:r>
+                <a:r>
+                  <a:rPr lang="en-US" sz="1300" b="0" i="0" kern="1200" dirty="0">
+                    <a:solidFill>
+                      <a:schemeClr val="tx1"/>
+                    </a:solidFill>
+                    <a:effectLst/>
+                    <a:ea typeface="+mn-ea"/>
+                    <a:cs typeface="+mn-cs"/>
+                  </a:rPr>
+                  <a:t>(LPM) </a:t>
+                </a:r>
+                <a:r>
+                  <a:rPr lang="en-NL" sz="1300" b="0" i="0" kern="1200" dirty="0" err="1">
+                    <a:solidFill>
+                      <a:schemeClr val="tx1"/>
+                    </a:solidFill>
+                    <a:effectLst/>
+                    <a:ea typeface="+mn-ea"/>
+                    <a:cs typeface="+mn-cs"/>
+                  </a:rPr>
+                  <a:t>werkt</a:t>
+                </a:r>
+                <a:r>
+                  <a:rPr lang="en-NL" sz="1300" b="0" i="0" kern="1200" dirty="0">
+                    <a:solidFill>
+                      <a:schemeClr val="tx1"/>
+                    </a:solidFill>
+                    <a:effectLst/>
+                    <a:ea typeface="+mn-ea"/>
+                    <a:cs typeface="+mn-cs"/>
+                  </a:rPr>
+                  <a:t> de within-</a:t>
+                </a:r>
+                <a:r>
+                  <a:rPr lang="en-NL" sz="1300" b="0" i="0" kern="1200" dirty="0" err="1">
+                    <a:solidFill>
+                      <a:schemeClr val="tx1"/>
+                    </a:solidFill>
+                    <a:effectLst/>
+                    <a:ea typeface="+mn-ea"/>
+                    <a:cs typeface="+mn-cs"/>
+                  </a:rPr>
+                  <a:t>transformatie</a:t>
+                </a:r>
+                <a:r>
+                  <a:rPr lang="en-NL" sz="1300" b="0" i="0" kern="1200" dirty="0">
+                    <a:solidFill>
+                      <a:schemeClr val="tx1"/>
+                    </a:solidFill>
+                    <a:effectLst/>
+                    <a:ea typeface="+mn-ea"/>
+                    <a:cs typeface="+mn-cs"/>
+                  </a:rPr>
+                  <a:t>, maar </a:t>
+                </a:r>
+                <a:r>
+                  <a:rPr lang="en-NL" sz="1300" b="0" i="0" kern="1200" dirty="0" err="1">
+                    <a:solidFill>
+                      <a:schemeClr val="tx1"/>
+                    </a:solidFill>
+                    <a:effectLst/>
+                    <a:ea typeface="+mn-ea"/>
+                    <a:cs typeface="+mn-cs"/>
+                  </a:rPr>
+                  <a:t>bij</a:t>
+                </a:r>
+                <a:r>
+                  <a:rPr lang="en-NL" sz="1300" b="0" i="0" kern="1200" dirty="0">
+                    <a:solidFill>
+                      <a:schemeClr val="tx1"/>
+                    </a:solidFill>
+                    <a:effectLst/>
+                    <a:ea typeface="+mn-ea"/>
+                    <a:cs typeface="+mn-cs"/>
+                  </a:rPr>
+                  <a:t> </a:t>
+                </a:r>
+                <a:r>
+                  <a:rPr lang="en-NL" sz="1300" b="0" i="0" kern="1200" dirty="0" err="1">
+                    <a:solidFill>
+                      <a:schemeClr val="tx1"/>
+                    </a:solidFill>
+                    <a:effectLst/>
+                    <a:ea typeface="+mn-ea"/>
+                    <a:cs typeface="+mn-cs"/>
+                  </a:rPr>
+                  <a:t>een</a:t>
+                </a:r>
+                <a:r>
+                  <a:rPr lang="en-NL" sz="1300" b="0" i="0" kern="1200" dirty="0">
+                    <a:solidFill>
+                      <a:schemeClr val="tx1"/>
+                    </a:solidFill>
+                    <a:effectLst/>
+                    <a:ea typeface="+mn-ea"/>
+                    <a:cs typeface="+mn-cs"/>
+                  </a:rPr>
+                  <a:t> </a:t>
+                </a:r>
+                <a:r>
+                  <a:rPr lang="en-NL" sz="1300" b="1" i="0" kern="1200" dirty="0">
+                    <a:solidFill>
+                      <a:schemeClr val="tx1"/>
+                    </a:solidFill>
+                    <a:effectLst/>
+                    <a:ea typeface="+mn-ea"/>
+                    <a:cs typeface="+mn-cs"/>
+                  </a:rPr>
+                  <a:t>probit-model</a:t>
+                </a:r>
+                <a:r>
+                  <a:rPr lang="en-NL" sz="1300" b="0" i="0" kern="1200" dirty="0">
+                    <a:solidFill>
+                      <a:schemeClr val="tx1"/>
+                    </a:solidFill>
+                    <a:effectLst/>
+                    <a:ea typeface="+mn-ea"/>
+                    <a:cs typeface="+mn-cs"/>
+                  </a:rPr>
+                  <a:t> </a:t>
+                </a:r>
+                <a:r>
+                  <a:rPr lang="en-NL" sz="1300" b="0" i="0" kern="1200" dirty="0" err="1">
+                    <a:solidFill>
+                      <a:schemeClr val="tx1"/>
+                    </a:solidFill>
+                    <a:effectLst/>
+                    <a:ea typeface="+mn-ea"/>
+                    <a:cs typeface="+mn-cs"/>
+                  </a:rPr>
+                  <a:t>niet</a:t>
+                </a:r>
+                <a:r>
+                  <a:rPr lang="en-US" sz="1300" b="0" i="0" kern="1200" dirty="0">
+                    <a:solidFill>
+                      <a:schemeClr val="tx1"/>
+                    </a:solidFill>
+                    <a:effectLst/>
+                    <a:ea typeface="+mn-ea"/>
+                    <a:cs typeface="+mn-cs"/>
+                  </a:rPr>
+                  <a:t> (</a:t>
+                </a:r>
+                <a:r>
+                  <a:rPr lang="en-NL" sz="1300" b="0" i="0" kern="1200" dirty="0">
+                    <a:solidFill>
+                      <a:schemeClr val="tx1"/>
+                    </a:solidFill>
+                    <a:effectLst/>
+                    <a:ea typeface="+mn-ea"/>
+                    <a:cs typeface="+mn-cs"/>
+                  </a:rPr>
+                  <a:t>Door de </a:t>
+                </a:r>
+                <a:r>
+                  <a:rPr lang="en-NL" sz="1300" b="0" i="0" kern="1200" dirty="0" err="1">
+                    <a:solidFill>
+                      <a:schemeClr val="tx1"/>
+                    </a:solidFill>
+                    <a:effectLst/>
+                    <a:ea typeface="+mn-ea"/>
+                    <a:cs typeface="+mn-cs"/>
+                  </a:rPr>
+                  <a:t>niet-lineariteit</a:t>
+                </a:r>
+                <a:r>
+                  <a:rPr lang="en-NL" sz="1300" b="0" i="0" kern="1200" dirty="0">
+                    <a:solidFill>
+                      <a:schemeClr val="tx1"/>
+                    </a:solidFill>
+                    <a:effectLst/>
+                    <a:ea typeface="+mn-ea"/>
+                    <a:cs typeface="+mn-cs"/>
+                  </a:rPr>
+                  <a:t> </a:t>
+                </a:r>
+                <a:r>
+                  <a:rPr lang="en-NL" sz="1300" b="0" i="0" kern="1200" dirty="0" err="1">
+                    <a:solidFill>
+                      <a:schemeClr val="tx1"/>
+                    </a:solidFill>
+                    <a:effectLst/>
+                    <a:ea typeface="+mn-ea"/>
+                    <a:cs typeface="+mn-cs"/>
+                  </a:rPr>
+                  <a:t>blijft</a:t>
+                </a:r>
+                <a:r>
+                  <a:rPr lang="en-NL" sz="1300" b="0" i="0" kern="1200" dirty="0">
+                    <a:solidFill>
+                      <a:schemeClr val="tx1"/>
+                    </a:solidFill>
+                    <a:effectLst/>
+                    <a:ea typeface="+mn-ea"/>
+                    <a:cs typeface="+mn-cs"/>
+                  </a:rPr>
+                  <a:t> </a:t>
+                </a:r>
+                <a14:m>
+                  <m:oMath xmlns:m="http://schemas.openxmlformats.org/officeDocument/2006/math">
+                    <m:sSub>
+                      <m:sSubPr>
+                        <m:ctrlPr>
+                          <a:rPr lang="en-NL" sz="1300" i="1" kern="1200">
+                            <a:solidFill>
+                              <a:schemeClr val="tx1"/>
+                            </a:solidFill>
+                            <a:ea typeface="+mn-ea"/>
+                            <a:cs typeface="+mn-cs"/>
+                          </a:rPr>
+                        </m:ctrlPr>
+                      </m:sSubPr>
+                      <m:e>
+                        <m:r>
+                          <a:rPr lang="en-NL" sz="1300" i="1" kern="1200">
+                            <a:solidFill>
+                              <a:schemeClr val="tx1"/>
+                            </a:solidFill>
+                            <a:ea typeface="+mn-ea"/>
+                            <a:cs typeface="+mn-cs"/>
+                          </a:rPr>
+                          <m:t>𝛼</m:t>
+                        </m:r>
+                      </m:e>
+                      <m:sub>
+                        <m:r>
+                          <a:rPr lang="en-NL" sz="1300" i="1" kern="1200">
+                            <a:solidFill>
+                              <a:schemeClr val="tx1"/>
+                            </a:solidFill>
+                            <a:ea typeface="+mn-ea"/>
+                            <a:cs typeface="+mn-cs"/>
+                          </a:rPr>
+                          <m:t>𝑖</m:t>
+                        </m:r>
+                      </m:sub>
+                    </m:sSub>
+                  </m:oMath>
+                </a14:m>
+                <a:r>
+                  <a:rPr lang="en-NL" sz="1300" b="0" i="0" kern="1200" dirty="0" err="1">
+                    <a:solidFill>
+                      <a:schemeClr val="tx1"/>
+                    </a:solidFill>
+                    <a:effectLst/>
+                    <a:ea typeface="+mn-ea"/>
+                    <a:cs typeface="+mn-cs"/>
+                  </a:rPr>
+                  <a:t>verweven</a:t>
+                </a:r>
+                <a:r>
+                  <a:rPr lang="en-NL" sz="1300" b="0" i="0" kern="1200" dirty="0">
+                    <a:solidFill>
+                      <a:schemeClr val="tx1"/>
+                    </a:solidFill>
+                    <a:effectLst/>
+                    <a:ea typeface="+mn-ea"/>
+                    <a:cs typeface="+mn-cs"/>
+                  </a:rPr>
+                  <a:t> </a:t>
+                </a:r>
+                <a:r>
+                  <a:rPr lang="en-NL" sz="1300" b="0" i="0" kern="1200" dirty="0" err="1">
+                    <a:solidFill>
+                      <a:schemeClr val="tx1"/>
+                    </a:solidFill>
+                    <a:effectLst/>
+                    <a:ea typeface="+mn-ea"/>
+                    <a:cs typeface="+mn-cs"/>
+                  </a:rPr>
+                  <a:t>zitten</a:t>
+                </a:r>
+                <a:r>
+                  <a:rPr lang="en-NL" sz="1300" b="0" i="0" kern="1200" dirty="0">
+                    <a:solidFill>
+                      <a:schemeClr val="tx1"/>
+                    </a:solidFill>
+                    <a:effectLst/>
+                    <a:ea typeface="+mn-ea"/>
+                    <a:cs typeface="+mn-cs"/>
+                  </a:rPr>
+                  <a:t> in de </a:t>
+                </a:r>
+                <a:r>
+                  <a:rPr lang="en-NL" sz="1300" b="0" i="0" kern="1200" dirty="0" err="1">
+                    <a:solidFill>
+                      <a:schemeClr val="tx1"/>
+                    </a:solidFill>
+                    <a:effectLst/>
+                    <a:ea typeface="+mn-ea"/>
+                    <a:cs typeface="+mn-cs"/>
+                  </a:rPr>
+                  <a:t>kansfunctie</a:t>
+                </a:r>
+                <a:r>
+                  <a:rPr lang="en-NL" sz="1300" b="0" i="0" kern="1200" dirty="0">
+                    <a:solidFill>
+                      <a:schemeClr val="tx1"/>
+                    </a:solidFill>
+                    <a:effectLst/>
+                    <a:ea typeface="+mn-ea"/>
+                    <a:cs typeface="+mn-cs"/>
+                  </a:rPr>
+                  <a:t> en </a:t>
+                </a:r>
+                <a:r>
+                  <a:rPr lang="en-NL" sz="1300" b="0" i="0" kern="1200" dirty="0" err="1">
+                    <a:solidFill>
+                      <a:schemeClr val="tx1"/>
+                    </a:solidFill>
+                    <a:effectLst/>
+                    <a:ea typeface="+mn-ea"/>
+                    <a:cs typeface="+mn-cs"/>
+                  </a:rPr>
+                  <a:t>kun</a:t>
+                </a:r>
+                <a:r>
+                  <a:rPr lang="en-NL" sz="1300" b="0" i="0" kern="1200" dirty="0">
+                    <a:solidFill>
+                      <a:schemeClr val="tx1"/>
+                    </a:solidFill>
+                    <a:effectLst/>
+                    <a:ea typeface="+mn-ea"/>
+                    <a:cs typeface="+mn-cs"/>
+                  </a:rPr>
+                  <a:t> je hem </a:t>
+                </a:r>
+                <a:r>
+                  <a:rPr lang="en-NL" sz="1300" b="0" i="0" kern="1200" dirty="0" err="1">
+                    <a:solidFill>
+                      <a:schemeClr val="tx1"/>
+                    </a:solidFill>
+                    <a:effectLst/>
+                    <a:ea typeface="+mn-ea"/>
+                    <a:cs typeface="+mn-cs"/>
+                  </a:rPr>
+                  <a:t>niet</a:t>
+                </a:r>
+                <a:r>
+                  <a:rPr lang="en-NL" sz="1300" b="0" i="0" kern="1200" dirty="0">
+                    <a:solidFill>
+                      <a:schemeClr val="tx1"/>
+                    </a:solidFill>
+                    <a:effectLst/>
+                    <a:ea typeface="+mn-ea"/>
+                    <a:cs typeface="+mn-cs"/>
+                  </a:rPr>
+                  <a:t> </a:t>
+                </a:r>
+                <a:r>
+                  <a:rPr lang="en-NL" sz="1300" b="0" i="0" kern="1200" dirty="0" err="1">
+                    <a:solidFill>
+                      <a:schemeClr val="tx1"/>
+                    </a:solidFill>
+                    <a:effectLst/>
+                    <a:ea typeface="+mn-ea"/>
+                    <a:cs typeface="+mn-cs"/>
+                  </a:rPr>
+                  <a:t>wegtransformeren</a:t>
+                </a:r>
+                <a:r>
+                  <a:rPr lang="en-NL" sz="1300" b="0" i="0" kern="1200" dirty="0">
+                    <a:solidFill>
+                      <a:schemeClr val="tx1"/>
+                    </a:solidFill>
+                    <a:effectLst/>
+                    <a:ea typeface="+mn-ea"/>
+                    <a:cs typeface="+mn-cs"/>
+                  </a:rPr>
+                  <a:t> door </a:t>
+                </a:r>
+                <a:r>
+                  <a:rPr lang="en-NL" sz="1300" b="0" i="0" kern="1200" dirty="0" err="1">
+                    <a:solidFill>
+                      <a:schemeClr val="tx1"/>
+                    </a:solidFill>
+                    <a:effectLst/>
+                    <a:ea typeface="+mn-ea"/>
+                    <a:cs typeface="+mn-cs"/>
+                  </a:rPr>
+                  <a:t>te</a:t>
+                </a:r>
+                <a:r>
+                  <a:rPr lang="en-NL" sz="1300" b="0" i="0" kern="1200" dirty="0">
+                    <a:solidFill>
+                      <a:schemeClr val="tx1"/>
+                    </a:solidFill>
+                    <a:effectLst/>
+                    <a:ea typeface="+mn-ea"/>
+                    <a:cs typeface="+mn-cs"/>
+                  </a:rPr>
+                  <a:t> de-</a:t>
+                </a:r>
+                <a:r>
+                  <a:rPr lang="en-NL" sz="1300" b="0" i="0" kern="1200" dirty="0" err="1">
+                    <a:solidFill>
+                      <a:schemeClr val="tx1"/>
+                    </a:solidFill>
+                    <a:effectLst/>
+                    <a:ea typeface="+mn-ea"/>
+                    <a:cs typeface="+mn-cs"/>
+                  </a:rPr>
+                  <a:t>meanen</a:t>
+                </a:r>
+                <a:r>
+                  <a:rPr lang="en-US" sz="1300" b="0" i="0" kern="1200" dirty="0">
+                    <a:solidFill>
+                      <a:schemeClr val="tx1"/>
+                    </a:solidFill>
+                    <a:effectLst/>
+                    <a:ea typeface="+mn-ea"/>
+                    <a:cs typeface="+mn-cs"/>
+                  </a:rPr>
+                  <a:t>); probit is </a:t>
+                </a:r>
+                <a:r>
+                  <a:rPr lang="en-US" sz="1300" b="0" i="0" kern="1200" dirty="0" err="1">
+                    <a:solidFill>
+                      <a:schemeClr val="tx1"/>
+                    </a:solidFill>
+                    <a:effectLst/>
+                    <a:ea typeface="+mn-ea"/>
+                    <a:cs typeface="+mn-cs"/>
+                  </a:rPr>
+                  <a:t>daarom</a:t>
+                </a:r>
+                <a:r>
+                  <a:rPr lang="en-US" sz="1300" b="0" i="0" kern="1200" dirty="0">
+                    <a:solidFill>
+                      <a:schemeClr val="tx1"/>
+                    </a:solidFill>
+                    <a:effectLst/>
+                    <a:ea typeface="+mn-ea"/>
+                    <a:cs typeface="+mn-cs"/>
+                  </a:rPr>
+                  <a:t> </a:t>
+                </a:r>
+                <a:r>
+                  <a:rPr lang="en-US" sz="1300" b="0" i="0" kern="1200" dirty="0" err="1">
+                    <a:solidFill>
+                      <a:schemeClr val="tx1"/>
+                    </a:solidFill>
+                    <a:effectLst/>
+                    <a:ea typeface="+mn-ea"/>
+                    <a:cs typeface="+mn-cs"/>
+                  </a:rPr>
+                  <a:t>niet</a:t>
+                </a:r>
+                <a:r>
+                  <a:rPr lang="en-US" sz="1300" b="0" i="0" kern="1200" dirty="0">
+                    <a:solidFill>
+                      <a:schemeClr val="tx1"/>
+                    </a:solidFill>
+                    <a:effectLst/>
+                    <a:ea typeface="+mn-ea"/>
+                    <a:cs typeface="+mn-cs"/>
+                  </a:rPr>
+                  <a:t> met FE </a:t>
+                </a:r>
+                <a:r>
+                  <a:rPr lang="en-US" sz="1300" b="0" i="0" kern="1200" dirty="0" err="1">
+                    <a:solidFill>
+                      <a:schemeClr val="tx1"/>
+                    </a:solidFill>
+                    <a:effectLst/>
+                    <a:ea typeface="+mn-ea"/>
+                    <a:cs typeface="+mn-cs"/>
+                  </a:rPr>
+                  <a:t>te</a:t>
+                </a:r>
+                <a:r>
+                  <a:rPr lang="en-US" sz="1300" b="0" i="0" kern="1200" dirty="0">
+                    <a:solidFill>
+                      <a:schemeClr val="tx1"/>
+                    </a:solidFill>
+                    <a:effectLst/>
+                    <a:ea typeface="+mn-ea"/>
+                    <a:cs typeface="+mn-cs"/>
+                  </a:rPr>
+                  <a:t> Schatten </a:t>
+                </a:r>
+                <a:r>
+                  <a:rPr lang="en-US" sz="1300" b="0" i="0" kern="1200" dirty="0" err="1">
+                    <a:solidFill>
+                      <a:schemeClr val="tx1"/>
+                    </a:solidFill>
+                    <a:effectLst/>
+                    <a:ea typeface="+mn-ea"/>
+                    <a:cs typeface="+mn-cs"/>
+                  </a:rPr>
+                  <a:t>behalve</a:t>
+                </a:r>
+                <a:r>
+                  <a:rPr lang="en-US" sz="1300" b="0" i="0" kern="1200" dirty="0">
+                    <a:solidFill>
+                      <a:schemeClr val="tx1"/>
+                    </a:solidFill>
+                    <a:effectLst/>
+                    <a:ea typeface="+mn-ea"/>
+                    <a:cs typeface="+mn-cs"/>
+                  </a:rPr>
+                  <a:t> CRE probit</a:t>
+                </a:r>
+                <a:r>
+                  <a:rPr lang="en-NL" sz="1300" b="0" i="0" kern="1200" dirty="0">
+                    <a:solidFill>
+                      <a:schemeClr val="tx1"/>
+                    </a:solidFill>
+                    <a:effectLst/>
+                    <a:ea typeface="+mn-ea"/>
+                    <a:cs typeface="+mn-cs"/>
+                  </a:rPr>
+                  <a:t>.</a:t>
+                </a:r>
+              </a:p>
+              <a:p>
+                <a:pPr marL="0" marR="0" lvl="0" indent="0" algn="l" defTabSz="914400" rtl="0" eaLnBrk="1" fontAlgn="auto" latinLnBrk="0" hangingPunct="1">
+                  <a:lnSpc>
+                    <a:spcPct val="100000"/>
+                  </a:lnSpc>
+                  <a:spcBef>
+                    <a:spcPts val="0"/>
+                  </a:spcBef>
+                  <a:spcAft>
+                    <a:spcPts val="0"/>
+                  </a:spcAft>
+                  <a:buClrTx/>
+                  <a:buSzTx/>
+                  <a:buFontTx/>
+                  <a:buNone/>
+                  <a:tabLst/>
+                  <a:defRPr/>
+                </a:pPr>
+                <a:endParaRPr lang="en-NL" sz="1300" b="0" i="0" kern="1200" dirty="0">
+                  <a:solidFill>
+                    <a:schemeClr val="tx1"/>
+                  </a:solidFill>
+                  <a:effectLst/>
+                  <a:ea typeface="+mn-ea"/>
+                  <a:cs typeface="+mn-cs"/>
+                </a:endParaRPr>
+              </a:p>
+            </p:txBody>
+          </p:sp>
+        </mc:Choice>
+        <mc:Fallback>
+          <p:sp>
+            <p:nvSpPr>
+              <p:cNvPr id="3" name="Tijdelijke aanduiding voor notities 2">
+                <a:extLst>
+                  <a:ext uri="{FF2B5EF4-FFF2-40B4-BE49-F238E27FC236}">
+                    <a16:creationId xmlns:a16="http://schemas.microsoft.com/office/drawing/2014/main" id="{8F9248E1-2394-BB6E-ACF7-C8BB520C4467}"/>
+                  </a:ext>
+                </a:extLst>
+              </p:cNvPr>
+              <p:cNvSpPr>
+                <a:spLocks noGrp="1"/>
+              </p:cNvSpPr>
+              <p:nvPr>
+                <p:ph type="body" idx="1"/>
+              </p:nvPr>
+            </p:nvSpPr>
+            <p:spPr>
+              <a:xfrm>
+                <a:off x="233917" y="4785598"/>
+                <a:ext cx="6223590" cy="3915489"/>
+              </a:xfrm>
+            </p:spPr>
+            <p:txBody>
+              <a:bodyPr/>
+              <a:lstStyle/>
+              <a:p>
+                <a:r>
+                  <a:rPr lang="en-US" sz="1300" dirty="0"/>
+                  <a:t>Dependent variable is the unexpected component of GDP growth, while the explanatory variables describe the composition of GDP (investment or exports as a share of GDP). In doing so, the relationship does not describe an accounting identity. In addition, the ICT variables are recorded with a delay (previous ICT exposures explain later growth surprises).</a:t>
+                </a:r>
+              </a:p>
+              <a:p>
+                <a:pPr marL="171450" indent="-171450">
+                  <a:buFontTx/>
+                  <a:buChar char="-"/>
+                </a:pPr>
+                <a:endParaRPr lang="en-US" sz="1300" dirty="0"/>
+              </a:p>
+              <a:p>
+                <a:pPr marL="171450" indent="-171450">
+                  <a:buFontTx/>
+                  <a:buChar char="-"/>
+                </a:pPr>
+                <a:r>
+                  <a:rPr lang="en-US" sz="1300" dirty="0"/>
+                  <a:t>Investing in ICT does not yet equal its effective application. It is a proxy, also for a country's exposure to the ICT factor without having to change economic processes.</a:t>
+                </a:r>
+              </a:p>
+              <a:p>
+                <a:pPr marL="171450" indent="-171450">
+                  <a:buFontTx/>
+                  <a:buChar char="-"/>
+                </a:pPr>
+                <a:r>
+                  <a:rPr lang="nl-NL" sz="1300" dirty="0" err="1"/>
+                  <a:t>Each</a:t>
+                </a:r>
+                <a:r>
+                  <a:rPr lang="nl-NL" sz="1300" dirty="0"/>
+                  <a:t> </a:t>
+                </a:r>
+                <a:r>
+                  <a:rPr lang="nl-NL" sz="1300" dirty="0" err="1"/>
+                  <a:t>year</a:t>
+                </a:r>
+                <a:r>
+                  <a:rPr lang="nl-NL" sz="1300" dirty="0"/>
+                  <a:t> the </a:t>
+                </a:r>
+                <a:r>
+                  <a:rPr lang="nl-NL" sz="1300" dirty="0" err="1"/>
+                  <a:t>median</a:t>
+                </a:r>
+                <a:r>
+                  <a:rPr lang="nl-NL" sz="1300" dirty="0"/>
+                  <a:t> </a:t>
+                </a:r>
+                <a:r>
+                  <a:rPr lang="nl-NL" sz="1300" dirty="0" err="1"/>
+                  <a:t>threshold</a:t>
+                </a:r>
+                <a:r>
+                  <a:rPr lang="nl-NL" sz="1300" dirty="0"/>
+                  <a:t> </a:t>
+                </a:r>
+                <a:r>
+                  <a:rPr lang="nl-NL" sz="1300" dirty="0" err="1"/>
+                  <a:t>for</a:t>
+                </a:r>
+                <a:r>
+                  <a:rPr lang="nl-NL" sz="1300" dirty="0"/>
+                  <a:t> </a:t>
+                </a:r>
+                <a:r>
+                  <a:rPr lang="nl-NL" sz="1300" dirty="0" err="1"/>
+                  <a:t>Above</a:t>
+                </a:r>
+                <a:r>
+                  <a:rPr lang="nl-NL" sz="1300" dirty="0"/>
+                  <a:t> </a:t>
+                </a:r>
+                <a:r>
+                  <a:rPr lang="nl-NL" sz="1300" dirty="0" err="1"/>
+                  <a:t>vs</a:t>
+                </a:r>
+                <a:r>
+                  <a:rPr lang="nl-NL" sz="1300" dirty="0"/>
+                  <a:t> Below changes, </a:t>
+                </a:r>
+                <a:r>
+                  <a:rPr lang="nl-NL" sz="1300" dirty="0" err="1"/>
+                  <a:t>so</a:t>
+                </a:r>
+                <a:r>
+                  <a:rPr lang="nl-NL" sz="1300" dirty="0"/>
+                  <a:t>: </a:t>
+                </a:r>
+                <a:r>
+                  <a:rPr lang="nl-NL" sz="1300" dirty="0" err="1"/>
+                  <a:t>each</a:t>
+                </a:r>
+                <a:r>
+                  <a:rPr lang="nl-NL" sz="1300" dirty="0"/>
+                  <a:t> </a:t>
+                </a:r>
+                <a:r>
+                  <a:rPr lang="nl-NL" sz="1300" dirty="0" err="1"/>
+                  <a:t>year</a:t>
+                </a:r>
+                <a:r>
+                  <a:rPr lang="nl-NL" sz="1300" dirty="0"/>
+                  <a:t> the </a:t>
+                </a:r>
+                <a:r>
+                  <a:rPr lang="nl-NL" sz="1300" dirty="0" err="1"/>
+                  <a:t>Above</a:t>
+                </a:r>
+                <a:r>
+                  <a:rPr lang="nl-NL" sz="1300" dirty="0"/>
+                  <a:t> and Below </a:t>
+                </a:r>
+                <a:r>
+                  <a:rPr lang="nl-NL" sz="1300" dirty="0" err="1"/>
+                  <a:t>groups</a:t>
+                </a:r>
+                <a:r>
+                  <a:rPr lang="nl-NL" sz="1300" dirty="0"/>
+                  <a:t> of </a:t>
+                </a:r>
+                <a:r>
+                  <a:rPr lang="nl-NL" sz="1300" dirty="0" err="1"/>
+                  <a:t>countries</a:t>
+                </a:r>
+                <a:r>
+                  <a:rPr lang="nl-NL" sz="1300" dirty="0"/>
+                  <a:t> </a:t>
+                </a:r>
+                <a:r>
+                  <a:rPr lang="nl-NL" sz="1300" dirty="0" err="1"/>
+                  <a:t>differ</a:t>
+                </a:r>
+                <a:endParaRPr lang="nl-NL" sz="1300" dirty="0"/>
+              </a:p>
+              <a:p>
+                <a:pPr marL="171450" indent="-171450">
+                  <a:buFontTx/>
+                  <a:buChar char="-"/>
+                </a:pPr>
+                <a:endParaRPr lang="nl-NL" sz="1300" dirty="0"/>
+              </a:p>
+              <a:p>
+                <a:pPr lvl="0"/>
+                <a:r>
+                  <a:rPr lang="en-NL" sz="1300" kern="1200" dirty="0">
+                    <a:solidFill>
+                      <a:schemeClr val="tx1"/>
+                    </a:solidFill>
+                    <a:effectLst/>
+                    <a:ea typeface="+mn-ea"/>
+                    <a:cs typeface="+mn-cs"/>
+                  </a:rPr>
+                  <a:t>The LPM-FE is attractive because</a:t>
+                </a:r>
+                <a:r>
+                  <a:rPr lang="en-US" sz="1300" kern="1200" dirty="0">
+                    <a:solidFill>
+                      <a:schemeClr val="tx1"/>
+                    </a:solidFill>
+                    <a:effectLst/>
+                    <a:ea typeface="+mn-ea"/>
+                    <a:cs typeface="+mn-cs"/>
+                  </a:rPr>
+                  <a:t> c</a:t>
+                </a:r>
+                <a:r>
+                  <a:rPr lang="en-NL" sz="1300" kern="1200" dirty="0" err="1">
+                    <a:solidFill>
+                      <a:schemeClr val="tx1"/>
+                    </a:solidFill>
+                    <a:effectLst/>
+                    <a:ea typeface="+mn-ea"/>
+                    <a:cs typeface="+mn-cs"/>
+                  </a:rPr>
+                  <a:t>ountry</a:t>
+                </a:r>
+                <a:r>
+                  <a:rPr lang="en-NL" sz="1300" kern="1200" dirty="0">
+                    <a:solidFill>
+                      <a:schemeClr val="tx1"/>
+                    </a:solidFill>
+                    <a:effectLst/>
+                    <a:ea typeface="+mn-ea"/>
+                    <a:cs typeface="+mn-cs"/>
+                  </a:rPr>
+                  <a:t> fixed effects can be included without the nonlinear incidental-parameters problem.</a:t>
+                </a:r>
+                <a:r>
+                  <a:rPr lang="en-US" sz="1300" kern="1200" dirty="0">
+                    <a:solidFill>
+                      <a:schemeClr val="tx1"/>
+                    </a:solidFill>
+                    <a:effectLst/>
+                    <a:ea typeface="+mn-ea"/>
+                    <a:cs typeface="+mn-cs"/>
+                  </a:rPr>
+                  <a:t>/ </a:t>
+                </a:r>
+                <a:r>
+                  <a:rPr lang="en-NL" sz="1300" kern="1200" dirty="0">
+                    <a:solidFill>
+                      <a:schemeClr val="tx1"/>
+                    </a:solidFill>
+                    <a:effectLst/>
+                    <a:ea typeface="+mn-ea"/>
+                    <a:cs typeface="+mn-cs"/>
+                  </a:rPr>
+                  <a:t>It allows the country effects to be arbitrarily correlated with ICT exposure</a:t>
+                </a:r>
+                <a:endParaRPr lang="en-US" sz="1300" kern="1200" dirty="0">
+                  <a:solidFill>
+                    <a:schemeClr val="tx1"/>
+                  </a:solidFill>
+                  <a:effectLst/>
+                  <a:ea typeface="+mn-ea"/>
+                  <a:cs typeface="+mn-cs"/>
+                </a:endParaRPr>
+              </a:p>
+              <a:p>
+                <a:pPr marL="0" marR="0" lvl="0" indent="0" algn="l" defTabSz="914400" rtl="0" eaLnBrk="1" fontAlgn="auto" latinLnBrk="0" hangingPunct="1">
+                  <a:lnSpc>
+                    <a:spcPct val="100000"/>
+                  </a:lnSpc>
+                  <a:spcBef>
+                    <a:spcPts val="0"/>
+                  </a:spcBef>
+                  <a:spcAft>
+                    <a:spcPts val="0"/>
+                  </a:spcAft>
+                  <a:buClrTx/>
+                  <a:buSzTx/>
+                  <a:buFontTx/>
+                  <a:buNone/>
+                  <a:tabLst/>
+                  <a:defRPr/>
+                </a:pPr>
+                <a:r>
+                  <a:rPr lang="en-US" sz="1300" b="0" i="0" kern="1200" dirty="0">
+                    <a:solidFill>
+                      <a:schemeClr val="tx1"/>
+                    </a:solidFill>
+                    <a:effectLst/>
+                    <a:ea typeface="+mn-ea"/>
+                    <a:cs typeface="+mn-cs"/>
+                  </a:rPr>
+                  <a:t>In LPM with FE </a:t>
+                </a:r>
+                <a:r>
+                  <a:rPr lang="en-NL" sz="1300" b="0" i="0" kern="1200" dirty="0">
+                    <a:solidFill>
+                      <a:schemeClr val="tx1"/>
+                    </a:solidFill>
+                    <a:effectLst/>
+                    <a:ea typeface="+mn-ea"/>
+                    <a:cs typeface="+mn-cs"/>
+                  </a:rPr>
+                  <a:t>the country-specific effect is treated as an unrestricted parameter that is eliminated through the </a:t>
+                </a:r>
+                <a:r>
+                  <a:rPr lang="en-NL" sz="1300" b="0" i="0" u="sng" kern="1200" dirty="0">
+                    <a:solidFill>
+                      <a:schemeClr val="tx1"/>
+                    </a:solidFill>
+                    <a:effectLst/>
+                    <a:ea typeface="+mn-ea"/>
+                    <a:cs typeface="+mn-cs"/>
+                  </a:rPr>
+                  <a:t>within transformation.</a:t>
+                </a:r>
+                <a:r>
+                  <a:rPr lang="en-NL" sz="1300" b="0" i="0" kern="1200" dirty="0">
+                    <a:solidFill>
+                      <a:schemeClr val="tx1"/>
+                    </a:solidFill>
+                    <a:effectLst/>
+                    <a:ea typeface="+mn-ea"/>
+                    <a:cs typeface="+mn-cs"/>
+                  </a:rPr>
+                  <a:t> As a result, you do </a:t>
+                </a:r>
+                <a:r>
+                  <a:rPr lang="en-NL" sz="1300" b="1" i="0" kern="1200" dirty="0">
+                    <a:solidFill>
+                      <a:schemeClr val="tx1"/>
+                    </a:solidFill>
+                    <a:effectLst/>
+                    <a:ea typeface="+mn-ea"/>
+                    <a:cs typeface="+mn-cs"/>
+                  </a:rPr>
+                  <a:t>not</a:t>
+                </a:r>
+                <a:r>
+                  <a:rPr lang="en-NL" sz="1300" b="0" i="0" kern="1200" dirty="0">
+                    <a:solidFill>
+                      <a:schemeClr val="tx1"/>
+                    </a:solidFill>
+                    <a:effectLst/>
+                    <a:ea typeface="+mn-ea"/>
+                    <a:cs typeface="+mn-cs"/>
+                  </a:rPr>
+                  <a:t> need the assumption that the country effect is uncorrelated with ICT exposure</a:t>
+                </a:r>
+                <a:r>
+                  <a:rPr lang="en-US" sz="1300" b="0" i="0" kern="1200" dirty="0">
+                    <a:solidFill>
+                      <a:schemeClr val="tx1"/>
+                    </a:solidFill>
+                    <a:effectLst/>
+                    <a:ea typeface="+mn-ea"/>
+                    <a:cs typeface="+mn-cs"/>
+                  </a:rPr>
+                  <a:t> (</a:t>
+                </a:r>
+                <a:r>
+                  <a:rPr lang="en-NL" sz="1300" b="0" i="0" kern="1200" dirty="0">
+                    <a:solidFill>
+                      <a:schemeClr val="tx1"/>
+                    </a:solidFill>
+                    <a:effectLst/>
+                    <a:ea typeface="+mn-ea"/>
+                    <a:cs typeface="+mn-cs"/>
+                  </a:rPr>
+                  <a:t>In a </a:t>
+                </a:r>
+                <a:r>
+                  <a:rPr lang="en-US" sz="1300" b="0" i="0" kern="1200" dirty="0">
+                    <a:solidFill>
+                      <a:schemeClr val="tx1"/>
+                    </a:solidFill>
+                    <a:effectLst/>
+                    <a:ea typeface="+mn-ea"/>
+                    <a:cs typeface="+mn-cs"/>
+                  </a:rPr>
+                  <a:t>FE</a:t>
+                </a:r>
+                <a:r>
+                  <a:rPr lang="en-NL" sz="1300" b="0" i="0" kern="1200" dirty="0">
+                    <a:solidFill>
+                      <a:schemeClr val="tx1"/>
+                    </a:solidFill>
+                    <a:effectLst/>
+                    <a:ea typeface="+mn-ea"/>
+                    <a:cs typeface="+mn-cs"/>
+                  </a:rPr>
+                  <a:t> LPM, </a:t>
+                </a:r>
+                <a:r>
+                  <a:rPr lang="en-US" sz="1300" b="0" i="0" kern="1200" dirty="0">
+                    <a:solidFill>
+                      <a:schemeClr val="tx1"/>
+                    </a:solidFill>
+                    <a:effectLst/>
+                    <a:ea typeface="+mn-ea"/>
+                    <a:cs typeface="+mn-cs"/>
+                  </a:rPr>
+                  <a:t>you</a:t>
+                </a:r>
+                <a:r>
+                  <a:rPr lang="en-NL" sz="1300" b="0" i="0" kern="1200" dirty="0">
+                    <a:solidFill>
+                      <a:schemeClr val="tx1"/>
+                    </a:solidFill>
+                    <a:effectLst/>
+                    <a:ea typeface="+mn-ea"/>
+                    <a:cs typeface="+mn-cs"/>
+                  </a:rPr>
+                  <a:t> transform the data by subtracting country means:</a:t>
+                </a:r>
+                <a:r>
+                  <a:rPr lang="en-US" sz="1300" b="0" i="0" kern="1200" dirty="0">
+                    <a:solidFill>
+                      <a:schemeClr val="tx1"/>
+                    </a:solidFill>
+                    <a:effectLst/>
+                    <a:ea typeface="+mn-ea"/>
+                    <a:cs typeface="+mn-cs"/>
+                  </a:rPr>
+                  <a:t> // </a:t>
+                </a:r>
+                <a:r>
+                  <a:rPr lang="en-NL" sz="1300" b="0" i="0" kern="1200" dirty="0">
+                    <a:solidFill>
+                      <a:schemeClr val="tx1"/>
+                    </a:solidFill>
+                    <a:effectLst/>
+                    <a:ea typeface="+mn-ea"/>
+                    <a:cs typeface="+mn-cs"/>
+                  </a:rPr>
+                  <a:t>Therefore, estimation uses only </a:t>
+                </a:r>
+                <a:r>
+                  <a:rPr lang="en-NL" sz="1300" b="1" i="0" kern="1200" dirty="0">
+                    <a:solidFill>
+                      <a:schemeClr val="tx1"/>
+                    </a:solidFill>
+                    <a:effectLst/>
+                    <a:ea typeface="+mn-ea"/>
+                    <a:cs typeface="+mn-cs"/>
+                  </a:rPr>
+                  <a:t>within-country variation over time</a:t>
+                </a:r>
+                <a:r>
+                  <a:rPr lang="en-NL" sz="1300" b="0" i="0" kern="1200" dirty="0">
+                    <a:solidFill>
+                      <a:schemeClr val="tx1"/>
+                    </a:solidFill>
+                    <a:effectLst/>
+                    <a:ea typeface="+mn-ea"/>
+                    <a:cs typeface="+mn-cs"/>
+                  </a:rPr>
+                  <a:t>. Whether high-ICT countries have systematically larger or smaller </a:t>
+                </a:r>
+                <a:r>
+                  <a:rPr lang="en-NL" sz="1300" i="0" kern="1200">
+                    <a:solidFill>
+                      <a:schemeClr val="tx1"/>
+                    </a:solidFill>
+                    <a:ea typeface="+mn-ea"/>
+                    <a:cs typeface="+mn-cs"/>
+                  </a:rPr>
+                  <a:t>𝛼_𝑖</a:t>
+                </a:r>
+                <a:r>
+                  <a:rPr lang="en-NL" sz="1300" b="0" i="0" kern="1200" dirty="0">
+                    <a:solidFill>
+                      <a:schemeClr val="tx1"/>
+                    </a:solidFill>
+                    <a:effectLst/>
+                    <a:ea typeface="+mn-ea"/>
+                    <a:cs typeface="+mn-cs"/>
+                  </a:rPr>
+                  <a:t>is irrelevant, because </a:t>
+                </a:r>
+                <a:r>
+                  <a:rPr lang="en-NL" sz="1300" i="0" kern="1200">
+                    <a:solidFill>
+                      <a:schemeClr val="tx1"/>
+                    </a:solidFill>
+                    <a:ea typeface="+mn-ea"/>
+                    <a:cs typeface="+mn-cs"/>
+                  </a:rPr>
+                  <a:t>𝛼_𝑖</a:t>
+                </a:r>
+                <a:r>
+                  <a:rPr lang="en-NL" sz="1300" b="0" i="0" kern="1200" dirty="0">
+                    <a:solidFill>
+                      <a:schemeClr val="tx1"/>
+                    </a:solidFill>
+                    <a:effectLst/>
+                    <a:ea typeface="+mn-ea"/>
+                    <a:cs typeface="+mn-cs"/>
+                  </a:rPr>
+                  <a:t>has been removed</a:t>
+                </a:r>
+                <a:r>
+                  <a:rPr lang="en-US" sz="1300" b="0" i="0" kern="1200" dirty="0">
+                    <a:solidFill>
+                      <a:schemeClr val="tx1"/>
+                    </a:solidFill>
+                    <a:effectLst/>
+                    <a:ea typeface="+mn-ea"/>
+                    <a:cs typeface="+mn-cs"/>
+                  </a:rPr>
+                  <a:t>)</a:t>
+                </a:r>
+              </a:p>
+              <a:p>
+                <a:pPr marL="0" marR="0" lvl="0" indent="0" algn="l" defTabSz="914400" rtl="0" eaLnBrk="1" fontAlgn="auto" latinLnBrk="0" hangingPunct="1">
+                  <a:lnSpc>
+                    <a:spcPct val="100000"/>
+                  </a:lnSpc>
+                  <a:spcBef>
+                    <a:spcPts val="0"/>
+                  </a:spcBef>
+                  <a:spcAft>
+                    <a:spcPts val="0"/>
+                  </a:spcAft>
+                  <a:buClrTx/>
+                  <a:buSzTx/>
+                  <a:buFontTx/>
+                  <a:buNone/>
+                  <a:tabLst/>
+                  <a:defRPr/>
+                </a:pPr>
+                <a:r>
+                  <a:rPr lang="en-NL" sz="1300" b="0" i="0" kern="1200" dirty="0" err="1">
+                    <a:solidFill>
+                      <a:schemeClr val="tx1"/>
+                    </a:solidFill>
+                    <a:effectLst/>
+                    <a:ea typeface="+mn-ea"/>
+                    <a:cs typeface="+mn-cs"/>
+                  </a:rPr>
+                  <a:t>bij</a:t>
+                </a:r>
+                <a:r>
+                  <a:rPr lang="en-NL" sz="1300" b="0" i="0" kern="1200" dirty="0">
+                    <a:solidFill>
+                      <a:schemeClr val="tx1"/>
+                    </a:solidFill>
+                    <a:effectLst/>
+                    <a:ea typeface="+mn-ea"/>
+                    <a:cs typeface="+mn-cs"/>
+                  </a:rPr>
+                  <a:t> </a:t>
+                </a:r>
+                <a:r>
+                  <a:rPr lang="en-NL" sz="1300" b="0" i="0" kern="1200" dirty="0" err="1">
+                    <a:solidFill>
+                      <a:schemeClr val="tx1"/>
+                    </a:solidFill>
+                    <a:effectLst/>
+                    <a:ea typeface="+mn-ea"/>
+                    <a:cs typeface="+mn-cs"/>
+                  </a:rPr>
+                  <a:t>een</a:t>
+                </a:r>
+                <a:r>
+                  <a:rPr lang="en-NL" sz="1300" b="0" i="0" kern="1200" dirty="0">
+                    <a:solidFill>
+                      <a:schemeClr val="tx1"/>
+                    </a:solidFill>
+                    <a:effectLst/>
+                    <a:ea typeface="+mn-ea"/>
+                    <a:cs typeface="+mn-cs"/>
+                  </a:rPr>
+                  <a:t> </a:t>
+                </a:r>
+                <a:r>
+                  <a:rPr lang="en-NL" sz="1300" b="1" i="0" kern="1200" dirty="0" err="1">
+                    <a:solidFill>
+                      <a:schemeClr val="tx1"/>
+                    </a:solidFill>
+                    <a:effectLst/>
+                    <a:ea typeface="+mn-ea"/>
+                    <a:cs typeface="+mn-cs"/>
+                  </a:rPr>
+                  <a:t>lineair</a:t>
+                </a:r>
+                <a:r>
+                  <a:rPr lang="en-NL" sz="1300" b="1" i="0" kern="1200" dirty="0">
+                    <a:solidFill>
+                      <a:schemeClr val="tx1"/>
+                    </a:solidFill>
+                    <a:effectLst/>
+                    <a:ea typeface="+mn-ea"/>
+                    <a:cs typeface="+mn-cs"/>
+                  </a:rPr>
+                  <a:t> model</a:t>
+                </a:r>
+                <a:r>
+                  <a:rPr lang="en-NL" sz="1300" b="0" i="0" kern="1200" dirty="0">
+                    <a:solidFill>
+                      <a:schemeClr val="tx1"/>
+                    </a:solidFill>
+                    <a:effectLst/>
+                    <a:ea typeface="+mn-ea"/>
+                    <a:cs typeface="+mn-cs"/>
+                  </a:rPr>
+                  <a:t> </a:t>
+                </a:r>
+                <a:r>
+                  <a:rPr lang="en-US" sz="1300" b="0" i="0" kern="1200" dirty="0">
+                    <a:solidFill>
+                      <a:schemeClr val="tx1"/>
+                    </a:solidFill>
+                    <a:effectLst/>
+                    <a:ea typeface="+mn-ea"/>
+                    <a:cs typeface="+mn-cs"/>
+                  </a:rPr>
+                  <a:t>(LPM) </a:t>
+                </a:r>
+                <a:r>
+                  <a:rPr lang="en-NL" sz="1300" b="0" i="0" kern="1200" dirty="0" err="1">
+                    <a:solidFill>
+                      <a:schemeClr val="tx1"/>
+                    </a:solidFill>
+                    <a:effectLst/>
+                    <a:ea typeface="+mn-ea"/>
+                    <a:cs typeface="+mn-cs"/>
+                  </a:rPr>
+                  <a:t>werkt</a:t>
+                </a:r>
+                <a:r>
+                  <a:rPr lang="en-NL" sz="1300" b="0" i="0" kern="1200" dirty="0">
+                    <a:solidFill>
+                      <a:schemeClr val="tx1"/>
+                    </a:solidFill>
+                    <a:effectLst/>
+                    <a:ea typeface="+mn-ea"/>
+                    <a:cs typeface="+mn-cs"/>
+                  </a:rPr>
+                  <a:t> de within-</a:t>
+                </a:r>
+                <a:r>
+                  <a:rPr lang="en-NL" sz="1300" b="0" i="0" kern="1200" dirty="0" err="1">
+                    <a:solidFill>
+                      <a:schemeClr val="tx1"/>
+                    </a:solidFill>
+                    <a:effectLst/>
+                    <a:ea typeface="+mn-ea"/>
+                    <a:cs typeface="+mn-cs"/>
+                  </a:rPr>
+                  <a:t>transformatie</a:t>
+                </a:r>
+                <a:r>
+                  <a:rPr lang="en-NL" sz="1300" b="0" i="0" kern="1200" dirty="0">
+                    <a:solidFill>
+                      <a:schemeClr val="tx1"/>
+                    </a:solidFill>
+                    <a:effectLst/>
+                    <a:ea typeface="+mn-ea"/>
+                    <a:cs typeface="+mn-cs"/>
+                  </a:rPr>
+                  <a:t>, maar </a:t>
+                </a:r>
+                <a:r>
+                  <a:rPr lang="en-NL" sz="1300" b="0" i="0" kern="1200" dirty="0" err="1">
+                    <a:solidFill>
+                      <a:schemeClr val="tx1"/>
+                    </a:solidFill>
+                    <a:effectLst/>
+                    <a:ea typeface="+mn-ea"/>
+                    <a:cs typeface="+mn-cs"/>
+                  </a:rPr>
+                  <a:t>bij</a:t>
+                </a:r>
+                <a:r>
+                  <a:rPr lang="en-NL" sz="1300" b="0" i="0" kern="1200" dirty="0">
+                    <a:solidFill>
+                      <a:schemeClr val="tx1"/>
+                    </a:solidFill>
+                    <a:effectLst/>
+                    <a:ea typeface="+mn-ea"/>
+                    <a:cs typeface="+mn-cs"/>
+                  </a:rPr>
+                  <a:t> </a:t>
+                </a:r>
+                <a:r>
+                  <a:rPr lang="en-NL" sz="1300" b="0" i="0" kern="1200" dirty="0" err="1">
+                    <a:solidFill>
+                      <a:schemeClr val="tx1"/>
+                    </a:solidFill>
+                    <a:effectLst/>
+                    <a:ea typeface="+mn-ea"/>
+                    <a:cs typeface="+mn-cs"/>
+                  </a:rPr>
+                  <a:t>een</a:t>
+                </a:r>
+                <a:r>
+                  <a:rPr lang="en-NL" sz="1300" b="0" i="0" kern="1200" dirty="0">
+                    <a:solidFill>
+                      <a:schemeClr val="tx1"/>
+                    </a:solidFill>
+                    <a:effectLst/>
+                    <a:ea typeface="+mn-ea"/>
+                    <a:cs typeface="+mn-cs"/>
+                  </a:rPr>
+                  <a:t> </a:t>
+                </a:r>
+                <a:r>
+                  <a:rPr lang="en-NL" sz="1300" b="1" i="0" kern="1200" dirty="0">
+                    <a:solidFill>
+                      <a:schemeClr val="tx1"/>
+                    </a:solidFill>
+                    <a:effectLst/>
+                    <a:ea typeface="+mn-ea"/>
+                    <a:cs typeface="+mn-cs"/>
+                  </a:rPr>
+                  <a:t>probit-model</a:t>
+                </a:r>
+                <a:r>
+                  <a:rPr lang="en-NL" sz="1300" b="0" i="0" kern="1200" dirty="0">
+                    <a:solidFill>
+                      <a:schemeClr val="tx1"/>
+                    </a:solidFill>
+                    <a:effectLst/>
+                    <a:ea typeface="+mn-ea"/>
+                    <a:cs typeface="+mn-cs"/>
+                  </a:rPr>
+                  <a:t> </a:t>
+                </a:r>
+                <a:r>
+                  <a:rPr lang="en-NL" sz="1300" b="0" i="0" kern="1200" dirty="0" err="1">
+                    <a:solidFill>
+                      <a:schemeClr val="tx1"/>
+                    </a:solidFill>
+                    <a:effectLst/>
+                    <a:ea typeface="+mn-ea"/>
+                    <a:cs typeface="+mn-cs"/>
+                  </a:rPr>
+                  <a:t>niet</a:t>
+                </a:r>
+                <a:r>
+                  <a:rPr lang="en-US" sz="1300" b="0" i="0" kern="1200" dirty="0">
+                    <a:solidFill>
+                      <a:schemeClr val="tx1"/>
+                    </a:solidFill>
+                    <a:effectLst/>
+                    <a:ea typeface="+mn-ea"/>
+                    <a:cs typeface="+mn-cs"/>
+                  </a:rPr>
+                  <a:t> (</a:t>
+                </a:r>
+                <a:r>
+                  <a:rPr lang="en-NL" sz="1300" b="0" i="0" kern="1200" dirty="0">
+                    <a:solidFill>
+                      <a:schemeClr val="tx1"/>
+                    </a:solidFill>
+                    <a:effectLst/>
+                    <a:ea typeface="+mn-ea"/>
+                    <a:cs typeface="+mn-cs"/>
+                  </a:rPr>
+                  <a:t>Door de </a:t>
+                </a:r>
+                <a:r>
+                  <a:rPr lang="en-NL" sz="1300" b="0" i="0" kern="1200" dirty="0" err="1">
+                    <a:solidFill>
+                      <a:schemeClr val="tx1"/>
+                    </a:solidFill>
+                    <a:effectLst/>
+                    <a:ea typeface="+mn-ea"/>
+                    <a:cs typeface="+mn-cs"/>
+                  </a:rPr>
+                  <a:t>niet-lineariteit</a:t>
+                </a:r>
+                <a:r>
+                  <a:rPr lang="en-NL" sz="1300" b="0" i="0" kern="1200" dirty="0">
+                    <a:solidFill>
+                      <a:schemeClr val="tx1"/>
+                    </a:solidFill>
+                    <a:effectLst/>
+                    <a:ea typeface="+mn-ea"/>
+                    <a:cs typeface="+mn-cs"/>
+                  </a:rPr>
+                  <a:t> </a:t>
+                </a:r>
+                <a:r>
+                  <a:rPr lang="en-NL" sz="1300" b="0" i="0" kern="1200" dirty="0" err="1">
+                    <a:solidFill>
+                      <a:schemeClr val="tx1"/>
+                    </a:solidFill>
+                    <a:effectLst/>
+                    <a:ea typeface="+mn-ea"/>
+                    <a:cs typeface="+mn-cs"/>
+                  </a:rPr>
+                  <a:t>blijft</a:t>
+                </a:r>
+                <a:r>
+                  <a:rPr lang="en-NL" sz="1300" b="0" i="0" kern="1200" dirty="0">
+                    <a:solidFill>
+                      <a:schemeClr val="tx1"/>
+                    </a:solidFill>
+                    <a:effectLst/>
+                    <a:ea typeface="+mn-ea"/>
+                    <a:cs typeface="+mn-cs"/>
+                  </a:rPr>
+                  <a:t> </a:t>
+                </a:r>
+                <a:r>
+                  <a:rPr lang="en-NL" sz="1300" i="0" kern="1200">
+                    <a:solidFill>
+                      <a:schemeClr val="tx1"/>
+                    </a:solidFill>
+                    <a:ea typeface="+mn-ea"/>
+                    <a:cs typeface="+mn-cs"/>
+                  </a:rPr>
+                  <a:t>𝛼_𝑖</a:t>
+                </a:r>
+                <a:r>
+                  <a:rPr lang="en-NL" sz="1300" b="0" i="0" kern="1200" dirty="0" err="1">
+                    <a:solidFill>
+                      <a:schemeClr val="tx1"/>
+                    </a:solidFill>
+                    <a:effectLst/>
+                    <a:ea typeface="+mn-ea"/>
+                    <a:cs typeface="+mn-cs"/>
+                  </a:rPr>
+                  <a:t>verweven</a:t>
+                </a:r>
+                <a:r>
+                  <a:rPr lang="en-NL" sz="1300" b="0" i="0" kern="1200" dirty="0">
+                    <a:solidFill>
+                      <a:schemeClr val="tx1"/>
+                    </a:solidFill>
+                    <a:effectLst/>
+                    <a:ea typeface="+mn-ea"/>
+                    <a:cs typeface="+mn-cs"/>
+                  </a:rPr>
+                  <a:t> </a:t>
+                </a:r>
+                <a:r>
+                  <a:rPr lang="en-NL" sz="1300" b="0" i="0" kern="1200" dirty="0" err="1">
+                    <a:solidFill>
+                      <a:schemeClr val="tx1"/>
+                    </a:solidFill>
+                    <a:effectLst/>
+                    <a:ea typeface="+mn-ea"/>
+                    <a:cs typeface="+mn-cs"/>
+                  </a:rPr>
+                  <a:t>zitten</a:t>
+                </a:r>
+                <a:r>
+                  <a:rPr lang="en-NL" sz="1300" b="0" i="0" kern="1200" dirty="0">
+                    <a:solidFill>
+                      <a:schemeClr val="tx1"/>
+                    </a:solidFill>
+                    <a:effectLst/>
+                    <a:ea typeface="+mn-ea"/>
+                    <a:cs typeface="+mn-cs"/>
+                  </a:rPr>
+                  <a:t> in de </a:t>
+                </a:r>
+                <a:r>
+                  <a:rPr lang="en-NL" sz="1300" b="0" i="0" kern="1200" dirty="0" err="1">
+                    <a:solidFill>
+                      <a:schemeClr val="tx1"/>
+                    </a:solidFill>
+                    <a:effectLst/>
+                    <a:ea typeface="+mn-ea"/>
+                    <a:cs typeface="+mn-cs"/>
+                  </a:rPr>
+                  <a:t>kansfunctie</a:t>
+                </a:r>
+                <a:r>
+                  <a:rPr lang="en-NL" sz="1300" b="0" i="0" kern="1200" dirty="0">
+                    <a:solidFill>
+                      <a:schemeClr val="tx1"/>
+                    </a:solidFill>
+                    <a:effectLst/>
+                    <a:ea typeface="+mn-ea"/>
+                    <a:cs typeface="+mn-cs"/>
+                  </a:rPr>
+                  <a:t> en </a:t>
+                </a:r>
+                <a:r>
+                  <a:rPr lang="en-NL" sz="1300" b="0" i="0" kern="1200" dirty="0" err="1">
+                    <a:solidFill>
+                      <a:schemeClr val="tx1"/>
+                    </a:solidFill>
+                    <a:effectLst/>
+                    <a:ea typeface="+mn-ea"/>
+                    <a:cs typeface="+mn-cs"/>
+                  </a:rPr>
+                  <a:t>kun</a:t>
+                </a:r>
+                <a:r>
+                  <a:rPr lang="en-NL" sz="1300" b="0" i="0" kern="1200" dirty="0">
+                    <a:solidFill>
+                      <a:schemeClr val="tx1"/>
+                    </a:solidFill>
+                    <a:effectLst/>
+                    <a:ea typeface="+mn-ea"/>
+                    <a:cs typeface="+mn-cs"/>
+                  </a:rPr>
+                  <a:t> je hem </a:t>
+                </a:r>
+                <a:r>
+                  <a:rPr lang="en-NL" sz="1300" b="0" i="0" kern="1200" dirty="0" err="1">
+                    <a:solidFill>
+                      <a:schemeClr val="tx1"/>
+                    </a:solidFill>
+                    <a:effectLst/>
+                    <a:ea typeface="+mn-ea"/>
+                    <a:cs typeface="+mn-cs"/>
+                  </a:rPr>
+                  <a:t>niet</a:t>
+                </a:r>
+                <a:r>
+                  <a:rPr lang="en-NL" sz="1300" b="0" i="0" kern="1200" dirty="0">
+                    <a:solidFill>
+                      <a:schemeClr val="tx1"/>
+                    </a:solidFill>
+                    <a:effectLst/>
+                    <a:ea typeface="+mn-ea"/>
+                    <a:cs typeface="+mn-cs"/>
+                  </a:rPr>
+                  <a:t> </a:t>
+                </a:r>
+                <a:r>
+                  <a:rPr lang="en-NL" sz="1300" b="0" i="0" kern="1200" dirty="0" err="1">
+                    <a:solidFill>
+                      <a:schemeClr val="tx1"/>
+                    </a:solidFill>
+                    <a:effectLst/>
+                    <a:ea typeface="+mn-ea"/>
+                    <a:cs typeface="+mn-cs"/>
+                  </a:rPr>
+                  <a:t>wegtransformeren</a:t>
+                </a:r>
+                <a:r>
+                  <a:rPr lang="en-NL" sz="1300" b="0" i="0" kern="1200" dirty="0">
+                    <a:solidFill>
+                      <a:schemeClr val="tx1"/>
+                    </a:solidFill>
+                    <a:effectLst/>
+                    <a:ea typeface="+mn-ea"/>
+                    <a:cs typeface="+mn-cs"/>
+                  </a:rPr>
+                  <a:t> door </a:t>
+                </a:r>
+                <a:r>
+                  <a:rPr lang="en-NL" sz="1300" b="0" i="0" kern="1200" dirty="0" err="1">
+                    <a:solidFill>
+                      <a:schemeClr val="tx1"/>
+                    </a:solidFill>
+                    <a:effectLst/>
+                    <a:ea typeface="+mn-ea"/>
+                    <a:cs typeface="+mn-cs"/>
+                  </a:rPr>
+                  <a:t>te</a:t>
+                </a:r>
+                <a:r>
+                  <a:rPr lang="en-NL" sz="1300" b="0" i="0" kern="1200" dirty="0">
+                    <a:solidFill>
+                      <a:schemeClr val="tx1"/>
+                    </a:solidFill>
+                    <a:effectLst/>
+                    <a:ea typeface="+mn-ea"/>
+                    <a:cs typeface="+mn-cs"/>
+                  </a:rPr>
+                  <a:t> de-</a:t>
+                </a:r>
+                <a:r>
+                  <a:rPr lang="en-NL" sz="1300" b="0" i="0" kern="1200" dirty="0" err="1">
+                    <a:solidFill>
+                      <a:schemeClr val="tx1"/>
+                    </a:solidFill>
+                    <a:effectLst/>
+                    <a:ea typeface="+mn-ea"/>
+                    <a:cs typeface="+mn-cs"/>
+                  </a:rPr>
+                  <a:t>meanen</a:t>
+                </a:r>
+                <a:r>
+                  <a:rPr lang="en-US" sz="1300" b="0" i="0" kern="1200" dirty="0">
+                    <a:solidFill>
+                      <a:schemeClr val="tx1"/>
+                    </a:solidFill>
+                    <a:effectLst/>
+                    <a:ea typeface="+mn-ea"/>
+                    <a:cs typeface="+mn-cs"/>
+                  </a:rPr>
+                  <a:t>); probit is </a:t>
+                </a:r>
+                <a:r>
+                  <a:rPr lang="en-US" sz="1300" b="0" i="0" kern="1200" dirty="0" err="1">
+                    <a:solidFill>
+                      <a:schemeClr val="tx1"/>
+                    </a:solidFill>
+                    <a:effectLst/>
+                    <a:ea typeface="+mn-ea"/>
+                    <a:cs typeface="+mn-cs"/>
+                  </a:rPr>
+                  <a:t>daarom</a:t>
+                </a:r>
+                <a:r>
+                  <a:rPr lang="en-US" sz="1300" b="0" i="0" kern="1200" dirty="0">
+                    <a:solidFill>
+                      <a:schemeClr val="tx1"/>
+                    </a:solidFill>
+                    <a:effectLst/>
+                    <a:ea typeface="+mn-ea"/>
+                    <a:cs typeface="+mn-cs"/>
+                  </a:rPr>
+                  <a:t> </a:t>
+                </a:r>
+                <a:r>
+                  <a:rPr lang="en-US" sz="1300" b="0" i="0" kern="1200" dirty="0" err="1">
+                    <a:solidFill>
+                      <a:schemeClr val="tx1"/>
+                    </a:solidFill>
+                    <a:effectLst/>
+                    <a:ea typeface="+mn-ea"/>
+                    <a:cs typeface="+mn-cs"/>
+                  </a:rPr>
+                  <a:t>niet</a:t>
+                </a:r>
+                <a:r>
+                  <a:rPr lang="en-US" sz="1300" b="0" i="0" kern="1200" dirty="0">
+                    <a:solidFill>
+                      <a:schemeClr val="tx1"/>
+                    </a:solidFill>
+                    <a:effectLst/>
+                    <a:ea typeface="+mn-ea"/>
+                    <a:cs typeface="+mn-cs"/>
+                  </a:rPr>
+                  <a:t> met FE </a:t>
+                </a:r>
+                <a:r>
+                  <a:rPr lang="en-US" sz="1300" b="0" i="0" kern="1200" dirty="0" err="1">
+                    <a:solidFill>
+                      <a:schemeClr val="tx1"/>
+                    </a:solidFill>
+                    <a:effectLst/>
+                    <a:ea typeface="+mn-ea"/>
+                    <a:cs typeface="+mn-cs"/>
+                  </a:rPr>
+                  <a:t>te</a:t>
+                </a:r>
+                <a:r>
+                  <a:rPr lang="en-US" sz="1300" b="0" i="0" kern="1200" dirty="0">
+                    <a:solidFill>
+                      <a:schemeClr val="tx1"/>
+                    </a:solidFill>
+                    <a:effectLst/>
+                    <a:ea typeface="+mn-ea"/>
+                    <a:cs typeface="+mn-cs"/>
+                  </a:rPr>
+                  <a:t> Schatten </a:t>
+                </a:r>
+                <a:r>
+                  <a:rPr lang="en-US" sz="1300" b="0" i="0" kern="1200" dirty="0" err="1">
+                    <a:solidFill>
+                      <a:schemeClr val="tx1"/>
+                    </a:solidFill>
+                    <a:effectLst/>
+                    <a:ea typeface="+mn-ea"/>
+                    <a:cs typeface="+mn-cs"/>
+                  </a:rPr>
+                  <a:t>behalve</a:t>
+                </a:r>
+                <a:r>
+                  <a:rPr lang="en-US" sz="1300" b="0" i="0" kern="1200" dirty="0">
+                    <a:solidFill>
+                      <a:schemeClr val="tx1"/>
+                    </a:solidFill>
+                    <a:effectLst/>
+                    <a:ea typeface="+mn-ea"/>
+                    <a:cs typeface="+mn-cs"/>
+                  </a:rPr>
+                  <a:t> CRE probit</a:t>
+                </a:r>
+                <a:r>
+                  <a:rPr lang="en-NL" sz="1300" b="0" i="0" kern="1200" dirty="0">
+                    <a:solidFill>
+                      <a:schemeClr val="tx1"/>
+                    </a:solidFill>
+                    <a:effectLst/>
+                    <a:ea typeface="+mn-ea"/>
+                    <a:cs typeface="+mn-cs"/>
+                  </a:rPr>
+                  <a:t>.</a:t>
+                </a:r>
+              </a:p>
+              <a:p>
+                <a:pPr marL="0" marR="0" lvl="0" indent="0" algn="l" defTabSz="914400" rtl="0" eaLnBrk="1" fontAlgn="auto" latinLnBrk="0" hangingPunct="1">
+                  <a:lnSpc>
+                    <a:spcPct val="100000"/>
+                  </a:lnSpc>
+                  <a:spcBef>
+                    <a:spcPts val="0"/>
+                  </a:spcBef>
+                  <a:spcAft>
+                    <a:spcPts val="0"/>
+                  </a:spcAft>
+                  <a:buClrTx/>
+                  <a:buSzTx/>
+                  <a:buFontTx/>
+                  <a:buNone/>
+                  <a:tabLst/>
+                  <a:defRPr/>
+                </a:pPr>
+                <a:endParaRPr lang="en-NL" sz="1300" b="0" i="0" kern="1200" dirty="0">
+                  <a:solidFill>
+                    <a:schemeClr val="tx1"/>
+                  </a:solidFill>
+                  <a:effectLst/>
+                  <a:ea typeface="+mn-ea"/>
+                  <a:cs typeface="+mn-cs"/>
+                </a:endParaRPr>
+              </a:p>
+            </p:txBody>
+          </p:sp>
+        </mc:Fallback>
+      </mc:AlternateContent>
       <p:sp>
         <p:nvSpPr>
           <p:cNvPr id="4" name="Tijdelijke aanduiding voor dianummer 3">
@@ -5499,7 +7957,7 @@
               </a:pPr>
               <a:t>8</a:t>
             </a:fld>
-            <a:endParaRPr kumimoji="0" lang="nl-NL" sz="1200" b="0" i="0" u="none" strike="noStrike" kern="1200" cap="none" spc="0" normalizeH="0" baseline="0" noProof="0">
+            <a:endParaRPr kumimoji="0" lang="nl-NL" sz="1200" b="0" i="0" u="none" strike="noStrike" kern="1200" cap="none" spc="0" normalizeH="0" baseline="0" noProof="0" dirty="0">
               <a:ln>
                 <a:noFill/>
               </a:ln>
@@ -8358,7 +10816,7 @@
                     <a:latin typeface="Verdana" panose="020B0604030504040204" pitchFamily="34" charset="0"/>
                     <a:ea typeface="Verdana" panose="020B0604030504040204" pitchFamily="34" charset="0"/>
                   </a:rPr>
-                  <a:t>1. Average effect (</a:t>
+                  <a:t>1. Average relationship (</a:t>
                 </a:r>
                 <a14:m>
                   <m:oMath xmlns:m="http://schemas.openxmlformats.org/officeDocument/2006/math">
@@ -8376,7 +10834,7 @@
                     <a:latin typeface="Verdana" panose="020B0604030504040204" pitchFamily="34" charset="0"/>
                     <a:ea typeface="Verdana" panose="020B0604030504040204" pitchFamily="34" charset="0"/>
                   </a:rPr>
-                  <a:t>) of ICT/AI in all years</a:t>
+                  <a:t>) with ICT/AI in all years</a:t>
                 </a:r>
               </a:p>
               <a:p>
@@ -16201,13 +18659,13 @@
                   <a:schemeClr val="bg1"/>
                 </a:solidFill>
               </a:rPr>
-              <a:t>Linear panel models (LPM)</a:t>
+              <a:t>Linear probability models (LPM)</a:t>
             </a:r>
           </a:p>
         </p:txBody>
       </p:sp>
-      <mc:AlternateContent xmlns:mc="http://schemas.openxmlformats.org/markup-compatibility/2006">
-        <mc:Choice xmlns:a14="http://schemas.microsoft.com/office/drawing/2010/main" Requires="a14">
+      <mc:AlternateContent xmlns:mc="http://schemas.openxmlformats.org/markup-compatibility/2006" xmlns:a14="http://schemas.microsoft.com/office/drawing/2010/main">
+        <mc:Choice Requires="a14">
           <p:sp>
             <p:nvSpPr>
               <p:cNvPr id="2" name="Content Placeholder 2">
@@ -18385,7 +20843,7 @@
             </p:txBody>
           </p:sp>
         </mc:Choice>
-        <mc:Fallback>
+        <mc:Fallback xmlns="">
           <p:sp>
             <p:nvSpPr>
               <p:cNvPr id="2" name="Content Placeholder 2">

--- a/Resilience.pptx
+++ b/Resilience.pptx
@@ -161,7 +161,7 @@
 <file path=ppt/revisionInfo.xml><?xml version="1.0" encoding="utf-8"?>
 <p1510:revInfo xmlns:a="http://schemas.openxmlformats.org/drawingml/2006/main" xmlns:r="http://schemas.openxmlformats.org/officeDocument/2006/relationships" xmlns:p1510="http://schemas.microsoft.com/office/powerpoint/2015/10/main">
   <p1510:revLst>
-    <p1510:client id="{13B43BEF-9B9B-431D-9308-0B2B126B7992}" v="691" dt="2026-10-10T15:12:41.481"/>
+    <p1510:client id="{13B43BEF-9B9B-431D-9308-0B2B126B7992}" v="753" dt="2026-10-10T15:20:10.608"/>
   </p1510:revLst>
 </p1510:revInfo>
 </file>
@@ -171,7 +171,7 @@
   <pc:docChgLst>
     <pc:chgData name="Jan Willem van den End (EBO_CMA)" userId="32ade95a-e024-4672-952f-5ed8641a9e00" providerId="ADAL" clId="{3BBBE02E-ACD4-4586-9407-5E79BF620DF1}"/>
     <pc:docChg chg="undo redo custSel addSld modSld sldOrd">
-      <pc:chgData name="Jan Willem van den End (EBO_CMA)" userId="32ade95a-e024-4672-952f-5ed8641a9e00" providerId="ADAL" clId="{3BBBE02E-ACD4-4586-9407-5E79BF620DF1}" dt="2026-10-10T15:12:41.481" v="10488" actId="6549"/>
+      <pc:chgData name="Jan Willem van den End (EBO_CMA)" userId="32ade95a-e024-4672-952f-5ed8641a9e00" providerId="ADAL" clId="{3BBBE02E-ACD4-4586-9407-5E79BF620DF1}" dt="2026-10-10T15:23:16.693" v="10568" actId="6549"/>
       <pc:docMkLst>
         <pc:docMk/>
       </pc:docMkLst>
@@ -553,14 +553,14 @@
           </ac:spMkLst>
         </pc:spChg>
       </pc:sldChg>
-      <pc:sldChg chg="modSp add mod modNotesTx">
-        <pc:chgData name="Jan Willem van den End (EBO_CMA)" userId="32ade95a-e024-4672-952f-5ed8641a9e00" providerId="ADAL" clId="{3BBBE02E-ACD4-4586-9407-5E79BF620DF1}" dt="2026-10-10T15:12:41.481" v="10488" actId="6549"/>
+      <pc:sldChg chg="modSp add mod modNotes modNotesTx">
+        <pc:chgData name="Jan Willem van den End (EBO_CMA)" userId="32ade95a-e024-4672-952f-5ed8641a9e00" providerId="ADAL" clId="{3BBBE02E-ACD4-4586-9407-5E79BF620DF1}" dt="2026-10-10T15:23:16.693" v="10568" actId="6549"/>
         <pc:sldMkLst>
           <pc:docMk/>
           <pc:sldMk cId="3745319895" sldId="798"/>
         </pc:sldMkLst>
         <pc:spChg chg="mod">
-          <ac:chgData name="Jan Willem van den End (EBO_CMA)" userId="32ade95a-e024-4672-952f-5ed8641a9e00" providerId="ADAL" clId="{3BBBE02E-ACD4-4586-9407-5E79BF620DF1}" dt="2026-10-10T15:12:41.481" v="10488" actId="6549"/>
+          <ac:chgData name="Jan Willem van den End (EBO_CMA)" userId="32ade95a-e024-4672-952f-5ed8641a9e00" providerId="ADAL" clId="{3BBBE02E-ACD4-4586-9407-5E79BF620DF1}" dt="2026-10-10T15:20:10.608" v="10550" actId="20577"/>
           <ac:spMkLst>
             <pc:docMk/>
             <pc:sldMk cId="3745319895" sldId="798"/>
@@ -1296,12 +1296,17 @@
             <p:ph type="body" idx="1"/>
           </p:nvPr>
         </p:nvSpPr>
-        <p:spPr/>
+        <p:spPr>
+          <a:xfrm>
+            <a:off x="680562" y="4785598"/>
+            <a:ext cx="5635178" cy="3915489"/>
+          </a:xfrm>
+        </p:spPr>
         <p:txBody>
           <a:bodyPr/>
           <a:lstStyle/>
           <a:p>
-            <a:pPr marL="171450" marR="0" lvl="0" indent="-171450" algn="l" defTabSz="914400" rtl="0" eaLnBrk="1" fontAlgn="auto" latinLnBrk="0" hangingPunct="1">
+            <a:pPr marR="0" lvl="0" algn="l" defTabSz="914400" rtl="0" eaLnBrk="1" fontAlgn="auto" latinLnBrk="0" hangingPunct="1">
               <a:lnSpc>
                 <a:spcPct val="100000"/>
               </a:lnSpc>
@@ -1313,13 +1318,11 @@
               </a:spcAft>
               <a:buClrTx/>
               <a:buSzTx/>
-              <a:buFontTx/>
-              <a:buChar char="-"/>
               <a:tabLst/>
               <a:defRPr/>
             </a:pPr>
             <a:r>
-              <a:rPr lang="en-NL" sz="1200" b="0" i="0" u="sng" kern="1200" dirty="0">
+              <a:rPr lang="en-NL" sz="1300" b="0" i="0" u="sng" kern="1200" dirty="0">
                 <a:solidFill>
                   <a:schemeClr val="tx1"/>
                 </a:solidFill>
@@ -1328,10 +1331,10 @@
                 <a:ea typeface="+mn-ea"/>
                 <a:cs typeface="+mn-cs"/>
               </a:rPr>
-              <a:t>The CRE probit, also known as the </a:t>
-            </a:r>
-            <a:r>
-              <a:rPr lang="en-NL" sz="1200" b="0" i="0" u="sng" kern="1200" dirty="0" err="1">
+              <a:t>CRE probit, also known as the </a:t>
+            </a:r>
+            <a:r>
+              <a:rPr lang="en-NL" sz="1300" b="0" i="0" u="sng" kern="1200" dirty="0" err="1">
                 <a:solidFill>
                   <a:schemeClr val="tx1"/>
                 </a:solidFill>
@@ -1343,7 +1346,7 @@
               <a:t>Mundlak</a:t>
             </a:r>
             <a:r>
-              <a:rPr lang="en-NL" sz="1200" b="0" i="0" u="sng" kern="1200" dirty="0">
+              <a:rPr lang="en-NL" sz="1300" b="0" i="0" u="sng" kern="1200" dirty="0">
                 <a:solidFill>
                   <a:schemeClr val="tx1"/>
                 </a:solidFill>
@@ -1355,7 +1358,7 @@
               <a:t> approach, is the </a:t>
             </a:r>
             <a:r>
-              <a:rPr lang="en-NL" sz="1200" b="1" i="0" u="sng" kern="1200" dirty="0">
+              <a:rPr lang="en-NL" sz="1300" b="1" i="0" u="sng" kern="1200" dirty="0">
                 <a:solidFill>
                   <a:schemeClr val="tx1"/>
                 </a:solidFill>
@@ -1367,7 +1370,7 @@
               <a:t>nonlinear</a:t>
             </a:r>
             <a:r>
-              <a:rPr lang="en-NL" sz="1200" b="0" i="0" u="sng" kern="1200" dirty="0">
+              <a:rPr lang="en-NL" sz="1300" b="0" i="0" u="sng" kern="1200" dirty="0">
                 <a:solidFill>
                   <a:schemeClr val="tx1"/>
                 </a:solidFill>
@@ -1379,7 +1382,7 @@
               <a:t> analogue of the fixed-effects LPM</a:t>
             </a:r>
             <a:r>
-              <a:rPr lang="en-US" sz="1200" b="0" i="0" u="sng" kern="1200" dirty="0">
+              <a:rPr lang="en-US" sz="1300" b="0" i="0" u="sng" kern="1200" dirty="0">
                 <a:solidFill>
                   <a:schemeClr val="tx1"/>
                 </a:solidFill>
@@ -1390,7 +1393,7 @@
               </a:rPr>
               <a:t>.</a:t>
             </a:r>
-            <a:endParaRPr lang="en-NL" sz="1200" b="0" i="0" u="sng" kern="1200" dirty="0">
+            <a:endParaRPr lang="en-NL" sz="1300" b="0" i="0" u="sng" kern="1200" dirty="0">
               <a:solidFill>
                 <a:schemeClr val="tx1"/>
               </a:solidFill>
@@ -1406,7 +1409,7 @@
               <a:buNone/>
             </a:pPr>
             <a:r>
-              <a:rPr lang="en-US" sz="1200" u="sng" kern="1200" dirty="0">
+              <a:rPr lang="en-US" sz="1300" u="sng" kern="1200" dirty="0">
                 <a:solidFill>
                   <a:schemeClr val="tx1"/>
                 </a:solidFill>
@@ -1418,7 +1421,7 @@
               <a:t>  CRE probit using </a:t>
             </a:r>
             <a:r>
-              <a:rPr lang="en-US" sz="1200" u="sng" kern="1200" dirty="0" err="1">
+              <a:rPr lang="en-US" sz="1300" u="sng" kern="1200" dirty="0" err="1">
                 <a:solidFill>
                   <a:schemeClr val="tx1"/>
                 </a:solidFill>
@@ -1430,7 +1433,7 @@
               <a:t>Mundlak</a:t>
             </a:r>
             <a:r>
-              <a:rPr lang="en-US" sz="1200" u="sng" kern="1200" dirty="0">
+              <a:rPr lang="en-US" sz="1300" u="sng" kern="1200" dirty="0">
                 <a:solidFill>
                   <a:schemeClr val="tx1"/>
                 </a:solidFill>
@@ -1442,7 +1445,7 @@
               <a:t> formulation</a:t>
             </a:r>
             <a:r>
-              <a:rPr lang="en-US" sz="1200" kern="1200" dirty="0">
+              <a:rPr lang="en-US" sz="1300" kern="1200" dirty="0">
                 <a:solidFill>
                   <a:schemeClr val="tx1"/>
                 </a:solidFill>
@@ -1454,7 +1457,7 @@
               <a:t>, including country means of the time-varying explanatory variables and controls (within/between decompositions of ICT and the enabled time-varying controls.). This permits persistent unobserved country heterogeneity to be correlated with ICT exposure. Inference accounts for within-country dependence. Including means of explanatory variables makes random component </a:t>
             </a:r>
             <a:r>
-              <a:rPr lang="en-US" sz="1200" kern="1200" dirty="0" err="1">
+              <a:rPr lang="en-US" sz="1300" kern="1200" dirty="0" err="1">
                 <a:solidFill>
                   <a:schemeClr val="tx1"/>
                 </a:solidFill>
@@ -1466,7 +1469,7 @@
               <a:t>alpha_i</a:t>
             </a:r>
             <a:r>
-              <a:rPr lang="en-US" sz="1200" kern="1200" dirty="0">
+              <a:rPr lang="en-US" sz="1300" kern="1200" dirty="0">
                 <a:solidFill>
                   <a:schemeClr val="tx1"/>
                 </a:solidFill>
@@ -1484,7 +1487,7 @@
               <a:buChar char="-"/>
             </a:pPr>
             <a:r>
-              <a:rPr lang="en-US" sz="1200" kern="1200" dirty="0">
+              <a:rPr lang="en-US" sz="1300" kern="1200" dirty="0">
                 <a:solidFill>
                   <a:schemeClr val="tx1"/>
                 </a:solidFill>
@@ -1496,7 +1499,7 @@
               <a:t>.</a:t>
             </a:r>
             <a:r>
-              <a:rPr lang="en-US" sz="1200" kern="1200" dirty="0" err="1">
+              <a:rPr lang="en-US" sz="1300" kern="1200" dirty="0" err="1">
                 <a:solidFill>
                   <a:schemeClr val="tx1"/>
                 </a:solidFill>
@@ -1508,7 +1511,7 @@
               <a:t>Beta_w</a:t>
             </a:r>
             <a:r>
-              <a:rPr lang="en-US" sz="1200" kern="1200" dirty="0">
+              <a:rPr lang="en-US" sz="1300" kern="1200" dirty="0">
                 <a:solidFill>
                   <a:schemeClr val="tx1"/>
                 </a:solidFill>
@@ -1520,7 +1523,7 @@
               <a:t> = within country effect (</a:t>
             </a:r>
             <a:r>
-              <a:rPr lang="en-US" sz="1200" kern="1200" dirty="0" err="1">
+              <a:rPr lang="en-US" sz="1300" kern="1200" dirty="0" err="1">
                 <a:solidFill>
                   <a:schemeClr val="tx1"/>
                 </a:solidFill>
@@ -1532,7 +1535,7 @@
               <a:t>Beta_w</a:t>
             </a:r>
             <a:r>
-              <a:rPr lang="en-US" sz="1200" kern="1200" dirty="0">
+              <a:rPr lang="en-US" sz="1300" kern="1200" dirty="0">
                 <a:solidFill>
                   <a:schemeClr val="tx1"/>
                 </a:solidFill>
@@ -1544,7 +1547,7 @@
               <a:t> * (</a:t>
             </a:r>
             <a:r>
-              <a:rPr lang="en-US" sz="1200" kern="1200" dirty="0" err="1">
+              <a:rPr lang="en-US" sz="1300" kern="1200" dirty="0" err="1">
                 <a:solidFill>
                   <a:schemeClr val="tx1"/>
                 </a:solidFill>
@@ -1556,7 +1559,7 @@
               <a:t>X_t</a:t>
             </a:r>
             <a:r>
-              <a:rPr lang="en-US" sz="1200" kern="1200" dirty="0">
+              <a:rPr lang="en-US" sz="1300" kern="1200" dirty="0">
                 <a:solidFill>
                   <a:schemeClr val="tx1"/>
                 </a:solidFill>
@@ -1568,7 +1571,7 @@
               <a:t> - </a:t>
             </a:r>
             <a:r>
-              <a:rPr lang="en-US" sz="1200" kern="1200" dirty="0" err="1">
+              <a:rPr lang="en-US" sz="1300" kern="1200" dirty="0" err="1">
                 <a:solidFill>
                   <a:schemeClr val="tx1"/>
                 </a:solidFill>
@@ -1580,7 +1583,7 @@
               <a:t>X_mean</a:t>
             </a:r>
             <a:r>
-              <a:rPr lang="en-US" sz="1200" kern="1200" dirty="0">
+              <a:rPr lang="en-US" sz="1300" kern="1200" dirty="0">
                 <a:solidFill>
                   <a:schemeClr val="tx1"/>
                 </a:solidFill>
@@ -1591,6 +1594,21 @@
               </a:rPr>
               <a:t>): what happens when X changes within a country</a:t>
             </a:r>
+          </a:p>
+          <a:p>
+            <a:pPr marL="171450" indent="-171450">
+              <a:buFontTx/>
+              <a:buChar char="-"/>
+            </a:pPr>
+            <a:endParaRPr lang="en-US" sz="1300" kern="1200" dirty="0">
+              <a:solidFill>
+                <a:schemeClr val="tx1"/>
+              </a:solidFill>
+              <a:effectLst/>
+              <a:latin typeface="+mn-lt"/>
+              <a:ea typeface="+mn-ea"/>
+              <a:cs typeface="+mn-cs"/>
+            </a:endParaRPr>
           </a:p>
           <a:p>
             <a:pPr marL="0" indent="0">
@@ -1598,7 +1616,7 @@
               <a:buNone/>
             </a:pPr>
             <a:r>
-              <a:rPr lang="en-NL" sz="1400" u="sng" kern="1200" dirty="0" err="1">
+              <a:rPr lang="en-NL" sz="1300" u="sng" kern="1200" dirty="0" err="1">
                 <a:solidFill>
                   <a:schemeClr val="tx1"/>
                 </a:solidFill>
@@ -1610,7 +1628,7 @@
               <a:t>Mundlak</a:t>
             </a:r>
             <a:r>
-              <a:rPr lang="en-NL" sz="1400" u="sng" kern="1200" dirty="0">
+              <a:rPr lang="en-NL" sz="1300" u="sng" kern="1200" dirty="0">
                 <a:solidFill>
                   <a:schemeClr val="tx1"/>
                 </a:solidFill>
@@ -1622,7 +1640,7 @@
               <a:t> country </a:t>
             </a:r>
             <a:r>
-              <a:rPr lang="en-NL" sz="1400" b="1" u="sng" kern="1200" dirty="0">
+              <a:rPr lang="en-NL" sz="1300" b="1" u="sng" kern="1200" dirty="0">
                 <a:solidFill>
                   <a:schemeClr val="tx1"/>
                 </a:solidFill>
@@ -1634,7 +1652,7 @@
               <a:t>means</a:t>
             </a:r>
             <a:r>
-              <a:rPr lang="en-NL" sz="1400" u="sng" kern="1200" dirty="0">
+              <a:rPr lang="en-NL" sz="1300" u="sng" kern="1200" dirty="0">
                 <a:solidFill>
                   <a:schemeClr val="tx1"/>
                 </a:solidFill>
@@ -1646,7 +1664,7 @@
               <a:t> adequately capture the </a:t>
             </a:r>
             <a:r>
-              <a:rPr lang="en-NL" sz="1400" b="1" u="sng" kern="1200" dirty="0">
+              <a:rPr lang="en-NL" sz="1300" b="1" u="sng" kern="1200" dirty="0">
                 <a:solidFill>
                   <a:schemeClr val="tx1"/>
                 </a:solidFill>
@@ -1658,7 +1676,7 @@
               <a:t>correlation</a:t>
             </a:r>
             <a:r>
-              <a:rPr lang="en-NL" sz="1400" u="sng" kern="1200" dirty="0">
+              <a:rPr lang="en-NL" sz="1300" u="sng" kern="1200" dirty="0">
                 <a:solidFill>
                   <a:schemeClr val="tx1"/>
                 </a:solidFill>
@@ -1670,7 +1688,7 @@
               <a:t> between ICT exposure and persistent country heterogeneity</a:t>
             </a:r>
             <a:r>
-              <a:rPr lang="en-US" sz="1400" u="sng" kern="1200" dirty="0">
+              <a:rPr lang="en-US" sz="1300" u="sng" kern="1200" dirty="0">
                 <a:solidFill>
                   <a:schemeClr val="tx1"/>
                 </a:solidFill>
@@ -1679,10 +1697,10 @@
                 <a:ea typeface="+mn-ea"/>
                 <a:cs typeface="+mn-cs"/>
               </a:rPr>
-              <a:t> =&gt;  </a:t>
-            </a:r>
-            <a:r>
-              <a:rPr lang="en-NL" sz="1200" kern="1200" dirty="0">
+              <a:t> </a:t>
+            </a:r>
+            <a:r>
+              <a:rPr lang="en-US" sz="1300" i="1" kern="1200" dirty="0">
                 <a:solidFill>
                   <a:schemeClr val="tx1"/>
                 </a:solidFill>
@@ -1691,10 +1709,10 @@
                 <a:ea typeface="+mn-ea"/>
                 <a:cs typeface="+mn-cs"/>
               </a:rPr>
-              <a:t>FE probit </a:t>
-            </a:r>
-            <a:r>
-              <a:rPr lang="en-US" sz="1200" kern="1200" dirty="0">
+              <a:t>=&gt;  normal </a:t>
+            </a:r>
+            <a:r>
+              <a:rPr lang="en-NL" sz="1300" i="1" kern="1200" dirty="0">
                 <a:solidFill>
                   <a:schemeClr val="tx1"/>
                 </a:solidFill>
@@ -1703,10 +1721,10 @@
                 <a:ea typeface="+mn-ea"/>
                 <a:cs typeface="+mn-cs"/>
               </a:rPr>
-              <a:t>model </a:t>
-            </a:r>
-            <a:r>
-              <a:rPr lang="en-NL" sz="1200" kern="1200" dirty="0">
+              <a:t>FE probit </a:t>
+            </a:r>
+            <a:r>
+              <a:rPr lang="en-US" sz="1300" kern="1200" dirty="0">
                 <a:solidFill>
                   <a:schemeClr val="tx1"/>
                 </a:solidFill>
@@ -1715,10 +1733,10 @@
                 <a:ea typeface="+mn-ea"/>
                 <a:cs typeface="+mn-cs"/>
               </a:rPr>
-              <a:t>estimates a separate intercept for </a:t>
-            </a:r>
-            <a:r>
-              <a:rPr lang="en-US" sz="1200" kern="1200" dirty="0">
+              <a:t>model </a:t>
+            </a:r>
+            <a:r>
+              <a:rPr lang="en-NL" sz="1300" kern="1200" dirty="0">
                 <a:solidFill>
                   <a:schemeClr val="tx1"/>
                 </a:solidFill>
@@ -1727,10 +1745,10 @@
                 <a:ea typeface="+mn-ea"/>
                 <a:cs typeface="+mn-cs"/>
               </a:rPr>
-              <a:t>each</a:t>
-            </a:r>
-            <a:r>
-              <a:rPr lang="en-NL" sz="1200" kern="1200" dirty="0">
+              <a:t>estimates a separate intercept for </a:t>
+            </a:r>
+            <a:r>
+              <a:rPr lang="en-US" sz="1300" kern="1200" dirty="0">
                 <a:solidFill>
                   <a:schemeClr val="tx1"/>
                 </a:solidFill>
@@ -1739,10 +1757,10 @@
                 <a:ea typeface="+mn-ea"/>
                 <a:cs typeface="+mn-cs"/>
               </a:rPr>
-              <a:t> country, whereas CRE probit assumes a normally distributed </a:t>
-            </a:r>
-            <a:r>
-              <a:rPr lang="en-NL" sz="1200" b="1" kern="1200" dirty="0">
+              <a:t>each</a:t>
+            </a:r>
+            <a:r>
+              <a:rPr lang="en-NL" sz="1300" kern="1200" dirty="0">
                 <a:solidFill>
                   <a:schemeClr val="tx1"/>
                 </a:solidFill>
@@ -1751,10 +1769,10 @@
                 <a:ea typeface="+mn-ea"/>
                 <a:cs typeface="+mn-cs"/>
               </a:rPr>
-              <a:t>country random intercept </a:t>
-            </a:r>
-            <a:r>
-              <a:rPr lang="en-NL" sz="1200" kern="1200" dirty="0">
+              <a:t> country, whereas </a:t>
+            </a:r>
+            <a:r>
+              <a:rPr lang="en-NL" sz="1300" i="1" kern="1200" dirty="0">
                 <a:solidFill>
                   <a:schemeClr val="tx1"/>
                 </a:solidFill>
@@ -1763,10 +1781,10 @@
                 <a:ea typeface="+mn-ea"/>
                 <a:cs typeface="+mn-cs"/>
               </a:rPr>
-              <a:t>and models its </a:t>
-            </a:r>
-            <a:r>
-              <a:rPr lang="en-NL" sz="1200" b="1" kern="1200" dirty="0">
+              <a:t>CRE probit </a:t>
+            </a:r>
+            <a:r>
+              <a:rPr lang="en-NL" sz="1300" kern="1200" dirty="0">
                 <a:solidFill>
                   <a:schemeClr val="tx1"/>
                 </a:solidFill>
@@ -1775,9 +1793,45 @@
                 <a:ea typeface="+mn-ea"/>
                 <a:cs typeface="+mn-cs"/>
               </a:rPr>
+              <a:t>assumes a normally distributed </a:t>
+            </a:r>
+            <a:r>
+              <a:rPr lang="en-NL" sz="1300" b="1" kern="1200" dirty="0">
+                <a:solidFill>
+                  <a:schemeClr val="tx1"/>
+                </a:solidFill>
+                <a:effectLst/>
+                <a:latin typeface="+mn-lt"/>
+                <a:ea typeface="+mn-ea"/>
+                <a:cs typeface="+mn-cs"/>
+              </a:rPr>
+              <a:t>country random intercept </a:t>
+            </a:r>
+            <a:r>
+              <a:rPr lang="en-NL" sz="1300" kern="1200" dirty="0">
+                <a:solidFill>
+                  <a:schemeClr val="tx1"/>
+                </a:solidFill>
+                <a:effectLst/>
+                <a:latin typeface="+mn-lt"/>
+                <a:ea typeface="+mn-ea"/>
+                <a:cs typeface="+mn-cs"/>
+              </a:rPr>
+              <a:t>and models its </a:t>
+            </a:r>
+            <a:r>
+              <a:rPr lang="en-NL" sz="1300" b="1" kern="1200" dirty="0">
+                <a:solidFill>
+                  <a:schemeClr val="tx1"/>
+                </a:solidFill>
+                <a:effectLst/>
+                <a:latin typeface="+mn-lt"/>
+                <a:ea typeface="+mn-ea"/>
+                <a:cs typeface="+mn-cs"/>
+              </a:rPr>
               <a:t>correlation with the regressors through their country means</a:t>
             </a:r>
-            <a:endParaRPr lang="nl-NL" sz="1400" b="1" dirty="0"/>
+            <a:endParaRPr lang="nl-NL" sz="1300" b="1" dirty="0"/>
           </a:p>
         </p:txBody>
       </p:sp>
@@ -5580,8 +5634,8 @@
           </a:p>
         </p:txBody>
       </p:sp>
-      <mc:AlternateContent xmlns:mc="http://schemas.openxmlformats.org/markup-compatibility/2006">
-        <mc:Choice xmlns:a14="http://schemas.microsoft.com/office/drawing/2010/main" Requires="a14">
+      <mc:AlternateContent xmlns:mc="http://schemas.openxmlformats.org/markup-compatibility/2006" xmlns:a14="http://schemas.microsoft.com/office/drawing/2010/main">
+        <mc:Choice Requires="a14">
           <p:sp>
             <p:nvSpPr>
               <p:cNvPr id="3" name="Tijdelijke aanduiding voor notities 2">
@@ -6032,6 +6086,7 @@
                             <a:solidFill>
                               <a:schemeClr val="tx1"/>
                             </a:solidFill>
+                            <a:latin typeface="Cambria Math" panose="02040503050406030204" pitchFamily="18" charset="0"/>
                             <a:ea typeface="+mn-ea"/>
                             <a:cs typeface="+mn-cs"/>
                           </a:rPr>
@@ -6043,6 +6098,7 @@
                             <a:solidFill>
                               <a:schemeClr val="tx1"/>
                             </a:solidFill>
+                            <a:latin typeface="Cambria Math" panose="02040503050406030204" pitchFamily="18" charset="0"/>
                             <a:ea typeface="+mn-ea"/>
                             <a:cs typeface="+mn-cs"/>
                           </a:rPr>
@@ -6055,6 +6111,7 @@
                             <a:solidFill>
                               <a:schemeClr val="tx1"/>
                             </a:solidFill>
+                            <a:latin typeface="Cambria Math" panose="02040503050406030204" pitchFamily="18" charset="0"/>
                             <a:ea typeface="+mn-ea"/>
                             <a:cs typeface="+mn-cs"/>
                           </a:rPr>
@@ -6084,6 +6141,7 @@
                             <a:solidFill>
                               <a:schemeClr val="tx1"/>
                             </a:solidFill>
+                            <a:latin typeface="Cambria Math" panose="02040503050406030204" pitchFamily="18" charset="0"/>
                             <a:ea typeface="+mn-ea"/>
                             <a:cs typeface="+mn-cs"/>
                           </a:rPr>
@@ -6095,6 +6153,7 @@
                             <a:solidFill>
                               <a:schemeClr val="tx1"/>
                             </a:solidFill>
+                            <a:latin typeface="Cambria Math" panose="02040503050406030204" pitchFamily="18" charset="0"/>
                             <a:ea typeface="+mn-ea"/>
                             <a:cs typeface="+mn-cs"/>
                           </a:rPr>
@@ -6107,6 +6166,7 @@
                             <a:solidFill>
                               <a:schemeClr val="tx1"/>
                             </a:solidFill>
+                            <a:latin typeface="Cambria Math" panose="02040503050406030204" pitchFamily="18" charset="0"/>
                             <a:ea typeface="+mn-ea"/>
                             <a:cs typeface="+mn-cs"/>
                           </a:rPr>
@@ -6441,6 +6501,7 @@
                             <a:solidFill>
                               <a:schemeClr val="tx1"/>
                             </a:solidFill>
+                            <a:latin typeface="Cambria Math" panose="02040503050406030204" pitchFamily="18" charset="0"/>
                             <a:ea typeface="+mn-ea"/>
                             <a:cs typeface="+mn-cs"/>
                           </a:rPr>
@@ -6452,6 +6513,7 @@
                             <a:solidFill>
                               <a:schemeClr val="tx1"/>
                             </a:solidFill>
+                            <a:latin typeface="Cambria Math" panose="02040503050406030204" pitchFamily="18" charset="0"/>
                             <a:ea typeface="+mn-ea"/>
                             <a:cs typeface="+mn-cs"/>
                           </a:rPr>
@@ -6464,6 +6526,7 @@
                             <a:solidFill>
                               <a:schemeClr val="tx1"/>
                             </a:solidFill>
+                            <a:latin typeface="Cambria Math" panose="02040503050406030204" pitchFamily="18" charset="0"/>
                             <a:ea typeface="+mn-ea"/>
                             <a:cs typeface="+mn-cs"/>
                           </a:rPr>
@@ -6779,7 +6842,7 @@
             </p:txBody>
           </p:sp>
         </mc:Choice>
-        <mc:Fallback>
+        <mc:Fallback xmlns="">
           <p:sp>
             <p:nvSpPr>
               <p:cNvPr id="3" name="Tijdelijke aanduiding voor notities 2">
@@ -10816,17 +10879,38 @@
                     <a:latin typeface="Verdana" panose="020B0604030504040204" pitchFamily="34" charset="0"/>
                     <a:ea typeface="Verdana" panose="020B0604030504040204" pitchFamily="34" charset="0"/>
                   </a:rPr>
-                  <a:t>1. Average relationship (</a:t>
+                  <a:t>1. Overall association (</a:t>
                 </a:r>
                 <a14:m>
                   <m:oMath xmlns:m="http://schemas.openxmlformats.org/officeDocument/2006/math">
-                    <m:r>
-                      <a:rPr lang="en-GB" sz="2400" i="1" noProof="1" smtClean="0">
-                        <a:latin typeface="Cambria Math" panose="02040503050406030204" pitchFamily="18" charset="0"/>
-                        <a:ea typeface="Cambria Math" panose="02040503050406030204" pitchFamily="18" charset="0"/>
-                      </a:rPr>
-                      <m:t>𝛽</m:t>
-                    </m:r>
+                    <m:sSub>
+                      <m:sSubPr>
+                        <m:ctrlPr>
+                          <a:rPr lang="en-GB" sz="2400" i="1" noProof="1">
+                            <a:latin typeface="Cambria Math" panose="02040503050406030204" pitchFamily="18" charset="0"/>
+                            <a:ea typeface="Cambria Math" panose="02040503050406030204" pitchFamily="18" charset="0"/>
+                          </a:rPr>
+                        </m:ctrlPr>
+                      </m:sSubPr>
+                      <m:e>
+                        <m:r>
+                          <a:rPr lang="en-GB" sz="2400" i="1" noProof="1">
+                            <a:latin typeface="Cambria Math" panose="02040503050406030204" pitchFamily="18" charset="0"/>
+                            <a:ea typeface="Cambria Math" panose="02040503050406030204" pitchFamily="18" charset="0"/>
+                          </a:rPr>
+                          <m:t>𝛽</m:t>
+                        </m:r>
+                      </m:e>
+                      <m:sub>
+                        <m:r>
+                          <a:rPr lang="en-GB" sz="2400" i="1" noProof="1">
+                            <a:latin typeface="Cambria Math" panose="02040503050406030204" pitchFamily="18" charset="0"/>
+                            <a:ea typeface="Verdana" panose="020B0604030504040204" pitchFamily="34" charset="0"/>
+                          </a:rPr>
+                          <m:t>𝑤</m:t>
+                        </m:r>
+                      </m:sub>
+                    </m:sSub>
                   </m:oMath>
                 </a14:m>
                 <a:r>
@@ -11626,17 +11710,38 @@
                     <a:latin typeface="Verdana" panose="020B0604030504040204" pitchFamily="34" charset="0"/>
                     <a:ea typeface="Verdana" panose="020B0604030504040204" pitchFamily="34" charset="0"/>
                   </a:rPr>
-                  <a:t>2. Additional effect (</a:t>
+                  <a:t>2. Additional association (</a:t>
                 </a:r>
                 <a14:m>
                   <m:oMath xmlns:m="http://schemas.openxmlformats.org/officeDocument/2006/math">
-                    <m:r>
-                      <a:rPr lang="en-GB" sz="2400" i="1" noProof="1" smtClean="0">
-                        <a:latin typeface="Cambria Math" panose="02040503050406030204" pitchFamily="18" charset="0"/>
-                        <a:ea typeface="Cambria Math" panose="02040503050406030204" pitchFamily="18" charset="0"/>
-                      </a:rPr>
-                      <m:t>𝛾</m:t>
-                    </m:r>
+                    <m:sSub>
+                      <m:sSubPr>
+                        <m:ctrlPr>
+                          <a:rPr lang="en-GB" sz="2400" i="1" noProof="1">
+                            <a:latin typeface="Cambria Math" panose="02040503050406030204" pitchFamily="18" charset="0"/>
+                            <a:ea typeface="Cambria Math" panose="02040503050406030204" pitchFamily="18" charset="0"/>
+                          </a:rPr>
+                        </m:ctrlPr>
+                      </m:sSubPr>
+                      <m:e>
+                        <m:r>
+                          <a:rPr lang="en-GB" sz="2400" i="1" noProof="1">
+                            <a:latin typeface="Cambria Math" panose="02040503050406030204" pitchFamily="18" charset="0"/>
+                            <a:ea typeface="Cambria Math" panose="02040503050406030204" pitchFamily="18" charset="0"/>
+                          </a:rPr>
+                          <m:t>𝛾</m:t>
+                        </m:r>
+                      </m:e>
+                      <m:sub>
+                        <m:r>
+                          <a:rPr lang="en-GB" sz="2400" i="1" noProof="1">
+                            <a:latin typeface="Cambria Math" panose="02040503050406030204" pitchFamily="18" charset="0"/>
+                            <a:ea typeface="Verdana" panose="020B0604030504040204" pitchFamily="34" charset="0"/>
+                          </a:rPr>
+                          <m:t>𝑤</m:t>
+                        </m:r>
+                      </m:sub>
+                    </m:sSub>
                   </m:oMath>
                 </a14:m>
                 <a:r>
@@ -11644,7 +11749,7 @@
                     <a:latin typeface="Verdana" panose="020B0604030504040204" pitchFamily="34" charset="0"/>
                     <a:ea typeface="Verdana" panose="020B0604030504040204" pitchFamily="34" charset="0"/>
                   </a:rPr>
-                  <a:t>) of ICT/AI in shock years</a:t>
+                  <a:t>) with ICT/AI in shock years</a:t>
                 </a:r>
               </a:p>
               <a:p>
@@ -12078,17 +12183,38 @@
                     <a:latin typeface="Verdana" panose="020B0604030504040204" pitchFamily="34" charset="0"/>
                     <a:ea typeface="Verdana" panose="020B0604030504040204" pitchFamily="34" charset="0"/>
                   </a:rPr>
-                  <a:t>3. Additional effect (</a:t>
+                  <a:t>3. Additional association (</a:t>
                 </a:r>
                 <a14:m>
                   <m:oMath xmlns:m="http://schemas.openxmlformats.org/officeDocument/2006/math">
-                    <m:r>
-                      <a:rPr lang="en-GB" sz="2400" noProof="1" smtClean="0">
-                        <a:latin typeface="Cambria Math" panose="02040503050406030204" pitchFamily="18" charset="0"/>
-                        <a:ea typeface="Verdana" panose="020B0604030504040204" pitchFamily="34" charset="0"/>
-                      </a:rPr>
-                      <m:t>𝛾</m:t>
-                    </m:r>
+                    <m:sSub>
+                      <m:sSubPr>
+                        <m:ctrlPr>
+                          <a:rPr lang="en-GB" sz="2400" i="1" noProof="1">
+                            <a:latin typeface="Cambria Math" panose="02040503050406030204" pitchFamily="18" charset="0"/>
+                            <a:ea typeface="Cambria Math" panose="02040503050406030204" pitchFamily="18" charset="0"/>
+                          </a:rPr>
+                        </m:ctrlPr>
+                      </m:sSubPr>
+                      <m:e>
+                        <m:r>
+                          <a:rPr lang="en-GB" sz="2400" i="1" noProof="1">
+                            <a:latin typeface="Cambria Math" panose="02040503050406030204" pitchFamily="18" charset="0"/>
+                            <a:ea typeface="Cambria Math" panose="02040503050406030204" pitchFamily="18" charset="0"/>
+                          </a:rPr>
+                          <m:t>𝛾</m:t>
+                        </m:r>
+                      </m:e>
+                      <m:sub>
+                        <m:r>
+                          <a:rPr lang="en-GB" sz="2400" i="1" noProof="1">
+                            <a:latin typeface="Cambria Math" panose="02040503050406030204" pitchFamily="18" charset="0"/>
+                            <a:ea typeface="Verdana" panose="020B0604030504040204" pitchFamily="34" charset="0"/>
+                          </a:rPr>
+                          <m:t>𝑤</m:t>
+                        </m:r>
+                      </m:sub>
+                    </m:sSub>
                   </m:oMath>
                 </a14:m>
                 <a:r>
